--- a/proposal/ふたりの計画のご提案.pptx
+++ b/proposal/ふたりの計画のご提案.pptx
@@ -526,7 +526,7 @@
           <a:p>
             <a:r>
               <a:rPr lang="ja-JP" altLang="en-US" sz="1200"/>
-              <a:t>指差すのは2027年後半の一か所だけ。「ここで分かれる、それだけ」。</a:t>
+              <a:t>指差すのは2028年1〜3月の一か所だけ。「入籍と入居、同じ月」。</a:t>
             </a:r>
           </a:p>
         </p:txBody>
@@ -585,7 +585,7 @@
           <a:p>
             <a:r>
               <a:rPr lang="ja-JP" altLang="en-US" sz="1200"/>
-              <a:t>今の家が安いのは資産。「ひとりで動く」は本当に必要なときだけ。</a:t>
+              <a:t>今の家が安いのは資産。物件探しまで動かない。</a:t>
             </a:r>
           </a:p>
         </p:txBody>
@@ -762,7 +762,7 @@
           <a:p>
             <a:r>
               <a:rPr lang="ja-JP" altLang="en-US" sz="1200"/>
-              <a:t>黄色の行が、彼への唯一の宿題。</a:t>
+              <a:t>黄色の行が、彼への一番かんたんな宿題。</a:t>
             </a:r>
           </a:p>
         </p:txBody>
@@ -1150,7 +1150,121 @@
         <p:spPr>
           <a:xfrm>
             <a:off x="841248" y="137160"/>
-            <a:ext cx="804672" cy="329184"/>
+            <a:ext cx="950976" cy="384048"/>
+          </a:xfrm>
+          <a:prstGeom prst="roundRect">
+            <a:avLst>
+              <a:gd name="adj" fmla="val 33333"/>
+            </a:avLst>
+          </a:prstGeom>
+          <a:solidFill>
+            <a:srgbClr val="FF6B6B"/>
+          </a:solidFill>
+          <a:ln>
+            <a:noFill/>
+          </a:ln>
+        </p:spPr>
+        <p:txBody>
+          <a:bodyPr wrap="square" lIns="0" tIns="0" rIns="0" bIns="0" anchor="ctr" rtlCol="0"/>
+          <a:lstStyle/>
+          <a:p>
+            <a:pPr algn="ctr">
+              <a:lnSpc>
+                <a:spcPct val="145000"/>
+              </a:lnSpc>
+            </a:pPr>
+            <a:r>
+              <a:rPr lang="ja-JP" altLang="en-US" sz="1300" b="1">
+                <a:solidFill>
+                  <a:srgbClr val="FFFFFF"/>
+                </a:solidFill>
+                <a:latin typeface="Yu Gothic"/>
+                <a:ea typeface="Yu Gothic"/>
+                <a:cs typeface="Yu Gothic"/>
+              </a:rPr>
+              <a:t>約束</a:t>
+            </a:r>
+          </a:p>
+        </p:txBody>
+      </p:sp>
+      <p:sp>
+        <p:nvSpPr>
+          <p:cNvPr id="3" name="TextBox 3"/>
+          <p:cNvSpPr txBox="1"/>
+          <p:nvPr/>
+        </p:nvSpPr>
+        <p:spPr>
+          <a:xfrm>
+            <a:off x="841248" y="640080"/>
+            <a:ext cx="10515600" cy="1005840"/>
+          </a:xfrm>
+          <a:prstGeom prst="rect">
+            <a:avLst/>
+          </a:prstGeom>
+          <a:noFill/>
+        </p:spPr>
+        <p:txBody>
+          <a:bodyPr wrap="square" lIns="0" tIns="0" rIns="0" bIns="0" anchor="t" rtlCol="0"/>
+          <a:lstStyle/>
+          <a:p>
+            <a:pPr algn="l">
+              <a:lnSpc>
+                <a:spcPct val="150000"/>
+              </a:lnSpc>
+            </a:pPr>
+            <a:r>
+              <a:rPr lang="ja-JP" altLang="en-US" sz="2700" b="1">
+                <a:solidFill>
+                  <a:srgbClr val="2B2D42"/>
+                </a:solidFill>
+                <a:latin typeface="Yu Gothic"/>
+                <a:ea typeface="Yu Gothic"/>
+                <a:cs typeface="Yu Gothic"/>
+              </a:rPr>
+              <a:t>私の側から先に。変えないことと、直すことを分けて。</a:t>
+            </a:r>
+          </a:p>
+        </p:txBody>
+      </p:sp>
+      <p:sp>
+        <p:nvSpPr>
+          <p:cNvPr id="4" name="Shape 4"/>
+          <p:cNvSpPr/>
+          <p:nvPr/>
+        </p:nvSpPr>
+        <p:spPr>
+          <a:xfrm>
+            <a:off x="841248" y="1924812"/>
+            <a:ext cx="2436876" cy="3931920"/>
+          </a:xfrm>
+          <a:prstGeom prst="roundRect">
+            <a:avLst>
+              <a:gd name="adj" fmla="val 5253"/>
+            </a:avLst>
+          </a:prstGeom>
+          <a:solidFill>
+            <a:srgbClr val="FFE3E0"/>
+          </a:solidFill>
+          <a:ln>
+            <a:noFill/>
+          </a:ln>
+        </p:spPr>
+        <p:txBody>
+          <a:bodyPr wrap="square" lIns="0" tIns="0" rIns="0" bIns="0" anchor="ctr" rtlCol="0"/>
+          <a:lstStyle/>
+          <a:p/>
+        </p:txBody>
+      </p:sp>
+      <p:sp>
+        <p:nvSpPr>
+          <p:cNvPr id="5" name="Shape 5"/>
+          <p:cNvSpPr/>
+          <p:nvPr/>
+        </p:nvSpPr>
+        <p:spPr>
+          <a:xfrm>
+            <a:off x="1133856" y="2290572"/>
+            <a:ext cx="1307592" cy="329184"/>
           </a:xfrm>
           <a:prstGeom prst="roundRect">
             <a:avLst>
@@ -1174,7 +1288,7 @@
               </a:lnSpc>
             </a:pPr>
             <a:r>
-              <a:rPr lang="ja-JP" altLang="en-US" sz="1100" b="1">
+              <a:rPr lang="ja-JP" altLang="en-US" sz="1200" b="1">
                 <a:solidFill>
                   <a:srgbClr val="FFFFFF"/>
                 </a:solidFill>
@@ -1182,21 +1296,21 @@
                 <a:ea typeface="Yu Gothic"/>
                 <a:cs typeface="Yu Gothic"/>
               </a:rPr>
-              <a:t>約束</a:t>
-            </a:r>
-          </a:p>
-        </p:txBody>
-      </p:sp>
-      <p:sp>
-        <p:nvSpPr>
-          <p:cNvPr id="3" name="TextBox 3"/>
-          <p:cNvSpPr txBox="1"/>
-          <p:nvPr/>
-        </p:nvSpPr>
-        <p:spPr>
-          <a:xfrm>
-            <a:off x="841248" y="612648"/>
-            <a:ext cx="10515600" cy="1005840"/>
+              <a:t>💼 仕事</a:t>
+            </a:r>
+          </a:p>
+        </p:txBody>
+      </p:sp>
+      <p:sp>
+        <p:nvSpPr>
+          <p:cNvPr id="6" name="TextBox 6"/>
+          <p:cNvSpPr txBox="1"/>
+          <p:nvPr/>
+        </p:nvSpPr>
+        <p:spPr>
+          <a:xfrm>
+            <a:off x="1133856" y="2839212"/>
+            <a:ext cx="1851660" cy="1097280"/>
           </a:xfrm>
           <a:prstGeom prst="rect">
             <a:avLst/>
@@ -1209,7 +1323,7 @@
           <a:p>
             <a:pPr algn="l">
               <a:lnSpc>
-                <a:spcPct val="160000"/>
+                <a:spcPct val="135000"/>
               </a:lnSpc>
             </a:pPr>
             <a:r>
@@ -1221,20 +1335,77 @@
                 <a:ea typeface="Yu Gothic"/>
                 <a:cs typeface="Yu Gothic"/>
               </a:rPr>
-              <a:t>私の側から先に。変えないことと、直すことを分けて。</a:t>
-            </a:r>
-          </a:p>
-        </p:txBody>
-      </p:sp>
-      <p:sp>
-        <p:nvSpPr>
-          <p:cNvPr id="4" name="Shape 4"/>
-          <p:cNvSpPr/>
-          <p:nvPr/>
-        </p:nvSpPr>
-        <p:spPr>
-          <a:xfrm>
-            <a:off x="841248" y="1924812"/>
+              <a:t>熱量は</a:t>
+            </a:r>
+          </a:p>
+          <a:p>
+            <a:pPr algn="l">
+              <a:lnSpc>
+                <a:spcPct val="135000"/>
+              </a:lnSpc>
+            </a:pPr>
+            <a:r>
+              <a:rPr lang="ja-JP" altLang="en-US" sz="2200" b="1">
+                <a:solidFill>
+                  <a:srgbClr val="2B2D42"/>
+                </a:solidFill>
+                <a:latin typeface="Yu Gothic"/>
+                <a:ea typeface="Yu Gothic"/>
+                <a:cs typeface="Yu Gothic"/>
+              </a:rPr>
+              <a:t>落とさない</a:t>
+            </a:r>
+          </a:p>
+        </p:txBody>
+      </p:sp>
+      <p:sp>
+        <p:nvSpPr>
+          <p:cNvPr id="7" name="TextBox 7"/>
+          <p:cNvSpPr txBox="1"/>
+          <p:nvPr/>
+        </p:nvSpPr>
+        <p:spPr>
+          <a:xfrm>
+            <a:off x="1133856" y="3982212"/>
+            <a:ext cx="1851660" cy="1645920"/>
+          </a:xfrm>
+          <a:prstGeom prst="rect">
+            <a:avLst/>
+          </a:prstGeom>
+          <a:noFill/>
+        </p:spPr>
+        <p:txBody>
+          <a:bodyPr wrap="square" lIns="0" tIns="0" rIns="0" bIns="0" anchor="t" rtlCol="0"/>
+          <a:lstStyle/>
+          <a:p>
+            <a:pPr algn="l">
+              <a:lnSpc>
+                <a:spcPct val="170000"/>
+              </a:lnSpc>
+            </a:pPr>
+            <a:r>
+              <a:rPr lang="ja-JP" altLang="en-US" sz="1350" b="0">
+                <a:solidFill>
+                  <a:srgbClr val="2B2D42"/>
+                </a:solidFill>
+                <a:latin typeface="Yu Gothic"/>
+                <a:ea typeface="Yu Gothic"/>
+                <a:cs typeface="Yu Gothic"/>
+              </a:rPr>
+              <a:t>30歳まではお互い仕事優先。結婚が仕事の邪魔をしない設計にする。</a:t>
+            </a:r>
+          </a:p>
+        </p:txBody>
+      </p:sp>
+      <p:sp>
+        <p:nvSpPr>
+          <p:cNvPr id="8" name="Shape 8"/>
+          <p:cNvSpPr/>
+          <p:nvPr/>
+        </p:nvSpPr>
+        <p:spPr>
+          <a:xfrm>
+            <a:off x="3534156" y="1924812"/>
             <a:ext cx="2436876" cy="3931920"/>
           </a:xfrm>
           <a:prstGeom prst="roundRect">
@@ -1243,7 +1414,7 @@
             </a:avLst>
           </a:prstGeom>
           <a:solidFill>
-            <a:srgbClr val="FFE3E0"/>
+            <a:srgbClr val="FFF1C9"/>
           </a:solidFill>
           <a:ln>
             <a:noFill/>
@@ -1257,22 +1428,22 @@
       </p:sp>
       <p:sp>
         <p:nvSpPr>
-          <p:cNvPr id="5" name="Shape 5"/>
-          <p:cNvSpPr/>
-          <p:nvPr/>
-        </p:nvSpPr>
-        <p:spPr>
-          <a:xfrm>
-            <a:off x="1133856" y="2290572"/>
-            <a:ext cx="1188720" cy="292608"/>
+          <p:cNvPr id="9" name="Shape 9"/>
+          <p:cNvSpPr/>
+          <p:nvPr/>
+        </p:nvSpPr>
+        <p:spPr>
+          <a:xfrm>
+            <a:off x="3826764" y="2290572"/>
+            <a:ext cx="1307592" cy="329184"/>
           </a:xfrm>
           <a:prstGeom prst="roundRect">
             <a:avLst>
-              <a:gd name="adj" fmla="val 43750"/>
+              <a:gd name="adj" fmla="val 38888"/>
             </a:avLst>
           </a:prstGeom>
           <a:solidFill>
-            <a:srgbClr val="FF6B6B"/>
+            <a:srgbClr val="FFB703"/>
           </a:solidFill>
           <a:ln>
             <a:noFill/>
@@ -1288,7 +1459,7 @@
               </a:lnSpc>
             </a:pPr>
             <a:r>
-              <a:rPr lang="ja-JP" altLang="en-US" sz="1050" b="1">
+              <a:rPr lang="ja-JP" altLang="en-US" sz="1200" b="1">
                 <a:solidFill>
                   <a:srgbClr val="FFFFFF"/>
                 </a:solidFill>
@@ -1296,21 +1467,21 @@
                 <a:ea typeface="Yu Gothic"/>
                 <a:cs typeface="Yu Gothic"/>
               </a:rPr>
-              <a:t>💼 仕事</a:t>
-            </a:r>
-          </a:p>
-        </p:txBody>
-      </p:sp>
-      <p:sp>
-        <p:nvSpPr>
-          <p:cNvPr id="6" name="TextBox 6"/>
-          <p:cNvSpPr txBox="1"/>
-          <p:nvPr/>
-        </p:nvSpPr>
-        <p:spPr>
-          <a:xfrm>
-            <a:off x="1133856" y="2793492"/>
-            <a:ext cx="1851660" cy="1005840"/>
+              <a:t>🕊 自由</a:t>
+            </a:r>
+          </a:p>
+        </p:txBody>
+      </p:sp>
+      <p:sp>
+        <p:nvSpPr>
+          <p:cNvPr id="10" name="TextBox 10"/>
+          <p:cNvSpPr txBox="1"/>
+          <p:nvPr/>
+        </p:nvSpPr>
+        <p:spPr>
+          <a:xfrm>
+            <a:off x="3826764" y="2839212"/>
+            <a:ext cx="1851660" cy="1097280"/>
           </a:xfrm>
           <a:prstGeom prst="rect">
             <a:avLst/>
@@ -1323,11 +1494,11 @@
           <a:p>
             <a:pPr algn="l">
               <a:lnSpc>
-                <a:spcPct val="140000"/>
-              </a:lnSpc>
-            </a:pPr>
-            <a:r>
-              <a:rPr lang="ja-JP" altLang="en-US" sz="1900" b="1">
+                <a:spcPct val="135000"/>
+              </a:lnSpc>
+            </a:pPr>
+            <a:r>
+              <a:rPr lang="ja-JP" altLang="en-US" sz="2200" b="1">
                 <a:solidFill>
                   <a:srgbClr val="2B2D42"/>
                 </a:solidFill>
@@ -1335,17 +1506,17 @@
                 <a:ea typeface="Yu Gothic"/>
                 <a:cs typeface="Yu Gothic"/>
               </a:rPr>
-              <a:t>熱量は</a:t>
-            </a:r>
-          </a:p>
-          <a:p>
-            <a:pPr algn="l">
-              <a:lnSpc>
-                <a:spcPct val="140000"/>
-              </a:lnSpc>
-            </a:pPr>
-            <a:r>
-              <a:rPr lang="ja-JP" altLang="en-US" sz="1900" b="1">
+              <a:t>ひとりの時間は</a:t>
+            </a:r>
+          </a:p>
+          <a:p>
+            <a:pPr algn="l">
+              <a:lnSpc>
+                <a:spcPct val="135000"/>
+              </a:lnSpc>
+            </a:pPr>
+            <a:r>
+              <a:rPr lang="ja-JP" altLang="en-US" sz="2200" b="1">
                 <a:solidFill>
                   <a:srgbClr val="2B2D42"/>
                 </a:solidFill>
@@ -1353,21 +1524,21 @@
                 <a:ea typeface="Yu Gothic"/>
                 <a:cs typeface="Yu Gothic"/>
               </a:rPr>
-              <a:t>落とさない</a:t>
-            </a:r>
-          </a:p>
-        </p:txBody>
-      </p:sp>
-      <p:sp>
-        <p:nvSpPr>
-          <p:cNvPr id="7" name="TextBox 7"/>
-          <p:cNvSpPr txBox="1"/>
-          <p:nvPr/>
-        </p:nvSpPr>
-        <p:spPr>
-          <a:xfrm>
-            <a:off x="1133856" y="3845052"/>
-            <a:ext cx="1851660" cy="1691640"/>
+              <a:t>制度で守る</a:t>
+            </a:r>
+          </a:p>
+        </p:txBody>
+      </p:sp>
+      <p:sp>
+        <p:nvSpPr>
+          <p:cNvPr id="11" name="TextBox 11"/>
+          <p:cNvSpPr txBox="1"/>
+          <p:nvPr/>
+        </p:nvSpPr>
+        <p:spPr>
+          <a:xfrm>
+            <a:off x="3826764" y="3982212"/>
+            <a:ext cx="1851660" cy="1645920"/>
           </a:xfrm>
           <a:prstGeom prst="rect">
             <a:avLst/>
@@ -1380,11 +1551,11 @@
           <a:p>
             <a:pPr algn="l">
               <a:lnSpc>
-                <a:spcPct val="180000"/>
-              </a:lnSpc>
-            </a:pPr>
-            <a:r>
-              <a:rPr lang="ja-JP" altLang="en-US" sz="1250" b="0">
+                <a:spcPct val="170000"/>
+              </a:lnSpc>
+            </a:pPr>
+            <a:r>
+              <a:rPr lang="ja-JP" altLang="en-US" sz="1350" b="0">
                 <a:solidFill>
                   <a:srgbClr val="2B2D42"/>
                 </a:solidFill>
@@ -1392,20 +1563,20 @@
                 <a:ea typeface="Yu Gothic"/>
                 <a:cs typeface="Yu Gothic"/>
               </a:rPr>
-              <a:t>30歳まではお互い仕事優先。結婚が仕事の邪魔をしない設計にする。</a:t>
-            </a:r>
-          </a:p>
-        </p:txBody>
-      </p:sp>
-      <p:sp>
-        <p:nvSpPr>
-          <p:cNvPr id="8" name="Shape 8"/>
-          <p:cNvSpPr/>
-          <p:nvPr/>
-        </p:nvSpPr>
-        <p:spPr>
-          <a:xfrm>
-            <a:off x="3534156" y="1924812"/>
+              <a:t>二人の家に自室を持つ。週に一度は別行動でいい。</a:t>
+            </a:r>
+          </a:p>
+        </p:txBody>
+      </p:sp>
+      <p:sp>
+        <p:nvSpPr>
+          <p:cNvPr id="12" name="Shape 12"/>
+          <p:cNvSpPr/>
+          <p:nvPr/>
+        </p:nvSpPr>
+        <p:spPr>
+          <a:xfrm>
+            <a:off x="6227064" y="1924812"/>
             <a:ext cx="2436876" cy="3931920"/>
           </a:xfrm>
           <a:prstGeom prst="roundRect">
@@ -1414,7 +1585,7 @@
             </a:avLst>
           </a:prstGeom>
           <a:solidFill>
-            <a:srgbClr val="FFF1C9"/>
+            <a:srgbClr val="D9F5F1"/>
           </a:solidFill>
           <a:ln>
             <a:noFill/>
@@ -1428,22 +1599,22 @@
       </p:sp>
       <p:sp>
         <p:nvSpPr>
-          <p:cNvPr id="9" name="Shape 9"/>
-          <p:cNvSpPr/>
-          <p:nvPr/>
-        </p:nvSpPr>
-        <p:spPr>
-          <a:xfrm>
-            <a:off x="3826764" y="2290572"/>
-            <a:ext cx="1188720" cy="292608"/>
+          <p:cNvPr id="13" name="Shape 13"/>
+          <p:cNvSpPr/>
+          <p:nvPr/>
+        </p:nvSpPr>
+        <p:spPr>
+          <a:xfrm>
+            <a:off x="6519672" y="2290572"/>
+            <a:ext cx="1307592" cy="329184"/>
           </a:xfrm>
           <a:prstGeom prst="roundRect">
             <a:avLst>
-              <a:gd name="adj" fmla="val 43750"/>
+              <a:gd name="adj" fmla="val 38888"/>
             </a:avLst>
           </a:prstGeom>
           <a:solidFill>
-            <a:srgbClr val="FFB703"/>
+            <a:srgbClr val="2EC4B6"/>
           </a:solidFill>
           <a:ln>
             <a:noFill/>
@@ -1459,7 +1630,7 @@
               </a:lnSpc>
             </a:pPr>
             <a:r>
-              <a:rPr lang="ja-JP" altLang="en-US" sz="1050" b="1">
+              <a:rPr lang="ja-JP" altLang="en-US" sz="1200" b="1">
                 <a:solidFill>
                   <a:srgbClr val="FFFFFF"/>
                 </a:solidFill>
@@ -1467,21 +1638,21 @@
                 <a:ea typeface="Yu Gothic"/>
                 <a:cs typeface="Yu Gothic"/>
               </a:rPr>
-              <a:t>🕊 自由</a:t>
-            </a:r>
-          </a:p>
-        </p:txBody>
-      </p:sp>
-      <p:sp>
-        <p:nvSpPr>
-          <p:cNvPr id="10" name="TextBox 10"/>
-          <p:cNvSpPr txBox="1"/>
-          <p:nvPr/>
-        </p:nvSpPr>
-        <p:spPr>
-          <a:xfrm>
-            <a:off x="3826764" y="2793492"/>
-            <a:ext cx="1851660" cy="1005840"/>
+              <a:t>🧹 家事</a:t>
+            </a:r>
+          </a:p>
+        </p:txBody>
+      </p:sp>
+      <p:sp>
+        <p:nvSpPr>
+          <p:cNvPr id="14" name="TextBox 14"/>
+          <p:cNvSpPr txBox="1"/>
+          <p:nvPr/>
+        </p:nvSpPr>
+        <p:spPr>
+          <a:xfrm>
+            <a:off x="6519672" y="2839212"/>
+            <a:ext cx="1851660" cy="1097280"/>
           </a:xfrm>
           <a:prstGeom prst="rect">
             <a:avLst/>
@@ -1494,11 +1665,11 @@
           <a:p>
             <a:pPr algn="l">
               <a:lnSpc>
-                <a:spcPct val="140000"/>
-              </a:lnSpc>
-            </a:pPr>
-            <a:r>
-              <a:rPr lang="ja-JP" altLang="en-US" sz="1900" b="1">
+                <a:spcPct val="135000"/>
+              </a:lnSpc>
+            </a:pPr>
+            <a:r>
+              <a:rPr lang="ja-JP" altLang="en-US" sz="2200" b="1">
                 <a:solidFill>
                   <a:srgbClr val="2B2D42"/>
                 </a:solidFill>
@@ -1506,17 +1677,17 @@
                 <a:ea typeface="Yu Gothic"/>
                 <a:cs typeface="Yu Gothic"/>
               </a:rPr>
-              <a:t>ひとりの時間は</a:t>
-            </a:r>
-          </a:p>
-          <a:p>
-            <a:pPr algn="l">
-              <a:lnSpc>
-                <a:spcPct val="140000"/>
-              </a:lnSpc>
-            </a:pPr>
-            <a:r>
-              <a:rPr lang="ja-JP" altLang="en-US" sz="1900" b="1">
+              <a:t>掃除は</a:t>
+            </a:r>
+          </a:p>
+          <a:p>
+            <a:pPr algn="l">
+              <a:lnSpc>
+                <a:spcPct val="135000"/>
+              </a:lnSpc>
+            </a:pPr>
+            <a:r>
+              <a:rPr lang="ja-JP" altLang="en-US" sz="2200" b="1">
                 <a:solidFill>
                   <a:srgbClr val="2B2D42"/>
                 </a:solidFill>
@@ -1524,21 +1695,21 @@
                 <a:ea typeface="Yu Gothic"/>
                 <a:cs typeface="Yu Gothic"/>
               </a:rPr>
-              <a:t>制度で守る</a:t>
-            </a:r>
-          </a:p>
-        </p:txBody>
-      </p:sp>
-      <p:sp>
-        <p:nvSpPr>
-          <p:cNvPr id="11" name="TextBox 11"/>
-          <p:cNvSpPr txBox="1"/>
-          <p:nvPr/>
-        </p:nvSpPr>
-        <p:spPr>
-          <a:xfrm>
-            <a:off x="3826764" y="3845052"/>
-            <a:ext cx="1851660" cy="1691640"/>
+              <a:t>改善中</a:t>
+            </a:r>
+          </a:p>
+        </p:txBody>
+      </p:sp>
+      <p:sp>
+        <p:nvSpPr>
+          <p:cNvPr id="15" name="TextBox 15"/>
+          <p:cNvSpPr txBox="1"/>
+          <p:nvPr/>
+        </p:nvSpPr>
+        <p:spPr>
+          <a:xfrm>
+            <a:off x="6519672" y="3982212"/>
+            <a:ext cx="1851660" cy="1645920"/>
           </a:xfrm>
           <a:prstGeom prst="rect">
             <a:avLst/>
@@ -1551,11 +1722,11 @@
           <a:p>
             <a:pPr algn="l">
               <a:lnSpc>
-                <a:spcPct val="180000"/>
-              </a:lnSpc>
-            </a:pPr>
-            <a:r>
-              <a:rPr lang="ja-JP" altLang="en-US" sz="1250" b="0">
+                <a:spcPct val="170000"/>
+              </a:lnSpc>
+            </a:pPr>
+            <a:r>
+              <a:rPr lang="ja-JP" altLang="en-US" sz="1350" b="0">
                 <a:solidFill>
                   <a:srgbClr val="2B2D42"/>
                 </a:solidFill>
@@ -1563,20 +1734,20 @@
                 <a:ea typeface="Yu Gothic"/>
                 <a:cs typeface="Yu Gothic"/>
               </a:rPr>
-              <a:t>二人の家に自室を持つ。週に一度は別行動でいい。</a:t>
-            </a:r>
-          </a:p>
-        </p:txBody>
-      </p:sp>
-      <p:sp>
-        <p:nvSpPr>
-          <p:cNvPr id="12" name="Shape 12"/>
-          <p:cNvSpPr/>
-          <p:nvPr/>
-        </p:nvSpPr>
-        <p:spPr>
-          <a:xfrm>
-            <a:off x="6227064" y="1924812"/>
+              <a:t>得意なほうがやる。決まらないものは外注も選択肢に入れる。</a:t>
+            </a:r>
+          </a:p>
+        </p:txBody>
+      </p:sp>
+      <p:sp>
+        <p:nvSpPr>
+          <p:cNvPr id="16" name="Shape 16"/>
+          <p:cNvSpPr/>
+          <p:nvPr/>
+        </p:nvSpPr>
+        <p:spPr>
+          <a:xfrm>
+            <a:off x="8919972" y="1924812"/>
             <a:ext cx="2436876" cy="3931920"/>
           </a:xfrm>
           <a:prstGeom prst="roundRect">
@@ -1585,7 +1756,7 @@
             </a:avLst>
           </a:prstGeom>
           <a:solidFill>
-            <a:srgbClr val="D9F5F1"/>
+            <a:srgbClr val="DCE8FF"/>
           </a:solidFill>
           <a:ln>
             <a:noFill/>
@@ -1599,22 +1770,22 @@
       </p:sp>
       <p:sp>
         <p:nvSpPr>
-          <p:cNvPr id="13" name="Shape 13"/>
-          <p:cNvSpPr/>
-          <p:nvPr/>
-        </p:nvSpPr>
-        <p:spPr>
-          <a:xfrm>
-            <a:off x="6519672" y="2290572"/>
-            <a:ext cx="1188720" cy="292608"/>
+          <p:cNvPr id="17" name="Shape 17"/>
+          <p:cNvSpPr/>
+          <p:nvPr/>
+        </p:nvSpPr>
+        <p:spPr>
+          <a:xfrm>
+            <a:off x="9212580" y="2290572"/>
+            <a:ext cx="1508760" cy="329184"/>
           </a:xfrm>
           <a:prstGeom prst="roundRect">
             <a:avLst>
-              <a:gd name="adj" fmla="val 43750"/>
+              <a:gd name="adj" fmla="val 38888"/>
             </a:avLst>
           </a:prstGeom>
           <a:solidFill>
-            <a:srgbClr val="2EC4B6"/>
+            <a:srgbClr val="4D96FF"/>
           </a:solidFill>
           <a:ln>
             <a:noFill/>
@@ -1630,7 +1801,7 @@
               </a:lnSpc>
             </a:pPr>
             <a:r>
-              <a:rPr lang="ja-JP" altLang="en-US" sz="1050" b="1">
+              <a:rPr lang="ja-JP" altLang="en-US" sz="1200" b="1">
                 <a:solidFill>
                   <a:srgbClr val="FFFFFF"/>
                 </a:solidFill>
@@ -1638,21 +1809,21 @@
                 <a:ea typeface="Yu Gothic"/>
                 <a:cs typeface="Yu Gothic"/>
               </a:rPr>
-              <a:t>🧹 家事</a:t>
-            </a:r>
-          </a:p>
-        </p:txBody>
-      </p:sp>
-      <p:sp>
-        <p:nvSpPr>
-          <p:cNvPr id="14" name="TextBox 14"/>
-          <p:cNvSpPr txBox="1"/>
-          <p:nvPr/>
-        </p:nvSpPr>
-        <p:spPr>
-          <a:xfrm>
-            <a:off x="6519672" y="2793492"/>
-            <a:ext cx="1851660" cy="1005840"/>
+              <a:t>🤝 ケンカ</a:t>
+            </a:r>
+          </a:p>
+        </p:txBody>
+      </p:sp>
+      <p:sp>
+        <p:nvSpPr>
+          <p:cNvPr id="18" name="TextBox 18"/>
+          <p:cNvSpPr txBox="1"/>
+          <p:nvPr/>
+        </p:nvSpPr>
+        <p:spPr>
+          <a:xfrm>
+            <a:off x="9212580" y="2839212"/>
+            <a:ext cx="1851660" cy="1097280"/>
           </a:xfrm>
           <a:prstGeom prst="rect">
             <a:avLst/>
@@ -1665,11 +1836,11 @@
           <a:p>
             <a:pPr algn="l">
               <a:lnSpc>
-                <a:spcPct val="140000"/>
-              </a:lnSpc>
-            </a:pPr>
-            <a:r>
-              <a:rPr lang="ja-JP" altLang="en-US" sz="1900" b="1">
+                <a:spcPct val="135000"/>
+              </a:lnSpc>
+            </a:pPr>
+            <a:r>
+              <a:rPr lang="ja-JP" altLang="en-US" sz="2200" b="1">
                 <a:solidFill>
                   <a:srgbClr val="2B2D42"/>
                 </a:solidFill>
@@ -1677,17 +1848,17 @@
                 <a:ea typeface="Yu Gothic"/>
                 <a:cs typeface="Yu Gothic"/>
               </a:rPr>
-              <a:t>掃除は</a:t>
-            </a:r>
-          </a:p>
-          <a:p>
-            <a:pPr algn="l">
-              <a:lnSpc>
-                <a:spcPct val="140000"/>
-              </a:lnSpc>
-            </a:pPr>
-            <a:r>
-              <a:rPr lang="ja-JP" altLang="en-US" sz="1900" b="1">
+              <a:t>片方が謝って</a:t>
+            </a:r>
+          </a:p>
+          <a:p>
+            <a:pPr algn="l">
+              <a:lnSpc>
+                <a:spcPct val="135000"/>
+              </a:lnSpc>
+            </a:pPr>
+            <a:r>
+              <a:rPr lang="ja-JP" altLang="en-US" sz="2200" b="1">
                 <a:solidFill>
                   <a:srgbClr val="2B2D42"/>
                 </a:solidFill>
@@ -1695,21 +1866,21 @@
                 <a:ea typeface="Yu Gothic"/>
                 <a:cs typeface="Yu Gothic"/>
               </a:rPr>
-              <a:t>改善中</a:t>
-            </a:r>
-          </a:p>
-        </p:txBody>
-      </p:sp>
-      <p:sp>
-        <p:nvSpPr>
-          <p:cNvPr id="15" name="TextBox 15"/>
-          <p:cNvSpPr txBox="1"/>
-          <p:nvPr/>
-        </p:nvSpPr>
-        <p:spPr>
-          <a:xfrm>
-            <a:off x="6519672" y="3845052"/>
-            <a:ext cx="1851660" cy="1691640"/>
+              <a:t>終わる</a:t>
+            </a:r>
+          </a:p>
+        </p:txBody>
+      </p:sp>
+      <p:sp>
+        <p:nvSpPr>
+          <p:cNvPr id="19" name="TextBox 19"/>
+          <p:cNvSpPr txBox="1"/>
+          <p:nvPr/>
+        </p:nvSpPr>
+        <p:spPr>
+          <a:xfrm>
+            <a:off x="9212580" y="3982212"/>
+            <a:ext cx="1851660" cy="1645920"/>
           </a:xfrm>
           <a:prstGeom prst="rect">
             <a:avLst/>
@@ -1722,182 +1893,11 @@
           <a:p>
             <a:pPr algn="l">
               <a:lnSpc>
-                <a:spcPct val="180000"/>
-              </a:lnSpc>
-            </a:pPr>
-            <a:r>
-              <a:rPr lang="ja-JP" altLang="en-US" sz="1250" b="0">
-                <a:solidFill>
-                  <a:srgbClr val="2B2D42"/>
-                </a:solidFill>
-                <a:latin typeface="Yu Gothic"/>
-                <a:ea typeface="Yu Gothic"/>
-                <a:cs typeface="Yu Gothic"/>
-              </a:rPr>
-              <a:t>得意なほうがやる。決まらないものは外注も選択肢に入れる。</a:t>
-            </a:r>
-          </a:p>
-        </p:txBody>
-      </p:sp>
-      <p:sp>
-        <p:nvSpPr>
-          <p:cNvPr id="16" name="Shape 16"/>
-          <p:cNvSpPr/>
-          <p:nvPr/>
-        </p:nvSpPr>
-        <p:spPr>
-          <a:xfrm>
-            <a:off x="8919972" y="1924812"/>
-            <a:ext cx="2436876" cy="3931920"/>
-          </a:xfrm>
-          <a:prstGeom prst="roundRect">
-            <a:avLst>
-              <a:gd name="adj" fmla="val 5253"/>
-            </a:avLst>
-          </a:prstGeom>
-          <a:solidFill>
-            <a:srgbClr val="DCE8FF"/>
-          </a:solidFill>
-          <a:ln>
-            <a:noFill/>
-          </a:ln>
-        </p:spPr>
-        <p:txBody>
-          <a:bodyPr wrap="square" lIns="0" tIns="0" rIns="0" bIns="0" anchor="ctr" rtlCol="0"/>
-          <a:lstStyle/>
-          <a:p/>
-        </p:txBody>
-      </p:sp>
-      <p:sp>
-        <p:nvSpPr>
-          <p:cNvPr id="17" name="Shape 17"/>
-          <p:cNvSpPr/>
-          <p:nvPr/>
-        </p:nvSpPr>
-        <p:spPr>
-          <a:xfrm>
-            <a:off x="9212580" y="2290572"/>
-            <a:ext cx="1371600" cy="292608"/>
-          </a:xfrm>
-          <a:prstGeom prst="roundRect">
-            <a:avLst>
-              <a:gd name="adj" fmla="val 43750"/>
-            </a:avLst>
-          </a:prstGeom>
-          <a:solidFill>
-            <a:srgbClr val="4D96FF"/>
-          </a:solidFill>
-          <a:ln>
-            <a:noFill/>
-          </a:ln>
-        </p:spPr>
-        <p:txBody>
-          <a:bodyPr wrap="square" lIns="0" tIns="0" rIns="0" bIns="0" anchor="ctr" rtlCol="0"/>
-          <a:lstStyle/>
-          <a:p>
-            <a:pPr algn="ctr">
-              <a:lnSpc>
-                <a:spcPct val="145000"/>
-              </a:lnSpc>
-            </a:pPr>
-            <a:r>
-              <a:rPr lang="ja-JP" altLang="en-US" sz="1050" b="1">
-                <a:solidFill>
-                  <a:srgbClr val="FFFFFF"/>
-                </a:solidFill>
-                <a:latin typeface="Yu Gothic"/>
-                <a:ea typeface="Yu Gothic"/>
-                <a:cs typeface="Yu Gothic"/>
-              </a:rPr>
-              <a:t>🤝 ケンカ</a:t>
-            </a:r>
-          </a:p>
-        </p:txBody>
-      </p:sp>
-      <p:sp>
-        <p:nvSpPr>
-          <p:cNvPr id="18" name="TextBox 18"/>
-          <p:cNvSpPr txBox="1"/>
-          <p:nvPr/>
-        </p:nvSpPr>
-        <p:spPr>
-          <a:xfrm>
-            <a:off x="9212580" y="2793492"/>
-            <a:ext cx="1851660" cy="1005840"/>
-          </a:xfrm>
-          <a:prstGeom prst="rect">
-            <a:avLst/>
-          </a:prstGeom>
-          <a:noFill/>
-        </p:spPr>
-        <p:txBody>
-          <a:bodyPr wrap="square" lIns="0" tIns="0" rIns="0" bIns="0" anchor="t" rtlCol="0"/>
-          <a:lstStyle/>
-          <a:p>
-            <a:pPr algn="l">
-              <a:lnSpc>
-                <a:spcPct val="140000"/>
-              </a:lnSpc>
-            </a:pPr>
-            <a:r>
-              <a:rPr lang="ja-JP" altLang="en-US" sz="1900" b="1">
-                <a:solidFill>
-                  <a:srgbClr val="2B2D42"/>
-                </a:solidFill>
-                <a:latin typeface="Yu Gothic"/>
-                <a:ea typeface="Yu Gothic"/>
-                <a:cs typeface="Yu Gothic"/>
-              </a:rPr>
-              <a:t>片方が謝って</a:t>
-            </a:r>
-          </a:p>
-          <a:p>
-            <a:pPr algn="l">
-              <a:lnSpc>
-                <a:spcPct val="140000"/>
-              </a:lnSpc>
-            </a:pPr>
-            <a:r>
-              <a:rPr lang="ja-JP" altLang="en-US" sz="1900" b="1">
-                <a:solidFill>
-                  <a:srgbClr val="2B2D42"/>
-                </a:solidFill>
-                <a:latin typeface="Yu Gothic"/>
-                <a:ea typeface="Yu Gothic"/>
-                <a:cs typeface="Yu Gothic"/>
-              </a:rPr>
-              <a:t>終わる</a:t>
-            </a:r>
-          </a:p>
-        </p:txBody>
-      </p:sp>
-      <p:sp>
-        <p:nvSpPr>
-          <p:cNvPr id="19" name="TextBox 19"/>
-          <p:cNvSpPr txBox="1"/>
-          <p:nvPr/>
-        </p:nvSpPr>
-        <p:spPr>
-          <a:xfrm>
-            <a:off x="9212580" y="3845052"/>
-            <a:ext cx="1851660" cy="1691640"/>
-          </a:xfrm>
-          <a:prstGeom prst="rect">
-            <a:avLst/>
-          </a:prstGeom>
-          <a:noFill/>
-        </p:spPr>
-        <p:txBody>
-          <a:bodyPr wrap="square" lIns="0" tIns="0" rIns="0" bIns="0" anchor="t" rtlCol="0"/>
-          <a:lstStyle/>
-          <a:p>
-            <a:pPr algn="l">
-              <a:lnSpc>
-                <a:spcPct val="180000"/>
-              </a:lnSpc>
-            </a:pPr>
-            <a:r>
-              <a:rPr lang="ja-JP" altLang="en-US" sz="1250" b="0">
+                <a:spcPct val="170000"/>
+              </a:lnSpc>
+            </a:pPr>
+            <a:r>
+              <a:rPr lang="ja-JP" altLang="en-US" sz="1350" b="0">
                 <a:solidFill>
                   <a:srgbClr val="2B2D42"/>
                 </a:solidFill>
@@ -1936,7 +1936,7 @@
               </a:lnSpc>
             </a:pPr>
             <a:r>
-              <a:rPr lang="ja-JP" altLang="en-US" sz="900" b="0">
+              <a:rPr lang="ja-JP" altLang="en-US" sz="1000" b="0">
                 <a:solidFill>
                   <a:srgbClr val="B8B2A8"/>
                 </a:solidFill>
@@ -2202,11 +2202,11 @@
         <p:spPr>
           <a:xfrm>
             <a:off x="841248" y="137160"/>
-            <a:ext cx="1152144" cy="329184"/>
+            <a:ext cx="1353312" cy="384048"/>
           </a:xfrm>
           <a:prstGeom prst="roundRect">
             <a:avLst>
-              <a:gd name="adj" fmla="val 38888"/>
+              <a:gd name="adj" fmla="val 33333"/>
             </a:avLst>
           </a:prstGeom>
           <a:solidFill>
@@ -2226,7 +2226,7 @@
               </a:lnSpc>
             </a:pPr>
             <a:r>
-              <a:rPr lang="ja-JP" altLang="en-US" sz="1100" b="1">
+              <a:rPr lang="ja-JP" altLang="en-US" sz="1300" b="1">
                 <a:solidFill>
                   <a:srgbClr val="FFFFFF"/>
                 </a:solidFill>
@@ -2247,7 +2247,7 @@
         </p:nvSpPr>
         <p:spPr>
           <a:xfrm>
-            <a:off x="841248" y="612648"/>
+            <a:off x="841248" y="640080"/>
             <a:ext cx="10515600" cy="1005840"/>
           </a:xfrm>
           <a:prstGeom prst="rect">
@@ -2261,11 +2261,11 @@
           <a:p>
             <a:pPr algn="l">
               <a:lnSpc>
-                <a:spcPct val="160000"/>
-              </a:lnSpc>
-            </a:pPr>
-            <a:r>
-              <a:rPr lang="ja-JP" altLang="en-US" sz="2200" b="1">
+                <a:spcPct val="150000"/>
+              </a:lnSpc>
+            </a:pPr>
+            <a:r>
+              <a:rPr lang="ja-JP" altLang="en-US" sz="2700" b="1">
                 <a:solidFill>
                   <a:srgbClr val="2B2D42"/>
                 </a:solidFill>
@@ -2276,7 +2276,7 @@
               <a:t>これは</a:t>
             </a:r>
             <a:r>
-              <a:rPr lang="ja-JP" altLang="en-US" sz="2200" b="1">
+              <a:rPr lang="ja-JP" altLang="en-US" sz="2700" b="1">
                 <a:solidFill>
                   <a:srgbClr val="2B2D42"/>
                 </a:solidFill>
@@ -2290,7 +2290,7 @@
               <a:t>たたき台</a:t>
             </a:r>
             <a:r>
-              <a:rPr lang="ja-JP" altLang="en-US" sz="2200" b="1">
+              <a:rPr lang="ja-JP" altLang="en-US" sz="2700" b="1">
                 <a:solidFill>
                   <a:srgbClr val="2B2D42"/>
                 </a:solidFill>
@@ -2311,8 +2311,8 @@
         </p:nvSpPr>
         <p:spPr>
           <a:xfrm>
-            <a:off x="841248" y="2628900"/>
-            <a:ext cx="457200" cy="457200"/>
+            <a:off x="841248" y="2491740"/>
+            <a:ext cx="548640" cy="548640"/>
           </a:xfrm>
           <a:prstGeom prst="ellipse">
             <a:avLst/>
@@ -2334,7 +2334,7 @@
               </a:lnSpc>
             </a:pPr>
             <a:r>
-              <a:rPr lang="ja-JP" altLang="en-US" sz="1500" b="1">
+              <a:rPr lang="ja-JP" altLang="en-US" sz="1800" b="1">
                 <a:solidFill>
                   <a:srgbClr val="FFFFFF"/>
                 </a:solidFill>
@@ -2355,8 +2355,8 @@
         </p:nvSpPr>
         <p:spPr>
           <a:xfrm>
-            <a:off x="1572768" y="2610612"/>
-            <a:ext cx="9692640" cy="822960"/>
+            <a:off x="1664208" y="2473452"/>
+            <a:ext cx="9601200" cy="914400"/>
           </a:xfrm>
           <a:prstGeom prst="rect">
             <a:avLst/>
@@ -2369,11 +2369,11 @@
           <a:p>
             <a:pPr algn="l">
               <a:lnSpc>
-                <a:spcPct val="170000"/>
-              </a:lnSpc>
-            </a:pPr>
-            <a:r>
-              <a:rPr lang="ja-JP" altLang="en-US" sz="1800" b="0">
+                <a:spcPct val="160000"/>
+              </a:lnSpc>
+            </a:pPr>
+            <a:r>
+              <a:rPr lang="ja-JP" altLang="en-US" sz="2200" b="0">
                 <a:solidFill>
                   <a:srgbClr val="2B2D42"/>
                 </a:solidFill>
@@ -2384,7 +2384,7 @@
               <a:t>決まっていないことのほうが多いです。</a:t>
             </a:r>
             <a:r>
-              <a:rPr lang="ja-JP" altLang="en-US" sz="1800" b="1">
+              <a:rPr lang="ja-JP" altLang="en-US" sz="2200" b="1">
                 <a:solidFill>
                   <a:srgbClr val="2B2D42"/>
                 </a:solidFill>
@@ -2395,7 +2395,7 @@
               <a:t>決める期限</a:t>
             </a:r>
             <a:r>
-              <a:rPr lang="ja-JP" altLang="en-US" sz="1800" b="0">
+              <a:rPr lang="ja-JP" altLang="en-US" sz="2200" b="0">
                 <a:solidFill>
                   <a:srgbClr val="2B2D42"/>
                 </a:solidFill>
@@ -2417,7 +2417,7 @@
         <p:spPr>
           <a:xfrm>
             <a:off x="841248" y="3589020"/>
-            <a:ext cx="457200" cy="457200"/>
+            <a:ext cx="548640" cy="548640"/>
           </a:xfrm>
           <a:prstGeom prst="ellipse">
             <a:avLst/>
@@ -2439,7 +2439,7 @@
               </a:lnSpc>
             </a:pPr>
             <a:r>
-              <a:rPr lang="ja-JP" altLang="en-US" sz="1500" b="1">
+              <a:rPr lang="ja-JP" altLang="en-US" sz="1800" b="1">
                 <a:solidFill>
                   <a:srgbClr val="FFFFFF"/>
                 </a:solidFill>
@@ -2460,8 +2460,8 @@
         </p:nvSpPr>
         <p:spPr>
           <a:xfrm>
-            <a:off x="1572768" y="3570732"/>
-            <a:ext cx="9692640" cy="822960"/>
+            <a:off x="1664208" y="3570732"/>
+            <a:ext cx="9601200" cy="914400"/>
           </a:xfrm>
           <a:prstGeom prst="rect">
             <a:avLst/>
@@ -2474,11 +2474,11 @@
           <a:p>
             <a:pPr algn="l">
               <a:lnSpc>
-                <a:spcPct val="170000"/>
-              </a:lnSpc>
-            </a:pPr>
-            <a:r>
-              <a:rPr lang="ja-JP" altLang="en-US" sz="1800" b="0">
+                <a:spcPct val="160000"/>
+              </a:lnSpc>
+            </a:pPr>
+            <a:r>
+              <a:rPr lang="ja-JP" altLang="en-US" sz="2200" b="0">
                 <a:solidFill>
                   <a:srgbClr val="2B2D42"/>
                 </a:solidFill>
@@ -2489,7 +2489,7 @@
               <a:t>数字は</a:t>
             </a:r>
             <a:r>
-              <a:rPr lang="ja-JP" altLang="en-US" sz="1800" b="1">
+              <a:rPr lang="ja-JP" altLang="en-US" sz="2200" b="1">
                 <a:solidFill>
                   <a:srgbClr val="2B2D42"/>
                 </a:solidFill>
@@ -2500,7 +2500,7 @@
               <a:t>私の分だけ</a:t>
             </a:r>
             <a:r>
-              <a:rPr lang="ja-JP" altLang="en-US" sz="1800" b="0">
+              <a:rPr lang="ja-JP" altLang="en-US" sz="2200" b="0">
                 <a:solidFill>
                   <a:srgbClr val="2B2D42"/>
                 </a:solidFill>
@@ -2521,8 +2521,8 @@
         </p:nvSpPr>
         <p:spPr>
           <a:xfrm>
-            <a:off x="841248" y="4549140"/>
-            <a:ext cx="457200" cy="457200"/>
+            <a:off x="841248" y="4686300"/>
+            <a:ext cx="548640" cy="548640"/>
           </a:xfrm>
           <a:prstGeom prst="ellipse">
             <a:avLst/>
@@ -2544,7 +2544,7 @@
               </a:lnSpc>
             </a:pPr>
             <a:r>
-              <a:rPr lang="ja-JP" altLang="en-US" sz="1500" b="1">
+              <a:rPr lang="ja-JP" altLang="en-US" sz="1800" b="1">
                 <a:solidFill>
                   <a:srgbClr val="FFFFFF"/>
                 </a:solidFill>
@@ -2565,8 +2565,8 @@
         </p:nvSpPr>
         <p:spPr>
           <a:xfrm>
-            <a:off x="1572768" y="4530852"/>
-            <a:ext cx="9692640" cy="822960"/>
+            <a:off x="1664208" y="4668012"/>
+            <a:ext cx="9601200" cy="914400"/>
           </a:xfrm>
           <a:prstGeom prst="rect">
             <a:avLst/>
@@ -2579,11 +2579,11 @@
           <a:p>
             <a:pPr algn="l">
               <a:lnSpc>
-                <a:spcPct val="170000"/>
-              </a:lnSpc>
-            </a:pPr>
-            <a:r>
-              <a:rPr lang="ja-JP" altLang="en-US" sz="1800" b="0">
+                <a:spcPct val="160000"/>
+              </a:lnSpc>
+            </a:pPr>
+            <a:r>
+              <a:rPr lang="ja-JP" altLang="en-US" sz="2200" b="0">
                 <a:solidFill>
                   <a:srgbClr val="2B2D42"/>
                 </a:solidFill>
@@ -2594,7 +2594,7 @@
               <a:t>半年に一度、一緒に開いて直します。</a:t>
             </a:r>
             <a:r>
-              <a:rPr lang="ja-JP" altLang="en-US" sz="1800" b="1">
+              <a:rPr lang="ja-JP" altLang="en-US" sz="2200" b="1">
                 <a:solidFill>
                   <a:srgbClr val="2B2D42"/>
                 </a:solidFill>
@@ -2605,7 +2605,7 @@
               <a:t>次は2027年3月</a:t>
             </a:r>
             <a:r>
-              <a:rPr lang="ja-JP" altLang="en-US" sz="1800" b="0">
+              <a:rPr lang="ja-JP" altLang="en-US" sz="2200" b="0">
                 <a:solidFill>
                   <a:srgbClr val="2B2D42"/>
                 </a:solidFill>
@@ -2644,7 +2644,7 @@
               </a:lnSpc>
             </a:pPr>
             <a:r>
-              <a:rPr lang="ja-JP" altLang="en-US" sz="900" b="0">
+              <a:rPr lang="ja-JP" altLang="en-US" sz="1000" b="0">
                 <a:solidFill>
                   <a:srgbClr val="B8B2A8"/>
                 </a:solidFill>
@@ -2745,11 +2745,11 @@
         <p:spPr>
           <a:xfrm>
             <a:off x="841248" y="137160"/>
-            <a:ext cx="1499616" cy="329184"/>
+            <a:ext cx="1755648" cy="384048"/>
           </a:xfrm>
           <a:prstGeom prst="roundRect">
             <a:avLst>
-              <a:gd name="adj" fmla="val 38888"/>
+              <a:gd name="adj" fmla="val 33333"/>
             </a:avLst>
           </a:prstGeom>
           <a:solidFill>
@@ -2769,7 +2769,7 @@
               </a:lnSpc>
             </a:pPr>
             <a:r>
-              <a:rPr lang="ja-JP" altLang="en-US" sz="1100" b="1">
+              <a:rPr lang="ja-JP" altLang="en-US" sz="1300" b="1">
                 <a:solidFill>
                   <a:srgbClr val="FFFFFF"/>
                 </a:solidFill>
@@ -2790,7 +2790,7 @@
         </p:nvSpPr>
         <p:spPr>
           <a:xfrm>
-            <a:off x="841248" y="612648"/>
+            <a:off x="841248" y="640080"/>
             <a:ext cx="10515600" cy="1005840"/>
           </a:xfrm>
           <a:prstGeom prst="rect">
@@ -2804,11 +2804,11 @@
           <a:p>
             <a:pPr algn="l">
               <a:lnSpc>
-                <a:spcPct val="160000"/>
-              </a:lnSpc>
-            </a:pPr>
-            <a:r>
-              <a:rPr lang="ja-JP" altLang="en-US" sz="2200" b="1">
+                <a:spcPct val="150000"/>
+              </a:lnSpc>
+            </a:pPr>
+            <a:r>
+              <a:rPr lang="ja-JP" altLang="en-US" sz="2700" b="1">
                 <a:solidFill>
                   <a:srgbClr val="2B2D42"/>
                 </a:solidFill>
@@ -2846,7 +2846,7 @@
                 <a:spcPct val="145000"/>
               </a:lnSpc>
             </a:pPr>
-            <a:endParaRPr lang="ja-JP" sz="1100"/>
+            <a:endParaRPr lang="ja-JP" sz="1250"/>
           </a:p>
         </p:txBody>
       </p:sp>
@@ -2876,7 +2876,7 @@
               </a:lnSpc>
             </a:pPr>
             <a:r>
-              <a:rPr lang="ja-JP" altLang="en-US" sz="1100" b="1" spc="80">
+              <a:rPr lang="ja-JP" altLang="en-US" sz="1250" b="1" spc="80">
                 <a:solidFill>
                   <a:srgbClr val="FF6B6B"/>
                 </a:solidFill>
@@ -2915,7 +2915,7 @@
               </a:lnSpc>
             </a:pPr>
             <a:r>
-              <a:rPr lang="ja-JP" altLang="en-US" sz="1100" b="1" spc="80">
+              <a:rPr lang="ja-JP" altLang="en-US" sz="1250" b="1" spc="80">
                 <a:solidFill>
                   <a:srgbClr val="FF6B6B"/>
                 </a:solidFill>
@@ -2977,11 +2977,11 @@
           <a:p>
             <a:pPr algn="l">
               <a:lnSpc>
-                <a:spcPct val="150000"/>
-              </a:lnSpc>
-            </a:pPr>
-            <a:r>
-              <a:rPr lang="ja-JP" altLang="en-US" sz="1300" b="0">
+                <a:spcPct val="145000"/>
+              </a:lnSpc>
+            </a:pPr>
+            <a:r>
+              <a:rPr lang="ja-JP" altLang="en-US" sz="1500" b="0">
                 <a:solidFill>
                   <a:srgbClr val="2B2D42"/>
                 </a:solidFill>
@@ -3016,11 +3016,11 @@
           <a:p>
             <a:pPr algn="l">
               <a:lnSpc>
-                <a:spcPct val="150000"/>
-              </a:lnSpc>
-            </a:pPr>
-            <a:r>
-              <a:rPr lang="ja-JP" altLang="en-US" sz="1300" b="0">
+                <a:spcPct val="145000"/>
+              </a:lnSpc>
+            </a:pPr>
+            <a:r>
+              <a:rPr lang="ja-JP" altLang="en-US" sz="1500" b="0">
                 <a:solidFill>
                   <a:srgbClr val="2B2D42"/>
                 </a:solidFill>
@@ -3055,11 +3055,11 @@
           <a:p>
             <a:pPr algn="l">
               <a:lnSpc>
-                <a:spcPct val="150000"/>
-              </a:lnSpc>
-            </a:pPr>
-            <a:r>
-              <a:rPr lang="ja-JP" altLang="en-US" sz="1300" b="0">
+                <a:spcPct val="145000"/>
+              </a:lnSpc>
+            </a:pPr>
+            <a:r>
+              <a:rPr lang="ja-JP" altLang="en-US" sz="1500" b="0">
                 <a:solidFill>
                   <a:srgbClr val="2B2D42"/>
                 </a:solidFill>
@@ -3121,11 +3121,11 @@
           <a:p>
             <a:pPr algn="l">
               <a:lnSpc>
-                <a:spcPct val="150000"/>
-              </a:lnSpc>
-            </a:pPr>
-            <a:r>
-              <a:rPr lang="ja-JP" altLang="en-US" sz="1300" b="0">
+                <a:spcPct val="145000"/>
+              </a:lnSpc>
+            </a:pPr>
+            <a:r>
+              <a:rPr lang="ja-JP" altLang="en-US" sz="1500" b="0">
                 <a:solidFill>
                   <a:srgbClr val="2B2D42"/>
                 </a:solidFill>
@@ -3160,11 +3160,11 @@
           <a:p>
             <a:pPr algn="l">
               <a:lnSpc>
-                <a:spcPct val="150000"/>
-              </a:lnSpc>
-            </a:pPr>
-            <a:r>
-              <a:rPr lang="ja-JP" altLang="en-US" sz="1300" b="0">
+                <a:spcPct val="145000"/>
+              </a:lnSpc>
+            </a:pPr>
+            <a:r>
+              <a:rPr lang="ja-JP" altLang="en-US" sz="1500" b="0">
                 <a:solidFill>
                   <a:srgbClr val="2B2D42"/>
                 </a:solidFill>
@@ -3199,11 +3199,11 @@
           <a:p>
             <a:pPr algn="l">
               <a:lnSpc>
-                <a:spcPct val="150000"/>
-              </a:lnSpc>
-            </a:pPr>
-            <a:r>
-              <a:rPr lang="ja-JP" altLang="en-US" sz="1300" b="0">
+                <a:spcPct val="145000"/>
+              </a:lnSpc>
+            </a:pPr>
+            <a:r>
+              <a:rPr lang="ja-JP" altLang="en-US" sz="1500" b="0">
                 <a:solidFill>
                   <a:srgbClr val="2B2D42"/>
                 </a:solidFill>
@@ -3211,7 +3211,7 @@
                 <a:ea typeface="Yu Gothic"/>
                 <a:cs typeface="Yu Gothic"/>
               </a:rPr>
-              <a:t>教えてください</a:t>
+              <a:t>自営</a:t>
             </a:r>
           </a:p>
         </p:txBody>
@@ -3265,11 +3265,11 @@
           <a:p>
             <a:pPr algn="l">
               <a:lnSpc>
-                <a:spcPct val="150000"/>
-              </a:lnSpc>
-            </a:pPr>
-            <a:r>
-              <a:rPr lang="ja-JP" altLang="en-US" sz="1300" b="0">
+                <a:spcPct val="145000"/>
+              </a:lnSpc>
+            </a:pPr>
+            <a:r>
+              <a:rPr lang="ja-JP" altLang="en-US" sz="1500" b="0">
                 <a:solidFill>
                   <a:srgbClr val="2B2D42"/>
                 </a:solidFill>
@@ -3304,11 +3304,11 @@
           <a:p>
             <a:pPr algn="l">
               <a:lnSpc>
-                <a:spcPct val="150000"/>
-              </a:lnSpc>
-            </a:pPr>
-            <a:r>
-              <a:rPr lang="ja-JP" altLang="en-US" sz="1300" b="0">
+                <a:spcPct val="145000"/>
+              </a:lnSpc>
+            </a:pPr>
+            <a:r>
+              <a:rPr lang="ja-JP" altLang="en-US" sz="1500" b="0">
                 <a:solidFill>
                   <a:srgbClr val="2B2D42"/>
                 </a:solidFill>
@@ -3316,7 +3316,7 @@
                 <a:ea typeface="Yu Gothic"/>
                 <a:cs typeface="Yu Gothic"/>
               </a:rPr>
-              <a:t>今の家に、しばらく住み続ける</a:t>
+              <a:t>今の家で、貯める</a:t>
             </a:r>
           </a:p>
         </p:txBody>
@@ -3343,11 +3343,11 @@
           <a:p>
             <a:pPr algn="l">
               <a:lnSpc>
-                <a:spcPct val="150000"/>
-              </a:lnSpc>
-            </a:pPr>
-            <a:r>
-              <a:rPr lang="ja-JP" altLang="en-US" sz="1300" b="0">
+                <a:spcPct val="145000"/>
+              </a:lnSpc>
+            </a:pPr>
+            <a:r>
+              <a:rPr lang="ja-JP" altLang="en-US" sz="1500" b="0">
                 <a:solidFill>
                   <a:srgbClr val="2B2D42"/>
                 </a:solidFill>
@@ -3409,11 +3409,11 @@
           <a:p>
             <a:pPr algn="l">
               <a:lnSpc>
-                <a:spcPct val="150000"/>
-              </a:lnSpc>
-            </a:pPr>
-            <a:r>
-              <a:rPr lang="ja-JP" altLang="en-US" sz="1300" b="0">
+                <a:spcPct val="145000"/>
+              </a:lnSpc>
+            </a:pPr>
+            <a:r>
+              <a:rPr lang="ja-JP" altLang="en-US" sz="1500" b="0">
                 <a:solidFill>
                   <a:srgbClr val="2B2D42"/>
                 </a:solidFill>
@@ -3448,11 +3448,11 @@
           <a:p>
             <a:pPr algn="l">
               <a:lnSpc>
-                <a:spcPct val="150000"/>
-              </a:lnSpc>
-            </a:pPr>
-            <a:r>
-              <a:rPr lang="ja-JP" altLang="en-US" sz="1300" b="0">
+                <a:spcPct val="145000"/>
+              </a:lnSpc>
+            </a:pPr>
+            <a:r>
+              <a:rPr lang="ja-JP" altLang="en-US" sz="1500" b="0">
                 <a:solidFill>
                   <a:srgbClr val="2B2D42"/>
                 </a:solidFill>
@@ -3460,7 +3460,7 @@
                 <a:ea typeface="Yu Gothic"/>
                 <a:cs typeface="Yu Gothic"/>
               </a:rPr>
-              <a:t>30歳までに入籍したい</a:t>
+              <a:t>30歳のうちに入籍したい</a:t>
             </a:r>
           </a:p>
         </p:txBody>
@@ -3487,11 +3487,11 @@
           <a:p>
             <a:pPr algn="l">
               <a:lnSpc>
-                <a:spcPct val="150000"/>
-              </a:lnSpc>
-            </a:pPr>
-            <a:r>
-              <a:rPr lang="ja-JP" altLang="en-US" sz="1300" b="0">
+                <a:spcPct val="145000"/>
+              </a:lnSpc>
+            </a:pPr>
+            <a:r>
+              <a:rPr lang="ja-JP" altLang="en-US" sz="1500" b="0">
                 <a:solidFill>
                   <a:srgbClr val="2B2D42"/>
                 </a:solidFill>
@@ -3530,7 +3530,7 @@
               </a:lnSpc>
             </a:pPr>
             <a:r>
-              <a:rPr lang="ja-JP" altLang="en-US" sz="900" b="0">
+              <a:rPr lang="ja-JP" altLang="en-US" sz="1000" b="0">
                 <a:solidFill>
                   <a:srgbClr val="B8B2A8"/>
                 </a:solidFill>
@@ -3631,11 +3631,11 @@
         <p:spPr>
           <a:xfrm>
             <a:off x="841248" y="137160"/>
-            <a:ext cx="978408" cy="329184"/>
+            <a:ext cx="1152144" cy="384048"/>
           </a:xfrm>
           <a:prstGeom prst="roundRect">
             <a:avLst>
-              <a:gd name="adj" fmla="val 38888"/>
+              <a:gd name="adj" fmla="val 33333"/>
             </a:avLst>
           </a:prstGeom>
           <a:solidFill>
@@ -3655,7 +3655,7 @@
               </a:lnSpc>
             </a:pPr>
             <a:r>
-              <a:rPr lang="ja-JP" altLang="en-US" sz="1100" b="1">
+              <a:rPr lang="ja-JP" altLang="en-US" sz="1300" b="1">
                 <a:solidFill>
                   <a:srgbClr val="FFFFFF"/>
                 </a:solidFill>
@@ -3676,7 +3676,7 @@
         </p:nvSpPr>
         <p:spPr>
           <a:xfrm>
-            <a:off x="841248" y="612648"/>
+            <a:off x="841248" y="640080"/>
             <a:ext cx="10515600" cy="1005840"/>
           </a:xfrm>
           <a:prstGeom prst="rect">
@@ -3690,11 +3690,11 @@
           <a:p>
             <a:pPr algn="l">
               <a:lnSpc>
-                <a:spcPct val="160000"/>
-              </a:lnSpc>
-            </a:pPr>
-            <a:r>
-              <a:rPr lang="ja-JP" altLang="en-US" sz="2200" b="1">
+                <a:spcPct val="150000"/>
+              </a:lnSpc>
+            </a:pPr>
+            <a:r>
+              <a:rPr lang="ja-JP" altLang="en-US" sz="2700" b="1">
                 <a:solidFill>
                   <a:srgbClr val="2B2D42"/>
                 </a:solidFill>
@@ -3702,7 +3702,7 @@
                 <a:ea typeface="Yu Gothic"/>
                 <a:cs typeface="Yu Gothic"/>
               </a:rPr>
-              <a:t>期限は2つ、削らないものも2つ。それ以外は、全部動かしてOK。</a:t>
+              <a:t>期限は2つ、削らないものも2つ。あとは全部、動かしてOK。</a:t>
             </a:r>
           </a:p>
         </p:txBody>
@@ -3745,7 +3745,7 @@
         <p:spPr>
           <a:xfrm>
             <a:off x="1152144" y="2747772"/>
-            <a:ext cx="2578608" cy="274320"/>
+            <a:ext cx="2578608" cy="320040"/>
           </a:xfrm>
           <a:prstGeom prst="rect">
             <a:avLst/>
@@ -3762,9 +3762,9 @@
               </a:lnSpc>
             </a:pPr>
             <a:r>
-              <a:rPr lang="ja-JP" altLang="en-US" sz="1100" b="1" spc="80">
-                <a:solidFill>
-                  <a:srgbClr val="6E7080"/>
+              <a:rPr lang="ja-JP" altLang="en-US" sz="1350" b="1" spc="80">
+                <a:solidFill>
+                  <a:srgbClr val="2B2D42"/>
                 </a:solidFill>
                 <a:latin typeface="Yu Gothic"/>
                 <a:ea typeface="Yu Gothic"/>
@@ -3820,7 +3820,7 @@
                 <a:ea typeface="Yu Gothic"/>
                 <a:cs typeface="Yu Gothic"/>
               </a:rPr>
-              <a:t>歳まで</a:t>
+              <a:t>歳のうちに</a:t>
             </a:r>
           </a:p>
         </p:txBody>
@@ -3851,7 +3851,7 @@
               </a:lnSpc>
             </a:pPr>
             <a:r>
-              <a:rPr lang="ja-JP" altLang="en-US" sz="1100" b="0">
+              <a:rPr lang="ja-JP" altLang="en-US" sz="1300" b="0">
                 <a:solidFill>
                   <a:srgbClr val="6E7080"/>
                 </a:solidFill>
@@ -3859,7 +3859,7 @@
                 <a:ea typeface="Yu Gothic"/>
                 <a:cs typeface="Yu Gothic"/>
               </a:rPr>
-              <a:t>2027年10月まで</a:t>
+              <a:t>予定は2028年1〜3月</a:t>
             </a:r>
           </a:p>
         </p:txBody>
@@ -3902,7 +3902,7 @@
         <p:spPr>
           <a:xfrm>
             <a:off x="4809744" y="2747772"/>
-            <a:ext cx="2578608" cy="274320"/>
+            <a:ext cx="2578608" cy="320040"/>
           </a:xfrm>
           <a:prstGeom prst="rect">
             <a:avLst/>
@@ -3919,9 +3919,9 @@
               </a:lnSpc>
             </a:pPr>
             <a:r>
-              <a:rPr lang="ja-JP" altLang="en-US" sz="1100" b="1" spc="80">
-                <a:solidFill>
-                  <a:srgbClr val="6E7080"/>
+              <a:rPr lang="ja-JP" altLang="en-US" sz="1350" b="1" spc="80">
+                <a:solidFill>
+                  <a:srgbClr val="2B2D42"/>
                 </a:solidFill>
                 <a:latin typeface="Yu Gothic"/>
                 <a:ea typeface="Yu Gothic"/>
@@ -3977,7 +3977,7 @@
                 <a:ea typeface="Yu Gothic"/>
                 <a:cs typeface="Yu Gothic"/>
               </a:rPr>
-              <a:t>歳まで</a:t>
+              <a:t>歳のうちに</a:t>
             </a:r>
           </a:p>
         </p:txBody>
@@ -4008,7 +4008,7 @@
               </a:lnSpc>
             </a:pPr>
             <a:r>
-              <a:rPr lang="ja-JP" altLang="en-US" sz="1100" b="0">
+              <a:rPr lang="ja-JP" altLang="en-US" sz="1300" b="0">
                 <a:solidFill>
                   <a:srgbClr val="6E7080"/>
                 </a:solidFill>
@@ -4016,7 +4016,7 @@
                 <a:ea typeface="Yu Gothic"/>
                 <a:cs typeface="Yu Gothic"/>
               </a:rPr>
-              <a:t>2029年10月まで。2人目は一旦保留</a:t>
+              <a:t>2029年10月まで</a:t>
             </a:r>
           </a:p>
         </p:txBody>
@@ -4059,7 +4059,7 @@
         <p:spPr>
           <a:xfrm>
             <a:off x="8467344" y="2747772"/>
-            <a:ext cx="2578608" cy="274320"/>
+            <a:ext cx="2578608" cy="320040"/>
           </a:xfrm>
           <a:prstGeom prst="rect">
             <a:avLst/>
@@ -4076,9 +4076,9 @@
               </a:lnSpc>
             </a:pPr>
             <a:r>
-              <a:rPr lang="ja-JP" altLang="en-US" sz="1100" b="1" spc="80">
-                <a:solidFill>
-                  <a:srgbClr val="6E7080"/>
+              <a:rPr lang="ja-JP" altLang="en-US" sz="1350" b="1" spc="80">
+                <a:solidFill>
+                  <a:srgbClr val="2B2D42"/>
                 </a:solidFill>
                 <a:latin typeface="Yu Gothic"/>
                 <a:ea typeface="Yu Gothic"/>
@@ -4165,7 +4165,7 @@
               </a:lnSpc>
             </a:pPr>
             <a:r>
-              <a:rPr lang="ja-JP" altLang="en-US" sz="1100" b="0">
+              <a:rPr lang="ja-JP" altLang="en-US" sz="1300" b="0">
                 <a:solidFill>
                   <a:srgbClr val="6E7080"/>
                 </a:solidFill>
@@ -4204,15 +4204,15 @@
               </a:lnSpc>
             </a:pPr>
             <a:r>
-              <a:rPr lang="ja-JP" altLang="en-US" sz="900" b="0">
-                <a:solidFill>
-                  <a:srgbClr val="B8B2A8"/>
-                </a:solidFill>
-                <a:latin typeface="Yu Gothic"/>
-                <a:ea typeface="Yu Gothic"/>
-                <a:cs typeface="Yu Gothic"/>
-              </a:rPr>
-              <a:t>式と指輪は後回し。時期も規模も、まだ決めない。</a:t>
+              <a:rPr lang="ja-JP" altLang="en-US" sz="1150" b="0">
+                <a:solidFill>
+                  <a:srgbClr val="6E7080"/>
+                </a:solidFill>
+                <a:latin typeface="Yu Gothic"/>
+                <a:ea typeface="Yu Gothic"/>
+                <a:cs typeface="Yu Gothic"/>
+              </a:rPr>
+              <a:t>式と指輪は後回し。2人目は、一旦保留。</a:t>
             </a:r>
           </a:p>
         </p:txBody>
@@ -4243,7 +4243,7 @@
               </a:lnSpc>
             </a:pPr>
             <a:r>
-              <a:rPr lang="ja-JP" altLang="en-US" sz="900" b="0">
+              <a:rPr lang="ja-JP" altLang="en-US" sz="1000" b="0">
                 <a:solidFill>
                   <a:srgbClr val="B8B2A8"/>
                 </a:solidFill>
@@ -4344,11 +4344,11 @@
         <p:spPr>
           <a:xfrm>
             <a:off x="841248" y="137160"/>
-            <a:ext cx="1499616" cy="329184"/>
+            <a:ext cx="1755648" cy="384048"/>
           </a:xfrm>
           <a:prstGeom prst="roundRect">
             <a:avLst>
-              <a:gd name="adj" fmla="val 38888"/>
+              <a:gd name="adj" fmla="val 33333"/>
             </a:avLst>
           </a:prstGeom>
           <a:solidFill>
@@ -4368,7 +4368,7 @@
               </a:lnSpc>
             </a:pPr>
             <a:r>
-              <a:rPr lang="ja-JP" altLang="en-US" sz="1100" b="1">
+              <a:rPr lang="ja-JP" altLang="en-US" sz="1300" b="1">
                 <a:solidFill>
                   <a:srgbClr val="FFFFFF"/>
                 </a:solidFill>
@@ -4389,25 +4389,25 @@
         </p:nvSpPr>
         <p:spPr>
           <a:xfrm>
-            <a:off x="2523744" y="137160"/>
-            <a:ext cx="9015984" cy="329184"/>
-          </a:xfrm>
-          <a:prstGeom prst="rect">
-            <a:avLst/>
-          </a:prstGeom>
-          <a:noFill/>
-        </p:spPr>
-        <p:txBody>
-          <a:bodyPr wrap="square" lIns="0" tIns="0" rIns="0" bIns="0" anchor="ctr" rtlCol="0"/>
-          <a:lstStyle/>
-          <a:p>
-            <a:pPr algn="l">
-              <a:lnSpc>
-                <a:spcPct val="145000"/>
-              </a:lnSpc>
-            </a:pPr>
-            <a:r>
-              <a:rPr lang="ja-JP" altLang="en-US" sz="1150" b="0">
+            <a:off x="2779776" y="137160"/>
+            <a:ext cx="8759952" cy="384048"/>
+          </a:xfrm>
+          <a:prstGeom prst="rect">
+            <a:avLst/>
+          </a:prstGeom>
+          <a:noFill/>
+        </p:spPr>
+        <p:txBody>
+          <a:bodyPr wrap="square" lIns="0" tIns="0" rIns="0" bIns="0" anchor="ctr" rtlCol="0"/>
+          <a:lstStyle/>
+          <a:p>
+            <a:pPr algn="l">
+              <a:lnSpc>
+                <a:spcPct val="145000"/>
+              </a:lnSpc>
+            </a:pPr>
+            <a:r>
+              <a:rPr lang="ja-JP" altLang="en-US" sz="1400" b="0">
                 <a:solidFill>
                   <a:srgbClr val="6E7080"/>
                 </a:solidFill>
@@ -4415,7 +4415,7 @@
                 <a:ea typeface="Yu Gothic"/>
                 <a:cs typeface="Yu Gothic"/>
               </a:rPr>
-              <a:t>分かれ道は、2027年後半の1か所だけ</a:t>
+              <a:t>入籍と入居は同じ月。2028年1〜3月</a:t>
             </a:r>
           </a:p>
         </p:txBody>
@@ -4451,7 +4451,7 @@
               </a:lnSpc>
             </a:pPr>
             <a:r>
-              <a:rPr lang="ja-JP" altLang="en-US" sz="1300" b="1">
+              <a:rPr lang="ja-JP" altLang="en-US" sz="1500" b="1">
                 <a:solidFill>
                   <a:srgbClr val="FF6B6B"/>
                 </a:solidFill>
@@ -4495,7 +4495,7 @@
               </a:lnSpc>
             </a:pPr>
             <a:r>
-              <a:rPr lang="ja-JP" altLang="en-US" sz="1000" b="0">
+              <a:rPr lang="ja-JP" altLang="en-US" sz="1100" b="0">
                 <a:solidFill>
                   <a:srgbClr val="6E7080"/>
                 </a:solidFill>
@@ -4539,7 +4539,7 @@
               </a:lnSpc>
             </a:pPr>
             <a:r>
-              <a:rPr lang="ja-JP" altLang="en-US" sz="1300" b="1">
+              <a:rPr lang="ja-JP" altLang="en-US" sz="1500" b="1">
                 <a:solidFill>
                   <a:srgbClr val="FF6B6B"/>
                 </a:solidFill>
@@ -4583,7 +4583,7 @@
               </a:lnSpc>
             </a:pPr>
             <a:r>
-              <a:rPr lang="ja-JP" altLang="en-US" sz="1000" b="0">
+              <a:rPr lang="ja-JP" altLang="en-US" sz="1100" b="0">
                 <a:solidFill>
                   <a:srgbClr val="6E7080"/>
                 </a:solidFill>
@@ -4627,7 +4627,7 @@
               </a:lnSpc>
             </a:pPr>
             <a:r>
-              <a:rPr lang="ja-JP" altLang="en-US" sz="1000" b="0">
+              <a:rPr lang="ja-JP" altLang="en-US" sz="1100" b="0">
                 <a:solidFill>
                   <a:srgbClr val="6E7080"/>
                 </a:solidFill>
@@ -4671,7 +4671,7 @@
               </a:lnSpc>
             </a:pPr>
             <a:r>
-              <a:rPr lang="ja-JP" altLang="en-US" sz="1000" b="0">
+              <a:rPr lang="ja-JP" altLang="en-US" sz="1100" b="0">
                 <a:solidFill>
                   <a:srgbClr val="6E7080"/>
                 </a:solidFill>
@@ -4715,7 +4715,7 @@
               </a:lnSpc>
             </a:pPr>
             <a:r>
-              <a:rPr lang="ja-JP" altLang="en-US" sz="1000" b="0">
+              <a:rPr lang="ja-JP" altLang="en-US" sz="1100" b="0">
                 <a:solidFill>
                   <a:srgbClr val="6E7080"/>
                 </a:solidFill>
@@ -4759,7 +4759,7 @@
               </a:lnSpc>
             </a:pPr>
             <a:r>
-              <a:rPr lang="ja-JP" altLang="en-US" sz="1300" b="1">
+              <a:rPr lang="ja-JP" altLang="en-US" sz="1500" b="1">
                 <a:solidFill>
                   <a:srgbClr val="FF6B6B"/>
                 </a:solidFill>
@@ -4803,7 +4803,7 @@
               </a:lnSpc>
             </a:pPr>
             <a:r>
-              <a:rPr lang="ja-JP" altLang="en-US" sz="1000" b="0">
+              <a:rPr lang="ja-JP" altLang="en-US" sz="1100" b="0">
                 <a:solidFill>
                   <a:srgbClr val="6E7080"/>
                 </a:solidFill>
@@ -4847,7 +4847,7 @@
               </a:lnSpc>
             </a:pPr>
             <a:r>
-              <a:rPr lang="ja-JP" altLang="en-US" sz="1000" b="0">
+              <a:rPr lang="ja-JP" altLang="en-US" sz="1100" b="0">
                 <a:solidFill>
                   <a:srgbClr val="6E7080"/>
                 </a:solidFill>
@@ -4891,7 +4891,7 @@
               </a:lnSpc>
             </a:pPr>
             <a:r>
-              <a:rPr lang="ja-JP" altLang="en-US" sz="1000" b="0">
+              <a:rPr lang="ja-JP" altLang="en-US" sz="1100" b="0">
                 <a:solidFill>
                   <a:srgbClr val="6E7080"/>
                 </a:solidFill>
@@ -4935,7 +4935,7 @@
               </a:lnSpc>
             </a:pPr>
             <a:r>
-              <a:rPr lang="ja-JP" altLang="en-US" sz="1000" b="0">
+              <a:rPr lang="ja-JP" altLang="en-US" sz="1100" b="0">
                 <a:solidFill>
                   <a:srgbClr val="6E7080"/>
                 </a:solidFill>
@@ -4979,7 +4979,7 @@
               </a:lnSpc>
             </a:pPr>
             <a:r>
-              <a:rPr lang="ja-JP" altLang="en-US" sz="1300" b="1">
+              <a:rPr lang="ja-JP" altLang="en-US" sz="1500" b="1">
                 <a:solidFill>
                   <a:srgbClr val="FF6B6B"/>
                 </a:solidFill>
@@ -5023,7 +5023,7 @@
               </a:lnSpc>
             </a:pPr>
             <a:r>
-              <a:rPr lang="ja-JP" altLang="en-US" sz="1000" b="0">
+              <a:rPr lang="ja-JP" altLang="en-US" sz="1100" b="0">
                 <a:solidFill>
                   <a:srgbClr val="6E7080"/>
                 </a:solidFill>
@@ -5067,7 +5067,7 @@
               </a:lnSpc>
             </a:pPr>
             <a:r>
-              <a:rPr lang="ja-JP" altLang="en-US" sz="1000" b="0">
+              <a:rPr lang="ja-JP" altLang="en-US" sz="1100" b="0">
                 <a:solidFill>
                   <a:srgbClr val="6E7080"/>
                 </a:solidFill>
@@ -5111,7 +5111,7 @@
               </a:lnSpc>
             </a:pPr>
             <a:r>
-              <a:rPr lang="ja-JP" altLang="en-US" sz="1000" b="0">
+              <a:rPr lang="ja-JP" altLang="en-US" sz="1100" b="0">
                 <a:solidFill>
                   <a:srgbClr val="6E7080"/>
                 </a:solidFill>
@@ -5155,7 +5155,7 @@
               </a:lnSpc>
             </a:pPr>
             <a:r>
-              <a:rPr lang="ja-JP" altLang="en-US" sz="1000" b="0">
+              <a:rPr lang="ja-JP" altLang="en-US" sz="1100" b="0">
                 <a:solidFill>
                   <a:srgbClr val="6E7080"/>
                 </a:solidFill>
@@ -5555,11 +5555,11 @@
         <p:spPr>
           <a:xfrm>
             <a:off x="274320" y="2350008"/>
-            <a:ext cx="640080" cy="376936"/>
+            <a:ext cx="640080" cy="424053"/>
           </a:xfrm>
           <a:prstGeom prst="roundRect">
             <a:avLst>
-              <a:gd name="adj" fmla="val 33962"/>
+              <a:gd name="adj" fmla="val 30188"/>
             </a:avLst>
           </a:prstGeom>
           <a:solidFill>
@@ -5579,7 +5579,7 @@
               </a:lnSpc>
             </a:pPr>
             <a:r>
-              <a:rPr lang="ja-JP" altLang="en-US" sz="1000" b="1">
+              <a:rPr lang="ja-JP" altLang="en-US" sz="1200" b="1">
                 <a:solidFill>
                   <a:srgbClr val="FF6B6B"/>
                 </a:solidFill>
@@ -5601,11 +5601,11 @@
         <p:spPr>
           <a:xfrm>
             <a:off x="987552" y="2404872"/>
-            <a:ext cx="788001" cy="267208"/>
+            <a:ext cx="788001" cy="314325"/>
           </a:xfrm>
           <a:prstGeom prst="roundRect">
             <a:avLst>
-              <a:gd name="adj" fmla="val 47908"/>
+              <a:gd name="adj" fmla="val 40727"/>
             </a:avLst>
           </a:prstGeom>
           <a:solidFill>
@@ -5625,7 +5625,7 @@
               </a:lnSpc>
             </a:pPr>
             <a:r>
-              <a:rPr lang="ja-JP" altLang="en-US" sz="1050" b="1">
+              <a:rPr lang="ja-JP" altLang="en-US" sz="1200" b="1">
                 <a:solidFill>
                   <a:srgbClr val="FFFFFF"/>
                 </a:solidFill>
@@ -5647,11 +5647,11 @@
         <p:spPr>
           <a:xfrm>
             <a:off x="1830417" y="2404872"/>
-            <a:ext cx="1630866" cy="267208"/>
+            <a:ext cx="2473731" cy="314325"/>
           </a:xfrm>
           <a:prstGeom prst="roundRect">
             <a:avLst>
-              <a:gd name="adj" fmla="val 47908"/>
+              <a:gd name="adj" fmla="val 40727"/>
             </a:avLst>
           </a:prstGeom>
           <a:solidFill>
@@ -5671,7 +5671,7 @@
               </a:lnSpc>
             </a:pPr>
             <a:r>
-              <a:rPr lang="ja-JP" altLang="en-US" sz="750" b="1">
+              <a:rPr lang="ja-JP" altLang="en-US" sz="1050" b="1">
                 <a:solidFill>
                   <a:srgbClr val="FFFFFF"/>
                 </a:solidFill>
@@ -5692,8 +5692,8 @@
         </p:nvSpPr>
         <p:spPr>
           <a:xfrm>
-            <a:off x="274320" y="2726944"/>
-            <a:ext cx="640080" cy="1130808"/>
+            <a:off x="274320" y="2774061"/>
+            <a:ext cx="640080" cy="1272159"/>
           </a:xfrm>
           <a:prstGeom prst="roundRect">
             <a:avLst>
@@ -5717,7 +5717,7 @@
               </a:lnSpc>
             </a:pPr>
             <a:r>
-              <a:rPr lang="ja-JP" altLang="en-US" sz="1000" b="1">
+              <a:rPr lang="ja-JP" altLang="en-US" sz="1200" b="1">
                 <a:solidFill>
                   <a:srgbClr val="FFB703"/>
                 </a:solidFill>
@@ -5738,12 +5738,12 @@
         </p:nvSpPr>
         <p:spPr>
           <a:xfrm>
-            <a:off x="987552" y="2781808"/>
-            <a:ext cx="2473731" cy="267208"/>
+            <a:off x="987552" y="2828925"/>
+            <a:ext cx="4159461" cy="314325"/>
           </a:xfrm>
           <a:prstGeom prst="roundRect">
             <a:avLst>
-              <a:gd name="adj" fmla="val 47908"/>
+              <a:gd name="adj" fmla="val 40727"/>
             </a:avLst>
           </a:prstGeom>
           <a:solidFill>
@@ -5763,7 +5763,7 @@
               </a:lnSpc>
             </a:pPr>
             <a:r>
-              <a:rPr lang="ja-JP" altLang="en-US" sz="750" b="1">
+              <a:rPr lang="ja-JP" altLang="en-US" sz="1200" b="1">
                 <a:solidFill>
                   <a:srgbClr val="2B2D42"/>
                 </a:solidFill>
@@ -5784,12 +5784,12 @@
         </p:nvSpPr>
         <p:spPr>
           <a:xfrm>
-            <a:off x="987552" y="3158744"/>
-            <a:ext cx="2473731" cy="267208"/>
+            <a:off x="5201877" y="2828925"/>
+            <a:ext cx="6688056" cy="314325"/>
           </a:xfrm>
           <a:prstGeom prst="roundRect">
             <a:avLst>
-              <a:gd name="adj" fmla="val 47908"/>
+              <a:gd name="adj" fmla="val 40727"/>
             </a:avLst>
           </a:prstGeom>
           <a:solidFill>
@@ -5809,7 +5809,7 @@
               </a:lnSpc>
             </a:pPr>
             <a:r>
-              <a:rPr lang="ja-JP" altLang="en-US" sz="750" b="1">
+              <a:rPr lang="ja-JP" altLang="en-US" sz="1200" b="1">
                 <a:solidFill>
                   <a:srgbClr val="2B2D42"/>
                 </a:solidFill>
@@ -5817,7 +5817,7 @@
                 <a:ea typeface="Yu Gothic"/>
                 <a:cs typeface="Yu Gothic"/>
               </a:rPr>
-              <a:t>私：今の家に住み続ける</a:t>
+              <a:t>二人の家（子ども前提の広さ）</a:t>
             </a:r>
           </a:p>
         </p:txBody>
@@ -5830,12 +5830,12 @@
         </p:nvSpPr>
         <p:spPr>
           <a:xfrm>
-            <a:off x="3516147" y="3158744"/>
-            <a:ext cx="1630866" cy="267208"/>
+            <a:off x="987552" y="3252978"/>
+            <a:ext cx="4159461" cy="314325"/>
           </a:xfrm>
           <a:prstGeom prst="roundRect">
             <a:avLst>
-              <a:gd name="adj" fmla="val 47908"/>
+              <a:gd name="adj" fmla="val 40727"/>
             </a:avLst>
           </a:prstGeom>
           <a:solidFill>
@@ -5855,7 +5855,7 @@
               </a:lnSpc>
             </a:pPr>
             <a:r>
-              <a:rPr lang="ja-JP" altLang="en-US" sz="840" b="1">
+              <a:rPr lang="ja-JP" altLang="en-US" sz="1200" b="1">
                 <a:solidFill>
                   <a:srgbClr val="2B2D42"/>
                 </a:solidFill>
@@ -5863,7 +5863,7 @@
                 <a:ea typeface="Yu Gothic"/>
                 <a:cs typeface="Yu Gothic"/>
               </a:rPr>
-              <a:t>二人の家へ</a:t>
+              <a:t>私：今の家で貯める</a:t>
             </a:r>
           </a:p>
         </p:txBody>
@@ -5876,12 +5876,12 @@
         </p:nvSpPr>
         <p:spPr>
           <a:xfrm>
-            <a:off x="1830417" y="3535680"/>
-            <a:ext cx="1630866" cy="267208"/>
+            <a:off x="1830417" y="3677031"/>
+            <a:ext cx="788001" cy="314325"/>
           </a:xfrm>
           <a:prstGeom prst="roundRect">
             <a:avLst>
-              <a:gd name="adj" fmla="val 47908"/>
+              <a:gd name="adj" fmla="val 40727"/>
             </a:avLst>
           </a:prstGeom>
           <a:solidFill>
@@ -5901,7 +5901,7 @@
               </a:lnSpc>
             </a:pPr>
             <a:r>
-              <a:rPr lang="ja-JP" altLang="en-US" sz="750" b="1">
+              <a:rPr lang="ja-JP" altLang="en-US" sz="800" b="1">
                 <a:solidFill>
                   <a:srgbClr val="2B2D42"/>
                 </a:solidFill>
@@ -5909,7 +5909,7 @@
                 <a:ea typeface="Yu Gothic"/>
                 <a:cs typeface="Yu Gothic"/>
               </a:rPr>
-              <a:t>補助の確認・予算とエリア</a:t>
+              <a:t>補助の確認</a:t>
             </a:r>
           </a:p>
         </p:txBody>
@@ -5922,12 +5922,12 @@
         </p:nvSpPr>
         <p:spPr>
           <a:xfrm>
-            <a:off x="3516147" y="3535680"/>
-            <a:ext cx="788001" cy="267208"/>
+            <a:off x="3516147" y="3677031"/>
+            <a:ext cx="1630866" cy="314325"/>
           </a:xfrm>
           <a:prstGeom prst="roundRect">
             <a:avLst>
-              <a:gd name="adj" fmla="val 47908"/>
+              <a:gd name="adj" fmla="val 40727"/>
             </a:avLst>
           </a:prstGeom>
           <a:solidFill>
@@ -5947,7 +5947,7 @@
               </a:lnSpc>
             </a:pPr>
             <a:r>
-              <a:rPr lang="ja-JP" altLang="en-US" sz="750" b="1">
+              <a:rPr lang="ja-JP" altLang="en-US" sz="1200" b="1">
                 <a:solidFill>
                   <a:srgbClr val="2B2D42"/>
                 </a:solidFill>
@@ -5955,7 +5955,7 @@
                 <a:ea typeface="Yu Gothic"/>
                 <a:cs typeface="Yu Gothic"/>
               </a:rPr>
-              <a:t>場所と条件</a:t>
+              <a:t>物件探し</a:t>
             </a:r>
           </a:p>
         </p:txBody>
@@ -5968,12 +5968,12 @@
         </p:nvSpPr>
         <p:spPr>
           <a:xfrm>
-            <a:off x="274320" y="3857752"/>
-            <a:ext cx="640080" cy="753872"/>
+            <a:off x="274320" y="4046220"/>
+            <a:ext cx="640080" cy="424053"/>
           </a:xfrm>
           <a:prstGeom prst="roundRect">
             <a:avLst>
-              <a:gd name="adj" fmla="val 20000"/>
+              <a:gd name="adj" fmla="val 30188"/>
             </a:avLst>
           </a:prstGeom>
           <a:solidFill>
@@ -5993,7 +5993,7 @@
               </a:lnSpc>
             </a:pPr>
             <a:r>
-              <a:rPr lang="ja-JP" altLang="en-US" sz="1000" b="1">
+              <a:rPr lang="ja-JP" altLang="en-US" sz="1200" b="1">
                 <a:solidFill>
                   <a:srgbClr val="2EC4B6"/>
                 </a:solidFill>
@@ -6014,12 +6014,12 @@
         </p:nvSpPr>
         <p:spPr>
           <a:xfrm>
-            <a:off x="4359012" y="3912616"/>
-            <a:ext cx="788001" cy="267208"/>
+            <a:off x="5201877" y="4101084"/>
+            <a:ext cx="788001" cy="314325"/>
           </a:xfrm>
           <a:prstGeom prst="roundRect">
             <a:avLst>
-              <a:gd name="adj" fmla="val 47908"/>
+              <a:gd name="adj" fmla="val 40727"/>
             </a:avLst>
           </a:prstGeom>
           <a:solidFill>
@@ -6039,7 +6039,7 @@
               </a:lnSpc>
             </a:pPr>
             <a:r>
-              <a:rPr lang="ja-JP" altLang="en-US" sz="1050" b="1">
+              <a:rPr lang="ja-JP" altLang="en-US" sz="800" b="1">
                 <a:solidFill>
                   <a:srgbClr val="FFFFFF"/>
                 </a:solidFill>
@@ -6047,7 +6047,7 @@
                 <a:ea typeface="Yu Gothic"/>
                 <a:cs typeface="Yu Gothic"/>
               </a:rPr>
-              <a:t>入籍</a:t>
+              <a:t>入籍→入居</a:t>
             </a:r>
           </a:p>
         </p:txBody>
@@ -6060,12 +6060,12 @@
         </p:nvSpPr>
         <p:spPr>
           <a:xfrm>
-            <a:off x="5201877" y="4289552"/>
-            <a:ext cx="1630866" cy="267208"/>
+            <a:off x="6044742" y="4101084"/>
+            <a:ext cx="1630866" cy="314325"/>
           </a:xfrm>
           <a:prstGeom prst="roundRect">
             <a:avLst>
-              <a:gd name="adj" fmla="val 47908"/>
+              <a:gd name="adj" fmla="val 40727"/>
             </a:avLst>
           </a:prstGeom>
           <a:solidFill>
@@ -6085,7 +6085,7 @@
               </a:lnSpc>
             </a:pPr>
             <a:r>
-              <a:rPr lang="ja-JP" altLang="en-US" sz="750" b="1">
+              <a:rPr lang="ja-JP" altLang="en-US" sz="800" b="1">
                 <a:solidFill>
                   <a:srgbClr val="FFFFFF"/>
                 </a:solidFill>
@@ -6106,12 +6106,12 @@
         </p:nvSpPr>
         <p:spPr>
           <a:xfrm>
-            <a:off x="274320" y="4611624"/>
-            <a:ext cx="640080" cy="376936"/>
+            <a:off x="274320" y="4470273"/>
+            <a:ext cx="640080" cy="424053"/>
           </a:xfrm>
           <a:prstGeom prst="roundRect">
             <a:avLst>
-              <a:gd name="adj" fmla="val 33962"/>
+              <a:gd name="adj" fmla="val 30188"/>
             </a:avLst>
           </a:prstGeom>
           <a:solidFill>
@@ -6131,7 +6131,7 @@
               </a:lnSpc>
             </a:pPr>
             <a:r>
-              <a:rPr lang="ja-JP" altLang="en-US" sz="1000" b="1">
+              <a:rPr lang="ja-JP" altLang="en-US" sz="1200" b="1">
                 <a:solidFill>
                   <a:srgbClr val="4D96FF"/>
                 </a:solidFill>
@@ -6152,12 +6152,12 @@
         </p:nvSpPr>
         <p:spPr>
           <a:xfrm>
-            <a:off x="6044742" y="4666488"/>
-            <a:ext cx="3316596" cy="267208"/>
+            <a:off x="6887607" y="4525137"/>
+            <a:ext cx="2473731" cy="314325"/>
           </a:xfrm>
           <a:prstGeom prst="roundRect">
             <a:avLst>
-              <a:gd name="adj" fmla="val 47908"/>
+              <a:gd name="adj" fmla="val 40727"/>
             </a:avLst>
           </a:prstGeom>
           <a:solidFill>
@@ -6198,12 +6198,12 @@
         </p:nvSpPr>
         <p:spPr>
           <a:xfrm>
-            <a:off x="9416202" y="4666488"/>
-            <a:ext cx="2473731" cy="267208"/>
+            <a:off x="9416202" y="4525137"/>
+            <a:ext cx="2473731" cy="314325"/>
           </a:xfrm>
           <a:prstGeom prst="roundRect">
             <a:avLst>
-              <a:gd name="adj" fmla="val 47908"/>
+              <a:gd name="adj" fmla="val 40727"/>
             </a:avLst>
           </a:prstGeom>
           <a:solidFill>
@@ -6223,7 +6223,7 @@
               </a:lnSpc>
             </a:pPr>
             <a:r>
-              <a:rPr lang="ja-JP" altLang="en-US" sz="1050" b="1">
+              <a:rPr lang="ja-JP" altLang="en-US" sz="1200" b="1">
                 <a:solidFill>
                   <a:srgbClr val="FFFFFF"/>
                 </a:solidFill>
@@ -6244,12 +6244,12 @@
         </p:nvSpPr>
         <p:spPr>
           <a:xfrm>
-            <a:off x="274320" y="4988560"/>
-            <a:ext cx="640080" cy="376936"/>
+            <a:off x="274320" y="4894326"/>
+            <a:ext cx="640080" cy="424053"/>
           </a:xfrm>
           <a:prstGeom prst="roundRect">
             <a:avLst>
-              <a:gd name="adj" fmla="val 33962"/>
+              <a:gd name="adj" fmla="val 30188"/>
             </a:avLst>
           </a:prstGeom>
           <a:solidFill>
@@ -6269,7 +6269,7 @@
               </a:lnSpc>
             </a:pPr>
             <a:r>
-              <a:rPr lang="ja-JP" altLang="en-US" sz="1000" b="1">
+              <a:rPr lang="ja-JP" altLang="en-US" sz="1200" b="1">
                 <a:solidFill>
                   <a:srgbClr val="FF6B6B"/>
                 </a:solidFill>
@@ -6290,12 +6290,12 @@
         </p:nvSpPr>
         <p:spPr>
           <a:xfrm>
-            <a:off x="6044742" y="5043424"/>
-            <a:ext cx="788001" cy="267208"/>
+            <a:off x="6044742" y="4949190"/>
+            <a:ext cx="788001" cy="314325"/>
           </a:xfrm>
           <a:prstGeom prst="roundRect">
             <a:avLst>
-              <a:gd name="adj" fmla="val 47908"/>
+              <a:gd name="adj" fmla="val 40727"/>
             </a:avLst>
           </a:prstGeom>
           <a:solidFill>
@@ -6315,7 +6315,7 @@
               </a:lnSpc>
             </a:pPr>
             <a:r>
-              <a:rPr lang="ja-JP" altLang="en-US" sz="750" b="1">
+              <a:rPr lang="ja-JP" altLang="en-US" sz="800" b="1">
                 <a:solidFill>
                   <a:srgbClr val="FFFFFF"/>
                 </a:solidFill>
@@ -6336,12 +6336,12 @@
         </p:nvSpPr>
         <p:spPr>
           <a:xfrm>
-            <a:off x="274320" y="5365496"/>
-            <a:ext cx="640080" cy="376936"/>
+            <a:off x="274320" y="5318379"/>
+            <a:ext cx="640080" cy="424053"/>
           </a:xfrm>
           <a:prstGeom prst="roundRect">
             <a:avLst>
-              <a:gd name="adj" fmla="val 33962"/>
+              <a:gd name="adj" fmla="val 30188"/>
             </a:avLst>
           </a:prstGeom>
           <a:solidFill>
@@ -6361,7 +6361,7 @@
               </a:lnSpc>
             </a:pPr>
             <a:r>
-              <a:rPr lang="ja-JP" altLang="en-US" sz="1000" b="1">
+              <a:rPr lang="ja-JP" altLang="en-US" sz="1200" b="1">
                 <a:solidFill>
                   <a:srgbClr val="FFB703"/>
                 </a:solidFill>
@@ -6382,12 +6382,12 @@
         </p:nvSpPr>
         <p:spPr>
           <a:xfrm>
-            <a:off x="7730472" y="5420360"/>
-            <a:ext cx="4159461" cy="267208"/>
+            <a:off x="8573337" y="5373243"/>
+            <a:ext cx="3316596" cy="314325"/>
           </a:xfrm>
           <a:prstGeom prst="roundRect">
             <a:avLst>
-              <a:gd name="adj" fmla="val 47908"/>
+              <a:gd name="adj" fmla="val 40727"/>
             </a:avLst>
           </a:prstGeom>
           <a:solidFill>
@@ -6407,7 +6407,7 @@
               </a:lnSpc>
             </a:pPr>
             <a:r>
-              <a:rPr lang="ja-JP" altLang="en-US" sz="1050" b="1">
+              <a:rPr lang="ja-JP" altLang="en-US" sz="1080" b="1">
                 <a:solidFill>
                   <a:srgbClr val="FFFFFF"/>
                 </a:solidFill>
@@ -6485,7 +6485,7 @@
               </a:lnSpc>
             </a:pPr>
             <a:r>
-              <a:rPr lang="ja-JP" altLang="en-US" sz="800" b="0">
+              <a:rPr lang="ja-JP" altLang="en-US" sz="950" b="0">
                 <a:solidFill>
                   <a:srgbClr val="6E7080"/>
                 </a:solidFill>
@@ -6501,84 +6501,6 @@
       <p:sp>
         <p:nvSpPr>
           <p:cNvPr id="56" name="TextBox 56"/>
-          <p:cNvSpPr txBox="1"/>
-          <p:nvPr/>
-        </p:nvSpPr>
-        <p:spPr>
-          <a:xfrm>
-            <a:off x="1995817" y="1709928"/>
-            <a:ext cx="457200" cy="292608"/>
-          </a:xfrm>
-          <a:prstGeom prst="rect">
-            <a:avLst/>
-          </a:prstGeom>
-          <a:noFill/>
-        </p:spPr>
-        <p:txBody>
-          <a:bodyPr wrap="square" lIns="0" tIns="0" rIns="0" bIns="0" anchor="t" rtlCol="0"/>
-          <a:lstStyle/>
-          <a:p>
-            <a:pPr algn="ctr">
-              <a:lnSpc>
-                <a:spcPct val="145000"/>
-              </a:lnSpc>
-            </a:pPr>
-            <a:r>
-              <a:rPr lang="ja-JP" altLang="en-US" sz="1500" b="0">
-                <a:solidFill>
-                  <a:srgbClr val="FF6B6B"/>
-                </a:solidFill>
-                <a:latin typeface="Yu Gothic"/>
-                <a:ea typeface="Yu Gothic"/>
-                <a:cs typeface="Yu Gothic"/>
-              </a:rPr>
-              <a:t>★</a:t>
-            </a:r>
-          </a:p>
-        </p:txBody>
-      </p:sp>
-      <p:sp>
-        <p:nvSpPr>
-          <p:cNvPr id="57" name="TextBox 57"/>
-          <p:cNvSpPr txBox="1"/>
-          <p:nvPr/>
-        </p:nvSpPr>
-        <p:spPr>
-          <a:xfrm>
-            <a:off x="1355737" y="2002536"/>
-            <a:ext cx="1737360" cy="274320"/>
-          </a:xfrm>
-          <a:prstGeom prst="rect">
-            <a:avLst/>
-          </a:prstGeom>
-          <a:noFill/>
-        </p:spPr>
-        <p:txBody>
-          <a:bodyPr wrap="square" lIns="0" tIns="0" rIns="0" bIns="0" anchor="t" rtlCol="0"/>
-          <a:lstStyle/>
-          <a:p>
-            <a:pPr algn="ctr">
-              <a:lnSpc>
-                <a:spcPct val="125000"/>
-              </a:lnSpc>
-            </a:pPr>
-            <a:r>
-              <a:rPr lang="ja-JP" altLang="en-US" sz="800" b="0">
-                <a:solidFill>
-                  <a:srgbClr val="6E7080"/>
-                </a:solidFill>
-                <a:latin typeface="Yu Gothic"/>
-                <a:ea typeface="Yu Gothic"/>
-                <a:cs typeface="Yu Gothic"/>
-              </a:rPr>
-              <a:t>補助の条件を確認</a:t>
-            </a:r>
-          </a:p>
-        </p:txBody>
-      </p:sp>
-      <p:sp>
-        <p:nvSpPr>
-          <p:cNvPr id="58" name="TextBox 58"/>
           <p:cNvSpPr txBox="1"/>
           <p:nvPr/>
         </p:nvSpPr>
@@ -6617,7 +6539,7 @@
       </p:sp>
       <p:sp>
         <p:nvSpPr>
-          <p:cNvPr id="59" name="TextBox 59"/>
+          <p:cNvPr id="57" name="TextBox 57"/>
           <p:cNvSpPr txBox="1"/>
           <p:nvPr/>
         </p:nvSpPr>
@@ -6641,7 +6563,7 @@
               </a:lnSpc>
             </a:pPr>
             <a:r>
-              <a:rPr lang="ja-JP" altLang="en-US" sz="800" b="0">
+              <a:rPr lang="ja-JP" altLang="en-US" sz="950" b="0">
                 <a:solidFill>
                   <a:srgbClr val="6E7080"/>
                 </a:solidFill>
@@ -6650,6 +6572,84 @@
                 <a:cs typeface="Yu Gothic"/>
               </a:rPr>
               <a:t>30歳</a:t>
+            </a:r>
+          </a:p>
+        </p:txBody>
+      </p:sp>
+      <p:sp>
+        <p:nvSpPr>
+          <p:cNvPr id="58" name="TextBox 58"/>
+          <p:cNvSpPr txBox="1"/>
+          <p:nvPr/>
+        </p:nvSpPr>
+        <p:spPr>
+          <a:xfrm>
+            <a:off x="5367277" y="1709928"/>
+            <a:ext cx="457200" cy="292608"/>
+          </a:xfrm>
+          <a:prstGeom prst="rect">
+            <a:avLst/>
+          </a:prstGeom>
+          <a:noFill/>
+        </p:spPr>
+        <p:txBody>
+          <a:bodyPr wrap="square" lIns="0" tIns="0" rIns="0" bIns="0" anchor="t" rtlCol="0"/>
+          <a:lstStyle/>
+          <a:p>
+            <a:pPr algn="ctr">
+              <a:lnSpc>
+                <a:spcPct val="145000"/>
+              </a:lnSpc>
+            </a:pPr>
+            <a:r>
+              <a:rPr lang="ja-JP" altLang="en-US" sz="1500" b="0">
+                <a:solidFill>
+                  <a:srgbClr val="FF6B6B"/>
+                </a:solidFill>
+                <a:latin typeface="Yu Gothic"/>
+                <a:ea typeface="Yu Gothic"/>
+                <a:cs typeface="Yu Gothic"/>
+              </a:rPr>
+              <a:t>★</a:t>
+            </a:r>
+          </a:p>
+        </p:txBody>
+      </p:sp>
+      <p:sp>
+        <p:nvSpPr>
+          <p:cNvPr id="59" name="TextBox 59"/>
+          <p:cNvSpPr txBox="1"/>
+          <p:nvPr/>
+        </p:nvSpPr>
+        <p:spPr>
+          <a:xfrm>
+            <a:off x="4727197" y="2002536"/>
+            <a:ext cx="1737360" cy="274320"/>
+          </a:xfrm>
+          <a:prstGeom prst="rect">
+            <a:avLst/>
+          </a:prstGeom>
+          <a:noFill/>
+        </p:spPr>
+        <p:txBody>
+          <a:bodyPr wrap="square" lIns="0" tIns="0" rIns="0" bIns="0" anchor="t" rtlCol="0"/>
+          <a:lstStyle/>
+          <a:p>
+            <a:pPr algn="ctr">
+              <a:lnSpc>
+                <a:spcPct val="125000"/>
+              </a:lnSpc>
+            </a:pPr>
+            <a:r>
+              <a:rPr lang="ja-JP" altLang="en-US" sz="950" b="0">
+                <a:solidFill>
+                  <a:srgbClr val="6E7080"/>
+                </a:solidFill>
+                <a:latin typeface="Yu Gothic"/>
+                <a:ea typeface="Yu Gothic"/>
+                <a:cs typeface="Yu Gothic"/>
+              </a:rPr>
+              <a:t>入籍・入居</a:t>
             </a:r>
           </a:p>
         </p:txBody>
@@ -6719,7 +6719,7 @@
               </a:lnSpc>
             </a:pPr>
             <a:r>
-              <a:rPr lang="ja-JP" altLang="en-US" sz="800" b="0">
+              <a:rPr lang="ja-JP" altLang="en-US" sz="950" b="0">
                 <a:solidFill>
                   <a:srgbClr val="6E7080"/>
                 </a:solidFill>
@@ -6758,7 +6758,7 @@
               </a:lnSpc>
             </a:pPr>
             <a:r>
-              <a:rPr lang="ja-JP" altLang="en-US" sz="950" b="0">
+              <a:rPr lang="ja-JP" altLang="en-US" sz="1100" b="0">
                 <a:solidFill>
                   <a:srgbClr val="6E7080"/>
                 </a:solidFill>
@@ -6797,7 +6797,7 @@
               </a:lnSpc>
             </a:pPr>
             <a:r>
-              <a:rPr lang="ja-JP" altLang="en-US" sz="900" b="0">
+              <a:rPr lang="ja-JP" altLang="en-US" sz="1000" b="0">
                 <a:solidFill>
                   <a:srgbClr val="B8B2A8"/>
                 </a:solidFill>
@@ -6898,7 +6898,146 @@
         <p:spPr>
           <a:xfrm>
             <a:off x="841248" y="137160"/>
-            <a:ext cx="978408" cy="329184"/>
+            <a:ext cx="1152144" cy="384048"/>
+          </a:xfrm>
+          <a:prstGeom prst="roundRect">
+            <a:avLst>
+              <a:gd name="adj" fmla="val 33333"/>
+            </a:avLst>
+          </a:prstGeom>
+          <a:solidFill>
+            <a:srgbClr val="FF6B6B"/>
+          </a:solidFill>
+          <a:ln>
+            <a:noFill/>
+          </a:ln>
+        </p:spPr>
+        <p:txBody>
+          <a:bodyPr wrap="square" lIns="0" tIns="0" rIns="0" bIns="0" anchor="ctr" rtlCol="0"/>
+          <a:lstStyle/>
+          <a:p>
+            <a:pPr algn="ctr">
+              <a:lnSpc>
+                <a:spcPct val="145000"/>
+              </a:lnSpc>
+            </a:pPr>
+            <a:r>
+              <a:rPr lang="ja-JP" altLang="en-US" sz="1300" b="1">
+                <a:solidFill>
+                  <a:srgbClr val="FFFFFF"/>
+                </a:solidFill>
+                <a:latin typeface="Yu Gothic"/>
+                <a:ea typeface="Yu Gothic"/>
+                <a:cs typeface="Yu Gothic"/>
+              </a:rPr>
+              <a:t>住まい</a:t>
+            </a:r>
+          </a:p>
+        </p:txBody>
+      </p:sp>
+      <p:sp>
+        <p:nvSpPr>
+          <p:cNvPr id="3" name="TextBox 3"/>
+          <p:cNvSpPr txBox="1"/>
+          <p:nvPr/>
+        </p:nvSpPr>
+        <p:spPr>
+          <a:xfrm>
+            <a:off x="841248" y="640080"/>
+            <a:ext cx="10515600" cy="1005840"/>
+          </a:xfrm>
+          <a:prstGeom prst="rect">
+            <a:avLst/>
+          </a:prstGeom>
+          <a:noFill/>
+        </p:spPr>
+        <p:txBody>
+          <a:bodyPr wrap="square" lIns="0" tIns="0" rIns="0" bIns="0" anchor="t" rtlCol="0"/>
+          <a:lstStyle/>
+          <a:p>
+            <a:pPr algn="l">
+              <a:lnSpc>
+                <a:spcPct val="150000"/>
+              </a:lnSpc>
+            </a:pPr>
+            <a:r>
+              <a:rPr lang="ja-JP" altLang="en-US" sz="2700" b="1">
+                <a:solidFill>
+                  <a:srgbClr val="2B2D42"/>
+                </a:solidFill>
+                <a:latin typeface="Yu Gothic"/>
+                <a:ea typeface="Yu Gothic"/>
+                <a:cs typeface="Yu Gothic"/>
+              </a:rPr>
+              <a:t>入籍と入居は同じ月に。最初の家は</a:t>
+            </a:r>
+            <a:r>
+              <a:rPr lang="ja-JP" altLang="en-US" sz="2700" b="1">
+                <a:solidFill>
+                  <a:srgbClr val="2B2D42"/>
+                </a:solidFill>
+                <a:highlight>
+                  <a:srgbClr val="FFE066"/>
+                </a:highlight>
+                <a:latin typeface="Yu Gothic"/>
+                <a:ea typeface="Yu Gothic"/>
+                <a:cs typeface="Yu Gothic"/>
+              </a:rPr>
+              <a:t>子ども前提の広さ</a:t>
+            </a:r>
+            <a:r>
+              <a:rPr lang="ja-JP" altLang="en-US" sz="2700" b="1">
+                <a:solidFill>
+                  <a:srgbClr val="2B2D42"/>
+                </a:solidFill>
+                <a:latin typeface="Yu Gothic"/>
+                <a:ea typeface="Yu Gothic"/>
+                <a:cs typeface="Yu Gothic"/>
+              </a:rPr>
+              <a:t>で、引っ越しは1回。</a:t>
+            </a:r>
+          </a:p>
+        </p:txBody>
+      </p:sp>
+      <p:sp>
+        <p:nvSpPr>
+          <p:cNvPr id="4" name="Shape 4"/>
+          <p:cNvSpPr/>
+          <p:nvPr/>
+        </p:nvSpPr>
+        <p:spPr>
+          <a:xfrm>
+            <a:off x="841248" y="1924812"/>
+            <a:ext cx="2436876" cy="3931920"/>
+          </a:xfrm>
+          <a:prstGeom prst="roundRect">
+            <a:avLst>
+              <a:gd name="adj" fmla="val 5253"/>
+            </a:avLst>
+          </a:prstGeom>
+          <a:solidFill>
+            <a:srgbClr val="FFE3E0"/>
+          </a:solidFill>
+          <a:ln>
+            <a:noFill/>
+          </a:ln>
+        </p:spPr>
+        <p:txBody>
+          <a:bodyPr wrap="square" lIns="0" tIns="0" rIns="0" bIns="0" anchor="ctr" rtlCol="0"/>
+          <a:lstStyle/>
+          <a:p/>
+        </p:txBody>
+      </p:sp>
+      <p:sp>
+        <p:nvSpPr>
+          <p:cNvPr id="5" name="Shape 5"/>
+          <p:cNvSpPr/>
+          <p:nvPr/>
+        </p:nvSpPr>
+        <p:spPr>
+          <a:xfrm>
+            <a:off x="1133856" y="2290572"/>
+            <a:ext cx="1911096" cy="329184"/>
           </a:xfrm>
           <a:prstGeom prst="roundRect">
             <a:avLst>
@@ -6922,7 +7061,7 @@
               </a:lnSpc>
             </a:pPr>
             <a:r>
-              <a:rPr lang="ja-JP" altLang="en-US" sz="1100" b="1">
+              <a:rPr lang="ja-JP" altLang="en-US" sz="1200" b="1">
                 <a:solidFill>
                   <a:srgbClr val="FFFFFF"/>
                 </a:solidFill>
@@ -6930,21 +7069,21 @@
                 <a:ea typeface="Yu Gothic"/>
                 <a:cs typeface="Yu Gothic"/>
               </a:rPr>
-              <a:t>住まい</a:t>
-            </a:r>
-          </a:p>
-        </p:txBody>
-      </p:sp>
-      <p:sp>
-        <p:nvSpPr>
-          <p:cNvPr id="3" name="TextBox 3"/>
-          <p:cNvSpPr txBox="1"/>
-          <p:nvPr/>
-        </p:nvSpPr>
-        <p:spPr>
-          <a:xfrm>
-            <a:off x="841248" y="612648"/>
-            <a:ext cx="10515600" cy="1005840"/>
+              <a:t>2027年後半</a:t>
+            </a:r>
+          </a:p>
+        </p:txBody>
+      </p:sp>
+      <p:sp>
+        <p:nvSpPr>
+          <p:cNvPr id="6" name="TextBox 6"/>
+          <p:cNvSpPr txBox="1"/>
+          <p:nvPr/>
+        </p:nvSpPr>
+        <p:spPr>
+          <a:xfrm>
+            <a:off x="1133856" y="2839212"/>
+            <a:ext cx="1851660" cy="1097280"/>
           </a:xfrm>
           <a:prstGeom prst="rect">
             <a:avLst/>
@@ -6957,7 +7096,7 @@
           <a:p>
             <a:pPr algn="l">
               <a:lnSpc>
-                <a:spcPct val="160000"/>
+                <a:spcPct val="135000"/>
               </a:lnSpc>
             </a:pPr>
             <a:r>
@@ -6969,54 +7108,68 @@
                 <a:ea typeface="Yu Gothic"/>
                 <a:cs typeface="Yu Gothic"/>
               </a:rPr>
-              <a:t>分かれ道は「家賃補助が使えるか」。どっちでも、最初の家は</a:t>
-            </a:r>
-            <a:r>
-              <a:rPr lang="ja-JP" altLang="en-US" sz="2200" b="1">
+              <a:t>物件探し</a:t>
+            </a:r>
+          </a:p>
+        </p:txBody>
+      </p:sp>
+      <p:sp>
+        <p:nvSpPr>
+          <p:cNvPr id="7" name="TextBox 7"/>
+          <p:cNvSpPr txBox="1"/>
+          <p:nvPr/>
+        </p:nvSpPr>
+        <p:spPr>
+          <a:xfrm>
+            <a:off x="1133856" y="3982212"/>
+            <a:ext cx="1851660" cy="1645920"/>
+          </a:xfrm>
+          <a:prstGeom prst="rect">
+            <a:avLst/>
+          </a:prstGeom>
+          <a:noFill/>
+        </p:spPr>
+        <p:txBody>
+          <a:bodyPr wrap="square" lIns="0" tIns="0" rIns="0" bIns="0" anchor="t" rtlCol="0"/>
+          <a:lstStyle/>
+          <a:p>
+            <a:pPr algn="l">
+              <a:lnSpc>
+                <a:spcPct val="170000"/>
+              </a:lnSpc>
+            </a:pPr>
+            <a:r>
+              <a:rPr lang="ja-JP" altLang="en-US" sz="1350" b="0">
                 <a:solidFill>
                   <a:srgbClr val="2B2D42"/>
                 </a:solidFill>
-                <a:highlight>
-                  <a:srgbClr val="FFE066"/>
-                </a:highlight>
-                <a:latin typeface="Yu Gothic"/>
-                <a:ea typeface="Yu Gothic"/>
-                <a:cs typeface="Yu Gothic"/>
-              </a:rPr>
-              <a:t>子ども前提の広さ</a:t>
-            </a:r>
-            <a:r>
-              <a:rPr lang="ja-JP" altLang="en-US" sz="2200" b="1">
-                <a:solidFill>
-                  <a:srgbClr val="2B2D42"/>
-                </a:solidFill>
-                <a:latin typeface="Yu Gothic"/>
-                <a:ea typeface="Yu Gothic"/>
-                <a:cs typeface="Yu Gothic"/>
-              </a:rPr>
-              <a:t>で。</a:t>
-            </a:r>
-          </a:p>
-        </p:txBody>
-      </p:sp>
-      <p:sp>
-        <p:nvSpPr>
-          <p:cNvPr id="4" name="Shape 4"/>
-          <p:cNvSpPr/>
-          <p:nvPr/>
-        </p:nvSpPr>
-        <p:spPr>
-          <a:xfrm>
-            <a:off x="841248" y="1924812"/>
-            <a:ext cx="3334512" cy="3931920"/>
+                <a:latin typeface="Yu Gothic"/>
+                <a:ea typeface="Yu Gothic"/>
+                <a:cs typeface="Yu Gothic"/>
+              </a:rPr>
+              <a:t>子ども前提の広さで。名義は私（世帯主）。補助の型に合わせて探す。</a:t>
+            </a:r>
+          </a:p>
+        </p:txBody>
+      </p:sp>
+      <p:sp>
+        <p:nvSpPr>
+          <p:cNvPr id="8" name="Shape 8"/>
+          <p:cNvSpPr/>
+          <p:nvPr/>
+        </p:nvSpPr>
+        <p:spPr>
+          <a:xfrm>
+            <a:off x="3534156" y="1924812"/>
+            <a:ext cx="2436876" cy="3931920"/>
           </a:xfrm>
           <a:prstGeom prst="roundRect">
             <a:avLst>
-              <a:gd name="adj" fmla="val 3839"/>
+              <a:gd name="adj" fmla="val 5253"/>
             </a:avLst>
           </a:prstGeom>
           <a:solidFill>
-            <a:srgbClr val="FFE3E0"/>
+            <a:srgbClr val="FFF1C9"/>
           </a:solidFill>
           <a:ln>
             <a:noFill/>
@@ -7030,22 +7183,22 @@
       </p:sp>
       <p:sp>
         <p:nvSpPr>
-          <p:cNvPr id="5" name="Shape 5"/>
-          <p:cNvSpPr/>
-          <p:nvPr/>
-        </p:nvSpPr>
-        <p:spPr>
-          <a:xfrm>
-            <a:off x="1133856" y="2290572"/>
-            <a:ext cx="1554480" cy="292608"/>
+          <p:cNvPr id="9" name="Shape 9"/>
+          <p:cNvSpPr/>
+          <p:nvPr/>
+        </p:nvSpPr>
+        <p:spPr>
+          <a:xfrm>
+            <a:off x="3826764" y="2290572"/>
+            <a:ext cx="2313432" cy="329184"/>
           </a:xfrm>
           <a:prstGeom prst="roundRect">
             <a:avLst>
-              <a:gd name="adj" fmla="val 43750"/>
+              <a:gd name="adj" fmla="val 38888"/>
             </a:avLst>
           </a:prstGeom>
           <a:solidFill>
-            <a:srgbClr val="FF6B6B"/>
+            <a:srgbClr val="FFB703"/>
           </a:solidFill>
           <a:ln>
             <a:noFill/>
@@ -7061,7 +7214,7 @@
               </a:lnSpc>
             </a:pPr>
             <a:r>
-              <a:rPr lang="ja-JP" altLang="en-US" sz="1050" b="1">
+              <a:rPr lang="ja-JP" altLang="en-US" sz="1200" b="1">
                 <a:solidFill>
                   <a:srgbClr val="FFFFFF"/>
                 </a:solidFill>
@@ -7069,21 +7222,21 @@
                 <a:ea typeface="Yu Gothic"/>
                 <a:cs typeface="Yu Gothic"/>
               </a:rPr>
-              <a:t>補助が使える</a:t>
-            </a:r>
-          </a:p>
-        </p:txBody>
-      </p:sp>
-      <p:sp>
-        <p:nvSpPr>
-          <p:cNvPr id="6" name="TextBox 6"/>
-          <p:cNvSpPr txBox="1"/>
-          <p:nvPr/>
-        </p:nvSpPr>
-        <p:spPr>
-          <a:xfrm>
-            <a:off x="1133856" y="2793492"/>
-            <a:ext cx="2749296" cy="1005840"/>
+              <a:t>2028年1〜3月</a:t>
+            </a:r>
+          </a:p>
+        </p:txBody>
+      </p:sp>
+      <p:sp>
+        <p:nvSpPr>
+          <p:cNvPr id="10" name="TextBox 10"/>
+          <p:cNvSpPr txBox="1"/>
+          <p:nvPr/>
+        </p:nvSpPr>
+        <p:spPr>
+          <a:xfrm>
+            <a:off x="3826764" y="2839212"/>
+            <a:ext cx="1851660" cy="1097280"/>
           </a:xfrm>
           <a:prstGeom prst="rect">
             <a:avLst/>
@@ -7096,11 +7249,11 @@
           <a:p>
             <a:pPr algn="l">
               <a:lnSpc>
-                <a:spcPct val="140000"/>
-              </a:lnSpc>
-            </a:pPr>
-            <a:r>
-              <a:rPr lang="ja-JP" altLang="en-US" sz="1900" b="1">
+                <a:spcPct val="135000"/>
+              </a:lnSpc>
+            </a:pPr>
+            <a:r>
+              <a:rPr lang="ja-JP" altLang="en-US" sz="2200" b="1">
                 <a:solidFill>
                   <a:srgbClr val="2B2D42"/>
                 </a:solidFill>
@@ -7108,17 +7261,38 @@
                 <a:ea typeface="Yu Gothic"/>
                 <a:cs typeface="Yu Gothic"/>
               </a:rPr>
-              <a:t>2027年後半、</a:t>
-            </a:r>
-          </a:p>
-          <a:p>
-            <a:pPr algn="l">
-              <a:lnSpc>
-                <a:spcPct val="140000"/>
-              </a:lnSpc>
-            </a:pPr>
-            <a:r>
-              <a:rPr lang="ja-JP" altLang="en-US" sz="1900" b="1">
+              <a:t>入籍 → 入居</a:t>
+            </a:r>
+          </a:p>
+        </p:txBody>
+      </p:sp>
+      <p:sp>
+        <p:nvSpPr>
+          <p:cNvPr id="11" name="TextBox 11"/>
+          <p:cNvSpPr txBox="1"/>
+          <p:nvPr/>
+        </p:nvSpPr>
+        <p:spPr>
+          <a:xfrm>
+            <a:off x="3826764" y="3982212"/>
+            <a:ext cx="1851660" cy="1645920"/>
+          </a:xfrm>
+          <a:prstGeom prst="rect">
+            <a:avLst/>
+          </a:prstGeom>
+          <a:noFill/>
+        </p:spPr>
+        <p:txBody>
+          <a:bodyPr wrap="square" lIns="0" tIns="0" rIns="0" bIns="0" anchor="t" rtlCol="0"/>
+          <a:lstStyle/>
+          <a:p>
+            <a:pPr algn="l">
+              <a:lnSpc>
+                <a:spcPct val="170000"/>
+              </a:lnSpc>
+            </a:pPr>
+            <a:r>
+              <a:rPr lang="ja-JP" altLang="en-US" sz="1350" b="0">
                 <a:solidFill>
                   <a:srgbClr val="2B2D42"/>
                 </a:solidFill>
@@ -7126,68 +7300,29 @@
                 <a:ea typeface="Yu Gothic"/>
                 <a:cs typeface="Yu Gothic"/>
               </a:rPr>
-              <a:t>二人の家へ</a:t>
-            </a:r>
-          </a:p>
-        </p:txBody>
-      </p:sp>
-      <p:sp>
-        <p:nvSpPr>
-          <p:cNvPr id="7" name="TextBox 7"/>
-          <p:cNvSpPr txBox="1"/>
-          <p:nvPr/>
-        </p:nvSpPr>
-        <p:spPr>
-          <a:xfrm>
-            <a:off x="1133856" y="3845052"/>
-            <a:ext cx="2749296" cy="1691640"/>
-          </a:xfrm>
-          <a:prstGeom prst="rect">
-            <a:avLst/>
-          </a:prstGeom>
-          <a:noFill/>
-        </p:spPr>
-        <p:txBody>
-          <a:bodyPr wrap="square" lIns="0" tIns="0" rIns="0" bIns="0" anchor="t" rtlCol="0"/>
-          <a:lstStyle/>
-          <a:p>
-            <a:pPr algn="l">
-              <a:lnSpc>
-                <a:spcPct val="180000"/>
-              </a:lnSpc>
-            </a:pPr>
-            <a:r>
-              <a:rPr lang="ja-JP" altLang="en-US" sz="1250" b="0">
-                <a:solidFill>
-                  <a:srgbClr val="2B2D42"/>
-                </a:solidFill>
-                <a:latin typeface="Yu Gothic"/>
-                <a:ea typeface="Yu Gothic"/>
-                <a:cs typeface="Yu Gothic"/>
-              </a:rPr>
-              <a:t>補助の条件（入籍が条件か、上限、回数）に合わせて場所を決める。入籍は住む前か、住むタイミング。</a:t>
-            </a:r>
-          </a:p>
-        </p:txBody>
-      </p:sp>
-      <p:sp>
-        <p:nvSpPr>
-          <p:cNvPr id="8" name="Shape 8"/>
-          <p:cNvSpPr/>
-          <p:nvPr/>
-        </p:nvSpPr>
-        <p:spPr>
-          <a:xfrm>
-            <a:off x="4431792" y="1924812"/>
-            <a:ext cx="3334512" cy="3931920"/>
+              <a:t>入籍が先、入居が後。同じ月の中で。彼のルームシェアは中途解約になる。</a:t>
+            </a:r>
+          </a:p>
+        </p:txBody>
+      </p:sp>
+      <p:sp>
+        <p:nvSpPr>
+          <p:cNvPr id="12" name="Shape 12"/>
+          <p:cNvSpPr/>
+          <p:nvPr/>
+        </p:nvSpPr>
+        <p:spPr>
+          <a:xfrm>
+            <a:off x="6227064" y="1924812"/>
+            <a:ext cx="2436876" cy="3931920"/>
           </a:xfrm>
           <a:prstGeom prst="roundRect">
             <a:avLst>
-              <a:gd name="adj" fmla="val 3839"/>
+              <a:gd name="adj" fmla="val 5253"/>
             </a:avLst>
           </a:prstGeom>
           <a:solidFill>
-            <a:srgbClr val="FFF1C9"/>
+            <a:srgbClr val="D9F5F1"/>
           </a:solidFill>
           <a:ln>
             <a:noFill/>
@@ -7201,22 +7336,22 @@
       </p:sp>
       <p:sp>
         <p:nvSpPr>
-          <p:cNvPr id="9" name="Shape 9"/>
-          <p:cNvSpPr/>
-          <p:nvPr/>
-        </p:nvSpPr>
-        <p:spPr>
-          <a:xfrm>
-            <a:off x="4724400" y="2290572"/>
-            <a:ext cx="1737360" cy="292608"/>
+          <p:cNvPr id="13" name="Shape 13"/>
+          <p:cNvSpPr/>
+          <p:nvPr/>
+        </p:nvSpPr>
+        <p:spPr>
+          <a:xfrm>
+            <a:off x="6519672" y="2290572"/>
+            <a:ext cx="1508760" cy="329184"/>
           </a:xfrm>
           <a:prstGeom prst="roundRect">
             <a:avLst>
-              <a:gd name="adj" fmla="val 43750"/>
+              <a:gd name="adj" fmla="val 38888"/>
             </a:avLst>
           </a:prstGeom>
           <a:solidFill>
-            <a:srgbClr val="FFB703"/>
+            <a:srgbClr val="2EC4B6"/>
           </a:solidFill>
           <a:ln>
             <a:noFill/>
@@ -7232,7 +7367,7 @@
               </a:lnSpc>
             </a:pPr>
             <a:r>
-              <a:rPr lang="ja-JP" altLang="en-US" sz="1050" b="1">
+              <a:rPr lang="ja-JP" altLang="en-US" sz="1200" b="1">
                 <a:solidFill>
                   <a:srgbClr val="FFFFFF"/>
                 </a:solidFill>
@@ -7240,21 +7375,21 @@
                 <a:ea typeface="Yu Gothic"/>
                 <a:cs typeface="Yu Gothic"/>
               </a:rPr>
-              <a:t>補助が使えない</a:t>
-            </a:r>
-          </a:p>
-        </p:txBody>
-      </p:sp>
-      <p:sp>
-        <p:nvSpPr>
-          <p:cNvPr id="10" name="TextBox 10"/>
-          <p:cNvSpPr txBox="1"/>
-          <p:nvPr/>
-        </p:nvSpPr>
-        <p:spPr>
-          <a:xfrm>
-            <a:off x="4724400" y="2793492"/>
-            <a:ext cx="2749296" cy="1005840"/>
+              <a:t>補助の型で</a:t>
+            </a:r>
+          </a:p>
+        </p:txBody>
+      </p:sp>
+      <p:sp>
+        <p:nvSpPr>
+          <p:cNvPr id="14" name="TextBox 14"/>
+          <p:cNvSpPr txBox="1"/>
+          <p:nvPr/>
+        </p:nvSpPr>
+        <p:spPr>
+          <a:xfrm>
+            <a:off x="6519672" y="2839212"/>
+            <a:ext cx="1851660" cy="1097280"/>
           </a:xfrm>
           <a:prstGeom prst="rect">
             <a:avLst/>
@@ -7267,11 +7402,11 @@
           <a:p>
             <a:pPr algn="l">
               <a:lnSpc>
-                <a:spcPct val="140000"/>
-              </a:lnSpc>
-            </a:pPr>
-            <a:r>
-              <a:rPr lang="ja-JP" altLang="en-US" sz="1900" b="1">
+                <a:spcPct val="135000"/>
+              </a:lnSpc>
+            </a:pPr>
+            <a:r>
+              <a:rPr lang="ja-JP" altLang="en-US" sz="2200" b="1">
                 <a:solidFill>
                   <a:srgbClr val="2B2D42"/>
                 </a:solidFill>
@@ -7279,17 +7414,38 @@
                 <a:ea typeface="Yu Gothic"/>
                 <a:cs typeface="Yu Gothic"/>
               </a:rPr>
-              <a:t>私が一度、</a:t>
-            </a:r>
-          </a:p>
-          <a:p>
-            <a:pPr algn="l">
-              <a:lnSpc>
-                <a:spcPct val="140000"/>
-              </a:lnSpc>
-            </a:pPr>
-            <a:r>
-              <a:rPr lang="ja-JP" altLang="en-US" sz="1900" b="1">
+              <a:t>変わること</a:t>
+            </a:r>
+          </a:p>
+        </p:txBody>
+      </p:sp>
+      <p:sp>
+        <p:nvSpPr>
+          <p:cNvPr id="15" name="TextBox 15"/>
+          <p:cNvSpPr txBox="1"/>
+          <p:nvPr/>
+        </p:nvSpPr>
+        <p:spPr>
+          <a:xfrm>
+            <a:off x="6519672" y="3982212"/>
+            <a:ext cx="1851660" cy="1645920"/>
+          </a:xfrm>
+          <a:prstGeom prst="rect">
+            <a:avLst/>
+          </a:prstGeom>
+          <a:noFill/>
+        </p:spPr>
+        <p:txBody>
+          <a:bodyPr wrap="square" lIns="0" tIns="0" rIns="0" bIns="0" anchor="t" rtlCol="0"/>
+          <a:lstStyle/>
+          <a:p>
+            <a:pPr algn="l">
+              <a:lnSpc>
+                <a:spcPct val="170000"/>
+              </a:lnSpc>
+            </a:pPr>
+            <a:r>
+              <a:rPr lang="ja-JP" altLang="en-US" sz="1350" b="0">
                 <a:solidFill>
                   <a:srgbClr val="2B2D42"/>
                 </a:solidFill>
@@ -7297,68 +7453,29 @@
                 <a:ea typeface="Yu Gothic"/>
                 <a:cs typeface="Yu Gothic"/>
               </a:rPr>
-              <a:t>ひとりで動く</a:t>
-            </a:r>
-          </a:p>
-        </p:txBody>
-      </p:sp>
-      <p:sp>
-        <p:nvSpPr>
-          <p:cNvPr id="11" name="TextBox 11"/>
-          <p:cNvSpPr txBox="1"/>
-          <p:nvPr/>
-        </p:nvSpPr>
-        <p:spPr>
-          <a:xfrm>
-            <a:off x="4724400" y="3845052"/>
-            <a:ext cx="2749296" cy="1691640"/>
-          </a:xfrm>
-          <a:prstGeom prst="rect">
-            <a:avLst/>
-          </a:prstGeom>
-          <a:noFill/>
-        </p:spPr>
-        <p:txBody>
-          <a:bodyPr wrap="square" lIns="0" tIns="0" rIns="0" bIns="0" anchor="t" rtlCol="0"/>
-          <a:lstStyle/>
-          <a:p>
-            <a:pPr algn="l">
-              <a:lnSpc>
-                <a:spcPct val="180000"/>
-              </a:lnSpc>
-            </a:pPr>
-            <a:r>
-              <a:rPr lang="ja-JP" altLang="en-US" sz="1250" b="0">
-                <a:solidFill>
-                  <a:srgbClr val="2B2D42"/>
-                </a:solidFill>
-                <a:latin typeface="Yu Gothic"/>
-                <a:ea typeface="Yu Gothic"/>
-                <a:cs typeface="Yu Gothic"/>
-              </a:rPr>
-              <a:t>二人で住むのに向かない条件なら、私が先にひとりで引っ越す。二人の家は補助なしで探す。</a:t>
-            </a:r>
-          </a:p>
-        </p:txBody>
-      </p:sp>
-      <p:sp>
-        <p:nvSpPr>
-          <p:cNvPr id="12" name="Shape 12"/>
-          <p:cNvSpPr/>
-          <p:nvPr/>
-        </p:nvSpPr>
-        <p:spPr>
-          <a:xfrm>
-            <a:off x="8022336" y="1924812"/>
-            <a:ext cx="3334512" cy="3931920"/>
+              <a:t>手当型なら私名義で家賃15〜16万。借り上げ社宅なら会社契約で審査なし。</a:t>
+            </a:r>
+          </a:p>
+        </p:txBody>
+      </p:sp>
+      <p:sp>
+        <p:nvSpPr>
+          <p:cNvPr id="16" name="Shape 16"/>
+          <p:cNvSpPr/>
+          <p:nvPr/>
+        </p:nvSpPr>
+        <p:spPr>
+          <a:xfrm>
+            <a:off x="8919972" y="1924812"/>
+            <a:ext cx="2436876" cy="3931920"/>
           </a:xfrm>
           <a:prstGeom prst="roundRect">
             <a:avLst>
-              <a:gd name="adj" fmla="val 3839"/>
+              <a:gd name="adj" fmla="val 5253"/>
             </a:avLst>
           </a:prstGeom>
           <a:solidFill>
-            <a:srgbClr val="D9F5F1"/>
+            <a:srgbClr val="DCE8FF"/>
           </a:solidFill>
           <a:ln>
             <a:noFill/>
@@ -7372,22 +7489,22 @@
       </p:sp>
       <p:sp>
         <p:nvSpPr>
-          <p:cNvPr id="13" name="Shape 13"/>
-          <p:cNvSpPr/>
-          <p:nvPr/>
-        </p:nvSpPr>
-        <p:spPr>
-          <a:xfrm>
-            <a:off x="8314944" y="2290572"/>
-            <a:ext cx="1371600" cy="292608"/>
+          <p:cNvPr id="17" name="Shape 17"/>
+          <p:cNvSpPr/>
+          <p:nvPr/>
+        </p:nvSpPr>
+        <p:spPr>
+          <a:xfrm>
+            <a:off x="9212580" y="2290572"/>
+            <a:ext cx="1508760" cy="329184"/>
           </a:xfrm>
           <a:prstGeom prst="roundRect">
             <a:avLst>
-              <a:gd name="adj" fmla="val 43750"/>
+              <a:gd name="adj" fmla="val 38888"/>
             </a:avLst>
           </a:prstGeom>
           <a:solidFill>
-            <a:srgbClr val="2EC4B6"/>
+            <a:srgbClr val="4D96FF"/>
           </a:solidFill>
           <a:ln>
             <a:noFill/>
@@ -7403,7 +7520,7 @@
               </a:lnSpc>
             </a:pPr>
             <a:r>
-              <a:rPr lang="ja-JP" altLang="en-US" sz="1050" b="1">
+              <a:rPr lang="ja-JP" altLang="en-US" sz="1200" b="1">
                 <a:solidFill>
                   <a:srgbClr val="FFFFFF"/>
                 </a:solidFill>
@@ -7418,14 +7535,14 @@
       </p:sp>
       <p:sp>
         <p:nvSpPr>
-          <p:cNvPr id="14" name="TextBox 14"/>
-          <p:cNvSpPr txBox="1"/>
-          <p:nvPr/>
-        </p:nvSpPr>
-        <p:spPr>
-          <a:xfrm>
-            <a:off x="8314944" y="2793492"/>
-            <a:ext cx="2749296" cy="1005840"/>
+          <p:cNvPr id="18" name="TextBox 18"/>
+          <p:cNvSpPr txBox="1"/>
+          <p:nvPr/>
+        </p:nvSpPr>
+        <p:spPr>
+          <a:xfrm>
+            <a:off x="9212580" y="2839212"/>
+            <a:ext cx="1851660" cy="1097280"/>
           </a:xfrm>
           <a:prstGeom prst="rect">
             <a:avLst/>
@@ -7438,11 +7555,11 @@
           <a:p>
             <a:pPr algn="l">
               <a:lnSpc>
-                <a:spcPct val="140000"/>
-              </a:lnSpc>
-            </a:pPr>
-            <a:r>
-              <a:rPr lang="ja-JP" altLang="en-US" sz="1900" b="1">
+                <a:spcPct val="135000"/>
+              </a:lnSpc>
+            </a:pPr>
+            <a:r>
+              <a:rPr lang="ja-JP" altLang="en-US" sz="2200" b="1">
                 <a:solidFill>
                   <a:srgbClr val="2B2D42"/>
                 </a:solidFill>
@@ -7450,17 +7567,38 @@
                 <a:ea typeface="Yu Gothic"/>
                 <a:cs typeface="Yu Gothic"/>
               </a:rPr>
-              <a:t>引っ越しは</a:t>
-            </a:r>
-          </a:p>
-          <a:p>
-            <a:pPr algn="l">
-              <a:lnSpc>
-                <a:spcPct val="140000"/>
-              </a:lnSpc>
-            </a:pPr>
-            <a:r>
-              <a:rPr lang="ja-JP" altLang="en-US" sz="1900" b="1">
+              <a:t>引っ越しは1回</a:t>
+            </a:r>
+          </a:p>
+        </p:txBody>
+      </p:sp>
+      <p:sp>
+        <p:nvSpPr>
+          <p:cNvPr id="19" name="TextBox 19"/>
+          <p:cNvSpPr txBox="1"/>
+          <p:nvPr/>
+        </p:nvSpPr>
+        <p:spPr>
+          <a:xfrm>
+            <a:off x="9212580" y="3982212"/>
+            <a:ext cx="1851660" cy="1645920"/>
+          </a:xfrm>
+          <a:prstGeom prst="rect">
+            <a:avLst/>
+          </a:prstGeom>
+          <a:noFill/>
+        </p:spPr>
+        <p:txBody>
+          <a:bodyPr wrap="square" lIns="0" tIns="0" rIns="0" bIns="0" anchor="t" rtlCol="0"/>
+          <a:lstStyle/>
+          <a:p>
+            <a:pPr algn="l">
+              <a:lnSpc>
+                <a:spcPct val="170000"/>
+              </a:lnSpc>
+            </a:pPr>
+            <a:r>
+              <a:rPr lang="ja-JP" altLang="en-US" sz="1350" b="0">
                 <a:solidFill>
                   <a:srgbClr val="2B2D42"/>
                 </a:solidFill>
@@ -7468,53 +7606,14 @@
                 <a:ea typeface="Yu Gothic"/>
                 <a:cs typeface="Yu Gothic"/>
               </a:rPr>
-              <a:t>1回にする</a:t>
-            </a:r>
-          </a:p>
-        </p:txBody>
-      </p:sp>
-      <p:sp>
-        <p:nvSpPr>
-          <p:cNvPr id="15" name="TextBox 15"/>
-          <p:cNvSpPr txBox="1"/>
-          <p:nvPr/>
-        </p:nvSpPr>
-        <p:spPr>
-          <a:xfrm>
-            <a:off x="8314944" y="3845052"/>
-            <a:ext cx="2749296" cy="1691640"/>
-          </a:xfrm>
-          <a:prstGeom prst="rect">
-            <a:avLst/>
-          </a:prstGeom>
-          <a:noFill/>
-        </p:spPr>
-        <p:txBody>
-          <a:bodyPr wrap="square" lIns="0" tIns="0" rIns="0" bIns="0" anchor="t" rtlCol="0"/>
-          <a:lstStyle/>
-          <a:p>
-            <a:pPr algn="l">
-              <a:lnSpc>
-                <a:spcPct val="180000"/>
-              </a:lnSpc>
-            </a:pPr>
-            <a:r>
-              <a:rPr lang="ja-JP" altLang="en-US" sz="1250" b="0">
-                <a:solidFill>
-                  <a:srgbClr val="2B2D42"/>
-                </a:solidFill>
-                <a:latin typeface="Yu Gothic"/>
-                <a:ea typeface="Yu Gothic"/>
-                <a:cs typeface="Yu Gothic"/>
-              </a:rPr>
-              <a:t>引っ越しは1回ごとに家賃4〜5か月分が飛ぶ。3回なら式が挙がる額。補助は一番長く住む家に使う。</a:t>
-            </a:r>
-          </a:p>
-        </p:txBody>
-      </p:sp>
-      <p:sp>
-        <p:nvSpPr>
-          <p:cNvPr id="16" name="TextBox 16"/>
+              <a:t>子どもが来ても住み替えない広さ。補助は一番長く住む家に使う。</a:t>
+            </a:r>
+          </a:p>
+        </p:txBody>
+      </p:sp>
+      <p:sp>
+        <p:nvSpPr>
+          <p:cNvPr id="20" name="TextBox 20"/>
           <p:cNvSpPr txBox="1"/>
           <p:nvPr/>
         </p:nvSpPr>
@@ -7538,7 +7637,7 @@
               </a:lnSpc>
             </a:pPr>
             <a:r>
-              <a:rPr lang="ja-JP" altLang="en-US" sz="900" b="0">
+              <a:rPr lang="ja-JP" altLang="en-US" sz="1000" b="0">
                 <a:solidFill>
                   <a:srgbClr val="B8B2A8"/>
                 </a:solidFill>
@@ -7553,7 +7652,7 @@
       </p:sp>
       <p:sp>
         <p:nvSpPr>
-          <p:cNvPr id="17" name="Shape 17"/>
+          <p:cNvPr id="21" name="Shape 21"/>
           <p:cNvSpPr/>
           <p:nvPr/>
         </p:nvSpPr>
@@ -7639,7 +7738,121 @@
         <p:spPr>
           <a:xfrm>
             <a:off x="841248" y="137160"/>
-            <a:ext cx="978408" cy="329184"/>
+            <a:ext cx="1152144" cy="384048"/>
+          </a:xfrm>
+          <a:prstGeom prst="roundRect">
+            <a:avLst>
+              <a:gd name="adj" fmla="val 33333"/>
+            </a:avLst>
+          </a:prstGeom>
+          <a:solidFill>
+            <a:srgbClr val="FF6B6B"/>
+          </a:solidFill>
+          <a:ln>
+            <a:noFill/>
+          </a:ln>
+        </p:spPr>
+        <p:txBody>
+          <a:bodyPr wrap="square" lIns="0" tIns="0" rIns="0" bIns="0" anchor="ctr" rtlCol="0"/>
+          <a:lstStyle/>
+          <a:p>
+            <a:pPr algn="ctr">
+              <a:lnSpc>
+                <a:spcPct val="145000"/>
+              </a:lnSpc>
+            </a:pPr>
+            <a:r>
+              <a:rPr lang="ja-JP" altLang="en-US" sz="1300" b="1">
+                <a:solidFill>
+                  <a:srgbClr val="FFFFFF"/>
+                </a:solidFill>
+                <a:latin typeface="Yu Gothic"/>
+                <a:ea typeface="Yu Gothic"/>
+                <a:cs typeface="Yu Gothic"/>
+              </a:rPr>
+              <a:t>生活費</a:t>
+            </a:r>
+          </a:p>
+        </p:txBody>
+      </p:sp>
+      <p:sp>
+        <p:nvSpPr>
+          <p:cNvPr id="3" name="TextBox 3"/>
+          <p:cNvSpPr txBox="1"/>
+          <p:nvPr/>
+        </p:nvSpPr>
+        <p:spPr>
+          <a:xfrm>
+            <a:off x="841248" y="640080"/>
+            <a:ext cx="10515600" cy="1005840"/>
+          </a:xfrm>
+          <a:prstGeom prst="rect">
+            <a:avLst/>
+          </a:prstGeom>
+          <a:noFill/>
+        </p:spPr>
+        <p:txBody>
+          <a:bodyPr wrap="square" lIns="0" tIns="0" rIns="0" bIns="0" anchor="t" rtlCol="0"/>
+          <a:lstStyle/>
+          <a:p>
+            <a:pPr algn="l">
+              <a:lnSpc>
+                <a:spcPct val="150000"/>
+              </a:lnSpc>
+            </a:pPr>
+            <a:r>
+              <a:rPr lang="ja-JP" altLang="en-US" sz="2700" b="1">
+                <a:solidFill>
+                  <a:srgbClr val="2B2D42"/>
+                </a:solidFill>
+                <a:latin typeface="Yu Gothic"/>
+                <a:ea typeface="Yu Gothic"/>
+                <a:cs typeface="Yu Gothic"/>
+              </a:rPr>
+              <a:t>二人の財布はひとつにして、見える化。削らないものだけ先に決める。</a:t>
+            </a:r>
+          </a:p>
+        </p:txBody>
+      </p:sp>
+      <p:sp>
+        <p:nvSpPr>
+          <p:cNvPr id="4" name="Shape 4"/>
+          <p:cNvSpPr/>
+          <p:nvPr/>
+        </p:nvSpPr>
+        <p:spPr>
+          <a:xfrm>
+            <a:off x="841248" y="1924812"/>
+            <a:ext cx="2436876" cy="3931920"/>
+          </a:xfrm>
+          <a:prstGeom prst="roundRect">
+            <a:avLst>
+              <a:gd name="adj" fmla="val 5253"/>
+            </a:avLst>
+          </a:prstGeom>
+          <a:solidFill>
+            <a:srgbClr val="FFE3E0"/>
+          </a:solidFill>
+          <a:ln>
+            <a:noFill/>
+          </a:ln>
+        </p:spPr>
+        <p:txBody>
+          <a:bodyPr wrap="square" lIns="0" tIns="0" rIns="0" bIns="0" anchor="ctr" rtlCol="0"/>
+          <a:lstStyle/>
+          <a:p/>
+        </p:txBody>
+      </p:sp>
+      <p:sp>
+        <p:nvSpPr>
+          <p:cNvPr id="5" name="Shape 5"/>
+          <p:cNvSpPr/>
+          <p:nvPr/>
+        </p:nvSpPr>
+        <p:spPr>
+          <a:xfrm>
+            <a:off x="1133856" y="2290572"/>
+            <a:ext cx="1307592" cy="329184"/>
           </a:xfrm>
           <a:prstGeom prst="roundRect">
             <a:avLst>
@@ -7663,7 +7876,7 @@
               </a:lnSpc>
             </a:pPr>
             <a:r>
-              <a:rPr lang="ja-JP" altLang="en-US" sz="1100" b="1">
+              <a:rPr lang="ja-JP" altLang="en-US" sz="1200" b="1">
                 <a:solidFill>
                   <a:srgbClr val="FFFFFF"/>
                 </a:solidFill>
@@ -7671,21 +7884,21 @@
                 <a:ea typeface="Yu Gothic"/>
                 <a:cs typeface="Yu Gothic"/>
               </a:rPr>
-              <a:t>生活費</a:t>
-            </a:r>
-          </a:p>
-        </p:txBody>
-      </p:sp>
-      <p:sp>
-        <p:nvSpPr>
-          <p:cNvPr id="3" name="TextBox 3"/>
-          <p:cNvSpPr txBox="1"/>
-          <p:nvPr/>
-        </p:nvSpPr>
-        <p:spPr>
-          <a:xfrm>
-            <a:off x="841248" y="612648"/>
-            <a:ext cx="10515600" cy="1005840"/>
+              <a:t>🏠 家賃</a:t>
+            </a:r>
+          </a:p>
+        </p:txBody>
+      </p:sp>
+      <p:sp>
+        <p:nvSpPr>
+          <p:cNvPr id="6" name="TextBox 6"/>
+          <p:cNvSpPr txBox="1"/>
+          <p:nvPr/>
+        </p:nvSpPr>
+        <p:spPr>
+          <a:xfrm>
+            <a:off x="1133856" y="2839212"/>
+            <a:ext cx="1851660" cy="1097280"/>
           </a:xfrm>
           <a:prstGeom prst="rect">
             <a:avLst/>
@@ -7698,7 +7911,7 @@
           <a:p>
             <a:pPr algn="l">
               <a:lnSpc>
-                <a:spcPct val="160000"/>
+                <a:spcPct val="135000"/>
               </a:lnSpc>
             </a:pPr>
             <a:r>
@@ -7710,20 +7923,77 @@
                 <a:ea typeface="Yu Gothic"/>
                 <a:cs typeface="Yu Gothic"/>
               </a:rPr>
-              <a:t>二人の財布はひとつにして、見える化。削らないものだけ、先に決める。</a:t>
-            </a:r>
-          </a:p>
-        </p:txBody>
-      </p:sp>
-      <p:sp>
-        <p:nvSpPr>
-          <p:cNvPr id="4" name="Shape 4"/>
-          <p:cNvSpPr/>
-          <p:nvPr/>
-        </p:nvSpPr>
-        <p:spPr>
-          <a:xfrm>
-            <a:off x="841248" y="1924812"/>
+              <a:t>月15〜20万、</a:t>
+            </a:r>
+          </a:p>
+          <a:p>
+            <a:pPr algn="l">
+              <a:lnSpc>
+                <a:spcPct val="135000"/>
+              </a:lnSpc>
+            </a:pPr>
+            <a:r>
+              <a:rPr lang="ja-JP" altLang="en-US" sz="2200" b="1">
+                <a:solidFill>
+                  <a:srgbClr val="2B2D42"/>
+                </a:solidFill>
+                <a:latin typeface="Yu Gothic"/>
+                <a:ea typeface="Yu Gothic"/>
+                <a:cs typeface="Yu Gothic"/>
+              </a:rPr>
+              <a:t>折半</a:t>
+            </a:r>
+          </a:p>
+        </p:txBody>
+      </p:sp>
+      <p:sp>
+        <p:nvSpPr>
+          <p:cNvPr id="7" name="TextBox 7"/>
+          <p:cNvSpPr txBox="1"/>
+          <p:nvPr/>
+        </p:nvSpPr>
+        <p:spPr>
+          <a:xfrm>
+            <a:off x="1133856" y="3982212"/>
+            <a:ext cx="1851660" cy="1645920"/>
+          </a:xfrm>
+          <a:prstGeom prst="rect">
+            <a:avLst/>
+          </a:prstGeom>
+          <a:noFill/>
+        </p:spPr>
+        <p:txBody>
+          <a:bodyPr wrap="square" lIns="0" tIns="0" rIns="0" bIns="0" anchor="t" rtlCol="0"/>
+          <a:lstStyle/>
+          <a:p>
+            <a:pPr algn="l">
+              <a:lnSpc>
+                <a:spcPct val="170000"/>
+              </a:lnSpc>
+            </a:pPr>
+            <a:r>
+              <a:rPr lang="ja-JP" altLang="en-US" sz="1350" b="0">
+                <a:solidFill>
+                  <a:srgbClr val="2B2D42"/>
+                </a:solidFill>
+                <a:latin typeface="Yu Gothic"/>
+                <a:ea typeface="Yu Gothic"/>
+                <a:cs typeface="Yu Gothic"/>
+              </a:rPr>
+              <a:t>私の分は上限10万。名義は私、共同口座から引き落とし。20万なら入籍後に収入合算。</a:t>
+            </a:r>
+          </a:p>
+        </p:txBody>
+      </p:sp>
+      <p:sp>
+        <p:nvSpPr>
+          <p:cNvPr id="8" name="Shape 8"/>
+          <p:cNvSpPr/>
+          <p:nvPr/>
+        </p:nvSpPr>
+        <p:spPr>
+          <a:xfrm>
+            <a:off x="3534156" y="1924812"/>
             <a:ext cx="2436876" cy="3931920"/>
           </a:xfrm>
           <a:prstGeom prst="roundRect">
@@ -7732,7 +8002,7 @@
             </a:avLst>
           </a:prstGeom>
           <a:solidFill>
-            <a:srgbClr val="FFE3E0"/>
+            <a:srgbClr val="FFF1C9"/>
           </a:solidFill>
           <a:ln>
             <a:noFill/>
@@ -7746,22 +8016,22 @@
       </p:sp>
       <p:sp>
         <p:nvSpPr>
-          <p:cNvPr id="5" name="Shape 5"/>
-          <p:cNvSpPr/>
-          <p:nvPr/>
-        </p:nvSpPr>
-        <p:spPr>
-          <a:xfrm>
-            <a:off x="1133856" y="2290572"/>
-            <a:ext cx="1188720" cy="292608"/>
+          <p:cNvPr id="9" name="Shape 9"/>
+          <p:cNvSpPr/>
+          <p:nvPr/>
+        </p:nvSpPr>
+        <p:spPr>
+          <a:xfrm>
+            <a:off x="3826764" y="2290572"/>
+            <a:ext cx="1709928" cy="329184"/>
           </a:xfrm>
           <a:prstGeom prst="roundRect">
             <a:avLst>
-              <a:gd name="adj" fmla="val 43750"/>
+              <a:gd name="adj" fmla="val 38888"/>
             </a:avLst>
           </a:prstGeom>
           <a:solidFill>
-            <a:srgbClr val="FF6B6B"/>
+            <a:srgbClr val="FFB703"/>
           </a:solidFill>
           <a:ln>
             <a:noFill/>
@@ -7777,7 +8047,7 @@
               </a:lnSpc>
             </a:pPr>
             <a:r>
-              <a:rPr lang="ja-JP" altLang="en-US" sz="1050" b="1">
+              <a:rPr lang="ja-JP" altLang="en-US" sz="1200" b="1">
                 <a:solidFill>
                   <a:srgbClr val="FFFFFF"/>
                 </a:solidFill>
@@ -7785,21 +8055,21 @@
                 <a:ea typeface="Yu Gothic"/>
                 <a:cs typeface="Yu Gothic"/>
               </a:rPr>
-              <a:t>🏠 家賃</a:t>
-            </a:r>
-          </a:p>
-        </p:txBody>
-      </p:sp>
-      <p:sp>
-        <p:nvSpPr>
-          <p:cNvPr id="6" name="TextBox 6"/>
-          <p:cNvSpPr txBox="1"/>
-          <p:nvPr/>
-        </p:nvSpPr>
-        <p:spPr>
-          <a:xfrm>
-            <a:off x="1133856" y="2793492"/>
-            <a:ext cx="1851660" cy="1005840"/>
+              <a:t>🏦 共同口座</a:t>
+            </a:r>
+          </a:p>
+        </p:txBody>
+      </p:sp>
+      <p:sp>
+        <p:nvSpPr>
+          <p:cNvPr id="10" name="TextBox 10"/>
+          <p:cNvSpPr txBox="1"/>
+          <p:nvPr/>
+        </p:nvSpPr>
+        <p:spPr>
+          <a:xfrm>
+            <a:off x="3826764" y="2839212"/>
+            <a:ext cx="1851660" cy="1097280"/>
           </a:xfrm>
           <a:prstGeom prst="rect">
             <a:avLst/>
@@ -7812,11 +8082,11 @@
           <a:p>
             <a:pPr algn="l">
               <a:lnSpc>
-                <a:spcPct val="140000"/>
-              </a:lnSpc>
-            </a:pPr>
-            <a:r>
-              <a:rPr lang="ja-JP" altLang="en-US" sz="1900" b="1">
+                <a:spcPct val="135000"/>
+              </a:lnSpc>
+            </a:pPr>
+            <a:r>
+              <a:rPr lang="ja-JP" altLang="en-US" sz="2200" b="1">
                 <a:solidFill>
                   <a:srgbClr val="2B2D42"/>
                 </a:solidFill>
@@ -7824,17 +8094,17 @@
                 <a:ea typeface="Yu Gothic"/>
                 <a:cs typeface="Yu Gothic"/>
               </a:rPr>
-              <a:t>二人の家は、</a:t>
-            </a:r>
-          </a:p>
-          <a:p>
-            <a:pPr algn="l">
-              <a:lnSpc>
-                <a:spcPct val="140000"/>
-              </a:lnSpc>
-            </a:pPr>
-            <a:r>
-              <a:rPr lang="ja-JP" altLang="en-US" sz="1900" b="1">
+              <a:t>お金はぜんぶ、</a:t>
+            </a:r>
+          </a:p>
+          <a:p>
+            <a:pPr algn="l">
+              <a:lnSpc>
+                <a:spcPct val="135000"/>
+              </a:lnSpc>
+            </a:pPr>
+            <a:r>
+              <a:rPr lang="ja-JP" altLang="en-US" sz="2200" b="1">
                 <a:solidFill>
                   <a:srgbClr val="2B2D42"/>
                 </a:solidFill>
@@ -7842,21 +8112,21 @@
                 <a:ea typeface="Yu Gothic"/>
                 <a:cs typeface="Yu Gothic"/>
               </a:rPr>
-              <a:t>月20万まで</a:t>
-            </a:r>
-          </a:p>
-        </p:txBody>
-      </p:sp>
-      <p:sp>
-        <p:nvSpPr>
-          <p:cNvPr id="7" name="TextBox 7"/>
-          <p:cNvSpPr txBox="1"/>
-          <p:nvPr/>
-        </p:nvSpPr>
-        <p:spPr>
-          <a:xfrm>
-            <a:off x="1133856" y="3845052"/>
-            <a:ext cx="1851660" cy="1691640"/>
+              <a:t>ここから</a:t>
+            </a:r>
+          </a:p>
+        </p:txBody>
+      </p:sp>
+      <p:sp>
+        <p:nvSpPr>
+          <p:cNvPr id="11" name="TextBox 11"/>
+          <p:cNvSpPr txBox="1"/>
+          <p:nvPr/>
+        </p:nvSpPr>
+        <p:spPr>
+          <a:xfrm>
+            <a:off x="3826764" y="3982212"/>
+            <a:ext cx="1851660" cy="1645920"/>
           </a:xfrm>
           <a:prstGeom prst="rect">
             <a:avLst/>
@@ -7869,11 +8139,11 @@
           <a:p>
             <a:pPr algn="l">
               <a:lnSpc>
-                <a:spcPct val="180000"/>
-              </a:lnSpc>
-            </a:pPr>
-            <a:r>
-              <a:rPr lang="ja-JP" altLang="en-US" sz="1250" b="0">
+                <a:spcPct val="170000"/>
+              </a:lnSpc>
+            </a:pPr>
+            <a:r>
+              <a:rPr lang="ja-JP" altLang="en-US" sz="1350" b="0">
                 <a:solidFill>
                   <a:srgbClr val="2B2D42"/>
                 </a:solidFill>
@@ -7881,20 +8151,20 @@
                 <a:ea typeface="Yu Gothic"/>
                 <a:cs typeface="Yu Gothic"/>
               </a:rPr>
-              <a:t>折半。私の分は上限10万、目標9万。給与の形が分かったら確定。</a:t>
-            </a:r>
-          </a:p>
-        </p:txBody>
-      </p:sp>
-      <p:sp>
-        <p:nvSpPr>
-          <p:cNvPr id="8" name="Shape 8"/>
-          <p:cNvSpPr/>
-          <p:nvPr/>
-        </p:nvSpPr>
-        <p:spPr>
-          <a:xfrm>
-            <a:off x="3534156" y="1924812"/>
+              <a:t>私名義で、入居と同時に開設。年に1回だけ棚卸し。お小遣いには干渉しない。</a:t>
+            </a:r>
+          </a:p>
+        </p:txBody>
+      </p:sp>
+      <p:sp>
+        <p:nvSpPr>
+          <p:cNvPr id="12" name="Shape 12"/>
+          <p:cNvSpPr/>
+          <p:nvPr/>
+        </p:nvSpPr>
+        <p:spPr>
+          <a:xfrm>
+            <a:off x="6227064" y="1924812"/>
             <a:ext cx="2436876" cy="3931920"/>
           </a:xfrm>
           <a:prstGeom prst="roundRect">
@@ -7903,7 +8173,7 @@
             </a:avLst>
           </a:prstGeom>
           <a:solidFill>
-            <a:srgbClr val="FFF1C9"/>
+            <a:srgbClr val="D9F5F1"/>
           </a:solidFill>
           <a:ln>
             <a:noFill/>
@@ -7917,22 +8187,22 @@
       </p:sp>
       <p:sp>
         <p:nvSpPr>
-          <p:cNvPr id="9" name="Shape 9"/>
-          <p:cNvSpPr/>
-          <p:nvPr/>
-        </p:nvSpPr>
-        <p:spPr>
-          <a:xfrm>
-            <a:off x="3826764" y="2290572"/>
-            <a:ext cx="1554480" cy="292608"/>
+          <p:cNvPr id="13" name="Shape 13"/>
+          <p:cNvSpPr/>
+          <p:nvPr/>
+        </p:nvSpPr>
+        <p:spPr>
+          <a:xfrm>
+            <a:off x="6519672" y="2290572"/>
+            <a:ext cx="2112264" cy="329184"/>
           </a:xfrm>
           <a:prstGeom prst="roundRect">
             <a:avLst>
-              <a:gd name="adj" fmla="val 43750"/>
+              <a:gd name="adj" fmla="val 38888"/>
             </a:avLst>
           </a:prstGeom>
           <a:solidFill>
-            <a:srgbClr val="FFB703"/>
+            <a:srgbClr val="2EC4B6"/>
           </a:solidFill>
           <a:ln>
             <a:noFill/>
@@ -7948,7 +8218,7 @@
               </a:lnSpc>
             </a:pPr>
             <a:r>
-              <a:rPr lang="ja-JP" altLang="en-US" sz="1050" b="1">
+              <a:rPr lang="ja-JP" altLang="en-US" sz="1200" b="1">
                 <a:solidFill>
                   <a:srgbClr val="FFFFFF"/>
                 </a:solidFill>
@@ -7956,21 +8226,21 @@
                 <a:ea typeface="Yu Gothic"/>
                 <a:cs typeface="Yu Gothic"/>
               </a:rPr>
-              <a:t>🏦 共同口座</a:t>
-            </a:r>
-          </a:p>
-        </p:txBody>
-      </p:sp>
-      <p:sp>
-        <p:nvSpPr>
-          <p:cNvPr id="10" name="TextBox 10"/>
-          <p:cNvSpPr txBox="1"/>
-          <p:nvPr/>
-        </p:nvSpPr>
-        <p:spPr>
-          <a:xfrm>
-            <a:off x="3826764" y="2793492"/>
-            <a:ext cx="1851660" cy="1005840"/>
+              <a:t>📸 削らないもの</a:t>
+            </a:r>
+          </a:p>
+        </p:txBody>
+      </p:sp>
+      <p:sp>
+        <p:nvSpPr>
+          <p:cNvPr id="14" name="TextBox 14"/>
+          <p:cNvSpPr txBox="1"/>
+          <p:nvPr/>
+        </p:nvSpPr>
+        <p:spPr>
+          <a:xfrm>
+            <a:off x="6519672" y="2839212"/>
+            <a:ext cx="1851660" cy="1097280"/>
           </a:xfrm>
           <a:prstGeom prst="rect">
             <a:avLst/>
@@ -7983,11 +8253,11 @@
           <a:p>
             <a:pPr algn="l">
               <a:lnSpc>
-                <a:spcPct val="140000"/>
-              </a:lnSpc>
-            </a:pPr>
-            <a:r>
-              <a:rPr lang="ja-JP" altLang="en-US" sz="1900" b="1">
+                <a:spcPct val="135000"/>
+              </a:lnSpc>
+            </a:pPr>
+            <a:r>
+              <a:rPr lang="ja-JP" altLang="en-US" sz="2200" b="1">
                 <a:solidFill>
                   <a:srgbClr val="2B2D42"/>
                 </a:solidFill>
@@ -7995,17 +8265,17 @@
                 <a:ea typeface="Yu Gothic"/>
                 <a:cs typeface="Yu Gothic"/>
               </a:rPr>
-              <a:t>生活費と貯金は、</a:t>
-            </a:r>
-          </a:p>
-          <a:p>
-            <a:pPr algn="l">
-              <a:lnSpc>
-                <a:spcPct val="140000"/>
-              </a:lnSpc>
-            </a:pPr>
-            <a:r>
-              <a:rPr lang="ja-JP" altLang="en-US" sz="1900" b="1">
+              <a:t>写真と、</a:t>
+            </a:r>
+          </a:p>
+          <a:p>
+            <a:pPr algn="l">
+              <a:lnSpc>
+                <a:spcPct val="135000"/>
+              </a:lnSpc>
+            </a:pPr>
+            <a:r>
+              <a:rPr lang="ja-JP" altLang="en-US" sz="2200" b="1">
                 <a:solidFill>
                   <a:srgbClr val="2B2D42"/>
                 </a:solidFill>
@@ -8013,21 +8283,21 @@
                 <a:ea typeface="Yu Gothic"/>
                 <a:cs typeface="Yu Gothic"/>
               </a:rPr>
-              <a:t>ここから</a:t>
-            </a:r>
-          </a:p>
-        </p:txBody>
-      </p:sp>
-      <p:sp>
-        <p:nvSpPr>
-          <p:cNvPr id="11" name="TextBox 11"/>
-          <p:cNvSpPr txBox="1"/>
-          <p:nvPr/>
-        </p:nvSpPr>
-        <p:spPr>
-          <a:xfrm>
-            <a:off x="3826764" y="3845052"/>
-            <a:ext cx="1851660" cy="1691640"/>
+              <a:t>新婚旅行</a:t>
+            </a:r>
+          </a:p>
+        </p:txBody>
+      </p:sp>
+      <p:sp>
+        <p:nvSpPr>
+          <p:cNvPr id="15" name="TextBox 15"/>
+          <p:cNvSpPr txBox="1"/>
+          <p:nvPr/>
+        </p:nvSpPr>
+        <p:spPr>
+          <a:xfrm>
+            <a:off x="6519672" y="3982212"/>
+            <a:ext cx="1851660" cy="1645920"/>
           </a:xfrm>
           <a:prstGeom prst="rect">
             <a:avLst/>
@@ -8040,11 +8310,11 @@
           <a:p>
             <a:pPr algn="l">
               <a:lnSpc>
-                <a:spcPct val="180000"/>
-              </a:lnSpc>
-            </a:pPr>
-            <a:r>
-              <a:rPr lang="ja-JP" altLang="en-US" sz="1250" b="0">
+                <a:spcPct val="170000"/>
+              </a:lnSpc>
+            </a:pPr>
+            <a:r>
+              <a:rPr lang="ja-JP" altLang="en-US" sz="1350" b="0">
                 <a:solidFill>
                   <a:srgbClr val="2B2D42"/>
                 </a:solidFill>
@@ -8052,20 +8322,20 @@
                 <a:ea typeface="Yu Gothic"/>
                 <a:cs typeface="Yu Gothic"/>
               </a:rPr>
-              <a:t>二人の家と同時に開設。年に1回だけ棚卸し。お小遣いには干渉しない。</a:t>
-            </a:r>
-          </a:p>
-        </p:txBody>
-      </p:sp>
-      <p:sp>
-        <p:nvSpPr>
-          <p:cNvPr id="12" name="Shape 12"/>
-          <p:cNvSpPr/>
-          <p:nvPr/>
-        </p:nvSpPr>
-        <p:spPr>
-          <a:xfrm>
-            <a:off x="6227064" y="1924812"/>
+              <a:t>収入が増える分から、月に決めた額を積む。出産の費用もここから。</a:t>
+            </a:r>
+          </a:p>
+        </p:txBody>
+      </p:sp>
+      <p:sp>
+        <p:nvSpPr>
+          <p:cNvPr id="16" name="Shape 16"/>
+          <p:cNvSpPr/>
+          <p:nvPr/>
+        </p:nvSpPr>
+        <p:spPr>
+          <a:xfrm>
+            <a:off x="8919972" y="1924812"/>
             <a:ext cx="2436876" cy="3931920"/>
           </a:xfrm>
           <a:prstGeom prst="roundRect">
@@ -8074,7 +8344,7 @@
             </a:avLst>
           </a:prstGeom>
           <a:solidFill>
-            <a:srgbClr val="D9F5F1"/>
+            <a:srgbClr val="DCE8FF"/>
           </a:solidFill>
           <a:ln>
             <a:noFill/>
@@ -8088,22 +8358,22 @@
       </p:sp>
       <p:sp>
         <p:nvSpPr>
-          <p:cNvPr id="13" name="Shape 13"/>
-          <p:cNvSpPr/>
-          <p:nvPr/>
-        </p:nvSpPr>
-        <p:spPr>
-          <a:xfrm>
-            <a:off x="6519672" y="2290572"/>
-            <a:ext cx="1920240" cy="292608"/>
+          <p:cNvPr id="17" name="Shape 17"/>
+          <p:cNvSpPr/>
+          <p:nvPr/>
+        </p:nvSpPr>
+        <p:spPr>
+          <a:xfrm>
+            <a:off x="9212580" y="2290572"/>
+            <a:ext cx="1508760" cy="329184"/>
           </a:xfrm>
           <a:prstGeom prst="roundRect">
             <a:avLst>
-              <a:gd name="adj" fmla="val 43750"/>
+              <a:gd name="adj" fmla="val 38888"/>
             </a:avLst>
           </a:prstGeom>
           <a:solidFill>
-            <a:srgbClr val="2EC4B6"/>
+            <a:srgbClr val="4D96FF"/>
           </a:solidFill>
           <a:ln>
             <a:noFill/>
@@ -8119,7 +8389,7 @@
               </a:lnSpc>
             </a:pPr>
             <a:r>
-              <a:rPr lang="ja-JP" altLang="en-US" sz="1050" b="1">
+              <a:rPr lang="ja-JP" altLang="en-US" sz="1200" b="1">
                 <a:solidFill>
                   <a:srgbClr val="FFFFFF"/>
                 </a:solidFill>
@@ -8127,21 +8397,21 @@
                 <a:ea typeface="Yu Gothic"/>
                 <a:cs typeface="Yu Gothic"/>
               </a:rPr>
-              <a:t>📸 削らないもの</a:t>
-            </a:r>
-          </a:p>
-        </p:txBody>
-      </p:sp>
-      <p:sp>
-        <p:nvSpPr>
-          <p:cNvPr id="14" name="TextBox 14"/>
-          <p:cNvSpPr txBox="1"/>
-          <p:nvPr/>
-        </p:nvSpPr>
-        <p:spPr>
-          <a:xfrm>
-            <a:off x="6519672" y="2793492"/>
-            <a:ext cx="1851660" cy="1005840"/>
+              <a:t>💍 後回し</a:t>
+            </a:r>
+          </a:p>
+        </p:txBody>
+      </p:sp>
+      <p:sp>
+        <p:nvSpPr>
+          <p:cNvPr id="18" name="TextBox 18"/>
+          <p:cNvSpPr txBox="1"/>
+          <p:nvPr/>
+        </p:nvSpPr>
+        <p:spPr>
+          <a:xfrm>
+            <a:off x="9212580" y="2839212"/>
+            <a:ext cx="1851660" cy="1097280"/>
           </a:xfrm>
           <a:prstGeom prst="rect">
             <a:avLst/>
@@ -8154,11 +8424,11 @@
           <a:p>
             <a:pPr algn="l">
               <a:lnSpc>
-                <a:spcPct val="140000"/>
-              </a:lnSpc>
-            </a:pPr>
-            <a:r>
-              <a:rPr lang="ja-JP" altLang="en-US" sz="1900" b="1">
+                <a:spcPct val="135000"/>
+              </a:lnSpc>
+            </a:pPr>
+            <a:r>
+              <a:rPr lang="ja-JP" altLang="en-US" sz="2200" b="1">
                 <a:solidFill>
                   <a:srgbClr val="2B2D42"/>
                 </a:solidFill>
@@ -8166,17 +8436,17 @@
                 <a:ea typeface="Yu Gothic"/>
                 <a:cs typeface="Yu Gothic"/>
               </a:rPr>
-              <a:t>写真と、</a:t>
-            </a:r>
-          </a:p>
-          <a:p>
-            <a:pPr algn="l">
-              <a:lnSpc>
-                <a:spcPct val="140000"/>
-              </a:lnSpc>
-            </a:pPr>
-            <a:r>
-              <a:rPr lang="ja-JP" altLang="en-US" sz="1900" b="1">
+              <a:t>式と、</a:t>
+            </a:r>
+          </a:p>
+          <a:p>
+            <a:pPr algn="l">
+              <a:lnSpc>
+                <a:spcPct val="135000"/>
+              </a:lnSpc>
+            </a:pPr>
+            <a:r>
+              <a:rPr lang="ja-JP" altLang="en-US" sz="2200" b="1">
                 <a:solidFill>
                   <a:srgbClr val="2B2D42"/>
                 </a:solidFill>
@@ -8184,21 +8454,21 @@
                 <a:ea typeface="Yu Gothic"/>
                 <a:cs typeface="Yu Gothic"/>
               </a:rPr>
-              <a:t>新婚旅行</a:t>
-            </a:r>
-          </a:p>
-        </p:txBody>
-      </p:sp>
-      <p:sp>
-        <p:nvSpPr>
-          <p:cNvPr id="15" name="TextBox 15"/>
-          <p:cNvSpPr txBox="1"/>
-          <p:nvPr/>
-        </p:nvSpPr>
-        <p:spPr>
-          <a:xfrm>
-            <a:off x="6519672" y="3845052"/>
-            <a:ext cx="1851660" cy="1691640"/>
+              <a:t>指輪</a:t>
+            </a:r>
+          </a:p>
+        </p:txBody>
+      </p:sp>
+      <p:sp>
+        <p:nvSpPr>
+          <p:cNvPr id="19" name="TextBox 19"/>
+          <p:cNvSpPr txBox="1"/>
+          <p:nvPr/>
+        </p:nvSpPr>
+        <p:spPr>
+          <a:xfrm>
+            <a:off x="9212580" y="3982212"/>
+            <a:ext cx="1851660" cy="1645920"/>
           </a:xfrm>
           <a:prstGeom prst="rect">
             <a:avLst/>
@@ -8211,182 +8481,11 @@
           <a:p>
             <a:pPr algn="l">
               <a:lnSpc>
-                <a:spcPct val="180000"/>
-              </a:lnSpc>
-            </a:pPr>
-            <a:r>
-              <a:rPr lang="ja-JP" altLang="en-US" sz="1250" b="0">
-                <a:solidFill>
-                  <a:srgbClr val="2B2D42"/>
-                </a:solidFill>
-                <a:latin typeface="Yu Gothic"/>
-                <a:ea typeface="Yu Gothic"/>
-                <a:cs typeface="Yu Gothic"/>
-              </a:rPr>
-              <a:t>収入が増える分から、月に決めた額を積む。出産の費用もここから。</a:t>
-            </a:r>
-          </a:p>
-        </p:txBody>
-      </p:sp>
-      <p:sp>
-        <p:nvSpPr>
-          <p:cNvPr id="16" name="Shape 16"/>
-          <p:cNvSpPr/>
-          <p:nvPr/>
-        </p:nvSpPr>
-        <p:spPr>
-          <a:xfrm>
-            <a:off x="8919972" y="1924812"/>
-            <a:ext cx="2436876" cy="3931920"/>
-          </a:xfrm>
-          <a:prstGeom prst="roundRect">
-            <a:avLst>
-              <a:gd name="adj" fmla="val 5253"/>
-            </a:avLst>
-          </a:prstGeom>
-          <a:solidFill>
-            <a:srgbClr val="DCE8FF"/>
-          </a:solidFill>
-          <a:ln>
-            <a:noFill/>
-          </a:ln>
-        </p:spPr>
-        <p:txBody>
-          <a:bodyPr wrap="square" lIns="0" tIns="0" rIns="0" bIns="0" anchor="ctr" rtlCol="0"/>
-          <a:lstStyle/>
-          <a:p/>
-        </p:txBody>
-      </p:sp>
-      <p:sp>
-        <p:nvSpPr>
-          <p:cNvPr id="17" name="Shape 17"/>
-          <p:cNvSpPr/>
-          <p:nvPr/>
-        </p:nvSpPr>
-        <p:spPr>
-          <a:xfrm>
-            <a:off x="9212580" y="2290572"/>
-            <a:ext cx="1371600" cy="292608"/>
-          </a:xfrm>
-          <a:prstGeom prst="roundRect">
-            <a:avLst>
-              <a:gd name="adj" fmla="val 43750"/>
-            </a:avLst>
-          </a:prstGeom>
-          <a:solidFill>
-            <a:srgbClr val="4D96FF"/>
-          </a:solidFill>
-          <a:ln>
-            <a:noFill/>
-          </a:ln>
-        </p:spPr>
-        <p:txBody>
-          <a:bodyPr wrap="square" lIns="0" tIns="0" rIns="0" bIns="0" anchor="ctr" rtlCol="0"/>
-          <a:lstStyle/>
-          <a:p>
-            <a:pPr algn="ctr">
-              <a:lnSpc>
-                <a:spcPct val="145000"/>
-              </a:lnSpc>
-            </a:pPr>
-            <a:r>
-              <a:rPr lang="ja-JP" altLang="en-US" sz="1050" b="1">
-                <a:solidFill>
-                  <a:srgbClr val="FFFFFF"/>
-                </a:solidFill>
-                <a:latin typeface="Yu Gothic"/>
-                <a:ea typeface="Yu Gothic"/>
-                <a:cs typeface="Yu Gothic"/>
-              </a:rPr>
-              <a:t>💍 後回し</a:t>
-            </a:r>
-          </a:p>
-        </p:txBody>
-      </p:sp>
-      <p:sp>
-        <p:nvSpPr>
-          <p:cNvPr id="18" name="TextBox 18"/>
-          <p:cNvSpPr txBox="1"/>
-          <p:nvPr/>
-        </p:nvSpPr>
-        <p:spPr>
-          <a:xfrm>
-            <a:off x="9212580" y="2793492"/>
-            <a:ext cx="1851660" cy="1005840"/>
-          </a:xfrm>
-          <a:prstGeom prst="rect">
-            <a:avLst/>
-          </a:prstGeom>
-          <a:noFill/>
-        </p:spPr>
-        <p:txBody>
-          <a:bodyPr wrap="square" lIns="0" tIns="0" rIns="0" bIns="0" anchor="t" rtlCol="0"/>
-          <a:lstStyle/>
-          <a:p>
-            <a:pPr algn="l">
-              <a:lnSpc>
-                <a:spcPct val="140000"/>
-              </a:lnSpc>
-            </a:pPr>
-            <a:r>
-              <a:rPr lang="ja-JP" altLang="en-US" sz="1900" b="1">
-                <a:solidFill>
-                  <a:srgbClr val="2B2D42"/>
-                </a:solidFill>
-                <a:latin typeface="Yu Gothic"/>
-                <a:ea typeface="Yu Gothic"/>
-                <a:cs typeface="Yu Gothic"/>
-              </a:rPr>
-              <a:t>式と、</a:t>
-            </a:r>
-          </a:p>
-          <a:p>
-            <a:pPr algn="l">
-              <a:lnSpc>
-                <a:spcPct val="140000"/>
-              </a:lnSpc>
-            </a:pPr>
-            <a:r>
-              <a:rPr lang="ja-JP" altLang="en-US" sz="1900" b="1">
-                <a:solidFill>
-                  <a:srgbClr val="2B2D42"/>
-                </a:solidFill>
-                <a:latin typeface="Yu Gothic"/>
-                <a:ea typeface="Yu Gothic"/>
-                <a:cs typeface="Yu Gothic"/>
-              </a:rPr>
-              <a:t>指輪</a:t>
-            </a:r>
-          </a:p>
-        </p:txBody>
-      </p:sp>
-      <p:sp>
-        <p:nvSpPr>
-          <p:cNvPr id="19" name="TextBox 19"/>
-          <p:cNvSpPr txBox="1"/>
-          <p:nvPr/>
-        </p:nvSpPr>
-        <p:spPr>
-          <a:xfrm>
-            <a:off x="9212580" y="3845052"/>
-            <a:ext cx="1851660" cy="1691640"/>
-          </a:xfrm>
-          <a:prstGeom prst="rect">
-            <a:avLst/>
-          </a:prstGeom>
-          <a:noFill/>
-        </p:spPr>
-        <p:txBody>
-          <a:bodyPr wrap="square" lIns="0" tIns="0" rIns="0" bIns="0" anchor="t" rtlCol="0"/>
-          <a:lstStyle/>
-          <a:p>
-            <a:pPr algn="l">
-              <a:lnSpc>
-                <a:spcPct val="180000"/>
-              </a:lnSpc>
-            </a:pPr>
-            <a:r>
-              <a:rPr lang="ja-JP" altLang="en-US" sz="1250" b="0">
+                <a:spcPct val="170000"/>
+              </a:lnSpc>
+            </a:pPr>
+            <a:r>
+              <a:rPr lang="ja-JP" altLang="en-US" sz="1350" b="0">
                 <a:solidFill>
                   <a:srgbClr val="2B2D42"/>
                 </a:solidFill>
@@ -8425,7 +8524,7 @@
               </a:lnSpc>
             </a:pPr>
             <a:r>
-              <a:rPr lang="ja-JP" altLang="en-US" sz="900" b="0">
+              <a:rPr lang="ja-JP" altLang="en-US" sz="1000" b="0">
                 <a:solidFill>
                   <a:srgbClr val="B8B2A8"/>
                 </a:solidFill>
@@ -8526,11 +8625,11 @@
         <p:spPr>
           <a:xfrm>
             <a:off x="841248" y="137160"/>
-            <a:ext cx="1673352" cy="329184"/>
+            <a:ext cx="1956816" cy="384048"/>
           </a:xfrm>
           <a:prstGeom prst="roundRect">
             <a:avLst>
-              <a:gd name="adj" fmla="val 38888"/>
+              <a:gd name="adj" fmla="val 33333"/>
             </a:avLst>
           </a:prstGeom>
           <a:solidFill>
@@ -8550,7 +8649,7 @@
               </a:lnSpc>
             </a:pPr>
             <a:r>
-              <a:rPr lang="ja-JP" altLang="en-US" sz="1100" b="1">
+              <a:rPr lang="ja-JP" altLang="en-US" sz="1300" b="1">
                 <a:solidFill>
                   <a:srgbClr val="FFFFFF"/>
                 </a:solidFill>
@@ -8571,7 +8670,7 @@
         </p:nvSpPr>
         <p:spPr>
           <a:xfrm>
-            <a:off x="841248" y="612648"/>
+            <a:off x="841248" y="640080"/>
             <a:ext cx="10515600" cy="1005840"/>
           </a:xfrm>
           <a:prstGeom prst="rect">
@@ -8585,11 +8684,11 @@
           <a:p>
             <a:pPr algn="l">
               <a:lnSpc>
-                <a:spcPct val="160000"/>
-              </a:lnSpc>
-            </a:pPr>
-            <a:r>
-              <a:rPr lang="ja-JP" altLang="en-US" sz="2200" b="1">
+                <a:spcPct val="150000"/>
+              </a:lnSpc>
+            </a:pPr>
+            <a:r>
+              <a:rPr lang="ja-JP" altLang="en-US" sz="2700" b="1">
                 <a:solidFill>
                   <a:srgbClr val="2B2D42"/>
                 </a:solidFill>
@@ -8610,8 +8709,8 @@
         </p:nvSpPr>
         <p:spPr>
           <a:xfrm>
-            <a:off x="841248" y="2628900"/>
-            <a:ext cx="457200" cy="457200"/>
+            <a:off x="841248" y="1967103"/>
+            <a:ext cx="548640" cy="548640"/>
           </a:xfrm>
           <a:prstGeom prst="ellipse">
             <a:avLst/>
@@ -8633,7 +8732,7 @@
               </a:lnSpc>
             </a:pPr>
             <a:r>
-              <a:rPr lang="ja-JP" altLang="en-US" sz="1500" b="1">
+              <a:rPr lang="ja-JP" altLang="en-US" sz="1800" b="1">
                 <a:solidFill>
                   <a:srgbClr val="FFFFFF"/>
                 </a:solidFill>
@@ -8654,8 +8753,8 @@
         </p:nvSpPr>
         <p:spPr>
           <a:xfrm>
-            <a:off x="1572768" y="2610612"/>
-            <a:ext cx="9692640" cy="822960"/>
+            <a:off x="1664208" y="1948815"/>
+            <a:ext cx="9601200" cy="914400"/>
           </a:xfrm>
           <a:prstGeom prst="rect">
             <a:avLst/>
@@ -8668,11 +8767,11 @@
           <a:p>
             <a:pPr algn="l">
               <a:lnSpc>
-                <a:spcPct val="170000"/>
-              </a:lnSpc>
-            </a:pPr>
-            <a:r>
-              <a:rPr lang="ja-JP" altLang="en-US" sz="1800" b="0">
+                <a:spcPct val="160000"/>
+              </a:lnSpc>
+            </a:pPr>
+            <a:r>
+              <a:rPr lang="ja-JP" altLang="en-US" sz="2200" b="0">
                 <a:solidFill>
                   <a:srgbClr val="2B2D42"/>
                 </a:solidFill>
@@ -8683,7 +8782,7 @@
               <a:t>転職で、年収は</a:t>
             </a:r>
             <a:r>
-              <a:rPr lang="ja-JP" altLang="en-US" sz="1800" b="1">
+              <a:rPr lang="ja-JP" altLang="en-US" sz="2200" b="1">
                 <a:solidFill>
                   <a:srgbClr val="2B2D42"/>
                 </a:solidFill>
@@ -8694,7 +8793,7 @@
               <a:t>100万円くらい上がる</a:t>
             </a:r>
             <a:r>
-              <a:rPr lang="ja-JP" altLang="en-US" sz="1800" b="0">
+              <a:rPr lang="ja-JP" altLang="en-US" sz="2200" b="0">
                 <a:solidFill>
                   <a:srgbClr val="2B2D42"/>
                 </a:solidFill>
@@ -8715,8 +8814,8 @@
         </p:nvSpPr>
         <p:spPr>
           <a:xfrm>
-            <a:off x="841248" y="3589020"/>
-            <a:ext cx="457200" cy="457200"/>
+            <a:off x="841248" y="3048381"/>
+            <a:ext cx="548640" cy="548640"/>
           </a:xfrm>
           <a:prstGeom prst="ellipse">
             <a:avLst/>
@@ -8738,7 +8837,7 @@
               </a:lnSpc>
             </a:pPr>
             <a:r>
-              <a:rPr lang="ja-JP" altLang="en-US" sz="1500" b="1">
+              <a:rPr lang="ja-JP" altLang="en-US" sz="1800" b="1">
                 <a:solidFill>
                   <a:srgbClr val="FFFFFF"/>
                 </a:solidFill>
@@ -8759,8 +8858,8 @@
         </p:nvSpPr>
         <p:spPr>
           <a:xfrm>
-            <a:off x="1572768" y="3570732"/>
-            <a:ext cx="9692640" cy="822960"/>
+            <a:off x="1664208" y="3030093"/>
+            <a:ext cx="9601200" cy="914400"/>
           </a:xfrm>
           <a:prstGeom prst="rect">
             <a:avLst/>
@@ -8773,11 +8872,11 @@
           <a:p>
             <a:pPr algn="l">
               <a:lnSpc>
-                <a:spcPct val="170000"/>
-              </a:lnSpc>
-            </a:pPr>
-            <a:r>
-              <a:rPr lang="ja-JP" altLang="en-US" sz="1800" b="0">
+                <a:spcPct val="160000"/>
+              </a:lnSpc>
+            </a:pPr>
+            <a:r>
+              <a:rPr lang="ja-JP" altLang="en-US" sz="2200" b="1">
                 <a:solidFill>
                   <a:srgbClr val="2B2D42"/>
                 </a:solidFill>
@@ -8785,10 +8884,10 @@
                 <a:ea typeface="Yu Gothic"/>
                 <a:cs typeface="Yu Gothic"/>
               </a:rPr>
-              <a:t>貯金の代わりに、</a:t>
-            </a:r>
-            <a:r>
-              <a:rPr lang="ja-JP" altLang="en-US" sz="1800" b="1">
+              <a:t>2028年頭までに75万</a:t>
+            </a:r>
+            <a:r>
+              <a:rPr lang="ja-JP" altLang="en-US" sz="2200" b="0">
                 <a:solidFill>
                   <a:srgbClr val="2B2D42"/>
                 </a:solidFill>
@@ -8796,18 +8895,7 @@
                 <a:ea typeface="Yu Gothic"/>
                 <a:cs typeface="Yu Gothic"/>
               </a:rPr>
-              <a:t>NISAでコツコツ</a:t>
-            </a:r>
-            <a:r>
-              <a:rPr lang="ja-JP" altLang="en-US" sz="1800" b="0">
-                <a:solidFill>
-                  <a:srgbClr val="2B2D42"/>
-                </a:solidFill>
-                <a:latin typeface="Yu Gothic"/>
-                <a:ea typeface="Yu Gothic"/>
-                <a:cs typeface="Yu Gothic"/>
-              </a:rPr>
-              <a:t>（225万円分）。これは崩さない。</a:t>
+              <a:t>貯める。二人の家の初期費用の私の分は、ここから。</a:t>
             </a:r>
           </a:p>
         </p:txBody>
@@ -8820,8 +8908,8 @@
         </p:nvSpPr>
         <p:spPr>
           <a:xfrm>
-            <a:off x="841248" y="4549140"/>
-            <a:ext cx="457200" cy="457200"/>
+            <a:off x="841248" y="4129659"/>
+            <a:ext cx="548640" cy="548640"/>
           </a:xfrm>
           <a:prstGeom prst="ellipse">
             <a:avLst/>
@@ -8843,7 +8931,7 @@
               </a:lnSpc>
             </a:pPr>
             <a:r>
-              <a:rPr lang="ja-JP" altLang="en-US" sz="1500" b="1">
+              <a:rPr lang="ja-JP" altLang="en-US" sz="1800" b="1">
                 <a:solidFill>
                   <a:srgbClr val="FFFFFF"/>
                 </a:solidFill>
@@ -8864,8 +8952,8 @@
         </p:nvSpPr>
         <p:spPr>
           <a:xfrm>
-            <a:off x="1572768" y="4530852"/>
-            <a:ext cx="9692640" cy="822960"/>
+            <a:off x="1664208" y="4111371"/>
+            <a:ext cx="9601200" cy="914400"/>
           </a:xfrm>
           <a:prstGeom prst="rect">
             <a:avLst/>
@@ -8878,11 +8966,11 @@
           <a:p>
             <a:pPr algn="l">
               <a:lnSpc>
-                <a:spcPct val="170000"/>
-              </a:lnSpc>
-            </a:pPr>
-            <a:r>
-              <a:rPr lang="ja-JP" altLang="en-US" sz="1800" b="0">
+                <a:spcPct val="160000"/>
+              </a:lnSpc>
+            </a:pPr>
+            <a:r>
+              <a:rPr lang="ja-JP" altLang="en-US" sz="2200" b="0">
                 <a:solidFill>
                   <a:srgbClr val="2B2D42"/>
                 </a:solidFill>
@@ -8890,10 +8978,115 @@
                 <a:ea typeface="Yu Gothic"/>
                 <a:cs typeface="Yu Gothic"/>
               </a:rPr>
+              <a:t>貯金の代わりに、</a:t>
+            </a:r>
+            <a:r>
+              <a:rPr lang="ja-JP" altLang="en-US" sz="2200" b="1">
+                <a:solidFill>
+                  <a:srgbClr val="2B2D42"/>
+                </a:solidFill>
+                <a:latin typeface="Yu Gothic"/>
+                <a:ea typeface="Yu Gothic"/>
+                <a:cs typeface="Yu Gothic"/>
+              </a:rPr>
+              <a:t>NISAでコツコツ</a:t>
+            </a:r>
+            <a:r>
+              <a:rPr lang="ja-JP" altLang="en-US" sz="2200" b="0">
+                <a:solidFill>
+                  <a:srgbClr val="2B2D42"/>
+                </a:solidFill>
+                <a:latin typeface="Yu Gothic"/>
+                <a:ea typeface="Yu Gothic"/>
+                <a:cs typeface="Yu Gothic"/>
+              </a:rPr>
+              <a:t>（225万円分）。これは崩さない。</a:t>
+            </a:r>
+          </a:p>
+        </p:txBody>
+      </p:sp>
+      <p:sp>
+        <p:nvSpPr>
+          <p:cNvPr id="10" name="Shape 10"/>
+          <p:cNvSpPr/>
+          <p:nvPr/>
+        </p:nvSpPr>
+        <p:spPr>
+          <a:xfrm>
+            <a:off x="841248" y="5210937"/>
+            <a:ext cx="548640" cy="548640"/>
+          </a:xfrm>
+          <a:prstGeom prst="ellipse">
+            <a:avLst/>
+          </a:prstGeom>
+          <a:solidFill>
+            <a:srgbClr val="4D96FF"/>
+          </a:solidFill>
+          <a:ln>
+            <a:noFill/>
+          </a:ln>
+        </p:spPr>
+        <p:txBody>
+          <a:bodyPr wrap="square" lIns="0" tIns="0" rIns="0" bIns="0" anchor="ctr" rtlCol="0"/>
+          <a:lstStyle/>
+          <a:p>
+            <a:pPr algn="ctr">
+              <a:lnSpc>
+                <a:spcPct val="145000"/>
+              </a:lnSpc>
+            </a:pPr>
+            <a:r>
+              <a:rPr lang="ja-JP" altLang="en-US" sz="1800" b="1">
+                <a:solidFill>
+                  <a:srgbClr val="FFFFFF"/>
+                </a:solidFill>
+                <a:latin typeface="Yu Gothic"/>
+                <a:ea typeface="Yu Gothic"/>
+                <a:cs typeface="Yu Gothic"/>
+              </a:rPr>
+              <a:t>4</a:t>
+            </a:r>
+          </a:p>
+        </p:txBody>
+      </p:sp>
+      <p:sp>
+        <p:nvSpPr>
+          <p:cNvPr id="11" name="TextBox 11"/>
+          <p:cNvSpPr txBox="1"/>
+          <p:nvPr/>
+        </p:nvSpPr>
+        <p:spPr>
+          <a:xfrm>
+            <a:off x="1664208" y="5192649"/>
+            <a:ext cx="9601200" cy="914400"/>
+          </a:xfrm>
+          <a:prstGeom prst="rect">
+            <a:avLst/>
+          </a:prstGeom>
+          <a:noFill/>
+        </p:spPr>
+        <p:txBody>
+          <a:bodyPr wrap="square" lIns="0" tIns="0" rIns="0" bIns="0" anchor="t" rtlCol="0"/>
+          <a:lstStyle/>
+          <a:p>
+            <a:pPr algn="l">
+              <a:lnSpc>
+                <a:spcPct val="160000"/>
+              </a:lnSpc>
+            </a:pPr>
+            <a:r>
+              <a:rPr lang="ja-JP" altLang="en-US" sz="1930" b="0">
+                <a:solidFill>
+                  <a:srgbClr val="2B2D42"/>
+                </a:solidFill>
+                <a:latin typeface="Yu Gothic"/>
+                <a:ea typeface="Yu Gothic"/>
+                <a:cs typeface="Yu Gothic"/>
+              </a:rPr>
               <a:t>2028年6月の</a:t>
             </a:r>
             <a:r>
-              <a:rPr lang="ja-JP" altLang="en-US" sz="1800" b="1">
+              <a:rPr lang="ja-JP" altLang="en-US" sz="1930" b="1">
                 <a:solidFill>
                   <a:srgbClr val="2B2D42"/>
                 </a:solidFill>
@@ -8904,7 +9097,7 @@
               <a:t>カンヌ</a:t>
             </a:r>
             <a:r>
-              <a:rPr lang="ja-JP" altLang="en-US" sz="1800" b="0">
+              <a:rPr lang="ja-JP" altLang="en-US" sz="1930" b="0">
                 <a:solidFill>
                   <a:srgbClr val="2B2D42"/>
                 </a:solidFill>
@@ -8919,7 +9112,7 @@
       </p:sp>
       <p:sp>
         <p:nvSpPr>
-          <p:cNvPr id="10" name="TextBox 10"/>
+          <p:cNvPr id="12" name="TextBox 12"/>
           <p:cNvSpPr txBox="1"/>
           <p:nvPr/>
         </p:nvSpPr>
@@ -8943,7 +9136,7 @@
               </a:lnSpc>
             </a:pPr>
             <a:r>
-              <a:rPr lang="ja-JP" altLang="en-US" sz="900" b="0">
+              <a:rPr lang="ja-JP" altLang="en-US" sz="1000" b="0">
                 <a:solidFill>
                   <a:srgbClr val="B8B2A8"/>
                 </a:solidFill>
@@ -8958,7 +9151,7 @@
       </p:sp>
       <p:sp>
         <p:nvSpPr>
-          <p:cNvPr id="11" name="Shape 11"/>
+          <p:cNvPr id="13" name="Shape 13"/>
           <p:cNvSpPr/>
           <p:nvPr/>
         </p:nvSpPr>
@@ -9044,11 +9237,11 @@
         <p:spPr>
           <a:xfrm>
             <a:off x="841248" y="137160"/>
-            <a:ext cx="1325880" cy="329184"/>
+            <a:ext cx="1554480" cy="384048"/>
           </a:xfrm>
           <a:prstGeom prst="roundRect">
             <a:avLst>
-              <a:gd name="adj" fmla="val 38888"/>
+              <a:gd name="adj" fmla="val 33333"/>
             </a:avLst>
           </a:prstGeom>
           <a:solidFill>
@@ -9068,7 +9261,7 @@
               </a:lnSpc>
             </a:pPr>
             <a:r>
-              <a:rPr lang="ja-JP" altLang="en-US" sz="1100" b="1">
+              <a:rPr lang="ja-JP" altLang="en-US" sz="1300" b="1">
                 <a:solidFill>
                   <a:srgbClr val="FFFFFF"/>
                 </a:solidFill>
@@ -9089,7 +9282,7 @@
         </p:nvSpPr>
         <p:spPr>
           <a:xfrm>
-            <a:off x="841248" y="612648"/>
+            <a:off x="841248" y="640080"/>
             <a:ext cx="10515600" cy="1005840"/>
           </a:xfrm>
           <a:prstGeom prst="rect">
@@ -9103,11 +9296,11 @@
           <a:p>
             <a:pPr algn="l">
               <a:lnSpc>
-                <a:spcPct val="160000"/>
-              </a:lnSpc>
-            </a:pPr>
-            <a:r>
-              <a:rPr lang="ja-JP" altLang="en-US" sz="2200" b="1">
+                <a:spcPct val="150000"/>
+              </a:lnSpc>
+            </a:pPr>
+            <a:r>
+              <a:rPr lang="ja-JP" altLang="en-US" sz="2700" b="1">
                 <a:solidFill>
                   <a:srgbClr val="2B2D42"/>
                 </a:solidFill>
@@ -9129,24 +9322,24 @@
         <p:spPr>
           <a:xfrm>
             <a:off x="932688" y="1728216"/>
-            <a:ext cx="6272784" cy="617873"/>
-          </a:xfrm>
-          <a:prstGeom prst="rect">
-            <a:avLst/>
-          </a:prstGeom>
-          <a:noFill/>
-        </p:spPr>
-        <p:txBody>
-          <a:bodyPr wrap="square" lIns="0" tIns="0" rIns="0" bIns="0" anchor="ctr" rtlCol="0"/>
-          <a:lstStyle/>
-          <a:p>
-            <a:pPr algn="l">
-              <a:lnSpc>
-                <a:spcPct val="145000"/>
-              </a:lnSpc>
-            </a:pPr>
-            <a:r>
-              <a:rPr lang="ja-JP" altLang="en-US" sz="1100" b="1" spc="80">
+            <a:ext cx="6272784" cy="540639"/>
+          </a:xfrm>
+          <a:prstGeom prst="rect">
+            <a:avLst/>
+          </a:prstGeom>
+          <a:noFill/>
+        </p:spPr>
+        <p:txBody>
+          <a:bodyPr wrap="square" lIns="0" tIns="0" rIns="0" bIns="0" anchor="ctr" rtlCol="0"/>
+          <a:lstStyle/>
+          <a:p>
+            <a:pPr algn="l">
+              <a:lnSpc>
+                <a:spcPct val="145000"/>
+              </a:lnSpc>
+            </a:pPr>
+            <a:r>
+              <a:rPr lang="ja-JP" altLang="en-US" sz="1250" b="1" spc="80">
                 <a:solidFill>
                   <a:srgbClr val="FF6B6B"/>
                 </a:solidFill>
@@ -9168,24 +9361,24 @@
         <p:spPr>
           <a:xfrm>
             <a:off x="7333488" y="1728216"/>
-            <a:ext cx="2157984" cy="617873"/>
-          </a:xfrm>
-          <a:prstGeom prst="rect">
-            <a:avLst/>
-          </a:prstGeom>
-          <a:noFill/>
-        </p:spPr>
-        <p:txBody>
-          <a:bodyPr wrap="square" lIns="0" tIns="0" rIns="0" bIns="0" anchor="ctr" rtlCol="0"/>
-          <a:lstStyle/>
-          <a:p>
-            <a:pPr algn="l">
-              <a:lnSpc>
-                <a:spcPct val="145000"/>
-              </a:lnSpc>
-            </a:pPr>
-            <a:r>
-              <a:rPr lang="ja-JP" altLang="en-US" sz="1100" b="1" spc="80">
+            <a:ext cx="2157984" cy="540639"/>
+          </a:xfrm>
+          <a:prstGeom prst="rect">
+            <a:avLst/>
+          </a:prstGeom>
+          <a:noFill/>
+        </p:spPr>
+        <p:txBody>
+          <a:bodyPr wrap="square" lIns="0" tIns="0" rIns="0" bIns="0" anchor="ctr" rtlCol="0"/>
+          <a:lstStyle/>
+          <a:p>
+            <a:pPr algn="l">
+              <a:lnSpc>
+                <a:spcPct val="145000"/>
+              </a:lnSpc>
+            </a:pPr>
+            <a:r>
+              <a:rPr lang="ja-JP" altLang="en-US" sz="1250" b="1" spc="80">
                 <a:solidFill>
                   <a:srgbClr val="FF6B6B"/>
                 </a:solidFill>
@@ -9207,24 +9400,24 @@
         <p:spPr>
           <a:xfrm>
             <a:off x="9619488" y="1728216"/>
-            <a:ext cx="1700784" cy="617873"/>
-          </a:xfrm>
-          <a:prstGeom prst="rect">
-            <a:avLst/>
-          </a:prstGeom>
-          <a:noFill/>
-        </p:spPr>
-        <p:txBody>
-          <a:bodyPr wrap="square" lIns="0" tIns="0" rIns="0" bIns="0" anchor="ctr" rtlCol="0"/>
-          <a:lstStyle/>
-          <a:p>
-            <a:pPr algn="l">
-              <a:lnSpc>
-                <a:spcPct val="145000"/>
-              </a:lnSpc>
-            </a:pPr>
-            <a:r>
-              <a:rPr lang="ja-JP" altLang="en-US" sz="1100" b="1" spc="80">
+            <a:ext cx="1700784" cy="540639"/>
+          </a:xfrm>
+          <a:prstGeom prst="rect">
+            <a:avLst/>
+          </a:prstGeom>
+          <a:noFill/>
+        </p:spPr>
+        <p:txBody>
+          <a:bodyPr wrap="square" lIns="0" tIns="0" rIns="0" bIns="0" anchor="ctr" rtlCol="0"/>
+          <a:lstStyle/>
+          <a:p>
+            <a:pPr algn="l">
+              <a:lnSpc>
+                <a:spcPct val="145000"/>
+              </a:lnSpc>
+            </a:pPr>
+            <a:r>
+              <a:rPr lang="ja-JP" altLang="en-US" sz="1250" b="1" spc="80">
                 <a:solidFill>
                   <a:srgbClr val="FF6B6B"/>
                 </a:solidFill>
@@ -9245,7 +9438,7 @@
         </p:nvSpPr>
         <p:spPr>
           <a:xfrm>
-            <a:off x="841248" y="2333389"/>
+            <a:off x="841248" y="2256155"/>
             <a:ext cx="10515600" cy="25400"/>
           </a:xfrm>
           <a:prstGeom prst="rect">
@@ -9272,25 +9465,25 @@
         </p:nvSpPr>
         <p:spPr>
           <a:xfrm>
-            <a:off x="841248" y="2346089"/>
-            <a:ext cx="6272784" cy="617873"/>
-          </a:xfrm>
-          <a:prstGeom prst="rect">
-            <a:avLst/>
-          </a:prstGeom>
-          <a:noFill/>
-        </p:spPr>
-        <p:txBody>
-          <a:bodyPr wrap="square" lIns="0" tIns="0" rIns="0" bIns="0" anchor="ctr" rtlCol="0"/>
-          <a:lstStyle/>
-          <a:p>
-            <a:pPr algn="l">
-              <a:lnSpc>
-                <a:spcPct val="150000"/>
-              </a:lnSpc>
-            </a:pPr>
-            <a:r>
-              <a:rPr lang="ja-JP" altLang="en-US" sz="1300" b="0">
+            <a:off x="841248" y="2268855"/>
+            <a:ext cx="6272784" cy="540639"/>
+          </a:xfrm>
+          <a:prstGeom prst="rect">
+            <a:avLst/>
+          </a:prstGeom>
+          <a:noFill/>
+        </p:spPr>
+        <p:txBody>
+          <a:bodyPr wrap="square" lIns="0" tIns="0" rIns="0" bIns="0" anchor="ctr" rtlCol="0"/>
+          <a:lstStyle/>
+          <a:p>
+            <a:pPr algn="l">
+              <a:lnSpc>
+                <a:spcPct val="145000"/>
+              </a:lnSpc>
+            </a:pPr>
+            <a:r>
+              <a:rPr lang="ja-JP" altLang="en-US" sz="1500" b="0">
                 <a:solidFill>
                   <a:srgbClr val="2B2D42"/>
                 </a:solidFill>
@@ -9298,7 +9491,7 @@
                 <a:ea typeface="Yu Gothic"/>
                 <a:cs typeface="Yu Gothic"/>
               </a:rPr>
-              <a:t>会社の家賃補助の条件（入籍が条件か・家賃の上限・使える回数）</a:t>
+              <a:t>家賃補助の型・上限・同居人の条件・回数・退職時の扱い</a:t>
             </a:r>
           </a:p>
         </p:txBody>
@@ -9311,25 +9504,25 @@
         </p:nvSpPr>
         <p:spPr>
           <a:xfrm>
-            <a:off x="7242048" y="2346089"/>
-            <a:ext cx="2157984" cy="617873"/>
-          </a:xfrm>
-          <a:prstGeom prst="rect">
-            <a:avLst/>
-          </a:prstGeom>
-          <a:noFill/>
-        </p:spPr>
-        <p:txBody>
-          <a:bodyPr wrap="square" lIns="0" tIns="0" rIns="0" bIns="0" anchor="ctr" rtlCol="0"/>
-          <a:lstStyle/>
-          <a:p>
-            <a:pPr algn="l">
-              <a:lnSpc>
-                <a:spcPct val="150000"/>
-              </a:lnSpc>
-            </a:pPr>
-            <a:r>
-              <a:rPr lang="ja-JP" altLang="en-US" sz="1300" b="0">
+            <a:off x="7242048" y="2268855"/>
+            <a:ext cx="2157984" cy="540639"/>
+          </a:xfrm>
+          <a:prstGeom prst="rect">
+            <a:avLst/>
+          </a:prstGeom>
+          <a:noFill/>
+        </p:spPr>
+        <p:txBody>
+          <a:bodyPr wrap="square" lIns="0" tIns="0" rIns="0" bIns="0" anchor="ctr" rtlCol="0"/>
+          <a:lstStyle/>
+          <a:p>
+            <a:pPr algn="l">
+              <a:lnSpc>
+                <a:spcPct val="145000"/>
+              </a:lnSpc>
+            </a:pPr>
+            <a:r>
+              <a:rPr lang="ja-JP" altLang="en-US" sz="1500" b="0">
                 <a:solidFill>
                   <a:srgbClr val="2B2D42"/>
                 </a:solidFill>
@@ -9337,7 +9530,7 @@
                 <a:ea typeface="Yu Gothic"/>
                 <a:cs typeface="Yu Gothic"/>
               </a:rPr>
-              <a:t>2027年1月</a:t>
+              <a:t>入社後すぐ</a:t>
             </a:r>
           </a:p>
         </p:txBody>
@@ -9350,25 +9543,25 @@
         </p:nvSpPr>
         <p:spPr>
           <a:xfrm>
-            <a:off x="9528048" y="2346089"/>
-            <a:ext cx="1700784" cy="617873"/>
-          </a:xfrm>
-          <a:prstGeom prst="rect">
-            <a:avLst/>
-          </a:prstGeom>
-          <a:noFill/>
-        </p:spPr>
-        <p:txBody>
-          <a:bodyPr wrap="square" lIns="0" tIns="0" rIns="0" bIns="0" anchor="ctr" rtlCol="0"/>
-          <a:lstStyle/>
-          <a:p>
-            <a:pPr algn="l">
-              <a:lnSpc>
-                <a:spcPct val="150000"/>
-              </a:lnSpc>
-            </a:pPr>
-            <a:r>
-              <a:rPr lang="ja-JP" altLang="en-US" sz="1300" b="0">
+            <a:off x="9528048" y="2268855"/>
+            <a:ext cx="1700784" cy="540639"/>
+          </a:xfrm>
+          <a:prstGeom prst="rect">
+            <a:avLst/>
+          </a:prstGeom>
+          <a:noFill/>
+        </p:spPr>
+        <p:txBody>
+          <a:bodyPr wrap="square" lIns="0" tIns="0" rIns="0" bIns="0" anchor="ctr" rtlCol="0"/>
+          <a:lstStyle/>
+          <a:p>
+            <a:pPr algn="l">
+              <a:lnSpc>
+                <a:spcPct val="145000"/>
+              </a:lnSpc>
+            </a:pPr>
+            <a:r>
+              <a:rPr lang="ja-JP" altLang="en-US" sz="1500" b="0">
                 <a:solidFill>
                   <a:srgbClr val="2B2D42"/>
                 </a:solidFill>
@@ -9389,7 +9582,7 @@
         </p:nvSpPr>
         <p:spPr>
           <a:xfrm>
-            <a:off x="841248" y="2958882"/>
+            <a:off x="841248" y="2804414"/>
             <a:ext cx="10515600" cy="9525"/>
           </a:xfrm>
           <a:prstGeom prst="rect">
@@ -9416,25 +9609,25 @@
         </p:nvSpPr>
         <p:spPr>
           <a:xfrm>
-            <a:off x="841248" y="2963962"/>
-            <a:ext cx="6272784" cy="617873"/>
-          </a:xfrm>
-          <a:prstGeom prst="rect">
-            <a:avLst/>
-          </a:prstGeom>
-          <a:noFill/>
-        </p:spPr>
-        <p:txBody>
-          <a:bodyPr wrap="square" lIns="0" tIns="0" rIns="0" bIns="0" anchor="ctr" rtlCol="0"/>
-          <a:lstStyle/>
-          <a:p>
-            <a:pPr algn="l">
-              <a:lnSpc>
-                <a:spcPct val="150000"/>
-              </a:lnSpc>
-            </a:pPr>
-            <a:r>
-              <a:rPr lang="ja-JP" altLang="en-US" sz="1300" b="0">
+            <a:off x="841248" y="2809494"/>
+            <a:ext cx="6272784" cy="540639"/>
+          </a:xfrm>
+          <a:prstGeom prst="rect">
+            <a:avLst/>
+          </a:prstGeom>
+          <a:noFill/>
+        </p:spPr>
+        <p:txBody>
+          <a:bodyPr wrap="square" lIns="0" tIns="0" rIns="0" bIns="0" anchor="ctr" rtlCol="0"/>
+          <a:lstStyle/>
+          <a:p>
+            <a:pPr algn="l">
+              <a:lnSpc>
+                <a:spcPct val="145000"/>
+              </a:lnSpc>
+            </a:pPr>
+            <a:r>
+              <a:rPr lang="ja-JP" altLang="en-US" sz="1500" b="0">
                 <a:solidFill>
                   <a:srgbClr val="2B2D42"/>
                 </a:solidFill>
@@ -9442,7 +9635,7 @@
                 <a:ea typeface="Yu Gothic"/>
                 <a:cs typeface="Yu Gothic"/>
               </a:rPr>
-              <a:t>転職先の給与の形（賞与の有無）を確認して、家賃の負担額を確定</a:t>
+              <a:t>給与の形（賞与の有無）を見て、家賃の負担額を確定</a:t>
             </a:r>
           </a:p>
         </p:txBody>
@@ -9455,25 +9648,25 @@
         </p:nvSpPr>
         <p:spPr>
           <a:xfrm>
-            <a:off x="7242048" y="2963962"/>
-            <a:ext cx="2157984" cy="617873"/>
-          </a:xfrm>
-          <a:prstGeom prst="rect">
-            <a:avLst/>
-          </a:prstGeom>
-          <a:noFill/>
-        </p:spPr>
-        <p:txBody>
-          <a:bodyPr wrap="square" lIns="0" tIns="0" rIns="0" bIns="0" anchor="ctr" rtlCol="0"/>
-          <a:lstStyle/>
-          <a:p>
-            <a:pPr algn="l">
-              <a:lnSpc>
-                <a:spcPct val="150000"/>
-              </a:lnSpc>
-            </a:pPr>
-            <a:r>
-              <a:rPr lang="ja-JP" altLang="en-US" sz="1300" b="0">
+            <a:off x="7242048" y="2809494"/>
+            <a:ext cx="2157984" cy="540639"/>
+          </a:xfrm>
+          <a:prstGeom prst="rect">
+            <a:avLst/>
+          </a:prstGeom>
+          <a:noFill/>
+        </p:spPr>
+        <p:txBody>
+          <a:bodyPr wrap="square" lIns="0" tIns="0" rIns="0" bIns="0" anchor="ctr" rtlCol="0"/>
+          <a:lstStyle/>
+          <a:p>
+            <a:pPr algn="l">
+              <a:lnSpc>
+                <a:spcPct val="145000"/>
+              </a:lnSpc>
+            </a:pPr>
+            <a:r>
+              <a:rPr lang="ja-JP" altLang="en-US" sz="1500" b="0">
                 <a:solidFill>
                   <a:srgbClr val="2B2D42"/>
                 </a:solidFill>
@@ -9494,25 +9687,25 @@
         </p:nvSpPr>
         <p:spPr>
           <a:xfrm>
-            <a:off x="9528048" y="2963962"/>
-            <a:ext cx="1700784" cy="617873"/>
-          </a:xfrm>
-          <a:prstGeom prst="rect">
-            <a:avLst/>
-          </a:prstGeom>
-          <a:noFill/>
-        </p:spPr>
-        <p:txBody>
-          <a:bodyPr wrap="square" lIns="0" tIns="0" rIns="0" bIns="0" anchor="ctr" rtlCol="0"/>
-          <a:lstStyle/>
-          <a:p>
-            <a:pPr algn="l">
-              <a:lnSpc>
-                <a:spcPct val="150000"/>
-              </a:lnSpc>
-            </a:pPr>
-            <a:r>
-              <a:rPr lang="ja-JP" altLang="en-US" sz="1300" b="0">
+            <a:off x="9528048" y="2809494"/>
+            <a:ext cx="1700784" cy="540639"/>
+          </a:xfrm>
+          <a:prstGeom prst="rect">
+            <a:avLst/>
+          </a:prstGeom>
+          <a:noFill/>
+        </p:spPr>
+        <p:txBody>
+          <a:bodyPr wrap="square" lIns="0" tIns="0" rIns="0" bIns="0" anchor="ctr" rtlCol="0"/>
+          <a:lstStyle/>
+          <a:p>
+            <a:pPr algn="l">
+              <a:lnSpc>
+                <a:spcPct val="145000"/>
+              </a:lnSpc>
+            </a:pPr>
+            <a:r>
+              <a:rPr lang="ja-JP" altLang="en-US" sz="1500" b="0">
                 <a:solidFill>
                   <a:srgbClr val="2B2D42"/>
                 </a:solidFill>
@@ -9533,7 +9726,7 @@
         </p:nvSpPr>
         <p:spPr>
           <a:xfrm>
-            <a:off x="841248" y="3576755"/>
+            <a:off x="841248" y="3345053"/>
             <a:ext cx="10515600" cy="9525"/>
           </a:xfrm>
           <a:prstGeom prst="rect">
@@ -9560,25 +9753,25 @@
         </p:nvSpPr>
         <p:spPr>
           <a:xfrm>
-            <a:off x="841248" y="3581835"/>
-            <a:ext cx="6272784" cy="617873"/>
-          </a:xfrm>
-          <a:prstGeom prst="rect">
-            <a:avLst/>
-          </a:prstGeom>
-          <a:noFill/>
-        </p:spPr>
-        <p:txBody>
-          <a:bodyPr wrap="square" lIns="0" tIns="0" rIns="0" bIns="0" anchor="ctr" rtlCol="0"/>
-          <a:lstStyle/>
-          <a:p>
-            <a:pPr algn="l">
-              <a:lnSpc>
-                <a:spcPct val="150000"/>
-              </a:lnSpc>
-            </a:pPr>
-            <a:r>
-              <a:rPr lang="ja-JP" altLang="en-US" sz="1300" b="0">
+            <a:off x="841248" y="3350133"/>
+            <a:ext cx="6272784" cy="540639"/>
+          </a:xfrm>
+          <a:prstGeom prst="rect">
+            <a:avLst/>
+          </a:prstGeom>
+          <a:noFill/>
+        </p:spPr>
+        <p:txBody>
+          <a:bodyPr wrap="square" lIns="0" tIns="0" rIns="0" bIns="0" anchor="ctr" rtlCol="0"/>
+          <a:lstStyle/>
+          <a:p>
+            <a:pPr algn="l">
+              <a:lnSpc>
+                <a:spcPct val="145000"/>
+              </a:lnSpc>
+            </a:pPr>
+            <a:r>
+              <a:rPr lang="ja-JP" altLang="en-US" sz="1500" b="0">
                 <a:solidFill>
                   <a:srgbClr val="2B2D42"/>
                 </a:solidFill>
@@ -9586,7 +9779,7 @@
                 <a:ea typeface="Yu Gothic"/>
                 <a:cs typeface="Yu Gothic"/>
               </a:rPr>
-              <a:t>入籍を、住む前にするか、住むタイミングにするか</a:t>
+              <a:t>ルームシェアの契約期間と、解約の条件</a:t>
             </a:r>
           </a:p>
         </p:txBody>
@@ -9599,25 +9792,25 @@
         </p:nvSpPr>
         <p:spPr>
           <a:xfrm>
-            <a:off x="7242048" y="3581835"/>
-            <a:ext cx="2157984" cy="617873"/>
-          </a:xfrm>
-          <a:prstGeom prst="rect">
-            <a:avLst/>
-          </a:prstGeom>
-          <a:noFill/>
-        </p:spPr>
-        <p:txBody>
-          <a:bodyPr wrap="square" lIns="0" tIns="0" rIns="0" bIns="0" anchor="ctr" rtlCol="0"/>
-          <a:lstStyle/>
-          <a:p>
-            <a:pPr algn="l">
-              <a:lnSpc>
-                <a:spcPct val="150000"/>
-              </a:lnSpc>
-            </a:pPr>
-            <a:r>
-              <a:rPr lang="ja-JP" altLang="en-US" sz="1300" b="0">
+            <a:off x="7242048" y="3350133"/>
+            <a:ext cx="2157984" cy="540639"/>
+          </a:xfrm>
+          <a:prstGeom prst="rect">
+            <a:avLst/>
+          </a:prstGeom>
+          <a:noFill/>
+        </p:spPr>
+        <p:txBody>
+          <a:bodyPr wrap="square" lIns="0" tIns="0" rIns="0" bIns="0" anchor="ctr" rtlCol="0"/>
+          <a:lstStyle/>
+          <a:p>
+            <a:pPr algn="l">
+              <a:lnSpc>
+                <a:spcPct val="145000"/>
+              </a:lnSpc>
+            </a:pPr>
+            <a:r>
+              <a:rPr lang="ja-JP" altLang="en-US" sz="1500" b="0">
                 <a:solidFill>
                   <a:srgbClr val="2B2D42"/>
                 </a:solidFill>
@@ -9625,7 +9818,7 @@
                 <a:ea typeface="Yu Gothic"/>
                 <a:cs typeface="Yu Gothic"/>
               </a:rPr>
-              <a:t>2027年前半</a:t>
+              <a:t>契約前</a:t>
             </a:r>
           </a:p>
         </p:txBody>
@@ -9638,25 +9831,25 @@
         </p:nvSpPr>
         <p:spPr>
           <a:xfrm>
-            <a:off x="9528048" y="3581835"/>
-            <a:ext cx="1700784" cy="617873"/>
-          </a:xfrm>
-          <a:prstGeom prst="rect">
-            <a:avLst/>
-          </a:prstGeom>
-          <a:noFill/>
-        </p:spPr>
-        <p:txBody>
-          <a:bodyPr wrap="square" lIns="0" tIns="0" rIns="0" bIns="0" anchor="ctr" rtlCol="0"/>
-          <a:lstStyle/>
-          <a:p>
-            <a:pPr algn="l">
-              <a:lnSpc>
-                <a:spcPct val="150000"/>
-              </a:lnSpc>
-            </a:pPr>
-            <a:r>
-              <a:rPr lang="ja-JP" altLang="en-US" sz="1300" b="0">
+            <a:off x="9528048" y="3350133"/>
+            <a:ext cx="1700784" cy="540639"/>
+          </a:xfrm>
+          <a:prstGeom prst="rect">
+            <a:avLst/>
+          </a:prstGeom>
+          <a:noFill/>
+        </p:spPr>
+        <p:txBody>
+          <a:bodyPr wrap="square" lIns="0" tIns="0" rIns="0" bIns="0" anchor="ctr" rtlCol="0"/>
+          <a:lstStyle/>
+          <a:p>
+            <a:pPr algn="l">
+              <a:lnSpc>
+                <a:spcPct val="145000"/>
+              </a:lnSpc>
+            </a:pPr>
+            <a:r>
+              <a:rPr lang="ja-JP" altLang="en-US" sz="1500" b="0">
                 <a:solidFill>
                   <a:srgbClr val="2B2D42"/>
                 </a:solidFill>
@@ -9664,7 +9857,7 @@
                 <a:ea typeface="Yu Gothic"/>
                 <a:cs typeface="Yu Gothic"/>
               </a:rPr>
-              <a:t>ふたり</a:t>
+              <a:t>【彼の名前】</a:t>
             </a:r>
           </a:p>
         </p:txBody>
@@ -9677,7 +9870,7 @@
         </p:nvSpPr>
         <p:spPr>
           <a:xfrm>
-            <a:off x="841248" y="4194628"/>
+            <a:off x="841248" y="3885692"/>
             <a:ext cx="10515600" cy="9525"/>
           </a:xfrm>
           <a:prstGeom prst="rect">
@@ -9704,25 +9897,25 @@
         </p:nvSpPr>
         <p:spPr>
           <a:xfrm>
-            <a:off x="841248" y="4199708"/>
-            <a:ext cx="6272784" cy="617873"/>
-          </a:xfrm>
-          <a:prstGeom prst="rect">
-            <a:avLst/>
-          </a:prstGeom>
-          <a:noFill/>
-        </p:spPr>
-        <p:txBody>
-          <a:bodyPr wrap="square" lIns="0" tIns="0" rIns="0" bIns="0" anchor="ctr" rtlCol="0"/>
-          <a:lstStyle/>
-          <a:p>
-            <a:pPr algn="l">
-              <a:lnSpc>
-                <a:spcPct val="150000"/>
-              </a:lnSpc>
-            </a:pPr>
-            <a:r>
-              <a:rPr lang="ja-JP" altLang="en-US" sz="1300" b="0">
+            <a:off x="841248" y="3890772"/>
+            <a:ext cx="6272784" cy="540639"/>
+          </a:xfrm>
+          <a:prstGeom prst="rect">
+            <a:avLst/>
+          </a:prstGeom>
+          <a:noFill/>
+        </p:spPr>
+        <p:txBody>
+          <a:bodyPr wrap="square" lIns="0" tIns="0" rIns="0" bIns="0" anchor="ctr" rtlCol="0"/>
+          <a:lstStyle/>
+          <a:p>
+            <a:pPr algn="l">
+              <a:lnSpc>
+                <a:spcPct val="145000"/>
+              </a:lnSpc>
+            </a:pPr>
+            <a:r>
+              <a:rPr lang="ja-JP" altLang="en-US" sz="1500" b="0">
                 <a:solidFill>
                   <a:srgbClr val="2B2D42"/>
                 </a:solidFill>
@@ -9730,7 +9923,7 @@
                 <a:ea typeface="Yu Gothic"/>
                 <a:cs typeface="Yu Gothic"/>
               </a:rPr>
-              <a:t>最初の二人の家を、子ども前提の広さにするか</a:t>
+              <a:t>入籍と入居を、何月にするか</a:t>
             </a:r>
           </a:p>
         </p:txBody>
@@ -9743,25 +9936,25 @@
         </p:nvSpPr>
         <p:spPr>
           <a:xfrm>
-            <a:off x="7242048" y="4199708"/>
-            <a:ext cx="2157984" cy="617873"/>
-          </a:xfrm>
-          <a:prstGeom prst="rect">
-            <a:avLst/>
-          </a:prstGeom>
-          <a:noFill/>
-        </p:spPr>
-        <p:txBody>
-          <a:bodyPr wrap="square" lIns="0" tIns="0" rIns="0" bIns="0" anchor="ctr" rtlCol="0"/>
-          <a:lstStyle/>
-          <a:p>
-            <a:pPr algn="l">
-              <a:lnSpc>
-                <a:spcPct val="150000"/>
-              </a:lnSpc>
-            </a:pPr>
-            <a:r>
-              <a:rPr lang="ja-JP" altLang="en-US" sz="1300" b="0">
+            <a:off x="7242048" y="3890772"/>
+            <a:ext cx="2157984" cy="540639"/>
+          </a:xfrm>
+          <a:prstGeom prst="rect">
+            <a:avLst/>
+          </a:prstGeom>
+          <a:noFill/>
+        </p:spPr>
+        <p:txBody>
+          <a:bodyPr wrap="square" lIns="0" tIns="0" rIns="0" bIns="0" anchor="ctr" rtlCol="0"/>
+          <a:lstStyle/>
+          <a:p>
+            <a:pPr algn="l">
+              <a:lnSpc>
+                <a:spcPct val="145000"/>
+              </a:lnSpc>
+            </a:pPr>
+            <a:r>
+              <a:rPr lang="ja-JP" altLang="en-US" sz="1500" b="0">
                 <a:solidFill>
                   <a:srgbClr val="2B2D42"/>
                 </a:solidFill>
@@ -9769,7 +9962,7 @@
                 <a:ea typeface="Yu Gothic"/>
                 <a:cs typeface="Yu Gothic"/>
               </a:rPr>
-              <a:t>2027年前半</a:t>
+              <a:t>2027年後半</a:t>
             </a:r>
           </a:p>
         </p:txBody>
@@ -9782,25 +9975,25 @@
         </p:nvSpPr>
         <p:spPr>
           <a:xfrm>
-            <a:off x="9528048" y="4199708"/>
-            <a:ext cx="1700784" cy="617873"/>
-          </a:xfrm>
-          <a:prstGeom prst="rect">
-            <a:avLst/>
-          </a:prstGeom>
-          <a:noFill/>
-        </p:spPr>
-        <p:txBody>
-          <a:bodyPr wrap="square" lIns="0" tIns="0" rIns="0" bIns="0" anchor="ctr" rtlCol="0"/>
-          <a:lstStyle/>
-          <a:p>
-            <a:pPr algn="l">
-              <a:lnSpc>
-                <a:spcPct val="150000"/>
-              </a:lnSpc>
-            </a:pPr>
-            <a:r>
-              <a:rPr lang="ja-JP" altLang="en-US" sz="1300" b="0">
+            <a:off x="9528048" y="3890772"/>
+            <a:ext cx="1700784" cy="540639"/>
+          </a:xfrm>
+          <a:prstGeom prst="rect">
+            <a:avLst/>
+          </a:prstGeom>
+          <a:noFill/>
+        </p:spPr>
+        <p:txBody>
+          <a:bodyPr wrap="square" lIns="0" tIns="0" rIns="0" bIns="0" anchor="ctr" rtlCol="0"/>
+          <a:lstStyle/>
+          <a:p>
+            <a:pPr algn="l">
+              <a:lnSpc>
+                <a:spcPct val="145000"/>
+              </a:lnSpc>
+            </a:pPr>
+            <a:r>
+              <a:rPr lang="ja-JP" altLang="en-US" sz="1500" b="0">
                 <a:solidFill>
                   <a:srgbClr val="2B2D42"/>
                 </a:solidFill>
@@ -9821,7 +10014,7 @@
         </p:nvSpPr>
         <p:spPr>
           <a:xfrm>
-            <a:off x="841248" y="4812501"/>
+            <a:off x="841248" y="4426331"/>
             <a:ext cx="10515600" cy="9525"/>
           </a:xfrm>
           <a:prstGeom prst="rect">
@@ -9842,18 +10035,162 @@
       </p:sp>
       <p:sp>
         <p:nvSpPr>
-          <p:cNvPr id="24" name="Shape 24"/>
-          <p:cNvSpPr/>
-          <p:nvPr/>
-        </p:nvSpPr>
-        <p:spPr>
-          <a:xfrm>
-            <a:off x="841248" y="4817581"/>
-            <a:ext cx="10515600" cy="617873"/>
+          <p:cNvPr id="24" name="TextBox 24"/>
+          <p:cNvSpPr txBox="1"/>
+          <p:nvPr/>
+        </p:nvSpPr>
+        <p:spPr>
+          <a:xfrm>
+            <a:off x="841248" y="4431411"/>
+            <a:ext cx="6272784" cy="540639"/>
+          </a:xfrm>
+          <a:prstGeom prst="rect">
+            <a:avLst/>
+          </a:prstGeom>
+          <a:noFill/>
+        </p:spPr>
+        <p:txBody>
+          <a:bodyPr wrap="square" lIns="0" tIns="0" rIns="0" bIns="0" anchor="ctr" rtlCol="0"/>
+          <a:lstStyle/>
+          <a:p>
+            <a:pPr algn="l">
+              <a:lnSpc>
+                <a:spcPct val="145000"/>
+              </a:lnSpc>
+            </a:pPr>
+            <a:r>
+              <a:rPr lang="ja-JP" altLang="en-US" sz="1500" b="0">
+                <a:solidFill>
+                  <a:srgbClr val="2B2D42"/>
+                </a:solidFill>
+                <a:latin typeface="Yu Gothic"/>
+                <a:ea typeface="Yu Gothic"/>
+                <a:cs typeface="Yu Gothic"/>
+              </a:rPr>
+              <a:t>収入合算が要るなら、確定申告書2〜3期分を用意</a:t>
+            </a:r>
+          </a:p>
+        </p:txBody>
+      </p:sp>
+      <p:sp>
+        <p:nvSpPr>
+          <p:cNvPr id="25" name="TextBox 25"/>
+          <p:cNvSpPr txBox="1"/>
+          <p:nvPr/>
+        </p:nvSpPr>
+        <p:spPr>
+          <a:xfrm>
+            <a:off x="7242048" y="4431411"/>
+            <a:ext cx="2157984" cy="540639"/>
+          </a:xfrm>
+          <a:prstGeom prst="rect">
+            <a:avLst/>
+          </a:prstGeom>
+          <a:noFill/>
+        </p:spPr>
+        <p:txBody>
+          <a:bodyPr wrap="square" lIns="0" tIns="0" rIns="0" bIns="0" anchor="ctr" rtlCol="0"/>
+          <a:lstStyle/>
+          <a:p>
+            <a:pPr algn="l">
+              <a:lnSpc>
+                <a:spcPct val="145000"/>
+              </a:lnSpc>
+            </a:pPr>
+            <a:r>
+              <a:rPr lang="ja-JP" altLang="en-US" sz="1500" b="0">
+                <a:solidFill>
+                  <a:srgbClr val="2B2D42"/>
+                </a:solidFill>
+                <a:latin typeface="Yu Gothic"/>
+                <a:ea typeface="Yu Gothic"/>
+                <a:cs typeface="Yu Gothic"/>
+              </a:rPr>
+              <a:t>2027年後半</a:t>
+            </a:r>
+          </a:p>
+        </p:txBody>
+      </p:sp>
+      <p:sp>
+        <p:nvSpPr>
+          <p:cNvPr id="26" name="TextBox 26"/>
+          <p:cNvSpPr txBox="1"/>
+          <p:nvPr/>
+        </p:nvSpPr>
+        <p:spPr>
+          <a:xfrm>
+            <a:off x="9528048" y="4431411"/>
+            <a:ext cx="1700784" cy="540639"/>
+          </a:xfrm>
+          <a:prstGeom prst="rect">
+            <a:avLst/>
+          </a:prstGeom>
+          <a:noFill/>
+        </p:spPr>
+        <p:txBody>
+          <a:bodyPr wrap="square" lIns="0" tIns="0" rIns="0" bIns="0" anchor="ctr" rtlCol="0"/>
+          <a:lstStyle/>
+          <a:p>
+            <a:pPr algn="l">
+              <a:lnSpc>
+                <a:spcPct val="145000"/>
+              </a:lnSpc>
+            </a:pPr>
+            <a:r>
+              <a:rPr lang="ja-JP" altLang="en-US" sz="1500" b="0">
+                <a:solidFill>
+                  <a:srgbClr val="2B2D42"/>
+                </a:solidFill>
+                <a:latin typeface="Yu Gothic"/>
+                <a:ea typeface="Yu Gothic"/>
+                <a:cs typeface="Yu Gothic"/>
+              </a:rPr>
+              <a:t>【彼の名前】</a:t>
+            </a:r>
+          </a:p>
+        </p:txBody>
+      </p:sp>
+      <p:sp>
+        <p:nvSpPr>
+          <p:cNvPr id="27" name="Shape 27"/>
+          <p:cNvSpPr/>
+          <p:nvPr/>
+        </p:nvSpPr>
+        <p:spPr>
+          <a:xfrm>
+            <a:off x="841248" y="4966970"/>
+            <a:ext cx="10515600" cy="9525"/>
+          </a:xfrm>
+          <a:prstGeom prst="rect">
+            <a:avLst/>
+          </a:prstGeom>
+          <a:solidFill>
+            <a:srgbClr val="EBE4DA"/>
+          </a:solidFill>
+          <a:ln>
+            <a:noFill/>
+          </a:ln>
+        </p:spPr>
+        <p:txBody>
+          <a:bodyPr wrap="square" lIns="0" tIns="0" rIns="0" bIns="0" anchor="ctr" rtlCol="0"/>
+          <a:lstStyle/>
+          <a:p/>
+        </p:txBody>
+      </p:sp>
+      <p:sp>
+        <p:nvSpPr>
+          <p:cNvPr id="28" name="Shape 28"/>
+          <p:cNvSpPr/>
+          <p:nvPr/>
+        </p:nvSpPr>
+        <p:spPr>
+          <a:xfrm>
+            <a:off x="841248" y="4972050"/>
+            <a:ext cx="10515600" cy="540639"/>
           </a:xfrm>
           <a:prstGeom prst="roundRect">
             <a:avLst>
-              <a:gd name="adj" fmla="val 20718"/>
+              <a:gd name="adj" fmla="val 23678"/>
             </a:avLst>
           </a:prstGeom>
           <a:solidFill>
@@ -9871,31 +10208,31 @@
       </p:sp>
       <p:sp>
         <p:nvSpPr>
-          <p:cNvPr id="25" name="TextBox 25"/>
-          <p:cNvSpPr txBox="1"/>
-          <p:nvPr/>
-        </p:nvSpPr>
-        <p:spPr>
-          <a:xfrm>
-            <a:off x="932688" y="4817581"/>
-            <a:ext cx="6181344" cy="617873"/>
-          </a:xfrm>
-          <a:prstGeom prst="rect">
-            <a:avLst/>
-          </a:prstGeom>
-          <a:noFill/>
-        </p:spPr>
-        <p:txBody>
-          <a:bodyPr wrap="square" lIns="0" tIns="0" rIns="0" bIns="0" anchor="ctr" rtlCol="0"/>
-          <a:lstStyle/>
-          <a:p>
-            <a:pPr algn="l">
-              <a:lnSpc>
-                <a:spcPct val="150000"/>
-              </a:lnSpc>
-            </a:pPr>
-            <a:r>
-              <a:rPr lang="ja-JP" altLang="en-US" sz="1300" b="1">
+          <p:cNvPr id="29" name="TextBox 29"/>
+          <p:cNvSpPr txBox="1"/>
+          <p:nvPr/>
+        </p:nvSpPr>
+        <p:spPr>
+          <a:xfrm>
+            <a:off x="932688" y="4972050"/>
+            <a:ext cx="6181344" cy="540639"/>
+          </a:xfrm>
+          <a:prstGeom prst="rect">
+            <a:avLst/>
+          </a:prstGeom>
+          <a:noFill/>
+        </p:spPr>
+        <p:txBody>
+          <a:bodyPr wrap="square" lIns="0" tIns="0" rIns="0" bIns="0" anchor="ctr" rtlCol="0"/>
+          <a:lstStyle/>
+          <a:p>
+            <a:pPr algn="l">
+              <a:lnSpc>
+                <a:spcPct val="145000"/>
+              </a:lnSpc>
+            </a:pPr>
+            <a:r>
+              <a:rPr lang="ja-JP" altLang="en-US" sz="1500" b="1">
                 <a:solidFill>
                   <a:srgbClr val="2B2D42"/>
                 </a:solidFill>
@@ -9910,31 +10247,31 @@
       </p:sp>
       <p:sp>
         <p:nvSpPr>
-          <p:cNvPr id="26" name="TextBox 26"/>
-          <p:cNvSpPr txBox="1"/>
-          <p:nvPr/>
-        </p:nvSpPr>
-        <p:spPr>
-          <a:xfrm>
-            <a:off x="7333488" y="4817581"/>
-            <a:ext cx="2066544" cy="617873"/>
-          </a:xfrm>
-          <a:prstGeom prst="rect">
-            <a:avLst/>
-          </a:prstGeom>
-          <a:noFill/>
-        </p:spPr>
-        <p:txBody>
-          <a:bodyPr wrap="square" lIns="0" tIns="0" rIns="0" bIns="0" anchor="ctr" rtlCol="0"/>
-          <a:lstStyle/>
-          <a:p>
-            <a:pPr algn="l">
-              <a:lnSpc>
-                <a:spcPct val="150000"/>
-              </a:lnSpc>
-            </a:pPr>
-            <a:r>
-              <a:rPr lang="ja-JP" altLang="en-US" sz="1300" b="1">
+          <p:cNvPr id="30" name="TextBox 30"/>
+          <p:cNvSpPr txBox="1"/>
+          <p:nvPr/>
+        </p:nvSpPr>
+        <p:spPr>
+          <a:xfrm>
+            <a:off x="7333488" y="4972050"/>
+            <a:ext cx="2066544" cy="540639"/>
+          </a:xfrm>
+          <a:prstGeom prst="rect">
+            <a:avLst/>
+          </a:prstGeom>
+          <a:noFill/>
+        </p:spPr>
+        <p:txBody>
+          <a:bodyPr wrap="square" lIns="0" tIns="0" rIns="0" bIns="0" anchor="ctr" rtlCol="0"/>
+          <a:lstStyle/>
+          <a:p>
+            <a:pPr algn="l">
+              <a:lnSpc>
+                <a:spcPct val="145000"/>
+              </a:lnSpc>
+            </a:pPr>
+            <a:r>
+              <a:rPr lang="ja-JP" altLang="en-US" sz="1500" b="1">
                 <a:solidFill>
                   <a:srgbClr val="2B2D42"/>
                 </a:solidFill>
@@ -9949,31 +10286,31 @@
       </p:sp>
       <p:sp>
         <p:nvSpPr>
-          <p:cNvPr id="27" name="TextBox 27"/>
-          <p:cNvSpPr txBox="1"/>
-          <p:nvPr/>
-        </p:nvSpPr>
-        <p:spPr>
-          <a:xfrm>
-            <a:off x="9619488" y="4817581"/>
-            <a:ext cx="1609344" cy="617873"/>
-          </a:xfrm>
-          <a:prstGeom prst="rect">
-            <a:avLst/>
-          </a:prstGeom>
-          <a:noFill/>
-        </p:spPr>
-        <p:txBody>
-          <a:bodyPr wrap="square" lIns="0" tIns="0" rIns="0" bIns="0" anchor="ctr" rtlCol="0"/>
-          <a:lstStyle/>
-          <a:p>
-            <a:pPr algn="l">
-              <a:lnSpc>
-                <a:spcPct val="150000"/>
-              </a:lnSpc>
-            </a:pPr>
-            <a:r>
-              <a:rPr lang="ja-JP" altLang="en-US" sz="1300" b="1">
+          <p:cNvPr id="31" name="TextBox 31"/>
+          <p:cNvSpPr txBox="1"/>
+          <p:nvPr/>
+        </p:nvSpPr>
+        <p:spPr>
+          <a:xfrm>
+            <a:off x="9619488" y="4972050"/>
+            <a:ext cx="1609344" cy="540639"/>
+          </a:xfrm>
+          <a:prstGeom prst="rect">
+            <a:avLst/>
+          </a:prstGeom>
+          <a:noFill/>
+        </p:spPr>
+        <p:txBody>
+          <a:bodyPr wrap="square" lIns="0" tIns="0" rIns="0" bIns="0" anchor="ctr" rtlCol="0"/>
+          <a:lstStyle/>
+          <a:p>
+            <a:pPr algn="l">
+              <a:lnSpc>
+                <a:spcPct val="145000"/>
+              </a:lnSpc>
+            </a:pPr>
+            <a:r>
+              <a:rPr lang="ja-JP" altLang="en-US" sz="1500" b="1">
                 <a:solidFill>
                   <a:srgbClr val="2B2D42"/>
                 </a:solidFill>
@@ -9988,13 +10325,13 @@
       </p:sp>
       <p:sp>
         <p:nvSpPr>
-          <p:cNvPr id="28" name="Shape 28"/>
-          <p:cNvSpPr/>
-          <p:nvPr/>
-        </p:nvSpPr>
-        <p:spPr>
-          <a:xfrm>
-            <a:off x="841248" y="5430374"/>
+          <p:cNvPr id="32" name="Shape 32"/>
+          <p:cNvSpPr/>
+          <p:nvPr/>
+        </p:nvSpPr>
+        <p:spPr>
+          <a:xfrm>
+            <a:off x="841248" y="5507609"/>
             <a:ext cx="10515600" cy="9525"/>
           </a:xfrm>
           <a:prstGeom prst="rect">
@@ -10015,31 +10352,31 @@
       </p:sp>
       <p:sp>
         <p:nvSpPr>
-          <p:cNvPr id="29" name="TextBox 29"/>
-          <p:cNvSpPr txBox="1"/>
-          <p:nvPr/>
-        </p:nvSpPr>
-        <p:spPr>
-          <a:xfrm>
-            <a:off x="841248" y="5435454"/>
-            <a:ext cx="6272784" cy="617873"/>
-          </a:xfrm>
-          <a:prstGeom prst="rect">
-            <a:avLst/>
-          </a:prstGeom>
-          <a:noFill/>
-        </p:spPr>
-        <p:txBody>
-          <a:bodyPr wrap="square" lIns="0" tIns="0" rIns="0" bIns="0" anchor="ctr" rtlCol="0"/>
-          <a:lstStyle/>
-          <a:p>
-            <a:pPr algn="l">
-              <a:lnSpc>
-                <a:spcPct val="150000"/>
-              </a:lnSpc>
-            </a:pPr>
-            <a:r>
-              <a:rPr lang="ja-JP" altLang="en-US" sz="1300" b="0">
+          <p:cNvPr id="33" name="TextBox 33"/>
+          <p:cNvSpPr txBox="1"/>
+          <p:nvPr/>
+        </p:nvSpPr>
+        <p:spPr>
+          <a:xfrm>
+            <a:off x="841248" y="5512689"/>
+            <a:ext cx="6272784" cy="540639"/>
+          </a:xfrm>
+          <a:prstGeom prst="rect">
+            <a:avLst/>
+          </a:prstGeom>
+          <a:noFill/>
+        </p:spPr>
+        <p:txBody>
+          <a:bodyPr wrap="square" lIns="0" tIns="0" rIns="0" bIns="0" anchor="ctr" rtlCol="0"/>
+          <a:lstStyle/>
+          <a:p>
+            <a:pPr algn="l">
+              <a:lnSpc>
+                <a:spcPct val="145000"/>
+              </a:lnSpc>
+            </a:pPr>
+            <a:r>
+              <a:rPr lang="ja-JP" altLang="en-US" sz="1500" b="0">
                 <a:solidFill>
                   <a:srgbClr val="2B2D42"/>
                 </a:solidFill>
@@ -10054,31 +10391,31 @@
       </p:sp>
       <p:sp>
         <p:nvSpPr>
-          <p:cNvPr id="30" name="TextBox 30"/>
-          <p:cNvSpPr txBox="1"/>
-          <p:nvPr/>
-        </p:nvSpPr>
-        <p:spPr>
-          <a:xfrm>
-            <a:off x="7242048" y="5435454"/>
-            <a:ext cx="2157984" cy="617873"/>
-          </a:xfrm>
-          <a:prstGeom prst="rect">
-            <a:avLst/>
-          </a:prstGeom>
-          <a:noFill/>
-        </p:spPr>
-        <p:txBody>
-          <a:bodyPr wrap="square" lIns="0" tIns="0" rIns="0" bIns="0" anchor="ctr" rtlCol="0"/>
-          <a:lstStyle/>
-          <a:p>
-            <a:pPr algn="l">
-              <a:lnSpc>
-                <a:spcPct val="150000"/>
-              </a:lnSpc>
-            </a:pPr>
-            <a:r>
-              <a:rPr lang="ja-JP" altLang="en-US" sz="1300" b="0">
+          <p:cNvPr id="34" name="TextBox 34"/>
+          <p:cNvSpPr txBox="1"/>
+          <p:nvPr/>
+        </p:nvSpPr>
+        <p:spPr>
+          <a:xfrm>
+            <a:off x="7242048" y="5512689"/>
+            <a:ext cx="2157984" cy="540639"/>
+          </a:xfrm>
+          <a:prstGeom prst="rect">
+            <a:avLst/>
+          </a:prstGeom>
+          <a:noFill/>
+        </p:spPr>
+        <p:txBody>
+          <a:bodyPr wrap="square" lIns="0" tIns="0" rIns="0" bIns="0" anchor="ctr" rtlCol="0"/>
+          <a:lstStyle/>
+          <a:p>
+            <a:pPr algn="l">
+              <a:lnSpc>
+                <a:spcPct val="145000"/>
+              </a:lnSpc>
+            </a:pPr>
+            <a:r>
+              <a:rPr lang="ja-JP" altLang="en-US" sz="1500" b="0">
                 <a:solidFill>
                   <a:srgbClr val="2B2D42"/>
                 </a:solidFill>
@@ -10093,31 +10430,31 @@
       </p:sp>
       <p:sp>
         <p:nvSpPr>
-          <p:cNvPr id="31" name="TextBox 31"/>
-          <p:cNvSpPr txBox="1"/>
-          <p:nvPr/>
-        </p:nvSpPr>
-        <p:spPr>
-          <a:xfrm>
-            <a:off x="9528048" y="5435454"/>
-            <a:ext cx="1700784" cy="617873"/>
-          </a:xfrm>
-          <a:prstGeom prst="rect">
-            <a:avLst/>
-          </a:prstGeom>
-          <a:noFill/>
-        </p:spPr>
-        <p:txBody>
-          <a:bodyPr wrap="square" lIns="0" tIns="0" rIns="0" bIns="0" anchor="ctr" rtlCol="0"/>
-          <a:lstStyle/>
-          <a:p>
-            <a:pPr algn="l">
-              <a:lnSpc>
-                <a:spcPct val="150000"/>
-              </a:lnSpc>
-            </a:pPr>
-            <a:r>
-              <a:rPr lang="ja-JP" altLang="en-US" sz="1300" b="0">
+          <p:cNvPr id="35" name="TextBox 35"/>
+          <p:cNvSpPr txBox="1"/>
+          <p:nvPr/>
+        </p:nvSpPr>
+        <p:spPr>
+          <a:xfrm>
+            <a:off x="9528048" y="5512689"/>
+            <a:ext cx="1700784" cy="540639"/>
+          </a:xfrm>
+          <a:prstGeom prst="rect">
+            <a:avLst/>
+          </a:prstGeom>
+          <a:noFill/>
+        </p:spPr>
+        <p:txBody>
+          <a:bodyPr wrap="square" lIns="0" tIns="0" rIns="0" bIns="0" anchor="ctr" rtlCol="0"/>
+          <a:lstStyle/>
+          <a:p>
+            <a:pPr algn="l">
+              <a:lnSpc>
+                <a:spcPct val="145000"/>
+              </a:lnSpc>
+            </a:pPr>
+            <a:r>
+              <a:rPr lang="ja-JP" altLang="en-US" sz="1500" b="0">
                 <a:solidFill>
                   <a:srgbClr val="2B2D42"/>
                 </a:solidFill>
@@ -10132,7 +10469,7 @@
       </p:sp>
       <p:sp>
         <p:nvSpPr>
-          <p:cNvPr id="32" name="TextBox 32"/>
+          <p:cNvPr id="36" name="TextBox 36"/>
           <p:cNvSpPr txBox="1"/>
           <p:nvPr/>
         </p:nvSpPr>
@@ -10156,7 +10493,7 @@
               </a:lnSpc>
             </a:pPr>
             <a:r>
-              <a:rPr lang="ja-JP" altLang="en-US" sz="900" b="0">
+              <a:rPr lang="ja-JP" altLang="en-US" sz="1000" b="0">
                 <a:solidFill>
                   <a:srgbClr val="B8B2A8"/>
                 </a:solidFill>
@@ -10171,7 +10508,7 @@
       </p:sp>
       <p:sp>
         <p:nvSpPr>
-          <p:cNvPr id="33" name="Shape 33"/>
+          <p:cNvPr id="37" name="Shape 37"/>
           <p:cNvSpPr/>
           <p:nvPr/>
         </p:nvSpPr>

--- a/proposal/ふたりの計画のご提案.pptx
+++ b/proposal/ふたりの計画のご提案.pptx
@@ -907,7 +907,7 @@
                 <a:ea typeface="Yu Gothic"/>
                 <a:cs typeface="Yu Gothic"/>
               </a:rPr>
-              <a:t>【彼の名前】さん 御中</a:t>
+              <a:t>凪さん 御中</a:t>
             </a:r>
           </a:p>
         </p:txBody>
@@ -934,7 +934,7 @@
           <a:p>
             <a:pPr algn="l">
               <a:lnSpc>
-                <a:spcPct val="112000"/>
+                <a:spcPct val="105000"/>
               </a:lnSpc>
             </a:pPr>
             <a:r>
@@ -952,7 +952,7 @@
           <a:p>
             <a:pPr algn="l">
               <a:lnSpc>
-                <a:spcPct val="112000"/>
+                <a:spcPct val="105000"/>
               </a:lnSpc>
             </a:pPr>
             <a:r>
@@ -1141,7 +1141,7 @@
           <a:p>
             <a:pPr algn="l">
               <a:lnSpc>
-                <a:spcPct val="165000"/>
+                <a:spcPct val="140000"/>
               </a:lnSpc>
             </a:pPr>
             <a:r>
@@ -1233,20 +1233,20 @@
         <p:spPr>
           <a:xfrm>
             <a:off x="841248" y="2414016"/>
-            <a:ext cx="2320290" cy="1097280"/>
-          </a:xfrm>
-          <a:prstGeom prst="rect">
-            <a:avLst/>
-          </a:prstGeom>
-          <a:noFill/>
-        </p:spPr>
-        <p:txBody>
-          <a:bodyPr wrap="square" lIns="0" tIns="0" rIns="0" bIns="0" anchor="t" rtlCol="0"/>
-          <a:lstStyle/>
-          <a:p>
-            <a:pPr algn="l">
-              <a:lnSpc>
-                <a:spcPct val="135000"/>
+            <a:ext cx="2320290" cy="1005840"/>
+          </a:xfrm>
+          <a:prstGeom prst="rect">
+            <a:avLst/>
+          </a:prstGeom>
+          <a:noFill/>
+        </p:spPr>
+        <p:txBody>
+          <a:bodyPr wrap="square" lIns="0" tIns="0" rIns="0" bIns="0" anchor="t" rtlCol="0"/>
+          <a:lstStyle/>
+          <a:p>
+            <a:pPr algn="l">
+              <a:lnSpc>
+                <a:spcPct val="125000"/>
               </a:lnSpc>
             </a:pPr>
             <a:r>
@@ -1264,7 +1264,7 @@
           <a:p>
             <a:pPr algn="l">
               <a:lnSpc>
-                <a:spcPct val="135000"/>
+                <a:spcPct val="125000"/>
               </a:lnSpc>
             </a:pPr>
             <a:r>
@@ -1289,21 +1289,21 @@
         </p:nvSpPr>
         <p:spPr>
           <a:xfrm>
-            <a:off x="841248" y="3602736"/>
-            <a:ext cx="2320290" cy="1353312"/>
-          </a:xfrm>
-          <a:prstGeom prst="rect">
-            <a:avLst/>
-          </a:prstGeom>
-          <a:noFill/>
-        </p:spPr>
-        <p:txBody>
-          <a:bodyPr wrap="square" lIns="0" tIns="0" rIns="0" bIns="0" anchor="t" rtlCol="0"/>
-          <a:lstStyle/>
-          <a:p>
-            <a:pPr algn="l">
-              <a:lnSpc>
-                <a:spcPct val="175000"/>
+            <a:off x="841248" y="3511296"/>
+            <a:ext cx="2320290" cy="1444752"/>
+          </a:xfrm>
+          <a:prstGeom prst="rect">
+            <a:avLst/>
+          </a:prstGeom>
+          <a:noFill/>
+        </p:spPr>
+        <p:txBody>
+          <a:bodyPr wrap="square" lIns="0" tIns="0" rIns="0" bIns="0" anchor="t" rtlCol="0"/>
+          <a:lstStyle/>
+          <a:p>
+            <a:pPr algn="l">
+              <a:lnSpc>
+                <a:spcPct val="155000"/>
               </a:lnSpc>
             </a:pPr>
             <a:r>
@@ -1395,20 +1395,20 @@
         <p:spPr>
           <a:xfrm>
             <a:off x="3573018" y="2414016"/>
-            <a:ext cx="2320290" cy="1097280"/>
-          </a:xfrm>
-          <a:prstGeom prst="rect">
-            <a:avLst/>
-          </a:prstGeom>
-          <a:noFill/>
-        </p:spPr>
-        <p:txBody>
-          <a:bodyPr wrap="square" lIns="0" tIns="0" rIns="0" bIns="0" anchor="t" rtlCol="0"/>
-          <a:lstStyle/>
-          <a:p>
-            <a:pPr algn="l">
-              <a:lnSpc>
-                <a:spcPct val="135000"/>
+            <a:ext cx="2320290" cy="1005840"/>
+          </a:xfrm>
+          <a:prstGeom prst="rect">
+            <a:avLst/>
+          </a:prstGeom>
+          <a:noFill/>
+        </p:spPr>
+        <p:txBody>
+          <a:bodyPr wrap="square" lIns="0" tIns="0" rIns="0" bIns="0" anchor="t" rtlCol="0"/>
+          <a:lstStyle/>
+          <a:p>
+            <a:pPr algn="l">
+              <a:lnSpc>
+                <a:spcPct val="125000"/>
               </a:lnSpc>
             </a:pPr>
             <a:r>
@@ -1426,7 +1426,7 @@
           <a:p>
             <a:pPr algn="l">
               <a:lnSpc>
-                <a:spcPct val="135000"/>
+                <a:spcPct val="125000"/>
               </a:lnSpc>
             </a:pPr>
             <a:r>
@@ -1451,21 +1451,21 @@
         </p:nvSpPr>
         <p:spPr>
           <a:xfrm>
-            <a:off x="3573018" y="3602736"/>
-            <a:ext cx="2320290" cy="1353312"/>
-          </a:xfrm>
-          <a:prstGeom prst="rect">
-            <a:avLst/>
-          </a:prstGeom>
-          <a:noFill/>
-        </p:spPr>
-        <p:txBody>
-          <a:bodyPr wrap="square" lIns="0" tIns="0" rIns="0" bIns="0" anchor="t" rtlCol="0"/>
-          <a:lstStyle/>
-          <a:p>
-            <a:pPr algn="l">
-              <a:lnSpc>
-                <a:spcPct val="175000"/>
+            <a:off x="3573018" y="3511296"/>
+            <a:ext cx="2320290" cy="1444752"/>
+          </a:xfrm>
+          <a:prstGeom prst="rect">
+            <a:avLst/>
+          </a:prstGeom>
+          <a:noFill/>
+        </p:spPr>
+        <p:txBody>
+          <a:bodyPr wrap="square" lIns="0" tIns="0" rIns="0" bIns="0" anchor="t" rtlCol="0"/>
+          <a:lstStyle/>
+          <a:p>
+            <a:pPr algn="l">
+              <a:lnSpc>
+                <a:spcPct val="155000"/>
               </a:lnSpc>
             </a:pPr>
             <a:r>
@@ -1557,20 +1557,20 @@
         <p:spPr>
           <a:xfrm>
             <a:off x="6304788" y="2414016"/>
-            <a:ext cx="2320290" cy="1097280"/>
-          </a:xfrm>
-          <a:prstGeom prst="rect">
-            <a:avLst/>
-          </a:prstGeom>
-          <a:noFill/>
-        </p:spPr>
-        <p:txBody>
-          <a:bodyPr wrap="square" lIns="0" tIns="0" rIns="0" bIns="0" anchor="t" rtlCol="0"/>
-          <a:lstStyle/>
-          <a:p>
-            <a:pPr algn="l">
-              <a:lnSpc>
-                <a:spcPct val="135000"/>
+            <a:ext cx="2320290" cy="1005840"/>
+          </a:xfrm>
+          <a:prstGeom prst="rect">
+            <a:avLst/>
+          </a:prstGeom>
+          <a:noFill/>
+        </p:spPr>
+        <p:txBody>
+          <a:bodyPr wrap="square" lIns="0" tIns="0" rIns="0" bIns="0" anchor="t" rtlCol="0"/>
+          <a:lstStyle/>
+          <a:p>
+            <a:pPr algn="l">
+              <a:lnSpc>
+                <a:spcPct val="125000"/>
               </a:lnSpc>
             </a:pPr>
             <a:r>
@@ -1588,7 +1588,7 @@
           <a:p>
             <a:pPr algn="l">
               <a:lnSpc>
-                <a:spcPct val="135000"/>
+                <a:spcPct val="125000"/>
               </a:lnSpc>
             </a:pPr>
             <a:r>
@@ -1613,21 +1613,21 @@
         </p:nvSpPr>
         <p:spPr>
           <a:xfrm>
-            <a:off x="6304788" y="3602736"/>
-            <a:ext cx="2320290" cy="1353312"/>
-          </a:xfrm>
-          <a:prstGeom prst="rect">
-            <a:avLst/>
-          </a:prstGeom>
-          <a:noFill/>
-        </p:spPr>
-        <p:txBody>
-          <a:bodyPr wrap="square" lIns="0" tIns="0" rIns="0" bIns="0" anchor="t" rtlCol="0"/>
-          <a:lstStyle/>
-          <a:p>
-            <a:pPr algn="l">
-              <a:lnSpc>
-                <a:spcPct val="175000"/>
+            <a:off x="6304788" y="3511296"/>
+            <a:ext cx="2320290" cy="1444752"/>
+          </a:xfrm>
+          <a:prstGeom prst="rect">
+            <a:avLst/>
+          </a:prstGeom>
+          <a:noFill/>
+        </p:spPr>
+        <p:txBody>
+          <a:bodyPr wrap="square" lIns="0" tIns="0" rIns="0" bIns="0" anchor="t" rtlCol="0"/>
+          <a:lstStyle/>
+          <a:p>
+            <a:pPr algn="l">
+              <a:lnSpc>
+                <a:spcPct val="155000"/>
               </a:lnSpc>
             </a:pPr>
             <a:r>
@@ -1719,20 +1719,20 @@
         <p:spPr>
           <a:xfrm>
             <a:off x="9036558" y="2414016"/>
-            <a:ext cx="2320290" cy="1097280"/>
-          </a:xfrm>
-          <a:prstGeom prst="rect">
-            <a:avLst/>
-          </a:prstGeom>
-          <a:noFill/>
-        </p:spPr>
-        <p:txBody>
-          <a:bodyPr wrap="square" lIns="0" tIns="0" rIns="0" bIns="0" anchor="t" rtlCol="0"/>
-          <a:lstStyle/>
-          <a:p>
-            <a:pPr algn="l">
-              <a:lnSpc>
-                <a:spcPct val="135000"/>
+            <a:ext cx="2320290" cy="1005840"/>
+          </a:xfrm>
+          <a:prstGeom prst="rect">
+            <a:avLst/>
+          </a:prstGeom>
+          <a:noFill/>
+        </p:spPr>
+        <p:txBody>
+          <a:bodyPr wrap="square" lIns="0" tIns="0" rIns="0" bIns="0" anchor="t" rtlCol="0"/>
+          <a:lstStyle/>
+          <a:p>
+            <a:pPr algn="l">
+              <a:lnSpc>
+                <a:spcPct val="125000"/>
               </a:lnSpc>
             </a:pPr>
             <a:r>
@@ -1750,7 +1750,7 @@
           <a:p>
             <a:pPr algn="l">
               <a:lnSpc>
-                <a:spcPct val="135000"/>
+                <a:spcPct val="125000"/>
               </a:lnSpc>
             </a:pPr>
             <a:r>
@@ -1775,21 +1775,21 @@
         </p:nvSpPr>
         <p:spPr>
           <a:xfrm>
-            <a:off x="9036558" y="3602736"/>
-            <a:ext cx="2320290" cy="1353312"/>
-          </a:xfrm>
-          <a:prstGeom prst="rect">
-            <a:avLst/>
-          </a:prstGeom>
-          <a:noFill/>
-        </p:spPr>
-        <p:txBody>
-          <a:bodyPr wrap="square" lIns="0" tIns="0" rIns="0" bIns="0" anchor="t" rtlCol="0"/>
-          <a:lstStyle/>
-          <a:p>
-            <a:pPr algn="l">
-              <a:lnSpc>
-                <a:spcPct val="175000"/>
+            <a:off x="9036558" y="3511296"/>
+            <a:ext cx="2320290" cy="1444752"/>
+          </a:xfrm>
+          <a:prstGeom prst="rect">
+            <a:avLst/>
+          </a:prstGeom>
+          <a:noFill/>
+        </p:spPr>
+        <p:txBody>
+          <a:bodyPr wrap="square" lIns="0" tIns="0" rIns="0" bIns="0" anchor="t" rtlCol="0"/>
+          <a:lstStyle/>
+          <a:p>
+            <a:pPr algn="l">
+              <a:lnSpc>
+                <a:spcPct val="155000"/>
               </a:lnSpc>
             </a:pPr>
             <a:r>
@@ -1828,7 +1828,7 @@
           <a:p>
             <a:pPr algn="l">
               <a:lnSpc>
-                <a:spcPct val="140000"/>
+                <a:spcPct val="125000"/>
               </a:lnSpc>
             </a:pPr>
             <a:r>
@@ -2017,7 +2017,7 @@
           <a:p>
             <a:pPr algn="l">
               <a:lnSpc>
-                <a:spcPct val="120000"/>
+                <a:spcPct val="112000"/>
               </a:lnSpc>
             </a:pPr>
             <a:r>
@@ -2035,7 +2035,7 @@
           <a:p>
             <a:pPr algn="l">
               <a:lnSpc>
-                <a:spcPct val="120000"/>
+                <a:spcPct val="112000"/>
               </a:lnSpc>
             </a:pPr>
             <a:r>
@@ -2074,7 +2074,7 @@
           <a:p>
             <a:pPr algn="l">
               <a:lnSpc>
-                <a:spcPct val="160000"/>
+                <a:spcPct val="145000"/>
               </a:lnSpc>
             </a:pPr>
             <a:r>
@@ -2185,7 +2185,7 @@
           <a:p>
             <a:pPr algn="l">
               <a:lnSpc>
-                <a:spcPct val="165000"/>
+                <a:spcPct val="140000"/>
               </a:lnSpc>
             </a:pPr>
             <a:r>
@@ -2288,7 +2288,7 @@
           <a:p>
             <a:pPr algn="l">
               <a:lnSpc>
-                <a:spcPct val="170000"/>
+                <a:spcPct val="145000"/>
               </a:lnSpc>
             </a:pPr>
             <a:r>
@@ -2388,7 +2388,7 @@
           <a:p>
             <a:pPr algn="l">
               <a:lnSpc>
-                <a:spcPct val="170000"/>
+                <a:spcPct val="145000"/>
               </a:lnSpc>
             </a:pPr>
             <a:r>
@@ -2488,7 +2488,7 @@
           <a:p>
             <a:pPr algn="l">
               <a:lnSpc>
-                <a:spcPct val="170000"/>
+                <a:spcPct val="145000"/>
               </a:lnSpc>
             </a:pPr>
             <a:r>
@@ -2549,7 +2549,7 @@
           <a:p>
             <a:pPr algn="l">
               <a:lnSpc>
-                <a:spcPct val="140000"/>
+                <a:spcPct val="125000"/>
               </a:lnSpc>
             </a:pPr>
             <a:r>
@@ -2738,7 +2738,7 @@
           <a:p>
             <a:pPr algn="l">
               <a:lnSpc>
-                <a:spcPct val="165000"/>
+                <a:spcPct val="140000"/>
               </a:lnSpc>
             </a:pPr>
             <a:r>
@@ -2857,7 +2857,7 @@
                 <a:ea typeface="Yu Gothic"/>
                 <a:cs typeface="Yu Gothic"/>
               </a:rPr>
-              <a:t>【彼の名前】</a:t>
+              <a:t>凪</a:t>
             </a:r>
           </a:p>
         </p:txBody>
@@ -2911,7 +2911,7 @@
           <a:p>
             <a:pPr algn="l">
               <a:lnSpc>
-                <a:spcPct val="145000"/>
+                <a:spcPct val="130000"/>
               </a:lnSpc>
             </a:pPr>
             <a:r>
@@ -2950,7 +2950,7 @@
           <a:p>
             <a:pPr algn="l">
               <a:lnSpc>
-                <a:spcPct val="145000"/>
+                <a:spcPct val="130000"/>
               </a:lnSpc>
             </a:pPr>
             <a:r>
@@ -2989,7 +2989,7 @@
           <a:p>
             <a:pPr algn="l">
               <a:lnSpc>
-                <a:spcPct val="145000"/>
+                <a:spcPct val="130000"/>
               </a:lnSpc>
             </a:pPr>
             <a:r>
@@ -3055,7 +3055,7 @@
           <a:p>
             <a:pPr algn="l">
               <a:lnSpc>
-                <a:spcPct val="145000"/>
+                <a:spcPct val="130000"/>
               </a:lnSpc>
             </a:pPr>
             <a:r>
@@ -3094,7 +3094,7 @@
           <a:p>
             <a:pPr algn="l">
               <a:lnSpc>
-                <a:spcPct val="145000"/>
+                <a:spcPct val="130000"/>
               </a:lnSpc>
             </a:pPr>
             <a:r>
@@ -3133,7 +3133,7 @@
           <a:p>
             <a:pPr algn="l">
               <a:lnSpc>
-                <a:spcPct val="145000"/>
+                <a:spcPct val="130000"/>
               </a:lnSpc>
             </a:pPr>
             <a:r>
@@ -3199,7 +3199,7 @@
           <a:p>
             <a:pPr algn="l">
               <a:lnSpc>
-                <a:spcPct val="145000"/>
+                <a:spcPct val="130000"/>
               </a:lnSpc>
             </a:pPr>
             <a:r>
@@ -3238,7 +3238,7 @@
           <a:p>
             <a:pPr algn="l">
               <a:lnSpc>
-                <a:spcPct val="145000"/>
+                <a:spcPct val="130000"/>
               </a:lnSpc>
             </a:pPr>
             <a:r>
@@ -3277,7 +3277,7 @@
           <a:p>
             <a:pPr algn="l">
               <a:lnSpc>
-                <a:spcPct val="145000"/>
+                <a:spcPct val="130000"/>
               </a:lnSpc>
             </a:pPr>
             <a:r>
@@ -3343,7 +3343,7 @@
           <a:p>
             <a:pPr algn="l">
               <a:lnSpc>
-                <a:spcPct val="145000"/>
+                <a:spcPct val="130000"/>
               </a:lnSpc>
             </a:pPr>
             <a:r>
@@ -3382,7 +3382,7 @@
           <a:p>
             <a:pPr algn="l">
               <a:lnSpc>
-                <a:spcPct val="145000"/>
+                <a:spcPct val="130000"/>
               </a:lnSpc>
             </a:pPr>
             <a:r>
@@ -3421,7 +3421,7 @@
           <a:p>
             <a:pPr algn="l">
               <a:lnSpc>
-                <a:spcPct val="145000"/>
+                <a:spcPct val="130000"/>
               </a:lnSpc>
             </a:pPr>
             <a:r>
@@ -3460,7 +3460,7 @@
           <a:p>
             <a:pPr algn="l">
               <a:lnSpc>
-                <a:spcPct val="140000"/>
+                <a:spcPct val="125000"/>
               </a:lnSpc>
             </a:pPr>
             <a:r>
@@ -3649,7 +3649,7 @@
           <a:p>
             <a:pPr algn="l">
               <a:lnSpc>
-                <a:spcPct val="165000"/>
+                <a:spcPct val="140000"/>
               </a:lnSpc>
             </a:pPr>
             <a:r>
@@ -3777,7 +3777,7 @@
           <a:p>
             <a:pPr algn="l">
               <a:lnSpc>
-                <a:spcPct val="150000"/>
+                <a:spcPct val="135000"/>
               </a:lnSpc>
             </a:pPr>
             <a:r>
@@ -3905,7 +3905,7 @@
           <a:p>
             <a:pPr algn="l">
               <a:lnSpc>
-                <a:spcPct val="150000"/>
+                <a:spcPct val="135000"/>
               </a:lnSpc>
             </a:pPr>
             <a:r>
@@ -4033,7 +4033,7 @@
           <a:p>
             <a:pPr algn="l">
               <a:lnSpc>
-                <a:spcPct val="150000"/>
+                <a:spcPct val="135000"/>
               </a:lnSpc>
             </a:pPr>
             <a:r>
@@ -4072,7 +4072,7 @@
           <a:p>
             <a:pPr algn="l">
               <a:lnSpc>
-                <a:spcPct val="140000"/>
+                <a:spcPct val="125000"/>
               </a:lnSpc>
             </a:pPr>
             <a:r>
@@ -6735,7 +6735,7 @@
           <a:p>
             <a:pPr algn="l">
               <a:lnSpc>
-                <a:spcPct val="165000"/>
+                <a:spcPct val="140000"/>
               </a:lnSpc>
             </a:pPr>
             <a:r>
@@ -6852,20 +6852,20 @@
         <p:spPr>
           <a:xfrm>
             <a:off x="841248" y="2414016"/>
-            <a:ext cx="2320290" cy="1097280"/>
-          </a:xfrm>
-          <a:prstGeom prst="rect">
-            <a:avLst/>
-          </a:prstGeom>
-          <a:noFill/>
-        </p:spPr>
-        <p:txBody>
-          <a:bodyPr wrap="square" lIns="0" tIns="0" rIns="0" bIns="0" anchor="t" rtlCol="0"/>
-          <a:lstStyle/>
-          <a:p>
-            <a:pPr algn="l">
-              <a:lnSpc>
-                <a:spcPct val="135000"/>
+            <a:ext cx="2320290" cy="1005840"/>
+          </a:xfrm>
+          <a:prstGeom prst="rect">
+            <a:avLst/>
+          </a:prstGeom>
+          <a:noFill/>
+        </p:spPr>
+        <p:txBody>
+          <a:bodyPr wrap="square" lIns="0" tIns="0" rIns="0" bIns="0" anchor="t" rtlCol="0"/>
+          <a:lstStyle/>
+          <a:p>
+            <a:pPr algn="l">
+              <a:lnSpc>
+                <a:spcPct val="125000"/>
               </a:lnSpc>
             </a:pPr>
             <a:r>
@@ -6890,21 +6890,21 @@
         </p:nvSpPr>
         <p:spPr>
           <a:xfrm>
-            <a:off x="841248" y="3602736"/>
-            <a:ext cx="2320290" cy="1353312"/>
-          </a:xfrm>
-          <a:prstGeom prst="rect">
-            <a:avLst/>
-          </a:prstGeom>
-          <a:noFill/>
-        </p:spPr>
-        <p:txBody>
-          <a:bodyPr wrap="square" lIns="0" tIns="0" rIns="0" bIns="0" anchor="t" rtlCol="0"/>
-          <a:lstStyle/>
-          <a:p>
-            <a:pPr algn="l">
-              <a:lnSpc>
-                <a:spcPct val="175000"/>
+            <a:off x="841248" y="3511296"/>
+            <a:ext cx="2320290" cy="1444752"/>
+          </a:xfrm>
+          <a:prstGeom prst="rect">
+            <a:avLst/>
+          </a:prstGeom>
+          <a:noFill/>
+        </p:spPr>
+        <p:txBody>
+          <a:bodyPr wrap="square" lIns="0" tIns="0" rIns="0" bIns="0" anchor="t" rtlCol="0"/>
+          <a:lstStyle/>
+          <a:p>
+            <a:pPr algn="l">
+              <a:lnSpc>
+                <a:spcPct val="155000"/>
               </a:lnSpc>
             </a:pPr>
             <a:r>
@@ -6996,20 +6996,20 @@
         <p:spPr>
           <a:xfrm>
             <a:off x="3573018" y="2414016"/>
-            <a:ext cx="2320290" cy="1097280"/>
-          </a:xfrm>
-          <a:prstGeom prst="rect">
-            <a:avLst/>
-          </a:prstGeom>
-          <a:noFill/>
-        </p:spPr>
-        <p:txBody>
-          <a:bodyPr wrap="square" lIns="0" tIns="0" rIns="0" bIns="0" anchor="t" rtlCol="0"/>
-          <a:lstStyle/>
-          <a:p>
-            <a:pPr algn="l">
-              <a:lnSpc>
-                <a:spcPct val="135000"/>
+            <a:ext cx="2320290" cy="1005840"/>
+          </a:xfrm>
+          <a:prstGeom prst="rect">
+            <a:avLst/>
+          </a:prstGeom>
+          <a:noFill/>
+        </p:spPr>
+        <p:txBody>
+          <a:bodyPr wrap="square" lIns="0" tIns="0" rIns="0" bIns="0" anchor="t" rtlCol="0"/>
+          <a:lstStyle/>
+          <a:p>
+            <a:pPr algn="l">
+              <a:lnSpc>
+                <a:spcPct val="125000"/>
               </a:lnSpc>
             </a:pPr>
             <a:r>
@@ -7027,7 +7027,7 @@
           <a:p>
             <a:pPr algn="l">
               <a:lnSpc>
-                <a:spcPct val="135000"/>
+                <a:spcPct val="125000"/>
               </a:lnSpc>
             </a:pPr>
             <a:r>
@@ -7052,21 +7052,21 @@
         </p:nvSpPr>
         <p:spPr>
           <a:xfrm>
-            <a:off x="3573018" y="3602736"/>
-            <a:ext cx="2320290" cy="1353312"/>
-          </a:xfrm>
-          <a:prstGeom prst="rect">
-            <a:avLst/>
-          </a:prstGeom>
-          <a:noFill/>
-        </p:spPr>
-        <p:txBody>
-          <a:bodyPr wrap="square" lIns="0" tIns="0" rIns="0" bIns="0" anchor="t" rtlCol="0"/>
-          <a:lstStyle/>
-          <a:p>
-            <a:pPr algn="l">
-              <a:lnSpc>
-                <a:spcPct val="175000"/>
+            <a:off x="3573018" y="3511296"/>
+            <a:ext cx="2320290" cy="1444752"/>
+          </a:xfrm>
+          <a:prstGeom prst="rect">
+            <a:avLst/>
+          </a:prstGeom>
+          <a:noFill/>
+        </p:spPr>
+        <p:txBody>
+          <a:bodyPr wrap="square" lIns="0" tIns="0" rIns="0" bIns="0" anchor="t" rtlCol="0"/>
+          <a:lstStyle/>
+          <a:p>
+            <a:pPr algn="l">
+              <a:lnSpc>
+                <a:spcPct val="155000"/>
               </a:lnSpc>
             </a:pPr>
             <a:r>
@@ -7158,20 +7158,20 @@
         <p:spPr>
           <a:xfrm>
             <a:off x="6304788" y="2414016"/>
-            <a:ext cx="2320290" cy="1097280"/>
-          </a:xfrm>
-          <a:prstGeom prst="rect">
-            <a:avLst/>
-          </a:prstGeom>
-          <a:noFill/>
-        </p:spPr>
-        <p:txBody>
-          <a:bodyPr wrap="square" lIns="0" tIns="0" rIns="0" bIns="0" anchor="t" rtlCol="0"/>
-          <a:lstStyle/>
-          <a:p>
-            <a:pPr algn="l">
-              <a:lnSpc>
-                <a:spcPct val="135000"/>
+            <a:ext cx="2320290" cy="1005840"/>
+          </a:xfrm>
+          <a:prstGeom prst="rect">
+            <a:avLst/>
+          </a:prstGeom>
+          <a:noFill/>
+        </p:spPr>
+        <p:txBody>
+          <a:bodyPr wrap="square" lIns="0" tIns="0" rIns="0" bIns="0" anchor="t" rtlCol="0"/>
+          <a:lstStyle/>
+          <a:p>
+            <a:pPr algn="l">
+              <a:lnSpc>
+                <a:spcPct val="125000"/>
               </a:lnSpc>
             </a:pPr>
             <a:r>
@@ -7196,21 +7196,21 @@
         </p:nvSpPr>
         <p:spPr>
           <a:xfrm>
-            <a:off x="6304788" y="3602736"/>
-            <a:ext cx="2320290" cy="1353312"/>
-          </a:xfrm>
-          <a:prstGeom prst="rect">
-            <a:avLst/>
-          </a:prstGeom>
-          <a:noFill/>
-        </p:spPr>
-        <p:txBody>
-          <a:bodyPr wrap="square" lIns="0" tIns="0" rIns="0" bIns="0" anchor="t" rtlCol="0"/>
-          <a:lstStyle/>
-          <a:p>
-            <a:pPr algn="l">
-              <a:lnSpc>
-                <a:spcPct val="175000"/>
+            <a:off x="6304788" y="3511296"/>
+            <a:ext cx="2320290" cy="1444752"/>
+          </a:xfrm>
+          <a:prstGeom prst="rect">
+            <a:avLst/>
+          </a:prstGeom>
+          <a:noFill/>
+        </p:spPr>
+        <p:txBody>
+          <a:bodyPr wrap="square" lIns="0" tIns="0" rIns="0" bIns="0" anchor="t" rtlCol="0"/>
+          <a:lstStyle/>
+          <a:p>
+            <a:pPr algn="l">
+              <a:lnSpc>
+                <a:spcPct val="155000"/>
               </a:lnSpc>
             </a:pPr>
             <a:r>
@@ -7302,20 +7302,20 @@
         <p:spPr>
           <a:xfrm>
             <a:off x="9036558" y="2414016"/>
-            <a:ext cx="2320290" cy="1097280"/>
-          </a:xfrm>
-          <a:prstGeom prst="rect">
-            <a:avLst/>
-          </a:prstGeom>
-          <a:noFill/>
-        </p:spPr>
-        <p:txBody>
-          <a:bodyPr wrap="square" lIns="0" tIns="0" rIns="0" bIns="0" anchor="t" rtlCol="0"/>
-          <a:lstStyle/>
-          <a:p>
-            <a:pPr algn="l">
-              <a:lnSpc>
-                <a:spcPct val="135000"/>
+            <a:ext cx="2320290" cy="1005840"/>
+          </a:xfrm>
+          <a:prstGeom prst="rect">
+            <a:avLst/>
+          </a:prstGeom>
+          <a:noFill/>
+        </p:spPr>
+        <p:txBody>
+          <a:bodyPr wrap="square" lIns="0" tIns="0" rIns="0" bIns="0" anchor="t" rtlCol="0"/>
+          <a:lstStyle/>
+          <a:p>
+            <a:pPr algn="l">
+              <a:lnSpc>
+                <a:spcPct val="125000"/>
               </a:lnSpc>
             </a:pPr>
             <a:r>
@@ -7333,7 +7333,7 @@
           <a:p>
             <a:pPr algn="l">
               <a:lnSpc>
-                <a:spcPct val="135000"/>
+                <a:spcPct val="125000"/>
               </a:lnSpc>
             </a:pPr>
             <a:r>
@@ -7358,21 +7358,21 @@
         </p:nvSpPr>
         <p:spPr>
           <a:xfrm>
-            <a:off x="9036558" y="3602736"/>
-            <a:ext cx="2320290" cy="1353312"/>
-          </a:xfrm>
-          <a:prstGeom prst="rect">
-            <a:avLst/>
-          </a:prstGeom>
-          <a:noFill/>
-        </p:spPr>
-        <p:txBody>
-          <a:bodyPr wrap="square" lIns="0" tIns="0" rIns="0" bIns="0" anchor="t" rtlCol="0"/>
-          <a:lstStyle/>
-          <a:p>
-            <a:pPr algn="l">
-              <a:lnSpc>
-                <a:spcPct val="175000"/>
+            <a:off x="9036558" y="3511296"/>
+            <a:ext cx="2320290" cy="1444752"/>
+          </a:xfrm>
+          <a:prstGeom prst="rect">
+            <a:avLst/>
+          </a:prstGeom>
+          <a:noFill/>
+        </p:spPr>
+        <p:txBody>
+          <a:bodyPr wrap="square" lIns="0" tIns="0" rIns="0" bIns="0" anchor="t" rtlCol="0"/>
+          <a:lstStyle/>
+          <a:p>
+            <a:pPr algn="l">
+              <a:lnSpc>
+                <a:spcPct val="155000"/>
               </a:lnSpc>
             </a:pPr>
             <a:r>
@@ -7411,7 +7411,7 @@
           <a:p>
             <a:pPr algn="l">
               <a:lnSpc>
-                <a:spcPct val="140000"/>
+                <a:spcPct val="125000"/>
               </a:lnSpc>
             </a:pPr>
             <a:r>
@@ -7600,7 +7600,7 @@
           <a:p>
             <a:pPr algn="l">
               <a:lnSpc>
-                <a:spcPct val="165000"/>
+                <a:spcPct val="140000"/>
               </a:lnSpc>
             </a:pPr>
             <a:r>
@@ -7692,20 +7692,20 @@
         <p:spPr>
           <a:xfrm>
             <a:off x="841248" y="2414016"/>
-            <a:ext cx="2320290" cy="1097280"/>
-          </a:xfrm>
-          <a:prstGeom prst="rect">
-            <a:avLst/>
-          </a:prstGeom>
-          <a:noFill/>
-        </p:spPr>
-        <p:txBody>
-          <a:bodyPr wrap="square" lIns="0" tIns="0" rIns="0" bIns="0" anchor="t" rtlCol="0"/>
-          <a:lstStyle/>
-          <a:p>
-            <a:pPr algn="l">
-              <a:lnSpc>
-                <a:spcPct val="135000"/>
+            <a:ext cx="2320290" cy="1005840"/>
+          </a:xfrm>
+          <a:prstGeom prst="rect">
+            <a:avLst/>
+          </a:prstGeom>
+          <a:noFill/>
+        </p:spPr>
+        <p:txBody>
+          <a:bodyPr wrap="square" lIns="0" tIns="0" rIns="0" bIns="0" anchor="t" rtlCol="0"/>
+          <a:lstStyle/>
+          <a:p>
+            <a:pPr algn="l">
+              <a:lnSpc>
+                <a:spcPct val="125000"/>
               </a:lnSpc>
             </a:pPr>
             <a:r>
@@ -7723,7 +7723,7 @@
           <a:p>
             <a:pPr algn="l">
               <a:lnSpc>
-                <a:spcPct val="135000"/>
+                <a:spcPct val="125000"/>
               </a:lnSpc>
             </a:pPr>
             <a:r>
@@ -7748,21 +7748,21 @@
         </p:nvSpPr>
         <p:spPr>
           <a:xfrm>
-            <a:off x="841248" y="3602736"/>
-            <a:ext cx="2320290" cy="1353312"/>
-          </a:xfrm>
-          <a:prstGeom prst="rect">
-            <a:avLst/>
-          </a:prstGeom>
-          <a:noFill/>
-        </p:spPr>
-        <p:txBody>
-          <a:bodyPr wrap="square" lIns="0" tIns="0" rIns="0" bIns="0" anchor="t" rtlCol="0"/>
-          <a:lstStyle/>
-          <a:p>
-            <a:pPr algn="l">
-              <a:lnSpc>
-                <a:spcPct val="175000"/>
+            <a:off x="841248" y="3511296"/>
+            <a:ext cx="2320290" cy="1444752"/>
+          </a:xfrm>
+          <a:prstGeom prst="rect">
+            <a:avLst/>
+          </a:prstGeom>
+          <a:noFill/>
+        </p:spPr>
+        <p:txBody>
+          <a:bodyPr wrap="square" lIns="0" tIns="0" rIns="0" bIns="0" anchor="t" rtlCol="0"/>
+          <a:lstStyle/>
+          <a:p>
+            <a:pPr algn="l">
+              <a:lnSpc>
+                <a:spcPct val="155000"/>
               </a:lnSpc>
             </a:pPr>
             <a:r>
@@ -7854,20 +7854,20 @@
         <p:spPr>
           <a:xfrm>
             <a:off x="3573018" y="2414016"/>
-            <a:ext cx="2320290" cy="1097280"/>
-          </a:xfrm>
-          <a:prstGeom prst="rect">
-            <a:avLst/>
-          </a:prstGeom>
-          <a:noFill/>
-        </p:spPr>
-        <p:txBody>
-          <a:bodyPr wrap="square" lIns="0" tIns="0" rIns="0" bIns="0" anchor="t" rtlCol="0"/>
-          <a:lstStyle/>
-          <a:p>
-            <a:pPr algn="l">
-              <a:lnSpc>
-                <a:spcPct val="135000"/>
+            <a:ext cx="2320290" cy="1005840"/>
+          </a:xfrm>
+          <a:prstGeom prst="rect">
+            <a:avLst/>
+          </a:prstGeom>
+          <a:noFill/>
+        </p:spPr>
+        <p:txBody>
+          <a:bodyPr wrap="square" lIns="0" tIns="0" rIns="0" bIns="0" anchor="t" rtlCol="0"/>
+          <a:lstStyle/>
+          <a:p>
+            <a:pPr algn="l">
+              <a:lnSpc>
+                <a:spcPct val="125000"/>
               </a:lnSpc>
             </a:pPr>
             <a:r>
@@ -7885,7 +7885,7 @@
           <a:p>
             <a:pPr algn="l">
               <a:lnSpc>
-                <a:spcPct val="135000"/>
+                <a:spcPct val="125000"/>
               </a:lnSpc>
             </a:pPr>
             <a:r>
@@ -7910,21 +7910,21 @@
         </p:nvSpPr>
         <p:spPr>
           <a:xfrm>
-            <a:off x="3573018" y="3602736"/>
-            <a:ext cx="2320290" cy="1353312"/>
-          </a:xfrm>
-          <a:prstGeom prst="rect">
-            <a:avLst/>
-          </a:prstGeom>
-          <a:noFill/>
-        </p:spPr>
-        <p:txBody>
-          <a:bodyPr wrap="square" lIns="0" tIns="0" rIns="0" bIns="0" anchor="t" rtlCol="0"/>
-          <a:lstStyle/>
-          <a:p>
-            <a:pPr algn="l">
-              <a:lnSpc>
-                <a:spcPct val="175000"/>
+            <a:off x="3573018" y="3511296"/>
+            <a:ext cx="2320290" cy="1444752"/>
+          </a:xfrm>
+          <a:prstGeom prst="rect">
+            <a:avLst/>
+          </a:prstGeom>
+          <a:noFill/>
+        </p:spPr>
+        <p:txBody>
+          <a:bodyPr wrap="square" lIns="0" tIns="0" rIns="0" bIns="0" anchor="t" rtlCol="0"/>
+          <a:lstStyle/>
+          <a:p>
+            <a:pPr algn="l">
+              <a:lnSpc>
+                <a:spcPct val="155000"/>
               </a:lnSpc>
             </a:pPr>
             <a:r>
@@ -8016,20 +8016,20 @@
         <p:spPr>
           <a:xfrm>
             <a:off x="6304788" y="2414016"/>
-            <a:ext cx="2320290" cy="1097280"/>
-          </a:xfrm>
-          <a:prstGeom prst="rect">
-            <a:avLst/>
-          </a:prstGeom>
-          <a:noFill/>
-        </p:spPr>
-        <p:txBody>
-          <a:bodyPr wrap="square" lIns="0" tIns="0" rIns="0" bIns="0" anchor="t" rtlCol="0"/>
-          <a:lstStyle/>
-          <a:p>
-            <a:pPr algn="l">
-              <a:lnSpc>
-                <a:spcPct val="135000"/>
+            <a:ext cx="2320290" cy="1005840"/>
+          </a:xfrm>
+          <a:prstGeom prst="rect">
+            <a:avLst/>
+          </a:prstGeom>
+          <a:noFill/>
+        </p:spPr>
+        <p:txBody>
+          <a:bodyPr wrap="square" lIns="0" tIns="0" rIns="0" bIns="0" anchor="t" rtlCol="0"/>
+          <a:lstStyle/>
+          <a:p>
+            <a:pPr algn="l">
+              <a:lnSpc>
+                <a:spcPct val="125000"/>
               </a:lnSpc>
             </a:pPr>
             <a:r>
@@ -8047,7 +8047,7 @@
           <a:p>
             <a:pPr algn="l">
               <a:lnSpc>
-                <a:spcPct val="135000"/>
+                <a:spcPct val="125000"/>
               </a:lnSpc>
             </a:pPr>
             <a:r>
@@ -8072,21 +8072,21 @@
         </p:nvSpPr>
         <p:spPr>
           <a:xfrm>
-            <a:off x="6304788" y="3602736"/>
-            <a:ext cx="2320290" cy="1353312"/>
-          </a:xfrm>
-          <a:prstGeom prst="rect">
-            <a:avLst/>
-          </a:prstGeom>
-          <a:noFill/>
-        </p:spPr>
-        <p:txBody>
-          <a:bodyPr wrap="square" lIns="0" tIns="0" rIns="0" bIns="0" anchor="t" rtlCol="0"/>
-          <a:lstStyle/>
-          <a:p>
-            <a:pPr algn="l">
-              <a:lnSpc>
-                <a:spcPct val="175000"/>
+            <a:off x="6304788" y="3511296"/>
+            <a:ext cx="2320290" cy="1444752"/>
+          </a:xfrm>
+          <a:prstGeom prst="rect">
+            <a:avLst/>
+          </a:prstGeom>
+          <a:noFill/>
+        </p:spPr>
+        <p:txBody>
+          <a:bodyPr wrap="square" lIns="0" tIns="0" rIns="0" bIns="0" anchor="t" rtlCol="0"/>
+          <a:lstStyle/>
+          <a:p>
+            <a:pPr algn="l">
+              <a:lnSpc>
+                <a:spcPct val="155000"/>
               </a:lnSpc>
             </a:pPr>
             <a:r>
@@ -8178,20 +8178,20 @@
         <p:spPr>
           <a:xfrm>
             <a:off x="9036558" y="2414016"/>
-            <a:ext cx="2320290" cy="1097280"/>
-          </a:xfrm>
-          <a:prstGeom prst="rect">
-            <a:avLst/>
-          </a:prstGeom>
-          <a:noFill/>
-        </p:spPr>
-        <p:txBody>
-          <a:bodyPr wrap="square" lIns="0" tIns="0" rIns="0" bIns="0" anchor="t" rtlCol="0"/>
-          <a:lstStyle/>
-          <a:p>
-            <a:pPr algn="l">
-              <a:lnSpc>
-                <a:spcPct val="135000"/>
+            <a:ext cx="2320290" cy="1005840"/>
+          </a:xfrm>
+          <a:prstGeom prst="rect">
+            <a:avLst/>
+          </a:prstGeom>
+          <a:noFill/>
+        </p:spPr>
+        <p:txBody>
+          <a:bodyPr wrap="square" lIns="0" tIns="0" rIns="0" bIns="0" anchor="t" rtlCol="0"/>
+          <a:lstStyle/>
+          <a:p>
+            <a:pPr algn="l">
+              <a:lnSpc>
+                <a:spcPct val="125000"/>
               </a:lnSpc>
             </a:pPr>
             <a:r>
@@ -8209,7 +8209,7 @@
           <a:p>
             <a:pPr algn="l">
               <a:lnSpc>
-                <a:spcPct val="135000"/>
+                <a:spcPct val="125000"/>
               </a:lnSpc>
             </a:pPr>
             <a:r>
@@ -8234,21 +8234,21 @@
         </p:nvSpPr>
         <p:spPr>
           <a:xfrm>
-            <a:off x="9036558" y="3602736"/>
-            <a:ext cx="2320290" cy="1353312"/>
-          </a:xfrm>
-          <a:prstGeom prst="rect">
-            <a:avLst/>
-          </a:prstGeom>
-          <a:noFill/>
-        </p:spPr>
-        <p:txBody>
-          <a:bodyPr wrap="square" lIns="0" tIns="0" rIns="0" bIns="0" anchor="t" rtlCol="0"/>
-          <a:lstStyle/>
-          <a:p>
-            <a:pPr algn="l">
-              <a:lnSpc>
-                <a:spcPct val="175000"/>
+            <a:off x="9036558" y="3511296"/>
+            <a:ext cx="2320290" cy="1444752"/>
+          </a:xfrm>
+          <a:prstGeom prst="rect">
+            <a:avLst/>
+          </a:prstGeom>
+          <a:noFill/>
+        </p:spPr>
+        <p:txBody>
+          <a:bodyPr wrap="square" lIns="0" tIns="0" rIns="0" bIns="0" anchor="t" rtlCol="0"/>
+          <a:lstStyle/>
+          <a:p>
+            <a:pPr algn="l">
+              <a:lnSpc>
+                <a:spcPct val="155000"/>
               </a:lnSpc>
             </a:pPr>
             <a:r>
@@ -8287,7 +8287,7 @@
           <a:p>
             <a:pPr algn="l">
               <a:lnSpc>
-                <a:spcPct val="140000"/>
+                <a:spcPct val="125000"/>
               </a:lnSpc>
             </a:pPr>
             <a:r>
@@ -8476,7 +8476,7 @@
           <a:p>
             <a:pPr algn="l">
               <a:lnSpc>
-                <a:spcPct val="165000"/>
+                <a:spcPct val="140000"/>
               </a:lnSpc>
             </a:pPr>
             <a:r>
@@ -8554,7 +8554,7 @@
           <a:p>
             <a:pPr algn="l">
               <a:lnSpc>
-                <a:spcPct val="170000"/>
+                <a:spcPct val="145000"/>
               </a:lnSpc>
             </a:pPr>
             <a:r>
@@ -8654,7 +8654,7 @@
           <a:p>
             <a:pPr algn="l">
               <a:lnSpc>
-                <a:spcPct val="170000"/>
+                <a:spcPct val="145000"/>
               </a:lnSpc>
             </a:pPr>
             <a:r>
@@ -8754,7 +8754,7 @@
           <a:p>
             <a:pPr algn="l">
               <a:lnSpc>
-                <a:spcPct val="170000"/>
+                <a:spcPct val="145000"/>
               </a:lnSpc>
             </a:pPr>
             <a:r>
@@ -8815,7 +8815,7 @@
           <a:p>
             <a:pPr algn="l">
               <a:lnSpc>
-                <a:spcPct val="140000"/>
+                <a:spcPct val="125000"/>
               </a:lnSpc>
             </a:pPr>
             <a:r>
@@ -9004,7 +9004,7 @@
           <a:p>
             <a:pPr algn="l">
               <a:lnSpc>
-                <a:spcPct val="165000"/>
+                <a:spcPct val="140000"/>
               </a:lnSpc>
             </a:pPr>
             <a:r>
@@ -9187,7 +9187,7 @@
           <a:p>
             <a:pPr algn="l">
               <a:lnSpc>
-                <a:spcPct val="145000"/>
+                <a:spcPct val="130000"/>
               </a:lnSpc>
             </a:pPr>
             <a:r>
@@ -9226,7 +9226,7 @@
           <a:p>
             <a:pPr algn="l">
               <a:lnSpc>
-                <a:spcPct val="145000"/>
+                <a:spcPct val="130000"/>
               </a:lnSpc>
             </a:pPr>
             <a:r>
@@ -9265,7 +9265,7 @@
           <a:p>
             <a:pPr algn="l">
               <a:lnSpc>
-                <a:spcPct val="145000"/>
+                <a:spcPct val="130000"/>
               </a:lnSpc>
             </a:pPr>
             <a:r>
@@ -9331,7 +9331,7 @@
           <a:p>
             <a:pPr algn="l">
               <a:lnSpc>
-                <a:spcPct val="145000"/>
+                <a:spcPct val="130000"/>
               </a:lnSpc>
             </a:pPr>
             <a:r>
@@ -9370,7 +9370,7 @@
           <a:p>
             <a:pPr algn="l">
               <a:lnSpc>
-                <a:spcPct val="145000"/>
+                <a:spcPct val="130000"/>
               </a:lnSpc>
             </a:pPr>
             <a:r>
@@ -9409,7 +9409,7 @@
           <a:p>
             <a:pPr algn="l">
               <a:lnSpc>
-                <a:spcPct val="145000"/>
+                <a:spcPct val="130000"/>
               </a:lnSpc>
             </a:pPr>
             <a:r>
@@ -9475,7 +9475,7 @@
           <a:p>
             <a:pPr algn="l">
               <a:lnSpc>
-                <a:spcPct val="145000"/>
+                <a:spcPct val="130000"/>
               </a:lnSpc>
             </a:pPr>
             <a:r>
@@ -9514,7 +9514,7 @@
           <a:p>
             <a:pPr algn="l">
               <a:lnSpc>
-                <a:spcPct val="145000"/>
+                <a:spcPct val="130000"/>
               </a:lnSpc>
             </a:pPr>
             <a:r>
@@ -9553,7 +9553,7 @@
           <a:p>
             <a:pPr algn="l">
               <a:lnSpc>
-                <a:spcPct val="145000"/>
+                <a:spcPct val="130000"/>
               </a:lnSpc>
             </a:pPr>
             <a:r>
@@ -9565,7 +9565,7 @@
                 <a:ea typeface="Yu Gothic"/>
                 <a:cs typeface="Yu Gothic"/>
               </a:rPr>
-              <a:t>【彼の名前】</a:t>
+              <a:t>凪</a:t>
             </a:r>
           </a:p>
         </p:txBody>
@@ -9619,7 +9619,7 @@
           <a:p>
             <a:pPr algn="l">
               <a:lnSpc>
-                <a:spcPct val="145000"/>
+                <a:spcPct val="130000"/>
               </a:lnSpc>
             </a:pPr>
             <a:r>
@@ -9658,7 +9658,7 @@
           <a:p>
             <a:pPr algn="l">
               <a:lnSpc>
-                <a:spcPct val="145000"/>
+                <a:spcPct val="130000"/>
               </a:lnSpc>
             </a:pPr>
             <a:r>
@@ -9697,7 +9697,7 @@
           <a:p>
             <a:pPr algn="l">
               <a:lnSpc>
-                <a:spcPct val="145000"/>
+                <a:spcPct val="130000"/>
               </a:lnSpc>
             </a:pPr>
             <a:r>
@@ -9763,7 +9763,7 @@
           <a:p>
             <a:pPr algn="l">
               <a:lnSpc>
-                <a:spcPct val="145000"/>
+                <a:spcPct val="130000"/>
               </a:lnSpc>
             </a:pPr>
             <a:r>
@@ -9802,7 +9802,7 @@
           <a:p>
             <a:pPr algn="l">
               <a:lnSpc>
-                <a:spcPct val="145000"/>
+                <a:spcPct val="130000"/>
               </a:lnSpc>
             </a:pPr>
             <a:r>
@@ -9841,7 +9841,7 @@
           <a:p>
             <a:pPr algn="l">
               <a:lnSpc>
-                <a:spcPct val="145000"/>
+                <a:spcPct val="130000"/>
               </a:lnSpc>
             </a:pPr>
             <a:r>
@@ -9853,7 +9853,7 @@
                 <a:ea typeface="Yu Gothic"/>
                 <a:cs typeface="Yu Gothic"/>
               </a:rPr>
-              <a:t>【彼の名前】</a:t>
+              <a:t>凪</a:t>
             </a:r>
           </a:p>
         </p:txBody>
@@ -9934,7 +9934,7 @@
           <a:p>
             <a:pPr algn="l">
               <a:lnSpc>
-                <a:spcPct val="145000"/>
+                <a:spcPct val="130000"/>
               </a:lnSpc>
             </a:pPr>
             <a:r>
@@ -9973,7 +9973,7 @@
           <a:p>
             <a:pPr algn="l">
               <a:lnSpc>
-                <a:spcPct val="145000"/>
+                <a:spcPct val="130000"/>
               </a:lnSpc>
             </a:pPr>
             <a:r>
@@ -10012,7 +10012,7 @@
           <a:p>
             <a:pPr algn="l">
               <a:lnSpc>
-                <a:spcPct val="145000"/>
+                <a:spcPct val="130000"/>
               </a:lnSpc>
             </a:pPr>
             <a:r>
@@ -10024,7 +10024,7 @@
                 <a:ea typeface="Yu Gothic"/>
                 <a:cs typeface="Yu Gothic"/>
               </a:rPr>
-              <a:t>【彼の名前】</a:t>
+              <a:t>凪</a:t>
             </a:r>
           </a:p>
         </p:txBody>
@@ -10078,7 +10078,7 @@
           <a:p>
             <a:pPr algn="l">
               <a:lnSpc>
-                <a:spcPct val="145000"/>
+                <a:spcPct val="130000"/>
               </a:lnSpc>
             </a:pPr>
             <a:r>
@@ -10117,7 +10117,7 @@
           <a:p>
             <a:pPr algn="l">
               <a:lnSpc>
-                <a:spcPct val="145000"/>
+                <a:spcPct val="130000"/>
               </a:lnSpc>
             </a:pPr>
             <a:r>
@@ -10156,7 +10156,7 @@
           <a:p>
             <a:pPr algn="l">
               <a:lnSpc>
-                <a:spcPct val="145000"/>
+                <a:spcPct val="130000"/>
               </a:lnSpc>
             </a:pPr>
             <a:r>

--- a/proposal/ふたりの計画のご提案.pptx
+++ b/proposal/ふたりの計画のご提案.pptx
@@ -19,6 +19,8 @@
     <p:sldId id="264" r:id="rId11"/>
     <p:sldId id="265" r:id="rId12"/>
     <p:sldId id="266" r:id="rId13"/>
+    <p:sldId id="267" r:id="rId14"/>
+    <p:sldId id="268" r:id="rId15"/>
   </p:sldIdLst>
   <p:sldSz cx="12191695" cy="6858000"/>
   <p:notesSz cx="6858000" cy="9144000"/>
@@ -231,7 +233,7 @@
           <a:p>
             <a:r>
               <a:rPr lang="ja-JP" altLang="en-US" sz="1200"/>
-              <a:t>「改善中」は正直に。自己PRはしない。</a:t>
+              <a:t>真顔で読む。5つ目で笑われたら成功。</a:t>
             </a:r>
           </a:p>
         </p:txBody>
@@ -245,6 +247,124 @@
 </file>
 
 <file path=ppt/notesSlides/notesSlide11.xml><?xml version="1.0" encoding="utf-8"?>
+<p:notes xmlns:a="http://schemas.openxmlformats.org/drawingml/2006/main" xmlns:r="http://schemas.openxmlformats.org/officeDocument/2006/relationships" xmlns:p="http://schemas.openxmlformats.org/presentationml/2006/main">
+  <p:cSld>
+    <p:spTree>
+      <p:nvGrpSpPr>
+        <p:cNvPr id="1" name=""/>
+        <p:cNvGrpSpPr/>
+        <p:nvPr/>
+      </p:nvGrpSpPr>
+      <p:grpSpPr>
+        <a:xfrm>
+          <a:off x="0" y="0"/>
+          <a:ext cx="0" cy="0"/>
+          <a:chOff x="0" y="0"/>
+          <a:chExt cx="0" cy="0"/>
+        </a:xfrm>
+      </p:grpSpPr>
+      <p:sp>
+        <p:nvSpPr>
+          <p:cNvPr id="2" name="Slide Image Placeholder 1"/>
+          <p:cNvSpPr>
+            <a:spLocks noGrp="1" noRot="1" noChangeAspect="1"/>
+          </p:cNvSpPr>
+          <p:nvPr>
+            <p:ph type="sldImg"/>
+          </p:nvPr>
+        </p:nvSpPr>
+        <p:spPr/>
+      </p:sp>
+      <p:sp>
+        <p:nvSpPr>
+          <p:cNvPr id="3" name="Notes Placeholder 2"/>
+          <p:cNvSpPr>
+            <a:spLocks noGrp="1"/>
+          </p:cNvSpPr>
+          <p:nvPr>
+            <p:ph type="body" idx="1"/>
+          </p:nvPr>
+        </p:nvSpPr>
+        <p:spPr/>
+        <p:txBody>
+          <a:bodyPr/>
+          <a:lstStyle/>
+          <a:p>
+            <a:r>
+              <a:rPr lang="ja-JP" altLang="en-US" sz="1200"/>
+              <a:t>「たぶん」を消さない。言い切ると嘘くさくなる。</a:t>
+            </a:r>
+          </a:p>
+        </p:txBody>
+      </p:sp>
+    </p:spTree>
+  </p:cSld>
+  <p:clrMapOvr>
+    <a:masterClrMapping/>
+  </p:clrMapOvr>
+</p:notes>
+</file>
+
+<file path=ppt/notesSlides/notesSlide12.xml><?xml version="1.0" encoding="utf-8"?>
+<p:notes xmlns:a="http://schemas.openxmlformats.org/drawingml/2006/main" xmlns:r="http://schemas.openxmlformats.org/officeDocument/2006/relationships" xmlns:p="http://schemas.openxmlformats.org/presentationml/2006/main">
+  <p:cSld>
+    <p:spTree>
+      <p:nvGrpSpPr>
+        <p:cNvPr id="1" name=""/>
+        <p:cNvGrpSpPr/>
+        <p:nvPr/>
+      </p:nvGrpSpPr>
+      <p:grpSpPr>
+        <a:xfrm>
+          <a:off x="0" y="0"/>
+          <a:ext cx="0" cy="0"/>
+          <a:chOff x="0" y="0"/>
+          <a:chExt cx="0" cy="0"/>
+        </a:xfrm>
+      </p:grpSpPr>
+      <p:sp>
+        <p:nvSpPr>
+          <p:cNvPr id="2" name="Slide Image Placeholder 1"/>
+          <p:cNvSpPr>
+            <a:spLocks noGrp="1" noRot="1" noChangeAspect="1"/>
+          </p:cNvSpPr>
+          <p:nvPr>
+            <p:ph type="sldImg"/>
+          </p:nvPr>
+        </p:nvSpPr>
+        <p:spPr/>
+      </p:sp>
+      <p:sp>
+        <p:nvSpPr>
+          <p:cNvPr id="3" name="Notes Placeholder 2"/>
+          <p:cNvSpPr>
+            <a:spLocks noGrp="1"/>
+          </p:cNvSpPr>
+          <p:nvPr>
+            <p:ph type="body" idx="1"/>
+          </p:nvPr>
+        </p:nvSpPr>
+        <p:spPr/>
+        <p:txBody>
+          <a:bodyPr/>
+          <a:lstStyle/>
+          <a:p>
+            <a:r>
+              <a:rPr lang="ja-JP" altLang="en-US" sz="1200"/>
+              <a:t>「改善中」は正直に。自己PRはしない。</a:t>
+            </a:r>
+          </a:p>
+        </p:txBody>
+      </p:sp>
+    </p:spTree>
+  </p:cSld>
+  <p:clrMapOvr>
+    <a:masterClrMapping/>
+  </p:clrMapOvr>
+</p:notes>
+</file>
+
+<file path=ppt/notesSlides/notesSlide13.xml><?xml version="1.0" encoding="utf-8"?>
 <p:notes xmlns:a="http://schemas.openxmlformats.org/drawingml/2006/main" xmlns:r="http://schemas.openxmlformats.org/officeDocument/2006/relationships" xmlns:p="http://schemas.openxmlformats.org/presentationml/2006/main">
   <p:cSld>
     <p:spTree>
@@ -1114,7 +1234,7 @@
                 <a:ea typeface="Yu Gothic"/>
                 <a:cs typeface="Yu Gothic"/>
               </a:rPr>
-              <a:t>約束</a:t>
+              <a:t>私の魅力</a:t>
             </a:r>
           </a:p>
         </p:txBody>
@@ -1153,36 +1273,73 @@
                 <a:ea typeface="Yu Gothic Medium"/>
                 <a:cs typeface="Yu Gothic Medium"/>
               </a:rPr>
-              <a:t>私の側から先に書きます。変えないことと、直すことに分けました。</a:t>
-            </a:r>
-          </a:p>
-        </p:txBody>
-      </p:sp>
-      <p:sp>
-        <p:nvSpPr>
-          <p:cNvPr id="4" name="Shape 4"/>
-          <p:cNvSpPr/>
-          <p:nvPr/>
-        </p:nvSpPr>
-        <p:spPr>
-          <a:xfrm>
-            <a:off x="841248" y="1773936"/>
-            <a:ext cx="2320290" cy="38100"/>
-          </a:xfrm>
-          <a:prstGeom prst="rect">
-            <a:avLst/>
-          </a:prstGeom>
-          <a:solidFill>
-            <a:srgbClr val="00C4B3"/>
-          </a:solidFill>
-          <a:ln>
-            <a:noFill/>
-          </a:ln>
-        </p:spPr>
-        <p:txBody>
-          <a:bodyPr wrap="square" lIns="0" tIns="0" rIns="0" bIns="0" anchor="ctr" rtlCol="0"/>
-          <a:lstStyle/>
-          <a:p/>
+              <a:t>自分で言うのもなんですが、</a:t>
+            </a:r>
+            <a:r>
+              <a:rPr lang="ja-JP" altLang="en-US" sz="2200" b="0">
+                <a:solidFill>
+                  <a:srgbClr val="14141A"/>
+                </a:solidFill>
+                <a:highlight>
+                  <a:srgbClr val="FFD93D"/>
+                </a:highlight>
+                <a:latin typeface="Yu Gothic Medium"/>
+                <a:ea typeface="Yu Gothic Medium"/>
+                <a:cs typeface="Yu Gothic Medium"/>
+              </a:rPr>
+              <a:t>5つ</a:t>
+            </a:r>
+            <a:r>
+              <a:rPr lang="ja-JP" altLang="en-US" sz="2200" b="0">
+                <a:solidFill>
+                  <a:srgbClr val="14141A"/>
+                </a:solidFill>
+                <a:latin typeface="Yu Gothic Medium"/>
+                <a:ea typeface="Yu Gothic Medium"/>
+                <a:cs typeface="Yu Gothic Medium"/>
+              </a:rPr>
+              <a:t>あります。</a:t>
+            </a:r>
+          </a:p>
+        </p:txBody>
+      </p:sp>
+      <p:sp>
+        <p:nvSpPr>
+          <p:cNvPr id="4" name="TextBox 4"/>
+          <p:cNvSpPr txBox="1"/>
+          <p:nvPr/>
+        </p:nvSpPr>
+        <p:spPr>
+          <a:xfrm>
+            <a:off x="841248" y="1877264"/>
+            <a:ext cx="640080" cy="365760"/>
+          </a:xfrm>
+          <a:prstGeom prst="rect">
+            <a:avLst/>
+          </a:prstGeom>
+          <a:noFill/>
+        </p:spPr>
+        <p:txBody>
+          <a:bodyPr wrap="square" lIns="0" tIns="0" rIns="0" bIns="0" anchor="t" rtlCol="0"/>
+          <a:lstStyle/>
+          <a:p>
+            <a:pPr algn="l">
+              <a:lnSpc>
+                <a:spcPct val="145000"/>
+              </a:lnSpc>
+            </a:pPr>
+            <a:r>
+              <a:rPr lang="ja-JP" altLang="en-US" sz="1500" b="1" spc="100">
+                <a:solidFill>
+                  <a:srgbClr val="00C4B3"/>
+                </a:solidFill>
+                <a:latin typeface="Yu Gothic"/>
+                <a:ea typeface="Yu Gothic"/>
+                <a:cs typeface="Yu Gothic"/>
+              </a:rPr>
+              <a:t>01</a:t>
+            </a:r>
+          </a:p>
         </p:txBody>
       </p:sp>
       <p:sp>
@@ -1193,25 +1350,86 @@
         </p:nvSpPr>
         <p:spPr>
           <a:xfrm>
-            <a:off x="841248" y="2002536"/>
-            <a:ext cx="2320290" cy="320040"/>
-          </a:xfrm>
-          <a:prstGeom prst="rect">
-            <a:avLst/>
-          </a:prstGeom>
-          <a:noFill/>
-        </p:spPr>
-        <p:txBody>
-          <a:bodyPr wrap="square" lIns="0" tIns="0" rIns="0" bIns="0" anchor="t" rtlCol="0"/>
-          <a:lstStyle/>
-          <a:p>
-            <a:pPr algn="l">
-              <a:lnSpc>
-                <a:spcPct val="145000"/>
-              </a:lnSpc>
-            </a:pPr>
-            <a:r>
-              <a:rPr lang="ja-JP" altLang="en-US" sz="1200" b="1" spc="120">
+            <a:off x="1527048" y="1785824"/>
+            <a:ext cx="9784080" cy="914400"/>
+          </a:xfrm>
+          <a:prstGeom prst="rect">
+            <a:avLst/>
+          </a:prstGeom>
+          <a:noFill/>
+        </p:spPr>
+        <p:txBody>
+          <a:bodyPr wrap="square" lIns="0" tIns="0" rIns="0" bIns="0" anchor="t" rtlCol="0"/>
+          <a:lstStyle/>
+          <a:p>
+            <a:pPr algn="l">
+              <a:lnSpc>
+                <a:spcPct val="145000"/>
+              </a:lnSpc>
+            </a:pPr>
+            <a:r>
+              <a:rPr lang="ja-JP" altLang="en-US" sz="2000" b="0">
+                <a:solidFill>
+                  <a:srgbClr val="14141A"/>
+                </a:solidFill>
+                <a:latin typeface="Yu Gothic"/>
+                <a:ea typeface="Yu Gothic"/>
+                <a:cs typeface="Yu Gothic"/>
+              </a:rPr>
+              <a:t>顔面偏差値は、</a:t>
+            </a:r>
+            <a:r>
+              <a:rPr lang="ja-JP" altLang="en-US" sz="2000" b="1">
+                <a:solidFill>
+                  <a:srgbClr val="14141A"/>
+                </a:solidFill>
+                <a:latin typeface="Yu Gothic"/>
+                <a:ea typeface="Yu Gothic"/>
+                <a:cs typeface="Yu Gothic"/>
+              </a:rPr>
+              <a:t>まあまあ</a:t>
+            </a:r>
+            <a:r>
+              <a:rPr lang="ja-JP" altLang="en-US" sz="2000" b="0">
+                <a:solidFill>
+                  <a:srgbClr val="14141A"/>
+                </a:solidFill>
+                <a:latin typeface="Yu Gothic"/>
+                <a:ea typeface="Yu Gothic"/>
+                <a:cs typeface="Yu Gothic"/>
+              </a:rPr>
+              <a:t>あると思っています。</a:t>
+            </a:r>
+          </a:p>
+        </p:txBody>
+      </p:sp>
+      <p:sp>
+        <p:nvSpPr>
+          <p:cNvPr id="6" name="TextBox 6"/>
+          <p:cNvSpPr txBox="1"/>
+          <p:nvPr/>
+        </p:nvSpPr>
+        <p:spPr>
+          <a:xfrm>
+            <a:off x="841248" y="2723998"/>
+            <a:ext cx="640080" cy="365760"/>
+          </a:xfrm>
+          <a:prstGeom prst="rect">
+            <a:avLst/>
+          </a:prstGeom>
+          <a:noFill/>
+        </p:spPr>
+        <p:txBody>
+          <a:bodyPr wrap="square" lIns="0" tIns="0" rIns="0" bIns="0" anchor="t" rtlCol="0"/>
+          <a:lstStyle/>
+          <a:p>
+            <a:pPr algn="l">
+              <a:lnSpc>
+                <a:spcPct val="145000"/>
+              </a:lnSpc>
+            </a:pPr>
+            <a:r>
+              <a:rPr lang="ja-JP" altLang="en-US" sz="1500" b="1" spc="100">
                 <a:solidFill>
                   <a:srgbClr val="00C4B3"/>
                 </a:solidFill>
@@ -1219,64 +1437,7 @@
                 <a:ea typeface="Yu Gothic"/>
                 <a:cs typeface="Yu Gothic"/>
               </a:rPr>
-              <a:t>仕事</a:t>
-            </a:r>
-          </a:p>
-        </p:txBody>
-      </p:sp>
-      <p:sp>
-        <p:nvSpPr>
-          <p:cNvPr id="6" name="TextBox 6"/>
-          <p:cNvSpPr txBox="1"/>
-          <p:nvPr/>
-        </p:nvSpPr>
-        <p:spPr>
-          <a:xfrm>
-            <a:off x="841248" y="2414016"/>
-            <a:ext cx="2320290" cy="1005840"/>
-          </a:xfrm>
-          <a:prstGeom prst="rect">
-            <a:avLst/>
-          </a:prstGeom>
-          <a:noFill/>
-        </p:spPr>
-        <p:txBody>
-          <a:bodyPr wrap="square" lIns="0" tIns="0" rIns="0" bIns="0" anchor="t" rtlCol="0"/>
-          <a:lstStyle/>
-          <a:p>
-            <a:pPr algn="l">
-              <a:lnSpc>
-                <a:spcPct val="125000"/>
-              </a:lnSpc>
-            </a:pPr>
-            <a:r>
-              <a:rPr lang="ja-JP" altLang="en-US" sz="2200" b="1">
-                <a:solidFill>
-                  <a:srgbClr val="14141A"/>
-                </a:solidFill>
-                <a:latin typeface="Yu Gothic"/>
-                <a:ea typeface="Yu Gothic"/>
-                <a:cs typeface="Yu Gothic"/>
-              </a:rPr>
-              <a:t>熱量は</a:t>
-            </a:r>
-          </a:p>
-          <a:p>
-            <a:pPr algn="l">
-              <a:lnSpc>
-                <a:spcPct val="125000"/>
-              </a:lnSpc>
-            </a:pPr>
-            <a:r>
-              <a:rPr lang="ja-JP" altLang="en-US" sz="2200" b="1">
-                <a:solidFill>
-                  <a:srgbClr val="14141A"/>
-                </a:solidFill>
-                <a:latin typeface="Yu Gothic"/>
-                <a:ea typeface="Yu Gothic"/>
-                <a:cs typeface="Yu Gothic"/>
-              </a:rPr>
-              <a:t>落としません</a:t>
+              <a:t>02</a:t>
             </a:r>
           </a:p>
         </p:txBody>
@@ -1289,62 +1450,96 @@
         </p:nvSpPr>
         <p:spPr>
           <a:xfrm>
-            <a:off x="841248" y="3511296"/>
-            <a:ext cx="2320290" cy="1444752"/>
-          </a:xfrm>
-          <a:prstGeom prst="rect">
-            <a:avLst/>
-          </a:prstGeom>
-          <a:noFill/>
-        </p:spPr>
-        <p:txBody>
-          <a:bodyPr wrap="square" lIns="0" tIns="0" rIns="0" bIns="0" anchor="t" rtlCol="0"/>
-          <a:lstStyle/>
-          <a:p>
-            <a:pPr algn="l">
-              <a:lnSpc>
-                <a:spcPct val="155000"/>
-              </a:lnSpc>
-            </a:pPr>
-            <a:r>
-              <a:rPr lang="ja-JP" altLang="en-US" sz="1400" b="0">
-                <a:solidFill>
-                  <a:srgbClr val="14141A"/>
-                </a:solidFill>
-                <a:latin typeface="Yu Gothic"/>
-                <a:ea typeface="Yu Gothic"/>
-                <a:cs typeface="Yu Gothic"/>
-              </a:rPr>
-              <a:t>30歳まではお互い仕事優先です。結婚が仕事の邪魔をしない形にします。</a:t>
-            </a:r>
-          </a:p>
-        </p:txBody>
-      </p:sp>
-      <p:sp>
-        <p:nvSpPr>
-          <p:cNvPr id="8" name="Shape 8"/>
-          <p:cNvSpPr/>
-          <p:nvPr/>
-        </p:nvSpPr>
-        <p:spPr>
-          <a:xfrm>
-            <a:off x="3573018" y="1773936"/>
-            <a:ext cx="2320290" cy="38100"/>
-          </a:xfrm>
-          <a:prstGeom prst="rect">
-            <a:avLst/>
-          </a:prstGeom>
-          <a:solidFill>
-            <a:srgbClr val="FFD93D"/>
-          </a:solidFill>
-          <a:ln>
-            <a:noFill/>
-          </a:ln>
-        </p:spPr>
-        <p:txBody>
-          <a:bodyPr wrap="square" lIns="0" tIns="0" rIns="0" bIns="0" anchor="ctr" rtlCol="0"/>
-          <a:lstStyle/>
-          <a:p/>
+            <a:off x="1527048" y="2632558"/>
+            <a:ext cx="9784080" cy="914400"/>
+          </a:xfrm>
+          <a:prstGeom prst="rect">
+            <a:avLst/>
+          </a:prstGeom>
+          <a:noFill/>
+        </p:spPr>
+        <p:txBody>
+          <a:bodyPr wrap="square" lIns="0" tIns="0" rIns="0" bIns="0" anchor="t" rtlCol="0"/>
+          <a:lstStyle/>
+          <a:p>
+            <a:pPr algn="l">
+              <a:lnSpc>
+                <a:spcPct val="145000"/>
+              </a:lnSpc>
+            </a:pPr>
+            <a:r>
+              <a:rPr lang="ja-JP" altLang="en-US" sz="2000" b="0">
+                <a:solidFill>
+                  <a:srgbClr val="14141A"/>
+                </a:solidFill>
+                <a:latin typeface="Yu Gothic"/>
+                <a:ea typeface="Yu Gothic"/>
+                <a:cs typeface="Yu Gothic"/>
+              </a:rPr>
+              <a:t>仕事に人生をかけているので、</a:t>
+            </a:r>
+            <a:r>
+              <a:rPr lang="ja-JP" altLang="en-US" sz="2000" b="1">
+                <a:solidFill>
+                  <a:srgbClr val="14141A"/>
+                </a:solidFill>
+                <a:latin typeface="Yu Gothic"/>
+                <a:ea typeface="Yu Gothic"/>
+                <a:cs typeface="Yu Gothic"/>
+              </a:rPr>
+              <a:t>自立</a:t>
+            </a:r>
+            <a:r>
+              <a:rPr lang="ja-JP" altLang="en-US" sz="2000" b="0">
+                <a:solidFill>
+                  <a:srgbClr val="14141A"/>
+                </a:solidFill>
+                <a:latin typeface="Yu Gothic"/>
+                <a:ea typeface="Yu Gothic"/>
+                <a:cs typeface="Yu Gothic"/>
+              </a:rPr>
+              <a:t>しています。将来の安定性もあります。</a:t>
+            </a:r>
+          </a:p>
+        </p:txBody>
+      </p:sp>
+      <p:sp>
+        <p:nvSpPr>
+          <p:cNvPr id="8" name="TextBox 8"/>
+          <p:cNvSpPr txBox="1"/>
+          <p:nvPr/>
+        </p:nvSpPr>
+        <p:spPr>
+          <a:xfrm>
+            <a:off x="841248" y="3570732"/>
+            <a:ext cx="640080" cy="365760"/>
+          </a:xfrm>
+          <a:prstGeom prst="rect">
+            <a:avLst/>
+          </a:prstGeom>
+          <a:noFill/>
+        </p:spPr>
+        <p:txBody>
+          <a:bodyPr wrap="square" lIns="0" tIns="0" rIns="0" bIns="0" anchor="t" rtlCol="0"/>
+          <a:lstStyle/>
+          <a:p>
+            <a:pPr algn="l">
+              <a:lnSpc>
+                <a:spcPct val="145000"/>
+              </a:lnSpc>
+            </a:pPr>
+            <a:r>
+              <a:rPr lang="ja-JP" altLang="en-US" sz="1500" b="1" spc="100">
+                <a:solidFill>
+                  <a:srgbClr val="00C4B3"/>
+                </a:solidFill>
+                <a:latin typeface="Yu Gothic"/>
+                <a:ea typeface="Yu Gothic"/>
+                <a:cs typeface="Yu Gothic"/>
+              </a:rPr>
+              <a:t>03</a:t>
+            </a:r>
+          </a:p>
         </p:txBody>
       </p:sp>
       <p:sp>
@@ -1355,33 +1550,55 @@
         </p:nvSpPr>
         <p:spPr>
           <a:xfrm>
-            <a:off x="3573018" y="2002536"/>
-            <a:ext cx="2320290" cy="320040"/>
-          </a:xfrm>
-          <a:prstGeom prst="rect">
-            <a:avLst/>
-          </a:prstGeom>
-          <a:noFill/>
-        </p:spPr>
-        <p:txBody>
-          <a:bodyPr wrap="square" lIns="0" tIns="0" rIns="0" bIns="0" anchor="t" rtlCol="0"/>
-          <a:lstStyle/>
-          <a:p>
-            <a:pPr algn="l">
-              <a:lnSpc>
-                <a:spcPct val="145000"/>
-              </a:lnSpc>
-            </a:pPr>
-            <a:r>
-              <a:rPr lang="ja-JP" altLang="en-US" sz="1200" b="1" spc="120">
-                <a:solidFill>
-                  <a:srgbClr val="14141A"/>
-                </a:solidFill>
-                <a:latin typeface="Yu Gothic"/>
-                <a:ea typeface="Yu Gothic"/>
-                <a:cs typeface="Yu Gothic"/>
-              </a:rPr>
-              <a:t>自由</a:t>
+            <a:off x="1527048" y="3479292"/>
+            <a:ext cx="9784080" cy="914400"/>
+          </a:xfrm>
+          <a:prstGeom prst="rect">
+            <a:avLst/>
+          </a:prstGeom>
+          <a:noFill/>
+        </p:spPr>
+        <p:txBody>
+          <a:bodyPr wrap="square" lIns="0" tIns="0" rIns="0" bIns="0" anchor="t" rtlCol="0"/>
+          <a:lstStyle/>
+          <a:p>
+            <a:pPr algn="l">
+              <a:lnSpc>
+                <a:spcPct val="145000"/>
+              </a:lnSpc>
+            </a:pPr>
+            <a:r>
+              <a:rPr lang="ja-JP" altLang="en-US" sz="2000" b="0">
+                <a:solidFill>
+                  <a:srgbClr val="14141A"/>
+                </a:solidFill>
+                <a:latin typeface="Yu Gothic"/>
+                <a:ea typeface="Yu Gothic"/>
+                <a:cs typeface="Yu Gothic"/>
+              </a:rPr>
+              <a:t>性格もそこそこ悪くないです。</a:t>
+            </a:r>
+            <a:r>
+              <a:rPr lang="ja-JP" altLang="en-US" sz="2000" b="1">
+                <a:solidFill>
+                  <a:srgbClr val="14141A"/>
+                </a:solidFill>
+                <a:latin typeface="Yu Gothic"/>
+                <a:ea typeface="Yu Gothic"/>
+                <a:cs typeface="Yu Gothic"/>
+              </a:rPr>
+              <a:t>家で二人でご飯</a:t>
+            </a:r>
+            <a:r>
+              <a:rPr lang="ja-JP" altLang="en-US" sz="2000" b="0">
+                <a:solidFill>
+                  <a:srgbClr val="14141A"/>
+                </a:solidFill>
+                <a:latin typeface="Yu Gothic"/>
+                <a:ea typeface="Yu Gothic"/>
+                <a:cs typeface="Yu Gothic"/>
+              </a:rPr>
+              <a:t>、を強要しません。</a:t>
             </a:r>
           </a:p>
         </p:txBody>
@@ -1394,51 +1611,33 @@
         </p:nvSpPr>
         <p:spPr>
           <a:xfrm>
-            <a:off x="3573018" y="2414016"/>
-            <a:ext cx="2320290" cy="1005840"/>
-          </a:xfrm>
-          <a:prstGeom prst="rect">
-            <a:avLst/>
-          </a:prstGeom>
-          <a:noFill/>
-        </p:spPr>
-        <p:txBody>
-          <a:bodyPr wrap="square" lIns="0" tIns="0" rIns="0" bIns="0" anchor="t" rtlCol="0"/>
-          <a:lstStyle/>
-          <a:p>
-            <a:pPr algn="l">
-              <a:lnSpc>
-                <a:spcPct val="125000"/>
-              </a:lnSpc>
-            </a:pPr>
-            <a:r>
-              <a:rPr lang="ja-JP" altLang="en-US" sz="2200" b="1">
-                <a:solidFill>
-                  <a:srgbClr val="14141A"/>
-                </a:solidFill>
-                <a:latin typeface="Yu Gothic"/>
-                <a:ea typeface="Yu Gothic"/>
-                <a:cs typeface="Yu Gothic"/>
-              </a:rPr>
-              <a:t>ひとりの時間は</a:t>
-            </a:r>
-          </a:p>
-          <a:p>
-            <a:pPr algn="l">
-              <a:lnSpc>
-                <a:spcPct val="125000"/>
-              </a:lnSpc>
-            </a:pPr>
-            <a:r>
-              <a:rPr lang="ja-JP" altLang="en-US" sz="2200" b="1">
-                <a:solidFill>
-                  <a:srgbClr val="14141A"/>
-                </a:solidFill>
-                <a:latin typeface="Yu Gothic"/>
-                <a:ea typeface="Yu Gothic"/>
-                <a:cs typeface="Yu Gothic"/>
-              </a:rPr>
-              <a:t>制度で守ります</a:t>
+            <a:off x="841248" y="4417466"/>
+            <a:ext cx="640080" cy="365760"/>
+          </a:xfrm>
+          <a:prstGeom prst="rect">
+            <a:avLst/>
+          </a:prstGeom>
+          <a:noFill/>
+        </p:spPr>
+        <p:txBody>
+          <a:bodyPr wrap="square" lIns="0" tIns="0" rIns="0" bIns="0" anchor="t" rtlCol="0"/>
+          <a:lstStyle/>
+          <a:p>
+            <a:pPr algn="l">
+              <a:lnSpc>
+                <a:spcPct val="145000"/>
+              </a:lnSpc>
+            </a:pPr>
+            <a:r>
+              <a:rPr lang="ja-JP" altLang="en-US" sz="1500" b="1" spc="100">
+                <a:solidFill>
+                  <a:srgbClr val="00C4B3"/>
+                </a:solidFill>
+                <a:latin typeface="Yu Gothic"/>
+                <a:ea typeface="Yu Gothic"/>
+                <a:cs typeface="Yu Gothic"/>
+              </a:rPr>
+              <a:t>04</a:t>
             </a:r>
           </a:p>
         </p:txBody>
@@ -1451,62 +1650,96 @@
         </p:nvSpPr>
         <p:spPr>
           <a:xfrm>
-            <a:off x="3573018" y="3511296"/>
-            <a:ext cx="2320290" cy="1444752"/>
-          </a:xfrm>
-          <a:prstGeom prst="rect">
-            <a:avLst/>
-          </a:prstGeom>
-          <a:noFill/>
-        </p:spPr>
-        <p:txBody>
-          <a:bodyPr wrap="square" lIns="0" tIns="0" rIns="0" bIns="0" anchor="t" rtlCol="0"/>
-          <a:lstStyle/>
-          <a:p>
-            <a:pPr algn="l">
-              <a:lnSpc>
-                <a:spcPct val="155000"/>
-              </a:lnSpc>
-            </a:pPr>
-            <a:r>
-              <a:rPr lang="ja-JP" altLang="en-US" sz="1400" b="0">
-                <a:solidFill>
-                  <a:srgbClr val="14141A"/>
-                </a:solidFill>
-                <a:latin typeface="Yu Gothic"/>
-                <a:ea typeface="Yu Gothic"/>
-                <a:cs typeface="Yu Gothic"/>
-              </a:rPr>
-              <a:t>二人の家に自室を持ちます。週に一度は別行動でかまいません。</a:t>
-            </a:r>
-          </a:p>
-        </p:txBody>
-      </p:sp>
-      <p:sp>
-        <p:nvSpPr>
-          <p:cNvPr id="12" name="Shape 12"/>
-          <p:cNvSpPr/>
-          <p:nvPr/>
-        </p:nvSpPr>
-        <p:spPr>
-          <a:xfrm>
-            <a:off x="6304788" y="1773936"/>
-            <a:ext cx="2320290" cy="38100"/>
-          </a:xfrm>
-          <a:prstGeom prst="rect">
-            <a:avLst/>
-          </a:prstGeom>
-          <a:solidFill>
-            <a:srgbClr val="FF5C77"/>
-          </a:solidFill>
-          <a:ln>
-            <a:noFill/>
-          </a:ln>
-        </p:spPr>
-        <p:txBody>
-          <a:bodyPr wrap="square" lIns="0" tIns="0" rIns="0" bIns="0" anchor="ctr" rtlCol="0"/>
-          <a:lstStyle/>
-          <a:p/>
+            <a:off x="1527048" y="4326026"/>
+            <a:ext cx="9784080" cy="914400"/>
+          </a:xfrm>
+          <a:prstGeom prst="rect">
+            <a:avLst/>
+          </a:prstGeom>
+          <a:noFill/>
+        </p:spPr>
+        <p:txBody>
+          <a:bodyPr wrap="square" lIns="0" tIns="0" rIns="0" bIns="0" anchor="t" rtlCol="0"/>
+          <a:lstStyle/>
+          <a:p>
+            <a:pPr algn="l">
+              <a:lnSpc>
+                <a:spcPct val="145000"/>
+              </a:lnSpc>
+            </a:pPr>
+            <a:r>
+              <a:rPr lang="ja-JP" altLang="en-US" sz="2000" b="0">
+                <a:solidFill>
+                  <a:srgbClr val="14141A"/>
+                </a:solidFill>
+                <a:latin typeface="Yu Gothic"/>
+                <a:ea typeface="Yu Gothic"/>
+                <a:cs typeface="Yu Gothic"/>
+              </a:rPr>
+              <a:t>人脈もそこそこあります。凪さんの仕事の</a:t>
+            </a:r>
+            <a:r>
+              <a:rPr lang="ja-JP" altLang="en-US" sz="2000" b="1">
+                <a:solidFill>
+                  <a:srgbClr val="14141A"/>
+                </a:solidFill>
+                <a:latin typeface="Yu Gothic"/>
+                <a:ea typeface="Yu Gothic"/>
+                <a:cs typeface="Yu Gothic"/>
+              </a:rPr>
+              <a:t>ビジネスマッチング</a:t>
+            </a:r>
+            <a:r>
+              <a:rPr lang="ja-JP" altLang="en-US" sz="2000" b="0">
+                <a:solidFill>
+                  <a:srgbClr val="14141A"/>
+                </a:solidFill>
+                <a:latin typeface="Yu Gothic"/>
+                <a:ea typeface="Yu Gothic"/>
+                <a:cs typeface="Yu Gothic"/>
+              </a:rPr>
+              <a:t>もできます。</a:t>
+            </a:r>
+          </a:p>
+        </p:txBody>
+      </p:sp>
+      <p:sp>
+        <p:nvSpPr>
+          <p:cNvPr id="12" name="TextBox 12"/>
+          <p:cNvSpPr txBox="1"/>
+          <p:nvPr/>
+        </p:nvSpPr>
+        <p:spPr>
+          <a:xfrm>
+            <a:off x="841248" y="5264200"/>
+            <a:ext cx="640080" cy="365760"/>
+          </a:xfrm>
+          <a:prstGeom prst="rect">
+            <a:avLst/>
+          </a:prstGeom>
+          <a:noFill/>
+        </p:spPr>
+        <p:txBody>
+          <a:bodyPr wrap="square" lIns="0" tIns="0" rIns="0" bIns="0" anchor="t" rtlCol="0"/>
+          <a:lstStyle/>
+          <a:p>
+            <a:pPr algn="l">
+              <a:lnSpc>
+                <a:spcPct val="145000"/>
+              </a:lnSpc>
+            </a:pPr>
+            <a:r>
+              <a:rPr lang="ja-JP" altLang="en-US" sz="1500" b="1" spc="100">
+                <a:solidFill>
+                  <a:srgbClr val="00C4B3"/>
+                </a:solidFill>
+                <a:latin typeface="Yu Gothic"/>
+                <a:ea typeface="Yu Gothic"/>
+                <a:cs typeface="Yu Gothic"/>
+              </a:rPr>
+              <a:t>05</a:t>
+            </a:r>
+          </a:p>
         </p:txBody>
       </p:sp>
       <p:sp>
@@ -1517,33 +1750,44 @@
         </p:nvSpPr>
         <p:spPr>
           <a:xfrm>
-            <a:off x="6304788" y="2002536"/>
-            <a:ext cx="2320290" cy="320040"/>
-          </a:xfrm>
-          <a:prstGeom prst="rect">
-            <a:avLst/>
-          </a:prstGeom>
-          <a:noFill/>
-        </p:spPr>
-        <p:txBody>
-          <a:bodyPr wrap="square" lIns="0" tIns="0" rIns="0" bIns="0" anchor="t" rtlCol="0"/>
-          <a:lstStyle/>
-          <a:p>
-            <a:pPr algn="l">
-              <a:lnSpc>
-                <a:spcPct val="145000"/>
-              </a:lnSpc>
-            </a:pPr>
-            <a:r>
-              <a:rPr lang="ja-JP" altLang="en-US" sz="1200" b="1" spc="120">
-                <a:solidFill>
-                  <a:srgbClr val="FF5C77"/>
-                </a:solidFill>
-                <a:latin typeface="Yu Gothic"/>
-                <a:ea typeface="Yu Gothic"/>
-                <a:cs typeface="Yu Gothic"/>
-              </a:rPr>
-              <a:t>家事</a:t>
+            <a:off x="1527048" y="5172760"/>
+            <a:ext cx="9784080" cy="914400"/>
+          </a:xfrm>
+          <a:prstGeom prst="rect">
+            <a:avLst/>
+          </a:prstGeom>
+          <a:noFill/>
+        </p:spPr>
+        <p:txBody>
+          <a:bodyPr wrap="square" lIns="0" tIns="0" rIns="0" bIns="0" anchor="t" rtlCol="0"/>
+          <a:lstStyle/>
+          <a:p>
+            <a:pPr algn="l">
+              <a:lnSpc>
+                <a:spcPct val="145000"/>
+              </a:lnSpc>
+            </a:pPr>
+            <a:r>
+              <a:rPr lang="ja-JP" altLang="en-US" sz="2000" b="1">
+                <a:solidFill>
+                  <a:srgbClr val="14141A"/>
+                </a:solidFill>
+                <a:latin typeface="Yu Gothic"/>
+                <a:ea typeface="Yu Gothic"/>
+                <a:cs typeface="Yu Gothic"/>
+              </a:rPr>
+              <a:t>柔軟性と伸びしろ</a:t>
+            </a:r>
+            <a:r>
+              <a:rPr lang="ja-JP" altLang="en-US" sz="2000" b="0">
+                <a:solidFill>
+                  <a:srgbClr val="14141A"/>
+                </a:solidFill>
+                <a:latin typeface="Yu Gothic"/>
+                <a:ea typeface="Yu Gothic"/>
+                <a:cs typeface="Yu Gothic"/>
+              </a:rPr>
+              <a:t>があります。片付けも掃除も、少しずつ対応中です。</a:t>
             </a:r>
           </a:p>
         </p:txBody>
@@ -1551,303 +1795,6 @@
       <p:sp>
         <p:nvSpPr>
           <p:cNvPr id="14" name="TextBox 14"/>
-          <p:cNvSpPr txBox="1"/>
-          <p:nvPr/>
-        </p:nvSpPr>
-        <p:spPr>
-          <a:xfrm>
-            <a:off x="6304788" y="2414016"/>
-            <a:ext cx="2320290" cy="1005840"/>
-          </a:xfrm>
-          <a:prstGeom prst="rect">
-            <a:avLst/>
-          </a:prstGeom>
-          <a:noFill/>
-        </p:spPr>
-        <p:txBody>
-          <a:bodyPr wrap="square" lIns="0" tIns="0" rIns="0" bIns="0" anchor="t" rtlCol="0"/>
-          <a:lstStyle/>
-          <a:p>
-            <a:pPr algn="l">
-              <a:lnSpc>
-                <a:spcPct val="125000"/>
-              </a:lnSpc>
-            </a:pPr>
-            <a:r>
-              <a:rPr lang="ja-JP" altLang="en-US" sz="2200" b="1">
-                <a:solidFill>
-                  <a:srgbClr val="14141A"/>
-                </a:solidFill>
-                <a:latin typeface="Yu Gothic"/>
-                <a:ea typeface="Yu Gothic"/>
-                <a:cs typeface="Yu Gothic"/>
-              </a:rPr>
-              <a:t>掃除は</a:t>
-            </a:r>
-          </a:p>
-          <a:p>
-            <a:pPr algn="l">
-              <a:lnSpc>
-                <a:spcPct val="125000"/>
-              </a:lnSpc>
-            </a:pPr>
-            <a:r>
-              <a:rPr lang="ja-JP" altLang="en-US" sz="2200" b="1">
-                <a:solidFill>
-                  <a:srgbClr val="14141A"/>
-                </a:solidFill>
-                <a:latin typeface="Yu Gothic"/>
-                <a:ea typeface="Yu Gothic"/>
-                <a:cs typeface="Yu Gothic"/>
-              </a:rPr>
-              <a:t>改善中です</a:t>
-            </a:r>
-          </a:p>
-        </p:txBody>
-      </p:sp>
-      <p:sp>
-        <p:nvSpPr>
-          <p:cNvPr id="15" name="TextBox 15"/>
-          <p:cNvSpPr txBox="1"/>
-          <p:nvPr/>
-        </p:nvSpPr>
-        <p:spPr>
-          <a:xfrm>
-            <a:off x="6304788" y="3511296"/>
-            <a:ext cx="2320290" cy="1444752"/>
-          </a:xfrm>
-          <a:prstGeom prst="rect">
-            <a:avLst/>
-          </a:prstGeom>
-          <a:noFill/>
-        </p:spPr>
-        <p:txBody>
-          <a:bodyPr wrap="square" lIns="0" tIns="0" rIns="0" bIns="0" anchor="t" rtlCol="0"/>
-          <a:lstStyle/>
-          <a:p>
-            <a:pPr algn="l">
-              <a:lnSpc>
-                <a:spcPct val="155000"/>
-              </a:lnSpc>
-            </a:pPr>
-            <a:r>
-              <a:rPr lang="ja-JP" altLang="en-US" sz="1400" b="0">
-                <a:solidFill>
-                  <a:srgbClr val="14141A"/>
-                </a:solidFill>
-                <a:latin typeface="Yu Gothic"/>
-                <a:ea typeface="Yu Gothic"/>
-                <a:cs typeface="Yu Gothic"/>
-              </a:rPr>
-              <a:t>得意なほうがやります。決まらないものは、外注も選択肢に入れます。</a:t>
-            </a:r>
-          </a:p>
-        </p:txBody>
-      </p:sp>
-      <p:sp>
-        <p:nvSpPr>
-          <p:cNvPr id="16" name="Shape 16"/>
-          <p:cNvSpPr/>
-          <p:nvPr/>
-        </p:nvSpPr>
-        <p:spPr>
-          <a:xfrm>
-            <a:off x="9036558" y="1773936"/>
-            <a:ext cx="2320290" cy="38100"/>
-          </a:xfrm>
-          <a:prstGeom prst="rect">
-            <a:avLst/>
-          </a:prstGeom>
-          <a:solidFill>
-            <a:srgbClr val="6C5CE7"/>
-          </a:solidFill>
-          <a:ln>
-            <a:noFill/>
-          </a:ln>
-        </p:spPr>
-        <p:txBody>
-          <a:bodyPr wrap="square" lIns="0" tIns="0" rIns="0" bIns="0" anchor="ctr" rtlCol="0"/>
-          <a:lstStyle/>
-          <a:p/>
-        </p:txBody>
-      </p:sp>
-      <p:sp>
-        <p:nvSpPr>
-          <p:cNvPr id="17" name="TextBox 17"/>
-          <p:cNvSpPr txBox="1"/>
-          <p:nvPr/>
-        </p:nvSpPr>
-        <p:spPr>
-          <a:xfrm>
-            <a:off x="9036558" y="2002536"/>
-            <a:ext cx="2320290" cy="320040"/>
-          </a:xfrm>
-          <a:prstGeom prst="rect">
-            <a:avLst/>
-          </a:prstGeom>
-          <a:noFill/>
-        </p:spPr>
-        <p:txBody>
-          <a:bodyPr wrap="square" lIns="0" tIns="0" rIns="0" bIns="0" anchor="t" rtlCol="0"/>
-          <a:lstStyle/>
-          <a:p>
-            <a:pPr algn="l">
-              <a:lnSpc>
-                <a:spcPct val="145000"/>
-              </a:lnSpc>
-            </a:pPr>
-            <a:r>
-              <a:rPr lang="ja-JP" altLang="en-US" sz="1200" b="1" spc="120">
-                <a:solidFill>
-                  <a:srgbClr val="6C5CE7"/>
-                </a:solidFill>
-                <a:latin typeface="Yu Gothic"/>
-                <a:ea typeface="Yu Gothic"/>
-                <a:cs typeface="Yu Gothic"/>
-              </a:rPr>
-              <a:t>ケンカ</a:t>
-            </a:r>
-          </a:p>
-        </p:txBody>
-      </p:sp>
-      <p:sp>
-        <p:nvSpPr>
-          <p:cNvPr id="18" name="TextBox 18"/>
-          <p:cNvSpPr txBox="1"/>
-          <p:nvPr/>
-        </p:nvSpPr>
-        <p:spPr>
-          <a:xfrm>
-            <a:off x="9036558" y="2414016"/>
-            <a:ext cx="2320290" cy="1005840"/>
-          </a:xfrm>
-          <a:prstGeom prst="rect">
-            <a:avLst/>
-          </a:prstGeom>
-          <a:noFill/>
-        </p:spPr>
-        <p:txBody>
-          <a:bodyPr wrap="square" lIns="0" tIns="0" rIns="0" bIns="0" anchor="t" rtlCol="0"/>
-          <a:lstStyle/>
-          <a:p>
-            <a:pPr algn="l">
-              <a:lnSpc>
-                <a:spcPct val="125000"/>
-              </a:lnSpc>
-            </a:pPr>
-            <a:r>
-              <a:rPr lang="ja-JP" altLang="en-US" sz="2200" b="1">
-                <a:solidFill>
-                  <a:srgbClr val="14141A"/>
-                </a:solidFill>
-                <a:latin typeface="Yu Gothic"/>
-                <a:ea typeface="Yu Gothic"/>
-                <a:cs typeface="Yu Gothic"/>
-              </a:rPr>
-              <a:t>片方が謝って</a:t>
-            </a:r>
-          </a:p>
-          <a:p>
-            <a:pPr algn="l">
-              <a:lnSpc>
-                <a:spcPct val="125000"/>
-              </a:lnSpc>
-            </a:pPr>
-            <a:r>
-              <a:rPr lang="ja-JP" altLang="en-US" sz="2200" b="1">
-                <a:solidFill>
-                  <a:srgbClr val="14141A"/>
-                </a:solidFill>
-                <a:latin typeface="Yu Gothic"/>
-                <a:ea typeface="Yu Gothic"/>
-                <a:cs typeface="Yu Gothic"/>
-              </a:rPr>
-              <a:t>終わります</a:t>
-            </a:r>
-          </a:p>
-        </p:txBody>
-      </p:sp>
-      <p:sp>
-        <p:nvSpPr>
-          <p:cNvPr id="19" name="TextBox 19"/>
-          <p:cNvSpPr txBox="1"/>
-          <p:nvPr/>
-        </p:nvSpPr>
-        <p:spPr>
-          <a:xfrm>
-            <a:off x="9036558" y="3511296"/>
-            <a:ext cx="2320290" cy="1444752"/>
-          </a:xfrm>
-          <a:prstGeom prst="rect">
-            <a:avLst/>
-          </a:prstGeom>
-          <a:noFill/>
-        </p:spPr>
-        <p:txBody>
-          <a:bodyPr wrap="square" lIns="0" tIns="0" rIns="0" bIns="0" anchor="t" rtlCol="0"/>
-          <a:lstStyle/>
-          <a:p>
-            <a:pPr algn="l">
-              <a:lnSpc>
-                <a:spcPct val="155000"/>
-              </a:lnSpc>
-            </a:pPr>
-            <a:r>
-              <a:rPr lang="ja-JP" altLang="en-US" sz="1400" b="0">
-                <a:solidFill>
-                  <a:srgbClr val="14141A"/>
-                </a:solidFill>
-                <a:latin typeface="Yu Gothic"/>
-                <a:ea typeface="Yu Gothic"/>
-                <a:cs typeface="Yu Gothic"/>
-              </a:rPr>
-              <a:t>今のやり方を変えません。翌日には持ち越しません。</a:t>
-            </a:r>
-          </a:p>
-        </p:txBody>
-      </p:sp>
-      <p:sp>
-        <p:nvSpPr>
-          <p:cNvPr id="20" name="TextBox 20"/>
-          <p:cNvSpPr txBox="1"/>
-          <p:nvPr/>
-        </p:nvSpPr>
-        <p:spPr>
-          <a:xfrm>
-            <a:off x="841248" y="5138928"/>
-            <a:ext cx="10515600" cy="914400"/>
-          </a:xfrm>
-          <a:prstGeom prst="rect">
-            <a:avLst/>
-          </a:prstGeom>
-          <a:noFill/>
-        </p:spPr>
-        <p:txBody>
-          <a:bodyPr wrap="square" lIns="0" tIns="0" rIns="0" bIns="0" anchor="b" rtlCol="0"/>
-          <a:lstStyle/>
-          <a:p>
-            <a:pPr algn="l">
-              <a:lnSpc>
-                <a:spcPct val="125000"/>
-              </a:lnSpc>
-            </a:pPr>
-            <a:r>
-              <a:rPr lang="ja-JP" altLang="en-US" sz="2800" b="1">
-                <a:solidFill>
-                  <a:srgbClr val="14141A"/>
-                </a:solidFill>
-                <a:latin typeface="Yu Gothic"/>
-                <a:ea typeface="Yu Gothic"/>
-                <a:cs typeface="Yu Gothic"/>
-              </a:rPr>
-              <a:t>変えないのは仕事、直すのは家事です。</a:t>
-            </a:r>
-          </a:p>
-        </p:txBody>
-      </p:sp>
-      <p:sp>
-        <p:nvSpPr>
-          <p:cNvPr id="21" name="TextBox 21"/>
           <p:cNvSpPr txBox="1"/>
           <p:nvPr/>
         </p:nvSpPr>
@@ -1886,7 +1833,7 @@
       </p:sp>
       <p:sp>
         <p:nvSpPr>
-          <p:cNvPr id="22" name="TextBox 22"/>
+          <p:cNvPr id="15" name="TextBox 15"/>
           <p:cNvSpPr txBox="1"/>
           <p:nvPr/>
         </p:nvSpPr>
@@ -1932,6 +1879,1596 @@
 </file>
 
 <file path=ppt/slides/slide11.xml><?xml version="1.0" encoding="utf-8"?>
+<p:sld xmlns:a="http://schemas.openxmlformats.org/drawingml/2006/main" xmlns:r="http://schemas.openxmlformats.org/officeDocument/2006/relationships" xmlns:p="http://schemas.openxmlformats.org/presentationml/2006/main">
+  <p:cSld>
+    <p:bg>
+      <p:bgPr>
+        <a:solidFill>
+          <a:srgbClr val="FFFFFF"/>
+        </a:solidFill>
+        <a:effectLst/>
+      </p:bgPr>
+    </p:bg>
+    <p:spTree>
+      <p:nvGrpSpPr>
+        <p:cNvPr id="1" name=""/>
+        <p:cNvGrpSpPr/>
+        <p:nvPr/>
+      </p:nvGrpSpPr>
+      <p:grpSpPr>
+        <a:xfrm>
+          <a:off x="0" y="0"/>
+          <a:ext cx="0" cy="0"/>
+          <a:chOff x="0" y="0"/>
+          <a:chExt cx="0" cy="0"/>
+        </a:xfrm>
+      </p:grpSpPr>
+      <p:sp>
+        <p:nvSpPr>
+          <p:cNvPr id="2" name="TextBox 2"/>
+          <p:cNvSpPr txBox="1"/>
+          <p:nvPr/>
+        </p:nvSpPr>
+        <p:spPr>
+          <a:xfrm>
+            <a:off x="841248" y="155448"/>
+            <a:ext cx="10515600" cy="329184"/>
+          </a:xfrm>
+          <a:prstGeom prst="rect">
+            <a:avLst/>
+          </a:prstGeom>
+          <a:noFill/>
+        </p:spPr>
+        <p:txBody>
+          <a:bodyPr wrap="square" lIns="0" tIns="0" rIns="0" bIns="0" anchor="t" rtlCol="0"/>
+          <a:lstStyle/>
+          <a:p>
+            <a:pPr algn="l">
+              <a:lnSpc>
+                <a:spcPct val="145000"/>
+              </a:lnSpc>
+            </a:pPr>
+            <a:r>
+              <a:rPr lang="ja-JP" altLang="en-US" sz="1300" b="1" spc="150">
+                <a:solidFill>
+                  <a:srgbClr val="14141A"/>
+                </a:solidFill>
+                <a:latin typeface="Yu Gothic"/>
+                <a:ea typeface="Yu Gothic"/>
+                <a:cs typeface="Yu Gothic"/>
+              </a:rPr>
+              <a:t>お互いについて</a:t>
+            </a:r>
+          </a:p>
+        </p:txBody>
+      </p:sp>
+      <p:sp>
+        <p:nvSpPr>
+          <p:cNvPr id="3" name="TextBox 3"/>
+          <p:cNvSpPr txBox="1"/>
+          <p:nvPr/>
+        </p:nvSpPr>
+        <p:spPr>
+          <a:xfrm>
+            <a:off x="841248" y="585216"/>
+            <a:ext cx="10515600" cy="1005840"/>
+          </a:xfrm>
+          <a:prstGeom prst="rect">
+            <a:avLst/>
+          </a:prstGeom>
+          <a:noFill/>
+        </p:spPr>
+        <p:txBody>
+          <a:bodyPr wrap="square" lIns="0" tIns="0" rIns="0" bIns="0" anchor="t" rtlCol="0"/>
+          <a:lstStyle/>
+          <a:p>
+            <a:pPr algn="l">
+              <a:lnSpc>
+                <a:spcPct val="140000"/>
+              </a:lnSpc>
+            </a:pPr>
+            <a:r>
+              <a:rPr lang="ja-JP" altLang="en-US" sz="2200" b="0">
+                <a:solidFill>
+                  <a:srgbClr val="14141A"/>
+                </a:solidFill>
+                <a:latin typeface="Yu Gothic Medium"/>
+                <a:ea typeface="Yu Gothic Medium"/>
+                <a:cs typeface="Yu Gothic Medium"/>
+              </a:rPr>
+              <a:t>私ひとりの話ではなく、ふたりで見たときの話も書いておきます。</a:t>
+            </a:r>
+          </a:p>
+        </p:txBody>
+      </p:sp>
+      <p:sp>
+        <p:nvSpPr>
+          <p:cNvPr id="4" name="Shape 4"/>
+          <p:cNvSpPr/>
+          <p:nvPr/>
+        </p:nvSpPr>
+        <p:spPr>
+          <a:xfrm>
+            <a:off x="841248" y="1773936"/>
+            <a:ext cx="3230880" cy="38100"/>
+          </a:xfrm>
+          <a:prstGeom prst="rect">
+            <a:avLst/>
+          </a:prstGeom>
+          <a:solidFill>
+            <a:srgbClr val="00C4B3"/>
+          </a:solidFill>
+          <a:ln>
+            <a:noFill/>
+          </a:ln>
+        </p:spPr>
+        <p:txBody>
+          <a:bodyPr wrap="square" lIns="0" tIns="0" rIns="0" bIns="0" anchor="ctr" rtlCol="0"/>
+          <a:lstStyle/>
+          <a:p/>
+        </p:txBody>
+      </p:sp>
+      <p:sp>
+        <p:nvSpPr>
+          <p:cNvPr id="5" name="TextBox 5"/>
+          <p:cNvSpPr txBox="1"/>
+          <p:nvPr/>
+        </p:nvSpPr>
+        <p:spPr>
+          <a:xfrm>
+            <a:off x="841248" y="2002536"/>
+            <a:ext cx="3230880" cy="320040"/>
+          </a:xfrm>
+          <a:prstGeom prst="rect">
+            <a:avLst/>
+          </a:prstGeom>
+          <a:noFill/>
+        </p:spPr>
+        <p:txBody>
+          <a:bodyPr wrap="square" lIns="0" tIns="0" rIns="0" bIns="0" anchor="t" rtlCol="0"/>
+          <a:lstStyle/>
+          <a:p>
+            <a:pPr algn="l">
+              <a:lnSpc>
+                <a:spcPct val="145000"/>
+              </a:lnSpc>
+            </a:pPr>
+            <a:r>
+              <a:rPr lang="ja-JP" altLang="en-US" sz="1200" b="1" spc="120">
+                <a:solidFill>
+                  <a:srgbClr val="00C4B3"/>
+                </a:solidFill>
+                <a:latin typeface="Yu Gothic"/>
+                <a:ea typeface="Yu Gothic"/>
+                <a:cs typeface="Yu Gothic"/>
+              </a:rPr>
+              <a:t>相性</a:t>
+            </a:r>
+          </a:p>
+        </p:txBody>
+      </p:sp>
+      <p:sp>
+        <p:nvSpPr>
+          <p:cNvPr id="6" name="TextBox 6"/>
+          <p:cNvSpPr txBox="1"/>
+          <p:nvPr/>
+        </p:nvSpPr>
+        <p:spPr>
+          <a:xfrm>
+            <a:off x="841248" y="2414016"/>
+            <a:ext cx="3230880" cy="1005840"/>
+          </a:xfrm>
+          <a:prstGeom prst="rect">
+            <a:avLst/>
+          </a:prstGeom>
+          <a:noFill/>
+        </p:spPr>
+        <p:txBody>
+          <a:bodyPr wrap="square" lIns="0" tIns="0" rIns="0" bIns="0" anchor="t" rtlCol="0"/>
+          <a:lstStyle/>
+          <a:p>
+            <a:pPr algn="l">
+              <a:lnSpc>
+                <a:spcPct val="125000"/>
+              </a:lnSpc>
+            </a:pPr>
+            <a:r>
+              <a:rPr lang="ja-JP" altLang="en-US" sz="2200" b="1">
+                <a:solidFill>
+                  <a:srgbClr val="14141A"/>
+                </a:solidFill>
+                <a:latin typeface="Yu Gothic"/>
+                <a:ea typeface="Yu Gothic"/>
+                <a:cs typeface="Yu Gothic"/>
+              </a:rPr>
+              <a:t>昼も夜も、</a:t>
+            </a:r>
+          </a:p>
+          <a:p>
+            <a:pPr algn="l">
+              <a:lnSpc>
+                <a:spcPct val="125000"/>
+              </a:lnSpc>
+            </a:pPr>
+            <a:r>
+              <a:rPr lang="ja-JP" altLang="en-US" sz="2200" b="1">
+                <a:solidFill>
+                  <a:srgbClr val="14141A"/>
+                </a:solidFill>
+                <a:latin typeface="Yu Gothic"/>
+                <a:ea typeface="Yu Gothic"/>
+                <a:cs typeface="Yu Gothic"/>
+              </a:rPr>
+              <a:t>悪くないです</a:t>
+            </a:r>
+          </a:p>
+        </p:txBody>
+      </p:sp>
+      <p:sp>
+        <p:nvSpPr>
+          <p:cNvPr id="7" name="TextBox 7"/>
+          <p:cNvSpPr txBox="1"/>
+          <p:nvPr/>
+        </p:nvSpPr>
+        <p:spPr>
+          <a:xfrm>
+            <a:off x="841248" y="3511296"/>
+            <a:ext cx="3230880" cy="1444752"/>
+          </a:xfrm>
+          <a:prstGeom prst="rect">
+            <a:avLst/>
+          </a:prstGeom>
+          <a:noFill/>
+        </p:spPr>
+        <p:txBody>
+          <a:bodyPr wrap="square" lIns="0" tIns="0" rIns="0" bIns="0" anchor="t" rtlCol="0"/>
+          <a:lstStyle/>
+          <a:p>
+            <a:pPr algn="l">
+              <a:lnSpc>
+                <a:spcPct val="155000"/>
+              </a:lnSpc>
+            </a:pPr>
+            <a:r>
+              <a:rPr lang="ja-JP" altLang="en-US" sz="1500" b="0">
+                <a:solidFill>
+                  <a:srgbClr val="14141A"/>
+                </a:solidFill>
+                <a:latin typeface="Yu Gothic"/>
+                <a:ea typeface="Yu Gothic"/>
+                <a:cs typeface="Yu Gothic"/>
+              </a:rPr>
+              <a:t>たぶん、きっと、という但し書きはつきます。ここだけは主観です。</a:t>
+            </a:r>
+          </a:p>
+        </p:txBody>
+      </p:sp>
+      <p:sp>
+        <p:nvSpPr>
+          <p:cNvPr id="8" name="Shape 8"/>
+          <p:cNvSpPr/>
+          <p:nvPr/>
+        </p:nvSpPr>
+        <p:spPr>
+          <a:xfrm>
+            <a:off x="4483608" y="1773936"/>
+            <a:ext cx="3230880" cy="38100"/>
+          </a:xfrm>
+          <a:prstGeom prst="rect">
+            <a:avLst/>
+          </a:prstGeom>
+          <a:solidFill>
+            <a:srgbClr val="FFD93D"/>
+          </a:solidFill>
+          <a:ln>
+            <a:noFill/>
+          </a:ln>
+        </p:spPr>
+        <p:txBody>
+          <a:bodyPr wrap="square" lIns="0" tIns="0" rIns="0" bIns="0" anchor="ctr" rtlCol="0"/>
+          <a:lstStyle/>
+          <a:p/>
+        </p:txBody>
+      </p:sp>
+      <p:sp>
+        <p:nvSpPr>
+          <p:cNvPr id="9" name="TextBox 9"/>
+          <p:cNvSpPr txBox="1"/>
+          <p:nvPr/>
+        </p:nvSpPr>
+        <p:spPr>
+          <a:xfrm>
+            <a:off x="4483608" y="2002536"/>
+            <a:ext cx="3230880" cy="320040"/>
+          </a:xfrm>
+          <a:prstGeom prst="rect">
+            <a:avLst/>
+          </a:prstGeom>
+          <a:noFill/>
+        </p:spPr>
+        <p:txBody>
+          <a:bodyPr wrap="square" lIns="0" tIns="0" rIns="0" bIns="0" anchor="t" rtlCol="0"/>
+          <a:lstStyle/>
+          <a:p>
+            <a:pPr algn="l">
+              <a:lnSpc>
+                <a:spcPct val="145000"/>
+              </a:lnSpc>
+            </a:pPr>
+            <a:r>
+              <a:rPr lang="ja-JP" altLang="en-US" sz="1200" b="1" spc="120">
+                <a:solidFill>
+                  <a:srgbClr val="14141A"/>
+                </a:solidFill>
+                <a:latin typeface="Yu Gothic"/>
+                <a:ea typeface="Yu Gothic"/>
+                <a:cs typeface="Yu Gothic"/>
+              </a:rPr>
+              <a:t>姿勢</a:t>
+            </a:r>
+          </a:p>
+        </p:txBody>
+      </p:sp>
+      <p:sp>
+        <p:nvSpPr>
+          <p:cNvPr id="10" name="TextBox 10"/>
+          <p:cNvSpPr txBox="1"/>
+          <p:nvPr/>
+        </p:nvSpPr>
+        <p:spPr>
+          <a:xfrm>
+            <a:off x="4483608" y="2414016"/>
+            <a:ext cx="3230880" cy="1005840"/>
+          </a:xfrm>
+          <a:prstGeom prst="rect">
+            <a:avLst/>
+          </a:prstGeom>
+          <a:noFill/>
+        </p:spPr>
+        <p:txBody>
+          <a:bodyPr wrap="square" lIns="0" tIns="0" rIns="0" bIns="0" anchor="t" rtlCol="0"/>
+          <a:lstStyle/>
+          <a:p>
+            <a:pPr algn="l">
+              <a:lnSpc>
+                <a:spcPct val="125000"/>
+              </a:lnSpc>
+            </a:pPr>
+            <a:r>
+              <a:rPr lang="ja-JP" altLang="en-US" sz="2200" b="1">
+                <a:solidFill>
+                  <a:srgbClr val="14141A"/>
+                </a:solidFill>
+                <a:latin typeface="Yu Gothic"/>
+                <a:ea typeface="Yu Gothic"/>
+                <a:cs typeface="Yu Gothic"/>
+              </a:rPr>
+              <a:t>お互い、</a:t>
+            </a:r>
+          </a:p>
+          <a:p>
+            <a:pPr algn="l">
+              <a:lnSpc>
+                <a:spcPct val="125000"/>
+              </a:lnSpc>
+            </a:pPr>
+            <a:r>
+              <a:rPr lang="ja-JP" altLang="en-US" sz="2200" b="1">
+                <a:solidFill>
+                  <a:srgbClr val="14141A"/>
+                </a:solidFill>
+                <a:latin typeface="Yu Gothic"/>
+                <a:ea typeface="Yu Gothic"/>
+                <a:cs typeface="Yu Gothic"/>
+              </a:rPr>
+              <a:t>直そうとします</a:t>
+            </a:r>
+          </a:p>
+        </p:txBody>
+      </p:sp>
+      <p:sp>
+        <p:nvSpPr>
+          <p:cNvPr id="11" name="TextBox 11"/>
+          <p:cNvSpPr txBox="1"/>
+          <p:nvPr/>
+        </p:nvSpPr>
+        <p:spPr>
+          <a:xfrm>
+            <a:off x="4483608" y="3511296"/>
+            <a:ext cx="3230880" cy="1444752"/>
+          </a:xfrm>
+          <a:prstGeom prst="rect">
+            <a:avLst/>
+          </a:prstGeom>
+          <a:noFill/>
+        </p:spPr>
+        <p:txBody>
+          <a:bodyPr wrap="square" lIns="0" tIns="0" rIns="0" bIns="0" anchor="t" rtlCol="0"/>
+          <a:lstStyle/>
+          <a:p>
+            <a:pPr algn="l">
+              <a:lnSpc>
+                <a:spcPct val="155000"/>
+              </a:lnSpc>
+            </a:pPr>
+            <a:r>
+              <a:rPr lang="ja-JP" altLang="en-US" sz="1500" b="0">
+                <a:solidFill>
+                  <a:srgbClr val="14141A"/>
+                </a:solidFill>
+                <a:latin typeface="Yu Gothic"/>
+                <a:ea typeface="Yu Gothic"/>
+                <a:cs typeface="Yu Gothic"/>
+              </a:rPr>
+              <a:t>自分のよくないところを、言われる前に直そうとする人同士だと思っています。</a:t>
+            </a:r>
+          </a:p>
+        </p:txBody>
+      </p:sp>
+      <p:sp>
+        <p:nvSpPr>
+          <p:cNvPr id="12" name="Shape 12"/>
+          <p:cNvSpPr/>
+          <p:nvPr/>
+        </p:nvSpPr>
+        <p:spPr>
+          <a:xfrm>
+            <a:off x="8125968" y="1773936"/>
+            <a:ext cx="3230880" cy="38100"/>
+          </a:xfrm>
+          <a:prstGeom prst="rect">
+            <a:avLst/>
+          </a:prstGeom>
+          <a:solidFill>
+            <a:srgbClr val="FF5C77"/>
+          </a:solidFill>
+          <a:ln>
+            <a:noFill/>
+          </a:ln>
+        </p:spPr>
+        <p:txBody>
+          <a:bodyPr wrap="square" lIns="0" tIns="0" rIns="0" bIns="0" anchor="ctr" rtlCol="0"/>
+          <a:lstStyle/>
+          <a:p/>
+        </p:txBody>
+      </p:sp>
+      <p:sp>
+        <p:nvSpPr>
+          <p:cNvPr id="13" name="TextBox 13"/>
+          <p:cNvSpPr txBox="1"/>
+          <p:nvPr/>
+        </p:nvSpPr>
+        <p:spPr>
+          <a:xfrm>
+            <a:off x="8125968" y="2002536"/>
+            <a:ext cx="3230880" cy="320040"/>
+          </a:xfrm>
+          <a:prstGeom prst="rect">
+            <a:avLst/>
+          </a:prstGeom>
+          <a:noFill/>
+        </p:spPr>
+        <p:txBody>
+          <a:bodyPr wrap="square" lIns="0" tIns="0" rIns="0" bIns="0" anchor="t" rtlCol="0"/>
+          <a:lstStyle/>
+          <a:p>
+            <a:pPr algn="l">
+              <a:lnSpc>
+                <a:spcPct val="145000"/>
+              </a:lnSpc>
+            </a:pPr>
+            <a:r>
+              <a:rPr lang="ja-JP" altLang="en-US" sz="1200" b="1" spc="120">
+                <a:solidFill>
+                  <a:srgbClr val="FF5C77"/>
+                </a:solidFill>
+                <a:latin typeface="Yu Gothic"/>
+                <a:ea typeface="Yu Gothic"/>
+                <a:cs typeface="Yu Gothic"/>
+              </a:rPr>
+              <a:t>周囲</a:t>
+            </a:r>
+          </a:p>
+        </p:txBody>
+      </p:sp>
+      <p:sp>
+        <p:nvSpPr>
+          <p:cNvPr id="14" name="TextBox 14"/>
+          <p:cNvSpPr txBox="1"/>
+          <p:nvPr/>
+        </p:nvSpPr>
+        <p:spPr>
+          <a:xfrm>
+            <a:off x="8125968" y="2414016"/>
+            <a:ext cx="3230880" cy="1005840"/>
+          </a:xfrm>
+          <a:prstGeom prst="rect">
+            <a:avLst/>
+          </a:prstGeom>
+          <a:noFill/>
+        </p:spPr>
+        <p:txBody>
+          <a:bodyPr wrap="square" lIns="0" tIns="0" rIns="0" bIns="0" anchor="t" rtlCol="0"/>
+          <a:lstStyle/>
+          <a:p>
+            <a:pPr algn="l">
+              <a:lnSpc>
+                <a:spcPct val="125000"/>
+              </a:lnSpc>
+            </a:pPr>
+            <a:r>
+              <a:rPr lang="ja-JP" altLang="en-US" sz="2200" b="1">
+                <a:solidFill>
+                  <a:srgbClr val="14141A"/>
+                </a:solidFill>
+                <a:latin typeface="Yu Gothic"/>
+                <a:ea typeface="Yu Gothic"/>
+                <a:cs typeface="Yu Gothic"/>
+              </a:rPr>
+              <a:t>共通の知り合いも、</a:t>
+            </a:r>
+          </a:p>
+          <a:p>
+            <a:pPr algn="l">
+              <a:lnSpc>
+                <a:spcPct val="125000"/>
+              </a:lnSpc>
+            </a:pPr>
+            <a:r>
+              <a:rPr lang="ja-JP" altLang="en-US" sz="2200" b="1">
+                <a:solidFill>
+                  <a:srgbClr val="14141A"/>
+                </a:solidFill>
+                <a:latin typeface="Yu Gothic"/>
+                <a:ea typeface="Yu Gothic"/>
+                <a:cs typeface="Yu Gothic"/>
+              </a:rPr>
+              <a:t>できています</a:t>
+            </a:r>
+          </a:p>
+        </p:txBody>
+      </p:sp>
+      <p:sp>
+        <p:nvSpPr>
+          <p:cNvPr id="15" name="TextBox 15"/>
+          <p:cNvSpPr txBox="1"/>
+          <p:nvPr/>
+        </p:nvSpPr>
+        <p:spPr>
+          <a:xfrm>
+            <a:off x="8125968" y="3511296"/>
+            <a:ext cx="3230880" cy="1444752"/>
+          </a:xfrm>
+          <a:prstGeom prst="rect">
+            <a:avLst/>
+          </a:prstGeom>
+          <a:noFill/>
+        </p:spPr>
+        <p:txBody>
+          <a:bodyPr wrap="square" lIns="0" tIns="0" rIns="0" bIns="0" anchor="t" rtlCol="0"/>
+          <a:lstStyle/>
+          <a:p>
+            <a:pPr algn="l">
+              <a:lnSpc>
+                <a:spcPct val="155000"/>
+              </a:lnSpc>
+            </a:pPr>
+            <a:r>
+              <a:rPr lang="ja-JP" altLang="en-US" sz="1500" b="0">
+                <a:solidFill>
+                  <a:srgbClr val="14141A"/>
+                </a:solidFill>
+                <a:latin typeface="Yu Gothic"/>
+                <a:ea typeface="Yu Gothic"/>
+                <a:cs typeface="Yu Gothic"/>
+              </a:rPr>
+              <a:t>お互いの友人にも会っていて、印象も悪くないはずです。たぶん。</a:t>
+            </a:r>
+          </a:p>
+        </p:txBody>
+      </p:sp>
+      <p:sp>
+        <p:nvSpPr>
+          <p:cNvPr id="16" name="TextBox 16"/>
+          <p:cNvSpPr txBox="1"/>
+          <p:nvPr/>
+        </p:nvSpPr>
+        <p:spPr>
+          <a:xfrm>
+            <a:off x="841248" y="5138928"/>
+            <a:ext cx="10515600" cy="914400"/>
+          </a:xfrm>
+          <a:prstGeom prst="rect">
+            <a:avLst/>
+          </a:prstGeom>
+          <a:noFill/>
+        </p:spPr>
+        <p:txBody>
+          <a:bodyPr wrap="square" lIns="0" tIns="0" rIns="0" bIns="0" anchor="b" rtlCol="0"/>
+          <a:lstStyle/>
+          <a:p>
+            <a:pPr algn="l">
+              <a:lnSpc>
+                <a:spcPct val="125000"/>
+              </a:lnSpc>
+            </a:pPr>
+            <a:r>
+              <a:rPr lang="ja-JP" altLang="en-US" sz="2800" b="1">
+                <a:solidFill>
+                  <a:srgbClr val="14141A"/>
+                </a:solidFill>
+                <a:latin typeface="Yu Gothic"/>
+                <a:ea typeface="Yu Gothic"/>
+                <a:cs typeface="Yu Gothic"/>
+              </a:rPr>
+              <a:t>だから、一緒に暮らしても大丈夫だと思っています。</a:t>
+            </a:r>
+          </a:p>
+        </p:txBody>
+      </p:sp>
+      <p:sp>
+        <p:nvSpPr>
+          <p:cNvPr id="17" name="TextBox 17"/>
+          <p:cNvSpPr txBox="1"/>
+          <p:nvPr/>
+        </p:nvSpPr>
+        <p:spPr>
+          <a:xfrm>
+            <a:off x="841248" y="6391656"/>
+            <a:ext cx="5486400" cy="274320"/>
+          </a:xfrm>
+          <a:prstGeom prst="rect">
+            <a:avLst/>
+          </a:prstGeom>
+          <a:noFill/>
+        </p:spPr>
+        <p:txBody>
+          <a:bodyPr wrap="square" lIns="0" tIns="0" rIns="0" bIns="0" anchor="t" rtlCol="0"/>
+          <a:lstStyle/>
+          <a:p>
+            <a:pPr algn="l">
+              <a:lnSpc>
+                <a:spcPct val="145000"/>
+              </a:lnSpc>
+            </a:pPr>
+            <a:r>
+              <a:rPr lang="ja-JP" altLang="en-US" sz="1000" b="0" spc="50">
+                <a:solidFill>
+                  <a:srgbClr val="A3A3AE"/>
+                </a:solidFill>
+                <a:latin typeface="Yu Gothic"/>
+                <a:ea typeface="Yu Gothic"/>
+                <a:cs typeface="Yu Gothic"/>
+              </a:rPr>
+              <a:t>ふたりの計画のご提案</a:t>
+            </a:r>
+          </a:p>
+        </p:txBody>
+      </p:sp>
+      <p:sp>
+        <p:nvSpPr>
+          <p:cNvPr id="18" name="TextBox 18"/>
+          <p:cNvSpPr txBox="1"/>
+          <p:nvPr/>
+        </p:nvSpPr>
+        <p:spPr>
+          <a:xfrm>
+            <a:off x="10436047" y="6373368"/>
+            <a:ext cx="914400" cy="274320"/>
+          </a:xfrm>
+          <a:prstGeom prst="rect">
+            <a:avLst/>
+          </a:prstGeom>
+          <a:noFill/>
+        </p:spPr>
+        <p:txBody>
+          <a:bodyPr wrap="square" lIns="0" tIns="0" rIns="0" bIns="0" anchor="t" rtlCol="0"/>
+          <a:lstStyle/>
+          <a:p>
+            <a:pPr algn="r">
+              <a:lnSpc>
+                <a:spcPct val="145000"/>
+              </a:lnSpc>
+            </a:pPr>
+            <a:r>
+              <a:rPr lang="ja-JP" altLang="en-US" sz="1200" b="1" spc="50">
+                <a:solidFill>
+                  <a:srgbClr val="A3A3AE"/>
+                </a:solidFill>
+                <a:latin typeface="Yu Gothic"/>
+                <a:ea typeface="Yu Gothic"/>
+                <a:cs typeface="Yu Gothic"/>
+              </a:rPr>
+              <a:t>11</a:t>
+            </a:r>
+          </a:p>
+        </p:txBody>
+      </p:sp>
+    </p:spTree>
+  </p:cSld>
+  <p:clrMapOvr>
+    <a:masterClrMapping/>
+  </p:clrMapOvr>
+</p:sld>
+</file>
+
+<file path=ppt/slides/slide12.xml><?xml version="1.0" encoding="utf-8"?>
+<p:sld xmlns:a="http://schemas.openxmlformats.org/drawingml/2006/main" xmlns:r="http://schemas.openxmlformats.org/officeDocument/2006/relationships" xmlns:p="http://schemas.openxmlformats.org/presentationml/2006/main">
+  <p:cSld>
+    <p:bg>
+      <p:bgPr>
+        <a:solidFill>
+          <a:srgbClr val="FFFFFF"/>
+        </a:solidFill>
+        <a:effectLst/>
+      </p:bgPr>
+    </p:bg>
+    <p:spTree>
+      <p:nvGrpSpPr>
+        <p:cNvPr id="1" name=""/>
+        <p:cNvGrpSpPr/>
+        <p:nvPr/>
+      </p:nvGrpSpPr>
+      <p:grpSpPr>
+        <a:xfrm>
+          <a:off x="0" y="0"/>
+          <a:ext cx="0" cy="0"/>
+          <a:chOff x="0" y="0"/>
+          <a:chExt cx="0" cy="0"/>
+        </a:xfrm>
+      </p:grpSpPr>
+      <p:sp>
+        <p:nvSpPr>
+          <p:cNvPr id="2" name="TextBox 2"/>
+          <p:cNvSpPr txBox="1"/>
+          <p:nvPr/>
+        </p:nvSpPr>
+        <p:spPr>
+          <a:xfrm>
+            <a:off x="841248" y="155448"/>
+            <a:ext cx="10515600" cy="329184"/>
+          </a:xfrm>
+          <a:prstGeom prst="rect">
+            <a:avLst/>
+          </a:prstGeom>
+          <a:noFill/>
+        </p:spPr>
+        <p:txBody>
+          <a:bodyPr wrap="square" lIns="0" tIns="0" rIns="0" bIns="0" anchor="t" rtlCol="0"/>
+          <a:lstStyle/>
+          <a:p>
+            <a:pPr algn="l">
+              <a:lnSpc>
+                <a:spcPct val="145000"/>
+              </a:lnSpc>
+            </a:pPr>
+            <a:r>
+              <a:rPr lang="ja-JP" altLang="en-US" sz="1300" b="1" spc="150">
+                <a:solidFill>
+                  <a:srgbClr val="14141A"/>
+                </a:solidFill>
+                <a:latin typeface="Yu Gothic"/>
+                <a:ea typeface="Yu Gothic"/>
+                <a:cs typeface="Yu Gothic"/>
+              </a:rPr>
+              <a:t>約束</a:t>
+            </a:r>
+          </a:p>
+        </p:txBody>
+      </p:sp>
+      <p:sp>
+        <p:nvSpPr>
+          <p:cNvPr id="3" name="TextBox 3"/>
+          <p:cNvSpPr txBox="1"/>
+          <p:nvPr/>
+        </p:nvSpPr>
+        <p:spPr>
+          <a:xfrm>
+            <a:off x="841248" y="585216"/>
+            <a:ext cx="10515600" cy="1005840"/>
+          </a:xfrm>
+          <a:prstGeom prst="rect">
+            <a:avLst/>
+          </a:prstGeom>
+          <a:noFill/>
+        </p:spPr>
+        <p:txBody>
+          <a:bodyPr wrap="square" lIns="0" tIns="0" rIns="0" bIns="0" anchor="t" rtlCol="0"/>
+          <a:lstStyle/>
+          <a:p>
+            <a:pPr algn="l">
+              <a:lnSpc>
+                <a:spcPct val="140000"/>
+              </a:lnSpc>
+            </a:pPr>
+            <a:r>
+              <a:rPr lang="ja-JP" altLang="en-US" sz="2200" b="0">
+                <a:solidFill>
+                  <a:srgbClr val="14141A"/>
+                </a:solidFill>
+                <a:latin typeface="Yu Gothic Medium"/>
+                <a:ea typeface="Yu Gothic Medium"/>
+                <a:cs typeface="Yu Gothic Medium"/>
+              </a:rPr>
+              <a:t>私の側から先に書きます。変えないことと、直すことに分けました。</a:t>
+            </a:r>
+          </a:p>
+        </p:txBody>
+      </p:sp>
+      <p:sp>
+        <p:nvSpPr>
+          <p:cNvPr id="4" name="Shape 4"/>
+          <p:cNvSpPr/>
+          <p:nvPr/>
+        </p:nvSpPr>
+        <p:spPr>
+          <a:xfrm>
+            <a:off x="841248" y="1773936"/>
+            <a:ext cx="2320290" cy="38100"/>
+          </a:xfrm>
+          <a:prstGeom prst="rect">
+            <a:avLst/>
+          </a:prstGeom>
+          <a:solidFill>
+            <a:srgbClr val="00C4B3"/>
+          </a:solidFill>
+          <a:ln>
+            <a:noFill/>
+          </a:ln>
+        </p:spPr>
+        <p:txBody>
+          <a:bodyPr wrap="square" lIns="0" tIns="0" rIns="0" bIns="0" anchor="ctr" rtlCol="0"/>
+          <a:lstStyle/>
+          <a:p/>
+        </p:txBody>
+      </p:sp>
+      <p:sp>
+        <p:nvSpPr>
+          <p:cNvPr id="5" name="TextBox 5"/>
+          <p:cNvSpPr txBox="1"/>
+          <p:nvPr/>
+        </p:nvSpPr>
+        <p:spPr>
+          <a:xfrm>
+            <a:off x="841248" y="2002536"/>
+            <a:ext cx="2320290" cy="320040"/>
+          </a:xfrm>
+          <a:prstGeom prst="rect">
+            <a:avLst/>
+          </a:prstGeom>
+          <a:noFill/>
+        </p:spPr>
+        <p:txBody>
+          <a:bodyPr wrap="square" lIns="0" tIns="0" rIns="0" bIns="0" anchor="t" rtlCol="0"/>
+          <a:lstStyle/>
+          <a:p>
+            <a:pPr algn="l">
+              <a:lnSpc>
+                <a:spcPct val="145000"/>
+              </a:lnSpc>
+            </a:pPr>
+            <a:r>
+              <a:rPr lang="ja-JP" altLang="en-US" sz="1200" b="1" spc="120">
+                <a:solidFill>
+                  <a:srgbClr val="00C4B3"/>
+                </a:solidFill>
+                <a:latin typeface="Yu Gothic"/>
+                <a:ea typeface="Yu Gothic"/>
+                <a:cs typeface="Yu Gothic"/>
+              </a:rPr>
+              <a:t>仕事</a:t>
+            </a:r>
+          </a:p>
+        </p:txBody>
+      </p:sp>
+      <p:sp>
+        <p:nvSpPr>
+          <p:cNvPr id="6" name="TextBox 6"/>
+          <p:cNvSpPr txBox="1"/>
+          <p:nvPr/>
+        </p:nvSpPr>
+        <p:spPr>
+          <a:xfrm>
+            <a:off x="841248" y="2414016"/>
+            <a:ext cx="2320290" cy="1005840"/>
+          </a:xfrm>
+          <a:prstGeom prst="rect">
+            <a:avLst/>
+          </a:prstGeom>
+          <a:noFill/>
+        </p:spPr>
+        <p:txBody>
+          <a:bodyPr wrap="square" lIns="0" tIns="0" rIns="0" bIns="0" anchor="t" rtlCol="0"/>
+          <a:lstStyle/>
+          <a:p>
+            <a:pPr algn="l">
+              <a:lnSpc>
+                <a:spcPct val="125000"/>
+              </a:lnSpc>
+            </a:pPr>
+            <a:r>
+              <a:rPr lang="ja-JP" altLang="en-US" sz="2200" b="1">
+                <a:solidFill>
+                  <a:srgbClr val="14141A"/>
+                </a:solidFill>
+                <a:latin typeface="Yu Gothic"/>
+                <a:ea typeface="Yu Gothic"/>
+                <a:cs typeface="Yu Gothic"/>
+              </a:rPr>
+              <a:t>熱量は</a:t>
+            </a:r>
+          </a:p>
+          <a:p>
+            <a:pPr algn="l">
+              <a:lnSpc>
+                <a:spcPct val="125000"/>
+              </a:lnSpc>
+            </a:pPr>
+            <a:r>
+              <a:rPr lang="ja-JP" altLang="en-US" sz="2200" b="1">
+                <a:solidFill>
+                  <a:srgbClr val="14141A"/>
+                </a:solidFill>
+                <a:latin typeface="Yu Gothic"/>
+                <a:ea typeface="Yu Gothic"/>
+                <a:cs typeface="Yu Gothic"/>
+              </a:rPr>
+              <a:t>落としません</a:t>
+            </a:r>
+          </a:p>
+        </p:txBody>
+      </p:sp>
+      <p:sp>
+        <p:nvSpPr>
+          <p:cNvPr id="7" name="TextBox 7"/>
+          <p:cNvSpPr txBox="1"/>
+          <p:nvPr/>
+        </p:nvSpPr>
+        <p:spPr>
+          <a:xfrm>
+            <a:off x="841248" y="3511296"/>
+            <a:ext cx="2320290" cy="1444752"/>
+          </a:xfrm>
+          <a:prstGeom prst="rect">
+            <a:avLst/>
+          </a:prstGeom>
+          <a:noFill/>
+        </p:spPr>
+        <p:txBody>
+          <a:bodyPr wrap="square" lIns="0" tIns="0" rIns="0" bIns="0" anchor="t" rtlCol="0"/>
+          <a:lstStyle/>
+          <a:p>
+            <a:pPr algn="l">
+              <a:lnSpc>
+                <a:spcPct val="155000"/>
+              </a:lnSpc>
+            </a:pPr>
+            <a:r>
+              <a:rPr lang="ja-JP" altLang="en-US" sz="1400" b="0">
+                <a:solidFill>
+                  <a:srgbClr val="14141A"/>
+                </a:solidFill>
+                <a:latin typeface="Yu Gothic"/>
+                <a:ea typeface="Yu Gothic"/>
+                <a:cs typeface="Yu Gothic"/>
+              </a:rPr>
+              <a:t>30歳まではお互い仕事優先です。結婚が仕事の邪魔をしない形にします。</a:t>
+            </a:r>
+          </a:p>
+        </p:txBody>
+      </p:sp>
+      <p:sp>
+        <p:nvSpPr>
+          <p:cNvPr id="8" name="Shape 8"/>
+          <p:cNvSpPr/>
+          <p:nvPr/>
+        </p:nvSpPr>
+        <p:spPr>
+          <a:xfrm>
+            <a:off x="3573018" y="1773936"/>
+            <a:ext cx="2320290" cy="38100"/>
+          </a:xfrm>
+          <a:prstGeom prst="rect">
+            <a:avLst/>
+          </a:prstGeom>
+          <a:solidFill>
+            <a:srgbClr val="FFD93D"/>
+          </a:solidFill>
+          <a:ln>
+            <a:noFill/>
+          </a:ln>
+        </p:spPr>
+        <p:txBody>
+          <a:bodyPr wrap="square" lIns="0" tIns="0" rIns="0" bIns="0" anchor="ctr" rtlCol="0"/>
+          <a:lstStyle/>
+          <a:p/>
+        </p:txBody>
+      </p:sp>
+      <p:sp>
+        <p:nvSpPr>
+          <p:cNvPr id="9" name="TextBox 9"/>
+          <p:cNvSpPr txBox="1"/>
+          <p:nvPr/>
+        </p:nvSpPr>
+        <p:spPr>
+          <a:xfrm>
+            <a:off x="3573018" y="2002536"/>
+            <a:ext cx="2320290" cy="320040"/>
+          </a:xfrm>
+          <a:prstGeom prst="rect">
+            <a:avLst/>
+          </a:prstGeom>
+          <a:noFill/>
+        </p:spPr>
+        <p:txBody>
+          <a:bodyPr wrap="square" lIns="0" tIns="0" rIns="0" bIns="0" anchor="t" rtlCol="0"/>
+          <a:lstStyle/>
+          <a:p>
+            <a:pPr algn="l">
+              <a:lnSpc>
+                <a:spcPct val="145000"/>
+              </a:lnSpc>
+            </a:pPr>
+            <a:r>
+              <a:rPr lang="ja-JP" altLang="en-US" sz="1200" b="1" spc="120">
+                <a:solidFill>
+                  <a:srgbClr val="14141A"/>
+                </a:solidFill>
+                <a:latin typeface="Yu Gothic"/>
+                <a:ea typeface="Yu Gothic"/>
+                <a:cs typeface="Yu Gothic"/>
+              </a:rPr>
+              <a:t>自由</a:t>
+            </a:r>
+          </a:p>
+        </p:txBody>
+      </p:sp>
+      <p:sp>
+        <p:nvSpPr>
+          <p:cNvPr id="10" name="TextBox 10"/>
+          <p:cNvSpPr txBox="1"/>
+          <p:nvPr/>
+        </p:nvSpPr>
+        <p:spPr>
+          <a:xfrm>
+            <a:off x="3573018" y="2414016"/>
+            <a:ext cx="2320290" cy="1005840"/>
+          </a:xfrm>
+          <a:prstGeom prst="rect">
+            <a:avLst/>
+          </a:prstGeom>
+          <a:noFill/>
+        </p:spPr>
+        <p:txBody>
+          <a:bodyPr wrap="square" lIns="0" tIns="0" rIns="0" bIns="0" anchor="t" rtlCol="0"/>
+          <a:lstStyle/>
+          <a:p>
+            <a:pPr algn="l">
+              <a:lnSpc>
+                <a:spcPct val="125000"/>
+              </a:lnSpc>
+            </a:pPr>
+            <a:r>
+              <a:rPr lang="ja-JP" altLang="en-US" sz="2200" b="1">
+                <a:solidFill>
+                  <a:srgbClr val="14141A"/>
+                </a:solidFill>
+                <a:latin typeface="Yu Gothic"/>
+                <a:ea typeface="Yu Gothic"/>
+                <a:cs typeface="Yu Gothic"/>
+              </a:rPr>
+              <a:t>ひとりの時間は</a:t>
+            </a:r>
+          </a:p>
+          <a:p>
+            <a:pPr algn="l">
+              <a:lnSpc>
+                <a:spcPct val="125000"/>
+              </a:lnSpc>
+            </a:pPr>
+            <a:r>
+              <a:rPr lang="ja-JP" altLang="en-US" sz="2200" b="1">
+                <a:solidFill>
+                  <a:srgbClr val="14141A"/>
+                </a:solidFill>
+                <a:latin typeface="Yu Gothic"/>
+                <a:ea typeface="Yu Gothic"/>
+                <a:cs typeface="Yu Gothic"/>
+              </a:rPr>
+              <a:t>制度で守ります</a:t>
+            </a:r>
+          </a:p>
+        </p:txBody>
+      </p:sp>
+      <p:sp>
+        <p:nvSpPr>
+          <p:cNvPr id="11" name="TextBox 11"/>
+          <p:cNvSpPr txBox="1"/>
+          <p:nvPr/>
+        </p:nvSpPr>
+        <p:spPr>
+          <a:xfrm>
+            <a:off x="3573018" y="3511296"/>
+            <a:ext cx="2320290" cy="1444752"/>
+          </a:xfrm>
+          <a:prstGeom prst="rect">
+            <a:avLst/>
+          </a:prstGeom>
+          <a:noFill/>
+        </p:spPr>
+        <p:txBody>
+          <a:bodyPr wrap="square" lIns="0" tIns="0" rIns="0" bIns="0" anchor="t" rtlCol="0"/>
+          <a:lstStyle/>
+          <a:p>
+            <a:pPr algn="l">
+              <a:lnSpc>
+                <a:spcPct val="155000"/>
+              </a:lnSpc>
+            </a:pPr>
+            <a:r>
+              <a:rPr lang="ja-JP" altLang="en-US" sz="1400" b="0">
+                <a:solidFill>
+                  <a:srgbClr val="14141A"/>
+                </a:solidFill>
+                <a:latin typeface="Yu Gothic"/>
+                <a:ea typeface="Yu Gothic"/>
+                <a:cs typeface="Yu Gothic"/>
+              </a:rPr>
+              <a:t>二人の家に自室を持ちます。週に一度は別行動でかまいません。</a:t>
+            </a:r>
+          </a:p>
+        </p:txBody>
+      </p:sp>
+      <p:sp>
+        <p:nvSpPr>
+          <p:cNvPr id="12" name="Shape 12"/>
+          <p:cNvSpPr/>
+          <p:nvPr/>
+        </p:nvSpPr>
+        <p:spPr>
+          <a:xfrm>
+            <a:off x="6304788" y="1773936"/>
+            <a:ext cx="2320290" cy="38100"/>
+          </a:xfrm>
+          <a:prstGeom prst="rect">
+            <a:avLst/>
+          </a:prstGeom>
+          <a:solidFill>
+            <a:srgbClr val="FF5C77"/>
+          </a:solidFill>
+          <a:ln>
+            <a:noFill/>
+          </a:ln>
+        </p:spPr>
+        <p:txBody>
+          <a:bodyPr wrap="square" lIns="0" tIns="0" rIns="0" bIns="0" anchor="ctr" rtlCol="0"/>
+          <a:lstStyle/>
+          <a:p/>
+        </p:txBody>
+      </p:sp>
+      <p:sp>
+        <p:nvSpPr>
+          <p:cNvPr id="13" name="TextBox 13"/>
+          <p:cNvSpPr txBox="1"/>
+          <p:nvPr/>
+        </p:nvSpPr>
+        <p:spPr>
+          <a:xfrm>
+            <a:off x="6304788" y="2002536"/>
+            <a:ext cx="2320290" cy="320040"/>
+          </a:xfrm>
+          <a:prstGeom prst="rect">
+            <a:avLst/>
+          </a:prstGeom>
+          <a:noFill/>
+        </p:spPr>
+        <p:txBody>
+          <a:bodyPr wrap="square" lIns="0" tIns="0" rIns="0" bIns="0" anchor="t" rtlCol="0"/>
+          <a:lstStyle/>
+          <a:p>
+            <a:pPr algn="l">
+              <a:lnSpc>
+                <a:spcPct val="145000"/>
+              </a:lnSpc>
+            </a:pPr>
+            <a:r>
+              <a:rPr lang="ja-JP" altLang="en-US" sz="1200" b="1" spc="120">
+                <a:solidFill>
+                  <a:srgbClr val="FF5C77"/>
+                </a:solidFill>
+                <a:latin typeface="Yu Gothic"/>
+                <a:ea typeface="Yu Gothic"/>
+                <a:cs typeface="Yu Gothic"/>
+              </a:rPr>
+              <a:t>家事</a:t>
+            </a:r>
+          </a:p>
+        </p:txBody>
+      </p:sp>
+      <p:sp>
+        <p:nvSpPr>
+          <p:cNvPr id="14" name="TextBox 14"/>
+          <p:cNvSpPr txBox="1"/>
+          <p:nvPr/>
+        </p:nvSpPr>
+        <p:spPr>
+          <a:xfrm>
+            <a:off x="6304788" y="2414016"/>
+            <a:ext cx="2320290" cy="1005840"/>
+          </a:xfrm>
+          <a:prstGeom prst="rect">
+            <a:avLst/>
+          </a:prstGeom>
+          <a:noFill/>
+        </p:spPr>
+        <p:txBody>
+          <a:bodyPr wrap="square" lIns="0" tIns="0" rIns="0" bIns="0" anchor="t" rtlCol="0"/>
+          <a:lstStyle/>
+          <a:p>
+            <a:pPr algn="l">
+              <a:lnSpc>
+                <a:spcPct val="125000"/>
+              </a:lnSpc>
+            </a:pPr>
+            <a:r>
+              <a:rPr lang="ja-JP" altLang="en-US" sz="2200" b="1">
+                <a:solidFill>
+                  <a:srgbClr val="14141A"/>
+                </a:solidFill>
+                <a:latin typeface="Yu Gothic"/>
+                <a:ea typeface="Yu Gothic"/>
+                <a:cs typeface="Yu Gothic"/>
+              </a:rPr>
+              <a:t>掃除は</a:t>
+            </a:r>
+          </a:p>
+          <a:p>
+            <a:pPr algn="l">
+              <a:lnSpc>
+                <a:spcPct val="125000"/>
+              </a:lnSpc>
+            </a:pPr>
+            <a:r>
+              <a:rPr lang="ja-JP" altLang="en-US" sz="2200" b="1">
+                <a:solidFill>
+                  <a:srgbClr val="14141A"/>
+                </a:solidFill>
+                <a:latin typeface="Yu Gothic"/>
+                <a:ea typeface="Yu Gothic"/>
+                <a:cs typeface="Yu Gothic"/>
+              </a:rPr>
+              <a:t>改善中です</a:t>
+            </a:r>
+          </a:p>
+        </p:txBody>
+      </p:sp>
+      <p:sp>
+        <p:nvSpPr>
+          <p:cNvPr id="15" name="TextBox 15"/>
+          <p:cNvSpPr txBox="1"/>
+          <p:nvPr/>
+        </p:nvSpPr>
+        <p:spPr>
+          <a:xfrm>
+            <a:off x="6304788" y="3511296"/>
+            <a:ext cx="2320290" cy="1444752"/>
+          </a:xfrm>
+          <a:prstGeom prst="rect">
+            <a:avLst/>
+          </a:prstGeom>
+          <a:noFill/>
+        </p:spPr>
+        <p:txBody>
+          <a:bodyPr wrap="square" lIns="0" tIns="0" rIns="0" bIns="0" anchor="t" rtlCol="0"/>
+          <a:lstStyle/>
+          <a:p>
+            <a:pPr algn="l">
+              <a:lnSpc>
+                <a:spcPct val="155000"/>
+              </a:lnSpc>
+            </a:pPr>
+            <a:r>
+              <a:rPr lang="ja-JP" altLang="en-US" sz="1400" b="0">
+                <a:solidFill>
+                  <a:srgbClr val="14141A"/>
+                </a:solidFill>
+                <a:latin typeface="Yu Gothic"/>
+                <a:ea typeface="Yu Gothic"/>
+                <a:cs typeface="Yu Gothic"/>
+              </a:rPr>
+              <a:t>得意なほうがやります。決まらないものは、外注も選択肢に入れます。</a:t>
+            </a:r>
+          </a:p>
+        </p:txBody>
+      </p:sp>
+      <p:sp>
+        <p:nvSpPr>
+          <p:cNvPr id="16" name="Shape 16"/>
+          <p:cNvSpPr/>
+          <p:nvPr/>
+        </p:nvSpPr>
+        <p:spPr>
+          <a:xfrm>
+            <a:off x="9036558" y="1773936"/>
+            <a:ext cx="2320290" cy="38100"/>
+          </a:xfrm>
+          <a:prstGeom prst="rect">
+            <a:avLst/>
+          </a:prstGeom>
+          <a:solidFill>
+            <a:srgbClr val="6C5CE7"/>
+          </a:solidFill>
+          <a:ln>
+            <a:noFill/>
+          </a:ln>
+        </p:spPr>
+        <p:txBody>
+          <a:bodyPr wrap="square" lIns="0" tIns="0" rIns="0" bIns="0" anchor="ctr" rtlCol="0"/>
+          <a:lstStyle/>
+          <a:p/>
+        </p:txBody>
+      </p:sp>
+      <p:sp>
+        <p:nvSpPr>
+          <p:cNvPr id="17" name="TextBox 17"/>
+          <p:cNvSpPr txBox="1"/>
+          <p:nvPr/>
+        </p:nvSpPr>
+        <p:spPr>
+          <a:xfrm>
+            <a:off x="9036558" y="2002536"/>
+            <a:ext cx="2320290" cy="320040"/>
+          </a:xfrm>
+          <a:prstGeom prst="rect">
+            <a:avLst/>
+          </a:prstGeom>
+          <a:noFill/>
+        </p:spPr>
+        <p:txBody>
+          <a:bodyPr wrap="square" lIns="0" tIns="0" rIns="0" bIns="0" anchor="t" rtlCol="0"/>
+          <a:lstStyle/>
+          <a:p>
+            <a:pPr algn="l">
+              <a:lnSpc>
+                <a:spcPct val="145000"/>
+              </a:lnSpc>
+            </a:pPr>
+            <a:r>
+              <a:rPr lang="ja-JP" altLang="en-US" sz="1200" b="1" spc="120">
+                <a:solidFill>
+                  <a:srgbClr val="6C5CE7"/>
+                </a:solidFill>
+                <a:latin typeface="Yu Gothic"/>
+                <a:ea typeface="Yu Gothic"/>
+                <a:cs typeface="Yu Gothic"/>
+              </a:rPr>
+              <a:t>ケンカ</a:t>
+            </a:r>
+          </a:p>
+        </p:txBody>
+      </p:sp>
+      <p:sp>
+        <p:nvSpPr>
+          <p:cNvPr id="18" name="TextBox 18"/>
+          <p:cNvSpPr txBox="1"/>
+          <p:nvPr/>
+        </p:nvSpPr>
+        <p:spPr>
+          <a:xfrm>
+            <a:off x="9036558" y="2414016"/>
+            <a:ext cx="2320290" cy="1005840"/>
+          </a:xfrm>
+          <a:prstGeom prst="rect">
+            <a:avLst/>
+          </a:prstGeom>
+          <a:noFill/>
+        </p:spPr>
+        <p:txBody>
+          <a:bodyPr wrap="square" lIns="0" tIns="0" rIns="0" bIns="0" anchor="t" rtlCol="0"/>
+          <a:lstStyle/>
+          <a:p>
+            <a:pPr algn="l">
+              <a:lnSpc>
+                <a:spcPct val="125000"/>
+              </a:lnSpc>
+            </a:pPr>
+            <a:r>
+              <a:rPr lang="ja-JP" altLang="en-US" sz="2200" b="1">
+                <a:solidFill>
+                  <a:srgbClr val="14141A"/>
+                </a:solidFill>
+                <a:latin typeface="Yu Gothic"/>
+                <a:ea typeface="Yu Gothic"/>
+                <a:cs typeface="Yu Gothic"/>
+              </a:rPr>
+              <a:t>片方が謝って</a:t>
+            </a:r>
+          </a:p>
+          <a:p>
+            <a:pPr algn="l">
+              <a:lnSpc>
+                <a:spcPct val="125000"/>
+              </a:lnSpc>
+            </a:pPr>
+            <a:r>
+              <a:rPr lang="ja-JP" altLang="en-US" sz="2200" b="1">
+                <a:solidFill>
+                  <a:srgbClr val="14141A"/>
+                </a:solidFill>
+                <a:latin typeface="Yu Gothic"/>
+                <a:ea typeface="Yu Gothic"/>
+                <a:cs typeface="Yu Gothic"/>
+              </a:rPr>
+              <a:t>終わります</a:t>
+            </a:r>
+          </a:p>
+        </p:txBody>
+      </p:sp>
+      <p:sp>
+        <p:nvSpPr>
+          <p:cNvPr id="19" name="TextBox 19"/>
+          <p:cNvSpPr txBox="1"/>
+          <p:nvPr/>
+        </p:nvSpPr>
+        <p:spPr>
+          <a:xfrm>
+            <a:off x="9036558" y="3511296"/>
+            <a:ext cx="2320290" cy="1444752"/>
+          </a:xfrm>
+          <a:prstGeom prst="rect">
+            <a:avLst/>
+          </a:prstGeom>
+          <a:noFill/>
+        </p:spPr>
+        <p:txBody>
+          <a:bodyPr wrap="square" lIns="0" tIns="0" rIns="0" bIns="0" anchor="t" rtlCol="0"/>
+          <a:lstStyle/>
+          <a:p>
+            <a:pPr algn="l">
+              <a:lnSpc>
+                <a:spcPct val="155000"/>
+              </a:lnSpc>
+            </a:pPr>
+            <a:r>
+              <a:rPr lang="ja-JP" altLang="en-US" sz="1400" b="0">
+                <a:solidFill>
+                  <a:srgbClr val="14141A"/>
+                </a:solidFill>
+                <a:latin typeface="Yu Gothic"/>
+                <a:ea typeface="Yu Gothic"/>
+                <a:cs typeface="Yu Gothic"/>
+              </a:rPr>
+              <a:t>今のやり方を変えません。翌日には持ち越しません。</a:t>
+            </a:r>
+          </a:p>
+        </p:txBody>
+      </p:sp>
+      <p:sp>
+        <p:nvSpPr>
+          <p:cNvPr id="20" name="TextBox 20"/>
+          <p:cNvSpPr txBox="1"/>
+          <p:nvPr/>
+        </p:nvSpPr>
+        <p:spPr>
+          <a:xfrm>
+            <a:off x="841248" y="5138928"/>
+            <a:ext cx="10515600" cy="914400"/>
+          </a:xfrm>
+          <a:prstGeom prst="rect">
+            <a:avLst/>
+          </a:prstGeom>
+          <a:noFill/>
+        </p:spPr>
+        <p:txBody>
+          <a:bodyPr wrap="square" lIns="0" tIns="0" rIns="0" bIns="0" anchor="b" rtlCol="0"/>
+          <a:lstStyle/>
+          <a:p>
+            <a:pPr algn="l">
+              <a:lnSpc>
+                <a:spcPct val="125000"/>
+              </a:lnSpc>
+            </a:pPr>
+            <a:r>
+              <a:rPr lang="ja-JP" altLang="en-US" sz="2800" b="1">
+                <a:solidFill>
+                  <a:srgbClr val="14141A"/>
+                </a:solidFill>
+                <a:latin typeface="Yu Gothic"/>
+                <a:ea typeface="Yu Gothic"/>
+                <a:cs typeface="Yu Gothic"/>
+              </a:rPr>
+              <a:t>変えないのは仕事、直すのは家事です。</a:t>
+            </a:r>
+          </a:p>
+        </p:txBody>
+      </p:sp>
+      <p:sp>
+        <p:nvSpPr>
+          <p:cNvPr id="21" name="TextBox 21"/>
+          <p:cNvSpPr txBox="1"/>
+          <p:nvPr/>
+        </p:nvSpPr>
+        <p:spPr>
+          <a:xfrm>
+            <a:off x="841248" y="6391656"/>
+            <a:ext cx="5486400" cy="274320"/>
+          </a:xfrm>
+          <a:prstGeom prst="rect">
+            <a:avLst/>
+          </a:prstGeom>
+          <a:noFill/>
+        </p:spPr>
+        <p:txBody>
+          <a:bodyPr wrap="square" lIns="0" tIns="0" rIns="0" bIns="0" anchor="t" rtlCol="0"/>
+          <a:lstStyle/>
+          <a:p>
+            <a:pPr algn="l">
+              <a:lnSpc>
+                <a:spcPct val="145000"/>
+              </a:lnSpc>
+            </a:pPr>
+            <a:r>
+              <a:rPr lang="ja-JP" altLang="en-US" sz="1000" b="0" spc="50">
+                <a:solidFill>
+                  <a:srgbClr val="A3A3AE"/>
+                </a:solidFill>
+                <a:latin typeface="Yu Gothic"/>
+                <a:ea typeface="Yu Gothic"/>
+                <a:cs typeface="Yu Gothic"/>
+              </a:rPr>
+              <a:t>ふたりの計画のご提案</a:t>
+            </a:r>
+          </a:p>
+        </p:txBody>
+      </p:sp>
+      <p:sp>
+        <p:nvSpPr>
+          <p:cNvPr id="22" name="TextBox 22"/>
+          <p:cNvSpPr txBox="1"/>
+          <p:nvPr/>
+        </p:nvSpPr>
+        <p:spPr>
+          <a:xfrm>
+            <a:off x="10436047" y="6373368"/>
+            <a:ext cx="914400" cy="274320"/>
+          </a:xfrm>
+          <a:prstGeom prst="rect">
+            <a:avLst/>
+          </a:prstGeom>
+          <a:noFill/>
+        </p:spPr>
+        <p:txBody>
+          <a:bodyPr wrap="square" lIns="0" tIns="0" rIns="0" bIns="0" anchor="t" rtlCol="0"/>
+          <a:lstStyle/>
+          <a:p>
+            <a:pPr algn="r">
+              <a:lnSpc>
+                <a:spcPct val="145000"/>
+              </a:lnSpc>
+            </a:pPr>
+            <a:r>
+              <a:rPr lang="ja-JP" altLang="en-US" sz="1200" b="1" spc="50">
+                <a:solidFill>
+                  <a:srgbClr val="A3A3AE"/>
+                </a:solidFill>
+                <a:latin typeface="Yu Gothic"/>
+                <a:ea typeface="Yu Gothic"/>
+                <a:cs typeface="Yu Gothic"/>
+              </a:rPr>
+              <a:t>12</a:t>
+            </a:r>
+          </a:p>
+        </p:txBody>
+      </p:sp>
+    </p:spTree>
+  </p:cSld>
+  <p:clrMapOvr>
+    <a:masterClrMapping/>
+  </p:clrMapOvr>
+</p:sld>
+</file>
+
+<file path=ppt/slides/slide13.xml><?xml version="1.0" encoding="utf-8"?>
 <p:sld xmlns:a="http://schemas.openxmlformats.org/drawingml/2006/main" xmlns:r="http://schemas.openxmlformats.org/officeDocument/2006/relationships" xmlns:p="http://schemas.openxmlformats.org/presentationml/2006/main">
   <p:cSld>
     <p:bg>

--- a/proposal/ふたりの計画のご提案.pptx
+++ b/proposal/ふたりの計画のご提案.pptx
@@ -31,6 +31,8 @@
     <p:sldId id="276" r:id="rId23"/>
     <p:sldId id="277" r:id="rId24"/>
     <p:sldId id="278" r:id="rId25"/>
+    <p:sldId id="279" r:id="rId26"/>
+    <p:sldId id="280" r:id="rId27"/>
   </p:sldIdLst>
   <p:sldSz cx="12191695" cy="6858000"/>
   <p:notesSz cx="6858000" cy="9144000"/>
@@ -774,7 +776,7 @@
           <a:p>
             <a:r>
               <a:rPr lang="ja-JP" altLang="en-US" sz="1200"/>
-              <a:t>金額はここだけ。ほかのページには置かない。</a:t>
+              <a:t>条件は3つだけ。増やすと物件が無くなる。</a:t>
             </a:r>
           </a:p>
         </p:txBody>
@@ -892,7 +894,7 @@
           <a:p>
             <a:r>
               <a:rPr lang="ja-JP" altLang="en-US" sz="1200"/>
-              <a:t>カンヌは隠さない。「家計に影響しない」の一点だけ伝わればいい。</a:t>
+              <a:t>金額はここだけ。ほかのページには置かない。</a:t>
             </a:r>
           </a:p>
         </p:txBody>
@@ -951,7 +953,7 @@
           <a:p>
             <a:r>
               <a:rPr lang="ja-JP" altLang="en-US" sz="1200"/>
-              <a:t>黄色の行が、彼への一番かんたんな宿題。</a:t>
+              <a:t>「足りない方が悪い」にしないのが、この図の目的。</a:t>
             </a:r>
           </a:p>
         </p:txBody>
@@ -1010,7 +1012,7 @@
           <a:p>
             <a:r>
               <a:rPr lang="ja-JP" altLang="en-US" sz="1200"/>
-              <a:t>「改善中」は正直に。自己PRはしない。</a:t>
+              <a:t>カンヌは隠さない。「家計に影響しない」の一点だけ伝わればいい。</a:t>
             </a:r>
           </a:p>
         </p:txBody>
@@ -1024,6 +1026,124 @@
 </file>
 
 <file path=ppt/notesSlides/notesSlide23.xml><?xml version="1.0" encoding="utf-8"?>
+<p:notes xmlns:a="http://schemas.openxmlformats.org/drawingml/2006/main" xmlns:r="http://schemas.openxmlformats.org/officeDocument/2006/relationships" xmlns:p="http://schemas.openxmlformats.org/presentationml/2006/main">
+  <p:cSld>
+    <p:spTree>
+      <p:nvGrpSpPr>
+        <p:cNvPr id="1" name=""/>
+        <p:cNvGrpSpPr/>
+        <p:nvPr/>
+      </p:nvGrpSpPr>
+      <p:grpSpPr>
+        <a:xfrm>
+          <a:off x="0" y="0"/>
+          <a:ext cx="0" cy="0"/>
+          <a:chOff x="0" y="0"/>
+          <a:chExt cx="0" cy="0"/>
+        </a:xfrm>
+      </p:grpSpPr>
+      <p:sp>
+        <p:nvSpPr>
+          <p:cNvPr id="2" name="Slide Image Placeholder 1"/>
+          <p:cNvSpPr>
+            <a:spLocks noGrp="1" noRot="1" noChangeAspect="1"/>
+          </p:cNvSpPr>
+          <p:nvPr>
+            <p:ph type="sldImg"/>
+          </p:nvPr>
+        </p:nvSpPr>
+        <p:spPr/>
+      </p:sp>
+      <p:sp>
+        <p:nvSpPr>
+          <p:cNvPr id="3" name="Notes Placeholder 2"/>
+          <p:cNvSpPr>
+            <a:spLocks noGrp="1"/>
+          </p:cNvSpPr>
+          <p:nvPr>
+            <p:ph type="body" idx="1"/>
+          </p:nvPr>
+        </p:nvSpPr>
+        <p:spPr/>
+        <p:txBody>
+          <a:bodyPr/>
+          <a:lstStyle/>
+          <a:p>
+            <a:r>
+              <a:rPr lang="ja-JP" altLang="en-US" sz="1200"/>
+              <a:t>黄色の行が、彼への一番かんたんな宿題。</a:t>
+            </a:r>
+          </a:p>
+        </p:txBody>
+      </p:sp>
+    </p:spTree>
+  </p:cSld>
+  <p:clrMapOvr>
+    <a:masterClrMapping/>
+  </p:clrMapOvr>
+</p:notes>
+</file>
+
+<file path=ppt/notesSlides/notesSlide24.xml><?xml version="1.0" encoding="utf-8"?>
+<p:notes xmlns:a="http://schemas.openxmlformats.org/drawingml/2006/main" xmlns:r="http://schemas.openxmlformats.org/officeDocument/2006/relationships" xmlns:p="http://schemas.openxmlformats.org/presentationml/2006/main">
+  <p:cSld>
+    <p:spTree>
+      <p:nvGrpSpPr>
+        <p:cNvPr id="1" name=""/>
+        <p:cNvGrpSpPr/>
+        <p:nvPr/>
+      </p:nvGrpSpPr>
+      <p:grpSpPr>
+        <a:xfrm>
+          <a:off x="0" y="0"/>
+          <a:ext cx="0" cy="0"/>
+          <a:chOff x="0" y="0"/>
+          <a:chExt cx="0" cy="0"/>
+        </a:xfrm>
+      </p:grpSpPr>
+      <p:sp>
+        <p:nvSpPr>
+          <p:cNvPr id="2" name="Slide Image Placeholder 1"/>
+          <p:cNvSpPr>
+            <a:spLocks noGrp="1" noRot="1" noChangeAspect="1"/>
+          </p:cNvSpPr>
+          <p:nvPr>
+            <p:ph type="sldImg"/>
+          </p:nvPr>
+        </p:nvSpPr>
+        <p:spPr/>
+      </p:sp>
+      <p:sp>
+        <p:nvSpPr>
+          <p:cNvPr id="3" name="Notes Placeholder 2"/>
+          <p:cNvSpPr>
+            <a:spLocks noGrp="1"/>
+          </p:cNvSpPr>
+          <p:nvPr>
+            <p:ph type="body" idx="1"/>
+          </p:nvPr>
+        </p:nvSpPr>
+        <p:spPr/>
+        <p:txBody>
+          <a:bodyPr/>
+          <a:lstStyle/>
+          <a:p>
+            <a:r>
+              <a:rPr lang="ja-JP" altLang="en-US" sz="1200"/>
+              <a:t>「改善中」は正直に。自己PRはしない。</a:t>
+            </a:r>
+          </a:p>
+        </p:txBody>
+      </p:sp>
+    </p:spTree>
+  </p:cSld>
+  <p:clrMapOvr>
+    <a:masterClrMapping/>
+  </p:clrMapOvr>
+</p:notes>
+</file>
+
+<file path=ppt/notesSlides/notesSlide25.xml><?xml version="1.0" encoding="utf-8"?>
 <p:notes xmlns:a="http://schemas.openxmlformats.org/drawingml/2006/main" xmlns:r="http://schemas.openxmlformats.org/officeDocument/2006/relationships" xmlns:p="http://schemas.openxmlformats.org/presentationml/2006/main">
   <p:cSld>
     <p:spTree>
@@ -7153,7 +7273,7 @@
                 <a:ea typeface="Yu Gothic"/>
                 <a:cs typeface="Yu Gothic"/>
               </a:rPr>
-              <a:t>生活費</a:t>
+              <a:t>家の条件</a:t>
             </a:r>
           </a:p>
         </p:txBody>
@@ -7192,7 +7312,32 @@
                 <a:ea typeface="Yu Gothic Medium"/>
                 <a:cs typeface="Yu Gothic Medium"/>
               </a:rPr>
-              <a:t>二人の財布はひとつにして、見える化します。削らないものだけ、先に決めます。</a:t>
+              <a:t>広さへのこだわりはありません。</a:t>
+            </a:r>
+            <a:r>
+              <a:rPr lang="ja-JP" altLang="en-US" sz="2200" b="0">
+                <a:solidFill>
+                  <a:srgbClr val="14141A"/>
+                </a:solidFill>
+                <a:highlight>
+                  <a:srgbClr val="FFD93D"/>
+                </a:highlight>
+                <a:latin typeface="Yu Gothic Medium"/>
+                <a:ea typeface="Yu Gothic Medium"/>
+                <a:cs typeface="Yu Gothic Medium"/>
+              </a:rPr>
+              <a:t>場所と設備</a:t>
+            </a:r>
+            <a:r>
+              <a:rPr lang="ja-JP" altLang="en-US" sz="2200" b="0">
+                <a:solidFill>
+                  <a:srgbClr val="14141A"/>
+                </a:solidFill>
+                <a:latin typeface="Yu Gothic Medium"/>
+                <a:ea typeface="Yu Gothic Medium"/>
+                <a:cs typeface="Yu Gothic Medium"/>
+              </a:rPr>
+              <a:t>だけ、先に決めさせてください。</a:t>
             </a:r>
           </a:p>
         </p:txBody>
@@ -7205,8 +7350,184 @@
         </p:nvSpPr>
         <p:spPr>
           <a:xfrm>
-            <a:off x="841248" y="1773936"/>
-            <a:ext cx="2320290" cy="38100"/>
+            <a:off x="1389888" y="1901952"/>
+            <a:ext cx="3566160" cy="3566160"/>
+          </a:xfrm>
+          <a:prstGeom prst="ellipse">
+            <a:avLst/>
+          </a:prstGeom>
+          <a:solidFill>
+            <a:srgbClr val="E6F7F5"/>
+          </a:solidFill>
+          <a:ln>
+            <a:noFill/>
+          </a:ln>
+        </p:spPr>
+        <p:txBody>
+          <a:bodyPr wrap="square" lIns="0" tIns="0" rIns="0" bIns="0" anchor="ctr" rtlCol="0"/>
+          <a:lstStyle/>
+          <a:p/>
+        </p:txBody>
+      </p:sp>
+      <p:sp>
+        <p:nvSpPr>
+          <p:cNvPr id="5" name="TextBox 5"/>
+          <p:cNvSpPr txBox="1"/>
+          <p:nvPr/>
+        </p:nvSpPr>
+        <p:spPr>
+          <a:xfrm>
+            <a:off x="1389888" y="2048256"/>
+            <a:ext cx="3566160" cy="310896"/>
+          </a:xfrm>
+          <a:prstGeom prst="rect">
+            <a:avLst/>
+          </a:prstGeom>
+          <a:noFill/>
+        </p:spPr>
+        <p:txBody>
+          <a:bodyPr wrap="square" lIns="0" tIns="0" rIns="0" bIns="0" anchor="t" rtlCol="0"/>
+          <a:lstStyle/>
+          <a:p>
+            <a:pPr algn="ctr">
+              <a:lnSpc>
+                <a:spcPct val="145000"/>
+              </a:lnSpc>
+            </a:pPr>
+            <a:r>
+              <a:rPr lang="ja-JP" altLang="en-US" sz="1350" b="1">
+                <a:solidFill>
+                  <a:srgbClr val="14141A"/>
+                </a:solidFill>
+                <a:latin typeface="Yu Gothic"/>
+                <a:ea typeface="Yu Gothic"/>
+                <a:cs typeface="Yu Gothic"/>
+              </a:rPr>
+              <a:t>通勤60分</a:t>
+            </a:r>
+          </a:p>
+        </p:txBody>
+      </p:sp>
+      <p:sp>
+        <p:nvSpPr>
+          <p:cNvPr id="6" name="Shape 6"/>
+          <p:cNvSpPr/>
+          <p:nvPr/>
+        </p:nvSpPr>
+        <p:spPr>
+          <a:xfrm>
+            <a:off x="2138782" y="2650846"/>
+            <a:ext cx="2068372" cy="2068372"/>
+          </a:xfrm>
+          <a:prstGeom prst="ellipse">
+            <a:avLst/>
+          </a:prstGeom>
+          <a:solidFill>
+            <a:srgbClr val="FFF6CC"/>
+          </a:solidFill>
+          <a:ln>
+            <a:noFill/>
+          </a:ln>
+        </p:spPr>
+        <p:txBody>
+          <a:bodyPr wrap="square" lIns="0" tIns="0" rIns="0" bIns="0" anchor="ctr" rtlCol="0"/>
+          <a:lstStyle/>
+          <a:p/>
+        </p:txBody>
+      </p:sp>
+      <p:sp>
+        <p:nvSpPr>
+          <p:cNvPr id="7" name="TextBox 7"/>
+          <p:cNvSpPr txBox="1"/>
+          <p:nvPr/>
+        </p:nvSpPr>
+        <p:spPr>
+          <a:xfrm>
+            <a:off x="2138782" y="2797150"/>
+            <a:ext cx="2068372" cy="310896"/>
+          </a:xfrm>
+          <a:prstGeom prst="rect">
+            <a:avLst/>
+          </a:prstGeom>
+          <a:noFill/>
+        </p:spPr>
+        <p:txBody>
+          <a:bodyPr wrap="square" lIns="0" tIns="0" rIns="0" bIns="0" anchor="t" rtlCol="0"/>
+          <a:lstStyle/>
+          <a:p>
+            <a:pPr algn="ctr">
+              <a:lnSpc>
+                <a:spcPct val="145000"/>
+              </a:lnSpc>
+            </a:pPr>
+            <a:r>
+              <a:rPr lang="ja-JP" altLang="en-US" sz="1350" b="1">
+                <a:solidFill>
+                  <a:srgbClr val="14141A"/>
+                </a:solidFill>
+                <a:latin typeface="Yu Gothic"/>
+                <a:ea typeface="Yu Gothic"/>
+                <a:cs typeface="Yu Gothic"/>
+              </a:rPr>
+              <a:t>通勤30分</a:t>
+            </a:r>
+          </a:p>
+        </p:txBody>
+      </p:sp>
+      <p:sp>
+        <p:nvSpPr>
+          <p:cNvPr id="8" name="Shape 8"/>
+          <p:cNvSpPr/>
+          <p:nvPr/>
+        </p:nvSpPr>
+        <p:spPr>
+          <a:xfrm>
+            <a:off x="2624328" y="3136392"/>
+            <a:ext cx="1097280" cy="1097280"/>
+          </a:xfrm>
+          <a:prstGeom prst="ellipse">
+            <a:avLst/>
+          </a:prstGeom>
+          <a:solidFill>
+            <a:srgbClr val="14141A"/>
+          </a:solidFill>
+          <a:ln>
+            <a:noFill/>
+          </a:ln>
+        </p:spPr>
+        <p:txBody>
+          <a:bodyPr wrap="square" lIns="0" tIns="0" rIns="0" bIns="0" anchor="ctr" rtlCol="0"/>
+          <a:lstStyle/>
+          <a:p>
+            <a:pPr algn="ctr">
+              <a:lnSpc>
+                <a:spcPct val="145000"/>
+              </a:lnSpc>
+            </a:pPr>
+            <a:r>
+              <a:rPr lang="ja-JP" altLang="en-US" sz="1300" b="1">
+                <a:solidFill>
+                  <a:srgbClr val="FFFFFF"/>
+                </a:solidFill>
+                <a:latin typeface="Yu Gothic"/>
+                <a:ea typeface="Yu Gothic"/>
+                <a:cs typeface="Yu Gothic"/>
+              </a:rPr>
+              <a:t>都内</a:t>
+            </a:r>
+          </a:p>
+        </p:txBody>
+      </p:sp>
+      <p:sp>
+        <p:nvSpPr>
+          <p:cNvPr id="9" name="Shape 9"/>
+          <p:cNvSpPr/>
+          <p:nvPr/>
+        </p:nvSpPr>
+        <p:spPr>
+          <a:xfrm>
+            <a:off x="5961888" y="2551176"/>
+            <a:ext cx="146304" cy="146304"/>
           </a:xfrm>
           <a:prstGeom prst="rect">
             <a:avLst/>
@@ -7226,14 +7547,14 @@
       </p:sp>
       <p:sp>
         <p:nvSpPr>
-          <p:cNvPr id="5" name="TextBox 5"/>
-          <p:cNvSpPr txBox="1"/>
-          <p:nvPr/>
-        </p:nvSpPr>
-        <p:spPr>
-          <a:xfrm>
-            <a:off x="841248" y="2002536"/>
-            <a:ext cx="2320290" cy="320040"/>
+          <p:cNvPr id="10" name="TextBox 10"/>
+          <p:cNvSpPr txBox="1"/>
+          <p:nvPr/>
+        </p:nvSpPr>
+        <p:spPr>
+          <a:xfrm>
+            <a:off x="6327648" y="2423160"/>
+            <a:ext cx="5022799" cy="384048"/>
           </a:xfrm>
           <a:prstGeom prst="rect">
             <a:avLst/>
@@ -7250,125 +7571,68 @@
               </a:lnSpc>
             </a:pPr>
             <a:r>
-              <a:rPr lang="ja-JP" altLang="en-US" sz="1200" b="1" spc="120">
-                <a:solidFill>
-                  <a:srgbClr val="00C4B3"/>
-                </a:solidFill>
-                <a:latin typeface="Yu Gothic"/>
-                <a:ea typeface="Yu Gothic"/>
-                <a:cs typeface="Yu Gothic"/>
-              </a:rPr>
-              <a:t>家賃</a:t>
-            </a:r>
-          </a:p>
-        </p:txBody>
-      </p:sp>
-      <p:sp>
-        <p:nvSpPr>
-          <p:cNvPr id="6" name="TextBox 6"/>
-          <p:cNvSpPr txBox="1"/>
-          <p:nvPr/>
-        </p:nvSpPr>
-        <p:spPr>
-          <a:xfrm>
-            <a:off x="841248" y="2414016"/>
-            <a:ext cx="2320290" cy="1005840"/>
-          </a:xfrm>
-          <a:prstGeom prst="rect">
-            <a:avLst/>
-          </a:prstGeom>
-          <a:noFill/>
-        </p:spPr>
-        <p:txBody>
-          <a:bodyPr wrap="square" lIns="0" tIns="0" rIns="0" bIns="0" anchor="t" rtlCol="0"/>
-          <a:lstStyle/>
-          <a:p>
-            <a:pPr algn="l">
-              <a:lnSpc>
-                <a:spcPct val="125000"/>
-              </a:lnSpc>
-            </a:pPr>
-            <a:r>
-              <a:rPr lang="ja-JP" altLang="en-US" sz="2200" b="1">
-                <a:solidFill>
-                  <a:srgbClr val="14141A"/>
-                </a:solidFill>
-                <a:latin typeface="Yu Gothic"/>
-                <a:ea typeface="Yu Gothic"/>
-                <a:cs typeface="Yu Gothic"/>
-              </a:rPr>
-              <a:t>月15〜20万を</a:t>
-            </a:r>
-          </a:p>
-          <a:p>
-            <a:pPr algn="l">
-              <a:lnSpc>
-                <a:spcPct val="125000"/>
-              </a:lnSpc>
-            </a:pPr>
-            <a:r>
-              <a:rPr lang="ja-JP" altLang="en-US" sz="2200" b="1">
-                <a:solidFill>
-                  <a:srgbClr val="14141A"/>
-                </a:solidFill>
-                <a:latin typeface="Yu Gothic"/>
-                <a:ea typeface="Yu Gothic"/>
-                <a:cs typeface="Yu Gothic"/>
-              </a:rPr>
-              <a:t>折半します</a:t>
-            </a:r>
-          </a:p>
-        </p:txBody>
-      </p:sp>
-      <p:sp>
-        <p:nvSpPr>
-          <p:cNvPr id="7" name="TextBox 7"/>
-          <p:cNvSpPr txBox="1"/>
-          <p:nvPr/>
-        </p:nvSpPr>
-        <p:spPr>
-          <a:xfrm>
-            <a:off x="841248" y="3511296"/>
-            <a:ext cx="2320290" cy="1444752"/>
-          </a:xfrm>
-          <a:prstGeom prst="rect">
-            <a:avLst/>
-          </a:prstGeom>
-          <a:noFill/>
-        </p:spPr>
-        <p:txBody>
-          <a:bodyPr wrap="square" lIns="0" tIns="0" rIns="0" bIns="0" anchor="t" rtlCol="0"/>
-          <a:lstStyle/>
-          <a:p>
-            <a:pPr algn="l">
-              <a:lnSpc>
-                <a:spcPct val="155000"/>
-              </a:lnSpc>
-            </a:pPr>
-            <a:r>
-              <a:rPr lang="ja-JP" altLang="en-US" sz="1400" b="0">
-                <a:solidFill>
-                  <a:srgbClr val="14141A"/>
-                </a:solidFill>
-                <a:latin typeface="Yu Gothic"/>
-                <a:ea typeface="Yu Gothic"/>
-                <a:cs typeface="Yu Gothic"/>
-              </a:rPr>
-              <a:t>私の分は上限10万です。名義は私で、共同口座から引き落とします。20万なら入籍後に収入を合算します。</a:t>
-            </a:r>
-          </a:p>
-        </p:txBody>
-      </p:sp>
-      <p:sp>
-        <p:nvSpPr>
-          <p:cNvPr id="8" name="Shape 8"/>
+              <a:rPr lang="ja-JP" altLang="en-US" sz="1800" b="1">
+                <a:solidFill>
+                  <a:srgbClr val="14141A"/>
+                </a:solidFill>
+                <a:latin typeface="Yu Gothic"/>
+                <a:ea typeface="Yu Gothic"/>
+                <a:cs typeface="Yu Gothic"/>
+              </a:rPr>
+              <a:t>ふたりとも通勤30〜60分</a:t>
+            </a:r>
+          </a:p>
+        </p:txBody>
+      </p:sp>
+      <p:sp>
+        <p:nvSpPr>
+          <p:cNvPr id="11" name="TextBox 11"/>
+          <p:cNvSpPr txBox="1"/>
+          <p:nvPr/>
+        </p:nvSpPr>
+        <p:spPr>
+          <a:xfrm>
+            <a:off x="6327648" y="2825496"/>
+            <a:ext cx="5022799" cy="365760"/>
+          </a:xfrm>
+          <a:prstGeom prst="rect">
+            <a:avLst/>
+          </a:prstGeom>
+          <a:noFill/>
+        </p:spPr>
+        <p:txBody>
+          <a:bodyPr wrap="square" lIns="0" tIns="0" rIns="0" bIns="0" anchor="t" rtlCol="0"/>
+          <a:lstStyle/>
+          <a:p>
+            <a:pPr algn="l">
+              <a:lnSpc>
+                <a:spcPct val="140000"/>
+              </a:lnSpc>
+            </a:pPr>
+            <a:r>
+              <a:rPr lang="ja-JP" altLang="en-US" sz="1300" b="0">
+                <a:solidFill>
+                  <a:srgbClr val="6B6B76"/>
+                </a:solidFill>
+                <a:latin typeface="Yu Gothic"/>
+                <a:ea typeface="Yu Gothic"/>
+                <a:cs typeface="Yu Gothic"/>
+              </a:rPr>
+              <a:t>どちらかだけが遠い、をつくらない範囲で探します。</a:t>
+            </a:r>
+          </a:p>
+        </p:txBody>
+      </p:sp>
+      <p:sp>
+        <p:nvSpPr>
+          <p:cNvPr id="12" name="Shape 12"/>
           <p:cNvSpPr/>
           <p:nvPr/>
         </p:nvSpPr>
         <p:spPr>
           <a:xfrm>
-            <a:off x="3573018" y="1773936"/>
-            <a:ext cx="2320290" cy="38100"/>
+            <a:off x="5961888" y="3392424"/>
+            <a:ext cx="146304" cy="146304"/>
           </a:xfrm>
           <a:prstGeom prst="rect">
             <a:avLst/>
@@ -7388,14 +7652,14 @@
       </p:sp>
       <p:sp>
         <p:nvSpPr>
-          <p:cNvPr id="9" name="TextBox 9"/>
-          <p:cNvSpPr txBox="1"/>
-          <p:nvPr/>
-        </p:nvSpPr>
-        <p:spPr>
-          <a:xfrm>
-            <a:off x="3573018" y="2002536"/>
-            <a:ext cx="2320290" cy="320040"/>
+          <p:cNvPr id="13" name="TextBox 13"/>
+          <p:cNvSpPr txBox="1"/>
+          <p:nvPr/>
+        </p:nvSpPr>
+        <p:spPr>
+          <a:xfrm>
+            <a:off x="6327648" y="3264408"/>
+            <a:ext cx="5022799" cy="384048"/>
           </a:xfrm>
           <a:prstGeom prst="rect">
             <a:avLst/>
@@ -7412,125 +7676,68 @@
               </a:lnSpc>
             </a:pPr>
             <a:r>
-              <a:rPr lang="ja-JP" altLang="en-US" sz="1200" b="1" spc="120">
-                <a:solidFill>
-                  <a:srgbClr val="14141A"/>
-                </a:solidFill>
-                <a:latin typeface="Yu Gothic"/>
-                <a:ea typeface="Yu Gothic"/>
-                <a:cs typeface="Yu Gothic"/>
-              </a:rPr>
-              <a:t>共同口座</a:t>
-            </a:r>
-          </a:p>
-        </p:txBody>
-      </p:sp>
-      <p:sp>
-        <p:nvSpPr>
-          <p:cNvPr id="10" name="TextBox 10"/>
-          <p:cNvSpPr txBox="1"/>
-          <p:nvPr/>
-        </p:nvSpPr>
-        <p:spPr>
-          <a:xfrm>
-            <a:off x="3573018" y="2414016"/>
-            <a:ext cx="2320290" cy="1005840"/>
-          </a:xfrm>
-          <a:prstGeom prst="rect">
-            <a:avLst/>
-          </a:prstGeom>
-          <a:noFill/>
-        </p:spPr>
-        <p:txBody>
-          <a:bodyPr wrap="square" lIns="0" tIns="0" rIns="0" bIns="0" anchor="t" rtlCol="0"/>
-          <a:lstStyle/>
-          <a:p>
-            <a:pPr algn="l">
-              <a:lnSpc>
-                <a:spcPct val="125000"/>
-              </a:lnSpc>
-            </a:pPr>
-            <a:r>
-              <a:rPr lang="ja-JP" altLang="en-US" sz="2200" b="1">
-                <a:solidFill>
-                  <a:srgbClr val="14141A"/>
-                </a:solidFill>
-                <a:latin typeface="Yu Gothic"/>
-                <a:ea typeface="Yu Gothic"/>
-                <a:cs typeface="Yu Gothic"/>
-              </a:rPr>
-              <a:t>お金はぜんぶ</a:t>
-            </a:r>
-          </a:p>
-          <a:p>
-            <a:pPr algn="l">
-              <a:lnSpc>
-                <a:spcPct val="125000"/>
-              </a:lnSpc>
-            </a:pPr>
-            <a:r>
-              <a:rPr lang="ja-JP" altLang="en-US" sz="2200" b="1">
-                <a:solidFill>
-                  <a:srgbClr val="14141A"/>
-                </a:solidFill>
-                <a:latin typeface="Yu Gothic"/>
-                <a:ea typeface="Yu Gothic"/>
-                <a:cs typeface="Yu Gothic"/>
-              </a:rPr>
-              <a:t>ここからです</a:t>
-            </a:r>
-          </a:p>
-        </p:txBody>
-      </p:sp>
-      <p:sp>
-        <p:nvSpPr>
-          <p:cNvPr id="11" name="TextBox 11"/>
-          <p:cNvSpPr txBox="1"/>
-          <p:nvPr/>
-        </p:nvSpPr>
-        <p:spPr>
-          <a:xfrm>
-            <a:off x="3573018" y="3511296"/>
-            <a:ext cx="2320290" cy="1444752"/>
-          </a:xfrm>
-          <a:prstGeom prst="rect">
-            <a:avLst/>
-          </a:prstGeom>
-          <a:noFill/>
-        </p:spPr>
-        <p:txBody>
-          <a:bodyPr wrap="square" lIns="0" tIns="0" rIns="0" bIns="0" anchor="t" rtlCol="0"/>
-          <a:lstStyle/>
-          <a:p>
-            <a:pPr algn="l">
-              <a:lnSpc>
-                <a:spcPct val="155000"/>
-              </a:lnSpc>
-            </a:pPr>
-            <a:r>
-              <a:rPr lang="ja-JP" altLang="en-US" sz="1400" b="0">
-                <a:solidFill>
-                  <a:srgbClr val="14141A"/>
-                </a:solidFill>
-                <a:latin typeface="Yu Gothic"/>
-                <a:ea typeface="Yu Gothic"/>
-                <a:cs typeface="Yu Gothic"/>
-              </a:rPr>
-              <a:t>私名義で、入居と同時に開設します。年に1回だけ棚卸しをします。お小遣いには干渉しません。</a:t>
-            </a:r>
-          </a:p>
-        </p:txBody>
-      </p:sp>
-      <p:sp>
-        <p:nvSpPr>
-          <p:cNvPr id="12" name="Shape 12"/>
+              <a:rPr lang="ja-JP" altLang="en-US" sz="1800" b="1">
+                <a:solidFill>
+                  <a:srgbClr val="14141A"/>
+                </a:solidFill>
+                <a:latin typeface="Yu Gothic"/>
+                <a:ea typeface="Yu Gothic"/>
+                <a:cs typeface="Yu Gothic"/>
+              </a:rPr>
+              <a:t>独立洗面台がある</a:t>
+            </a:r>
+          </a:p>
+        </p:txBody>
+      </p:sp>
+      <p:sp>
+        <p:nvSpPr>
+          <p:cNvPr id="14" name="TextBox 14"/>
+          <p:cNvSpPr txBox="1"/>
+          <p:nvPr/>
+        </p:nvSpPr>
+        <p:spPr>
+          <a:xfrm>
+            <a:off x="6327648" y="3666744"/>
+            <a:ext cx="5022799" cy="365760"/>
+          </a:xfrm>
+          <a:prstGeom prst="rect">
+            <a:avLst/>
+          </a:prstGeom>
+          <a:noFill/>
+        </p:spPr>
+        <p:txBody>
+          <a:bodyPr wrap="square" lIns="0" tIns="0" rIns="0" bIns="0" anchor="t" rtlCol="0"/>
+          <a:lstStyle/>
+          <a:p>
+            <a:pPr algn="l">
+              <a:lnSpc>
+                <a:spcPct val="140000"/>
+              </a:lnSpc>
+            </a:pPr>
+            <a:r>
+              <a:rPr lang="ja-JP" altLang="en-US" sz="1300" b="0">
+                <a:solidFill>
+                  <a:srgbClr val="6B6B76"/>
+                </a:solidFill>
+                <a:latin typeface="Yu Gothic"/>
+                <a:ea typeface="Yu Gothic"/>
+                <a:cs typeface="Yu Gothic"/>
+              </a:rPr>
+              <a:t>ここは譲れません。朝の支度が重ならないように。</a:t>
+            </a:r>
+          </a:p>
+        </p:txBody>
+      </p:sp>
+      <p:sp>
+        <p:nvSpPr>
+          <p:cNvPr id="15" name="Shape 15"/>
           <p:cNvSpPr/>
           <p:nvPr/>
         </p:nvSpPr>
         <p:spPr>
           <a:xfrm>
-            <a:off x="6304788" y="1773936"/>
-            <a:ext cx="2320290" cy="38100"/>
+            <a:off x="5961888" y="4233672"/>
+            <a:ext cx="146304" cy="146304"/>
           </a:xfrm>
           <a:prstGeom prst="rect">
             <a:avLst/>
@@ -7550,14 +7757,14 @@
       </p:sp>
       <p:sp>
         <p:nvSpPr>
-          <p:cNvPr id="13" name="TextBox 13"/>
-          <p:cNvSpPr txBox="1"/>
-          <p:nvPr/>
-        </p:nvSpPr>
-        <p:spPr>
-          <a:xfrm>
-            <a:off x="6304788" y="2002536"/>
-            <a:ext cx="2320290" cy="320040"/>
+          <p:cNvPr id="16" name="TextBox 16"/>
+          <p:cNvSpPr txBox="1"/>
+          <p:nvPr/>
+        </p:nvSpPr>
+        <p:spPr>
+          <a:xfrm>
+            <a:off x="6327648" y="4105656"/>
+            <a:ext cx="5022799" cy="384048"/>
           </a:xfrm>
           <a:prstGeom prst="rect">
             <a:avLst/>
@@ -7574,140 +7781,17 @@
               </a:lnSpc>
             </a:pPr>
             <a:r>
-              <a:rPr lang="ja-JP" altLang="en-US" sz="1200" b="1" spc="120">
-                <a:solidFill>
-                  <a:srgbClr val="FF5C77"/>
-                </a:solidFill>
-                <a:latin typeface="Yu Gothic"/>
-                <a:ea typeface="Yu Gothic"/>
-                <a:cs typeface="Yu Gothic"/>
-              </a:rPr>
-              <a:t>削らないもの</a:t>
-            </a:r>
-          </a:p>
-        </p:txBody>
-      </p:sp>
-      <p:sp>
-        <p:nvSpPr>
-          <p:cNvPr id="14" name="TextBox 14"/>
-          <p:cNvSpPr txBox="1"/>
-          <p:nvPr/>
-        </p:nvSpPr>
-        <p:spPr>
-          <a:xfrm>
-            <a:off x="6304788" y="2414016"/>
-            <a:ext cx="2320290" cy="1005840"/>
-          </a:xfrm>
-          <a:prstGeom prst="rect">
-            <a:avLst/>
-          </a:prstGeom>
-          <a:noFill/>
-        </p:spPr>
-        <p:txBody>
-          <a:bodyPr wrap="square" lIns="0" tIns="0" rIns="0" bIns="0" anchor="t" rtlCol="0"/>
-          <a:lstStyle/>
-          <a:p>
-            <a:pPr algn="l">
-              <a:lnSpc>
-                <a:spcPct val="125000"/>
-              </a:lnSpc>
-            </a:pPr>
-            <a:r>
-              <a:rPr lang="ja-JP" altLang="en-US" sz="2200" b="1">
-                <a:solidFill>
-                  <a:srgbClr val="14141A"/>
-                </a:solidFill>
-                <a:latin typeface="Yu Gothic"/>
-                <a:ea typeface="Yu Gothic"/>
-                <a:cs typeface="Yu Gothic"/>
-              </a:rPr>
-              <a:t>写真と、</a:t>
-            </a:r>
-          </a:p>
-          <a:p>
-            <a:pPr algn="l">
-              <a:lnSpc>
-                <a:spcPct val="125000"/>
-              </a:lnSpc>
-            </a:pPr>
-            <a:r>
-              <a:rPr lang="ja-JP" altLang="en-US" sz="2200" b="1">
-                <a:solidFill>
-                  <a:srgbClr val="14141A"/>
-                </a:solidFill>
-                <a:latin typeface="Yu Gothic"/>
-                <a:ea typeface="Yu Gothic"/>
-                <a:cs typeface="Yu Gothic"/>
-              </a:rPr>
-              <a:t>新婚旅行</a:t>
-            </a:r>
-          </a:p>
-        </p:txBody>
-      </p:sp>
-      <p:sp>
-        <p:nvSpPr>
-          <p:cNvPr id="15" name="TextBox 15"/>
-          <p:cNvSpPr txBox="1"/>
-          <p:nvPr/>
-        </p:nvSpPr>
-        <p:spPr>
-          <a:xfrm>
-            <a:off x="6304788" y="3511296"/>
-            <a:ext cx="2320290" cy="1444752"/>
-          </a:xfrm>
-          <a:prstGeom prst="rect">
-            <a:avLst/>
-          </a:prstGeom>
-          <a:noFill/>
-        </p:spPr>
-        <p:txBody>
-          <a:bodyPr wrap="square" lIns="0" tIns="0" rIns="0" bIns="0" anchor="t" rtlCol="0"/>
-          <a:lstStyle/>
-          <a:p>
-            <a:pPr algn="l">
-              <a:lnSpc>
-                <a:spcPct val="155000"/>
-              </a:lnSpc>
-            </a:pPr>
-            <a:r>
-              <a:rPr lang="ja-JP" altLang="en-US" sz="1400" b="0">
-                <a:solidFill>
-                  <a:srgbClr val="14141A"/>
-                </a:solidFill>
-                <a:latin typeface="Yu Gothic"/>
-                <a:ea typeface="Yu Gothic"/>
-                <a:cs typeface="Yu Gothic"/>
-              </a:rPr>
-              <a:t>収入が増える分から、月に決めた額を積み立てます。出産の費用もここから出します。</a:t>
-            </a:r>
-          </a:p>
-        </p:txBody>
-      </p:sp>
-      <p:sp>
-        <p:nvSpPr>
-          <p:cNvPr id="16" name="Shape 16"/>
-          <p:cNvSpPr/>
-          <p:nvPr/>
-        </p:nvSpPr>
-        <p:spPr>
-          <a:xfrm>
-            <a:off x="9036558" y="1773936"/>
-            <a:ext cx="2320290" cy="38100"/>
-          </a:xfrm>
-          <a:prstGeom prst="rect">
-            <a:avLst/>
-          </a:prstGeom>
-          <a:solidFill>
-            <a:srgbClr val="6C5CE7"/>
-          </a:solidFill>
-          <a:ln>
-            <a:noFill/>
-          </a:ln>
-        </p:spPr>
-        <p:txBody>
-          <a:bodyPr wrap="square" lIns="0" tIns="0" rIns="0" bIns="0" anchor="ctr" rtlCol="0"/>
-          <a:lstStyle/>
-          <a:p/>
+              <a:rPr lang="ja-JP" altLang="en-US" sz="1800" b="1">
+                <a:solidFill>
+                  <a:srgbClr val="14141A"/>
+                </a:solidFill>
+                <a:latin typeface="Yu Gothic"/>
+                <a:ea typeface="Yu Gothic"/>
+                <a:cs typeface="Yu Gothic"/>
+              </a:rPr>
+              <a:t>広さは、こだわりません</a:t>
+            </a:r>
+          </a:p>
         </p:txBody>
       </p:sp>
       <p:sp>
@@ -7718,8 +7802,47 @@
         </p:nvSpPr>
         <p:spPr>
           <a:xfrm>
-            <a:off x="9036558" y="2002536"/>
-            <a:ext cx="2320290" cy="320040"/>
+            <a:off x="6327648" y="4507992"/>
+            <a:ext cx="5022799" cy="365760"/>
+          </a:xfrm>
+          <a:prstGeom prst="rect">
+            <a:avLst/>
+          </a:prstGeom>
+          <a:noFill/>
+        </p:spPr>
+        <p:txBody>
+          <a:bodyPr wrap="square" lIns="0" tIns="0" rIns="0" bIns="0" anchor="t" rtlCol="0"/>
+          <a:lstStyle/>
+          <a:p>
+            <a:pPr algn="l">
+              <a:lnSpc>
+                <a:spcPct val="140000"/>
+              </a:lnSpc>
+            </a:pPr>
+            <a:r>
+              <a:rPr lang="ja-JP" altLang="en-US" sz="1300" b="0">
+                <a:solidFill>
+                  <a:srgbClr val="6B6B76"/>
+                </a:solidFill>
+                <a:latin typeface="Yu Gothic"/>
+                <a:ea typeface="Yu Gothic"/>
+                <a:cs typeface="Yu Gothic"/>
+              </a:rPr>
+              <a:t>間取りより、場所と設備を優先します。</a:t>
+            </a:r>
+          </a:p>
+        </p:txBody>
+      </p:sp>
+      <p:sp>
+        <p:nvSpPr>
+          <p:cNvPr id="18" name="TextBox 18"/>
+          <p:cNvSpPr txBox="1"/>
+          <p:nvPr/>
+        </p:nvSpPr>
+        <p:spPr>
+          <a:xfrm>
+            <a:off x="841248" y="5824728"/>
+            <a:ext cx="10515600" cy="365760"/>
           </a:xfrm>
           <a:prstGeom prst="rect">
             <a:avLst/>
@@ -7736,72 +7859,15 @@
               </a:lnSpc>
             </a:pPr>
             <a:r>
-              <a:rPr lang="ja-JP" altLang="en-US" sz="1200" b="1" spc="120">
-                <a:solidFill>
-                  <a:srgbClr val="6C5CE7"/>
-                </a:solidFill>
-                <a:latin typeface="Yu Gothic"/>
-                <a:ea typeface="Yu Gothic"/>
-                <a:cs typeface="Yu Gothic"/>
-              </a:rPr>
-              <a:t>後回し</a:t>
-            </a:r>
-          </a:p>
-        </p:txBody>
-      </p:sp>
-      <p:sp>
-        <p:nvSpPr>
-          <p:cNvPr id="18" name="TextBox 18"/>
-          <p:cNvSpPr txBox="1"/>
-          <p:nvPr/>
-        </p:nvSpPr>
-        <p:spPr>
-          <a:xfrm>
-            <a:off x="9036558" y="2414016"/>
-            <a:ext cx="2320290" cy="1005840"/>
-          </a:xfrm>
-          <a:prstGeom prst="rect">
-            <a:avLst/>
-          </a:prstGeom>
-          <a:noFill/>
-        </p:spPr>
-        <p:txBody>
-          <a:bodyPr wrap="square" lIns="0" tIns="0" rIns="0" bIns="0" anchor="t" rtlCol="0"/>
-          <a:lstStyle/>
-          <a:p>
-            <a:pPr algn="l">
-              <a:lnSpc>
-                <a:spcPct val="125000"/>
-              </a:lnSpc>
-            </a:pPr>
-            <a:r>
-              <a:rPr lang="ja-JP" altLang="en-US" sz="2200" b="1">
-                <a:solidFill>
-                  <a:srgbClr val="14141A"/>
-                </a:solidFill>
-                <a:latin typeface="Yu Gothic"/>
-                <a:ea typeface="Yu Gothic"/>
-                <a:cs typeface="Yu Gothic"/>
-              </a:rPr>
-              <a:t>式と、</a:t>
-            </a:r>
-          </a:p>
-          <a:p>
-            <a:pPr algn="l">
-              <a:lnSpc>
-                <a:spcPct val="125000"/>
-              </a:lnSpc>
-            </a:pPr>
-            <a:r>
-              <a:rPr lang="ja-JP" altLang="en-US" sz="2200" b="1">
-                <a:solidFill>
-                  <a:srgbClr val="14141A"/>
-                </a:solidFill>
-                <a:latin typeface="Yu Gothic"/>
-                <a:ea typeface="Yu Gothic"/>
-                <a:cs typeface="Yu Gothic"/>
-              </a:rPr>
-              <a:t>指輪</a:t>
+              <a:rPr lang="ja-JP" altLang="en-US" sz="1150" b="0">
+                <a:solidFill>
+                  <a:srgbClr val="6B6B76"/>
+                </a:solidFill>
+                <a:latin typeface="Yu Gothic"/>
+                <a:ea typeface="Yu Gothic"/>
+                <a:cs typeface="Yu Gothic"/>
+              </a:rPr>
+              <a:t>※そのほかの希望は、物件を見ながら足していきます。</a:t>
             </a:r>
           </a:p>
         </p:txBody>
@@ -7809,84 +7875,6 @@
       <p:sp>
         <p:nvSpPr>
           <p:cNvPr id="19" name="TextBox 19"/>
-          <p:cNvSpPr txBox="1"/>
-          <p:nvPr/>
-        </p:nvSpPr>
-        <p:spPr>
-          <a:xfrm>
-            <a:off x="9036558" y="3511296"/>
-            <a:ext cx="2320290" cy="1444752"/>
-          </a:xfrm>
-          <a:prstGeom prst="rect">
-            <a:avLst/>
-          </a:prstGeom>
-          <a:noFill/>
-        </p:spPr>
-        <p:txBody>
-          <a:bodyPr wrap="square" lIns="0" tIns="0" rIns="0" bIns="0" anchor="t" rtlCol="0"/>
-          <a:lstStyle/>
-          <a:p>
-            <a:pPr algn="l">
-              <a:lnSpc>
-                <a:spcPct val="155000"/>
-              </a:lnSpc>
-            </a:pPr>
-            <a:r>
-              <a:rPr lang="ja-JP" altLang="en-US" sz="1400" b="0">
-                <a:solidFill>
-                  <a:srgbClr val="14141A"/>
-                </a:solidFill>
-                <a:latin typeface="Yu Gothic"/>
-                <a:ea typeface="Yu Gothic"/>
-                <a:cs typeface="Yu Gothic"/>
-              </a:rPr>
-              <a:t>時期も規模も、まだ決めません。決めたくなったら、そのとき決めます。</a:t>
-            </a:r>
-          </a:p>
-        </p:txBody>
-      </p:sp>
-      <p:sp>
-        <p:nvSpPr>
-          <p:cNvPr id="20" name="TextBox 20"/>
-          <p:cNvSpPr txBox="1"/>
-          <p:nvPr/>
-        </p:nvSpPr>
-        <p:spPr>
-          <a:xfrm>
-            <a:off x="841248" y="5138928"/>
-            <a:ext cx="10515600" cy="914400"/>
-          </a:xfrm>
-          <a:prstGeom prst="rect">
-            <a:avLst/>
-          </a:prstGeom>
-          <a:noFill/>
-        </p:spPr>
-        <p:txBody>
-          <a:bodyPr wrap="square" lIns="0" tIns="0" rIns="0" bIns="0" anchor="b" rtlCol="0"/>
-          <a:lstStyle/>
-          <a:p>
-            <a:pPr algn="l">
-              <a:lnSpc>
-                <a:spcPct val="125000"/>
-              </a:lnSpc>
-            </a:pPr>
-            <a:r>
-              <a:rPr lang="ja-JP" altLang="en-US" sz="2800" b="1">
-                <a:solidFill>
-                  <a:srgbClr val="14141A"/>
-                </a:solidFill>
-                <a:latin typeface="Yu Gothic"/>
-                <a:ea typeface="Yu Gothic"/>
-                <a:cs typeface="Yu Gothic"/>
-              </a:rPr>
-              <a:t>お金の話は、このページで全部です。</a:t>
-            </a:r>
-          </a:p>
-        </p:txBody>
-      </p:sp>
-      <p:sp>
-        <p:nvSpPr>
-          <p:cNvPr id="21" name="TextBox 21"/>
           <p:cNvSpPr txBox="1"/>
           <p:nvPr/>
         </p:nvSpPr>
@@ -7925,7 +7913,7 @@
       </p:sp>
       <p:sp>
         <p:nvSpPr>
-          <p:cNvPr id="22" name="TextBox 22"/>
+          <p:cNvPr id="20" name="TextBox 20"/>
           <p:cNvSpPr txBox="1"/>
           <p:nvPr/>
         </p:nvSpPr>
@@ -8582,7 +8570,7 @@
                 <a:ea typeface="Yu Gothic"/>
                 <a:cs typeface="Yu Gothic"/>
               </a:rPr>
-              <a:t>私のお金のこと</a:t>
+              <a:t>生活費</a:t>
             </a:r>
           </a:p>
         </p:txBody>
@@ -8621,21 +8609,48 @@
                 <a:ea typeface="Yu Gothic Medium"/>
                 <a:cs typeface="Yu Gothic Medium"/>
               </a:rPr>
-              <a:t>私の側の事情を、先にお伝えします。</a:t>
-            </a:r>
-          </a:p>
-        </p:txBody>
-      </p:sp>
-      <p:sp>
-        <p:nvSpPr>
-          <p:cNvPr id="4" name="TextBox 4"/>
-          <p:cNvSpPr txBox="1"/>
-          <p:nvPr/>
-        </p:nvSpPr>
-        <p:spPr>
-          <a:xfrm>
-            <a:off x="841248" y="1984248"/>
-            <a:ext cx="640080" cy="365760"/>
+              <a:t>二人の財布はひとつにして、見える化します。削らないものだけ、先に決めます。</a:t>
+            </a:r>
+          </a:p>
+        </p:txBody>
+      </p:sp>
+      <p:sp>
+        <p:nvSpPr>
+          <p:cNvPr id="4" name="Shape 4"/>
+          <p:cNvSpPr/>
+          <p:nvPr/>
+        </p:nvSpPr>
+        <p:spPr>
+          <a:xfrm>
+            <a:off x="841248" y="1773936"/>
+            <a:ext cx="2320290" cy="38100"/>
+          </a:xfrm>
+          <a:prstGeom prst="rect">
+            <a:avLst/>
+          </a:prstGeom>
+          <a:solidFill>
+            <a:srgbClr val="00C4B3"/>
+          </a:solidFill>
+          <a:ln>
+            <a:noFill/>
+          </a:ln>
+        </p:spPr>
+        <p:txBody>
+          <a:bodyPr wrap="square" lIns="0" tIns="0" rIns="0" bIns="0" anchor="ctr" rtlCol="0"/>
+          <a:lstStyle/>
+          <a:p/>
+        </p:txBody>
+      </p:sp>
+      <p:sp>
+        <p:nvSpPr>
+          <p:cNvPr id="5" name="TextBox 5"/>
+          <p:cNvSpPr txBox="1"/>
+          <p:nvPr/>
+        </p:nvSpPr>
+        <p:spPr>
+          <a:xfrm>
+            <a:off x="841248" y="2002536"/>
+            <a:ext cx="2320290" cy="320040"/>
           </a:xfrm>
           <a:prstGeom prst="rect">
             <a:avLst/>
@@ -8652,7 +8667,7 @@
               </a:lnSpc>
             </a:pPr>
             <a:r>
-              <a:rPr lang="ja-JP" altLang="en-US" sz="1500" b="1" spc="100">
+              <a:rPr lang="ja-JP" altLang="en-US" sz="1200" b="1" spc="120">
                 <a:solidFill>
                   <a:srgbClr val="00C4B3"/>
                 </a:solidFill>
@@ -8660,21 +8675,144 @@
                 <a:ea typeface="Yu Gothic"/>
                 <a:cs typeface="Yu Gothic"/>
               </a:rPr>
-              <a:t>01</a:t>
-            </a:r>
-          </a:p>
-        </p:txBody>
-      </p:sp>
-      <p:sp>
-        <p:nvSpPr>
-          <p:cNvPr id="5" name="TextBox 5"/>
-          <p:cNvSpPr txBox="1"/>
-          <p:nvPr/>
-        </p:nvSpPr>
-        <p:spPr>
-          <a:xfrm>
-            <a:off x="1527048" y="1892808"/>
-            <a:ext cx="9784080" cy="914400"/>
+              <a:t>家賃</a:t>
+            </a:r>
+          </a:p>
+        </p:txBody>
+      </p:sp>
+      <p:sp>
+        <p:nvSpPr>
+          <p:cNvPr id="6" name="TextBox 6"/>
+          <p:cNvSpPr txBox="1"/>
+          <p:nvPr/>
+        </p:nvSpPr>
+        <p:spPr>
+          <a:xfrm>
+            <a:off x="841248" y="2414016"/>
+            <a:ext cx="2320290" cy="1005840"/>
+          </a:xfrm>
+          <a:prstGeom prst="rect">
+            <a:avLst/>
+          </a:prstGeom>
+          <a:noFill/>
+        </p:spPr>
+        <p:txBody>
+          <a:bodyPr wrap="square" lIns="0" tIns="0" rIns="0" bIns="0" anchor="t" rtlCol="0"/>
+          <a:lstStyle/>
+          <a:p>
+            <a:pPr algn="l">
+              <a:lnSpc>
+                <a:spcPct val="125000"/>
+              </a:lnSpc>
+            </a:pPr>
+            <a:r>
+              <a:rPr lang="ja-JP" altLang="en-US" sz="2200" b="1">
+                <a:solidFill>
+                  <a:srgbClr val="14141A"/>
+                </a:solidFill>
+                <a:latin typeface="Yu Gothic"/>
+                <a:ea typeface="Yu Gothic"/>
+                <a:cs typeface="Yu Gothic"/>
+              </a:rPr>
+              <a:t>月15〜20万を</a:t>
+            </a:r>
+          </a:p>
+          <a:p>
+            <a:pPr algn="l">
+              <a:lnSpc>
+                <a:spcPct val="125000"/>
+              </a:lnSpc>
+            </a:pPr>
+            <a:r>
+              <a:rPr lang="ja-JP" altLang="en-US" sz="2200" b="1">
+                <a:solidFill>
+                  <a:srgbClr val="14141A"/>
+                </a:solidFill>
+                <a:latin typeface="Yu Gothic"/>
+                <a:ea typeface="Yu Gothic"/>
+                <a:cs typeface="Yu Gothic"/>
+              </a:rPr>
+              <a:t>ふたりで</a:t>
+            </a:r>
+          </a:p>
+        </p:txBody>
+      </p:sp>
+      <p:sp>
+        <p:nvSpPr>
+          <p:cNvPr id="7" name="TextBox 7"/>
+          <p:cNvSpPr txBox="1"/>
+          <p:nvPr/>
+        </p:nvSpPr>
+        <p:spPr>
+          <a:xfrm>
+            <a:off x="841248" y="3511296"/>
+            <a:ext cx="2320290" cy="1444752"/>
+          </a:xfrm>
+          <a:prstGeom prst="rect">
+            <a:avLst/>
+          </a:prstGeom>
+          <a:noFill/>
+        </p:spPr>
+        <p:txBody>
+          <a:bodyPr wrap="square" lIns="0" tIns="0" rIns="0" bIns="0" anchor="t" rtlCol="0"/>
+          <a:lstStyle/>
+          <a:p>
+            <a:pPr algn="l">
+              <a:lnSpc>
+                <a:spcPct val="155000"/>
+              </a:lnSpc>
+            </a:pPr>
+            <a:r>
+              <a:rPr lang="ja-JP" altLang="en-US" sz="1400" b="0">
+                <a:solidFill>
+                  <a:srgbClr val="14141A"/>
+                </a:solidFill>
+                <a:latin typeface="Yu Gothic"/>
+                <a:ea typeface="Yu Gothic"/>
+                <a:cs typeface="Yu Gothic"/>
+              </a:rPr>
+              <a:t>負担の割合は固定しません。名義は私で、共同口座から引き落とします。</a:t>
+            </a:r>
+          </a:p>
+        </p:txBody>
+      </p:sp>
+      <p:sp>
+        <p:nvSpPr>
+          <p:cNvPr id="8" name="Shape 8"/>
+          <p:cNvSpPr/>
+          <p:nvPr/>
+        </p:nvSpPr>
+        <p:spPr>
+          <a:xfrm>
+            <a:off x="3573018" y="1773936"/>
+            <a:ext cx="2320290" cy="38100"/>
+          </a:xfrm>
+          <a:prstGeom prst="rect">
+            <a:avLst/>
+          </a:prstGeom>
+          <a:solidFill>
+            <a:srgbClr val="FFD93D"/>
+          </a:solidFill>
+          <a:ln>
+            <a:noFill/>
+          </a:ln>
+        </p:spPr>
+        <p:txBody>
+          <a:bodyPr wrap="square" lIns="0" tIns="0" rIns="0" bIns="0" anchor="ctr" rtlCol="0"/>
+          <a:lstStyle/>
+          <a:p/>
+        </p:txBody>
+      </p:sp>
+      <p:sp>
+        <p:nvSpPr>
+          <p:cNvPr id="9" name="TextBox 9"/>
+          <p:cNvSpPr txBox="1"/>
+          <p:nvPr/>
+        </p:nvSpPr>
+        <p:spPr>
+          <a:xfrm>
+            <a:off x="3573018" y="2002536"/>
+            <a:ext cx="2320290" cy="320040"/>
           </a:xfrm>
           <a:prstGeom prst="rect">
             <a:avLst/>
@@ -8691,51 +8829,152 @@
               </a:lnSpc>
             </a:pPr>
             <a:r>
-              <a:rPr lang="ja-JP" altLang="en-US" sz="1950" b="0">
-                <a:solidFill>
-                  <a:srgbClr val="14141A"/>
-                </a:solidFill>
-                <a:latin typeface="Yu Gothic"/>
-                <a:ea typeface="Yu Gothic"/>
-                <a:cs typeface="Yu Gothic"/>
-              </a:rPr>
-              <a:t>転職で、年収は</a:t>
-            </a:r>
-            <a:r>
-              <a:rPr lang="ja-JP" altLang="en-US" sz="1950" b="1">
-                <a:solidFill>
-                  <a:srgbClr val="14141A"/>
-                </a:solidFill>
-                <a:latin typeface="Yu Gothic"/>
-                <a:ea typeface="Yu Gothic"/>
-                <a:cs typeface="Yu Gothic"/>
-              </a:rPr>
-              <a:t>100万円くらい上がる</a:t>
-            </a:r>
-            <a:r>
-              <a:rPr lang="ja-JP" altLang="en-US" sz="1950" b="0">
-                <a:solidFill>
-                  <a:srgbClr val="14141A"/>
-                </a:solidFill>
-                <a:latin typeface="Yu Gothic"/>
-                <a:ea typeface="Yu Gothic"/>
-                <a:cs typeface="Yu Gothic"/>
-              </a:rPr>
-              <a:t>予定です。増えた分を、この計画の原資にします。</a:t>
-            </a:r>
-          </a:p>
-        </p:txBody>
-      </p:sp>
-      <p:sp>
-        <p:nvSpPr>
-          <p:cNvPr id="6" name="TextBox 6"/>
-          <p:cNvSpPr txBox="1"/>
-          <p:nvPr/>
-        </p:nvSpPr>
-        <p:spPr>
-          <a:xfrm>
-            <a:off x="841248" y="3044952"/>
-            <a:ext cx="640080" cy="365760"/>
+              <a:rPr lang="ja-JP" altLang="en-US" sz="1200" b="1" spc="120">
+                <a:solidFill>
+                  <a:srgbClr val="14141A"/>
+                </a:solidFill>
+                <a:latin typeface="Yu Gothic"/>
+                <a:ea typeface="Yu Gothic"/>
+                <a:cs typeface="Yu Gothic"/>
+              </a:rPr>
+              <a:t>共同口座</a:t>
+            </a:r>
+          </a:p>
+        </p:txBody>
+      </p:sp>
+      <p:sp>
+        <p:nvSpPr>
+          <p:cNvPr id="10" name="TextBox 10"/>
+          <p:cNvSpPr txBox="1"/>
+          <p:nvPr/>
+        </p:nvSpPr>
+        <p:spPr>
+          <a:xfrm>
+            <a:off x="3573018" y="2414016"/>
+            <a:ext cx="2320290" cy="1005840"/>
+          </a:xfrm>
+          <a:prstGeom prst="rect">
+            <a:avLst/>
+          </a:prstGeom>
+          <a:noFill/>
+        </p:spPr>
+        <p:txBody>
+          <a:bodyPr wrap="square" lIns="0" tIns="0" rIns="0" bIns="0" anchor="t" rtlCol="0"/>
+          <a:lstStyle/>
+          <a:p>
+            <a:pPr algn="l">
+              <a:lnSpc>
+                <a:spcPct val="125000"/>
+              </a:lnSpc>
+            </a:pPr>
+            <a:r>
+              <a:rPr lang="ja-JP" altLang="en-US" sz="2200" b="1">
+                <a:solidFill>
+                  <a:srgbClr val="14141A"/>
+                </a:solidFill>
+                <a:latin typeface="Yu Gothic"/>
+                <a:ea typeface="Yu Gothic"/>
+                <a:cs typeface="Yu Gothic"/>
+              </a:rPr>
+              <a:t>お金はぜんぶ</a:t>
+            </a:r>
+          </a:p>
+          <a:p>
+            <a:pPr algn="l">
+              <a:lnSpc>
+                <a:spcPct val="125000"/>
+              </a:lnSpc>
+            </a:pPr>
+            <a:r>
+              <a:rPr lang="ja-JP" altLang="en-US" sz="2200" b="1">
+                <a:solidFill>
+                  <a:srgbClr val="14141A"/>
+                </a:solidFill>
+                <a:latin typeface="Yu Gothic"/>
+                <a:ea typeface="Yu Gothic"/>
+                <a:cs typeface="Yu Gothic"/>
+              </a:rPr>
+              <a:t>ここからです</a:t>
+            </a:r>
+          </a:p>
+        </p:txBody>
+      </p:sp>
+      <p:sp>
+        <p:nvSpPr>
+          <p:cNvPr id="11" name="TextBox 11"/>
+          <p:cNvSpPr txBox="1"/>
+          <p:nvPr/>
+        </p:nvSpPr>
+        <p:spPr>
+          <a:xfrm>
+            <a:off x="3573018" y="3511296"/>
+            <a:ext cx="2320290" cy="1444752"/>
+          </a:xfrm>
+          <a:prstGeom prst="rect">
+            <a:avLst/>
+          </a:prstGeom>
+          <a:noFill/>
+        </p:spPr>
+        <p:txBody>
+          <a:bodyPr wrap="square" lIns="0" tIns="0" rIns="0" bIns="0" anchor="t" rtlCol="0"/>
+          <a:lstStyle/>
+          <a:p>
+            <a:pPr algn="l">
+              <a:lnSpc>
+                <a:spcPct val="155000"/>
+              </a:lnSpc>
+            </a:pPr>
+            <a:r>
+              <a:rPr lang="ja-JP" altLang="en-US" sz="1400" b="0">
+                <a:solidFill>
+                  <a:srgbClr val="14141A"/>
+                </a:solidFill>
+                <a:latin typeface="Yu Gothic"/>
+                <a:ea typeface="Yu Gothic"/>
+                <a:cs typeface="Yu Gothic"/>
+              </a:rPr>
+              <a:t>私名義で、入居と同時に開設します。年に1回だけ棚卸しをします。お小遣いには干渉しません。</a:t>
+            </a:r>
+          </a:p>
+        </p:txBody>
+      </p:sp>
+      <p:sp>
+        <p:nvSpPr>
+          <p:cNvPr id="12" name="Shape 12"/>
+          <p:cNvSpPr/>
+          <p:nvPr/>
+        </p:nvSpPr>
+        <p:spPr>
+          <a:xfrm>
+            <a:off x="6304788" y="1773936"/>
+            <a:ext cx="2320290" cy="38100"/>
+          </a:xfrm>
+          <a:prstGeom prst="rect">
+            <a:avLst/>
+          </a:prstGeom>
+          <a:solidFill>
+            <a:srgbClr val="FF5C77"/>
+          </a:solidFill>
+          <a:ln>
+            <a:noFill/>
+          </a:ln>
+        </p:spPr>
+        <p:txBody>
+          <a:bodyPr wrap="square" lIns="0" tIns="0" rIns="0" bIns="0" anchor="ctr" rtlCol="0"/>
+          <a:lstStyle/>
+          <a:p/>
+        </p:txBody>
+      </p:sp>
+      <p:sp>
+        <p:nvSpPr>
+          <p:cNvPr id="13" name="TextBox 13"/>
+          <p:cNvSpPr txBox="1"/>
+          <p:nvPr/>
+        </p:nvSpPr>
+        <p:spPr>
+          <a:xfrm>
+            <a:off x="6304788" y="2002536"/>
+            <a:ext cx="2320290" cy="320040"/>
           </a:xfrm>
           <a:prstGeom prst="rect">
             <a:avLst/>
@@ -8752,29 +8991,152 @@
               </a:lnSpc>
             </a:pPr>
             <a:r>
-              <a:rPr lang="ja-JP" altLang="en-US" sz="1500" b="1" spc="100">
-                <a:solidFill>
-                  <a:srgbClr val="00C4B3"/>
-                </a:solidFill>
-                <a:latin typeface="Yu Gothic"/>
-                <a:ea typeface="Yu Gothic"/>
-                <a:cs typeface="Yu Gothic"/>
-              </a:rPr>
-              <a:t>02</a:t>
-            </a:r>
-          </a:p>
-        </p:txBody>
-      </p:sp>
-      <p:sp>
-        <p:nvSpPr>
-          <p:cNvPr id="7" name="TextBox 7"/>
-          <p:cNvSpPr txBox="1"/>
-          <p:nvPr/>
-        </p:nvSpPr>
-        <p:spPr>
-          <a:xfrm>
-            <a:off x="1527048" y="2953512"/>
-            <a:ext cx="9784080" cy="914400"/>
+              <a:rPr lang="ja-JP" altLang="en-US" sz="1200" b="1" spc="120">
+                <a:solidFill>
+                  <a:srgbClr val="FF5C77"/>
+                </a:solidFill>
+                <a:latin typeface="Yu Gothic"/>
+                <a:ea typeface="Yu Gothic"/>
+                <a:cs typeface="Yu Gothic"/>
+              </a:rPr>
+              <a:t>削らないもの</a:t>
+            </a:r>
+          </a:p>
+        </p:txBody>
+      </p:sp>
+      <p:sp>
+        <p:nvSpPr>
+          <p:cNvPr id="14" name="TextBox 14"/>
+          <p:cNvSpPr txBox="1"/>
+          <p:nvPr/>
+        </p:nvSpPr>
+        <p:spPr>
+          <a:xfrm>
+            <a:off x="6304788" y="2414016"/>
+            <a:ext cx="2320290" cy="1005840"/>
+          </a:xfrm>
+          <a:prstGeom prst="rect">
+            <a:avLst/>
+          </a:prstGeom>
+          <a:noFill/>
+        </p:spPr>
+        <p:txBody>
+          <a:bodyPr wrap="square" lIns="0" tIns="0" rIns="0" bIns="0" anchor="t" rtlCol="0"/>
+          <a:lstStyle/>
+          <a:p>
+            <a:pPr algn="l">
+              <a:lnSpc>
+                <a:spcPct val="125000"/>
+              </a:lnSpc>
+            </a:pPr>
+            <a:r>
+              <a:rPr lang="ja-JP" altLang="en-US" sz="2200" b="1">
+                <a:solidFill>
+                  <a:srgbClr val="14141A"/>
+                </a:solidFill>
+                <a:latin typeface="Yu Gothic"/>
+                <a:ea typeface="Yu Gothic"/>
+                <a:cs typeface="Yu Gothic"/>
+              </a:rPr>
+              <a:t>写真と、</a:t>
+            </a:r>
+          </a:p>
+          <a:p>
+            <a:pPr algn="l">
+              <a:lnSpc>
+                <a:spcPct val="125000"/>
+              </a:lnSpc>
+            </a:pPr>
+            <a:r>
+              <a:rPr lang="ja-JP" altLang="en-US" sz="2200" b="1">
+                <a:solidFill>
+                  <a:srgbClr val="14141A"/>
+                </a:solidFill>
+                <a:latin typeface="Yu Gothic"/>
+                <a:ea typeface="Yu Gothic"/>
+                <a:cs typeface="Yu Gothic"/>
+              </a:rPr>
+              <a:t>新婚旅行</a:t>
+            </a:r>
+          </a:p>
+        </p:txBody>
+      </p:sp>
+      <p:sp>
+        <p:nvSpPr>
+          <p:cNvPr id="15" name="TextBox 15"/>
+          <p:cNvSpPr txBox="1"/>
+          <p:nvPr/>
+        </p:nvSpPr>
+        <p:spPr>
+          <a:xfrm>
+            <a:off x="6304788" y="3511296"/>
+            <a:ext cx="2320290" cy="1444752"/>
+          </a:xfrm>
+          <a:prstGeom prst="rect">
+            <a:avLst/>
+          </a:prstGeom>
+          <a:noFill/>
+        </p:spPr>
+        <p:txBody>
+          <a:bodyPr wrap="square" lIns="0" tIns="0" rIns="0" bIns="0" anchor="t" rtlCol="0"/>
+          <a:lstStyle/>
+          <a:p>
+            <a:pPr algn="l">
+              <a:lnSpc>
+                <a:spcPct val="155000"/>
+              </a:lnSpc>
+            </a:pPr>
+            <a:r>
+              <a:rPr lang="ja-JP" altLang="en-US" sz="1400" b="0">
+                <a:solidFill>
+                  <a:srgbClr val="14141A"/>
+                </a:solidFill>
+                <a:latin typeface="Yu Gothic"/>
+                <a:ea typeface="Yu Gothic"/>
+                <a:cs typeface="Yu Gothic"/>
+              </a:rPr>
+              <a:t>収入が増える分から、月に決めた額を積み立てます。出産の費用もここから出します。</a:t>
+            </a:r>
+          </a:p>
+        </p:txBody>
+      </p:sp>
+      <p:sp>
+        <p:nvSpPr>
+          <p:cNvPr id="16" name="Shape 16"/>
+          <p:cNvSpPr/>
+          <p:nvPr/>
+        </p:nvSpPr>
+        <p:spPr>
+          <a:xfrm>
+            <a:off x="9036558" y="1773936"/>
+            <a:ext cx="2320290" cy="38100"/>
+          </a:xfrm>
+          <a:prstGeom prst="rect">
+            <a:avLst/>
+          </a:prstGeom>
+          <a:solidFill>
+            <a:srgbClr val="6C5CE7"/>
+          </a:solidFill>
+          <a:ln>
+            <a:noFill/>
+          </a:ln>
+        </p:spPr>
+        <p:txBody>
+          <a:bodyPr wrap="square" lIns="0" tIns="0" rIns="0" bIns="0" anchor="ctr" rtlCol="0"/>
+          <a:lstStyle/>
+          <a:p/>
+        </p:txBody>
+      </p:sp>
+      <p:sp>
+        <p:nvSpPr>
+          <p:cNvPr id="17" name="TextBox 17"/>
+          <p:cNvSpPr txBox="1"/>
+          <p:nvPr/>
+        </p:nvSpPr>
+        <p:spPr>
+          <a:xfrm>
+            <a:off x="9036558" y="2002536"/>
+            <a:ext cx="2320290" cy="320040"/>
           </a:xfrm>
           <a:prstGeom prst="rect">
             <a:avLst/>
@@ -8791,144 +9153,118 @@
               </a:lnSpc>
             </a:pPr>
             <a:r>
-              <a:rPr lang="ja-JP" altLang="en-US" sz="1860" b="0">
-                <a:solidFill>
-                  <a:srgbClr val="14141A"/>
-                </a:solidFill>
-                <a:latin typeface="Yu Gothic"/>
-                <a:ea typeface="Yu Gothic"/>
-                <a:cs typeface="Yu Gothic"/>
-              </a:rPr>
-              <a:t>貯金の代わりに、</a:t>
-            </a:r>
-            <a:r>
-              <a:rPr lang="ja-JP" altLang="en-US" sz="1860" b="1">
-                <a:solidFill>
-                  <a:srgbClr val="14141A"/>
-                </a:solidFill>
-                <a:latin typeface="Yu Gothic"/>
-                <a:ea typeface="Yu Gothic"/>
-                <a:cs typeface="Yu Gothic"/>
-              </a:rPr>
-              <a:t>NISAでコツコツ</a:t>
-            </a:r>
-            <a:r>
-              <a:rPr lang="ja-JP" altLang="en-US" sz="1860" b="0">
-                <a:solidFill>
-                  <a:srgbClr val="14141A"/>
-                </a:solidFill>
-                <a:latin typeface="Yu Gothic"/>
-                <a:ea typeface="Yu Gothic"/>
-                <a:cs typeface="Yu Gothic"/>
-              </a:rPr>
-              <a:t>積み立てています（225万円分）。これは崩しません。</a:t>
-            </a:r>
-          </a:p>
-        </p:txBody>
-      </p:sp>
-      <p:sp>
-        <p:nvSpPr>
-          <p:cNvPr id="8" name="TextBox 8"/>
-          <p:cNvSpPr txBox="1"/>
-          <p:nvPr/>
-        </p:nvSpPr>
-        <p:spPr>
-          <a:xfrm>
-            <a:off x="841248" y="4105656"/>
-            <a:ext cx="640080" cy="365760"/>
-          </a:xfrm>
-          <a:prstGeom prst="rect">
-            <a:avLst/>
-          </a:prstGeom>
-          <a:noFill/>
-        </p:spPr>
-        <p:txBody>
-          <a:bodyPr wrap="square" lIns="0" tIns="0" rIns="0" bIns="0" anchor="t" rtlCol="0"/>
-          <a:lstStyle/>
-          <a:p>
-            <a:pPr algn="l">
-              <a:lnSpc>
-                <a:spcPct val="145000"/>
-              </a:lnSpc>
-            </a:pPr>
-            <a:r>
-              <a:rPr lang="ja-JP" altLang="en-US" sz="1500" b="1" spc="100">
-                <a:solidFill>
-                  <a:srgbClr val="00C4B3"/>
-                </a:solidFill>
-                <a:latin typeface="Yu Gothic"/>
-                <a:ea typeface="Yu Gothic"/>
-                <a:cs typeface="Yu Gothic"/>
-              </a:rPr>
-              <a:t>03</a:t>
-            </a:r>
-          </a:p>
-        </p:txBody>
-      </p:sp>
-      <p:sp>
-        <p:nvSpPr>
-          <p:cNvPr id="9" name="TextBox 9"/>
-          <p:cNvSpPr txBox="1"/>
-          <p:nvPr/>
-        </p:nvSpPr>
-        <p:spPr>
-          <a:xfrm>
-            <a:off x="1527048" y="4014216"/>
-            <a:ext cx="9784080" cy="914400"/>
-          </a:xfrm>
-          <a:prstGeom prst="rect">
-            <a:avLst/>
-          </a:prstGeom>
-          <a:noFill/>
-        </p:spPr>
-        <p:txBody>
-          <a:bodyPr wrap="square" lIns="0" tIns="0" rIns="0" bIns="0" anchor="t" rtlCol="0"/>
-          <a:lstStyle/>
-          <a:p>
-            <a:pPr algn="l">
-              <a:lnSpc>
-                <a:spcPct val="145000"/>
-              </a:lnSpc>
-            </a:pPr>
-            <a:r>
-              <a:rPr lang="ja-JP" altLang="en-US" sz="1820" b="0">
-                <a:solidFill>
-                  <a:srgbClr val="14141A"/>
-                </a:solidFill>
-                <a:latin typeface="Yu Gothic"/>
-                <a:ea typeface="Yu Gothic"/>
-                <a:cs typeface="Yu Gothic"/>
-              </a:rPr>
-              <a:t>2028年6月の</a:t>
-            </a:r>
-            <a:r>
-              <a:rPr lang="ja-JP" altLang="en-US" sz="1820" b="1">
-                <a:solidFill>
-                  <a:srgbClr val="14141A"/>
-                </a:solidFill>
-                <a:latin typeface="Yu Gothic"/>
-                <a:ea typeface="Yu Gothic"/>
-                <a:cs typeface="Yu Gothic"/>
-              </a:rPr>
-              <a:t>カンヌ</a:t>
-            </a:r>
-            <a:r>
-              <a:rPr lang="ja-JP" altLang="en-US" sz="1820" b="0">
-                <a:solidFill>
-                  <a:srgbClr val="14141A"/>
-                </a:solidFill>
-                <a:latin typeface="Yu Gothic"/>
-                <a:ea typeface="Yu Gothic"/>
-                <a:cs typeface="Yu Gothic"/>
-              </a:rPr>
-              <a:t>は仕事です。費用は私側（会社負担を含む）で、家計からは出しません。</a:t>
-            </a:r>
-          </a:p>
-        </p:txBody>
-      </p:sp>
-      <p:sp>
-        <p:nvSpPr>
-          <p:cNvPr id="10" name="TextBox 10"/>
+              <a:rPr lang="ja-JP" altLang="en-US" sz="1200" b="1" spc="120">
+                <a:solidFill>
+                  <a:srgbClr val="6C5CE7"/>
+                </a:solidFill>
+                <a:latin typeface="Yu Gothic"/>
+                <a:ea typeface="Yu Gothic"/>
+                <a:cs typeface="Yu Gothic"/>
+              </a:rPr>
+              <a:t>後回し</a:t>
+            </a:r>
+          </a:p>
+        </p:txBody>
+      </p:sp>
+      <p:sp>
+        <p:nvSpPr>
+          <p:cNvPr id="18" name="TextBox 18"/>
+          <p:cNvSpPr txBox="1"/>
+          <p:nvPr/>
+        </p:nvSpPr>
+        <p:spPr>
+          <a:xfrm>
+            <a:off x="9036558" y="2414016"/>
+            <a:ext cx="2320290" cy="1005840"/>
+          </a:xfrm>
+          <a:prstGeom prst="rect">
+            <a:avLst/>
+          </a:prstGeom>
+          <a:noFill/>
+        </p:spPr>
+        <p:txBody>
+          <a:bodyPr wrap="square" lIns="0" tIns="0" rIns="0" bIns="0" anchor="t" rtlCol="0"/>
+          <a:lstStyle/>
+          <a:p>
+            <a:pPr algn="l">
+              <a:lnSpc>
+                <a:spcPct val="125000"/>
+              </a:lnSpc>
+            </a:pPr>
+            <a:r>
+              <a:rPr lang="ja-JP" altLang="en-US" sz="2200" b="1">
+                <a:solidFill>
+                  <a:srgbClr val="14141A"/>
+                </a:solidFill>
+                <a:latin typeface="Yu Gothic"/>
+                <a:ea typeface="Yu Gothic"/>
+                <a:cs typeface="Yu Gothic"/>
+              </a:rPr>
+              <a:t>式と、</a:t>
+            </a:r>
+          </a:p>
+          <a:p>
+            <a:pPr algn="l">
+              <a:lnSpc>
+                <a:spcPct val="125000"/>
+              </a:lnSpc>
+            </a:pPr>
+            <a:r>
+              <a:rPr lang="ja-JP" altLang="en-US" sz="2200" b="1">
+                <a:solidFill>
+                  <a:srgbClr val="14141A"/>
+                </a:solidFill>
+                <a:latin typeface="Yu Gothic"/>
+                <a:ea typeface="Yu Gothic"/>
+                <a:cs typeface="Yu Gothic"/>
+              </a:rPr>
+              <a:t>指輪</a:t>
+            </a:r>
+          </a:p>
+        </p:txBody>
+      </p:sp>
+      <p:sp>
+        <p:nvSpPr>
+          <p:cNvPr id="19" name="TextBox 19"/>
+          <p:cNvSpPr txBox="1"/>
+          <p:nvPr/>
+        </p:nvSpPr>
+        <p:spPr>
+          <a:xfrm>
+            <a:off x="9036558" y="3511296"/>
+            <a:ext cx="2320290" cy="1444752"/>
+          </a:xfrm>
+          <a:prstGeom prst="rect">
+            <a:avLst/>
+          </a:prstGeom>
+          <a:noFill/>
+        </p:spPr>
+        <p:txBody>
+          <a:bodyPr wrap="square" lIns="0" tIns="0" rIns="0" bIns="0" anchor="t" rtlCol="0"/>
+          <a:lstStyle/>
+          <a:p>
+            <a:pPr algn="l">
+              <a:lnSpc>
+                <a:spcPct val="155000"/>
+              </a:lnSpc>
+            </a:pPr>
+            <a:r>
+              <a:rPr lang="ja-JP" altLang="en-US" sz="1400" b="0">
+                <a:solidFill>
+                  <a:srgbClr val="14141A"/>
+                </a:solidFill>
+                <a:latin typeface="Yu Gothic"/>
+                <a:ea typeface="Yu Gothic"/>
+                <a:cs typeface="Yu Gothic"/>
+              </a:rPr>
+              <a:t>時期も規模も、まだ決めません。決めたくなったら、そのとき決めます。</a:t>
+            </a:r>
+          </a:p>
+        </p:txBody>
+      </p:sp>
+      <p:sp>
+        <p:nvSpPr>
+          <p:cNvPr id="20" name="TextBox 20"/>
           <p:cNvSpPr txBox="1"/>
           <p:nvPr/>
         </p:nvSpPr>
@@ -8960,14 +9296,14 @@
                 <a:ea typeface="Yu Gothic"/>
                 <a:cs typeface="Yu Gothic"/>
               </a:rPr>
-              <a:t>家計に影響するものは、ありません。</a:t>
-            </a:r>
-          </a:p>
-        </p:txBody>
-      </p:sp>
-      <p:sp>
-        <p:nvSpPr>
-          <p:cNvPr id="11" name="TextBox 11"/>
+              <a:t>いくらずつ出すかは、次のページで決めます。</a:t>
+            </a:r>
+          </a:p>
+        </p:txBody>
+      </p:sp>
+      <p:sp>
+        <p:nvSpPr>
+          <p:cNvPr id="21" name="TextBox 21"/>
           <p:cNvSpPr txBox="1"/>
           <p:nvPr/>
         </p:nvSpPr>
@@ -9006,7 +9342,7 @@
       </p:sp>
       <p:sp>
         <p:nvSpPr>
-          <p:cNvPr id="12" name="TextBox 12"/>
+          <p:cNvPr id="22" name="TextBox 22"/>
           <p:cNvSpPr txBox="1"/>
           <p:nvPr/>
         </p:nvSpPr>
@@ -9110,7 +9446,7 @@
                 <a:ea typeface="Yu Gothic"/>
                 <a:cs typeface="Yu Gothic"/>
               </a:rPr>
-              <a:t>決めること</a:t>
+              <a:t>生活費の決め方</a:t>
             </a:r>
           </a:p>
         </p:txBody>
@@ -9149,7 +9485,32 @@
                 <a:ea typeface="Yu Gothic Medium"/>
                 <a:cs typeface="Yu Gothic Medium"/>
               </a:rPr>
-              <a:t>まだ決まっていないことを、期限つきで並べました。</a:t>
+              <a:t>負担の割合は、</a:t>
+            </a:r>
+            <a:r>
+              <a:rPr lang="ja-JP" altLang="en-US" sz="2200" b="0">
+                <a:solidFill>
+                  <a:srgbClr val="14141A"/>
+                </a:solidFill>
+                <a:highlight>
+                  <a:srgbClr val="FFD93D"/>
+                </a:highlight>
+                <a:latin typeface="Yu Gothic Medium"/>
+                <a:ea typeface="Yu Gothic Medium"/>
+                <a:cs typeface="Yu Gothic Medium"/>
+              </a:rPr>
+              <a:t>半年ごと</a:t>
+            </a:r>
+            <a:r>
+              <a:rPr lang="ja-JP" altLang="en-US" sz="2200" b="0">
+                <a:solidFill>
+                  <a:srgbClr val="14141A"/>
+                </a:solidFill>
+                <a:latin typeface="Yu Gothic Medium"/>
+                <a:ea typeface="Yu Gothic Medium"/>
+                <a:cs typeface="Yu Gothic Medium"/>
+              </a:rPr>
+              <a:t>に決め直します。お金で足りない分は、家事で補います。</a:t>
             </a:r>
           </a:p>
         </p:txBody>
@@ -9162,128 +9523,117 @@
         </p:nvSpPr>
         <p:spPr>
           <a:xfrm>
-            <a:off x="841248" y="1728216"/>
-            <a:ext cx="6272784" cy="540639"/>
-          </a:xfrm>
-          <a:prstGeom prst="rect">
-            <a:avLst/>
-          </a:prstGeom>
-          <a:noFill/>
+            <a:off x="841248" y="1924812"/>
+            <a:ext cx="2203704" cy="310896"/>
+          </a:xfrm>
+          <a:prstGeom prst="rect">
+            <a:avLst/>
+          </a:prstGeom>
+          <a:noFill/>
+        </p:spPr>
+        <p:txBody>
+          <a:bodyPr wrap="square" lIns="0" tIns="0" rIns="0" bIns="0" anchor="t" rtlCol="0"/>
+          <a:lstStyle/>
+          <a:p>
+            <a:pPr algn="ctr">
+              <a:lnSpc>
+                <a:spcPct val="145000"/>
+              </a:lnSpc>
+            </a:pPr>
+            <a:r>
+              <a:rPr lang="ja-JP" altLang="en-US" sz="1200" b="1" spc="80">
+                <a:solidFill>
+                  <a:srgbClr val="6B6B76"/>
+                </a:solidFill>
+                <a:latin typeface="Yu Gothic"/>
+                <a:ea typeface="Yu Gothic"/>
+                <a:cs typeface="Yu Gothic"/>
+              </a:rPr>
+              <a:t>半年に一度</a:t>
+            </a:r>
+          </a:p>
+        </p:txBody>
+      </p:sp>
+      <p:sp>
+        <p:nvSpPr>
+          <p:cNvPr id="5" name="Shape 5"/>
+          <p:cNvSpPr/>
+          <p:nvPr/>
+        </p:nvSpPr>
+        <p:spPr>
+          <a:xfrm>
+            <a:off x="841248" y="2336292"/>
+            <a:ext cx="2203704" cy="1600200"/>
+          </a:xfrm>
+          <a:prstGeom prst="rect">
+            <a:avLst/>
+          </a:prstGeom>
+          <a:solidFill>
+            <a:srgbClr val="FFFFFF"/>
+          </a:solidFill>
+          <a:ln w="25400">
+            <a:solidFill>
+              <a:srgbClr val="14141A"/>
+            </a:solidFill>
+          </a:ln>
         </p:spPr>
         <p:txBody>
           <a:bodyPr wrap="square" lIns="0" tIns="0" rIns="0" bIns="0" anchor="ctr" rtlCol="0"/>
           <a:lstStyle/>
           <a:p>
-            <a:pPr algn="l">
-              <a:lnSpc>
-                <a:spcPct val="145000"/>
-              </a:lnSpc>
-            </a:pPr>
-            <a:r>
-              <a:rPr lang="ja-JP" altLang="en-US" sz="1250" b="1" spc="100">
-                <a:solidFill>
-                  <a:srgbClr val="6B6B76"/>
-                </a:solidFill>
-                <a:latin typeface="Yu Gothic"/>
-                <a:ea typeface="Yu Gothic"/>
-                <a:cs typeface="Yu Gothic"/>
-              </a:rPr>
-              <a:t>決めること</a:t>
-            </a:r>
-          </a:p>
-        </p:txBody>
-      </p:sp>
-      <p:sp>
-        <p:nvSpPr>
-          <p:cNvPr id="5" name="TextBox 5"/>
-          <p:cNvSpPr txBox="1"/>
-          <p:nvPr/>
-        </p:nvSpPr>
-        <p:spPr>
-          <a:xfrm>
-            <a:off x="7242048" y="1728216"/>
-            <a:ext cx="2157984" cy="540639"/>
-          </a:xfrm>
-          <a:prstGeom prst="rect">
-            <a:avLst/>
-          </a:prstGeom>
-          <a:noFill/>
-        </p:spPr>
-        <p:txBody>
-          <a:bodyPr wrap="square" lIns="0" tIns="0" rIns="0" bIns="0" anchor="ctr" rtlCol="0"/>
-          <a:lstStyle/>
-          <a:p>
-            <a:pPr algn="l">
-              <a:lnSpc>
-                <a:spcPct val="145000"/>
-              </a:lnSpc>
-            </a:pPr>
-            <a:r>
-              <a:rPr lang="ja-JP" altLang="en-US" sz="1250" b="1" spc="100">
-                <a:solidFill>
-                  <a:srgbClr val="6B6B76"/>
-                </a:solidFill>
-                <a:latin typeface="Yu Gothic"/>
-                <a:ea typeface="Yu Gothic"/>
-                <a:cs typeface="Yu Gothic"/>
-              </a:rPr>
-              <a:t>いつまで</a:t>
-            </a:r>
-          </a:p>
-        </p:txBody>
-      </p:sp>
-      <p:sp>
-        <p:nvSpPr>
-          <p:cNvPr id="6" name="TextBox 6"/>
-          <p:cNvSpPr txBox="1"/>
-          <p:nvPr/>
-        </p:nvSpPr>
-        <p:spPr>
-          <a:xfrm>
-            <a:off x="9528048" y="1728216"/>
-            <a:ext cx="1700784" cy="540639"/>
-          </a:xfrm>
-          <a:prstGeom prst="rect">
-            <a:avLst/>
-          </a:prstGeom>
-          <a:noFill/>
-        </p:spPr>
-        <p:txBody>
-          <a:bodyPr wrap="square" lIns="0" tIns="0" rIns="0" bIns="0" anchor="ctr" rtlCol="0"/>
-          <a:lstStyle/>
-          <a:p>
-            <a:pPr algn="l">
-              <a:lnSpc>
-                <a:spcPct val="145000"/>
-              </a:lnSpc>
-            </a:pPr>
-            <a:r>
-              <a:rPr lang="ja-JP" altLang="en-US" sz="1250" b="1" spc="100">
-                <a:solidFill>
-                  <a:srgbClr val="6B6B76"/>
-                </a:solidFill>
-                <a:latin typeface="Yu Gothic"/>
-                <a:ea typeface="Yu Gothic"/>
-                <a:cs typeface="Yu Gothic"/>
-              </a:rPr>
-              <a:t>だれが</a:t>
-            </a:r>
-          </a:p>
-        </p:txBody>
-      </p:sp>
-      <p:sp>
-        <p:nvSpPr>
-          <p:cNvPr id="7" name="Shape 7"/>
+            <a:pPr algn="ctr">
+              <a:lnSpc>
+                <a:spcPct val="130000"/>
+              </a:lnSpc>
+            </a:pPr>
+            <a:r>
+              <a:rPr lang="ja-JP" altLang="en-US" sz="2100" b="1">
+                <a:solidFill>
+                  <a:srgbClr val="14141A"/>
+                </a:solidFill>
+                <a:latin typeface="Yu Gothic"/>
+                <a:ea typeface="Yu Gothic"/>
+                <a:cs typeface="Yu Gothic"/>
+              </a:rPr>
+              <a:t>お互いの</a:t>
+            </a:r>
+          </a:p>
+          <a:p>
+            <a:pPr algn="ctr">
+              <a:lnSpc>
+                <a:spcPct val="130000"/>
+              </a:lnSpc>
+            </a:pPr>
+            <a:r>
+              <a:rPr lang="ja-JP" altLang="en-US" sz="2100" b="1">
+                <a:solidFill>
+                  <a:srgbClr val="14141A"/>
+                </a:solidFill>
+                <a:latin typeface="Yu Gothic"/>
+                <a:ea typeface="Yu Gothic"/>
+                <a:cs typeface="Yu Gothic"/>
+              </a:rPr>
+              <a:t>月収を見る</a:t>
+            </a:r>
+          </a:p>
+        </p:txBody>
+      </p:sp>
+      <p:sp>
+        <p:nvSpPr>
+          <p:cNvPr id="6" name="Shape 6"/>
           <p:cNvSpPr/>
           <p:nvPr/>
         </p:nvSpPr>
         <p:spPr>
           <a:xfrm>
-            <a:off x="841248" y="2256155"/>
-            <a:ext cx="10515600" cy="25400"/>
-          </a:xfrm>
-          <a:prstGeom prst="rect">
-            <a:avLst/>
+            <a:off x="3172968" y="3067812"/>
+            <a:ext cx="310896" cy="137160"/>
+          </a:xfrm>
+          <a:prstGeom prst="rightArrow">
+            <a:avLst>
+              <a:gd name="adj1" fmla="val 50000"/>
+              <a:gd name="adj2" fmla="val 55000"/>
+            </a:avLst>
           </a:prstGeom>
           <a:solidFill>
             <a:srgbClr val="14141A"/>
@@ -9300,137 +9650,126 @@
       </p:sp>
       <p:sp>
         <p:nvSpPr>
-          <p:cNvPr id="8" name="TextBox 8"/>
-          <p:cNvSpPr txBox="1"/>
-          <p:nvPr/>
-        </p:nvSpPr>
-        <p:spPr>
-          <a:xfrm>
-            <a:off x="841248" y="2268855"/>
-            <a:ext cx="6272784" cy="540639"/>
-          </a:xfrm>
-          <a:prstGeom prst="rect">
-            <a:avLst/>
-          </a:prstGeom>
-          <a:noFill/>
+          <p:cNvPr id="7" name="TextBox 7"/>
+          <p:cNvSpPr txBox="1"/>
+          <p:nvPr/>
+        </p:nvSpPr>
+        <p:spPr>
+          <a:xfrm>
+            <a:off x="3611880" y="1924812"/>
+            <a:ext cx="2203704" cy="310896"/>
+          </a:xfrm>
+          <a:prstGeom prst="rect">
+            <a:avLst/>
+          </a:prstGeom>
+          <a:noFill/>
+        </p:spPr>
+        <p:txBody>
+          <a:bodyPr wrap="square" lIns="0" tIns="0" rIns="0" bIns="0" anchor="t" rtlCol="0"/>
+          <a:lstStyle/>
+          <a:p>
+            <a:pPr algn="ctr">
+              <a:lnSpc>
+                <a:spcPct val="145000"/>
+              </a:lnSpc>
+            </a:pPr>
+            <a:r>
+              <a:rPr lang="ja-JP" altLang="en-US" sz="1200" b="1" spc="80">
+                <a:solidFill>
+                  <a:srgbClr val="6B6B76"/>
+                </a:solidFill>
+                <a:latin typeface="Yu Gothic"/>
+                <a:ea typeface="Yu Gothic"/>
+                <a:cs typeface="Yu Gothic"/>
+              </a:rPr>
+              <a:t>そのつど</a:t>
+            </a:r>
+          </a:p>
+        </p:txBody>
+      </p:sp>
+      <p:sp>
+        <p:nvSpPr>
+          <p:cNvPr id="8" name="Shape 8"/>
+          <p:cNvSpPr/>
+          <p:nvPr/>
+        </p:nvSpPr>
+        <p:spPr>
+          <a:xfrm>
+            <a:off x="3611880" y="2336292"/>
+            <a:ext cx="2203704" cy="1600200"/>
+          </a:xfrm>
+          <a:prstGeom prst="rect">
+            <a:avLst/>
+          </a:prstGeom>
+          <a:solidFill>
+            <a:srgbClr val="FFFFFF"/>
+          </a:solidFill>
+          <a:ln w="25400">
+            <a:solidFill>
+              <a:srgbClr val="14141A"/>
+            </a:solidFill>
+          </a:ln>
         </p:spPr>
         <p:txBody>
           <a:bodyPr wrap="square" lIns="0" tIns="0" rIns="0" bIns="0" anchor="ctr" rtlCol="0"/>
           <a:lstStyle/>
           <a:p>
-            <a:pPr algn="l">
+            <a:pPr algn="ctr">
               <a:lnSpc>
                 <a:spcPct val="130000"/>
               </a:lnSpc>
             </a:pPr>
             <a:r>
-              <a:rPr lang="ja-JP" altLang="en-US" sz="1500" b="0">
-                <a:solidFill>
-                  <a:srgbClr val="14141A"/>
-                </a:solidFill>
-                <a:latin typeface="Yu Gothic"/>
-                <a:ea typeface="Yu Gothic"/>
-                <a:cs typeface="Yu Gothic"/>
-              </a:rPr>
-              <a:t>家賃補助の型・上限・同居人の条件・回数・退職時の扱い</a:t>
-            </a:r>
-          </a:p>
-        </p:txBody>
-      </p:sp>
-      <p:sp>
-        <p:nvSpPr>
-          <p:cNvPr id="9" name="TextBox 9"/>
-          <p:cNvSpPr txBox="1"/>
-          <p:nvPr/>
-        </p:nvSpPr>
-        <p:spPr>
-          <a:xfrm>
-            <a:off x="7242048" y="2268855"/>
-            <a:ext cx="2157984" cy="540639"/>
-          </a:xfrm>
-          <a:prstGeom prst="rect">
-            <a:avLst/>
-          </a:prstGeom>
-          <a:noFill/>
-        </p:spPr>
-        <p:txBody>
-          <a:bodyPr wrap="square" lIns="0" tIns="0" rIns="0" bIns="0" anchor="ctr" rtlCol="0"/>
-          <a:lstStyle/>
-          <a:p>
-            <a:pPr algn="l">
+              <a:rPr lang="ja-JP" altLang="en-US" sz="2100" b="1">
+                <a:solidFill>
+                  <a:srgbClr val="14141A"/>
+                </a:solidFill>
+                <a:latin typeface="Yu Gothic"/>
+                <a:ea typeface="Yu Gothic"/>
+                <a:cs typeface="Yu Gothic"/>
+              </a:rPr>
+              <a:t>負担の割合を</a:t>
+            </a:r>
+          </a:p>
+          <a:p>
+            <a:pPr algn="ctr">
               <a:lnSpc>
                 <a:spcPct val="130000"/>
               </a:lnSpc>
             </a:pPr>
             <a:r>
-              <a:rPr lang="ja-JP" altLang="en-US" sz="1500" b="0">
-                <a:solidFill>
-                  <a:srgbClr val="14141A"/>
-                </a:solidFill>
-                <a:latin typeface="Yu Gothic"/>
-                <a:ea typeface="Yu Gothic"/>
-                <a:cs typeface="Yu Gothic"/>
-              </a:rPr>
-              <a:t>入社後すぐ</a:t>
-            </a:r>
-          </a:p>
-        </p:txBody>
-      </p:sp>
-      <p:sp>
-        <p:nvSpPr>
-          <p:cNvPr id="10" name="TextBox 10"/>
-          <p:cNvSpPr txBox="1"/>
-          <p:nvPr/>
-        </p:nvSpPr>
-        <p:spPr>
-          <a:xfrm>
-            <a:off x="9528048" y="2268855"/>
-            <a:ext cx="1700784" cy="540639"/>
-          </a:xfrm>
-          <a:prstGeom prst="rect">
-            <a:avLst/>
-          </a:prstGeom>
-          <a:noFill/>
-        </p:spPr>
-        <p:txBody>
-          <a:bodyPr wrap="square" lIns="0" tIns="0" rIns="0" bIns="0" anchor="ctr" rtlCol="0"/>
-          <a:lstStyle/>
-          <a:p>
-            <a:pPr algn="l">
-              <a:lnSpc>
-                <a:spcPct val="130000"/>
-              </a:lnSpc>
-            </a:pPr>
-            <a:r>
-              <a:rPr lang="ja-JP" altLang="en-US" sz="1500" b="0">
-                <a:solidFill>
-                  <a:srgbClr val="14141A"/>
-                </a:solidFill>
-                <a:latin typeface="Yu Gothic"/>
-                <a:ea typeface="Yu Gothic"/>
-                <a:cs typeface="Yu Gothic"/>
-              </a:rPr>
-              <a:t>私</a:t>
-            </a:r>
-          </a:p>
-        </p:txBody>
-      </p:sp>
-      <p:sp>
-        <p:nvSpPr>
-          <p:cNvPr id="11" name="Shape 11"/>
+              <a:rPr lang="ja-JP" altLang="en-US" sz="2100" b="1">
+                <a:solidFill>
+                  <a:srgbClr val="14141A"/>
+                </a:solidFill>
+                <a:latin typeface="Yu Gothic"/>
+                <a:ea typeface="Yu Gothic"/>
+                <a:cs typeface="Yu Gothic"/>
+              </a:rPr>
+              <a:t>決める</a:t>
+            </a:r>
+          </a:p>
+        </p:txBody>
+      </p:sp>
+      <p:sp>
+        <p:nvSpPr>
+          <p:cNvPr id="9" name="Shape 9"/>
           <p:cNvSpPr/>
           <p:nvPr/>
         </p:nvSpPr>
         <p:spPr>
           <a:xfrm>
-            <a:off x="841248" y="2804414"/>
-            <a:ext cx="10515600" cy="9525"/>
-          </a:xfrm>
-          <a:prstGeom prst="rect">
-            <a:avLst/>
+            <a:off x="5943600" y="3067812"/>
+            <a:ext cx="310896" cy="137160"/>
+          </a:xfrm>
+          <a:prstGeom prst="rightArrow">
+            <a:avLst>
+              <a:gd name="adj1" fmla="val 50000"/>
+              <a:gd name="adj2" fmla="val 55000"/>
+            </a:avLst>
           </a:prstGeom>
           <a:solidFill>
-            <a:srgbClr val="E7E7EE"/>
+            <a:srgbClr val="14141A"/>
           </a:solidFill>
           <a:ln>
             <a:noFill/>
@@ -9444,137 +9783,126 @@
       </p:sp>
       <p:sp>
         <p:nvSpPr>
-          <p:cNvPr id="12" name="TextBox 12"/>
-          <p:cNvSpPr txBox="1"/>
-          <p:nvPr/>
-        </p:nvSpPr>
-        <p:spPr>
-          <a:xfrm>
-            <a:off x="841248" y="2809494"/>
-            <a:ext cx="6272784" cy="540639"/>
-          </a:xfrm>
-          <a:prstGeom prst="rect">
-            <a:avLst/>
-          </a:prstGeom>
-          <a:noFill/>
+          <p:cNvPr id="10" name="TextBox 10"/>
+          <p:cNvSpPr txBox="1"/>
+          <p:nvPr/>
+        </p:nvSpPr>
+        <p:spPr>
+          <a:xfrm>
+            <a:off x="6382512" y="1924812"/>
+            <a:ext cx="2203704" cy="310896"/>
+          </a:xfrm>
+          <a:prstGeom prst="rect">
+            <a:avLst/>
+          </a:prstGeom>
+          <a:noFill/>
+        </p:spPr>
+        <p:txBody>
+          <a:bodyPr wrap="square" lIns="0" tIns="0" rIns="0" bIns="0" anchor="t" rtlCol="0"/>
+          <a:lstStyle/>
+          <a:p>
+            <a:pPr algn="ctr">
+              <a:lnSpc>
+                <a:spcPct val="145000"/>
+              </a:lnSpc>
+            </a:pPr>
+            <a:r>
+              <a:rPr lang="ja-JP" altLang="en-US" sz="1200" b="1" spc="80">
+                <a:solidFill>
+                  <a:srgbClr val="6B6B76"/>
+                </a:solidFill>
+                <a:latin typeface="Yu Gothic"/>
+                <a:ea typeface="Yu Gothic"/>
+                <a:cs typeface="Yu Gothic"/>
+              </a:rPr>
+              <a:t>足りないときは</a:t>
+            </a:r>
+          </a:p>
+        </p:txBody>
+      </p:sp>
+      <p:sp>
+        <p:nvSpPr>
+          <p:cNvPr id="11" name="Shape 11"/>
+          <p:cNvSpPr/>
+          <p:nvPr/>
+        </p:nvSpPr>
+        <p:spPr>
+          <a:xfrm>
+            <a:off x="6382512" y="2336292"/>
+            <a:ext cx="2203704" cy="1600200"/>
+          </a:xfrm>
+          <a:prstGeom prst="rect">
+            <a:avLst/>
+          </a:prstGeom>
+          <a:solidFill>
+            <a:srgbClr val="FFFFFF"/>
+          </a:solidFill>
+          <a:ln w="25400">
+            <a:solidFill>
+              <a:srgbClr val="14141A"/>
+            </a:solidFill>
+          </a:ln>
         </p:spPr>
         <p:txBody>
           <a:bodyPr wrap="square" lIns="0" tIns="0" rIns="0" bIns="0" anchor="ctr" rtlCol="0"/>
           <a:lstStyle/>
           <a:p>
-            <a:pPr algn="l">
+            <a:pPr algn="ctr">
               <a:lnSpc>
                 <a:spcPct val="130000"/>
               </a:lnSpc>
             </a:pPr>
             <a:r>
-              <a:rPr lang="ja-JP" altLang="en-US" sz="1500" b="0">
-                <a:solidFill>
-                  <a:srgbClr val="14141A"/>
-                </a:solidFill>
-                <a:latin typeface="Yu Gothic"/>
-                <a:ea typeface="Yu Gothic"/>
-                <a:cs typeface="Yu Gothic"/>
-              </a:rPr>
-              <a:t>給与の形（賞与の有無）を見て、家賃の負担額を確定する</a:t>
-            </a:r>
-          </a:p>
-        </p:txBody>
-      </p:sp>
-      <p:sp>
-        <p:nvSpPr>
-          <p:cNvPr id="13" name="TextBox 13"/>
-          <p:cNvSpPr txBox="1"/>
-          <p:nvPr/>
-        </p:nvSpPr>
-        <p:spPr>
-          <a:xfrm>
-            <a:off x="7242048" y="2809494"/>
-            <a:ext cx="2157984" cy="540639"/>
-          </a:xfrm>
-          <a:prstGeom prst="rect">
-            <a:avLst/>
-          </a:prstGeom>
-          <a:noFill/>
-        </p:spPr>
-        <p:txBody>
-          <a:bodyPr wrap="square" lIns="0" tIns="0" rIns="0" bIns="0" anchor="ctr" rtlCol="0"/>
-          <a:lstStyle/>
-          <a:p>
-            <a:pPr algn="l">
+              <a:rPr lang="ja-JP" altLang="en-US" sz="2100" b="1">
+                <a:solidFill>
+                  <a:srgbClr val="14141A"/>
+                </a:solidFill>
+                <a:latin typeface="Yu Gothic"/>
+                <a:ea typeface="Yu Gothic"/>
+                <a:cs typeface="Yu Gothic"/>
+              </a:rPr>
+              <a:t>家事で</a:t>
+            </a:r>
+          </a:p>
+          <a:p>
+            <a:pPr algn="ctr">
               <a:lnSpc>
                 <a:spcPct val="130000"/>
               </a:lnSpc>
             </a:pPr>
             <a:r>
-              <a:rPr lang="ja-JP" altLang="en-US" sz="1500" b="0">
-                <a:solidFill>
-                  <a:srgbClr val="14141A"/>
-                </a:solidFill>
-                <a:latin typeface="Yu Gothic"/>
-                <a:ea typeface="Yu Gothic"/>
-                <a:cs typeface="Yu Gothic"/>
-              </a:rPr>
-              <a:t>2027年1月</a:t>
-            </a:r>
-          </a:p>
-        </p:txBody>
-      </p:sp>
-      <p:sp>
-        <p:nvSpPr>
-          <p:cNvPr id="14" name="TextBox 14"/>
-          <p:cNvSpPr txBox="1"/>
-          <p:nvPr/>
-        </p:nvSpPr>
-        <p:spPr>
-          <a:xfrm>
-            <a:off x="9528048" y="2809494"/>
-            <a:ext cx="1700784" cy="540639"/>
-          </a:xfrm>
-          <a:prstGeom prst="rect">
-            <a:avLst/>
-          </a:prstGeom>
-          <a:noFill/>
-        </p:spPr>
-        <p:txBody>
-          <a:bodyPr wrap="square" lIns="0" tIns="0" rIns="0" bIns="0" anchor="ctr" rtlCol="0"/>
-          <a:lstStyle/>
-          <a:p>
-            <a:pPr algn="l">
-              <a:lnSpc>
-                <a:spcPct val="130000"/>
-              </a:lnSpc>
-            </a:pPr>
-            <a:r>
-              <a:rPr lang="ja-JP" altLang="en-US" sz="1500" b="0">
-                <a:solidFill>
-                  <a:srgbClr val="14141A"/>
-                </a:solidFill>
-                <a:latin typeface="Yu Gothic"/>
-                <a:ea typeface="Yu Gothic"/>
-                <a:cs typeface="Yu Gothic"/>
-              </a:rPr>
-              <a:t>私</a:t>
-            </a:r>
-          </a:p>
-        </p:txBody>
-      </p:sp>
-      <p:sp>
-        <p:nvSpPr>
-          <p:cNvPr id="15" name="Shape 15"/>
+              <a:rPr lang="ja-JP" altLang="en-US" sz="2100" b="1">
+                <a:solidFill>
+                  <a:srgbClr val="14141A"/>
+                </a:solidFill>
+                <a:latin typeface="Yu Gothic"/>
+                <a:ea typeface="Yu Gothic"/>
+                <a:cs typeface="Yu Gothic"/>
+              </a:rPr>
+              <a:t>補う</a:t>
+            </a:r>
+          </a:p>
+        </p:txBody>
+      </p:sp>
+      <p:sp>
+        <p:nvSpPr>
+          <p:cNvPr id="12" name="Shape 12"/>
           <p:cNvSpPr/>
           <p:nvPr/>
         </p:nvSpPr>
         <p:spPr>
           <a:xfrm>
-            <a:off x="841248" y="3345053"/>
-            <a:ext cx="10515600" cy="9525"/>
-          </a:xfrm>
-          <a:prstGeom prst="rect">
-            <a:avLst/>
+            <a:off x="8714232" y="3067812"/>
+            <a:ext cx="310896" cy="137160"/>
+          </a:xfrm>
+          <a:prstGeom prst="rightArrow">
+            <a:avLst>
+              <a:gd name="adj1" fmla="val 50000"/>
+              <a:gd name="adj2" fmla="val 55000"/>
+            </a:avLst>
           </a:prstGeom>
           <a:solidFill>
-            <a:srgbClr val="E7E7EE"/>
+            <a:srgbClr val="14141A"/>
           </a:solidFill>
           <a:ln>
             <a:noFill/>
@@ -9588,446 +9916,53 @@
       </p:sp>
       <p:sp>
         <p:nvSpPr>
-          <p:cNvPr id="16" name="TextBox 16"/>
-          <p:cNvSpPr txBox="1"/>
-          <p:nvPr/>
-        </p:nvSpPr>
-        <p:spPr>
-          <a:xfrm>
-            <a:off x="841248" y="3350133"/>
-            <a:ext cx="6272784" cy="540639"/>
-          </a:xfrm>
-          <a:prstGeom prst="rect">
-            <a:avLst/>
-          </a:prstGeom>
-          <a:noFill/>
-        </p:spPr>
-        <p:txBody>
-          <a:bodyPr wrap="square" lIns="0" tIns="0" rIns="0" bIns="0" anchor="ctr" rtlCol="0"/>
-          <a:lstStyle/>
-          <a:p>
-            <a:pPr algn="l">
-              <a:lnSpc>
-                <a:spcPct val="130000"/>
-              </a:lnSpc>
-            </a:pPr>
-            <a:r>
-              <a:rPr lang="ja-JP" altLang="en-US" sz="1500" b="0">
-                <a:solidFill>
-                  <a:srgbClr val="14141A"/>
-                </a:solidFill>
-                <a:latin typeface="Yu Gothic"/>
-                <a:ea typeface="Yu Gothic"/>
-                <a:cs typeface="Yu Gothic"/>
-              </a:rPr>
-              <a:t>ルームシェアの契約期間と、解約の条件</a:t>
-            </a:r>
-          </a:p>
-        </p:txBody>
-      </p:sp>
-      <p:sp>
-        <p:nvSpPr>
-          <p:cNvPr id="17" name="TextBox 17"/>
-          <p:cNvSpPr txBox="1"/>
-          <p:nvPr/>
-        </p:nvSpPr>
-        <p:spPr>
-          <a:xfrm>
-            <a:off x="7242048" y="3350133"/>
-            <a:ext cx="2157984" cy="540639"/>
-          </a:xfrm>
-          <a:prstGeom prst="rect">
-            <a:avLst/>
-          </a:prstGeom>
-          <a:noFill/>
-        </p:spPr>
-        <p:txBody>
-          <a:bodyPr wrap="square" lIns="0" tIns="0" rIns="0" bIns="0" anchor="ctr" rtlCol="0"/>
-          <a:lstStyle/>
-          <a:p>
-            <a:pPr algn="l">
-              <a:lnSpc>
-                <a:spcPct val="130000"/>
-              </a:lnSpc>
-            </a:pPr>
-            <a:r>
-              <a:rPr lang="ja-JP" altLang="en-US" sz="1500" b="0">
-                <a:solidFill>
-                  <a:srgbClr val="14141A"/>
-                </a:solidFill>
-                <a:latin typeface="Yu Gothic"/>
-                <a:ea typeface="Yu Gothic"/>
-                <a:cs typeface="Yu Gothic"/>
-              </a:rPr>
-              <a:t>契約前</a:t>
-            </a:r>
-          </a:p>
-        </p:txBody>
-      </p:sp>
-      <p:sp>
-        <p:nvSpPr>
-          <p:cNvPr id="18" name="TextBox 18"/>
-          <p:cNvSpPr txBox="1"/>
-          <p:nvPr/>
-        </p:nvSpPr>
-        <p:spPr>
-          <a:xfrm>
-            <a:off x="9528048" y="3350133"/>
-            <a:ext cx="1700784" cy="540639"/>
-          </a:xfrm>
-          <a:prstGeom prst="rect">
-            <a:avLst/>
-          </a:prstGeom>
-          <a:noFill/>
-        </p:spPr>
-        <p:txBody>
-          <a:bodyPr wrap="square" lIns="0" tIns="0" rIns="0" bIns="0" anchor="ctr" rtlCol="0"/>
-          <a:lstStyle/>
-          <a:p>
-            <a:pPr algn="l">
-              <a:lnSpc>
-                <a:spcPct val="130000"/>
-              </a:lnSpc>
-            </a:pPr>
-            <a:r>
-              <a:rPr lang="ja-JP" altLang="en-US" sz="1500" b="0">
-                <a:solidFill>
-                  <a:srgbClr val="14141A"/>
-                </a:solidFill>
-                <a:latin typeface="Yu Gothic"/>
-                <a:ea typeface="Yu Gothic"/>
-                <a:cs typeface="Yu Gothic"/>
-              </a:rPr>
-              <a:t>凪</a:t>
-            </a:r>
-          </a:p>
-        </p:txBody>
-      </p:sp>
-      <p:sp>
-        <p:nvSpPr>
-          <p:cNvPr id="19" name="Shape 19"/>
+          <p:cNvPr id="13" name="TextBox 13"/>
+          <p:cNvSpPr txBox="1"/>
+          <p:nvPr/>
+        </p:nvSpPr>
+        <p:spPr>
+          <a:xfrm>
+            <a:off x="9153144" y="1924812"/>
+            <a:ext cx="2203704" cy="310896"/>
+          </a:xfrm>
+          <a:prstGeom prst="rect">
+            <a:avLst/>
+          </a:prstGeom>
+          <a:noFill/>
+        </p:spPr>
+        <p:txBody>
+          <a:bodyPr wrap="square" lIns="0" tIns="0" rIns="0" bIns="0" anchor="t" rtlCol="0"/>
+          <a:lstStyle/>
+          <a:p>
+            <a:pPr algn="ctr">
+              <a:lnSpc>
+                <a:spcPct val="145000"/>
+              </a:lnSpc>
+            </a:pPr>
+            <a:r>
+              <a:rPr lang="ja-JP" altLang="en-US" sz="1200" b="1" spc="80">
+                <a:solidFill>
+                  <a:srgbClr val="6B6B76"/>
+                </a:solidFill>
+                <a:latin typeface="Yu Gothic"/>
+                <a:ea typeface="Yu Gothic"/>
+                <a:cs typeface="Yu Gothic"/>
+              </a:rPr>
+              <a:t>妊娠・出産後は</a:t>
+            </a:r>
+          </a:p>
+        </p:txBody>
+      </p:sp>
+      <p:sp>
+        <p:nvSpPr>
+          <p:cNvPr id="14" name="Shape 14"/>
           <p:cNvSpPr/>
           <p:nvPr/>
         </p:nvSpPr>
         <p:spPr>
           <a:xfrm>
-            <a:off x="841248" y="3885692"/>
-            <a:ext cx="10515600" cy="9525"/>
-          </a:xfrm>
-          <a:prstGeom prst="rect">
-            <a:avLst/>
-          </a:prstGeom>
-          <a:solidFill>
-            <a:srgbClr val="E7E7EE"/>
-          </a:solidFill>
-          <a:ln>
-            <a:noFill/>
-          </a:ln>
-        </p:spPr>
-        <p:txBody>
-          <a:bodyPr wrap="square" lIns="0" tIns="0" rIns="0" bIns="0" anchor="ctr" rtlCol="0"/>
-          <a:lstStyle/>
-          <a:p/>
-        </p:txBody>
-      </p:sp>
-      <p:sp>
-        <p:nvSpPr>
-          <p:cNvPr id="20" name="TextBox 20"/>
-          <p:cNvSpPr txBox="1"/>
-          <p:nvPr/>
-        </p:nvSpPr>
-        <p:spPr>
-          <a:xfrm>
-            <a:off x="841248" y="3890772"/>
-            <a:ext cx="6272784" cy="540639"/>
-          </a:xfrm>
-          <a:prstGeom prst="rect">
-            <a:avLst/>
-          </a:prstGeom>
-          <a:noFill/>
-        </p:spPr>
-        <p:txBody>
-          <a:bodyPr wrap="square" lIns="0" tIns="0" rIns="0" bIns="0" anchor="ctr" rtlCol="0"/>
-          <a:lstStyle/>
-          <a:p>
-            <a:pPr algn="l">
-              <a:lnSpc>
-                <a:spcPct val="130000"/>
-              </a:lnSpc>
-            </a:pPr>
-            <a:r>
-              <a:rPr lang="ja-JP" altLang="en-US" sz="1500" b="0">
-                <a:solidFill>
-                  <a:srgbClr val="14141A"/>
-                </a:solidFill>
-                <a:latin typeface="Yu Gothic"/>
-                <a:ea typeface="Yu Gothic"/>
-                <a:cs typeface="Yu Gothic"/>
-              </a:rPr>
-              <a:t>入籍と入居を、何月にするか</a:t>
-            </a:r>
-          </a:p>
-        </p:txBody>
-      </p:sp>
-      <p:sp>
-        <p:nvSpPr>
-          <p:cNvPr id="21" name="TextBox 21"/>
-          <p:cNvSpPr txBox="1"/>
-          <p:nvPr/>
-        </p:nvSpPr>
-        <p:spPr>
-          <a:xfrm>
-            <a:off x="7242048" y="3890772"/>
-            <a:ext cx="2157984" cy="540639"/>
-          </a:xfrm>
-          <a:prstGeom prst="rect">
-            <a:avLst/>
-          </a:prstGeom>
-          <a:noFill/>
-        </p:spPr>
-        <p:txBody>
-          <a:bodyPr wrap="square" lIns="0" tIns="0" rIns="0" bIns="0" anchor="ctr" rtlCol="0"/>
-          <a:lstStyle/>
-          <a:p>
-            <a:pPr algn="l">
-              <a:lnSpc>
-                <a:spcPct val="130000"/>
-              </a:lnSpc>
-            </a:pPr>
-            <a:r>
-              <a:rPr lang="ja-JP" altLang="en-US" sz="1500" b="0">
-                <a:solidFill>
-                  <a:srgbClr val="14141A"/>
-                </a:solidFill>
-                <a:latin typeface="Yu Gothic"/>
-                <a:ea typeface="Yu Gothic"/>
-                <a:cs typeface="Yu Gothic"/>
-              </a:rPr>
-              <a:t>2027年後半</a:t>
-            </a:r>
-          </a:p>
-        </p:txBody>
-      </p:sp>
-      <p:sp>
-        <p:nvSpPr>
-          <p:cNvPr id="22" name="TextBox 22"/>
-          <p:cNvSpPr txBox="1"/>
-          <p:nvPr/>
-        </p:nvSpPr>
-        <p:spPr>
-          <a:xfrm>
-            <a:off x="9528048" y="3890772"/>
-            <a:ext cx="1700784" cy="540639"/>
-          </a:xfrm>
-          <a:prstGeom prst="rect">
-            <a:avLst/>
-          </a:prstGeom>
-          <a:noFill/>
-        </p:spPr>
-        <p:txBody>
-          <a:bodyPr wrap="square" lIns="0" tIns="0" rIns="0" bIns="0" anchor="ctr" rtlCol="0"/>
-          <a:lstStyle/>
-          <a:p>
-            <a:pPr algn="l">
-              <a:lnSpc>
-                <a:spcPct val="130000"/>
-              </a:lnSpc>
-            </a:pPr>
-            <a:r>
-              <a:rPr lang="ja-JP" altLang="en-US" sz="1500" b="0">
-                <a:solidFill>
-                  <a:srgbClr val="14141A"/>
-                </a:solidFill>
-                <a:latin typeface="Yu Gothic"/>
-                <a:ea typeface="Yu Gothic"/>
-                <a:cs typeface="Yu Gothic"/>
-              </a:rPr>
-              <a:t>ふたり</a:t>
-            </a:r>
-          </a:p>
-        </p:txBody>
-      </p:sp>
-      <p:sp>
-        <p:nvSpPr>
-          <p:cNvPr id="23" name="Shape 23"/>
-          <p:cNvSpPr/>
-          <p:nvPr/>
-        </p:nvSpPr>
-        <p:spPr>
-          <a:xfrm>
-            <a:off x="841248" y="4426331"/>
-            <a:ext cx="10515600" cy="9525"/>
-          </a:xfrm>
-          <a:prstGeom prst="rect">
-            <a:avLst/>
-          </a:prstGeom>
-          <a:solidFill>
-            <a:srgbClr val="E7E7EE"/>
-          </a:solidFill>
-          <a:ln>
-            <a:noFill/>
-          </a:ln>
-        </p:spPr>
-        <p:txBody>
-          <a:bodyPr wrap="square" lIns="0" tIns="0" rIns="0" bIns="0" anchor="ctr" rtlCol="0"/>
-          <a:lstStyle/>
-          <a:p/>
-        </p:txBody>
-      </p:sp>
-      <p:sp>
-        <p:nvSpPr>
-          <p:cNvPr id="24" name="TextBox 24"/>
-          <p:cNvSpPr txBox="1"/>
-          <p:nvPr/>
-        </p:nvSpPr>
-        <p:spPr>
-          <a:xfrm>
-            <a:off x="841248" y="4431411"/>
-            <a:ext cx="6272784" cy="540639"/>
-          </a:xfrm>
-          <a:prstGeom prst="rect">
-            <a:avLst/>
-          </a:prstGeom>
-          <a:noFill/>
-        </p:spPr>
-        <p:txBody>
-          <a:bodyPr wrap="square" lIns="0" tIns="0" rIns="0" bIns="0" anchor="ctr" rtlCol="0"/>
-          <a:lstStyle/>
-          <a:p>
-            <a:pPr algn="l">
-              <a:lnSpc>
-                <a:spcPct val="130000"/>
-              </a:lnSpc>
-            </a:pPr>
-            <a:r>
-              <a:rPr lang="ja-JP" altLang="en-US" sz="1500" b="0">
-                <a:solidFill>
-                  <a:srgbClr val="14141A"/>
-                </a:solidFill>
-                <a:latin typeface="Yu Gothic"/>
-                <a:ea typeface="Yu Gothic"/>
-                <a:cs typeface="Yu Gothic"/>
-              </a:rPr>
-              <a:t>収入合算が必要なら、確定申告書2〜3期分を用意する</a:t>
-            </a:r>
-          </a:p>
-        </p:txBody>
-      </p:sp>
-      <p:sp>
-        <p:nvSpPr>
-          <p:cNvPr id="25" name="TextBox 25"/>
-          <p:cNvSpPr txBox="1"/>
-          <p:nvPr/>
-        </p:nvSpPr>
-        <p:spPr>
-          <a:xfrm>
-            <a:off x="7242048" y="4431411"/>
-            <a:ext cx="2157984" cy="540639"/>
-          </a:xfrm>
-          <a:prstGeom prst="rect">
-            <a:avLst/>
-          </a:prstGeom>
-          <a:noFill/>
-        </p:spPr>
-        <p:txBody>
-          <a:bodyPr wrap="square" lIns="0" tIns="0" rIns="0" bIns="0" anchor="ctr" rtlCol="0"/>
-          <a:lstStyle/>
-          <a:p>
-            <a:pPr algn="l">
-              <a:lnSpc>
-                <a:spcPct val="130000"/>
-              </a:lnSpc>
-            </a:pPr>
-            <a:r>
-              <a:rPr lang="ja-JP" altLang="en-US" sz="1500" b="0">
-                <a:solidFill>
-                  <a:srgbClr val="14141A"/>
-                </a:solidFill>
-                <a:latin typeface="Yu Gothic"/>
-                <a:ea typeface="Yu Gothic"/>
-                <a:cs typeface="Yu Gothic"/>
-              </a:rPr>
-              <a:t>2027年後半</a:t>
-            </a:r>
-          </a:p>
-        </p:txBody>
-      </p:sp>
-      <p:sp>
-        <p:nvSpPr>
-          <p:cNvPr id="26" name="TextBox 26"/>
-          <p:cNvSpPr txBox="1"/>
-          <p:nvPr/>
-        </p:nvSpPr>
-        <p:spPr>
-          <a:xfrm>
-            <a:off x="9528048" y="4431411"/>
-            <a:ext cx="1700784" cy="540639"/>
-          </a:xfrm>
-          <a:prstGeom prst="rect">
-            <a:avLst/>
-          </a:prstGeom>
-          <a:noFill/>
-        </p:spPr>
-        <p:txBody>
-          <a:bodyPr wrap="square" lIns="0" tIns="0" rIns="0" bIns="0" anchor="ctr" rtlCol="0"/>
-          <a:lstStyle/>
-          <a:p>
-            <a:pPr algn="l">
-              <a:lnSpc>
-                <a:spcPct val="130000"/>
-              </a:lnSpc>
-            </a:pPr>
-            <a:r>
-              <a:rPr lang="ja-JP" altLang="en-US" sz="1500" b="0">
-                <a:solidFill>
-                  <a:srgbClr val="14141A"/>
-                </a:solidFill>
-                <a:latin typeface="Yu Gothic"/>
-                <a:ea typeface="Yu Gothic"/>
-                <a:cs typeface="Yu Gothic"/>
-              </a:rPr>
-              <a:t>凪</a:t>
-            </a:r>
-          </a:p>
-        </p:txBody>
-      </p:sp>
-      <p:sp>
-        <p:nvSpPr>
-          <p:cNvPr id="27" name="Shape 27"/>
-          <p:cNvSpPr/>
-          <p:nvPr/>
-        </p:nvSpPr>
-        <p:spPr>
-          <a:xfrm>
-            <a:off x="841248" y="4966970"/>
-            <a:ext cx="10515600" cy="9525"/>
-          </a:xfrm>
-          <a:prstGeom prst="rect">
-            <a:avLst/>
-          </a:prstGeom>
-          <a:solidFill>
-            <a:srgbClr val="E7E7EE"/>
-          </a:solidFill>
-          <a:ln>
-            <a:noFill/>
-          </a:ln>
-        </p:spPr>
-        <p:txBody>
-          <a:bodyPr wrap="square" lIns="0" tIns="0" rIns="0" bIns="0" anchor="ctr" rtlCol="0"/>
-          <a:lstStyle/>
-          <a:p/>
-        </p:txBody>
-      </p:sp>
-      <p:sp>
-        <p:nvSpPr>
-          <p:cNvPr id="28" name="Shape 28"/>
-          <p:cNvSpPr/>
-          <p:nvPr/>
-        </p:nvSpPr>
-        <p:spPr>
-          <a:xfrm>
-            <a:off x="841248" y="4972050"/>
-            <a:ext cx="10515600" cy="540639"/>
+            <a:off x="9153144" y="2336292"/>
+            <a:ext cx="2203704" cy="1600200"/>
           </a:xfrm>
           <a:prstGeom prst="rect">
             <a:avLst/>
@@ -10042,273 +9977,107 @@
         <p:txBody>
           <a:bodyPr wrap="square" lIns="0" tIns="0" rIns="0" bIns="0" anchor="ctr" rtlCol="0"/>
           <a:lstStyle/>
-          <a:p/>
-        </p:txBody>
-      </p:sp>
-      <p:sp>
-        <p:nvSpPr>
-          <p:cNvPr id="29" name="TextBox 29"/>
-          <p:cNvSpPr txBox="1"/>
-          <p:nvPr/>
-        </p:nvSpPr>
-        <p:spPr>
-          <a:xfrm>
-            <a:off x="932688" y="4972050"/>
-            <a:ext cx="6181344" cy="540639"/>
-          </a:xfrm>
-          <a:prstGeom prst="rect">
-            <a:avLst/>
-          </a:prstGeom>
-          <a:noFill/>
-        </p:spPr>
-        <p:txBody>
-          <a:bodyPr wrap="square" lIns="0" tIns="0" rIns="0" bIns="0" anchor="ctr" rtlCol="0"/>
-          <a:lstStyle/>
-          <a:p>
-            <a:pPr algn="l">
+          <a:p>
+            <a:pPr algn="ctr">
               <a:lnSpc>
                 <a:spcPct val="130000"/>
               </a:lnSpc>
             </a:pPr>
             <a:r>
-              <a:rPr lang="ja-JP" altLang="en-US" sz="1500" b="1">
-                <a:solidFill>
-                  <a:srgbClr val="14141A"/>
-                </a:solidFill>
-                <a:latin typeface="Yu Gothic"/>
-                <a:ea typeface="Yu Gothic"/>
-                <a:cs typeface="Yu Gothic"/>
-              </a:rPr>
-              <a:t>あなたの分の空欄を埋める</a:t>
-            </a:r>
-          </a:p>
-        </p:txBody>
-      </p:sp>
-      <p:sp>
-        <p:nvSpPr>
-          <p:cNvPr id="30" name="TextBox 30"/>
-          <p:cNvSpPr txBox="1"/>
-          <p:nvPr/>
-        </p:nvSpPr>
-        <p:spPr>
-          <a:xfrm>
-            <a:off x="7333488" y="4972050"/>
-            <a:ext cx="2066544" cy="540639"/>
-          </a:xfrm>
-          <a:prstGeom prst="rect">
-            <a:avLst/>
-          </a:prstGeom>
-          <a:noFill/>
-        </p:spPr>
-        <p:txBody>
-          <a:bodyPr wrap="square" lIns="0" tIns="0" rIns="0" bIns="0" anchor="ctr" rtlCol="0"/>
-          <a:lstStyle/>
-          <a:p>
-            <a:pPr algn="l">
-              <a:lnSpc>
-                <a:spcPct val="130000"/>
-              </a:lnSpc>
-            </a:pPr>
-            <a:r>
-              <a:rPr lang="ja-JP" altLang="en-US" sz="1500" b="1">
-                <a:solidFill>
-                  <a:srgbClr val="14141A"/>
-                </a:solidFill>
-                <a:latin typeface="Yu Gothic"/>
-                <a:ea typeface="Yu Gothic"/>
-                <a:cs typeface="Yu Gothic"/>
-              </a:rPr>
-              <a:t>次に会うとき</a:t>
-            </a:r>
-          </a:p>
-        </p:txBody>
-      </p:sp>
-      <p:sp>
-        <p:nvSpPr>
-          <p:cNvPr id="31" name="TextBox 31"/>
-          <p:cNvSpPr txBox="1"/>
-          <p:nvPr/>
-        </p:nvSpPr>
-        <p:spPr>
-          <a:xfrm>
-            <a:off x="9619488" y="4972050"/>
-            <a:ext cx="1609344" cy="540639"/>
-          </a:xfrm>
-          <a:prstGeom prst="rect">
-            <a:avLst/>
-          </a:prstGeom>
-          <a:noFill/>
-        </p:spPr>
-        <p:txBody>
-          <a:bodyPr wrap="square" lIns="0" tIns="0" rIns="0" bIns="0" anchor="ctr" rtlCol="0"/>
-          <a:lstStyle/>
-          <a:p>
-            <a:pPr algn="l">
-              <a:lnSpc>
-                <a:spcPct val="130000"/>
-              </a:lnSpc>
-            </a:pPr>
-            <a:r>
-              <a:rPr lang="ja-JP" altLang="en-US" sz="1500" b="1">
-                <a:solidFill>
-                  <a:srgbClr val="14141A"/>
-                </a:solidFill>
-                <a:latin typeface="Yu Gothic"/>
-                <a:ea typeface="Yu Gothic"/>
-                <a:cs typeface="Yu Gothic"/>
-              </a:rPr>
-              <a:t>凪</a:t>
-            </a:r>
-          </a:p>
-        </p:txBody>
-      </p:sp>
-      <p:sp>
-        <p:nvSpPr>
-          <p:cNvPr id="32" name="Shape 32"/>
-          <p:cNvSpPr/>
-          <p:nvPr/>
-        </p:nvSpPr>
-        <p:spPr>
-          <a:xfrm>
-            <a:off x="841248" y="5507609"/>
-            <a:ext cx="10515600" cy="9525"/>
-          </a:xfrm>
-          <a:prstGeom prst="rect">
-            <a:avLst/>
-          </a:prstGeom>
-          <a:solidFill>
-            <a:srgbClr val="E7E7EE"/>
-          </a:solidFill>
-          <a:ln>
-            <a:noFill/>
-          </a:ln>
-        </p:spPr>
-        <p:txBody>
-          <a:bodyPr wrap="square" lIns="0" tIns="0" rIns="0" bIns="0" anchor="ctr" rtlCol="0"/>
-          <a:lstStyle/>
-          <a:p/>
-        </p:txBody>
-      </p:sp>
-      <p:sp>
-        <p:nvSpPr>
-          <p:cNvPr id="33" name="TextBox 33"/>
-          <p:cNvSpPr txBox="1"/>
-          <p:nvPr/>
-        </p:nvSpPr>
-        <p:spPr>
-          <a:xfrm>
-            <a:off x="841248" y="5512689"/>
-            <a:ext cx="6272784" cy="540639"/>
-          </a:xfrm>
-          <a:prstGeom prst="rect">
-            <a:avLst/>
-          </a:prstGeom>
-          <a:noFill/>
-        </p:spPr>
-        <p:txBody>
-          <a:bodyPr wrap="square" lIns="0" tIns="0" rIns="0" bIns="0" anchor="ctr" rtlCol="0"/>
-          <a:lstStyle/>
-          <a:p>
-            <a:pPr algn="l">
-              <a:lnSpc>
-                <a:spcPct val="130000"/>
-              </a:lnSpc>
-            </a:pPr>
-            <a:r>
-              <a:rPr lang="ja-JP" altLang="en-US" sz="1500" b="0">
-                <a:solidFill>
-                  <a:srgbClr val="14141A"/>
-                </a:solidFill>
-                <a:latin typeface="Yu Gothic"/>
-                <a:ea typeface="Yu Gothic"/>
-                <a:cs typeface="Yu Gothic"/>
-              </a:rPr>
-              <a:t>2人目をどうするか</a:t>
-            </a:r>
-          </a:p>
-        </p:txBody>
-      </p:sp>
-      <p:sp>
-        <p:nvSpPr>
-          <p:cNvPr id="34" name="TextBox 34"/>
-          <p:cNvSpPr txBox="1"/>
-          <p:nvPr/>
-        </p:nvSpPr>
-        <p:spPr>
-          <a:xfrm>
-            <a:off x="7242048" y="5512689"/>
-            <a:ext cx="2157984" cy="540639"/>
-          </a:xfrm>
-          <a:prstGeom prst="rect">
-            <a:avLst/>
-          </a:prstGeom>
-          <a:noFill/>
-        </p:spPr>
-        <p:txBody>
-          <a:bodyPr wrap="square" lIns="0" tIns="0" rIns="0" bIns="0" anchor="ctr" rtlCol="0"/>
-          <a:lstStyle/>
-          <a:p>
-            <a:pPr algn="l">
-              <a:lnSpc>
-                <a:spcPct val="130000"/>
-              </a:lnSpc>
-            </a:pPr>
-            <a:r>
-              <a:rPr lang="ja-JP" altLang="en-US" sz="1500" b="0">
-                <a:solidFill>
-                  <a:srgbClr val="14141A"/>
-                </a:solidFill>
-                <a:latin typeface="Yu Gothic"/>
-                <a:ea typeface="Yu Gothic"/>
-                <a:cs typeface="Yu Gothic"/>
-              </a:rPr>
-              <a:t>一人目のあと</a:t>
-            </a:r>
-          </a:p>
-        </p:txBody>
-      </p:sp>
-      <p:sp>
-        <p:nvSpPr>
-          <p:cNvPr id="35" name="TextBox 35"/>
-          <p:cNvSpPr txBox="1"/>
-          <p:nvPr/>
-        </p:nvSpPr>
-        <p:spPr>
-          <a:xfrm>
-            <a:off x="9528048" y="5512689"/>
-            <a:ext cx="1700784" cy="540639"/>
-          </a:xfrm>
-          <a:prstGeom prst="rect">
-            <a:avLst/>
-          </a:prstGeom>
-          <a:noFill/>
-        </p:spPr>
-        <p:txBody>
-          <a:bodyPr wrap="square" lIns="0" tIns="0" rIns="0" bIns="0" anchor="ctr" rtlCol="0"/>
-          <a:lstStyle/>
-          <a:p>
-            <a:pPr algn="l">
-              <a:lnSpc>
-                <a:spcPct val="130000"/>
-              </a:lnSpc>
-            </a:pPr>
-            <a:r>
-              <a:rPr lang="ja-JP" altLang="en-US" sz="1500" b="0">
-                <a:solidFill>
-                  <a:srgbClr val="14141A"/>
-                </a:solidFill>
-                <a:latin typeface="Yu Gothic"/>
-                <a:ea typeface="Yu Gothic"/>
-                <a:cs typeface="Yu Gothic"/>
-              </a:rPr>
-              <a:t>ふたり</a:t>
-            </a:r>
-          </a:p>
-        </p:txBody>
-      </p:sp>
-      <p:sp>
-        <p:nvSpPr>
-          <p:cNvPr id="36" name="TextBox 36"/>
+              <a:rPr lang="ja-JP" altLang="en-US" sz="2100" b="1">
+                <a:solidFill>
+                  <a:srgbClr val="14141A"/>
+                </a:solidFill>
+                <a:latin typeface="Yu Gothic"/>
+                <a:ea typeface="Yu Gothic"/>
+                <a:cs typeface="Yu Gothic"/>
+              </a:rPr>
+              <a:t>要相談</a:t>
+            </a:r>
+          </a:p>
+        </p:txBody>
+      </p:sp>
+      <p:sp>
+        <p:nvSpPr>
+          <p:cNvPr id="15" name="TextBox 15"/>
+          <p:cNvSpPr txBox="1"/>
+          <p:nvPr/>
+        </p:nvSpPr>
+        <p:spPr>
+          <a:xfrm>
+            <a:off x="841248" y="4773168"/>
+            <a:ext cx="10515600" cy="365760"/>
+          </a:xfrm>
+          <a:prstGeom prst="rect">
+            <a:avLst/>
+          </a:prstGeom>
+          <a:noFill/>
+        </p:spPr>
+        <p:txBody>
+          <a:bodyPr wrap="square" lIns="0" tIns="0" rIns="0" bIns="0" anchor="t" rtlCol="0"/>
+          <a:lstStyle/>
+          <a:p>
+            <a:pPr algn="l">
+              <a:lnSpc>
+                <a:spcPct val="145000"/>
+              </a:lnSpc>
+            </a:pPr>
+            <a:r>
+              <a:rPr lang="ja-JP" altLang="en-US" sz="1150" b="0">
+                <a:solidFill>
+                  <a:srgbClr val="6B6B76"/>
+                </a:solidFill>
+                <a:latin typeface="Yu Gothic"/>
+                <a:ea typeface="Yu Gothic"/>
+                <a:cs typeface="Yu Gothic"/>
+              </a:rPr>
+              <a:t>※収入が上下する前提で組みます。どちらかが減っても、責める話にしません。</a:t>
+            </a:r>
+          </a:p>
+        </p:txBody>
+      </p:sp>
+      <p:sp>
+        <p:nvSpPr>
+          <p:cNvPr id="16" name="TextBox 16"/>
+          <p:cNvSpPr txBox="1"/>
+          <p:nvPr/>
+        </p:nvSpPr>
+        <p:spPr>
+          <a:xfrm>
+            <a:off x="841248" y="5138928"/>
+            <a:ext cx="10515600" cy="914400"/>
+          </a:xfrm>
+          <a:prstGeom prst="rect">
+            <a:avLst/>
+          </a:prstGeom>
+          <a:noFill/>
+        </p:spPr>
+        <p:txBody>
+          <a:bodyPr wrap="square" lIns="0" tIns="0" rIns="0" bIns="0" anchor="b" rtlCol="0"/>
+          <a:lstStyle/>
+          <a:p>
+            <a:pPr algn="l">
+              <a:lnSpc>
+                <a:spcPct val="125000"/>
+              </a:lnSpc>
+            </a:pPr>
+            <a:r>
+              <a:rPr lang="ja-JP" altLang="en-US" sz="2800" b="1">
+                <a:solidFill>
+                  <a:srgbClr val="14141A"/>
+                </a:solidFill>
+                <a:latin typeface="Yu Gothic"/>
+                <a:ea typeface="Yu Gothic"/>
+                <a:cs typeface="Yu Gothic"/>
+              </a:rPr>
+              <a:t>お金で無理をせず、手を動かすほうで調整します。</a:t>
+            </a:r>
+          </a:p>
+        </p:txBody>
+      </p:sp>
+      <p:sp>
+        <p:nvSpPr>
+          <p:cNvPr id="17" name="TextBox 17"/>
           <p:cNvSpPr txBox="1"/>
           <p:nvPr/>
         </p:nvSpPr>
@@ -10347,7 +10116,7 @@
       </p:sp>
       <p:sp>
         <p:nvSpPr>
-          <p:cNvPr id="37" name="TextBox 37"/>
+          <p:cNvPr id="18" name="TextBox 18"/>
           <p:cNvSpPr txBox="1"/>
           <p:nvPr/>
         </p:nvSpPr>
@@ -10451,7 +10220,7 @@
                 <a:ea typeface="Yu Gothic"/>
                 <a:cs typeface="Yu Gothic"/>
               </a:rPr>
-              <a:t>約束</a:t>
+              <a:t>私のお金のこと</a:t>
             </a:r>
           </a:p>
         </p:txBody>
@@ -10490,36 +10259,48 @@
                 <a:ea typeface="Yu Gothic Medium"/>
                 <a:cs typeface="Yu Gothic Medium"/>
               </a:rPr>
-              <a:t>私の側から先に書きます。変えないことと、直すことに分けました。</a:t>
-            </a:r>
-          </a:p>
-        </p:txBody>
-      </p:sp>
-      <p:sp>
-        <p:nvSpPr>
-          <p:cNvPr id="4" name="Shape 4"/>
-          <p:cNvSpPr/>
-          <p:nvPr/>
-        </p:nvSpPr>
-        <p:spPr>
-          <a:xfrm>
-            <a:off x="841248" y="1773936"/>
-            <a:ext cx="2320290" cy="38100"/>
-          </a:xfrm>
-          <a:prstGeom prst="rect">
-            <a:avLst/>
-          </a:prstGeom>
-          <a:solidFill>
-            <a:srgbClr val="00C4B3"/>
-          </a:solidFill>
-          <a:ln>
-            <a:noFill/>
-          </a:ln>
-        </p:spPr>
-        <p:txBody>
-          <a:bodyPr wrap="square" lIns="0" tIns="0" rIns="0" bIns="0" anchor="ctr" rtlCol="0"/>
-          <a:lstStyle/>
-          <a:p/>
+              <a:t>私の側の事情を、先にお伝えします。</a:t>
+            </a:r>
+          </a:p>
+        </p:txBody>
+      </p:sp>
+      <p:sp>
+        <p:nvSpPr>
+          <p:cNvPr id="4" name="TextBox 4"/>
+          <p:cNvSpPr txBox="1"/>
+          <p:nvPr/>
+        </p:nvSpPr>
+        <p:spPr>
+          <a:xfrm>
+            <a:off x="841248" y="1984248"/>
+            <a:ext cx="640080" cy="365760"/>
+          </a:xfrm>
+          <a:prstGeom prst="rect">
+            <a:avLst/>
+          </a:prstGeom>
+          <a:noFill/>
+        </p:spPr>
+        <p:txBody>
+          <a:bodyPr wrap="square" lIns="0" tIns="0" rIns="0" bIns="0" anchor="t" rtlCol="0"/>
+          <a:lstStyle/>
+          <a:p>
+            <a:pPr algn="l">
+              <a:lnSpc>
+                <a:spcPct val="145000"/>
+              </a:lnSpc>
+            </a:pPr>
+            <a:r>
+              <a:rPr lang="ja-JP" altLang="en-US" sz="1500" b="1" spc="100">
+                <a:solidFill>
+                  <a:srgbClr val="00C4B3"/>
+                </a:solidFill>
+                <a:latin typeface="Yu Gothic"/>
+                <a:ea typeface="Yu Gothic"/>
+                <a:cs typeface="Yu Gothic"/>
+              </a:rPr>
+              <a:t>01</a:t>
+            </a:r>
+          </a:p>
         </p:txBody>
       </p:sp>
       <p:sp>
@@ -10530,8 +10311,8 @@
         </p:nvSpPr>
         <p:spPr>
           <a:xfrm>
-            <a:off x="841248" y="2002536"/>
-            <a:ext cx="2320290" cy="320040"/>
+            <a:off x="1527048" y="1892808"/>
+            <a:ext cx="9784080" cy="914400"/>
           </a:xfrm>
           <a:prstGeom prst="rect">
             <a:avLst/>
@@ -10548,7 +10329,68 @@
               </a:lnSpc>
             </a:pPr>
             <a:r>
-              <a:rPr lang="ja-JP" altLang="en-US" sz="1200" b="1" spc="120">
+              <a:rPr lang="ja-JP" altLang="en-US" sz="2000" b="0">
+                <a:solidFill>
+                  <a:srgbClr val="14141A"/>
+                </a:solidFill>
+                <a:latin typeface="Yu Gothic"/>
+                <a:ea typeface="Yu Gothic"/>
+                <a:cs typeface="Yu Gothic"/>
+              </a:rPr>
+              <a:t>転職で、</a:t>
+            </a:r>
+            <a:r>
+              <a:rPr lang="ja-JP" altLang="en-US" sz="2000" b="1">
+                <a:solidFill>
+                  <a:srgbClr val="14141A"/>
+                </a:solidFill>
+                <a:latin typeface="Yu Gothic"/>
+                <a:ea typeface="Yu Gothic"/>
+                <a:cs typeface="Yu Gothic"/>
+              </a:rPr>
+              <a:t>収入は増える</a:t>
+            </a:r>
+            <a:r>
+              <a:rPr lang="ja-JP" altLang="en-US" sz="2000" b="0">
+                <a:solidFill>
+                  <a:srgbClr val="14141A"/>
+                </a:solidFill>
+                <a:latin typeface="Yu Gothic"/>
+                <a:ea typeface="Yu Gothic"/>
+                <a:cs typeface="Yu Gothic"/>
+              </a:rPr>
+              <a:t>予定です。増えた分を、この計画の原資にします。</a:t>
+            </a:r>
+          </a:p>
+        </p:txBody>
+      </p:sp>
+      <p:sp>
+        <p:nvSpPr>
+          <p:cNvPr id="6" name="TextBox 6"/>
+          <p:cNvSpPr txBox="1"/>
+          <p:nvPr/>
+        </p:nvSpPr>
+        <p:spPr>
+          <a:xfrm>
+            <a:off x="841248" y="3044952"/>
+            <a:ext cx="640080" cy="365760"/>
+          </a:xfrm>
+          <a:prstGeom prst="rect">
+            <a:avLst/>
+          </a:prstGeom>
+          <a:noFill/>
+        </p:spPr>
+        <p:txBody>
+          <a:bodyPr wrap="square" lIns="0" tIns="0" rIns="0" bIns="0" anchor="t" rtlCol="0"/>
+          <a:lstStyle/>
+          <a:p>
+            <a:pPr algn="l">
+              <a:lnSpc>
+                <a:spcPct val="145000"/>
+              </a:lnSpc>
+            </a:pPr>
+            <a:r>
+              <a:rPr lang="ja-JP" altLang="en-US" sz="1500" b="1" spc="100">
                 <a:solidFill>
                   <a:srgbClr val="00C4B3"/>
                 </a:solidFill>
@@ -10556,64 +10398,7 @@
                 <a:ea typeface="Yu Gothic"/>
                 <a:cs typeface="Yu Gothic"/>
               </a:rPr>
-              <a:t>仕事</a:t>
-            </a:r>
-          </a:p>
-        </p:txBody>
-      </p:sp>
-      <p:sp>
-        <p:nvSpPr>
-          <p:cNvPr id="6" name="TextBox 6"/>
-          <p:cNvSpPr txBox="1"/>
-          <p:nvPr/>
-        </p:nvSpPr>
-        <p:spPr>
-          <a:xfrm>
-            <a:off x="841248" y="2414016"/>
-            <a:ext cx="2320290" cy="1005840"/>
-          </a:xfrm>
-          <a:prstGeom prst="rect">
-            <a:avLst/>
-          </a:prstGeom>
-          <a:noFill/>
-        </p:spPr>
-        <p:txBody>
-          <a:bodyPr wrap="square" lIns="0" tIns="0" rIns="0" bIns="0" anchor="t" rtlCol="0"/>
-          <a:lstStyle/>
-          <a:p>
-            <a:pPr algn="l">
-              <a:lnSpc>
-                <a:spcPct val="125000"/>
-              </a:lnSpc>
-            </a:pPr>
-            <a:r>
-              <a:rPr lang="ja-JP" altLang="en-US" sz="2200" b="1">
-                <a:solidFill>
-                  <a:srgbClr val="14141A"/>
-                </a:solidFill>
-                <a:latin typeface="Yu Gothic"/>
-                <a:ea typeface="Yu Gothic"/>
-                <a:cs typeface="Yu Gothic"/>
-              </a:rPr>
-              <a:t>熱量は</a:t>
-            </a:r>
-          </a:p>
-          <a:p>
-            <a:pPr algn="l">
-              <a:lnSpc>
-                <a:spcPct val="125000"/>
-              </a:lnSpc>
-            </a:pPr>
-            <a:r>
-              <a:rPr lang="ja-JP" altLang="en-US" sz="2200" b="1">
-                <a:solidFill>
-                  <a:srgbClr val="14141A"/>
-                </a:solidFill>
-                <a:latin typeface="Yu Gothic"/>
-                <a:ea typeface="Yu Gothic"/>
-                <a:cs typeface="Yu Gothic"/>
-              </a:rPr>
-              <a:t>落としません</a:t>
+              <a:t>02</a:t>
             </a:r>
           </a:p>
         </p:txBody>
@@ -10626,62 +10411,118 @@
         </p:nvSpPr>
         <p:spPr>
           <a:xfrm>
-            <a:off x="841248" y="3511296"/>
-            <a:ext cx="2320290" cy="1444752"/>
-          </a:xfrm>
-          <a:prstGeom prst="rect">
-            <a:avLst/>
-          </a:prstGeom>
-          <a:noFill/>
-        </p:spPr>
-        <p:txBody>
-          <a:bodyPr wrap="square" lIns="0" tIns="0" rIns="0" bIns="0" anchor="t" rtlCol="0"/>
-          <a:lstStyle/>
-          <a:p>
-            <a:pPr algn="l">
-              <a:lnSpc>
-                <a:spcPct val="155000"/>
-              </a:lnSpc>
-            </a:pPr>
-            <a:r>
-              <a:rPr lang="ja-JP" altLang="en-US" sz="1400" b="0">
-                <a:solidFill>
-                  <a:srgbClr val="14141A"/>
-                </a:solidFill>
-                <a:latin typeface="Yu Gothic"/>
-                <a:ea typeface="Yu Gothic"/>
-                <a:cs typeface="Yu Gothic"/>
-              </a:rPr>
-              <a:t>30歳まではお互い仕事優先です。結婚が仕事の邪魔をしない形にします。</a:t>
-            </a:r>
-          </a:p>
-        </p:txBody>
-      </p:sp>
-      <p:sp>
-        <p:nvSpPr>
-          <p:cNvPr id="8" name="Shape 8"/>
-          <p:cNvSpPr/>
-          <p:nvPr/>
-        </p:nvSpPr>
-        <p:spPr>
-          <a:xfrm>
-            <a:off x="3573018" y="1773936"/>
-            <a:ext cx="2320290" cy="38100"/>
-          </a:xfrm>
-          <a:prstGeom prst="rect">
-            <a:avLst/>
-          </a:prstGeom>
-          <a:solidFill>
-            <a:srgbClr val="FFD93D"/>
-          </a:solidFill>
-          <a:ln>
-            <a:noFill/>
-          </a:ln>
-        </p:spPr>
-        <p:txBody>
-          <a:bodyPr wrap="square" lIns="0" tIns="0" rIns="0" bIns="0" anchor="ctr" rtlCol="0"/>
-          <a:lstStyle/>
-          <a:p/>
+            <a:off x="1527048" y="2953512"/>
+            <a:ext cx="9784080" cy="914400"/>
+          </a:xfrm>
+          <a:prstGeom prst="rect">
+            <a:avLst/>
+          </a:prstGeom>
+          <a:noFill/>
+        </p:spPr>
+        <p:txBody>
+          <a:bodyPr wrap="square" lIns="0" tIns="0" rIns="0" bIns="0" anchor="t" rtlCol="0"/>
+          <a:lstStyle/>
+          <a:p>
+            <a:pPr algn="l">
+              <a:lnSpc>
+                <a:spcPct val="145000"/>
+              </a:lnSpc>
+            </a:pPr>
+            <a:r>
+              <a:rPr lang="ja-JP" altLang="en-US" sz="1820" b="0">
+                <a:solidFill>
+                  <a:srgbClr val="14141A"/>
+                </a:solidFill>
+                <a:latin typeface="Yu Gothic"/>
+                <a:ea typeface="Yu Gothic"/>
+                <a:cs typeface="Yu Gothic"/>
+              </a:rPr>
+              <a:t>貯金の代わりに、</a:t>
+            </a:r>
+            <a:r>
+              <a:rPr lang="ja-JP" altLang="en-US" sz="1820" b="1">
+                <a:solidFill>
+                  <a:srgbClr val="14141A"/>
+                </a:solidFill>
+                <a:latin typeface="Yu Gothic"/>
+                <a:ea typeface="Yu Gothic"/>
+                <a:cs typeface="Yu Gothic"/>
+              </a:rPr>
+              <a:t>NISAで積み立て</a:t>
+            </a:r>
+            <a:r>
+              <a:rPr lang="ja-JP" altLang="en-US" sz="1820" b="0">
+                <a:solidFill>
+                  <a:srgbClr val="14141A"/>
+                </a:solidFill>
+                <a:latin typeface="Yu Gothic"/>
+                <a:ea typeface="Yu Gothic"/>
+                <a:cs typeface="Yu Gothic"/>
+              </a:rPr>
+              <a:t>ています。有給消化の旅行などで、</a:t>
+            </a:r>
+            <a:r>
+              <a:rPr lang="ja-JP" altLang="en-US" sz="1820" b="1">
+                <a:solidFill>
+                  <a:srgbClr val="14141A"/>
+                </a:solidFill>
+                <a:latin typeface="Yu Gothic"/>
+                <a:ea typeface="Yu Gothic"/>
+                <a:cs typeface="Yu Gothic"/>
+              </a:rPr>
+              <a:t>使う可能性もあります</a:t>
+            </a:r>
+            <a:r>
+              <a:rPr lang="ja-JP" altLang="en-US" sz="1820" b="0">
+                <a:solidFill>
+                  <a:srgbClr val="14141A"/>
+                </a:solidFill>
+                <a:latin typeface="Yu Gothic"/>
+                <a:ea typeface="Yu Gothic"/>
+                <a:cs typeface="Yu Gothic"/>
+              </a:rPr>
+              <a:t>。</a:t>
+            </a:r>
+          </a:p>
+        </p:txBody>
+      </p:sp>
+      <p:sp>
+        <p:nvSpPr>
+          <p:cNvPr id="8" name="TextBox 8"/>
+          <p:cNvSpPr txBox="1"/>
+          <p:nvPr/>
+        </p:nvSpPr>
+        <p:spPr>
+          <a:xfrm>
+            <a:off x="841248" y="4105656"/>
+            <a:ext cx="640080" cy="365760"/>
+          </a:xfrm>
+          <a:prstGeom prst="rect">
+            <a:avLst/>
+          </a:prstGeom>
+          <a:noFill/>
+        </p:spPr>
+        <p:txBody>
+          <a:bodyPr wrap="square" lIns="0" tIns="0" rIns="0" bIns="0" anchor="t" rtlCol="0"/>
+          <a:lstStyle/>
+          <a:p>
+            <a:pPr algn="l">
+              <a:lnSpc>
+                <a:spcPct val="145000"/>
+              </a:lnSpc>
+            </a:pPr>
+            <a:r>
+              <a:rPr lang="ja-JP" altLang="en-US" sz="1500" b="1" spc="100">
+                <a:solidFill>
+                  <a:srgbClr val="00C4B3"/>
+                </a:solidFill>
+                <a:latin typeface="Yu Gothic"/>
+                <a:ea typeface="Yu Gothic"/>
+                <a:cs typeface="Yu Gothic"/>
+              </a:rPr>
+              <a:t>03</a:t>
+            </a:r>
+          </a:p>
         </p:txBody>
       </p:sp>
       <p:sp>
@@ -10692,8 +10533,8 @@
         </p:nvSpPr>
         <p:spPr>
           <a:xfrm>
-            <a:off x="3573018" y="2002536"/>
-            <a:ext cx="2320290" cy="320040"/>
+            <a:off x="1527048" y="4014216"/>
+            <a:ext cx="9784080" cy="914400"/>
           </a:xfrm>
           <a:prstGeom prst="rect">
             <a:avLst/>
@@ -10710,15 +10551,37 @@
               </a:lnSpc>
             </a:pPr>
             <a:r>
-              <a:rPr lang="ja-JP" altLang="en-US" sz="1200" b="1" spc="120">
-                <a:solidFill>
-                  <a:srgbClr val="14141A"/>
-                </a:solidFill>
-                <a:latin typeface="Yu Gothic"/>
-                <a:ea typeface="Yu Gothic"/>
-                <a:cs typeface="Yu Gothic"/>
-              </a:rPr>
-              <a:t>自由</a:t>
+              <a:rPr lang="ja-JP" altLang="en-US" sz="1820" b="0">
+                <a:solidFill>
+                  <a:srgbClr val="14141A"/>
+                </a:solidFill>
+                <a:latin typeface="Yu Gothic"/>
+                <a:ea typeface="Yu Gothic"/>
+                <a:cs typeface="Yu Gothic"/>
+              </a:rPr>
+              <a:t>2028年6月の</a:t>
+            </a:r>
+            <a:r>
+              <a:rPr lang="ja-JP" altLang="en-US" sz="1820" b="1">
+                <a:solidFill>
+                  <a:srgbClr val="14141A"/>
+                </a:solidFill>
+                <a:latin typeface="Yu Gothic"/>
+                <a:ea typeface="Yu Gothic"/>
+                <a:cs typeface="Yu Gothic"/>
+              </a:rPr>
+              <a:t>カンヌ</a:t>
+            </a:r>
+            <a:r>
+              <a:rPr lang="ja-JP" altLang="en-US" sz="1820" b="0">
+                <a:solidFill>
+                  <a:srgbClr val="14141A"/>
+                </a:solidFill>
+                <a:latin typeface="Yu Gothic"/>
+                <a:ea typeface="Yu Gothic"/>
+                <a:cs typeface="Yu Gothic"/>
+              </a:rPr>
+              <a:t>は仕事です。費用は私側（会社負担を含む）で、家計からは出しません。</a:t>
             </a:r>
           </a:p>
         </p:txBody>
@@ -10726,426 +10589,6 @@
       <p:sp>
         <p:nvSpPr>
           <p:cNvPr id="10" name="TextBox 10"/>
-          <p:cNvSpPr txBox="1"/>
-          <p:nvPr/>
-        </p:nvSpPr>
-        <p:spPr>
-          <a:xfrm>
-            <a:off x="3573018" y="2414016"/>
-            <a:ext cx="2320290" cy="1005840"/>
-          </a:xfrm>
-          <a:prstGeom prst="rect">
-            <a:avLst/>
-          </a:prstGeom>
-          <a:noFill/>
-        </p:spPr>
-        <p:txBody>
-          <a:bodyPr wrap="square" lIns="0" tIns="0" rIns="0" bIns="0" anchor="t" rtlCol="0"/>
-          <a:lstStyle/>
-          <a:p>
-            <a:pPr algn="l">
-              <a:lnSpc>
-                <a:spcPct val="125000"/>
-              </a:lnSpc>
-            </a:pPr>
-            <a:r>
-              <a:rPr lang="ja-JP" altLang="en-US" sz="2200" b="1">
-                <a:solidFill>
-                  <a:srgbClr val="14141A"/>
-                </a:solidFill>
-                <a:latin typeface="Yu Gothic"/>
-                <a:ea typeface="Yu Gothic"/>
-                <a:cs typeface="Yu Gothic"/>
-              </a:rPr>
-              <a:t>ひとりの時間は</a:t>
-            </a:r>
-          </a:p>
-          <a:p>
-            <a:pPr algn="l">
-              <a:lnSpc>
-                <a:spcPct val="125000"/>
-              </a:lnSpc>
-            </a:pPr>
-            <a:r>
-              <a:rPr lang="ja-JP" altLang="en-US" sz="2200" b="1">
-                <a:solidFill>
-                  <a:srgbClr val="14141A"/>
-                </a:solidFill>
-                <a:latin typeface="Yu Gothic"/>
-                <a:ea typeface="Yu Gothic"/>
-                <a:cs typeface="Yu Gothic"/>
-              </a:rPr>
-              <a:t>制度で守ります</a:t>
-            </a:r>
-          </a:p>
-        </p:txBody>
-      </p:sp>
-      <p:sp>
-        <p:nvSpPr>
-          <p:cNvPr id="11" name="TextBox 11"/>
-          <p:cNvSpPr txBox="1"/>
-          <p:nvPr/>
-        </p:nvSpPr>
-        <p:spPr>
-          <a:xfrm>
-            <a:off x="3573018" y="3511296"/>
-            <a:ext cx="2320290" cy="1444752"/>
-          </a:xfrm>
-          <a:prstGeom prst="rect">
-            <a:avLst/>
-          </a:prstGeom>
-          <a:noFill/>
-        </p:spPr>
-        <p:txBody>
-          <a:bodyPr wrap="square" lIns="0" tIns="0" rIns="0" bIns="0" anchor="t" rtlCol="0"/>
-          <a:lstStyle/>
-          <a:p>
-            <a:pPr algn="l">
-              <a:lnSpc>
-                <a:spcPct val="155000"/>
-              </a:lnSpc>
-            </a:pPr>
-            <a:r>
-              <a:rPr lang="ja-JP" altLang="en-US" sz="1400" b="0">
-                <a:solidFill>
-                  <a:srgbClr val="14141A"/>
-                </a:solidFill>
-                <a:latin typeface="Yu Gothic"/>
-                <a:ea typeface="Yu Gothic"/>
-                <a:cs typeface="Yu Gothic"/>
-              </a:rPr>
-              <a:t>二人の家に自室を持ちます。週に一度は別行動でかまいません。</a:t>
-            </a:r>
-          </a:p>
-        </p:txBody>
-      </p:sp>
-      <p:sp>
-        <p:nvSpPr>
-          <p:cNvPr id="12" name="Shape 12"/>
-          <p:cNvSpPr/>
-          <p:nvPr/>
-        </p:nvSpPr>
-        <p:spPr>
-          <a:xfrm>
-            <a:off x="6304788" y="1773936"/>
-            <a:ext cx="2320290" cy="38100"/>
-          </a:xfrm>
-          <a:prstGeom prst="rect">
-            <a:avLst/>
-          </a:prstGeom>
-          <a:solidFill>
-            <a:srgbClr val="FF5C77"/>
-          </a:solidFill>
-          <a:ln>
-            <a:noFill/>
-          </a:ln>
-        </p:spPr>
-        <p:txBody>
-          <a:bodyPr wrap="square" lIns="0" tIns="0" rIns="0" bIns="0" anchor="ctr" rtlCol="0"/>
-          <a:lstStyle/>
-          <a:p/>
-        </p:txBody>
-      </p:sp>
-      <p:sp>
-        <p:nvSpPr>
-          <p:cNvPr id="13" name="TextBox 13"/>
-          <p:cNvSpPr txBox="1"/>
-          <p:nvPr/>
-        </p:nvSpPr>
-        <p:spPr>
-          <a:xfrm>
-            <a:off x="6304788" y="2002536"/>
-            <a:ext cx="2320290" cy="320040"/>
-          </a:xfrm>
-          <a:prstGeom prst="rect">
-            <a:avLst/>
-          </a:prstGeom>
-          <a:noFill/>
-        </p:spPr>
-        <p:txBody>
-          <a:bodyPr wrap="square" lIns="0" tIns="0" rIns="0" bIns="0" anchor="t" rtlCol="0"/>
-          <a:lstStyle/>
-          <a:p>
-            <a:pPr algn="l">
-              <a:lnSpc>
-                <a:spcPct val="145000"/>
-              </a:lnSpc>
-            </a:pPr>
-            <a:r>
-              <a:rPr lang="ja-JP" altLang="en-US" sz="1200" b="1" spc="120">
-                <a:solidFill>
-                  <a:srgbClr val="FF5C77"/>
-                </a:solidFill>
-                <a:latin typeface="Yu Gothic"/>
-                <a:ea typeface="Yu Gothic"/>
-                <a:cs typeface="Yu Gothic"/>
-              </a:rPr>
-              <a:t>家事</a:t>
-            </a:r>
-          </a:p>
-        </p:txBody>
-      </p:sp>
-      <p:sp>
-        <p:nvSpPr>
-          <p:cNvPr id="14" name="TextBox 14"/>
-          <p:cNvSpPr txBox="1"/>
-          <p:nvPr/>
-        </p:nvSpPr>
-        <p:spPr>
-          <a:xfrm>
-            <a:off x="6304788" y="2414016"/>
-            <a:ext cx="2320290" cy="1005840"/>
-          </a:xfrm>
-          <a:prstGeom prst="rect">
-            <a:avLst/>
-          </a:prstGeom>
-          <a:noFill/>
-        </p:spPr>
-        <p:txBody>
-          <a:bodyPr wrap="square" lIns="0" tIns="0" rIns="0" bIns="0" anchor="t" rtlCol="0"/>
-          <a:lstStyle/>
-          <a:p>
-            <a:pPr algn="l">
-              <a:lnSpc>
-                <a:spcPct val="125000"/>
-              </a:lnSpc>
-            </a:pPr>
-            <a:r>
-              <a:rPr lang="ja-JP" altLang="en-US" sz="2200" b="1">
-                <a:solidFill>
-                  <a:srgbClr val="14141A"/>
-                </a:solidFill>
-                <a:latin typeface="Yu Gothic"/>
-                <a:ea typeface="Yu Gothic"/>
-                <a:cs typeface="Yu Gothic"/>
-              </a:rPr>
-              <a:t>掃除は</a:t>
-            </a:r>
-          </a:p>
-          <a:p>
-            <a:pPr algn="l">
-              <a:lnSpc>
-                <a:spcPct val="125000"/>
-              </a:lnSpc>
-            </a:pPr>
-            <a:r>
-              <a:rPr lang="ja-JP" altLang="en-US" sz="2200" b="1">
-                <a:solidFill>
-                  <a:srgbClr val="14141A"/>
-                </a:solidFill>
-                <a:latin typeface="Yu Gothic"/>
-                <a:ea typeface="Yu Gothic"/>
-                <a:cs typeface="Yu Gothic"/>
-              </a:rPr>
-              <a:t>改善中です</a:t>
-            </a:r>
-          </a:p>
-        </p:txBody>
-      </p:sp>
-      <p:sp>
-        <p:nvSpPr>
-          <p:cNvPr id="15" name="TextBox 15"/>
-          <p:cNvSpPr txBox="1"/>
-          <p:nvPr/>
-        </p:nvSpPr>
-        <p:spPr>
-          <a:xfrm>
-            <a:off x="6304788" y="3511296"/>
-            <a:ext cx="2320290" cy="1444752"/>
-          </a:xfrm>
-          <a:prstGeom prst="rect">
-            <a:avLst/>
-          </a:prstGeom>
-          <a:noFill/>
-        </p:spPr>
-        <p:txBody>
-          <a:bodyPr wrap="square" lIns="0" tIns="0" rIns="0" bIns="0" anchor="t" rtlCol="0"/>
-          <a:lstStyle/>
-          <a:p>
-            <a:pPr algn="l">
-              <a:lnSpc>
-                <a:spcPct val="155000"/>
-              </a:lnSpc>
-            </a:pPr>
-            <a:r>
-              <a:rPr lang="ja-JP" altLang="en-US" sz="1400" b="0">
-                <a:solidFill>
-                  <a:srgbClr val="14141A"/>
-                </a:solidFill>
-                <a:latin typeface="Yu Gothic"/>
-                <a:ea typeface="Yu Gothic"/>
-                <a:cs typeface="Yu Gothic"/>
-              </a:rPr>
-              <a:t>得意なほうがやります。決まらないものは、外注も選択肢に入れます。</a:t>
-            </a:r>
-          </a:p>
-        </p:txBody>
-      </p:sp>
-      <p:sp>
-        <p:nvSpPr>
-          <p:cNvPr id="16" name="Shape 16"/>
-          <p:cNvSpPr/>
-          <p:nvPr/>
-        </p:nvSpPr>
-        <p:spPr>
-          <a:xfrm>
-            <a:off x="9036558" y="1773936"/>
-            <a:ext cx="2320290" cy="38100"/>
-          </a:xfrm>
-          <a:prstGeom prst="rect">
-            <a:avLst/>
-          </a:prstGeom>
-          <a:solidFill>
-            <a:srgbClr val="6C5CE7"/>
-          </a:solidFill>
-          <a:ln>
-            <a:noFill/>
-          </a:ln>
-        </p:spPr>
-        <p:txBody>
-          <a:bodyPr wrap="square" lIns="0" tIns="0" rIns="0" bIns="0" anchor="ctr" rtlCol="0"/>
-          <a:lstStyle/>
-          <a:p/>
-        </p:txBody>
-      </p:sp>
-      <p:sp>
-        <p:nvSpPr>
-          <p:cNvPr id="17" name="TextBox 17"/>
-          <p:cNvSpPr txBox="1"/>
-          <p:nvPr/>
-        </p:nvSpPr>
-        <p:spPr>
-          <a:xfrm>
-            <a:off x="9036558" y="2002536"/>
-            <a:ext cx="2320290" cy="320040"/>
-          </a:xfrm>
-          <a:prstGeom prst="rect">
-            <a:avLst/>
-          </a:prstGeom>
-          <a:noFill/>
-        </p:spPr>
-        <p:txBody>
-          <a:bodyPr wrap="square" lIns="0" tIns="0" rIns="0" bIns="0" anchor="t" rtlCol="0"/>
-          <a:lstStyle/>
-          <a:p>
-            <a:pPr algn="l">
-              <a:lnSpc>
-                <a:spcPct val="145000"/>
-              </a:lnSpc>
-            </a:pPr>
-            <a:r>
-              <a:rPr lang="ja-JP" altLang="en-US" sz="1200" b="1" spc="120">
-                <a:solidFill>
-                  <a:srgbClr val="6C5CE7"/>
-                </a:solidFill>
-                <a:latin typeface="Yu Gothic"/>
-                <a:ea typeface="Yu Gothic"/>
-                <a:cs typeface="Yu Gothic"/>
-              </a:rPr>
-              <a:t>ケンカ</a:t>
-            </a:r>
-          </a:p>
-        </p:txBody>
-      </p:sp>
-      <p:sp>
-        <p:nvSpPr>
-          <p:cNvPr id="18" name="TextBox 18"/>
-          <p:cNvSpPr txBox="1"/>
-          <p:nvPr/>
-        </p:nvSpPr>
-        <p:spPr>
-          <a:xfrm>
-            <a:off x="9036558" y="2414016"/>
-            <a:ext cx="2320290" cy="1005840"/>
-          </a:xfrm>
-          <a:prstGeom prst="rect">
-            <a:avLst/>
-          </a:prstGeom>
-          <a:noFill/>
-        </p:spPr>
-        <p:txBody>
-          <a:bodyPr wrap="square" lIns="0" tIns="0" rIns="0" bIns="0" anchor="t" rtlCol="0"/>
-          <a:lstStyle/>
-          <a:p>
-            <a:pPr algn="l">
-              <a:lnSpc>
-                <a:spcPct val="125000"/>
-              </a:lnSpc>
-            </a:pPr>
-            <a:r>
-              <a:rPr lang="ja-JP" altLang="en-US" sz="2200" b="1">
-                <a:solidFill>
-                  <a:srgbClr val="14141A"/>
-                </a:solidFill>
-                <a:latin typeface="Yu Gothic"/>
-                <a:ea typeface="Yu Gothic"/>
-                <a:cs typeface="Yu Gothic"/>
-              </a:rPr>
-              <a:t>片方が謝って</a:t>
-            </a:r>
-          </a:p>
-          <a:p>
-            <a:pPr algn="l">
-              <a:lnSpc>
-                <a:spcPct val="125000"/>
-              </a:lnSpc>
-            </a:pPr>
-            <a:r>
-              <a:rPr lang="ja-JP" altLang="en-US" sz="2200" b="1">
-                <a:solidFill>
-                  <a:srgbClr val="14141A"/>
-                </a:solidFill>
-                <a:latin typeface="Yu Gothic"/>
-                <a:ea typeface="Yu Gothic"/>
-                <a:cs typeface="Yu Gothic"/>
-              </a:rPr>
-              <a:t>終わります</a:t>
-            </a:r>
-          </a:p>
-        </p:txBody>
-      </p:sp>
-      <p:sp>
-        <p:nvSpPr>
-          <p:cNvPr id="19" name="TextBox 19"/>
-          <p:cNvSpPr txBox="1"/>
-          <p:nvPr/>
-        </p:nvSpPr>
-        <p:spPr>
-          <a:xfrm>
-            <a:off x="9036558" y="3511296"/>
-            <a:ext cx="2320290" cy="1444752"/>
-          </a:xfrm>
-          <a:prstGeom prst="rect">
-            <a:avLst/>
-          </a:prstGeom>
-          <a:noFill/>
-        </p:spPr>
-        <p:txBody>
-          <a:bodyPr wrap="square" lIns="0" tIns="0" rIns="0" bIns="0" anchor="t" rtlCol="0"/>
-          <a:lstStyle/>
-          <a:p>
-            <a:pPr algn="l">
-              <a:lnSpc>
-                <a:spcPct val="155000"/>
-              </a:lnSpc>
-            </a:pPr>
-            <a:r>
-              <a:rPr lang="ja-JP" altLang="en-US" sz="1400" b="0">
-                <a:solidFill>
-                  <a:srgbClr val="14141A"/>
-                </a:solidFill>
-                <a:latin typeface="Yu Gothic"/>
-                <a:ea typeface="Yu Gothic"/>
-                <a:cs typeface="Yu Gothic"/>
-              </a:rPr>
-              <a:t>今のやり方を変えません。翌日には持ち越しません。</a:t>
-            </a:r>
-          </a:p>
-        </p:txBody>
-      </p:sp>
-      <p:sp>
-        <p:nvSpPr>
-          <p:cNvPr id="20" name="TextBox 20"/>
           <p:cNvSpPr txBox="1"/>
           <p:nvPr/>
         </p:nvSpPr>
@@ -11177,14 +10620,14 @@
                 <a:ea typeface="Yu Gothic"/>
                 <a:cs typeface="Yu Gothic"/>
               </a:rPr>
-              <a:t>変えないのは仕事、直すのは家事です。</a:t>
-            </a:r>
-          </a:p>
-        </p:txBody>
-      </p:sp>
-      <p:sp>
-        <p:nvSpPr>
-          <p:cNvPr id="21" name="TextBox 21"/>
+              <a:t>家計に影響するものは、ありません。</a:t>
+            </a:r>
+          </a:p>
+        </p:txBody>
+      </p:sp>
+      <p:sp>
+        <p:nvSpPr>
+          <p:cNvPr id="11" name="TextBox 11"/>
           <p:cNvSpPr txBox="1"/>
           <p:nvPr/>
         </p:nvSpPr>
@@ -11223,7 +10666,7 @@
       </p:sp>
       <p:sp>
         <p:nvSpPr>
-          <p:cNvPr id="22" name="TextBox 22"/>
+          <p:cNvPr id="12" name="TextBox 12"/>
           <p:cNvSpPr txBox="1"/>
           <p:nvPr/>
         </p:nvSpPr>
@@ -11269,6 +10712,2223 @@
 </file>
 
 <file path=ppt/slides/slide23.xml><?xml version="1.0" encoding="utf-8"?>
+<p:sld xmlns:a="http://schemas.openxmlformats.org/drawingml/2006/main" xmlns:r="http://schemas.openxmlformats.org/officeDocument/2006/relationships" xmlns:p="http://schemas.openxmlformats.org/presentationml/2006/main">
+  <p:cSld>
+    <p:bg>
+      <p:bgPr>
+        <a:solidFill>
+          <a:srgbClr val="FFFFFF"/>
+        </a:solidFill>
+        <a:effectLst/>
+      </p:bgPr>
+    </p:bg>
+    <p:spTree>
+      <p:nvGrpSpPr>
+        <p:cNvPr id="1" name=""/>
+        <p:cNvGrpSpPr/>
+        <p:nvPr/>
+      </p:nvGrpSpPr>
+      <p:grpSpPr>
+        <a:xfrm>
+          <a:off x="0" y="0"/>
+          <a:ext cx="0" cy="0"/>
+          <a:chOff x="0" y="0"/>
+          <a:chExt cx="0" cy="0"/>
+        </a:xfrm>
+      </p:grpSpPr>
+      <p:sp>
+        <p:nvSpPr>
+          <p:cNvPr id="2" name="TextBox 2"/>
+          <p:cNvSpPr txBox="1"/>
+          <p:nvPr/>
+        </p:nvSpPr>
+        <p:spPr>
+          <a:xfrm>
+            <a:off x="841248" y="155448"/>
+            <a:ext cx="10515600" cy="329184"/>
+          </a:xfrm>
+          <a:prstGeom prst="rect">
+            <a:avLst/>
+          </a:prstGeom>
+          <a:noFill/>
+        </p:spPr>
+        <p:txBody>
+          <a:bodyPr wrap="square" lIns="0" tIns="0" rIns="0" bIns="0" anchor="t" rtlCol="0"/>
+          <a:lstStyle/>
+          <a:p>
+            <a:pPr algn="l">
+              <a:lnSpc>
+                <a:spcPct val="145000"/>
+              </a:lnSpc>
+            </a:pPr>
+            <a:r>
+              <a:rPr lang="ja-JP" altLang="en-US" sz="1300" b="1" spc="150">
+                <a:solidFill>
+                  <a:srgbClr val="14141A"/>
+                </a:solidFill>
+                <a:latin typeface="Yu Gothic"/>
+                <a:ea typeface="Yu Gothic"/>
+                <a:cs typeface="Yu Gothic"/>
+              </a:rPr>
+              <a:t>決めること</a:t>
+            </a:r>
+          </a:p>
+        </p:txBody>
+      </p:sp>
+      <p:sp>
+        <p:nvSpPr>
+          <p:cNvPr id="3" name="TextBox 3"/>
+          <p:cNvSpPr txBox="1"/>
+          <p:nvPr/>
+        </p:nvSpPr>
+        <p:spPr>
+          <a:xfrm>
+            <a:off x="841248" y="585216"/>
+            <a:ext cx="10515600" cy="1005840"/>
+          </a:xfrm>
+          <a:prstGeom prst="rect">
+            <a:avLst/>
+          </a:prstGeom>
+          <a:noFill/>
+        </p:spPr>
+        <p:txBody>
+          <a:bodyPr wrap="square" lIns="0" tIns="0" rIns="0" bIns="0" anchor="t" rtlCol="0"/>
+          <a:lstStyle/>
+          <a:p>
+            <a:pPr algn="l">
+              <a:lnSpc>
+                <a:spcPct val="140000"/>
+              </a:lnSpc>
+            </a:pPr>
+            <a:r>
+              <a:rPr lang="ja-JP" altLang="en-US" sz="2200" b="0">
+                <a:solidFill>
+                  <a:srgbClr val="14141A"/>
+                </a:solidFill>
+                <a:latin typeface="Yu Gothic Medium"/>
+                <a:ea typeface="Yu Gothic Medium"/>
+                <a:cs typeface="Yu Gothic Medium"/>
+              </a:rPr>
+              <a:t>まだ決まっていないことを、期限つきで並べました。</a:t>
+            </a:r>
+          </a:p>
+        </p:txBody>
+      </p:sp>
+      <p:sp>
+        <p:nvSpPr>
+          <p:cNvPr id="4" name="TextBox 4"/>
+          <p:cNvSpPr txBox="1"/>
+          <p:nvPr/>
+        </p:nvSpPr>
+        <p:spPr>
+          <a:xfrm>
+            <a:off x="841248" y="1728216"/>
+            <a:ext cx="6272784" cy="540639"/>
+          </a:xfrm>
+          <a:prstGeom prst="rect">
+            <a:avLst/>
+          </a:prstGeom>
+          <a:noFill/>
+        </p:spPr>
+        <p:txBody>
+          <a:bodyPr wrap="square" lIns="0" tIns="0" rIns="0" bIns="0" anchor="ctr" rtlCol="0"/>
+          <a:lstStyle/>
+          <a:p>
+            <a:pPr algn="l">
+              <a:lnSpc>
+                <a:spcPct val="145000"/>
+              </a:lnSpc>
+            </a:pPr>
+            <a:r>
+              <a:rPr lang="ja-JP" altLang="en-US" sz="1250" b="1" spc="100">
+                <a:solidFill>
+                  <a:srgbClr val="6B6B76"/>
+                </a:solidFill>
+                <a:latin typeface="Yu Gothic"/>
+                <a:ea typeface="Yu Gothic"/>
+                <a:cs typeface="Yu Gothic"/>
+              </a:rPr>
+              <a:t>決めること</a:t>
+            </a:r>
+          </a:p>
+        </p:txBody>
+      </p:sp>
+      <p:sp>
+        <p:nvSpPr>
+          <p:cNvPr id="5" name="TextBox 5"/>
+          <p:cNvSpPr txBox="1"/>
+          <p:nvPr/>
+        </p:nvSpPr>
+        <p:spPr>
+          <a:xfrm>
+            <a:off x="7242048" y="1728216"/>
+            <a:ext cx="2157984" cy="540639"/>
+          </a:xfrm>
+          <a:prstGeom prst="rect">
+            <a:avLst/>
+          </a:prstGeom>
+          <a:noFill/>
+        </p:spPr>
+        <p:txBody>
+          <a:bodyPr wrap="square" lIns="0" tIns="0" rIns="0" bIns="0" anchor="ctr" rtlCol="0"/>
+          <a:lstStyle/>
+          <a:p>
+            <a:pPr algn="l">
+              <a:lnSpc>
+                <a:spcPct val="145000"/>
+              </a:lnSpc>
+            </a:pPr>
+            <a:r>
+              <a:rPr lang="ja-JP" altLang="en-US" sz="1250" b="1" spc="100">
+                <a:solidFill>
+                  <a:srgbClr val="6B6B76"/>
+                </a:solidFill>
+                <a:latin typeface="Yu Gothic"/>
+                <a:ea typeface="Yu Gothic"/>
+                <a:cs typeface="Yu Gothic"/>
+              </a:rPr>
+              <a:t>いつまで</a:t>
+            </a:r>
+          </a:p>
+        </p:txBody>
+      </p:sp>
+      <p:sp>
+        <p:nvSpPr>
+          <p:cNvPr id="6" name="TextBox 6"/>
+          <p:cNvSpPr txBox="1"/>
+          <p:nvPr/>
+        </p:nvSpPr>
+        <p:spPr>
+          <a:xfrm>
+            <a:off x="9528048" y="1728216"/>
+            <a:ext cx="1700784" cy="540639"/>
+          </a:xfrm>
+          <a:prstGeom prst="rect">
+            <a:avLst/>
+          </a:prstGeom>
+          <a:noFill/>
+        </p:spPr>
+        <p:txBody>
+          <a:bodyPr wrap="square" lIns="0" tIns="0" rIns="0" bIns="0" anchor="ctr" rtlCol="0"/>
+          <a:lstStyle/>
+          <a:p>
+            <a:pPr algn="l">
+              <a:lnSpc>
+                <a:spcPct val="145000"/>
+              </a:lnSpc>
+            </a:pPr>
+            <a:r>
+              <a:rPr lang="ja-JP" altLang="en-US" sz="1250" b="1" spc="100">
+                <a:solidFill>
+                  <a:srgbClr val="6B6B76"/>
+                </a:solidFill>
+                <a:latin typeface="Yu Gothic"/>
+                <a:ea typeface="Yu Gothic"/>
+                <a:cs typeface="Yu Gothic"/>
+              </a:rPr>
+              <a:t>だれが</a:t>
+            </a:r>
+          </a:p>
+        </p:txBody>
+      </p:sp>
+      <p:sp>
+        <p:nvSpPr>
+          <p:cNvPr id="7" name="Shape 7"/>
+          <p:cNvSpPr/>
+          <p:nvPr/>
+        </p:nvSpPr>
+        <p:spPr>
+          <a:xfrm>
+            <a:off x="841248" y="2256155"/>
+            <a:ext cx="10515600" cy="25400"/>
+          </a:xfrm>
+          <a:prstGeom prst="rect">
+            <a:avLst/>
+          </a:prstGeom>
+          <a:solidFill>
+            <a:srgbClr val="14141A"/>
+          </a:solidFill>
+          <a:ln>
+            <a:noFill/>
+          </a:ln>
+        </p:spPr>
+        <p:txBody>
+          <a:bodyPr wrap="square" lIns="0" tIns="0" rIns="0" bIns="0" anchor="ctr" rtlCol="0"/>
+          <a:lstStyle/>
+          <a:p/>
+        </p:txBody>
+      </p:sp>
+      <p:sp>
+        <p:nvSpPr>
+          <p:cNvPr id="8" name="TextBox 8"/>
+          <p:cNvSpPr txBox="1"/>
+          <p:nvPr/>
+        </p:nvSpPr>
+        <p:spPr>
+          <a:xfrm>
+            <a:off x="841248" y="2268855"/>
+            <a:ext cx="6272784" cy="540639"/>
+          </a:xfrm>
+          <a:prstGeom prst="rect">
+            <a:avLst/>
+          </a:prstGeom>
+          <a:noFill/>
+        </p:spPr>
+        <p:txBody>
+          <a:bodyPr wrap="square" lIns="0" tIns="0" rIns="0" bIns="0" anchor="ctr" rtlCol="0"/>
+          <a:lstStyle/>
+          <a:p>
+            <a:pPr algn="l">
+              <a:lnSpc>
+                <a:spcPct val="130000"/>
+              </a:lnSpc>
+            </a:pPr>
+            <a:r>
+              <a:rPr lang="ja-JP" altLang="en-US" sz="1500" b="0">
+                <a:solidFill>
+                  <a:srgbClr val="14141A"/>
+                </a:solidFill>
+                <a:latin typeface="Yu Gothic"/>
+                <a:ea typeface="Yu Gothic"/>
+                <a:cs typeface="Yu Gothic"/>
+              </a:rPr>
+              <a:t>家賃補助の型・上限・同居人の条件・回数・退職時の扱い</a:t>
+            </a:r>
+          </a:p>
+        </p:txBody>
+      </p:sp>
+      <p:sp>
+        <p:nvSpPr>
+          <p:cNvPr id="9" name="TextBox 9"/>
+          <p:cNvSpPr txBox="1"/>
+          <p:nvPr/>
+        </p:nvSpPr>
+        <p:spPr>
+          <a:xfrm>
+            <a:off x="7242048" y="2268855"/>
+            <a:ext cx="2157984" cy="540639"/>
+          </a:xfrm>
+          <a:prstGeom prst="rect">
+            <a:avLst/>
+          </a:prstGeom>
+          <a:noFill/>
+        </p:spPr>
+        <p:txBody>
+          <a:bodyPr wrap="square" lIns="0" tIns="0" rIns="0" bIns="0" anchor="ctr" rtlCol="0"/>
+          <a:lstStyle/>
+          <a:p>
+            <a:pPr algn="l">
+              <a:lnSpc>
+                <a:spcPct val="130000"/>
+              </a:lnSpc>
+            </a:pPr>
+            <a:r>
+              <a:rPr lang="ja-JP" altLang="en-US" sz="1500" b="0">
+                <a:solidFill>
+                  <a:srgbClr val="14141A"/>
+                </a:solidFill>
+                <a:latin typeface="Yu Gothic"/>
+                <a:ea typeface="Yu Gothic"/>
+                <a:cs typeface="Yu Gothic"/>
+              </a:rPr>
+              <a:t>入社後すぐ</a:t>
+            </a:r>
+          </a:p>
+        </p:txBody>
+      </p:sp>
+      <p:sp>
+        <p:nvSpPr>
+          <p:cNvPr id="10" name="TextBox 10"/>
+          <p:cNvSpPr txBox="1"/>
+          <p:nvPr/>
+        </p:nvSpPr>
+        <p:spPr>
+          <a:xfrm>
+            <a:off x="9528048" y="2268855"/>
+            <a:ext cx="1700784" cy="540639"/>
+          </a:xfrm>
+          <a:prstGeom prst="rect">
+            <a:avLst/>
+          </a:prstGeom>
+          <a:noFill/>
+        </p:spPr>
+        <p:txBody>
+          <a:bodyPr wrap="square" lIns="0" tIns="0" rIns="0" bIns="0" anchor="ctr" rtlCol="0"/>
+          <a:lstStyle/>
+          <a:p>
+            <a:pPr algn="l">
+              <a:lnSpc>
+                <a:spcPct val="130000"/>
+              </a:lnSpc>
+            </a:pPr>
+            <a:r>
+              <a:rPr lang="ja-JP" altLang="en-US" sz="1500" b="0">
+                <a:solidFill>
+                  <a:srgbClr val="14141A"/>
+                </a:solidFill>
+                <a:latin typeface="Yu Gothic"/>
+                <a:ea typeface="Yu Gothic"/>
+                <a:cs typeface="Yu Gothic"/>
+              </a:rPr>
+              <a:t>私</a:t>
+            </a:r>
+          </a:p>
+        </p:txBody>
+      </p:sp>
+      <p:sp>
+        <p:nvSpPr>
+          <p:cNvPr id="11" name="Shape 11"/>
+          <p:cNvSpPr/>
+          <p:nvPr/>
+        </p:nvSpPr>
+        <p:spPr>
+          <a:xfrm>
+            <a:off x="841248" y="2804414"/>
+            <a:ext cx="10515600" cy="9525"/>
+          </a:xfrm>
+          <a:prstGeom prst="rect">
+            <a:avLst/>
+          </a:prstGeom>
+          <a:solidFill>
+            <a:srgbClr val="E7E7EE"/>
+          </a:solidFill>
+          <a:ln>
+            <a:noFill/>
+          </a:ln>
+        </p:spPr>
+        <p:txBody>
+          <a:bodyPr wrap="square" lIns="0" tIns="0" rIns="0" bIns="0" anchor="ctr" rtlCol="0"/>
+          <a:lstStyle/>
+          <a:p/>
+        </p:txBody>
+      </p:sp>
+      <p:sp>
+        <p:nvSpPr>
+          <p:cNvPr id="12" name="TextBox 12"/>
+          <p:cNvSpPr txBox="1"/>
+          <p:nvPr/>
+        </p:nvSpPr>
+        <p:spPr>
+          <a:xfrm>
+            <a:off x="841248" y="2809494"/>
+            <a:ext cx="6272784" cy="540639"/>
+          </a:xfrm>
+          <a:prstGeom prst="rect">
+            <a:avLst/>
+          </a:prstGeom>
+          <a:noFill/>
+        </p:spPr>
+        <p:txBody>
+          <a:bodyPr wrap="square" lIns="0" tIns="0" rIns="0" bIns="0" anchor="ctr" rtlCol="0"/>
+          <a:lstStyle/>
+          <a:p>
+            <a:pPr algn="l">
+              <a:lnSpc>
+                <a:spcPct val="130000"/>
+              </a:lnSpc>
+            </a:pPr>
+            <a:r>
+              <a:rPr lang="ja-JP" altLang="en-US" sz="1500" b="0">
+                <a:solidFill>
+                  <a:srgbClr val="14141A"/>
+                </a:solidFill>
+                <a:latin typeface="Yu Gothic"/>
+                <a:ea typeface="Yu Gothic"/>
+                <a:cs typeface="Yu Gothic"/>
+              </a:rPr>
+              <a:t>給与の形（賞与の有無）を見て、家賃の負担額を確定する</a:t>
+            </a:r>
+          </a:p>
+        </p:txBody>
+      </p:sp>
+      <p:sp>
+        <p:nvSpPr>
+          <p:cNvPr id="13" name="TextBox 13"/>
+          <p:cNvSpPr txBox="1"/>
+          <p:nvPr/>
+        </p:nvSpPr>
+        <p:spPr>
+          <a:xfrm>
+            <a:off x="7242048" y="2809494"/>
+            <a:ext cx="2157984" cy="540639"/>
+          </a:xfrm>
+          <a:prstGeom prst="rect">
+            <a:avLst/>
+          </a:prstGeom>
+          <a:noFill/>
+        </p:spPr>
+        <p:txBody>
+          <a:bodyPr wrap="square" lIns="0" tIns="0" rIns="0" bIns="0" anchor="ctr" rtlCol="0"/>
+          <a:lstStyle/>
+          <a:p>
+            <a:pPr algn="l">
+              <a:lnSpc>
+                <a:spcPct val="130000"/>
+              </a:lnSpc>
+            </a:pPr>
+            <a:r>
+              <a:rPr lang="ja-JP" altLang="en-US" sz="1500" b="0">
+                <a:solidFill>
+                  <a:srgbClr val="14141A"/>
+                </a:solidFill>
+                <a:latin typeface="Yu Gothic"/>
+                <a:ea typeface="Yu Gothic"/>
+                <a:cs typeface="Yu Gothic"/>
+              </a:rPr>
+              <a:t>2027年1月</a:t>
+            </a:r>
+          </a:p>
+        </p:txBody>
+      </p:sp>
+      <p:sp>
+        <p:nvSpPr>
+          <p:cNvPr id="14" name="TextBox 14"/>
+          <p:cNvSpPr txBox="1"/>
+          <p:nvPr/>
+        </p:nvSpPr>
+        <p:spPr>
+          <a:xfrm>
+            <a:off x="9528048" y="2809494"/>
+            <a:ext cx="1700784" cy="540639"/>
+          </a:xfrm>
+          <a:prstGeom prst="rect">
+            <a:avLst/>
+          </a:prstGeom>
+          <a:noFill/>
+        </p:spPr>
+        <p:txBody>
+          <a:bodyPr wrap="square" lIns="0" tIns="0" rIns="0" bIns="0" anchor="ctr" rtlCol="0"/>
+          <a:lstStyle/>
+          <a:p>
+            <a:pPr algn="l">
+              <a:lnSpc>
+                <a:spcPct val="130000"/>
+              </a:lnSpc>
+            </a:pPr>
+            <a:r>
+              <a:rPr lang="ja-JP" altLang="en-US" sz="1500" b="0">
+                <a:solidFill>
+                  <a:srgbClr val="14141A"/>
+                </a:solidFill>
+                <a:latin typeface="Yu Gothic"/>
+                <a:ea typeface="Yu Gothic"/>
+                <a:cs typeface="Yu Gothic"/>
+              </a:rPr>
+              <a:t>私</a:t>
+            </a:r>
+          </a:p>
+        </p:txBody>
+      </p:sp>
+      <p:sp>
+        <p:nvSpPr>
+          <p:cNvPr id="15" name="Shape 15"/>
+          <p:cNvSpPr/>
+          <p:nvPr/>
+        </p:nvSpPr>
+        <p:spPr>
+          <a:xfrm>
+            <a:off x="841248" y="3345053"/>
+            <a:ext cx="10515600" cy="9525"/>
+          </a:xfrm>
+          <a:prstGeom prst="rect">
+            <a:avLst/>
+          </a:prstGeom>
+          <a:solidFill>
+            <a:srgbClr val="E7E7EE"/>
+          </a:solidFill>
+          <a:ln>
+            <a:noFill/>
+          </a:ln>
+        </p:spPr>
+        <p:txBody>
+          <a:bodyPr wrap="square" lIns="0" tIns="0" rIns="0" bIns="0" anchor="ctr" rtlCol="0"/>
+          <a:lstStyle/>
+          <a:p/>
+        </p:txBody>
+      </p:sp>
+      <p:sp>
+        <p:nvSpPr>
+          <p:cNvPr id="16" name="TextBox 16"/>
+          <p:cNvSpPr txBox="1"/>
+          <p:nvPr/>
+        </p:nvSpPr>
+        <p:spPr>
+          <a:xfrm>
+            <a:off x="841248" y="3350133"/>
+            <a:ext cx="6272784" cy="540639"/>
+          </a:xfrm>
+          <a:prstGeom prst="rect">
+            <a:avLst/>
+          </a:prstGeom>
+          <a:noFill/>
+        </p:spPr>
+        <p:txBody>
+          <a:bodyPr wrap="square" lIns="0" tIns="0" rIns="0" bIns="0" anchor="ctr" rtlCol="0"/>
+          <a:lstStyle/>
+          <a:p>
+            <a:pPr algn="l">
+              <a:lnSpc>
+                <a:spcPct val="130000"/>
+              </a:lnSpc>
+            </a:pPr>
+            <a:r>
+              <a:rPr lang="ja-JP" altLang="en-US" sz="1500" b="0">
+                <a:solidFill>
+                  <a:srgbClr val="14141A"/>
+                </a:solidFill>
+                <a:latin typeface="Yu Gothic"/>
+                <a:ea typeface="Yu Gothic"/>
+                <a:cs typeface="Yu Gothic"/>
+              </a:rPr>
+              <a:t>ルームシェアの契約期間と、解約の条件</a:t>
+            </a:r>
+          </a:p>
+        </p:txBody>
+      </p:sp>
+      <p:sp>
+        <p:nvSpPr>
+          <p:cNvPr id="17" name="TextBox 17"/>
+          <p:cNvSpPr txBox="1"/>
+          <p:nvPr/>
+        </p:nvSpPr>
+        <p:spPr>
+          <a:xfrm>
+            <a:off x="7242048" y="3350133"/>
+            <a:ext cx="2157984" cy="540639"/>
+          </a:xfrm>
+          <a:prstGeom prst="rect">
+            <a:avLst/>
+          </a:prstGeom>
+          <a:noFill/>
+        </p:spPr>
+        <p:txBody>
+          <a:bodyPr wrap="square" lIns="0" tIns="0" rIns="0" bIns="0" anchor="ctr" rtlCol="0"/>
+          <a:lstStyle/>
+          <a:p>
+            <a:pPr algn="l">
+              <a:lnSpc>
+                <a:spcPct val="130000"/>
+              </a:lnSpc>
+            </a:pPr>
+            <a:r>
+              <a:rPr lang="ja-JP" altLang="en-US" sz="1500" b="0">
+                <a:solidFill>
+                  <a:srgbClr val="14141A"/>
+                </a:solidFill>
+                <a:latin typeface="Yu Gothic"/>
+                <a:ea typeface="Yu Gothic"/>
+                <a:cs typeface="Yu Gothic"/>
+              </a:rPr>
+              <a:t>契約前</a:t>
+            </a:r>
+          </a:p>
+        </p:txBody>
+      </p:sp>
+      <p:sp>
+        <p:nvSpPr>
+          <p:cNvPr id="18" name="TextBox 18"/>
+          <p:cNvSpPr txBox="1"/>
+          <p:nvPr/>
+        </p:nvSpPr>
+        <p:spPr>
+          <a:xfrm>
+            <a:off x="9528048" y="3350133"/>
+            <a:ext cx="1700784" cy="540639"/>
+          </a:xfrm>
+          <a:prstGeom prst="rect">
+            <a:avLst/>
+          </a:prstGeom>
+          <a:noFill/>
+        </p:spPr>
+        <p:txBody>
+          <a:bodyPr wrap="square" lIns="0" tIns="0" rIns="0" bIns="0" anchor="ctr" rtlCol="0"/>
+          <a:lstStyle/>
+          <a:p>
+            <a:pPr algn="l">
+              <a:lnSpc>
+                <a:spcPct val="130000"/>
+              </a:lnSpc>
+            </a:pPr>
+            <a:r>
+              <a:rPr lang="ja-JP" altLang="en-US" sz="1500" b="0">
+                <a:solidFill>
+                  <a:srgbClr val="14141A"/>
+                </a:solidFill>
+                <a:latin typeface="Yu Gothic"/>
+                <a:ea typeface="Yu Gothic"/>
+                <a:cs typeface="Yu Gothic"/>
+              </a:rPr>
+              <a:t>凪</a:t>
+            </a:r>
+          </a:p>
+        </p:txBody>
+      </p:sp>
+      <p:sp>
+        <p:nvSpPr>
+          <p:cNvPr id="19" name="Shape 19"/>
+          <p:cNvSpPr/>
+          <p:nvPr/>
+        </p:nvSpPr>
+        <p:spPr>
+          <a:xfrm>
+            <a:off x="841248" y="3885692"/>
+            <a:ext cx="10515600" cy="9525"/>
+          </a:xfrm>
+          <a:prstGeom prst="rect">
+            <a:avLst/>
+          </a:prstGeom>
+          <a:solidFill>
+            <a:srgbClr val="E7E7EE"/>
+          </a:solidFill>
+          <a:ln>
+            <a:noFill/>
+          </a:ln>
+        </p:spPr>
+        <p:txBody>
+          <a:bodyPr wrap="square" lIns="0" tIns="0" rIns="0" bIns="0" anchor="ctr" rtlCol="0"/>
+          <a:lstStyle/>
+          <a:p/>
+        </p:txBody>
+      </p:sp>
+      <p:sp>
+        <p:nvSpPr>
+          <p:cNvPr id="20" name="TextBox 20"/>
+          <p:cNvSpPr txBox="1"/>
+          <p:nvPr/>
+        </p:nvSpPr>
+        <p:spPr>
+          <a:xfrm>
+            <a:off x="841248" y="3890772"/>
+            <a:ext cx="6272784" cy="540639"/>
+          </a:xfrm>
+          <a:prstGeom prst="rect">
+            <a:avLst/>
+          </a:prstGeom>
+          <a:noFill/>
+        </p:spPr>
+        <p:txBody>
+          <a:bodyPr wrap="square" lIns="0" tIns="0" rIns="0" bIns="0" anchor="ctr" rtlCol="0"/>
+          <a:lstStyle/>
+          <a:p>
+            <a:pPr algn="l">
+              <a:lnSpc>
+                <a:spcPct val="130000"/>
+              </a:lnSpc>
+            </a:pPr>
+            <a:r>
+              <a:rPr lang="ja-JP" altLang="en-US" sz="1500" b="0">
+                <a:solidFill>
+                  <a:srgbClr val="14141A"/>
+                </a:solidFill>
+                <a:latin typeface="Yu Gothic"/>
+                <a:ea typeface="Yu Gothic"/>
+                <a:cs typeface="Yu Gothic"/>
+              </a:rPr>
+              <a:t>入籍と入居を、何月にするか</a:t>
+            </a:r>
+          </a:p>
+        </p:txBody>
+      </p:sp>
+      <p:sp>
+        <p:nvSpPr>
+          <p:cNvPr id="21" name="TextBox 21"/>
+          <p:cNvSpPr txBox="1"/>
+          <p:nvPr/>
+        </p:nvSpPr>
+        <p:spPr>
+          <a:xfrm>
+            <a:off x="7242048" y="3890772"/>
+            <a:ext cx="2157984" cy="540639"/>
+          </a:xfrm>
+          <a:prstGeom prst="rect">
+            <a:avLst/>
+          </a:prstGeom>
+          <a:noFill/>
+        </p:spPr>
+        <p:txBody>
+          <a:bodyPr wrap="square" lIns="0" tIns="0" rIns="0" bIns="0" anchor="ctr" rtlCol="0"/>
+          <a:lstStyle/>
+          <a:p>
+            <a:pPr algn="l">
+              <a:lnSpc>
+                <a:spcPct val="130000"/>
+              </a:lnSpc>
+            </a:pPr>
+            <a:r>
+              <a:rPr lang="ja-JP" altLang="en-US" sz="1500" b="0">
+                <a:solidFill>
+                  <a:srgbClr val="14141A"/>
+                </a:solidFill>
+                <a:latin typeface="Yu Gothic"/>
+                <a:ea typeface="Yu Gothic"/>
+                <a:cs typeface="Yu Gothic"/>
+              </a:rPr>
+              <a:t>2027年後半</a:t>
+            </a:r>
+          </a:p>
+        </p:txBody>
+      </p:sp>
+      <p:sp>
+        <p:nvSpPr>
+          <p:cNvPr id="22" name="TextBox 22"/>
+          <p:cNvSpPr txBox="1"/>
+          <p:nvPr/>
+        </p:nvSpPr>
+        <p:spPr>
+          <a:xfrm>
+            <a:off x="9528048" y="3890772"/>
+            <a:ext cx="1700784" cy="540639"/>
+          </a:xfrm>
+          <a:prstGeom prst="rect">
+            <a:avLst/>
+          </a:prstGeom>
+          <a:noFill/>
+        </p:spPr>
+        <p:txBody>
+          <a:bodyPr wrap="square" lIns="0" tIns="0" rIns="0" bIns="0" anchor="ctr" rtlCol="0"/>
+          <a:lstStyle/>
+          <a:p>
+            <a:pPr algn="l">
+              <a:lnSpc>
+                <a:spcPct val="130000"/>
+              </a:lnSpc>
+            </a:pPr>
+            <a:r>
+              <a:rPr lang="ja-JP" altLang="en-US" sz="1500" b="0">
+                <a:solidFill>
+                  <a:srgbClr val="14141A"/>
+                </a:solidFill>
+                <a:latin typeface="Yu Gothic"/>
+                <a:ea typeface="Yu Gothic"/>
+                <a:cs typeface="Yu Gothic"/>
+              </a:rPr>
+              <a:t>ふたり</a:t>
+            </a:r>
+          </a:p>
+        </p:txBody>
+      </p:sp>
+      <p:sp>
+        <p:nvSpPr>
+          <p:cNvPr id="23" name="Shape 23"/>
+          <p:cNvSpPr/>
+          <p:nvPr/>
+        </p:nvSpPr>
+        <p:spPr>
+          <a:xfrm>
+            <a:off x="841248" y="4426331"/>
+            <a:ext cx="10515600" cy="9525"/>
+          </a:xfrm>
+          <a:prstGeom prst="rect">
+            <a:avLst/>
+          </a:prstGeom>
+          <a:solidFill>
+            <a:srgbClr val="E7E7EE"/>
+          </a:solidFill>
+          <a:ln>
+            <a:noFill/>
+          </a:ln>
+        </p:spPr>
+        <p:txBody>
+          <a:bodyPr wrap="square" lIns="0" tIns="0" rIns="0" bIns="0" anchor="ctr" rtlCol="0"/>
+          <a:lstStyle/>
+          <a:p/>
+        </p:txBody>
+      </p:sp>
+      <p:sp>
+        <p:nvSpPr>
+          <p:cNvPr id="24" name="TextBox 24"/>
+          <p:cNvSpPr txBox="1"/>
+          <p:nvPr/>
+        </p:nvSpPr>
+        <p:spPr>
+          <a:xfrm>
+            <a:off x="841248" y="4431411"/>
+            <a:ext cx="6272784" cy="540639"/>
+          </a:xfrm>
+          <a:prstGeom prst="rect">
+            <a:avLst/>
+          </a:prstGeom>
+          <a:noFill/>
+        </p:spPr>
+        <p:txBody>
+          <a:bodyPr wrap="square" lIns="0" tIns="0" rIns="0" bIns="0" anchor="ctr" rtlCol="0"/>
+          <a:lstStyle/>
+          <a:p>
+            <a:pPr algn="l">
+              <a:lnSpc>
+                <a:spcPct val="130000"/>
+              </a:lnSpc>
+            </a:pPr>
+            <a:r>
+              <a:rPr lang="ja-JP" altLang="en-US" sz="1500" b="0">
+                <a:solidFill>
+                  <a:srgbClr val="14141A"/>
+                </a:solidFill>
+                <a:latin typeface="Yu Gothic"/>
+                <a:ea typeface="Yu Gothic"/>
+                <a:cs typeface="Yu Gothic"/>
+              </a:rPr>
+              <a:t>収入合算が必要なら、確定申告書2〜3期分を用意する</a:t>
+            </a:r>
+          </a:p>
+        </p:txBody>
+      </p:sp>
+      <p:sp>
+        <p:nvSpPr>
+          <p:cNvPr id="25" name="TextBox 25"/>
+          <p:cNvSpPr txBox="1"/>
+          <p:nvPr/>
+        </p:nvSpPr>
+        <p:spPr>
+          <a:xfrm>
+            <a:off x="7242048" y="4431411"/>
+            <a:ext cx="2157984" cy="540639"/>
+          </a:xfrm>
+          <a:prstGeom prst="rect">
+            <a:avLst/>
+          </a:prstGeom>
+          <a:noFill/>
+        </p:spPr>
+        <p:txBody>
+          <a:bodyPr wrap="square" lIns="0" tIns="0" rIns="0" bIns="0" anchor="ctr" rtlCol="0"/>
+          <a:lstStyle/>
+          <a:p>
+            <a:pPr algn="l">
+              <a:lnSpc>
+                <a:spcPct val="130000"/>
+              </a:lnSpc>
+            </a:pPr>
+            <a:r>
+              <a:rPr lang="ja-JP" altLang="en-US" sz="1500" b="0">
+                <a:solidFill>
+                  <a:srgbClr val="14141A"/>
+                </a:solidFill>
+                <a:latin typeface="Yu Gothic"/>
+                <a:ea typeface="Yu Gothic"/>
+                <a:cs typeface="Yu Gothic"/>
+              </a:rPr>
+              <a:t>2027年後半</a:t>
+            </a:r>
+          </a:p>
+        </p:txBody>
+      </p:sp>
+      <p:sp>
+        <p:nvSpPr>
+          <p:cNvPr id="26" name="TextBox 26"/>
+          <p:cNvSpPr txBox="1"/>
+          <p:nvPr/>
+        </p:nvSpPr>
+        <p:spPr>
+          <a:xfrm>
+            <a:off x="9528048" y="4431411"/>
+            <a:ext cx="1700784" cy="540639"/>
+          </a:xfrm>
+          <a:prstGeom prst="rect">
+            <a:avLst/>
+          </a:prstGeom>
+          <a:noFill/>
+        </p:spPr>
+        <p:txBody>
+          <a:bodyPr wrap="square" lIns="0" tIns="0" rIns="0" bIns="0" anchor="ctr" rtlCol="0"/>
+          <a:lstStyle/>
+          <a:p>
+            <a:pPr algn="l">
+              <a:lnSpc>
+                <a:spcPct val="130000"/>
+              </a:lnSpc>
+            </a:pPr>
+            <a:r>
+              <a:rPr lang="ja-JP" altLang="en-US" sz="1500" b="0">
+                <a:solidFill>
+                  <a:srgbClr val="14141A"/>
+                </a:solidFill>
+                <a:latin typeface="Yu Gothic"/>
+                <a:ea typeface="Yu Gothic"/>
+                <a:cs typeface="Yu Gothic"/>
+              </a:rPr>
+              <a:t>凪</a:t>
+            </a:r>
+          </a:p>
+        </p:txBody>
+      </p:sp>
+      <p:sp>
+        <p:nvSpPr>
+          <p:cNvPr id="27" name="Shape 27"/>
+          <p:cNvSpPr/>
+          <p:nvPr/>
+        </p:nvSpPr>
+        <p:spPr>
+          <a:xfrm>
+            <a:off x="841248" y="4966970"/>
+            <a:ext cx="10515600" cy="9525"/>
+          </a:xfrm>
+          <a:prstGeom prst="rect">
+            <a:avLst/>
+          </a:prstGeom>
+          <a:solidFill>
+            <a:srgbClr val="E7E7EE"/>
+          </a:solidFill>
+          <a:ln>
+            <a:noFill/>
+          </a:ln>
+        </p:spPr>
+        <p:txBody>
+          <a:bodyPr wrap="square" lIns="0" tIns="0" rIns="0" bIns="0" anchor="ctr" rtlCol="0"/>
+          <a:lstStyle/>
+          <a:p/>
+        </p:txBody>
+      </p:sp>
+      <p:sp>
+        <p:nvSpPr>
+          <p:cNvPr id="28" name="Shape 28"/>
+          <p:cNvSpPr/>
+          <p:nvPr/>
+        </p:nvSpPr>
+        <p:spPr>
+          <a:xfrm>
+            <a:off x="841248" y="4972050"/>
+            <a:ext cx="10515600" cy="540639"/>
+          </a:xfrm>
+          <a:prstGeom prst="rect">
+            <a:avLst/>
+          </a:prstGeom>
+          <a:solidFill>
+            <a:srgbClr val="FFD93D"/>
+          </a:solidFill>
+          <a:ln>
+            <a:noFill/>
+          </a:ln>
+        </p:spPr>
+        <p:txBody>
+          <a:bodyPr wrap="square" lIns="0" tIns="0" rIns="0" bIns="0" anchor="ctr" rtlCol="0"/>
+          <a:lstStyle/>
+          <a:p/>
+        </p:txBody>
+      </p:sp>
+      <p:sp>
+        <p:nvSpPr>
+          <p:cNvPr id="29" name="TextBox 29"/>
+          <p:cNvSpPr txBox="1"/>
+          <p:nvPr/>
+        </p:nvSpPr>
+        <p:spPr>
+          <a:xfrm>
+            <a:off x="932688" y="4972050"/>
+            <a:ext cx="6181344" cy="540639"/>
+          </a:xfrm>
+          <a:prstGeom prst="rect">
+            <a:avLst/>
+          </a:prstGeom>
+          <a:noFill/>
+        </p:spPr>
+        <p:txBody>
+          <a:bodyPr wrap="square" lIns="0" tIns="0" rIns="0" bIns="0" anchor="ctr" rtlCol="0"/>
+          <a:lstStyle/>
+          <a:p>
+            <a:pPr algn="l">
+              <a:lnSpc>
+                <a:spcPct val="130000"/>
+              </a:lnSpc>
+            </a:pPr>
+            <a:r>
+              <a:rPr lang="ja-JP" altLang="en-US" sz="1500" b="1">
+                <a:solidFill>
+                  <a:srgbClr val="14141A"/>
+                </a:solidFill>
+                <a:latin typeface="Yu Gothic"/>
+                <a:ea typeface="Yu Gothic"/>
+                <a:cs typeface="Yu Gothic"/>
+              </a:rPr>
+              <a:t>あなたの分の空欄を埋める</a:t>
+            </a:r>
+          </a:p>
+        </p:txBody>
+      </p:sp>
+      <p:sp>
+        <p:nvSpPr>
+          <p:cNvPr id="30" name="TextBox 30"/>
+          <p:cNvSpPr txBox="1"/>
+          <p:nvPr/>
+        </p:nvSpPr>
+        <p:spPr>
+          <a:xfrm>
+            <a:off x="7333488" y="4972050"/>
+            <a:ext cx="2066544" cy="540639"/>
+          </a:xfrm>
+          <a:prstGeom prst="rect">
+            <a:avLst/>
+          </a:prstGeom>
+          <a:noFill/>
+        </p:spPr>
+        <p:txBody>
+          <a:bodyPr wrap="square" lIns="0" tIns="0" rIns="0" bIns="0" anchor="ctr" rtlCol="0"/>
+          <a:lstStyle/>
+          <a:p>
+            <a:pPr algn="l">
+              <a:lnSpc>
+                <a:spcPct val="130000"/>
+              </a:lnSpc>
+            </a:pPr>
+            <a:r>
+              <a:rPr lang="ja-JP" altLang="en-US" sz="1500" b="1">
+                <a:solidFill>
+                  <a:srgbClr val="14141A"/>
+                </a:solidFill>
+                <a:latin typeface="Yu Gothic"/>
+                <a:ea typeface="Yu Gothic"/>
+                <a:cs typeface="Yu Gothic"/>
+              </a:rPr>
+              <a:t>次に会うとき</a:t>
+            </a:r>
+          </a:p>
+        </p:txBody>
+      </p:sp>
+      <p:sp>
+        <p:nvSpPr>
+          <p:cNvPr id="31" name="TextBox 31"/>
+          <p:cNvSpPr txBox="1"/>
+          <p:nvPr/>
+        </p:nvSpPr>
+        <p:spPr>
+          <a:xfrm>
+            <a:off x="9619488" y="4972050"/>
+            <a:ext cx="1609344" cy="540639"/>
+          </a:xfrm>
+          <a:prstGeom prst="rect">
+            <a:avLst/>
+          </a:prstGeom>
+          <a:noFill/>
+        </p:spPr>
+        <p:txBody>
+          <a:bodyPr wrap="square" lIns="0" tIns="0" rIns="0" bIns="0" anchor="ctr" rtlCol="0"/>
+          <a:lstStyle/>
+          <a:p>
+            <a:pPr algn="l">
+              <a:lnSpc>
+                <a:spcPct val="130000"/>
+              </a:lnSpc>
+            </a:pPr>
+            <a:r>
+              <a:rPr lang="ja-JP" altLang="en-US" sz="1500" b="1">
+                <a:solidFill>
+                  <a:srgbClr val="14141A"/>
+                </a:solidFill>
+                <a:latin typeface="Yu Gothic"/>
+                <a:ea typeface="Yu Gothic"/>
+                <a:cs typeface="Yu Gothic"/>
+              </a:rPr>
+              <a:t>凪</a:t>
+            </a:r>
+          </a:p>
+        </p:txBody>
+      </p:sp>
+      <p:sp>
+        <p:nvSpPr>
+          <p:cNvPr id="32" name="Shape 32"/>
+          <p:cNvSpPr/>
+          <p:nvPr/>
+        </p:nvSpPr>
+        <p:spPr>
+          <a:xfrm>
+            <a:off x="841248" y="5507609"/>
+            <a:ext cx="10515600" cy="9525"/>
+          </a:xfrm>
+          <a:prstGeom prst="rect">
+            <a:avLst/>
+          </a:prstGeom>
+          <a:solidFill>
+            <a:srgbClr val="E7E7EE"/>
+          </a:solidFill>
+          <a:ln>
+            <a:noFill/>
+          </a:ln>
+        </p:spPr>
+        <p:txBody>
+          <a:bodyPr wrap="square" lIns="0" tIns="0" rIns="0" bIns="0" anchor="ctr" rtlCol="0"/>
+          <a:lstStyle/>
+          <a:p/>
+        </p:txBody>
+      </p:sp>
+      <p:sp>
+        <p:nvSpPr>
+          <p:cNvPr id="33" name="TextBox 33"/>
+          <p:cNvSpPr txBox="1"/>
+          <p:nvPr/>
+        </p:nvSpPr>
+        <p:spPr>
+          <a:xfrm>
+            <a:off x="841248" y="5512689"/>
+            <a:ext cx="6272784" cy="540639"/>
+          </a:xfrm>
+          <a:prstGeom prst="rect">
+            <a:avLst/>
+          </a:prstGeom>
+          <a:noFill/>
+        </p:spPr>
+        <p:txBody>
+          <a:bodyPr wrap="square" lIns="0" tIns="0" rIns="0" bIns="0" anchor="ctr" rtlCol="0"/>
+          <a:lstStyle/>
+          <a:p>
+            <a:pPr algn="l">
+              <a:lnSpc>
+                <a:spcPct val="130000"/>
+              </a:lnSpc>
+            </a:pPr>
+            <a:r>
+              <a:rPr lang="ja-JP" altLang="en-US" sz="1500" b="0">
+                <a:solidFill>
+                  <a:srgbClr val="14141A"/>
+                </a:solidFill>
+                <a:latin typeface="Yu Gothic"/>
+                <a:ea typeface="Yu Gothic"/>
+                <a:cs typeface="Yu Gothic"/>
+              </a:rPr>
+              <a:t>2人目をどうするか</a:t>
+            </a:r>
+          </a:p>
+        </p:txBody>
+      </p:sp>
+      <p:sp>
+        <p:nvSpPr>
+          <p:cNvPr id="34" name="TextBox 34"/>
+          <p:cNvSpPr txBox="1"/>
+          <p:nvPr/>
+        </p:nvSpPr>
+        <p:spPr>
+          <a:xfrm>
+            <a:off x="7242048" y="5512689"/>
+            <a:ext cx="2157984" cy="540639"/>
+          </a:xfrm>
+          <a:prstGeom prst="rect">
+            <a:avLst/>
+          </a:prstGeom>
+          <a:noFill/>
+        </p:spPr>
+        <p:txBody>
+          <a:bodyPr wrap="square" lIns="0" tIns="0" rIns="0" bIns="0" anchor="ctr" rtlCol="0"/>
+          <a:lstStyle/>
+          <a:p>
+            <a:pPr algn="l">
+              <a:lnSpc>
+                <a:spcPct val="130000"/>
+              </a:lnSpc>
+            </a:pPr>
+            <a:r>
+              <a:rPr lang="ja-JP" altLang="en-US" sz="1500" b="0">
+                <a:solidFill>
+                  <a:srgbClr val="14141A"/>
+                </a:solidFill>
+                <a:latin typeface="Yu Gothic"/>
+                <a:ea typeface="Yu Gothic"/>
+                <a:cs typeface="Yu Gothic"/>
+              </a:rPr>
+              <a:t>一人目のあと</a:t>
+            </a:r>
+          </a:p>
+        </p:txBody>
+      </p:sp>
+      <p:sp>
+        <p:nvSpPr>
+          <p:cNvPr id="35" name="TextBox 35"/>
+          <p:cNvSpPr txBox="1"/>
+          <p:nvPr/>
+        </p:nvSpPr>
+        <p:spPr>
+          <a:xfrm>
+            <a:off x="9528048" y="5512689"/>
+            <a:ext cx="1700784" cy="540639"/>
+          </a:xfrm>
+          <a:prstGeom prst="rect">
+            <a:avLst/>
+          </a:prstGeom>
+          <a:noFill/>
+        </p:spPr>
+        <p:txBody>
+          <a:bodyPr wrap="square" lIns="0" tIns="0" rIns="0" bIns="0" anchor="ctr" rtlCol="0"/>
+          <a:lstStyle/>
+          <a:p>
+            <a:pPr algn="l">
+              <a:lnSpc>
+                <a:spcPct val="130000"/>
+              </a:lnSpc>
+            </a:pPr>
+            <a:r>
+              <a:rPr lang="ja-JP" altLang="en-US" sz="1500" b="0">
+                <a:solidFill>
+                  <a:srgbClr val="14141A"/>
+                </a:solidFill>
+                <a:latin typeface="Yu Gothic"/>
+                <a:ea typeface="Yu Gothic"/>
+                <a:cs typeface="Yu Gothic"/>
+              </a:rPr>
+              <a:t>ふたり</a:t>
+            </a:r>
+          </a:p>
+        </p:txBody>
+      </p:sp>
+      <p:sp>
+        <p:nvSpPr>
+          <p:cNvPr id="36" name="TextBox 36"/>
+          <p:cNvSpPr txBox="1"/>
+          <p:nvPr/>
+        </p:nvSpPr>
+        <p:spPr>
+          <a:xfrm>
+            <a:off x="841248" y="6391656"/>
+            <a:ext cx="5486400" cy="274320"/>
+          </a:xfrm>
+          <a:prstGeom prst="rect">
+            <a:avLst/>
+          </a:prstGeom>
+          <a:noFill/>
+        </p:spPr>
+        <p:txBody>
+          <a:bodyPr wrap="square" lIns="0" tIns="0" rIns="0" bIns="0" anchor="t" rtlCol="0"/>
+          <a:lstStyle/>
+          <a:p>
+            <a:pPr algn="l">
+              <a:lnSpc>
+                <a:spcPct val="145000"/>
+              </a:lnSpc>
+            </a:pPr>
+            <a:r>
+              <a:rPr lang="ja-JP" altLang="en-US" sz="1000" b="0" spc="50">
+                <a:solidFill>
+                  <a:srgbClr val="A3A3AE"/>
+                </a:solidFill>
+                <a:latin typeface="Yu Gothic"/>
+                <a:ea typeface="Yu Gothic"/>
+                <a:cs typeface="Yu Gothic"/>
+              </a:rPr>
+              <a:t>ふたりの計画のご提案</a:t>
+            </a:r>
+          </a:p>
+        </p:txBody>
+      </p:sp>
+      <p:sp>
+        <p:nvSpPr>
+          <p:cNvPr id="37" name="TextBox 37"/>
+          <p:cNvSpPr txBox="1"/>
+          <p:nvPr/>
+        </p:nvSpPr>
+        <p:spPr>
+          <a:xfrm>
+            <a:off x="10436047" y="6373368"/>
+            <a:ext cx="914400" cy="274320"/>
+          </a:xfrm>
+          <a:prstGeom prst="rect">
+            <a:avLst/>
+          </a:prstGeom>
+          <a:noFill/>
+        </p:spPr>
+        <p:txBody>
+          <a:bodyPr wrap="square" lIns="0" tIns="0" rIns="0" bIns="0" anchor="t" rtlCol="0"/>
+          <a:lstStyle/>
+          <a:p>
+            <a:pPr algn="r">
+              <a:lnSpc>
+                <a:spcPct val="145000"/>
+              </a:lnSpc>
+            </a:pPr>
+            <a:r>
+              <a:rPr lang="ja-JP" altLang="en-US" sz="1200" b="1" spc="50">
+                <a:solidFill>
+                  <a:srgbClr val="A3A3AE"/>
+                </a:solidFill>
+                <a:latin typeface="Yu Gothic"/>
+                <a:ea typeface="Yu Gothic"/>
+                <a:cs typeface="Yu Gothic"/>
+              </a:rPr>
+              <a:t>23</a:t>
+            </a:r>
+          </a:p>
+        </p:txBody>
+      </p:sp>
+    </p:spTree>
+  </p:cSld>
+  <p:clrMapOvr>
+    <a:masterClrMapping/>
+  </p:clrMapOvr>
+</p:sld>
+</file>
+
+<file path=ppt/slides/slide24.xml><?xml version="1.0" encoding="utf-8"?>
+<p:sld xmlns:a="http://schemas.openxmlformats.org/drawingml/2006/main" xmlns:r="http://schemas.openxmlformats.org/officeDocument/2006/relationships" xmlns:p="http://schemas.openxmlformats.org/presentationml/2006/main">
+  <p:cSld>
+    <p:bg>
+      <p:bgPr>
+        <a:solidFill>
+          <a:srgbClr val="FFFFFF"/>
+        </a:solidFill>
+        <a:effectLst/>
+      </p:bgPr>
+    </p:bg>
+    <p:spTree>
+      <p:nvGrpSpPr>
+        <p:cNvPr id="1" name=""/>
+        <p:cNvGrpSpPr/>
+        <p:nvPr/>
+      </p:nvGrpSpPr>
+      <p:grpSpPr>
+        <a:xfrm>
+          <a:off x="0" y="0"/>
+          <a:ext cx="0" cy="0"/>
+          <a:chOff x="0" y="0"/>
+          <a:chExt cx="0" cy="0"/>
+        </a:xfrm>
+      </p:grpSpPr>
+      <p:sp>
+        <p:nvSpPr>
+          <p:cNvPr id="2" name="TextBox 2"/>
+          <p:cNvSpPr txBox="1"/>
+          <p:nvPr/>
+        </p:nvSpPr>
+        <p:spPr>
+          <a:xfrm>
+            <a:off x="841248" y="155448"/>
+            <a:ext cx="10515600" cy="329184"/>
+          </a:xfrm>
+          <a:prstGeom prst="rect">
+            <a:avLst/>
+          </a:prstGeom>
+          <a:noFill/>
+        </p:spPr>
+        <p:txBody>
+          <a:bodyPr wrap="square" lIns="0" tIns="0" rIns="0" bIns="0" anchor="t" rtlCol="0"/>
+          <a:lstStyle/>
+          <a:p>
+            <a:pPr algn="l">
+              <a:lnSpc>
+                <a:spcPct val="145000"/>
+              </a:lnSpc>
+            </a:pPr>
+            <a:r>
+              <a:rPr lang="ja-JP" altLang="en-US" sz="1300" b="1" spc="150">
+                <a:solidFill>
+                  <a:srgbClr val="14141A"/>
+                </a:solidFill>
+                <a:latin typeface="Yu Gothic"/>
+                <a:ea typeface="Yu Gothic"/>
+                <a:cs typeface="Yu Gothic"/>
+              </a:rPr>
+              <a:t>約束</a:t>
+            </a:r>
+          </a:p>
+        </p:txBody>
+      </p:sp>
+      <p:sp>
+        <p:nvSpPr>
+          <p:cNvPr id="3" name="TextBox 3"/>
+          <p:cNvSpPr txBox="1"/>
+          <p:nvPr/>
+        </p:nvSpPr>
+        <p:spPr>
+          <a:xfrm>
+            <a:off x="841248" y="585216"/>
+            <a:ext cx="10515600" cy="1005840"/>
+          </a:xfrm>
+          <a:prstGeom prst="rect">
+            <a:avLst/>
+          </a:prstGeom>
+          <a:noFill/>
+        </p:spPr>
+        <p:txBody>
+          <a:bodyPr wrap="square" lIns="0" tIns="0" rIns="0" bIns="0" anchor="t" rtlCol="0"/>
+          <a:lstStyle/>
+          <a:p>
+            <a:pPr algn="l">
+              <a:lnSpc>
+                <a:spcPct val="140000"/>
+              </a:lnSpc>
+            </a:pPr>
+            <a:r>
+              <a:rPr lang="ja-JP" altLang="en-US" sz="2200" b="0">
+                <a:solidFill>
+                  <a:srgbClr val="14141A"/>
+                </a:solidFill>
+                <a:latin typeface="Yu Gothic Medium"/>
+                <a:ea typeface="Yu Gothic Medium"/>
+                <a:cs typeface="Yu Gothic Medium"/>
+              </a:rPr>
+              <a:t>私の側から先に書きます。変えないことと、直すことに分けました。</a:t>
+            </a:r>
+          </a:p>
+        </p:txBody>
+      </p:sp>
+      <p:sp>
+        <p:nvSpPr>
+          <p:cNvPr id="4" name="Shape 4"/>
+          <p:cNvSpPr/>
+          <p:nvPr/>
+        </p:nvSpPr>
+        <p:spPr>
+          <a:xfrm>
+            <a:off x="841248" y="1773936"/>
+            <a:ext cx="2320290" cy="38100"/>
+          </a:xfrm>
+          <a:prstGeom prst="rect">
+            <a:avLst/>
+          </a:prstGeom>
+          <a:solidFill>
+            <a:srgbClr val="00C4B3"/>
+          </a:solidFill>
+          <a:ln>
+            <a:noFill/>
+          </a:ln>
+        </p:spPr>
+        <p:txBody>
+          <a:bodyPr wrap="square" lIns="0" tIns="0" rIns="0" bIns="0" anchor="ctr" rtlCol="0"/>
+          <a:lstStyle/>
+          <a:p/>
+        </p:txBody>
+      </p:sp>
+      <p:sp>
+        <p:nvSpPr>
+          <p:cNvPr id="5" name="TextBox 5"/>
+          <p:cNvSpPr txBox="1"/>
+          <p:nvPr/>
+        </p:nvSpPr>
+        <p:spPr>
+          <a:xfrm>
+            <a:off x="841248" y="2002536"/>
+            <a:ext cx="2320290" cy="320040"/>
+          </a:xfrm>
+          <a:prstGeom prst="rect">
+            <a:avLst/>
+          </a:prstGeom>
+          <a:noFill/>
+        </p:spPr>
+        <p:txBody>
+          <a:bodyPr wrap="square" lIns="0" tIns="0" rIns="0" bIns="0" anchor="t" rtlCol="0"/>
+          <a:lstStyle/>
+          <a:p>
+            <a:pPr algn="l">
+              <a:lnSpc>
+                <a:spcPct val="145000"/>
+              </a:lnSpc>
+            </a:pPr>
+            <a:r>
+              <a:rPr lang="ja-JP" altLang="en-US" sz="1200" b="1" spc="120">
+                <a:solidFill>
+                  <a:srgbClr val="00C4B3"/>
+                </a:solidFill>
+                <a:latin typeface="Yu Gothic"/>
+                <a:ea typeface="Yu Gothic"/>
+                <a:cs typeface="Yu Gothic"/>
+              </a:rPr>
+              <a:t>仕事</a:t>
+            </a:r>
+          </a:p>
+        </p:txBody>
+      </p:sp>
+      <p:sp>
+        <p:nvSpPr>
+          <p:cNvPr id="6" name="TextBox 6"/>
+          <p:cNvSpPr txBox="1"/>
+          <p:nvPr/>
+        </p:nvSpPr>
+        <p:spPr>
+          <a:xfrm>
+            <a:off x="841248" y="2414016"/>
+            <a:ext cx="2320290" cy="1005840"/>
+          </a:xfrm>
+          <a:prstGeom prst="rect">
+            <a:avLst/>
+          </a:prstGeom>
+          <a:noFill/>
+        </p:spPr>
+        <p:txBody>
+          <a:bodyPr wrap="square" lIns="0" tIns="0" rIns="0" bIns="0" anchor="t" rtlCol="0"/>
+          <a:lstStyle/>
+          <a:p>
+            <a:pPr algn="l">
+              <a:lnSpc>
+                <a:spcPct val="125000"/>
+              </a:lnSpc>
+            </a:pPr>
+            <a:r>
+              <a:rPr lang="ja-JP" altLang="en-US" sz="2200" b="1">
+                <a:solidFill>
+                  <a:srgbClr val="14141A"/>
+                </a:solidFill>
+                <a:latin typeface="Yu Gothic"/>
+                <a:ea typeface="Yu Gothic"/>
+                <a:cs typeface="Yu Gothic"/>
+              </a:rPr>
+              <a:t>熱量は</a:t>
+            </a:r>
+          </a:p>
+          <a:p>
+            <a:pPr algn="l">
+              <a:lnSpc>
+                <a:spcPct val="125000"/>
+              </a:lnSpc>
+            </a:pPr>
+            <a:r>
+              <a:rPr lang="ja-JP" altLang="en-US" sz="2200" b="1">
+                <a:solidFill>
+                  <a:srgbClr val="14141A"/>
+                </a:solidFill>
+                <a:latin typeface="Yu Gothic"/>
+                <a:ea typeface="Yu Gothic"/>
+                <a:cs typeface="Yu Gothic"/>
+              </a:rPr>
+              <a:t>落としません</a:t>
+            </a:r>
+          </a:p>
+        </p:txBody>
+      </p:sp>
+      <p:sp>
+        <p:nvSpPr>
+          <p:cNvPr id="7" name="TextBox 7"/>
+          <p:cNvSpPr txBox="1"/>
+          <p:nvPr/>
+        </p:nvSpPr>
+        <p:spPr>
+          <a:xfrm>
+            <a:off x="841248" y="3511296"/>
+            <a:ext cx="2320290" cy="1444752"/>
+          </a:xfrm>
+          <a:prstGeom prst="rect">
+            <a:avLst/>
+          </a:prstGeom>
+          <a:noFill/>
+        </p:spPr>
+        <p:txBody>
+          <a:bodyPr wrap="square" lIns="0" tIns="0" rIns="0" bIns="0" anchor="t" rtlCol="0"/>
+          <a:lstStyle/>
+          <a:p>
+            <a:pPr algn="l">
+              <a:lnSpc>
+                <a:spcPct val="155000"/>
+              </a:lnSpc>
+            </a:pPr>
+            <a:r>
+              <a:rPr lang="ja-JP" altLang="en-US" sz="1400" b="0">
+                <a:solidFill>
+                  <a:srgbClr val="14141A"/>
+                </a:solidFill>
+                <a:latin typeface="Yu Gothic"/>
+                <a:ea typeface="Yu Gothic"/>
+                <a:cs typeface="Yu Gothic"/>
+              </a:rPr>
+              <a:t>30歳まではお互い仕事優先です。結婚が仕事の邪魔をしない形にします。</a:t>
+            </a:r>
+          </a:p>
+        </p:txBody>
+      </p:sp>
+      <p:sp>
+        <p:nvSpPr>
+          <p:cNvPr id="8" name="Shape 8"/>
+          <p:cNvSpPr/>
+          <p:nvPr/>
+        </p:nvSpPr>
+        <p:spPr>
+          <a:xfrm>
+            <a:off x="3573018" y="1773936"/>
+            <a:ext cx="2320290" cy="38100"/>
+          </a:xfrm>
+          <a:prstGeom prst="rect">
+            <a:avLst/>
+          </a:prstGeom>
+          <a:solidFill>
+            <a:srgbClr val="FFD93D"/>
+          </a:solidFill>
+          <a:ln>
+            <a:noFill/>
+          </a:ln>
+        </p:spPr>
+        <p:txBody>
+          <a:bodyPr wrap="square" lIns="0" tIns="0" rIns="0" bIns="0" anchor="ctr" rtlCol="0"/>
+          <a:lstStyle/>
+          <a:p/>
+        </p:txBody>
+      </p:sp>
+      <p:sp>
+        <p:nvSpPr>
+          <p:cNvPr id="9" name="TextBox 9"/>
+          <p:cNvSpPr txBox="1"/>
+          <p:nvPr/>
+        </p:nvSpPr>
+        <p:spPr>
+          <a:xfrm>
+            <a:off x="3573018" y="2002536"/>
+            <a:ext cx="2320290" cy="320040"/>
+          </a:xfrm>
+          <a:prstGeom prst="rect">
+            <a:avLst/>
+          </a:prstGeom>
+          <a:noFill/>
+        </p:spPr>
+        <p:txBody>
+          <a:bodyPr wrap="square" lIns="0" tIns="0" rIns="0" bIns="0" anchor="t" rtlCol="0"/>
+          <a:lstStyle/>
+          <a:p>
+            <a:pPr algn="l">
+              <a:lnSpc>
+                <a:spcPct val="145000"/>
+              </a:lnSpc>
+            </a:pPr>
+            <a:r>
+              <a:rPr lang="ja-JP" altLang="en-US" sz="1200" b="1" spc="120">
+                <a:solidFill>
+                  <a:srgbClr val="14141A"/>
+                </a:solidFill>
+                <a:latin typeface="Yu Gothic"/>
+                <a:ea typeface="Yu Gothic"/>
+                <a:cs typeface="Yu Gothic"/>
+              </a:rPr>
+              <a:t>自由</a:t>
+            </a:r>
+          </a:p>
+        </p:txBody>
+      </p:sp>
+      <p:sp>
+        <p:nvSpPr>
+          <p:cNvPr id="10" name="TextBox 10"/>
+          <p:cNvSpPr txBox="1"/>
+          <p:nvPr/>
+        </p:nvSpPr>
+        <p:spPr>
+          <a:xfrm>
+            <a:off x="3573018" y="2414016"/>
+            <a:ext cx="2320290" cy="1005840"/>
+          </a:xfrm>
+          <a:prstGeom prst="rect">
+            <a:avLst/>
+          </a:prstGeom>
+          <a:noFill/>
+        </p:spPr>
+        <p:txBody>
+          <a:bodyPr wrap="square" lIns="0" tIns="0" rIns="0" bIns="0" anchor="t" rtlCol="0"/>
+          <a:lstStyle/>
+          <a:p>
+            <a:pPr algn="l">
+              <a:lnSpc>
+                <a:spcPct val="125000"/>
+              </a:lnSpc>
+            </a:pPr>
+            <a:r>
+              <a:rPr lang="ja-JP" altLang="en-US" sz="2200" b="1">
+                <a:solidFill>
+                  <a:srgbClr val="14141A"/>
+                </a:solidFill>
+                <a:latin typeface="Yu Gothic"/>
+                <a:ea typeface="Yu Gothic"/>
+                <a:cs typeface="Yu Gothic"/>
+              </a:rPr>
+              <a:t>ひとりの時間は</a:t>
+            </a:r>
+          </a:p>
+          <a:p>
+            <a:pPr algn="l">
+              <a:lnSpc>
+                <a:spcPct val="125000"/>
+              </a:lnSpc>
+            </a:pPr>
+            <a:r>
+              <a:rPr lang="ja-JP" altLang="en-US" sz="2200" b="1">
+                <a:solidFill>
+                  <a:srgbClr val="14141A"/>
+                </a:solidFill>
+                <a:latin typeface="Yu Gothic"/>
+                <a:ea typeface="Yu Gothic"/>
+                <a:cs typeface="Yu Gothic"/>
+              </a:rPr>
+              <a:t>制度で守ります</a:t>
+            </a:r>
+          </a:p>
+        </p:txBody>
+      </p:sp>
+      <p:sp>
+        <p:nvSpPr>
+          <p:cNvPr id="11" name="TextBox 11"/>
+          <p:cNvSpPr txBox="1"/>
+          <p:nvPr/>
+        </p:nvSpPr>
+        <p:spPr>
+          <a:xfrm>
+            <a:off x="3573018" y="3511296"/>
+            <a:ext cx="2320290" cy="1444752"/>
+          </a:xfrm>
+          <a:prstGeom prst="rect">
+            <a:avLst/>
+          </a:prstGeom>
+          <a:noFill/>
+        </p:spPr>
+        <p:txBody>
+          <a:bodyPr wrap="square" lIns="0" tIns="0" rIns="0" bIns="0" anchor="t" rtlCol="0"/>
+          <a:lstStyle/>
+          <a:p>
+            <a:pPr algn="l">
+              <a:lnSpc>
+                <a:spcPct val="155000"/>
+              </a:lnSpc>
+            </a:pPr>
+            <a:r>
+              <a:rPr lang="ja-JP" altLang="en-US" sz="1400" b="0">
+                <a:solidFill>
+                  <a:srgbClr val="14141A"/>
+                </a:solidFill>
+                <a:latin typeface="Yu Gothic"/>
+                <a:ea typeface="Yu Gothic"/>
+                <a:cs typeface="Yu Gothic"/>
+              </a:rPr>
+              <a:t>二人の家に自室を持ちます。週に一度は別行動でかまいません。</a:t>
+            </a:r>
+          </a:p>
+        </p:txBody>
+      </p:sp>
+      <p:sp>
+        <p:nvSpPr>
+          <p:cNvPr id="12" name="Shape 12"/>
+          <p:cNvSpPr/>
+          <p:nvPr/>
+        </p:nvSpPr>
+        <p:spPr>
+          <a:xfrm>
+            <a:off x="6304788" y="1773936"/>
+            <a:ext cx="2320290" cy="38100"/>
+          </a:xfrm>
+          <a:prstGeom prst="rect">
+            <a:avLst/>
+          </a:prstGeom>
+          <a:solidFill>
+            <a:srgbClr val="FF5C77"/>
+          </a:solidFill>
+          <a:ln>
+            <a:noFill/>
+          </a:ln>
+        </p:spPr>
+        <p:txBody>
+          <a:bodyPr wrap="square" lIns="0" tIns="0" rIns="0" bIns="0" anchor="ctr" rtlCol="0"/>
+          <a:lstStyle/>
+          <a:p/>
+        </p:txBody>
+      </p:sp>
+      <p:sp>
+        <p:nvSpPr>
+          <p:cNvPr id="13" name="TextBox 13"/>
+          <p:cNvSpPr txBox="1"/>
+          <p:nvPr/>
+        </p:nvSpPr>
+        <p:spPr>
+          <a:xfrm>
+            <a:off x="6304788" y="2002536"/>
+            <a:ext cx="2320290" cy="320040"/>
+          </a:xfrm>
+          <a:prstGeom prst="rect">
+            <a:avLst/>
+          </a:prstGeom>
+          <a:noFill/>
+        </p:spPr>
+        <p:txBody>
+          <a:bodyPr wrap="square" lIns="0" tIns="0" rIns="0" bIns="0" anchor="t" rtlCol="0"/>
+          <a:lstStyle/>
+          <a:p>
+            <a:pPr algn="l">
+              <a:lnSpc>
+                <a:spcPct val="145000"/>
+              </a:lnSpc>
+            </a:pPr>
+            <a:r>
+              <a:rPr lang="ja-JP" altLang="en-US" sz="1200" b="1" spc="120">
+                <a:solidFill>
+                  <a:srgbClr val="FF5C77"/>
+                </a:solidFill>
+                <a:latin typeface="Yu Gothic"/>
+                <a:ea typeface="Yu Gothic"/>
+                <a:cs typeface="Yu Gothic"/>
+              </a:rPr>
+              <a:t>家事</a:t>
+            </a:r>
+          </a:p>
+        </p:txBody>
+      </p:sp>
+      <p:sp>
+        <p:nvSpPr>
+          <p:cNvPr id="14" name="TextBox 14"/>
+          <p:cNvSpPr txBox="1"/>
+          <p:nvPr/>
+        </p:nvSpPr>
+        <p:spPr>
+          <a:xfrm>
+            <a:off x="6304788" y="2414016"/>
+            <a:ext cx="2320290" cy="1005840"/>
+          </a:xfrm>
+          <a:prstGeom prst="rect">
+            <a:avLst/>
+          </a:prstGeom>
+          <a:noFill/>
+        </p:spPr>
+        <p:txBody>
+          <a:bodyPr wrap="square" lIns="0" tIns="0" rIns="0" bIns="0" anchor="t" rtlCol="0"/>
+          <a:lstStyle/>
+          <a:p>
+            <a:pPr algn="l">
+              <a:lnSpc>
+                <a:spcPct val="125000"/>
+              </a:lnSpc>
+            </a:pPr>
+            <a:r>
+              <a:rPr lang="ja-JP" altLang="en-US" sz="2200" b="1">
+                <a:solidFill>
+                  <a:srgbClr val="14141A"/>
+                </a:solidFill>
+                <a:latin typeface="Yu Gothic"/>
+                <a:ea typeface="Yu Gothic"/>
+                <a:cs typeface="Yu Gothic"/>
+              </a:rPr>
+              <a:t>掃除は</a:t>
+            </a:r>
+          </a:p>
+          <a:p>
+            <a:pPr algn="l">
+              <a:lnSpc>
+                <a:spcPct val="125000"/>
+              </a:lnSpc>
+            </a:pPr>
+            <a:r>
+              <a:rPr lang="ja-JP" altLang="en-US" sz="2200" b="1">
+                <a:solidFill>
+                  <a:srgbClr val="14141A"/>
+                </a:solidFill>
+                <a:latin typeface="Yu Gothic"/>
+                <a:ea typeface="Yu Gothic"/>
+                <a:cs typeface="Yu Gothic"/>
+              </a:rPr>
+              <a:t>改善中です</a:t>
+            </a:r>
+          </a:p>
+        </p:txBody>
+      </p:sp>
+      <p:sp>
+        <p:nvSpPr>
+          <p:cNvPr id="15" name="TextBox 15"/>
+          <p:cNvSpPr txBox="1"/>
+          <p:nvPr/>
+        </p:nvSpPr>
+        <p:spPr>
+          <a:xfrm>
+            <a:off x="6304788" y="3511296"/>
+            <a:ext cx="2320290" cy="1444752"/>
+          </a:xfrm>
+          <a:prstGeom prst="rect">
+            <a:avLst/>
+          </a:prstGeom>
+          <a:noFill/>
+        </p:spPr>
+        <p:txBody>
+          <a:bodyPr wrap="square" lIns="0" tIns="0" rIns="0" bIns="0" anchor="t" rtlCol="0"/>
+          <a:lstStyle/>
+          <a:p>
+            <a:pPr algn="l">
+              <a:lnSpc>
+                <a:spcPct val="155000"/>
+              </a:lnSpc>
+            </a:pPr>
+            <a:r>
+              <a:rPr lang="ja-JP" altLang="en-US" sz="1400" b="0">
+                <a:solidFill>
+                  <a:srgbClr val="14141A"/>
+                </a:solidFill>
+                <a:latin typeface="Yu Gothic"/>
+                <a:ea typeface="Yu Gothic"/>
+                <a:cs typeface="Yu Gothic"/>
+              </a:rPr>
+              <a:t>得意なほうがやります。決まらないものは、外注も選択肢に入れます。</a:t>
+            </a:r>
+          </a:p>
+        </p:txBody>
+      </p:sp>
+      <p:sp>
+        <p:nvSpPr>
+          <p:cNvPr id="16" name="Shape 16"/>
+          <p:cNvSpPr/>
+          <p:nvPr/>
+        </p:nvSpPr>
+        <p:spPr>
+          <a:xfrm>
+            <a:off x="9036558" y="1773936"/>
+            <a:ext cx="2320290" cy="38100"/>
+          </a:xfrm>
+          <a:prstGeom prst="rect">
+            <a:avLst/>
+          </a:prstGeom>
+          <a:solidFill>
+            <a:srgbClr val="6C5CE7"/>
+          </a:solidFill>
+          <a:ln>
+            <a:noFill/>
+          </a:ln>
+        </p:spPr>
+        <p:txBody>
+          <a:bodyPr wrap="square" lIns="0" tIns="0" rIns="0" bIns="0" anchor="ctr" rtlCol="0"/>
+          <a:lstStyle/>
+          <a:p/>
+        </p:txBody>
+      </p:sp>
+      <p:sp>
+        <p:nvSpPr>
+          <p:cNvPr id="17" name="TextBox 17"/>
+          <p:cNvSpPr txBox="1"/>
+          <p:nvPr/>
+        </p:nvSpPr>
+        <p:spPr>
+          <a:xfrm>
+            <a:off x="9036558" y="2002536"/>
+            <a:ext cx="2320290" cy="320040"/>
+          </a:xfrm>
+          <a:prstGeom prst="rect">
+            <a:avLst/>
+          </a:prstGeom>
+          <a:noFill/>
+        </p:spPr>
+        <p:txBody>
+          <a:bodyPr wrap="square" lIns="0" tIns="0" rIns="0" bIns="0" anchor="t" rtlCol="0"/>
+          <a:lstStyle/>
+          <a:p>
+            <a:pPr algn="l">
+              <a:lnSpc>
+                <a:spcPct val="145000"/>
+              </a:lnSpc>
+            </a:pPr>
+            <a:r>
+              <a:rPr lang="ja-JP" altLang="en-US" sz="1200" b="1" spc="120">
+                <a:solidFill>
+                  <a:srgbClr val="6C5CE7"/>
+                </a:solidFill>
+                <a:latin typeface="Yu Gothic"/>
+                <a:ea typeface="Yu Gothic"/>
+                <a:cs typeface="Yu Gothic"/>
+              </a:rPr>
+              <a:t>ケンカ</a:t>
+            </a:r>
+          </a:p>
+        </p:txBody>
+      </p:sp>
+      <p:sp>
+        <p:nvSpPr>
+          <p:cNvPr id="18" name="TextBox 18"/>
+          <p:cNvSpPr txBox="1"/>
+          <p:nvPr/>
+        </p:nvSpPr>
+        <p:spPr>
+          <a:xfrm>
+            <a:off x="9036558" y="2414016"/>
+            <a:ext cx="2320290" cy="1005840"/>
+          </a:xfrm>
+          <a:prstGeom prst="rect">
+            <a:avLst/>
+          </a:prstGeom>
+          <a:noFill/>
+        </p:spPr>
+        <p:txBody>
+          <a:bodyPr wrap="square" lIns="0" tIns="0" rIns="0" bIns="0" anchor="t" rtlCol="0"/>
+          <a:lstStyle/>
+          <a:p>
+            <a:pPr algn="l">
+              <a:lnSpc>
+                <a:spcPct val="125000"/>
+              </a:lnSpc>
+            </a:pPr>
+            <a:r>
+              <a:rPr lang="ja-JP" altLang="en-US" sz="2200" b="1">
+                <a:solidFill>
+                  <a:srgbClr val="14141A"/>
+                </a:solidFill>
+                <a:latin typeface="Yu Gothic"/>
+                <a:ea typeface="Yu Gothic"/>
+                <a:cs typeface="Yu Gothic"/>
+              </a:rPr>
+              <a:t>片方が謝って</a:t>
+            </a:r>
+          </a:p>
+          <a:p>
+            <a:pPr algn="l">
+              <a:lnSpc>
+                <a:spcPct val="125000"/>
+              </a:lnSpc>
+            </a:pPr>
+            <a:r>
+              <a:rPr lang="ja-JP" altLang="en-US" sz="2200" b="1">
+                <a:solidFill>
+                  <a:srgbClr val="14141A"/>
+                </a:solidFill>
+                <a:latin typeface="Yu Gothic"/>
+                <a:ea typeface="Yu Gothic"/>
+                <a:cs typeface="Yu Gothic"/>
+              </a:rPr>
+              <a:t>終わります</a:t>
+            </a:r>
+          </a:p>
+        </p:txBody>
+      </p:sp>
+      <p:sp>
+        <p:nvSpPr>
+          <p:cNvPr id="19" name="TextBox 19"/>
+          <p:cNvSpPr txBox="1"/>
+          <p:nvPr/>
+        </p:nvSpPr>
+        <p:spPr>
+          <a:xfrm>
+            <a:off x="9036558" y="3511296"/>
+            <a:ext cx="2320290" cy="1444752"/>
+          </a:xfrm>
+          <a:prstGeom prst="rect">
+            <a:avLst/>
+          </a:prstGeom>
+          <a:noFill/>
+        </p:spPr>
+        <p:txBody>
+          <a:bodyPr wrap="square" lIns="0" tIns="0" rIns="0" bIns="0" anchor="t" rtlCol="0"/>
+          <a:lstStyle/>
+          <a:p>
+            <a:pPr algn="l">
+              <a:lnSpc>
+                <a:spcPct val="155000"/>
+              </a:lnSpc>
+            </a:pPr>
+            <a:r>
+              <a:rPr lang="ja-JP" altLang="en-US" sz="1400" b="0">
+                <a:solidFill>
+                  <a:srgbClr val="14141A"/>
+                </a:solidFill>
+                <a:latin typeface="Yu Gothic"/>
+                <a:ea typeface="Yu Gothic"/>
+                <a:cs typeface="Yu Gothic"/>
+              </a:rPr>
+              <a:t>今のやり方を変えません。翌日には持ち越しません。</a:t>
+            </a:r>
+          </a:p>
+        </p:txBody>
+      </p:sp>
+      <p:sp>
+        <p:nvSpPr>
+          <p:cNvPr id="20" name="TextBox 20"/>
+          <p:cNvSpPr txBox="1"/>
+          <p:nvPr/>
+        </p:nvSpPr>
+        <p:spPr>
+          <a:xfrm>
+            <a:off x="841248" y="5138928"/>
+            <a:ext cx="10515600" cy="914400"/>
+          </a:xfrm>
+          <a:prstGeom prst="rect">
+            <a:avLst/>
+          </a:prstGeom>
+          <a:noFill/>
+        </p:spPr>
+        <p:txBody>
+          <a:bodyPr wrap="square" lIns="0" tIns="0" rIns="0" bIns="0" anchor="b" rtlCol="0"/>
+          <a:lstStyle/>
+          <a:p>
+            <a:pPr algn="l">
+              <a:lnSpc>
+                <a:spcPct val="125000"/>
+              </a:lnSpc>
+            </a:pPr>
+            <a:r>
+              <a:rPr lang="ja-JP" altLang="en-US" sz="2800" b="1">
+                <a:solidFill>
+                  <a:srgbClr val="14141A"/>
+                </a:solidFill>
+                <a:latin typeface="Yu Gothic"/>
+                <a:ea typeface="Yu Gothic"/>
+                <a:cs typeface="Yu Gothic"/>
+              </a:rPr>
+              <a:t>変えないのは仕事、直すのは家事です。</a:t>
+            </a:r>
+          </a:p>
+        </p:txBody>
+      </p:sp>
+      <p:sp>
+        <p:nvSpPr>
+          <p:cNvPr id="21" name="TextBox 21"/>
+          <p:cNvSpPr txBox="1"/>
+          <p:nvPr/>
+        </p:nvSpPr>
+        <p:spPr>
+          <a:xfrm>
+            <a:off x="841248" y="6391656"/>
+            <a:ext cx="5486400" cy="274320"/>
+          </a:xfrm>
+          <a:prstGeom prst="rect">
+            <a:avLst/>
+          </a:prstGeom>
+          <a:noFill/>
+        </p:spPr>
+        <p:txBody>
+          <a:bodyPr wrap="square" lIns="0" tIns="0" rIns="0" bIns="0" anchor="t" rtlCol="0"/>
+          <a:lstStyle/>
+          <a:p>
+            <a:pPr algn="l">
+              <a:lnSpc>
+                <a:spcPct val="145000"/>
+              </a:lnSpc>
+            </a:pPr>
+            <a:r>
+              <a:rPr lang="ja-JP" altLang="en-US" sz="1000" b="0" spc="50">
+                <a:solidFill>
+                  <a:srgbClr val="A3A3AE"/>
+                </a:solidFill>
+                <a:latin typeface="Yu Gothic"/>
+                <a:ea typeface="Yu Gothic"/>
+                <a:cs typeface="Yu Gothic"/>
+              </a:rPr>
+              <a:t>ふたりの計画のご提案</a:t>
+            </a:r>
+          </a:p>
+        </p:txBody>
+      </p:sp>
+      <p:sp>
+        <p:nvSpPr>
+          <p:cNvPr id="22" name="TextBox 22"/>
+          <p:cNvSpPr txBox="1"/>
+          <p:nvPr/>
+        </p:nvSpPr>
+        <p:spPr>
+          <a:xfrm>
+            <a:off x="10436047" y="6373368"/>
+            <a:ext cx="914400" cy="274320"/>
+          </a:xfrm>
+          <a:prstGeom prst="rect">
+            <a:avLst/>
+          </a:prstGeom>
+          <a:noFill/>
+        </p:spPr>
+        <p:txBody>
+          <a:bodyPr wrap="square" lIns="0" tIns="0" rIns="0" bIns="0" anchor="t" rtlCol="0"/>
+          <a:lstStyle/>
+          <a:p>
+            <a:pPr algn="r">
+              <a:lnSpc>
+                <a:spcPct val="145000"/>
+              </a:lnSpc>
+            </a:pPr>
+            <a:r>
+              <a:rPr lang="ja-JP" altLang="en-US" sz="1200" b="1" spc="50">
+                <a:solidFill>
+                  <a:srgbClr val="A3A3AE"/>
+                </a:solidFill>
+                <a:latin typeface="Yu Gothic"/>
+                <a:ea typeface="Yu Gothic"/>
+                <a:cs typeface="Yu Gothic"/>
+              </a:rPr>
+              <a:t>24</a:t>
+            </a:r>
+          </a:p>
+        </p:txBody>
+      </p:sp>
+    </p:spTree>
+  </p:cSld>
+  <p:clrMapOvr>
+    <a:masterClrMapping/>
+  </p:clrMapOvr>
+</p:sld>
+</file>
+
+<file path=ppt/slides/slide25.xml><?xml version="1.0" encoding="utf-8"?>
 <p:sld xmlns:a="http://schemas.openxmlformats.org/drawingml/2006/main" xmlns:r="http://schemas.openxmlformats.org/officeDocument/2006/relationships" xmlns:p="http://schemas.openxmlformats.org/presentationml/2006/main">
   <p:cSld>
     <p:bg>

--- a/proposal/ふたりの計画のご提案.pptx
+++ b/proposal/ふたりの計画のご提案.pptx
@@ -1694,7 +1694,7 @@
     <p:bg>
       <p:bgPr>
         <a:solidFill>
-          <a:srgbClr val="FFD93D"/>
+          <a:srgbClr val="FFF1F4"/>
         </a:solidFill>
         <a:effectLst/>
       </p:bgPr>
@@ -1715,7 +1715,250 @@
       </p:grpSpPr>
       <p:sp>
         <p:nvSpPr>
-          <p:cNvPr id="2" name="TextBox 2"/>
+          <p:cNvPr id="2" name="Shape 2"/>
+          <p:cNvSpPr/>
+          <p:nvPr/>
+        </p:nvSpPr>
+        <p:spPr>
+          <a:xfrm>
+            <a:off x="8130323" y="160020"/>
+            <a:ext cx="1051560" cy="1051560"/>
+          </a:xfrm>
+          <a:prstGeom prst="heart">
+            <a:avLst/>
+          </a:prstGeom>
+          <a:solidFill>
+            <a:srgbClr val="FFC1CB"/>
+          </a:solidFill>
+          <a:ln>
+            <a:noFill/>
+          </a:ln>
+        </p:spPr>
+        <p:txBody>
+          <a:bodyPr wrap="square" lIns="0" tIns="0" rIns="0" bIns="0" anchor="ctr" rtlCol="0"/>
+          <a:lstStyle/>
+          <a:p/>
+        </p:txBody>
+      </p:sp>
+      <p:sp>
+        <p:nvSpPr>
+          <p:cNvPr id="3" name="Shape 3"/>
+          <p:cNvSpPr/>
+          <p:nvPr/>
+        </p:nvSpPr>
+        <p:spPr>
+          <a:xfrm>
+            <a:off x="10445227" y="1773936"/>
+            <a:ext cx="566928" cy="566928"/>
+          </a:xfrm>
+          <a:prstGeom prst="heart">
+            <a:avLst/>
+          </a:prstGeom>
+          <a:solidFill>
+            <a:srgbClr val="FF99AA"/>
+          </a:solidFill>
+          <a:ln>
+            <a:noFill/>
+          </a:ln>
+        </p:spPr>
+        <p:txBody>
+          <a:bodyPr wrap="square" lIns="0" tIns="0" rIns="0" bIns="0" anchor="ctr" rtlCol="0"/>
+          <a:lstStyle/>
+          <a:p/>
+        </p:txBody>
+      </p:sp>
+      <p:sp>
+        <p:nvSpPr>
+          <p:cNvPr id="4" name="Shape 4"/>
+          <p:cNvSpPr/>
+          <p:nvPr/>
+        </p:nvSpPr>
+        <p:spPr>
+          <a:xfrm>
+            <a:off x="9210815" y="3214116"/>
+            <a:ext cx="841248" cy="841248"/>
+          </a:xfrm>
+          <a:prstGeom prst="heart">
+            <a:avLst/>
+          </a:prstGeom>
+          <a:solidFill>
+            <a:srgbClr val="FF99AA"/>
+          </a:solidFill>
+          <a:ln>
+            <a:noFill/>
+          </a:ln>
+        </p:spPr>
+        <p:txBody>
+          <a:bodyPr wrap="square" lIns="0" tIns="0" rIns="0" bIns="0" anchor="ctr" rtlCol="0"/>
+          <a:lstStyle/>
+          <a:p/>
+        </p:txBody>
+      </p:sp>
+      <p:sp>
+        <p:nvSpPr>
+          <p:cNvPr id="5" name="Shape 5"/>
+          <p:cNvSpPr/>
+          <p:nvPr/>
+        </p:nvSpPr>
+        <p:spPr>
+          <a:xfrm>
+            <a:off x="11240737" y="4649724"/>
+            <a:ext cx="438912" cy="438912"/>
+          </a:xfrm>
+          <a:prstGeom prst="heart">
+            <a:avLst/>
+          </a:prstGeom>
+          <a:solidFill>
+            <a:srgbClr val="FFC1CB"/>
+          </a:solidFill>
+          <a:ln>
+            <a:noFill/>
+          </a:ln>
+        </p:spPr>
+        <p:txBody>
+          <a:bodyPr wrap="square" lIns="0" tIns="0" rIns="0" bIns="0" anchor="ctr" rtlCol="0"/>
+          <a:lstStyle/>
+          <a:p/>
+        </p:txBody>
+      </p:sp>
+      <p:sp>
+        <p:nvSpPr>
+          <p:cNvPr id="6" name="Shape 6"/>
+          <p:cNvSpPr/>
+          <p:nvPr/>
+        </p:nvSpPr>
+        <p:spPr>
+          <a:xfrm>
+            <a:off x="7622849" y="5116068"/>
+            <a:ext cx="603504" cy="603504"/>
+          </a:xfrm>
+          <a:prstGeom prst="heart">
+            <a:avLst/>
+          </a:prstGeom>
+          <a:solidFill>
+            <a:srgbClr val="FFC1CB"/>
+          </a:solidFill>
+          <a:ln>
+            <a:noFill/>
+          </a:ln>
+        </p:spPr>
+        <p:txBody>
+          <a:bodyPr wrap="square" lIns="0" tIns="0" rIns="0" bIns="0" anchor="ctr" rtlCol="0"/>
+          <a:lstStyle/>
+          <a:p/>
+        </p:txBody>
+      </p:sp>
+      <p:sp>
+        <p:nvSpPr>
+          <p:cNvPr id="7" name="Shape 7"/>
+          <p:cNvSpPr/>
+          <p:nvPr/>
+        </p:nvSpPr>
+        <p:spPr>
+          <a:xfrm>
+            <a:off x="281927" y="205740"/>
+            <a:ext cx="411480" cy="411480"/>
+          </a:xfrm>
+          <a:prstGeom prst="heart">
+            <a:avLst/>
+          </a:prstGeom>
+          <a:solidFill>
+            <a:srgbClr val="FF99AA"/>
+          </a:solidFill>
+          <a:ln>
+            <a:noFill/>
+          </a:ln>
+        </p:spPr>
+        <p:txBody>
+          <a:bodyPr wrap="square" lIns="0" tIns="0" rIns="0" bIns="0" anchor="ctr" rtlCol="0"/>
+          <a:lstStyle/>
+          <a:p/>
+        </p:txBody>
+      </p:sp>
+      <p:sp>
+        <p:nvSpPr>
+          <p:cNvPr id="8" name="Shape 8"/>
+          <p:cNvSpPr/>
+          <p:nvPr/>
+        </p:nvSpPr>
+        <p:spPr>
+          <a:xfrm>
+            <a:off x="1700738" y="77724"/>
+            <a:ext cx="256032" cy="256032"/>
+          </a:xfrm>
+          <a:prstGeom prst="heart">
+            <a:avLst/>
+          </a:prstGeom>
+          <a:solidFill>
+            <a:srgbClr val="FFC1CB"/>
+          </a:solidFill>
+          <a:ln>
+            <a:noFill/>
+          </a:ln>
+        </p:spPr>
+        <p:txBody>
+          <a:bodyPr wrap="square" lIns="0" tIns="0" rIns="0" bIns="0" anchor="ctr" rtlCol="0"/>
+          <a:lstStyle/>
+          <a:p/>
+        </p:txBody>
+      </p:sp>
+      <p:sp>
+        <p:nvSpPr>
+          <p:cNvPr id="9" name="Shape 9"/>
+          <p:cNvSpPr/>
+          <p:nvPr/>
+        </p:nvSpPr>
+        <p:spPr>
+          <a:xfrm>
+            <a:off x="36566" y="3922776"/>
+            <a:ext cx="658368" cy="658368"/>
+          </a:xfrm>
+          <a:prstGeom prst="heart">
+            <a:avLst/>
+          </a:prstGeom>
+          <a:solidFill>
+            <a:srgbClr val="FFC1CB"/>
+          </a:solidFill>
+          <a:ln>
+            <a:noFill/>
+          </a:ln>
+        </p:spPr>
+        <p:txBody>
+          <a:bodyPr wrap="square" lIns="0" tIns="0" rIns="0" bIns="0" anchor="ctr" rtlCol="0"/>
+          <a:lstStyle/>
+          <a:p/>
+        </p:txBody>
+      </p:sp>
+      <p:sp>
+        <p:nvSpPr>
+          <p:cNvPr id="10" name="Shape 10"/>
+          <p:cNvSpPr/>
+          <p:nvPr/>
+        </p:nvSpPr>
+        <p:spPr>
+          <a:xfrm>
+            <a:off x="5199753" y="6281928"/>
+            <a:ext cx="329184" cy="329184"/>
+          </a:xfrm>
+          <a:prstGeom prst="heart">
+            <a:avLst/>
+          </a:prstGeom>
+          <a:solidFill>
+            <a:srgbClr val="FF99AA"/>
+          </a:solidFill>
+          <a:ln>
+            <a:noFill/>
+          </a:ln>
+        </p:spPr>
+        <p:txBody>
+          <a:bodyPr wrap="square" lIns="0" tIns="0" rIns="0" bIns="0" anchor="ctr" rtlCol="0"/>
+          <a:lstStyle/>
+          <a:p/>
+        </p:txBody>
+      </p:sp>
+      <p:sp>
+        <p:nvSpPr>
+          <p:cNvPr id="11" name="TextBox 11"/>
           <p:cNvSpPr txBox="1"/>
           <p:nvPr/>
         </p:nvSpPr>
@@ -1741,7 +1984,7 @@
             <a:r>
               <a:rPr lang="ja-JP" altLang="en-US" sz="1400" b="1" spc="150">
                 <a:solidFill>
-                  <a:srgbClr val="14141A"/>
+                  <a:srgbClr val="C9184A"/>
                 </a:solidFill>
                 <a:latin typeface="Yu Gothic"/>
                 <a:ea typeface="Yu Gothic"/>
@@ -1754,37 +1997,37 @@
       </p:sp>
       <p:sp>
         <p:nvSpPr>
-          <p:cNvPr id="3" name="TextBox 3"/>
+          <p:cNvPr id="12" name="TextBox 12"/>
           <p:cNvSpPr txBox="1"/>
           <p:nvPr/>
         </p:nvSpPr>
         <p:spPr>
           <a:xfrm>
             <a:off x="841248" y="1371600"/>
-            <a:ext cx="10515600" cy="3931920"/>
-          </a:xfrm>
-          <a:prstGeom prst="rect">
-            <a:avLst/>
-          </a:prstGeom>
-          <a:noFill/>
-        </p:spPr>
-        <p:txBody>
-          <a:bodyPr wrap="square" lIns="0" tIns="0" rIns="0" bIns="0" anchor="ctr" rtlCol="0"/>
-          <a:lstStyle/>
-          <a:p>
-            <a:pPr algn="l">
-              <a:lnSpc>
-                <a:spcPct val="105000"/>
+            <a:ext cx="7863840" cy="3931920"/>
+          </a:xfrm>
+          <a:prstGeom prst="rect">
+            <a:avLst/>
+          </a:prstGeom>
+          <a:noFill/>
+        </p:spPr>
+        <p:txBody>
+          <a:bodyPr wrap="square" lIns="0" tIns="0" rIns="0" bIns="0" anchor="ctr" rtlCol="0"/>
+          <a:lstStyle/>
+          <a:p>
+            <a:pPr algn="l">
+              <a:lnSpc>
+                <a:spcPct val="108000"/>
               </a:lnSpc>
             </a:pPr>
             <a:r>
               <a:rPr lang="ja-JP" altLang="en-US" sz="8000" b="1">
                 <a:solidFill>
-                  <a:srgbClr val="14141A"/>
-                </a:solidFill>
-                <a:latin typeface="Yu Gothic"/>
-                <a:ea typeface="Yu Gothic"/>
-                <a:cs typeface="Yu Gothic"/>
+                  <a:srgbClr val="C9184A"/>
+                </a:solidFill>
+                <a:latin typeface="Hiragino Maru Gothic ProN"/>
+                <a:ea typeface="Hiragino Maru Gothic ProN"/>
+                <a:cs typeface="Hiragino Maru Gothic ProN"/>
               </a:rPr>
               <a:t>ふたりの計画の</a:t>
             </a:r>
@@ -1792,17 +2035,17 @@
           <a:p>
             <a:pPr algn="l">
               <a:lnSpc>
-                <a:spcPct val="105000"/>
+                <a:spcPct val="108000"/>
               </a:lnSpc>
             </a:pPr>
             <a:r>
               <a:rPr lang="ja-JP" altLang="en-US" sz="8000" b="1">
                 <a:solidFill>
-                  <a:srgbClr val="14141A"/>
-                </a:solidFill>
-                <a:latin typeface="Yu Gothic"/>
-                <a:ea typeface="Yu Gothic"/>
-                <a:cs typeface="Yu Gothic"/>
+                  <a:srgbClr val="C9184A"/>
+                </a:solidFill>
+                <a:latin typeface="Hiragino Maru Gothic ProN"/>
+                <a:ea typeface="Hiragino Maru Gothic ProN"/>
+                <a:cs typeface="Hiragino Maru Gothic ProN"/>
               </a:rPr>
               <a:t>ご提案</a:t>
             </a:r>
@@ -1811,14 +2054,14 @@
       </p:sp>
       <p:sp>
         <p:nvSpPr>
-          <p:cNvPr id="4" name="TextBox 4"/>
+          <p:cNvPr id="13" name="TextBox 13"/>
           <p:cNvSpPr txBox="1"/>
           <p:nvPr/>
         </p:nvSpPr>
         <p:spPr>
           <a:xfrm>
             <a:off x="841248" y="5212080"/>
-            <a:ext cx="10515600" cy="457200"/>
+            <a:ext cx="7863840" cy="457200"/>
           </a:xfrm>
           <a:prstGeom prst="rect">
             <a:avLst/>
@@ -1839,9 +2082,9 @@
                 <a:solidFill>
                   <a:srgbClr val="14141A"/>
                 </a:solidFill>
-                <a:latin typeface="Yu Gothic Medium"/>
-                <a:ea typeface="Yu Gothic Medium"/>
-                <a:cs typeface="Yu Gothic Medium"/>
+                <a:latin typeface="Hiragino Maru Gothic ProN"/>
+                <a:ea typeface="Hiragino Maru Gothic ProN"/>
+                <a:cs typeface="Hiragino Maru Gothic ProN"/>
               </a:rPr>
               <a:t>2026 → 2029 のたたき台です。</a:t>
             </a:r>
@@ -1850,7 +2093,7 @@
       </p:sp>
       <p:sp>
         <p:nvSpPr>
-          <p:cNvPr id="5" name="TextBox 5"/>
+          <p:cNvPr id="14" name="TextBox 14"/>
           <p:cNvSpPr txBox="1"/>
           <p:nvPr/>
         </p:nvSpPr>
@@ -1876,7 +2119,7 @@
             <a:r>
               <a:rPr lang="ja-JP" altLang="en-US" sz="1300" b="1" spc="120">
                 <a:solidFill>
-                  <a:srgbClr val="14141A"/>
+                  <a:srgbClr val="6B6B76"/>
                 </a:solidFill>
                 <a:latin typeface="Yu Gothic"/>
                 <a:ea typeface="Yu Gothic"/>
@@ -2189,7 +2432,250 @@
       </p:grpSpPr>
       <p:sp>
         <p:nvSpPr>
-          <p:cNvPr id="2" name="TextBox 2"/>
+          <p:cNvPr id="2" name="Shape 2"/>
+          <p:cNvSpPr/>
+          <p:nvPr/>
+        </p:nvSpPr>
+        <p:spPr>
+          <a:xfrm>
+            <a:off x="8130323" y="160020"/>
+            <a:ext cx="1051560" cy="1051560"/>
+          </a:xfrm>
+          <a:prstGeom prst="heart">
+            <a:avLst/>
+          </a:prstGeom>
+          <a:solidFill>
+            <a:srgbClr val="FFBAC5"/>
+          </a:solidFill>
+          <a:ln>
+            <a:noFill/>
+          </a:ln>
+        </p:spPr>
+        <p:txBody>
+          <a:bodyPr wrap="square" lIns="0" tIns="0" rIns="0" bIns="0" anchor="ctr" rtlCol="0"/>
+          <a:lstStyle/>
+          <a:p/>
+        </p:txBody>
+      </p:sp>
+      <p:sp>
+        <p:nvSpPr>
+          <p:cNvPr id="3" name="Shape 3"/>
+          <p:cNvSpPr/>
+          <p:nvPr/>
+        </p:nvSpPr>
+        <p:spPr>
+          <a:xfrm>
+            <a:off x="10445227" y="1773936"/>
+            <a:ext cx="566928" cy="566928"/>
+          </a:xfrm>
+          <a:prstGeom prst="heart">
+            <a:avLst/>
+          </a:prstGeom>
+          <a:solidFill>
+            <a:srgbClr val="FF93A5"/>
+          </a:solidFill>
+          <a:ln>
+            <a:noFill/>
+          </a:ln>
+        </p:spPr>
+        <p:txBody>
+          <a:bodyPr wrap="square" lIns="0" tIns="0" rIns="0" bIns="0" anchor="ctr" rtlCol="0"/>
+          <a:lstStyle/>
+          <a:p/>
+        </p:txBody>
+      </p:sp>
+      <p:sp>
+        <p:nvSpPr>
+          <p:cNvPr id="4" name="Shape 4"/>
+          <p:cNvSpPr/>
+          <p:nvPr/>
+        </p:nvSpPr>
+        <p:spPr>
+          <a:xfrm>
+            <a:off x="9210815" y="3214116"/>
+            <a:ext cx="841248" cy="841248"/>
+          </a:xfrm>
+          <a:prstGeom prst="heart">
+            <a:avLst/>
+          </a:prstGeom>
+          <a:solidFill>
+            <a:srgbClr val="FF93A5"/>
+          </a:solidFill>
+          <a:ln>
+            <a:noFill/>
+          </a:ln>
+        </p:spPr>
+        <p:txBody>
+          <a:bodyPr wrap="square" lIns="0" tIns="0" rIns="0" bIns="0" anchor="ctr" rtlCol="0"/>
+          <a:lstStyle/>
+          <a:p/>
+        </p:txBody>
+      </p:sp>
+      <p:sp>
+        <p:nvSpPr>
+          <p:cNvPr id="5" name="Shape 5"/>
+          <p:cNvSpPr/>
+          <p:nvPr/>
+        </p:nvSpPr>
+        <p:spPr>
+          <a:xfrm>
+            <a:off x="11240737" y="4649724"/>
+            <a:ext cx="438912" cy="438912"/>
+          </a:xfrm>
+          <a:prstGeom prst="heart">
+            <a:avLst/>
+          </a:prstGeom>
+          <a:solidFill>
+            <a:srgbClr val="FFBAC5"/>
+          </a:solidFill>
+          <a:ln>
+            <a:noFill/>
+          </a:ln>
+        </p:spPr>
+        <p:txBody>
+          <a:bodyPr wrap="square" lIns="0" tIns="0" rIns="0" bIns="0" anchor="ctr" rtlCol="0"/>
+          <a:lstStyle/>
+          <a:p/>
+        </p:txBody>
+      </p:sp>
+      <p:sp>
+        <p:nvSpPr>
+          <p:cNvPr id="6" name="Shape 6"/>
+          <p:cNvSpPr/>
+          <p:nvPr/>
+        </p:nvSpPr>
+        <p:spPr>
+          <a:xfrm>
+            <a:off x="7622849" y="5116068"/>
+            <a:ext cx="603504" cy="603504"/>
+          </a:xfrm>
+          <a:prstGeom prst="heart">
+            <a:avLst/>
+          </a:prstGeom>
+          <a:solidFill>
+            <a:srgbClr val="FFBAC5"/>
+          </a:solidFill>
+          <a:ln>
+            <a:noFill/>
+          </a:ln>
+        </p:spPr>
+        <p:txBody>
+          <a:bodyPr wrap="square" lIns="0" tIns="0" rIns="0" bIns="0" anchor="ctr" rtlCol="0"/>
+          <a:lstStyle/>
+          <a:p/>
+        </p:txBody>
+      </p:sp>
+      <p:sp>
+        <p:nvSpPr>
+          <p:cNvPr id="7" name="Shape 7"/>
+          <p:cNvSpPr/>
+          <p:nvPr/>
+        </p:nvSpPr>
+        <p:spPr>
+          <a:xfrm>
+            <a:off x="281927" y="205740"/>
+            <a:ext cx="411480" cy="411480"/>
+          </a:xfrm>
+          <a:prstGeom prst="heart">
+            <a:avLst/>
+          </a:prstGeom>
+          <a:solidFill>
+            <a:srgbClr val="FF93A5"/>
+          </a:solidFill>
+          <a:ln>
+            <a:noFill/>
+          </a:ln>
+        </p:spPr>
+        <p:txBody>
+          <a:bodyPr wrap="square" lIns="0" tIns="0" rIns="0" bIns="0" anchor="ctr" rtlCol="0"/>
+          <a:lstStyle/>
+          <a:p/>
+        </p:txBody>
+      </p:sp>
+      <p:sp>
+        <p:nvSpPr>
+          <p:cNvPr id="8" name="Shape 8"/>
+          <p:cNvSpPr/>
+          <p:nvPr/>
+        </p:nvSpPr>
+        <p:spPr>
+          <a:xfrm>
+            <a:off x="1700738" y="77724"/>
+            <a:ext cx="256032" cy="256032"/>
+          </a:xfrm>
+          <a:prstGeom prst="heart">
+            <a:avLst/>
+          </a:prstGeom>
+          <a:solidFill>
+            <a:srgbClr val="FFBAC5"/>
+          </a:solidFill>
+          <a:ln>
+            <a:noFill/>
+          </a:ln>
+        </p:spPr>
+        <p:txBody>
+          <a:bodyPr wrap="square" lIns="0" tIns="0" rIns="0" bIns="0" anchor="ctr" rtlCol="0"/>
+          <a:lstStyle/>
+          <a:p/>
+        </p:txBody>
+      </p:sp>
+      <p:sp>
+        <p:nvSpPr>
+          <p:cNvPr id="9" name="Shape 9"/>
+          <p:cNvSpPr/>
+          <p:nvPr/>
+        </p:nvSpPr>
+        <p:spPr>
+          <a:xfrm>
+            <a:off x="36566" y="3922776"/>
+            <a:ext cx="658368" cy="658368"/>
+          </a:xfrm>
+          <a:prstGeom prst="heart">
+            <a:avLst/>
+          </a:prstGeom>
+          <a:solidFill>
+            <a:srgbClr val="FFBAC5"/>
+          </a:solidFill>
+          <a:ln>
+            <a:noFill/>
+          </a:ln>
+        </p:spPr>
+        <p:txBody>
+          <a:bodyPr wrap="square" lIns="0" tIns="0" rIns="0" bIns="0" anchor="ctr" rtlCol="0"/>
+          <a:lstStyle/>
+          <a:p/>
+        </p:txBody>
+      </p:sp>
+      <p:sp>
+        <p:nvSpPr>
+          <p:cNvPr id="10" name="Shape 10"/>
+          <p:cNvSpPr/>
+          <p:nvPr/>
+        </p:nvSpPr>
+        <p:spPr>
+          <a:xfrm>
+            <a:off x="5199753" y="6281928"/>
+            <a:ext cx="329184" cy="329184"/>
+          </a:xfrm>
+          <a:prstGeom prst="heart">
+            <a:avLst/>
+          </a:prstGeom>
+          <a:solidFill>
+            <a:srgbClr val="FF93A5"/>
+          </a:solidFill>
+          <a:ln>
+            <a:noFill/>
+          </a:ln>
+        </p:spPr>
+        <p:txBody>
+          <a:bodyPr wrap="square" lIns="0" tIns="0" rIns="0" bIns="0" anchor="ctr" rtlCol="0"/>
+          <a:lstStyle/>
+          <a:p/>
+        </p:txBody>
+      </p:sp>
+      <p:sp>
+        <p:nvSpPr>
+          <p:cNvPr id="11" name="TextBox 11"/>
           <p:cNvSpPr txBox="1"/>
           <p:nvPr/>
         </p:nvSpPr>
@@ -2228,7 +2714,7 @@
       </p:sp>
       <p:sp>
         <p:nvSpPr>
-          <p:cNvPr id="3" name="TextBox 3"/>
+          <p:cNvPr id="12" name="TextBox 12"/>
           <p:cNvSpPr txBox="1"/>
           <p:nvPr/>
         </p:nvSpPr>
@@ -2256,9 +2742,9 @@
                 <a:solidFill>
                   <a:srgbClr val="FFFFFF"/>
                 </a:solidFill>
-                <a:latin typeface="Yu Gothic"/>
-                <a:ea typeface="Yu Gothic"/>
-                <a:cs typeface="Yu Gothic"/>
+                <a:latin typeface="Hiragino Maru Gothic ProN"/>
+                <a:ea typeface="Hiragino Maru Gothic ProN"/>
+                <a:cs typeface="Hiragino Maru Gothic ProN"/>
               </a:rPr>
               <a:t>お互いについて</a:t>
             </a:r>
@@ -2267,7 +2753,7 @@
       </p:sp>
       <p:sp>
         <p:nvSpPr>
-          <p:cNvPr id="4" name="TextBox 4"/>
+          <p:cNvPr id="13" name="TextBox 13"/>
           <p:cNvSpPr txBox="1"/>
           <p:nvPr/>
         </p:nvSpPr>
@@ -3140,7 +3626,250 @@
       </p:grpSpPr>
       <p:sp>
         <p:nvSpPr>
-          <p:cNvPr id="2" name="TextBox 2"/>
+          <p:cNvPr id="2" name="Shape 2"/>
+          <p:cNvSpPr/>
+          <p:nvPr/>
+        </p:nvSpPr>
+        <p:spPr>
+          <a:xfrm>
+            <a:off x="8130323" y="160020"/>
+            <a:ext cx="1051560" cy="1051560"/>
+          </a:xfrm>
+          <a:prstGeom prst="heart">
+            <a:avLst/>
+          </a:prstGeom>
+          <a:solidFill>
+            <a:srgbClr val="93E6DF"/>
+          </a:solidFill>
+          <a:ln>
+            <a:noFill/>
+          </a:ln>
+        </p:spPr>
+        <p:txBody>
+          <a:bodyPr wrap="square" lIns="0" tIns="0" rIns="0" bIns="0" anchor="ctr" rtlCol="0"/>
+          <a:lstStyle/>
+          <a:p/>
+        </p:txBody>
+      </p:sp>
+      <p:sp>
+        <p:nvSpPr>
+          <p:cNvPr id="3" name="Shape 3"/>
+          <p:cNvSpPr/>
+          <p:nvPr/>
+        </p:nvSpPr>
+        <p:spPr>
+          <a:xfrm>
+            <a:off x="10445227" y="1773936"/>
+            <a:ext cx="566928" cy="566928"/>
+          </a:xfrm>
+          <a:prstGeom prst="heart">
+            <a:avLst/>
+          </a:prstGeom>
+          <a:solidFill>
+            <a:srgbClr val="56D8CC"/>
+          </a:solidFill>
+          <a:ln>
+            <a:noFill/>
+          </a:ln>
+        </p:spPr>
+        <p:txBody>
+          <a:bodyPr wrap="square" lIns="0" tIns="0" rIns="0" bIns="0" anchor="ctr" rtlCol="0"/>
+          <a:lstStyle/>
+          <a:p/>
+        </p:txBody>
+      </p:sp>
+      <p:sp>
+        <p:nvSpPr>
+          <p:cNvPr id="4" name="Shape 4"/>
+          <p:cNvSpPr/>
+          <p:nvPr/>
+        </p:nvSpPr>
+        <p:spPr>
+          <a:xfrm>
+            <a:off x="9210815" y="3214116"/>
+            <a:ext cx="841248" cy="841248"/>
+          </a:xfrm>
+          <a:prstGeom prst="heart">
+            <a:avLst/>
+          </a:prstGeom>
+          <a:solidFill>
+            <a:srgbClr val="56D8CC"/>
+          </a:solidFill>
+          <a:ln>
+            <a:noFill/>
+          </a:ln>
+        </p:spPr>
+        <p:txBody>
+          <a:bodyPr wrap="square" lIns="0" tIns="0" rIns="0" bIns="0" anchor="ctr" rtlCol="0"/>
+          <a:lstStyle/>
+          <a:p/>
+        </p:txBody>
+      </p:sp>
+      <p:sp>
+        <p:nvSpPr>
+          <p:cNvPr id="5" name="Shape 5"/>
+          <p:cNvSpPr/>
+          <p:nvPr/>
+        </p:nvSpPr>
+        <p:spPr>
+          <a:xfrm>
+            <a:off x="11240737" y="4649724"/>
+            <a:ext cx="438912" cy="438912"/>
+          </a:xfrm>
+          <a:prstGeom prst="heart">
+            <a:avLst/>
+          </a:prstGeom>
+          <a:solidFill>
+            <a:srgbClr val="93E6DF"/>
+          </a:solidFill>
+          <a:ln>
+            <a:noFill/>
+          </a:ln>
+        </p:spPr>
+        <p:txBody>
+          <a:bodyPr wrap="square" lIns="0" tIns="0" rIns="0" bIns="0" anchor="ctr" rtlCol="0"/>
+          <a:lstStyle/>
+          <a:p/>
+        </p:txBody>
+      </p:sp>
+      <p:sp>
+        <p:nvSpPr>
+          <p:cNvPr id="6" name="Shape 6"/>
+          <p:cNvSpPr/>
+          <p:nvPr/>
+        </p:nvSpPr>
+        <p:spPr>
+          <a:xfrm>
+            <a:off x="7622849" y="5116068"/>
+            <a:ext cx="603504" cy="603504"/>
+          </a:xfrm>
+          <a:prstGeom prst="heart">
+            <a:avLst/>
+          </a:prstGeom>
+          <a:solidFill>
+            <a:srgbClr val="93E6DF"/>
+          </a:solidFill>
+          <a:ln>
+            <a:noFill/>
+          </a:ln>
+        </p:spPr>
+        <p:txBody>
+          <a:bodyPr wrap="square" lIns="0" tIns="0" rIns="0" bIns="0" anchor="ctr" rtlCol="0"/>
+          <a:lstStyle/>
+          <a:p/>
+        </p:txBody>
+      </p:sp>
+      <p:sp>
+        <p:nvSpPr>
+          <p:cNvPr id="7" name="Shape 7"/>
+          <p:cNvSpPr/>
+          <p:nvPr/>
+        </p:nvSpPr>
+        <p:spPr>
+          <a:xfrm>
+            <a:off x="281927" y="205740"/>
+            <a:ext cx="411480" cy="411480"/>
+          </a:xfrm>
+          <a:prstGeom prst="heart">
+            <a:avLst/>
+          </a:prstGeom>
+          <a:solidFill>
+            <a:srgbClr val="56D8CC"/>
+          </a:solidFill>
+          <a:ln>
+            <a:noFill/>
+          </a:ln>
+        </p:spPr>
+        <p:txBody>
+          <a:bodyPr wrap="square" lIns="0" tIns="0" rIns="0" bIns="0" anchor="ctr" rtlCol="0"/>
+          <a:lstStyle/>
+          <a:p/>
+        </p:txBody>
+      </p:sp>
+      <p:sp>
+        <p:nvSpPr>
+          <p:cNvPr id="8" name="Shape 8"/>
+          <p:cNvSpPr/>
+          <p:nvPr/>
+        </p:nvSpPr>
+        <p:spPr>
+          <a:xfrm>
+            <a:off x="1700738" y="77724"/>
+            <a:ext cx="256032" cy="256032"/>
+          </a:xfrm>
+          <a:prstGeom prst="heart">
+            <a:avLst/>
+          </a:prstGeom>
+          <a:solidFill>
+            <a:srgbClr val="93E6DF"/>
+          </a:solidFill>
+          <a:ln>
+            <a:noFill/>
+          </a:ln>
+        </p:spPr>
+        <p:txBody>
+          <a:bodyPr wrap="square" lIns="0" tIns="0" rIns="0" bIns="0" anchor="ctr" rtlCol="0"/>
+          <a:lstStyle/>
+          <a:p/>
+        </p:txBody>
+      </p:sp>
+      <p:sp>
+        <p:nvSpPr>
+          <p:cNvPr id="9" name="Shape 9"/>
+          <p:cNvSpPr/>
+          <p:nvPr/>
+        </p:nvSpPr>
+        <p:spPr>
+          <a:xfrm>
+            <a:off x="36566" y="3922776"/>
+            <a:ext cx="658368" cy="658368"/>
+          </a:xfrm>
+          <a:prstGeom prst="heart">
+            <a:avLst/>
+          </a:prstGeom>
+          <a:solidFill>
+            <a:srgbClr val="93E6DF"/>
+          </a:solidFill>
+          <a:ln>
+            <a:noFill/>
+          </a:ln>
+        </p:spPr>
+        <p:txBody>
+          <a:bodyPr wrap="square" lIns="0" tIns="0" rIns="0" bIns="0" anchor="ctr" rtlCol="0"/>
+          <a:lstStyle/>
+          <a:p/>
+        </p:txBody>
+      </p:sp>
+      <p:sp>
+        <p:nvSpPr>
+          <p:cNvPr id="10" name="Shape 10"/>
+          <p:cNvSpPr/>
+          <p:nvPr/>
+        </p:nvSpPr>
+        <p:spPr>
+          <a:xfrm>
+            <a:off x="5199753" y="6281928"/>
+            <a:ext cx="329184" cy="329184"/>
+          </a:xfrm>
+          <a:prstGeom prst="heart">
+            <a:avLst/>
+          </a:prstGeom>
+          <a:solidFill>
+            <a:srgbClr val="56D8CC"/>
+          </a:solidFill>
+          <a:ln>
+            <a:noFill/>
+          </a:ln>
+        </p:spPr>
+        <p:txBody>
+          <a:bodyPr wrap="square" lIns="0" tIns="0" rIns="0" bIns="0" anchor="ctr" rtlCol="0"/>
+          <a:lstStyle/>
+          <a:p/>
+        </p:txBody>
+      </p:sp>
+      <p:sp>
+        <p:nvSpPr>
+          <p:cNvPr id="11" name="TextBox 11"/>
           <p:cNvSpPr txBox="1"/>
           <p:nvPr/>
         </p:nvSpPr>
@@ -3179,7 +3908,7 @@
       </p:sp>
       <p:sp>
         <p:nvSpPr>
-          <p:cNvPr id="3" name="TextBox 3"/>
+          <p:cNvPr id="12" name="TextBox 12"/>
           <p:cNvSpPr txBox="1"/>
           <p:nvPr/>
         </p:nvSpPr>
@@ -3207,9 +3936,9 @@
                 <a:solidFill>
                   <a:srgbClr val="FFFFFF"/>
                 </a:solidFill>
-                <a:latin typeface="Yu Gothic"/>
-                <a:ea typeface="Yu Gothic"/>
-                <a:cs typeface="Yu Gothic"/>
+                <a:latin typeface="Hiragino Maru Gothic ProN"/>
+                <a:ea typeface="Hiragino Maru Gothic ProN"/>
+                <a:cs typeface="Hiragino Maru Gothic ProN"/>
               </a:rPr>
               <a:t>だから、大丈夫です。</a:t>
             </a:r>
@@ -3218,7 +3947,7 @@
       </p:sp>
       <p:sp>
         <p:nvSpPr>
-          <p:cNvPr id="4" name="TextBox 4"/>
+          <p:cNvPr id="13" name="TextBox 13"/>
           <p:cNvSpPr txBox="1"/>
           <p:nvPr/>
         </p:nvSpPr>
@@ -12934,7 +13663,7 @@
     <p:bg>
       <p:bgPr>
         <a:solidFill>
-          <a:srgbClr val="FFD93D"/>
+          <a:srgbClr val="FFF1F4"/>
         </a:solidFill>
         <a:effectLst/>
       </p:bgPr>
@@ -12955,7 +13684,250 @@
       </p:grpSpPr>
       <p:sp>
         <p:nvSpPr>
-          <p:cNvPr id="2" name="TextBox 2"/>
+          <p:cNvPr id="2" name="Shape 2"/>
+          <p:cNvSpPr/>
+          <p:nvPr/>
+        </p:nvSpPr>
+        <p:spPr>
+          <a:xfrm>
+            <a:off x="8130323" y="160020"/>
+            <a:ext cx="1051560" cy="1051560"/>
+          </a:xfrm>
+          <a:prstGeom prst="heart">
+            <a:avLst/>
+          </a:prstGeom>
+          <a:solidFill>
+            <a:srgbClr val="FFC1CB"/>
+          </a:solidFill>
+          <a:ln>
+            <a:noFill/>
+          </a:ln>
+        </p:spPr>
+        <p:txBody>
+          <a:bodyPr wrap="square" lIns="0" tIns="0" rIns="0" bIns="0" anchor="ctr" rtlCol="0"/>
+          <a:lstStyle/>
+          <a:p/>
+        </p:txBody>
+      </p:sp>
+      <p:sp>
+        <p:nvSpPr>
+          <p:cNvPr id="3" name="Shape 3"/>
+          <p:cNvSpPr/>
+          <p:nvPr/>
+        </p:nvSpPr>
+        <p:spPr>
+          <a:xfrm>
+            <a:off x="10445227" y="1773936"/>
+            <a:ext cx="566928" cy="566928"/>
+          </a:xfrm>
+          <a:prstGeom prst="heart">
+            <a:avLst/>
+          </a:prstGeom>
+          <a:solidFill>
+            <a:srgbClr val="FF99AA"/>
+          </a:solidFill>
+          <a:ln>
+            <a:noFill/>
+          </a:ln>
+        </p:spPr>
+        <p:txBody>
+          <a:bodyPr wrap="square" lIns="0" tIns="0" rIns="0" bIns="0" anchor="ctr" rtlCol="0"/>
+          <a:lstStyle/>
+          <a:p/>
+        </p:txBody>
+      </p:sp>
+      <p:sp>
+        <p:nvSpPr>
+          <p:cNvPr id="4" name="Shape 4"/>
+          <p:cNvSpPr/>
+          <p:nvPr/>
+        </p:nvSpPr>
+        <p:spPr>
+          <a:xfrm>
+            <a:off x="9210815" y="3214116"/>
+            <a:ext cx="841248" cy="841248"/>
+          </a:xfrm>
+          <a:prstGeom prst="heart">
+            <a:avLst/>
+          </a:prstGeom>
+          <a:solidFill>
+            <a:srgbClr val="FF99AA"/>
+          </a:solidFill>
+          <a:ln>
+            <a:noFill/>
+          </a:ln>
+        </p:spPr>
+        <p:txBody>
+          <a:bodyPr wrap="square" lIns="0" tIns="0" rIns="0" bIns="0" anchor="ctr" rtlCol="0"/>
+          <a:lstStyle/>
+          <a:p/>
+        </p:txBody>
+      </p:sp>
+      <p:sp>
+        <p:nvSpPr>
+          <p:cNvPr id="5" name="Shape 5"/>
+          <p:cNvSpPr/>
+          <p:nvPr/>
+        </p:nvSpPr>
+        <p:spPr>
+          <a:xfrm>
+            <a:off x="11240737" y="4649724"/>
+            <a:ext cx="438912" cy="438912"/>
+          </a:xfrm>
+          <a:prstGeom prst="heart">
+            <a:avLst/>
+          </a:prstGeom>
+          <a:solidFill>
+            <a:srgbClr val="FFC1CB"/>
+          </a:solidFill>
+          <a:ln>
+            <a:noFill/>
+          </a:ln>
+        </p:spPr>
+        <p:txBody>
+          <a:bodyPr wrap="square" lIns="0" tIns="0" rIns="0" bIns="0" anchor="ctr" rtlCol="0"/>
+          <a:lstStyle/>
+          <a:p/>
+        </p:txBody>
+      </p:sp>
+      <p:sp>
+        <p:nvSpPr>
+          <p:cNvPr id="6" name="Shape 6"/>
+          <p:cNvSpPr/>
+          <p:nvPr/>
+        </p:nvSpPr>
+        <p:spPr>
+          <a:xfrm>
+            <a:off x="7622849" y="5116068"/>
+            <a:ext cx="603504" cy="603504"/>
+          </a:xfrm>
+          <a:prstGeom prst="heart">
+            <a:avLst/>
+          </a:prstGeom>
+          <a:solidFill>
+            <a:srgbClr val="FFC1CB"/>
+          </a:solidFill>
+          <a:ln>
+            <a:noFill/>
+          </a:ln>
+        </p:spPr>
+        <p:txBody>
+          <a:bodyPr wrap="square" lIns="0" tIns="0" rIns="0" bIns="0" anchor="ctr" rtlCol="0"/>
+          <a:lstStyle/>
+          <a:p/>
+        </p:txBody>
+      </p:sp>
+      <p:sp>
+        <p:nvSpPr>
+          <p:cNvPr id="7" name="Shape 7"/>
+          <p:cNvSpPr/>
+          <p:nvPr/>
+        </p:nvSpPr>
+        <p:spPr>
+          <a:xfrm>
+            <a:off x="281927" y="205740"/>
+            <a:ext cx="411480" cy="411480"/>
+          </a:xfrm>
+          <a:prstGeom prst="heart">
+            <a:avLst/>
+          </a:prstGeom>
+          <a:solidFill>
+            <a:srgbClr val="FF99AA"/>
+          </a:solidFill>
+          <a:ln>
+            <a:noFill/>
+          </a:ln>
+        </p:spPr>
+        <p:txBody>
+          <a:bodyPr wrap="square" lIns="0" tIns="0" rIns="0" bIns="0" anchor="ctr" rtlCol="0"/>
+          <a:lstStyle/>
+          <a:p/>
+        </p:txBody>
+      </p:sp>
+      <p:sp>
+        <p:nvSpPr>
+          <p:cNvPr id="8" name="Shape 8"/>
+          <p:cNvSpPr/>
+          <p:nvPr/>
+        </p:nvSpPr>
+        <p:spPr>
+          <a:xfrm>
+            <a:off x="1700738" y="77724"/>
+            <a:ext cx="256032" cy="256032"/>
+          </a:xfrm>
+          <a:prstGeom prst="heart">
+            <a:avLst/>
+          </a:prstGeom>
+          <a:solidFill>
+            <a:srgbClr val="FFC1CB"/>
+          </a:solidFill>
+          <a:ln>
+            <a:noFill/>
+          </a:ln>
+        </p:spPr>
+        <p:txBody>
+          <a:bodyPr wrap="square" lIns="0" tIns="0" rIns="0" bIns="0" anchor="ctr" rtlCol="0"/>
+          <a:lstStyle/>
+          <a:p/>
+        </p:txBody>
+      </p:sp>
+      <p:sp>
+        <p:nvSpPr>
+          <p:cNvPr id="9" name="Shape 9"/>
+          <p:cNvSpPr/>
+          <p:nvPr/>
+        </p:nvSpPr>
+        <p:spPr>
+          <a:xfrm>
+            <a:off x="36566" y="3922776"/>
+            <a:ext cx="658368" cy="658368"/>
+          </a:xfrm>
+          <a:prstGeom prst="heart">
+            <a:avLst/>
+          </a:prstGeom>
+          <a:solidFill>
+            <a:srgbClr val="FFC1CB"/>
+          </a:solidFill>
+          <a:ln>
+            <a:noFill/>
+          </a:ln>
+        </p:spPr>
+        <p:txBody>
+          <a:bodyPr wrap="square" lIns="0" tIns="0" rIns="0" bIns="0" anchor="ctr" rtlCol="0"/>
+          <a:lstStyle/>
+          <a:p/>
+        </p:txBody>
+      </p:sp>
+      <p:sp>
+        <p:nvSpPr>
+          <p:cNvPr id="10" name="Shape 10"/>
+          <p:cNvSpPr/>
+          <p:nvPr/>
+        </p:nvSpPr>
+        <p:spPr>
+          <a:xfrm>
+            <a:off x="5199753" y="6281928"/>
+            <a:ext cx="329184" cy="329184"/>
+          </a:xfrm>
+          <a:prstGeom prst="heart">
+            <a:avLst/>
+          </a:prstGeom>
+          <a:solidFill>
+            <a:srgbClr val="FF99AA"/>
+          </a:solidFill>
+          <a:ln>
+            <a:noFill/>
+          </a:ln>
+        </p:spPr>
+        <p:txBody>
+          <a:bodyPr wrap="square" lIns="0" tIns="0" rIns="0" bIns="0" anchor="ctr" rtlCol="0"/>
+          <a:lstStyle/>
+          <a:p/>
+        </p:txBody>
+      </p:sp>
+      <p:sp>
+        <p:nvSpPr>
+          <p:cNvPr id="11" name="TextBox 11"/>
           <p:cNvSpPr txBox="1"/>
           <p:nvPr/>
         </p:nvSpPr>
@@ -12981,7 +13953,7 @@
             <a:r>
               <a:rPr lang="ja-JP" altLang="en-US" sz="1400" b="1" spc="150">
                 <a:solidFill>
-                  <a:srgbClr val="14141A"/>
+                  <a:srgbClr val="C9184A"/>
                 </a:solidFill>
                 <a:latin typeface="Yu Gothic"/>
                 <a:ea typeface="Yu Gothic"/>
@@ -12994,37 +13966,37 @@
       </p:sp>
       <p:sp>
         <p:nvSpPr>
-          <p:cNvPr id="3" name="TextBox 3"/>
+          <p:cNvPr id="12" name="TextBox 12"/>
           <p:cNvSpPr txBox="1"/>
           <p:nvPr/>
         </p:nvSpPr>
         <p:spPr>
           <a:xfrm>
             <a:off x="841248" y="1828800"/>
-            <a:ext cx="10515600" cy="2743200"/>
-          </a:xfrm>
-          <a:prstGeom prst="rect">
-            <a:avLst/>
-          </a:prstGeom>
-          <a:noFill/>
-        </p:spPr>
-        <p:txBody>
-          <a:bodyPr wrap="square" lIns="0" tIns="0" rIns="0" bIns="0" anchor="ctr" rtlCol="0"/>
-          <a:lstStyle/>
-          <a:p>
-            <a:pPr algn="l">
-              <a:lnSpc>
-                <a:spcPct val="112000"/>
+            <a:ext cx="8595360" cy="2743200"/>
+          </a:xfrm>
+          <a:prstGeom prst="rect">
+            <a:avLst/>
+          </a:prstGeom>
+          <a:noFill/>
+        </p:spPr>
+        <p:txBody>
+          <a:bodyPr wrap="square" lIns="0" tIns="0" rIns="0" bIns="0" anchor="ctr" rtlCol="0"/>
+          <a:lstStyle/>
+          <a:p>
+            <a:pPr algn="l">
+              <a:lnSpc>
+                <a:spcPct val="114999"/>
               </a:lnSpc>
             </a:pPr>
             <a:r>
               <a:rPr lang="ja-JP" altLang="en-US" sz="5330" b="1">
                 <a:solidFill>
-                  <a:srgbClr val="14141A"/>
-                </a:solidFill>
-                <a:latin typeface="Yu Gothic"/>
-                <a:ea typeface="Yu Gothic"/>
-                <a:cs typeface="Yu Gothic"/>
+                  <a:srgbClr val="C9184A"/>
+                </a:solidFill>
+                <a:latin typeface="Hiragino Maru Gothic ProN"/>
+                <a:ea typeface="Hiragino Maru Gothic ProN"/>
+                <a:cs typeface="Hiragino Maru Gothic ProN"/>
               </a:rPr>
               <a:t>この資料を、</a:t>
             </a:r>
@@ -13032,17 +14004,17 @@
           <a:p>
             <a:pPr algn="l">
               <a:lnSpc>
-                <a:spcPct val="112000"/>
+                <a:spcPct val="114999"/>
               </a:lnSpc>
             </a:pPr>
             <a:r>
               <a:rPr lang="ja-JP" altLang="en-US" sz="5330" b="1">
                 <a:solidFill>
-                  <a:srgbClr val="14141A"/>
-                </a:solidFill>
-                <a:latin typeface="Yu Gothic"/>
-                <a:ea typeface="Yu Gothic"/>
-                <a:cs typeface="Yu Gothic"/>
+                  <a:srgbClr val="C9184A"/>
+                </a:solidFill>
+                <a:latin typeface="Hiragino Maru Gothic ProN"/>
+                <a:ea typeface="Hiragino Maru Gothic ProN"/>
+                <a:cs typeface="Hiragino Maru Gothic ProN"/>
               </a:rPr>
               <a:t>たたき台にしてください。</a:t>
             </a:r>
@@ -13051,14 +14023,14 @@
       </p:sp>
       <p:sp>
         <p:nvSpPr>
-          <p:cNvPr id="4" name="TextBox 4"/>
+          <p:cNvPr id="13" name="TextBox 13"/>
           <p:cNvSpPr txBox="1"/>
           <p:nvPr/>
         </p:nvSpPr>
         <p:spPr>
           <a:xfrm>
             <a:off x="841248" y="4754880"/>
-            <a:ext cx="10515600" cy="914400"/>
+            <a:ext cx="8595360" cy="914400"/>
           </a:xfrm>
           <a:prstGeom prst="rect">
             <a:avLst/>
@@ -13079,9 +14051,9 @@
                 <a:solidFill>
                   <a:srgbClr val="14141A"/>
                 </a:solidFill>
-                <a:latin typeface="Yu Gothic Medium"/>
-                <a:ea typeface="Yu Gothic Medium"/>
-                <a:cs typeface="Yu Gothic Medium"/>
+                <a:latin typeface="Hiragino Maru Gothic ProN"/>
+                <a:ea typeface="Hiragino Maru Gothic ProN"/>
+                <a:cs typeface="Hiragino Maru Gothic ProN"/>
               </a:rPr>
               <a:t>次に開くのは2027年3月です。それまでに、気になるところを直して返してください。</a:t>
             </a:r>
@@ -14034,7 +15006,250 @@
       </p:grpSpPr>
       <p:sp>
         <p:nvSpPr>
-          <p:cNvPr id="2" name="TextBox 2"/>
+          <p:cNvPr id="2" name="Shape 2"/>
+          <p:cNvSpPr/>
+          <p:nvPr/>
+        </p:nvSpPr>
+        <p:spPr>
+          <a:xfrm>
+            <a:off x="8130323" y="160020"/>
+            <a:ext cx="1051560" cy="1051560"/>
+          </a:xfrm>
+          <a:prstGeom prst="heart">
+            <a:avLst/>
+          </a:prstGeom>
+          <a:solidFill>
+            <a:srgbClr val="FFEFAD"/>
+          </a:solidFill>
+          <a:ln>
+            <a:noFill/>
+          </a:ln>
+        </p:spPr>
+        <p:txBody>
+          <a:bodyPr wrap="square" lIns="0" tIns="0" rIns="0" bIns="0" anchor="ctr" rtlCol="0"/>
+          <a:lstStyle/>
+          <a:p/>
+        </p:txBody>
+      </p:sp>
+      <p:sp>
+        <p:nvSpPr>
+          <p:cNvPr id="3" name="Shape 3"/>
+          <p:cNvSpPr/>
+          <p:nvPr/>
+        </p:nvSpPr>
+        <p:spPr>
+          <a:xfrm>
+            <a:off x="10445227" y="1773936"/>
+            <a:ext cx="566928" cy="566928"/>
+          </a:xfrm>
+          <a:prstGeom prst="heart">
+            <a:avLst/>
+          </a:prstGeom>
+          <a:solidFill>
+            <a:srgbClr val="FFE57E"/>
+          </a:solidFill>
+          <a:ln>
+            <a:noFill/>
+          </a:ln>
+        </p:spPr>
+        <p:txBody>
+          <a:bodyPr wrap="square" lIns="0" tIns="0" rIns="0" bIns="0" anchor="ctr" rtlCol="0"/>
+          <a:lstStyle/>
+          <a:p/>
+        </p:txBody>
+      </p:sp>
+      <p:sp>
+        <p:nvSpPr>
+          <p:cNvPr id="4" name="Shape 4"/>
+          <p:cNvSpPr/>
+          <p:nvPr/>
+        </p:nvSpPr>
+        <p:spPr>
+          <a:xfrm>
+            <a:off x="9210815" y="3214116"/>
+            <a:ext cx="841248" cy="841248"/>
+          </a:xfrm>
+          <a:prstGeom prst="heart">
+            <a:avLst/>
+          </a:prstGeom>
+          <a:solidFill>
+            <a:srgbClr val="FFE57E"/>
+          </a:solidFill>
+          <a:ln>
+            <a:noFill/>
+          </a:ln>
+        </p:spPr>
+        <p:txBody>
+          <a:bodyPr wrap="square" lIns="0" tIns="0" rIns="0" bIns="0" anchor="ctr" rtlCol="0"/>
+          <a:lstStyle/>
+          <a:p/>
+        </p:txBody>
+      </p:sp>
+      <p:sp>
+        <p:nvSpPr>
+          <p:cNvPr id="5" name="Shape 5"/>
+          <p:cNvSpPr/>
+          <p:nvPr/>
+        </p:nvSpPr>
+        <p:spPr>
+          <a:xfrm>
+            <a:off x="11240737" y="4649724"/>
+            <a:ext cx="438912" cy="438912"/>
+          </a:xfrm>
+          <a:prstGeom prst="heart">
+            <a:avLst/>
+          </a:prstGeom>
+          <a:solidFill>
+            <a:srgbClr val="FFEFAD"/>
+          </a:solidFill>
+          <a:ln>
+            <a:noFill/>
+          </a:ln>
+        </p:spPr>
+        <p:txBody>
+          <a:bodyPr wrap="square" lIns="0" tIns="0" rIns="0" bIns="0" anchor="ctr" rtlCol="0"/>
+          <a:lstStyle/>
+          <a:p/>
+        </p:txBody>
+      </p:sp>
+      <p:sp>
+        <p:nvSpPr>
+          <p:cNvPr id="6" name="Shape 6"/>
+          <p:cNvSpPr/>
+          <p:nvPr/>
+        </p:nvSpPr>
+        <p:spPr>
+          <a:xfrm>
+            <a:off x="7622849" y="5116068"/>
+            <a:ext cx="603504" cy="603504"/>
+          </a:xfrm>
+          <a:prstGeom prst="heart">
+            <a:avLst/>
+          </a:prstGeom>
+          <a:solidFill>
+            <a:srgbClr val="FFEFAD"/>
+          </a:solidFill>
+          <a:ln>
+            <a:noFill/>
+          </a:ln>
+        </p:spPr>
+        <p:txBody>
+          <a:bodyPr wrap="square" lIns="0" tIns="0" rIns="0" bIns="0" anchor="ctr" rtlCol="0"/>
+          <a:lstStyle/>
+          <a:p/>
+        </p:txBody>
+      </p:sp>
+      <p:sp>
+        <p:nvSpPr>
+          <p:cNvPr id="7" name="Shape 7"/>
+          <p:cNvSpPr/>
+          <p:nvPr/>
+        </p:nvSpPr>
+        <p:spPr>
+          <a:xfrm>
+            <a:off x="281927" y="205740"/>
+            <a:ext cx="411480" cy="411480"/>
+          </a:xfrm>
+          <a:prstGeom prst="heart">
+            <a:avLst/>
+          </a:prstGeom>
+          <a:solidFill>
+            <a:srgbClr val="FFE57E"/>
+          </a:solidFill>
+          <a:ln>
+            <a:noFill/>
+          </a:ln>
+        </p:spPr>
+        <p:txBody>
+          <a:bodyPr wrap="square" lIns="0" tIns="0" rIns="0" bIns="0" anchor="ctr" rtlCol="0"/>
+          <a:lstStyle/>
+          <a:p/>
+        </p:txBody>
+      </p:sp>
+      <p:sp>
+        <p:nvSpPr>
+          <p:cNvPr id="8" name="Shape 8"/>
+          <p:cNvSpPr/>
+          <p:nvPr/>
+        </p:nvSpPr>
+        <p:spPr>
+          <a:xfrm>
+            <a:off x="1700738" y="77724"/>
+            <a:ext cx="256032" cy="256032"/>
+          </a:xfrm>
+          <a:prstGeom prst="heart">
+            <a:avLst/>
+          </a:prstGeom>
+          <a:solidFill>
+            <a:srgbClr val="FFEFAD"/>
+          </a:solidFill>
+          <a:ln>
+            <a:noFill/>
+          </a:ln>
+        </p:spPr>
+        <p:txBody>
+          <a:bodyPr wrap="square" lIns="0" tIns="0" rIns="0" bIns="0" anchor="ctr" rtlCol="0"/>
+          <a:lstStyle/>
+          <a:p/>
+        </p:txBody>
+      </p:sp>
+      <p:sp>
+        <p:nvSpPr>
+          <p:cNvPr id="9" name="Shape 9"/>
+          <p:cNvSpPr/>
+          <p:nvPr/>
+        </p:nvSpPr>
+        <p:spPr>
+          <a:xfrm>
+            <a:off x="36566" y="3922776"/>
+            <a:ext cx="658368" cy="658368"/>
+          </a:xfrm>
+          <a:prstGeom prst="heart">
+            <a:avLst/>
+          </a:prstGeom>
+          <a:solidFill>
+            <a:srgbClr val="FFEFAD"/>
+          </a:solidFill>
+          <a:ln>
+            <a:noFill/>
+          </a:ln>
+        </p:spPr>
+        <p:txBody>
+          <a:bodyPr wrap="square" lIns="0" tIns="0" rIns="0" bIns="0" anchor="ctr" rtlCol="0"/>
+          <a:lstStyle/>
+          <a:p/>
+        </p:txBody>
+      </p:sp>
+      <p:sp>
+        <p:nvSpPr>
+          <p:cNvPr id="10" name="Shape 10"/>
+          <p:cNvSpPr/>
+          <p:nvPr/>
+        </p:nvSpPr>
+        <p:spPr>
+          <a:xfrm>
+            <a:off x="5199753" y="6281928"/>
+            <a:ext cx="329184" cy="329184"/>
+          </a:xfrm>
+          <a:prstGeom prst="heart">
+            <a:avLst/>
+          </a:prstGeom>
+          <a:solidFill>
+            <a:srgbClr val="FFE57E"/>
+          </a:solidFill>
+          <a:ln>
+            <a:noFill/>
+          </a:ln>
+        </p:spPr>
+        <p:txBody>
+          <a:bodyPr wrap="square" lIns="0" tIns="0" rIns="0" bIns="0" anchor="ctr" rtlCol="0"/>
+          <a:lstStyle/>
+          <a:p/>
+        </p:txBody>
+      </p:sp>
+      <p:sp>
+        <p:nvSpPr>
+          <p:cNvPr id="11" name="TextBox 11"/>
           <p:cNvSpPr txBox="1"/>
           <p:nvPr/>
         </p:nvSpPr>
@@ -14073,7 +15288,7 @@
       </p:sp>
       <p:sp>
         <p:nvSpPr>
-          <p:cNvPr id="3" name="TextBox 3"/>
+          <p:cNvPr id="12" name="TextBox 12"/>
           <p:cNvSpPr txBox="1"/>
           <p:nvPr/>
         </p:nvSpPr>
@@ -14101,9 +15316,9 @@
                 <a:solidFill>
                   <a:srgbClr val="14141A"/>
                 </a:solidFill>
-                <a:latin typeface="Yu Gothic"/>
-                <a:ea typeface="Yu Gothic"/>
-                <a:cs typeface="Yu Gothic"/>
+                <a:latin typeface="Hiragino Maru Gothic ProN"/>
+                <a:ea typeface="Hiragino Maru Gothic ProN"/>
+                <a:cs typeface="Hiragino Maru Gothic ProN"/>
               </a:rPr>
               <a:t>私の魅力</a:t>
             </a:r>
@@ -14112,7 +15327,7 @@
       </p:sp>
       <p:sp>
         <p:nvSpPr>
-          <p:cNvPr id="4" name="TextBox 4"/>
+          <p:cNvPr id="13" name="TextBox 13"/>
           <p:cNvSpPr txBox="1"/>
           <p:nvPr/>
         </p:nvSpPr>

--- a/proposal/ふたりの計画のご提案.pptx
+++ b/proposal/ふたりの計画のご提案.pptx
@@ -33,6 +33,7 @@
     <p:sldId id="278" r:id="rId25"/>
     <p:sldId id="279" r:id="rId26"/>
     <p:sldId id="280" r:id="rId27"/>
+    <p:sldId id="281" r:id="rId28"/>
   </p:sldIdLst>
   <p:sldSz cx="12191695" cy="6858000"/>
   <p:notesSz cx="6858000" cy="9144000"/>
@@ -894,7 +895,7 @@
           <a:p>
             <a:r>
               <a:rPr lang="ja-JP" altLang="en-US" sz="1200"/>
-              <a:t>金額はここだけ。ほかのページには置かない。</a:t>
+              <a:t>「譲れない」を増やすと物件が消える。今の数でちょうどいい。</a:t>
             </a:r>
           </a:p>
         </p:txBody>
@@ -953,7 +954,7 @@
           <a:p>
             <a:r>
               <a:rPr lang="ja-JP" altLang="en-US" sz="1200"/>
-              <a:t>「足りない方が悪い」にしないのが、この図の目的。</a:t>
+              <a:t>金額はここだけ。ほかのページには置かない。</a:t>
             </a:r>
           </a:p>
         </p:txBody>
@@ -1012,7 +1013,7 @@
           <a:p>
             <a:r>
               <a:rPr lang="ja-JP" altLang="en-US" sz="1200"/>
-              <a:t>カンヌは隠さない。「家計に影響しない」の一点だけ伝わればいい。</a:t>
+              <a:t>「足りない方が悪い」にしないのが、この図の目的。</a:t>
             </a:r>
           </a:p>
         </p:txBody>
@@ -1071,7 +1072,7 @@
           <a:p>
             <a:r>
               <a:rPr lang="ja-JP" altLang="en-US" sz="1200"/>
-              <a:t>黄色の行が、彼への一番かんたんな宿題。</a:t>
+              <a:t>カンヌは隠さない。「家計に影響しない」の一点だけ伝わればいい。</a:t>
             </a:r>
           </a:p>
         </p:txBody>
@@ -1130,7 +1131,7 @@
           <a:p>
             <a:r>
               <a:rPr lang="ja-JP" altLang="en-US" sz="1200"/>
-              <a:t>「改善中」は正直に。自己PRはしない。</a:t>
+              <a:t>黄色の行が、彼への一番かんたんな宿題。</a:t>
             </a:r>
           </a:p>
         </p:txBody>
@@ -1144,6 +1145,65 @@
 </file>
 
 <file path=ppt/notesSlides/notesSlide25.xml><?xml version="1.0" encoding="utf-8"?>
+<p:notes xmlns:a="http://schemas.openxmlformats.org/drawingml/2006/main" xmlns:r="http://schemas.openxmlformats.org/officeDocument/2006/relationships" xmlns:p="http://schemas.openxmlformats.org/presentationml/2006/main">
+  <p:cSld>
+    <p:spTree>
+      <p:nvGrpSpPr>
+        <p:cNvPr id="1" name=""/>
+        <p:cNvGrpSpPr/>
+        <p:nvPr/>
+      </p:nvGrpSpPr>
+      <p:grpSpPr>
+        <a:xfrm>
+          <a:off x="0" y="0"/>
+          <a:ext cx="0" cy="0"/>
+          <a:chOff x="0" y="0"/>
+          <a:chExt cx="0" cy="0"/>
+        </a:xfrm>
+      </p:grpSpPr>
+      <p:sp>
+        <p:nvSpPr>
+          <p:cNvPr id="2" name="Slide Image Placeholder 1"/>
+          <p:cNvSpPr>
+            <a:spLocks noGrp="1" noRot="1" noChangeAspect="1"/>
+          </p:cNvSpPr>
+          <p:nvPr>
+            <p:ph type="sldImg"/>
+          </p:nvPr>
+        </p:nvSpPr>
+        <p:spPr/>
+      </p:sp>
+      <p:sp>
+        <p:nvSpPr>
+          <p:cNvPr id="3" name="Notes Placeholder 2"/>
+          <p:cNvSpPr>
+            <a:spLocks noGrp="1"/>
+          </p:cNvSpPr>
+          <p:nvPr>
+            <p:ph type="body" idx="1"/>
+          </p:nvPr>
+        </p:nvSpPr>
+        <p:spPr/>
+        <p:txBody>
+          <a:bodyPr/>
+          <a:lstStyle/>
+          <a:p>
+            <a:r>
+              <a:rPr lang="ja-JP" altLang="en-US" sz="1200"/>
+              <a:t>「改善中」は正直に。自己PRはしない。</a:t>
+            </a:r>
+          </a:p>
+        </p:txBody>
+      </p:sp>
+    </p:spTree>
+  </p:cSld>
+  <p:clrMapOvr>
+    <a:masterClrMapping/>
+  </p:clrMapOvr>
+</p:notes>
+</file>
+
+<file path=ppt/notesSlides/notesSlide26.xml><?xml version="1.0" encoding="utf-8"?>
 <p:notes xmlns:a="http://schemas.openxmlformats.org/drawingml/2006/main" xmlns:r="http://schemas.openxmlformats.org/officeDocument/2006/relationships" xmlns:p="http://schemas.openxmlformats.org/presentationml/2006/main">
   <p:cSld>
     <p:spTree>
@@ -7651,7 +7711,7 @@
                 <a:ea typeface="Yu Gothic"/>
                 <a:cs typeface="Yu Gothic"/>
               </a:rPr>
-              <a:t>手当型なら私名義で家賃15〜16万が目安。借り上げ社宅なら会社契約で、審査はありません。</a:t>
+              <a:t>手当型だと私名義で通るのは15〜16万まで。20万を超えるなら入籍後の収入合算か、借り上げ社宅が要ります。</a:t>
             </a:r>
           </a:p>
         </p:txBody>
@@ -8002,7 +8062,7 @@
                 <a:ea typeface="Yu Gothic"/>
                 <a:cs typeface="Yu Gothic"/>
               </a:rPr>
-              <a:t>家の条件</a:t>
+              <a:t>家の条件①｜エリア</a:t>
             </a:r>
           </a:p>
         </p:txBody>
@@ -8041,7 +8101,7 @@
                 <a:ea typeface="Yu Gothic Medium"/>
                 <a:cs typeface="Yu Gothic Medium"/>
               </a:rPr>
-              <a:t>広さへのこだわりはありません。</a:t>
+              <a:t>住むのは都内。</a:t>
             </a:r>
             <a:r>
               <a:rPr lang="ja-JP" altLang="en-US" sz="2200" b="0">
@@ -8055,7 +8115,7 @@
                 <a:ea typeface="Yu Gothic Medium"/>
                 <a:cs typeface="Yu Gothic Medium"/>
               </a:rPr>
-              <a:t>場所と設備</a:t>
+              <a:t>ふたりとも通勤30〜60分</a:t>
             </a:r>
             <a:r>
               <a:rPr lang="ja-JP" altLang="en-US" sz="2200" b="0">
@@ -8066,7 +8126,7 @@
                 <a:ea typeface="Yu Gothic Medium"/>
                 <a:cs typeface="Yu Gothic Medium"/>
               </a:rPr>
-              <a:t>だけ、先に決めさせてください。</a:t>
+              <a:t>の範囲から選びます。</a:t>
             </a:r>
           </a:p>
         </p:txBody>
@@ -8413,7 +8473,7 @@
                 <a:ea typeface="Yu Gothic"/>
                 <a:cs typeface="Yu Gothic"/>
               </a:rPr>
-              <a:t>独立洗面台がある</a:t>
+              <a:t>駅から徒歩10分以内</a:t>
             </a:r>
           </a:p>
         </p:txBody>
@@ -8452,7 +8512,7 @@
                 <a:ea typeface="Yu Gothic"/>
                 <a:cs typeface="Yu Gothic"/>
               </a:rPr>
-              <a:t>ここは譲れません。朝の支度が重ならないように。</a:t>
+              <a:t>表示ではなく、実際に歩いた時間で見ます。</a:t>
             </a:r>
           </a:p>
         </p:txBody>
@@ -8518,7 +8578,7 @@
                 <a:ea typeface="Yu Gothic"/>
                 <a:cs typeface="Yu Gothic"/>
               </a:rPr>
-              <a:t>広さは、こだわりません</a:t>
+              <a:t>エリアは、こだわりません</a:t>
             </a:r>
           </a:p>
         </p:txBody>
@@ -8557,7 +8617,7 @@
                 <a:ea typeface="Yu Gothic"/>
                 <a:cs typeface="Yu Gothic"/>
               </a:rPr>
-              <a:t>間取りより、場所と設備を優先します。</a:t>
+              <a:t>この円の中なら、どこでもかまいません。</a:t>
             </a:r>
           </a:p>
         </p:txBody>
@@ -8596,7 +8656,7 @@
                 <a:ea typeface="Yu Gothic"/>
                 <a:cs typeface="Yu Gothic"/>
               </a:rPr>
-              <a:t>※そのほかの希望は、物件を見ながら足していきます。</a:t>
+              <a:t>※今の家は「徒歩8分」表示ですが、実際は12分ほどかかります。</a:t>
             </a:r>
           </a:p>
         </p:txBody>
@@ -9299,7 +9359,7 @@
                 <a:ea typeface="Yu Gothic"/>
                 <a:cs typeface="Yu Gothic"/>
               </a:rPr>
-              <a:t>生活費</a:t>
+              <a:t>家の条件②｜物件</a:t>
             </a:r>
           </a:p>
         </p:txBody>
@@ -9338,27 +9398,134 @@
                 <a:ea typeface="Yu Gothic Medium"/>
                 <a:cs typeface="Yu Gothic Medium"/>
               </a:rPr>
-              <a:t>二人の財布はひとつにして、見える化します。削らないものだけ、先に決めます。</a:t>
-            </a:r>
-          </a:p>
-        </p:txBody>
-      </p:sp>
-      <p:sp>
-        <p:nvSpPr>
-          <p:cNvPr id="4" name="Shape 4"/>
+              <a:t>譲れないものと、あると嬉しいものを分けました。</a:t>
+            </a:r>
+          </a:p>
+        </p:txBody>
+      </p:sp>
+      <p:sp>
+        <p:nvSpPr>
+          <p:cNvPr id="4" name="TextBox 4"/>
+          <p:cNvSpPr txBox="1"/>
+          <p:nvPr/>
+        </p:nvSpPr>
+        <p:spPr>
+          <a:xfrm>
+            <a:off x="841248" y="1728216"/>
+            <a:ext cx="1517904" cy="457200"/>
+          </a:xfrm>
+          <a:prstGeom prst="rect">
+            <a:avLst/>
+          </a:prstGeom>
+          <a:noFill/>
+        </p:spPr>
+        <p:txBody>
+          <a:bodyPr wrap="square" lIns="0" tIns="0" rIns="0" bIns="0" anchor="ctr" rtlCol="0"/>
+          <a:lstStyle/>
+          <a:p>
+            <a:pPr algn="l">
+              <a:lnSpc>
+                <a:spcPct val="145000"/>
+              </a:lnSpc>
+            </a:pPr>
+            <a:endParaRPr lang="ja-JP" sz="1250"/>
+          </a:p>
+        </p:txBody>
+      </p:sp>
+      <p:sp>
+        <p:nvSpPr>
+          <p:cNvPr id="5" name="TextBox 5"/>
+          <p:cNvSpPr txBox="1"/>
+          <p:nvPr/>
+        </p:nvSpPr>
+        <p:spPr>
+          <a:xfrm>
+            <a:off x="2487168" y="1728216"/>
+            <a:ext cx="6455664" cy="457200"/>
+          </a:xfrm>
+          <a:prstGeom prst="rect">
+            <a:avLst/>
+          </a:prstGeom>
+          <a:noFill/>
+        </p:spPr>
+        <p:txBody>
+          <a:bodyPr wrap="square" lIns="0" tIns="0" rIns="0" bIns="0" anchor="ctr" rtlCol="0"/>
+          <a:lstStyle/>
+          <a:p>
+            <a:pPr algn="l">
+              <a:lnSpc>
+                <a:spcPct val="145000"/>
+              </a:lnSpc>
+            </a:pPr>
+            <a:r>
+              <a:rPr lang="ja-JP" altLang="en-US" sz="1250" b="1" spc="100">
+                <a:solidFill>
+                  <a:srgbClr val="6B6B76"/>
+                </a:solidFill>
+                <a:latin typeface="Yu Gothic"/>
+                <a:ea typeface="Yu Gothic"/>
+                <a:cs typeface="Yu Gothic"/>
+              </a:rPr>
+              <a:t>条件</a:t>
+            </a:r>
+          </a:p>
+        </p:txBody>
+      </p:sp>
+      <p:sp>
+        <p:nvSpPr>
+          <p:cNvPr id="6" name="TextBox 6"/>
+          <p:cNvSpPr txBox="1"/>
+          <p:nvPr/>
+        </p:nvSpPr>
+        <p:spPr>
+          <a:xfrm>
+            <a:off x="9070848" y="1728216"/>
+            <a:ext cx="2157984" cy="457200"/>
+          </a:xfrm>
+          <a:prstGeom prst="rect">
+            <a:avLst/>
+          </a:prstGeom>
+          <a:noFill/>
+        </p:spPr>
+        <p:txBody>
+          <a:bodyPr wrap="square" lIns="0" tIns="0" rIns="0" bIns="0" anchor="ctr" rtlCol="0"/>
+          <a:lstStyle/>
+          <a:p>
+            <a:pPr algn="l">
+              <a:lnSpc>
+                <a:spcPct val="145000"/>
+              </a:lnSpc>
+            </a:pPr>
+            <a:r>
+              <a:rPr lang="ja-JP" altLang="en-US" sz="1250" b="1" spc="100">
+                <a:solidFill>
+                  <a:srgbClr val="6B6B76"/>
+                </a:solidFill>
+                <a:latin typeface="Yu Gothic"/>
+                <a:ea typeface="Yu Gothic"/>
+                <a:cs typeface="Yu Gothic"/>
+              </a:rPr>
+              <a:t>優先度</a:t>
+            </a:r>
+          </a:p>
+        </p:txBody>
+      </p:sp>
+      <p:sp>
+        <p:nvSpPr>
+          <p:cNvPr id="7" name="Shape 7"/>
           <p:cNvSpPr/>
           <p:nvPr/>
         </p:nvSpPr>
         <p:spPr>
           <a:xfrm>
-            <a:off x="841248" y="1773936"/>
-            <a:ext cx="2320290" cy="38100"/>
+            <a:off x="841248" y="2172716"/>
+            <a:ext cx="10515600" cy="25400"/>
           </a:xfrm>
           <a:prstGeom prst="rect">
             <a:avLst/>
           </a:prstGeom>
           <a:solidFill>
-            <a:srgbClr val="00C4B3"/>
+            <a:srgbClr val="14141A"/>
           </a:solidFill>
           <a:ln>
             <a:noFill/>
@@ -9372,155 +9539,137 @@
       </p:sp>
       <p:sp>
         <p:nvSpPr>
-          <p:cNvPr id="5" name="TextBox 5"/>
-          <p:cNvSpPr txBox="1"/>
-          <p:nvPr/>
-        </p:nvSpPr>
-        <p:spPr>
-          <a:xfrm>
-            <a:off x="841248" y="2002536"/>
-            <a:ext cx="2320290" cy="320040"/>
-          </a:xfrm>
-          <a:prstGeom prst="rect">
-            <a:avLst/>
-          </a:prstGeom>
-          <a:noFill/>
-        </p:spPr>
-        <p:txBody>
-          <a:bodyPr wrap="square" lIns="0" tIns="0" rIns="0" bIns="0" anchor="t" rtlCol="0"/>
-          <a:lstStyle/>
-          <a:p>
-            <a:pPr algn="l">
-              <a:lnSpc>
-                <a:spcPct val="145000"/>
-              </a:lnSpc>
-            </a:pPr>
-            <a:r>
-              <a:rPr lang="ja-JP" altLang="en-US" sz="1200" b="1" spc="120">
-                <a:solidFill>
-                  <a:srgbClr val="00C4B3"/>
-                </a:solidFill>
-                <a:latin typeface="Yu Gothic"/>
-                <a:ea typeface="Yu Gothic"/>
-                <a:cs typeface="Yu Gothic"/>
-              </a:rPr>
-              <a:t>家賃</a:t>
-            </a:r>
-          </a:p>
-        </p:txBody>
-      </p:sp>
-      <p:sp>
-        <p:nvSpPr>
-          <p:cNvPr id="6" name="TextBox 6"/>
-          <p:cNvSpPr txBox="1"/>
-          <p:nvPr/>
-        </p:nvSpPr>
-        <p:spPr>
-          <a:xfrm>
-            <a:off x="841248" y="2414016"/>
-            <a:ext cx="2320290" cy="1005840"/>
-          </a:xfrm>
-          <a:prstGeom prst="rect">
-            <a:avLst/>
-          </a:prstGeom>
-          <a:noFill/>
-        </p:spPr>
-        <p:txBody>
-          <a:bodyPr wrap="square" lIns="0" tIns="0" rIns="0" bIns="0" anchor="t" rtlCol="0"/>
-          <a:lstStyle/>
-          <a:p>
-            <a:pPr algn="l">
-              <a:lnSpc>
-                <a:spcPct val="125000"/>
-              </a:lnSpc>
-            </a:pPr>
-            <a:r>
-              <a:rPr lang="ja-JP" altLang="en-US" sz="2200" b="1">
-                <a:solidFill>
-                  <a:srgbClr val="14141A"/>
-                </a:solidFill>
-                <a:latin typeface="Yu Gothic"/>
-                <a:ea typeface="Yu Gothic"/>
-                <a:cs typeface="Yu Gothic"/>
-              </a:rPr>
-              <a:t>月15〜20万を</a:t>
-            </a:r>
-          </a:p>
-          <a:p>
-            <a:pPr algn="l">
-              <a:lnSpc>
-                <a:spcPct val="125000"/>
-              </a:lnSpc>
-            </a:pPr>
-            <a:r>
-              <a:rPr lang="ja-JP" altLang="en-US" sz="2200" b="1">
-                <a:solidFill>
-                  <a:srgbClr val="14141A"/>
-                </a:solidFill>
-                <a:latin typeface="Yu Gothic"/>
-                <a:ea typeface="Yu Gothic"/>
-                <a:cs typeface="Yu Gothic"/>
-              </a:rPr>
-              <a:t>ふたりで</a:t>
-            </a:r>
-          </a:p>
-        </p:txBody>
-      </p:sp>
-      <p:sp>
-        <p:nvSpPr>
-          <p:cNvPr id="7" name="TextBox 7"/>
-          <p:cNvSpPr txBox="1"/>
-          <p:nvPr/>
-        </p:nvSpPr>
-        <p:spPr>
-          <a:xfrm>
-            <a:off x="841248" y="3511296"/>
-            <a:ext cx="2320290" cy="1444752"/>
-          </a:xfrm>
-          <a:prstGeom prst="rect">
-            <a:avLst/>
-          </a:prstGeom>
-          <a:noFill/>
-        </p:spPr>
-        <p:txBody>
-          <a:bodyPr wrap="square" lIns="0" tIns="0" rIns="0" bIns="0" anchor="t" rtlCol="0"/>
-          <a:lstStyle/>
-          <a:p>
-            <a:pPr algn="l">
-              <a:lnSpc>
-                <a:spcPct val="155000"/>
-              </a:lnSpc>
-            </a:pPr>
-            <a:r>
-              <a:rPr lang="ja-JP" altLang="en-US" sz="1400" b="0">
-                <a:solidFill>
-                  <a:srgbClr val="14141A"/>
-                </a:solidFill>
-                <a:latin typeface="Yu Gothic"/>
-                <a:ea typeface="Yu Gothic"/>
-                <a:cs typeface="Yu Gothic"/>
-              </a:rPr>
-              <a:t>負担の割合は固定しません。名義は私で、共同口座から引き落とします。</a:t>
-            </a:r>
-          </a:p>
-        </p:txBody>
-      </p:sp>
-      <p:sp>
-        <p:nvSpPr>
-          <p:cNvPr id="8" name="Shape 8"/>
+          <p:cNvPr id="8" name="TextBox 8"/>
+          <p:cNvSpPr txBox="1"/>
+          <p:nvPr/>
+        </p:nvSpPr>
+        <p:spPr>
+          <a:xfrm>
+            <a:off x="841248" y="2185416"/>
+            <a:ext cx="1517904" cy="457200"/>
+          </a:xfrm>
+          <a:prstGeom prst="rect">
+            <a:avLst/>
+          </a:prstGeom>
+          <a:noFill/>
+        </p:spPr>
+        <p:txBody>
+          <a:bodyPr wrap="square" lIns="0" tIns="0" rIns="0" bIns="0" anchor="ctr" rtlCol="0"/>
+          <a:lstStyle/>
+          <a:p>
+            <a:pPr algn="l">
+              <a:lnSpc>
+                <a:spcPct val="130000"/>
+              </a:lnSpc>
+            </a:pPr>
+            <a:r>
+              <a:rPr lang="ja-JP" altLang="en-US" sz="1500" b="0">
+                <a:solidFill>
+                  <a:srgbClr val="14141A"/>
+                </a:solidFill>
+                <a:latin typeface="Yu Gothic"/>
+                <a:ea typeface="Yu Gothic"/>
+                <a:cs typeface="Yu Gothic"/>
+              </a:rPr>
+              <a:t>間取り</a:t>
+            </a:r>
+          </a:p>
+        </p:txBody>
+      </p:sp>
+      <p:sp>
+        <p:nvSpPr>
+          <p:cNvPr id="9" name="TextBox 9"/>
+          <p:cNvSpPr txBox="1"/>
+          <p:nvPr/>
+        </p:nvSpPr>
+        <p:spPr>
+          <a:xfrm>
+            <a:off x="2487168" y="2185416"/>
+            <a:ext cx="6455664" cy="457200"/>
+          </a:xfrm>
+          <a:prstGeom prst="rect">
+            <a:avLst/>
+          </a:prstGeom>
+          <a:noFill/>
+        </p:spPr>
+        <p:txBody>
+          <a:bodyPr wrap="square" lIns="0" tIns="0" rIns="0" bIns="0" anchor="ctr" rtlCol="0"/>
+          <a:lstStyle/>
+          <a:p>
+            <a:pPr algn="l">
+              <a:lnSpc>
+                <a:spcPct val="130000"/>
+              </a:lnSpc>
+            </a:pPr>
+            <a:r>
+              <a:rPr lang="ja-JP" altLang="en-US" sz="1500" b="0">
+                <a:solidFill>
+                  <a:srgbClr val="14141A"/>
+                </a:solidFill>
+                <a:latin typeface="Yu Gothic"/>
+                <a:ea typeface="Yu Gothic"/>
+                <a:cs typeface="Yu Gothic"/>
+              </a:rPr>
+              <a:t>2LDK。ドラム式の洗濯機が置けること</a:t>
+            </a:r>
+          </a:p>
+        </p:txBody>
+      </p:sp>
+      <p:sp>
+        <p:nvSpPr>
+          <p:cNvPr id="10" name="TextBox 10"/>
+          <p:cNvSpPr txBox="1"/>
+          <p:nvPr/>
+        </p:nvSpPr>
+        <p:spPr>
+          <a:xfrm>
+            <a:off x="9070848" y="2185416"/>
+            <a:ext cx="2157984" cy="457200"/>
+          </a:xfrm>
+          <a:prstGeom prst="rect">
+            <a:avLst/>
+          </a:prstGeom>
+          <a:noFill/>
+        </p:spPr>
+        <p:txBody>
+          <a:bodyPr wrap="square" lIns="0" tIns="0" rIns="0" bIns="0" anchor="ctr" rtlCol="0"/>
+          <a:lstStyle/>
+          <a:p>
+            <a:pPr algn="l">
+              <a:lnSpc>
+                <a:spcPct val="130000"/>
+              </a:lnSpc>
+            </a:pPr>
+            <a:r>
+              <a:rPr lang="ja-JP" altLang="en-US" sz="1500" b="0">
+                <a:solidFill>
+                  <a:srgbClr val="14141A"/>
+                </a:solidFill>
+                <a:latin typeface="Yu Gothic"/>
+                <a:ea typeface="Yu Gothic"/>
+                <a:cs typeface="Yu Gothic"/>
+              </a:rPr>
+              <a:t>譲れない</a:t>
+            </a:r>
+          </a:p>
+        </p:txBody>
+      </p:sp>
+      <p:sp>
+        <p:nvSpPr>
+          <p:cNvPr id="11" name="Shape 11"/>
           <p:cNvSpPr/>
           <p:nvPr/>
         </p:nvSpPr>
         <p:spPr>
           <a:xfrm>
-            <a:off x="3573018" y="1773936"/>
-            <a:ext cx="2320290" cy="38100"/>
+            <a:off x="841248" y="2637536"/>
+            <a:ext cx="10515600" cy="9525"/>
           </a:xfrm>
           <a:prstGeom prst="rect">
             <a:avLst/>
           </a:prstGeom>
           <a:solidFill>
-            <a:srgbClr val="FFD93D"/>
+            <a:srgbClr val="E7E7EE"/>
           </a:solidFill>
           <a:ln>
             <a:noFill/>
@@ -9534,155 +9683,137 @@
       </p:sp>
       <p:sp>
         <p:nvSpPr>
-          <p:cNvPr id="9" name="TextBox 9"/>
-          <p:cNvSpPr txBox="1"/>
-          <p:nvPr/>
-        </p:nvSpPr>
-        <p:spPr>
-          <a:xfrm>
-            <a:off x="3573018" y="2002536"/>
-            <a:ext cx="2320290" cy="320040"/>
-          </a:xfrm>
-          <a:prstGeom prst="rect">
-            <a:avLst/>
-          </a:prstGeom>
-          <a:noFill/>
-        </p:spPr>
-        <p:txBody>
-          <a:bodyPr wrap="square" lIns="0" tIns="0" rIns="0" bIns="0" anchor="t" rtlCol="0"/>
-          <a:lstStyle/>
-          <a:p>
-            <a:pPr algn="l">
-              <a:lnSpc>
-                <a:spcPct val="145000"/>
-              </a:lnSpc>
-            </a:pPr>
-            <a:r>
-              <a:rPr lang="ja-JP" altLang="en-US" sz="1200" b="1" spc="120">
-                <a:solidFill>
-                  <a:srgbClr val="14141A"/>
-                </a:solidFill>
-                <a:latin typeface="Yu Gothic"/>
-                <a:ea typeface="Yu Gothic"/>
-                <a:cs typeface="Yu Gothic"/>
-              </a:rPr>
-              <a:t>共同口座</a:t>
-            </a:r>
-          </a:p>
-        </p:txBody>
-      </p:sp>
-      <p:sp>
-        <p:nvSpPr>
-          <p:cNvPr id="10" name="TextBox 10"/>
-          <p:cNvSpPr txBox="1"/>
-          <p:nvPr/>
-        </p:nvSpPr>
-        <p:spPr>
-          <a:xfrm>
-            <a:off x="3573018" y="2414016"/>
-            <a:ext cx="2320290" cy="1005840"/>
-          </a:xfrm>
-          <a:prstGeom prst="rect">
-            <a:avLst/>
-          </a:prstGeom>
-          <a:noFill/>
-        </p:spPr>
-        <p:txBody>
-          <a:bodyPr wrap="square" lIns="0" tIns="0" rIns="0" bIns="0" anchor="t" rtlCol="0"/>
-          <a:lstStyle/>
-          <a:p>
-            <a:pPr algn="l">
-              <a:lnSpc>
-                <a:spcPct val="125000"/>
-              </a:lnSpc>
-            </a:pPr>
-            <a:r>
-              <a:rPr lang="ja-JP" altLang="en-US" sz="2200" b="1">
-                <a:solidFill>
-                  <a:srgbClr val="14141A"/>
-                </a:solidFill>
-                <a:latin typeface="Yu Gothic"/>
-                <a:ea typeface="Yu Gothic"/>
-                <a:cs typeface="Yu Gothic"/>
-              </a:rPr>
-              <a:t>お金はぜんぶ</a:t>
-            </a:r>
-          </a:p>
-          <a:p>
-            <a:pPr algn="l">
-              <a:lnSpc>
-                <a:spcPct val="125000"/>
-              </a:lnSpc>
-            </a:pPr>
-            <a:r>
-              <a:rPr lang="ja-JP" altLang="en-US" sz="2200" b="1">
-                <a:solidFill>
-                  <a:srgbClr val="14141A"/>
-                </a:solidFill>
-                <a:latin typeface="Yu Gothic"/>
-                <a:ea typeface="Yu Gothic"/>
-                <a:cs typeface="Yu Gothic"/>
-              </a:rPr>
-              <a:t>ここからです</a:t>
-            </a:r>
-          </a:p>
-        </p:txBody>
-      </p:sp>
-      <p:sp>
-        <p:nvSpPr>
-          <p:cNvPr id="11" name="TextBox 11"/>
-          <p:cNvSpPr txBox="1"/>
-          <p:nvPr/>
-        </p:nvSpPr>
-        <p:spPr>
-          <a:xfrm>
-            <a:off x="3573018" y="3511296"/>
-            <a:ext cx="2320290" cy="1444752"/>
-          </a:xfrm>
-          <a:prstGeom prst="rect">
-            <a:avLst/>
-          </a:prstGeom>
-          <a:noFill/>
-        </p:spPr>
-        <p:txBody>
-          <a:bodyPr wrap="square" lIns="0" tIns="0" rIns="0" bIns="0" anchor="t" rtlCol="0"/>
-          <a:lstStyle/>
-          <a:p>
-            <a:pPr algn="l">
-              <a:lnSpc>
-                <a:spcPct val="155000"/>
-              </a:lnSpc>
-            </a:pPr>
-            <a:r>
-              <a:rPr lang="ja-JP" altLang="en-US" sz="1400" b="0">
-                <a:solidFill>
-                  <a:srgbClr val="14141A"/>
-                </a:solidFill>
-                <a:latin typeface="Yu Gothic"/>
-                <a:ea typeface="Yu Gothic"/>
-                <a:cs typeface="Yu Gothic"/>
-              </a:rPr>
-              <a:t>私名義で、入居と同時に開設します。年に1回だけ棚卸しをします。お小遣いには干渉しません。</a:t>
-            </a:r>
-          </a:p>
-        </p:txBody>
-      </p:sp>
-      <p:sp>
-        <p:nvSpPr>
-          <p:cNvPr id="12" name="Shape 12"/>
+          <p:cNvPr id="12" name="TextBox 12"/>
+          <p:cNvSpPr txBox="1"/>
+          <p:nvPr/>
+        </p:nvSpPr>
+        <p:spPr>
+          <a:xfrm>
+            <a:off x="841248" y="2642616"/>
+            <a:ext cx="1517904" cy="457200"/>
+          </a:xfrm>
+          <a:prstGeom prst="rect">
+            <a:avLst/>
+          </a:prstGeom>
+          <a:noFill/>
+        </p:spPr>
+        <p:txBody>
+          <a:bodyPr wrap="square" lIns="0" tIns="0" rIns="0" bIns="0" anchor="ctr" rtlCol="0"/>
+          <a:lstStyle/>
+          <a:p>
+            <a:pPr algn="l">
+              <a:lnSpc>
+                <a:spcPct val="130000"/>
+              </a:lnSpc>
+            </a:pPr>
+            <a:r>
+              <a:rPr lang="ja-JP" altLang="en-US" sz="1500" b="0">
+                <a:solidFill>
+                  <a:srgbClr val="14141A"/>
+                </a:solidFill>
+                <a:latin typeface="Yu Gothic"/>
+                <a:ea typeface="Yu Gothic"/>
+                <a:cs typeface="Yu Gothic"/>
+              </a:rPr>
+              <a:t>設備</a:t>
+            </a:r>
+          </a:p>
+        </p:txBody>
+      </p:sp>
+      <p:sp>
+        <p:nvSpPr>
+          <p:cNvPr id="13" name="TextBox 13"/>
+          <p:cNvSpPr txBox="1"/>
+          <p:nvPr/>
+        </p:nvSpPr>
+        <p:spPr>
+          <a:xfrm>
+            <a:off x="2487168" y="2642616"/>
+            <a:ext cx="6455664" cy="457200"/>
+          </a:xfrm>
+          <a:prstGeom prst="rect">
+            <a:avLst/>
+          </a:prstGeom>
+          <a:noFill/>
+        </p:spPr>
+        <p:txBody>
+          <a:bodyPr wrap="square" lIns="0" tIns="0" rIns="0" bIns="0" anchor="ctr" rtlCol="0"/>
+          <a:lstStyle/>
+          <a:p>
+            <a:pPr algn="l">
+              <a:lnSpc>
+                <a:spcPct val="130000"/>
+              </a:lnSpc>
+            </a:pPr>
+            <a:r>
+              <a:rPr lang="ja-JP" altLang="en-US" sz="1500" b="0">
+                <a:solidFill>
+                  <a:srgbClr val="14141A"/>
+                </a:solidFill>
+                <a:latin typeface="Yu Gothic"/>
+                <a:ea typeface="Yu Gothic"/>
+                <a:cs typeface="Yu Gothic"/>
+              </a:rPr>
+              <a:t>独立洗面台、浴室乾燥、モニター付きインターホン、エアコン設置済み</a:t>
+            </a:r>
+          </a:p>
+        </p:txBody>
+      </p:sp>
+      <p:sp>
+        <p:nvSpPr>
+          <p:cNvPr id="14" name="TextBox 14"/>
+          <p:cNvSpPr txBox="1"/>
+          <p:nvPr/>
+        </p:nvSpPr>
+        <p:spPr>
+          <a:xfrm>
+            <a:off x="9070848" y="2642616"/>
+            <a:ext cx="2157984" cy="457200"/>
+          </a:xfrm>
+          <a:prstGeom prst="rect">
+            <a:avLst/>
+          </a:prstGeom>
+          <a:noFill/>
+        </p:spPr>
+        <p:txBody>
+          <a:bodyPr wrap="square" lIns="0" tIns="0" rIns="0" bIns="0" anchor="ctr" rtlCol="0"/>
+          <a:lstStyle/>
+          <a:p>
+            <a:pPr algn="l">
+              <a:lnSpc>
+                <a:spcPct val="130000"/>
+              </a:lnSpc>
+            </a:pPr>
+            <a:r>
+              <a:rPr lang="ja-JP" altLang="en-US" sz="1500" b="0">
+                <a:solidFill>
+                  <a:srgbClr val="14141A"/>
+                </a:solidFill>
+                <a:latin typeface="Yu Gothic"/>
+                <a:ea typeface="Yu Gothic"/>
+                <a:cs typeface="Yu Gothic"/>
+              </a:rPr>
+              <a:t>譲れない</a:t>
+            </a:r>
+          </a:p>
+        </p:txBody>
+      </p:sp>
+      <p:sp>
+        <p:nvSpPr>
+          <p:cNvPr id="15" name="Shape 15"/>
           <p:cNvSpPr/>
           <p:nvPr/>
         </p:nvSpPr>
         <p:spPr>
           <a:xfrm>
-            <a:off x="6304788" y="1773936"/>
-            <a:ext cx="2320290" cy="38100"/>
+            <a:off x="841248" y="3094736"/>
+            <a:ext cx="10515600" cy="9525"/>
           </a:xfrm>
           <a:prstGeom prst="rect">
             <a:avLst/>
           </a:prstGeom>
           <a:solidFill>
-            <a:srgbClr val="FF5C77"/>
+            <a:srgbClr val="E7E7EE"/>
           </a:solidFill>
           <a:ln>
             <a:noFill/>
@@ -9696,155 +9827,137 @@
       </p:sp>
       <p:sp>
         <p:nvSpPr>
-          <p:cNvPr id="13" name="TextBox 13"/>
-          <p:cNvSpPr txBox="1"/>
-          <p:nvPr/>
-        </p:nvSpPr>
-        <p:spPr>
-          <a:xfrm>
-            <a:off x="6304788" y="2002536"/>
-            <a:ext cx="2320290" cy="320040"/>
-          </a:xfrm>
-          <a:prstGeom prst="rect">
-            <a:avLst/>
-          </a:prstGeom>
-          <a:noFill/>
-        </p:spPr>
-        <p:txBody>
-          <a:bodyPr wrap="square" lIns="0" tIns="0" rIns="0" bIns="0" anchor="t" rtlCol="0"/>
-          <a:lstStyle/>
-          <a:p>
-            <a:pPr algn="l">
-              <a:lnSpc>
-                <a:spcPct val="145000"/>
-              </a:lnSpc>
-            </a:pPr>
-            <a:r>
-              <a:rPr lang="ja-JP" altLang="en-US" sz="1200" b="1" spc="120">
-                <a:solidFill>
-                  <a:srgbClr val="FF5C77"/>
-                </a:solidFill>
-                <a:latin typeface="Yu Gothic"/>
-                <a:ea typeface="Yu Gothic"/>
-                <a:cs typeface="Yu Gothic"/>
-              </a:rPr>
-              <a:t>削らないもの</a:t>
-            </a:r>
-          </a:p>
-        </p:txBody>
-      </p:sp>
-      <p:sp>
-        <p:nvSpPr>
-          <p:cNvPr id="14" name="TextBox 14"/>
-          <p:cNvSpPr txBox="1"/>
-          <p:nvPr/>
-        </p:nvSpPr>
-        <p:spPr>
-          <a:xfrm>
-            <a:off x="6304788" y="2414016"/>
-            <a:ext cx="2320290" cy="1005840"/>
-          </a:xfrm>
-          <a:prstGeom prst="rect">
-            <a:avLst/>
-          </a:prstGeom>
-          <a:noFill/>
-        </p:spPr>
-        <p:txBody>
-          <a:bodyPr wrap="square" lIns="0" tIns="0" rIns="0" bIns="0" anchor="t" rtlCol="0"/>
-          <a:lstStyle/>
-          <a:p>
-            <a:pPr algn="l">
-              <a:lnSpc>
-                <a:spcPct val="125000"/>
-              </a:lnSpc>
-            </a:pPr>
-            <a:r>
-              <a:rPr lang="ja-JP" altLang="en-US" sz="2200" b="1">
-                <a:solidFill>
-                  <a:srgbClr val="14141A"/>
-                </a:solidFill>
-                <a:latin typeface="Yu Gothic"/>
-                <a:ea typeface="Yu Gothic"/>
-                <a:cs typeface="Yu Gothic"/>
-              </a:rPr>
-              <a:t>写真と、</a:t>
-            </a:r>
-          </a:p>
-          <a:p>
-            <a:pPr algn="l">
-              <a:lnSpc>
-                <a:spcPct val="125000"/>
-              </a:lnSpc>
-            </a:pPr>
-            <a:r>
-              <a:rPr lang="ja-JP" altLang="en-US" sz="2200" b="1">
-                <a:solidFill>
-                  <a:srgbClr val="14141A"/>
-                </a:solidFill>
-                <a:latin typeface="Yu Gothic"/>
-                <a:ea typeface="Yu Gothic"/>
-                <a:cs typeface="Yu Gothic"/>
-              </a:rPr>
-              <a:t>新婚旅行</a:t>
-            </a:r>
-          </a:p>
-        </p:txBody>
-      </p:sp>
-      <p:sp>
-        <p:nvSpPr>
-          <p:cNvPr id="15" name="TextBox 15"/>
-          <p:cNvSpPr txBox="1"/>
-          <p:nvPr/>
-        </p:nvSpPr>
-        <p:spPr>
-          <a:xfrm>
-            <a:off x="6304788" y="3511296"/>
-            <a:ext cx="2320290" cy="1444752"/>
-          </a:xfrm>
-          <a:prstGeom prst="rect">
-            <a:avLst/>
-          </a:prstGeom>
-          <a:noFill/>
-        </p:spPr>
-        <p:txBody>
-          <a:bodyPr wrap="square" lIns="0" tIns="0" rIns="0" bIns="0" anchor="t" rtlCol="0"/>
-          <a:lstStyle/>
-          <a:p>
-            <a:pPr algn="l">
-              <a:lnSpc>
-                <a:spcPct val="155000"/>
-              </a:lnSpc>
-            </a:pPr>
-            <a:r>
-              <a:rPr lang="ja-JP" altLang="en-US" sz="1400" b="0">
-                <a:solidFill>
-                  <a:srgbClr val="14141A"/>
-                </a:solidFill>
-                <a:latin typeface="Yu Gothic"/>
-                <a:ea typeface="Yu Gothic"/>
-                <a:cs typeface="Yu Gothic"/>
-              </a:rPr>
-              <a:t>収入が増える分から、月に決めた額を積み立てます。出産の費用もここから出します。</a:t>
-            </a:r>
-          </a:p>
-        </p:txBody>
-      </p:sp>
-      <p:sp>
-        <p:nvSpPr>
-          <p:cNvPr id="16" name="Shape 16"/>
+          <p:cNvPr id="16" name="TextBox 16"/>
+          <p:cNvSpPr txBox="1"/>
+          <p:nvPr/>
+        </p:nvSpPr>
+        <p:spPr>
+          <a:xfrm>
+            <a:off x="841248" y="3099816"/>
+            <a:ext cx="1517904" cy="457200"/>
+          </a:xfrm>
+          <a:prstGeom prst="rect">
+            <a:avLst/>
+          </a:prstGeom>
+          <a:noFill/>
+        </p:spPr>
+        <p:txBody>
+          <a:bodyPr wrap="square" lIns="0" tIns="0" rIns="0" bIns="0" anchor="ctr" rtlCol="0"/>
+          <a:lstStyle/>
+          <a:p>
+            <a:pPr algn="l">
+              <a:lnSpc>
+                <a:spcPct val="130000"/>
+              </a:lnSpc>
+            </a:pPr>
+            <a:r>
+              <a:rPr lang="ja-JP" altLang="en-US" sz="1500" b="0">
+                <a:solidFill>
+                  <a:srgbClr val="14141A"/>
+                </a:solidFill>
+                <a:latin typeface="Yu Gothic"/>
+                <a:ea typeface="Yu Gothic"/>
+                <a:cs typeface="Yu Gothic"/>
+              </a:rPr>
+              <a:t>建物</a:t>
+            </a:r>
+          </a:p>
+        </p:txBody>
+      </p:sp>
+      <p:sp>
+        <p:nvSpPr>
+          <p:cNvPr id="17" name="TextBox 17"/>
+          <p:cNvSpPr txBox="1"/>
+          <p:nvPr/>
+        </p:nvSpPr>
+        <p:spPr>
+          <a:xfrm>
+            <a:off x="2487168" y="3099816"/>
+            <a:ext cx="6455664" cy="457200"/>
+          </a:xfrm>
+          <a:prstGeom prst="rect">
+            <a:avLst/>
+          </a:prstGeom>
+          <a:noFill/>
+        </p:spPr>
+        <p:txBody>
+          <a:bodyPr wrap="square" lIns="0" tIns="0" rIns="0" bIns="0" anchor="ctr" rtlCol="0"/>
+          <a:lstStyle/>
+          <a:p>
+            <a:pPr algn="l">
+              <a:lnSpc>
+                <a:spcPct val="130000"/>
+              </a:lnSpc>
+            </a:pPr>
+            <a:r>
+              <a:rPr lang="ja-JP" altLang="en-US" sz="1500" b="0">
+                <a:solidFill>
+                  <a:srgbClr val="14141A"/>
+                </a:solidFill>
+                <a:latin typeface="Yu Gothic"/>
+                <a:ea typeface="Yu Gothic"/>
+                <a:cs typeface="Yu Gothic"/>
+              </a:rPr>
+              <a:t>築20年前後、オートロック</a:t>
+            </a:r>
+          </a:p>
+        </p:txBody>
+      </p:sp>
+      <p:sp>
+        <p:nvSpPr>
+          <p:cNvPr id="18" name="TextBox 18"/>
+          <p:cNvSpPr txBox="1"/>
+          <p:nvPr/>
+        </p:nvSpPr>
+        <p:spPr>
+          <a:xfrm>
+            <a:off x="9070848" y="3099816"/>
+            <a:ext cx="2157984" cy="457200"/>
+          </a:xfrm>
+          <a:prstGeom prst="rect">
+            <a:avLst/>
+          </a:prstGeom>
+          <a:noFill/>
+        </p:spPr>
+        <p:txBody>
+          <a:bodyPr wrap="square" lIns="0" tIns="0" rIns="0" bIns="0" anchor="ctr" rtlCol="0"/>
+          <a:lstStyle/>
+          <a:p>
+            <a:pPr algn="l">
+              <a:lnSpc>
+                <a:spcPct val="130000"/>
+              </a:lnSpc>
+            </a:pPr>
+            <a:r>
+              <a:rPr lang="ja-JP" altLang="en-US" sz="1500" b="0">
+                <a:solidFill>
+                  <a:srgbClr val="14141A"/>
+                </a:solidFill>
+                <a:latin typeface="Yu Gothic"/>
+                <a:ea typeface="Yu Gothic"/>
+                <a:cs typeface="Yu Gothic"/>
+              </a:rPr>
+              <a:t>譲れない</a:t>
+            </a:r>
+          </a:p>
+        </p:txBody>
+      </p:sp>
+      <p:sp>
+        <p:nvSpPr>
+          <p:cNvPr id="19" name="Shape 19"/>
           <p:cNvSpPr/>
           <p:nvPr/>
         </p:nvSpPr>
         <p:spPr>
           <a:xfrm>
-            <a:off x="9036558" y="1773936"/>
-            <a:ext cx="2320290" cy="38100"/>
+            <a:off x="841248" y="3551936"/>
+            <a:ext cx="10515600" cy="9525"/>
           </a:xfrm>
           <a:prstGeom prst="rect">
             <a:avLst/>
           </a:prstGeom>
           <a:solidFill>
-            <a:srgbClr val="6C5CE7"/>
+            <a:srgbClr val="E7E7EE"/>
           </a:solidFill>
           <a:ln>
             <a:noFill/>
@@ -9858,14 +9971,419 @@
       </p:sp>
       <p:sp>
         <p:nvSpPr>
-          <p:cNvPr id="17" name="TextBox 17"/>
-          <p:cNvSpPr txBox="1"/>
-          <p:nvPr/>
-        </p:nvSpPr>
-        <p:spPr>
-          <a:xfrm>
-            <a:off x="9036558" y="2002536"/>
-            <a:ext cx="2320290" cy="320040"/>
+          <p:cNvPr id="20" name="TextBox 20"/>
+          <p:cNvSpPr txBox="1"/>
+          <p:nvPr/>
+        </p:nvSpPr>
+        <p:spPr>
+          <a:xfrm>
+            <a:off x="841248" y="3557016"/>
+            <a:ext cx="1517904" cy="457200"/>
+          </a:xfrm>
+          <a:prstGeom prst="rect">
+            <a:avLst/>
+          </a:prstGeom>
+          <a:noFill/>
+        </p:spPr>
+        <p:txBody>
+          <a:bodyPr wrap="square" lIns="0" tIns="0" rIns="0" bIns="0" anchor="ctr" rtlCol="0"/>
+          <a:lstStyle/>
+          <a:p>
+            <a:pPr algn="l">
+              <a:lnSpc>
+                <a:spcPct val="130000"/>
+              </a:lnSpc>
+            </a:pPr>
+            <a:r>
+              <a:rPr lang="ja-JP" altLang="en-US" sz="1500" b="0">
+                <a:solidFill>
+                  <a:srgbClr val="14141A"/>
+                </a:solidFill>
+                <a:latin typeface="Yu Gothic"/>
+                <a:ea typeface="Yu Gothic"/>
+                <a:cs typeface="Yu Gothic"/>
+              </a:rPr>
+              <a:t>建物</a:t>
+            </a:r>
+          </a:p>
+        </p:txBody>
+      </p:sp>
+      <p:sp>
+        <p:nvSpPr>
+          <p:cNvPr id="21" name="TextBox 21"/>
+          <p:cNvSpPr txBox="1"/>
+          <p:nvPr/>
+        </p:nvSpPr>
+        <p:spPr>
+          <a:xfrm>
+            <a:off x="2487168" y="3557016"/>
+            <a:ext cx="6455664" cy="457200"/>
+          </a:xfrm>
+          <a:prstGeom prst="rect">
+            <a:avLst/>
+          </a:prstGeom>
+          <a:noFill/>
+        </p:spPr>
+        <p:txBody>
+          <a:bodyPr wrap="square" lIns="0" tIns="0" rIns="0" bIns="0" anchor="ctr" rtlCol="0"/>
+          <a:lstStyle/>
+          <a:p>
+            <a:pPr algn="l">
+              <a:lnSpc>
+                <a:spcPct val="130000"/>
+              </a:lnSpc>
+            </a:pPr>
+            <a:r>
+              <a:rPr lang="ja-JP" altLang="en-US" sz="1500" b="0">
+                <a:solidFill>
+                  <a:srgbClr val="14141A"/>
+                </a:solidFill>
+                <a:latin typeface="Yu Gothic"/>
+                <a:ea typeface="Yu Gothic"/>
+                <a:cs typeface="Yu Gothic"/>
+              </a:rPr>
+              <a:t>宅配ボックス、24時間ゴミ出し</a:t>
+            </a:r>
+          </a:p>
+        </p:txBody>
+      </p:sp>
+      <p:sp>
+        <p:nvSpPr>
+          <p:cNvPr id="22" name="TextBox 22"/>
+          <p:cNvSpPr txBox="1"/>
+          <p:nvPr/>
+        </p:nvSpPr>
+        <p:spPr>
+          <a:xfrm>
+            <a:off x="9070848" y="3557016"/>
+            <a:ext cx="2157984" cy="457200"/>
+          </a:xfrm>
+          <a:prstGeom prst="rect">
+            <a:avLst/>
+          </a:prstGeom>
+          <a:noFill/>
+        </p:spPr>
+        <p:txBody>
+          <a:bodyPr wrap="square" lIns="0" tIns="0" rIns="0" bIns="0" anchor="ctr" rtlCol="0"/>
+          <a:lstStyle/>
+          <a:p>
+            <a:pPr algn="l">
+              <a:lnSpc>
+                <a:spcPct val="130000"/>
+              </a:lnSpc>
+            </a:pPr>
+            <a:r>
+              <a:rPr lang="ja-JP" altLang="en-US" sz="1500" b="0">
+                <a:solidFill>
+                  <a:srgbClr val="14141A"/>
+                </a:solidFill>
+                <a:latin typeface="Yu Gothic"/>
+                <a:ea typeface="Yu Gothic"/>
+                <a:cs typeface="Yu Gothic"/>
+              </a:rPr>
+              <a:t>あると嬉しい</a:t>
+            </a:r>
+          </a:p>
+        </p:txBody>
+      </p:sp>
+      <p:sp>
+        <p:nvSpPr>
+          <p:cNvPr id="23" name="Shape 23"/>
+          <p:cNvSpPr/>
+          <p:nvPr/>
+        </p:nvSpPr>
+        <p:spPr>
+          <a:xfrm>
+            <a:off x="841248" y="4009136"/>
+            <a:ext cx="10515600" cy="9525"/>
+          </a:xfrm>
+          <a:prstGeom prst="rect">
+            <a:avLst/>
+          </a:prstGeom>
+          <a:solidFill>
+            <a:srgbClr val="E7E7EE"/>
+          </a:solidFill>
+          <a:ln>
+            <a:noFill/>
+          </a:ln>
+        </p:spPr>
+        <p:txBody>
+          <a:bodyPr wrap="square" lIns="0" tIns="0" rIns="0" bIns="0" anchor="ctr" rtlCol="0"/>
+          <a:lstStyle/>
+          <a:p/>
+        </p:txBody>
+      </p:sp>
+      <p:sp>
+        <p:nvSpPr>
+          <p:cNvPr id="24" name="TextBox 24"/>
+          <p:cNvSpPr txBox="1"/>
+          <p:nvPr/>
+        </p:nvSpPr>
+        <p:spPr>
+          <a:xfrm>
+            <a:off x="841248" y="4014216"/>
+            <a:ext cx="1517904" cy="457200"/>
+          </a:xfrm>
+          <a:prstGeom prst="rect">
+            <a:avLst/>
+          </a:prstGeom>
+          <a:noFill/>
+        </p:spPr>
+        <p:txBody>
+          <a:bodyPr wrap="square" lIns="0" tIns="0" rIns="0" bIns="0" anchor="ctr" rtlCol="0"/>
+          <a:lstStyle/>
+          <a:p>
+            <a:pPr algn="l">
+              <a:lnSpc>
+                <a:spcPct val="130000"/>
+              </a:lnSpc>
+            </a:pPr>
+            <a:r>
+              <a:rPr lang="ja-JP" altLang="en-US" sz="1500" b="0">
+                <a:solidFill>
+                  <a:srgbClr val="14141A"/>
+                </a:solidFill>
+                <a:latin typeface="Yu Gothic"/>
+                <a:ea typeface="Yu Gothic"/>
+                <a:cs typeface="Yu Gothic"/>
+              </a:rPr>
+              <a:t>お金</a:t>
+            </a:r>
+          </a:p>
+        </p:txBody>
+      </p:sp>
+      <p:sp>
+        <p:nvSpPr>
+          <p:cNvPr id="25" name="TextBox 25"/>
+          <p:cNvSpPr txBox="1"/>
+          <p:nvPr/>
+        </p:nvSpPr>
+        <p:spPr>
+          <a:xfrm>
+            <a:off x="2487168" y="4014216"/>
+            <a:ext cx="6455664" cy="457200"/>
+          </a:xfrm>
+          <a:prstGeom prst="rect">
+            <a:avLst/>
+          </a:prstGeom>
+          <a:noFill/>
+        </p:spPr>
+        <p:txBody>
+          <a:bodyPr wrap="square" lIns="0" tIns="0" rIns="0" bIns="0" anchor="ctr" rtlCol="0"/>
+          <a:lstStyle/>
+          <a:p>
+            <a:pPr algn="l">
+              <a:lnSpc>
+                <a:spcPct val="130000"/>
+              </a:lnSpc>
+            </a:pPr>
+            <a:r>
+              <a:rPr lang="ja-JP" altLang="en-US" sz="1500" b="0">
+                <a:solidFill>
+                  <a:srgbClr val="14141A"/>
+                </a:solidFill>
+                <a:latin typeface="Yu Gothic"/>
+                <a:ea typeface="Yu Gothic"/>
+                <a:cs typeface="Yu Gothic"/>
+              </a:rPr>
+              <a:t>ひとり10〜12万円（ふたりで20〜24万円）</a:t>
+            </a:r>
+          </a:p>
+        </p:txBody>
+      </p:sp>
+      <p:sp>
+        <p:nvSpPr>
+          <p:cNvPr id="26" name="TextBox 26"/>
+          <p:cNvSpPr txBox="1"/>
+          <p:nvPr/>
+        </p:nvSpPr>
+        <p:spPr>
+          <a:xfrm>
+            <a:off x="9070848" y="4014216"/>
+            <a:ext cx="2157984" cy="457200"/>
+          </a:xfrm>
+          <a:prstGeom prst="rect">
+            <a:avLst/>
+          </a:prstGeom>
+          <a:noFill/>
+        </p:spPr>
+        <p:txBody>
+          <a:bodyPr wrap="square" lIns="0" tIns="0" rIns="0" bIns="0" anchor="ctr" rtlCol="0"/>
+          <a:lstStyle/>
+          <a:p>
+            <a:pPr algn="l">
+              <a:lnSpc>
+                <a:spcPct val="130000"/>
+              </a:lnSpc>
+            </a:pPr>
+            <a:r>
+              <a:rPr lang="ja-JP" altLang="en-US" sz="1500" b="0">
+                <a:solidFill>
+                  <a:srgbClr val="14141A"/>
+                </a:solidFill>
+                <a:latin typeface="Yu Gothic"/>
+                <a:ea typeface="Yu Gothic"/>
+                <a:cs typeface="Yu Gothic"/>
+              </a:rPr>
+              <a:t>上限</a:t>
+            </a:r>
+          </a:p>
+        </p:txBody>
+      </p:sp>
+      <p:sp>
+        <p:nvSpPr>
+          <p:cNvPr id="27" name="Shape 27"/>
+          <p:cNvSpPr/>
+          <p:nvPr/>
+        </p:nvSpPr>
+        <p:spPr>
+          <a:xfrm>
+            <a:off x="841248" y="4466336"/>
+            <a:ext cx="10515600" cy="9525"/>
+          </a:xfrm>
+          <a:prstGeom prst="rect">
+            <a:avLst/>
+          </a:prstGeom>
+          <a:solidFill>
+            <a:srgbClr val="E7E7EE"/>
+          </a:solidFill>
+          <a:ln>
+            <a:noFill/>
+          </a:ln>
+        </p:spPr>
+        <p:txBody>
+          <a:bodyPr wrap="square" lIns="0" tIns="0" rIns="0" bIns="0" anchor="ctr" rtlCol="0"/>
+          <a:lstStyle/>
+          <a:p/>
+        </p:txBody>
+      </p:sp>
+      <p:sp>
+        <p:nvSpPr>
+          <p:cNvPr id="28" name="TextBox 28"/>
+          <p:cNvSpPr txBox="1"/>
+          <p:nvPr/>
+        </p:nvSpPr>
+        <p:spPr>
+          <a:xfrm>
+            <a:off x="841248" y="4471416"/>
+            <a:ext cx="1517904" cy="457200"/>
+          </a:xfrm>
+          <a:prstGeom prst="rect">
+            <a:avLst/>
+          </a:prstGeom>
+          <a:noFill/>
+        </p:spPr>
+        <p:txBody>
+          <a:bodyPr wrap="square" lIns="0" tIns="0" rIns="0" bIns="0" anchor="ctr" rtlCol="0"/>
+          <a:lstStyle/>
+          <a:p>
+            <a:pPr algn="l">
+              <a:lnSpc>
+                <a:spcPct val="130000"/>
+              </a:lnSpc>
+            </a:pPr>
+            <a:r>
+              <a:rPr lang="ja-JP" altLang="en-US" sz="1500" b="0">
+                <a:solidFill>
+                  <a:srgbClr val="14141A"/>
+                </a:solidFill>
+                <a:latin typeface="Yu Gothic"/>
+                <a:ea typeface="Yu Gothic"/>
+                <a:cs typeface="Yu Gothic"/>
+              </a:rPr>
+              <a:t>子ども</a:t>
+            </a:r>
+          </a:p>
+        </p:txBody>
+      </p:sp>
+      <p:sp>
+        <p:nvSpPr>
+          <p:cNvPr id="29" name="TextBox 29"/>
+          <p:cNvSpPr txBox="1"/>
+          <p:nvPr/>
+        </p:nvSpPr>
+        <p:spPr>
+          <a:xfrm>
+            <a:off x="2487168" y="4471416"/>
+            <a:ext cx="6455664" cy="457200"/>
+          </a:xfrm>
+          <a:prstGeom prst="rect">
+            <a:avLst/>
+          </a:prstGeom>
+          <a:noFill/>
+        </p:spPr>
+        <p:txBody>
+          <a:bodyPr wrap="square" lIns="0" tIns="0" rIns="0" bIns="0" anchor="ctr" rtlCol="0"/>
+          <a:lstStyle/>
+          <a:p>
+            <a:pPr algn="l">
+              <a:lnSpc>
+                <a:spcPct val="130000"/>
+              </a:lnSpc>
+            </a:pPr>
+            <a:r>
+              <a:rPr lang="ja-JP" altLang="en-US" sz="1500" b="0">
+                <a:solidFill>
+                  <a:srgbClr val="14141A"/>
+                </a:solidFill>
+                <a:latin typeface="Yu Gothic"/>
+                <a:ea typeface="Yu Gothic"/>
+                <a:cs typeface="Yu Gothic"/>
+              </a:rPr>
+              <a:t>保育園や小児科の距離は、一旦保留</a:t>
+            </a:r>
+          </a:p>
+        </p:txBody>
+      </p:sp>
+      <p:sp>
+        <p:nvSpPr>
+          <p:cNvPr id="30" name="TextBox 30"/>
+          <p:cNvSpPr txBox="1"/>
+          <p:nvPr/>
+        </p:nvSpPr>
+        <p:spPr>
+          <a:xfrm>
+            <a:off x="9070848" y="4471416"/>
+            <a:ext cx="2157984" cy="457200"/>
+          </a:xfrm>
+          <a:prstGeom prst="rect">
+            <a:avLst/>
+          </a:prstGeom>
+          <a:noFill/>
+        </p:spPr>
+        <p:txBody>
+          <a:bodyPr wrap="square" lIns="0" tIns="0" rIns="0" bIns="0" anchor="ctr" rtlCol="0"/>
+          <a:lstStyle/>
+          <a:p>
+            <a:pPr algn="l">
+              <a:lnSpc>
+                <a:spcPct val="130000"/>
+              </a:lnSpc>
+            </a:pPr>
+            <a:r>
+              <a:rPr lang="ja-JP" altLang="en-US" sz="1500" b="0">
+                <a:solidFill>
+                  <a:srgbClr val="14141A"/>
+                </a:solidFill>
+                <a:latin typeface="Yu Gothic"/>
+                <a:ea typeface="Yu Gothic"/>
+                <a:cs typeface="Yu Gothic"/>
+              </a:rPr>
+              <a:t>あとで</a:t>
+            </a:r>
+          </a:p>
+        </p:txBody>
+      </p:sp>
+      <p:sp>
+        <p:nvSpPr>
+          <p:cNvPr id="31" name="TextBox 31"/>
+          <p:cNvSpPr txBox="1"/>
+          <p:nvPr/>
+        </p:nvSpPr>
+        <p:spPr>
+          <a:xfrm>
+            <a:off x="841248" y="5111496"/>
+            <a:ext cx="10515600" cy="457200"/>
           </a:xfrm>
           <a:prstGeom prst="rect">
             <a:avLst/>
@@ -9882,118 +10400,22 @@
               </a:lnSpc>
             </a:pPr>
             <a:r>
-              <a:rPr lang="ja-JP" altLang="en-US" sz="1200" b="1" spc="120">
-                <a:solidFill>
-                  <a:srgbClr val="6C5CE7"/>
-                </a:solidFill>
-                <a:latin typeface="Yu Gothic"/>
-                <a:ea typeface="Yu Gothic"/>
-                <a:cs typeface="Yu Gothic"/>
-              </a:rPr>
-              <a:t>後回し</a:t>
-            </a:r>
-          </a:p>
-        </p:txBody>
-      </p:sp>
-      <p:sp>
-        <p:nvSpPr>
-          <p:cNvPr id="18" name="TextBox 18"/>
-          <p:cNvSpPr txBox="1"/>
-          <p:nvPr/>
-        </p:nvSpPr>
-        <p:spPr>
-          <a:xfrm>
-            <a:off x="9036558" y="2414016"/>
-            <a:ext cx="2320290" cy="1005840"/>
-          </a:xfrm>
-          <a:prstGeom prst="rect">
-            <a:avLst/>
-          </a:prstGeom>
-          <a:noFill/>
-        </p:spPr>
-        <p:txBody>
-          <a:bodyPr wrap="square" lIns="0" tIns="0" rIns="0" bIns="0" anchor="t" rtlCol="0"/>
-          <a:lstStyle/>
-          <a:p>
-            <a:pPr algn="l">
-              <a:lnSpc>
-                <a:spcPct val="125000"/>
-              </a:lnSpc>
-            </a:pPr>
-            <a:r>
-              <a:rPr lang="ja-JP" altLang="en-US" sz="2200" b="1">
-                <a:solidFill>
-                  <a:srgbClr val="14141A"/>
-                </a:solidFill>
-                <a:latin typeface="Yu Gothic"/>
-                <a:ea typeface="Yu Gothic"/>
-                <a:cs typeface="Yu Gothic"/>
-              </a:rPr>
-              <a:t>式と、</a:t>
-            </a:r>
-          </a:p>
-          <a:p>
-            <a:pPr algn="l">
-              <a:lnSpc>
-                <a:spcPct val="125000"/>
-              </a:lnSpc>
-            </a:pPr>
-            <a:r>
-              <a:rPr lang="ja-JP" altLang="en-US" sz="2200" b="1">
-                <a:solidFill>
-                  <a:srgbClr val="14141A"/>
-                </a:solidFill>
-                <a:latin typeface="Yu Gothic"/>
-                <a:ea typeface="Yu Gothic"/>
-                <a:cs typeface="Yu Gothic"/>
-              </a:rPr>
-              <a:t>指輪</a:t>
-            </a:r>
-          </a:p>
-        </p:txBody>
-      </p:sp>
-      <p:sp>
-        <p:nvSpPr>
-          <p:cNvPr id="19" name="TextBox 19"/>
-          <p:cNvSpPr txBox="1"/>
-          <p:nvPr/>
-        </p:nvSpPr>
-        <p:spPr>
-          <a:xfrm>
-            <a:off x="9036558" y="3511296"/>
-            <a:ext cx="2320290" cy="1444752"/>
-          </a:xfrm>
-          <a:prstGeom prst="rect">
-            <a:avLst/>
-          </a:prstGeom>
-          <a:noFill/>
-        </p:spPr>
-        <p:txBody>
-          <a:bodyPr wrap="square" lIns="0" tIns="0" rIns="0" bIns="0" anchor="t" rtlCol="0"/>
-          <a:lstStyle/>
-          <a:p>
-            <a:pPr algn="l">
-              <a:lnSpc>
-                <a:spcPct val="155000"/>
-              </a:lnSpc>
-            </a:pPr>
-            <a:r>
-              <a:rPr lang="ja-JP" altLang="en-US" sz="1400" b="0">
-                <a:solidFill>
-                  <a:srgbClr val="14141A"/>
-                </a:solidFill>
-                <a:latin typeface="Yu Gothic"/>
-                <a:ea typeface="Yu Gothic"/>
-                <a:cs typeface="Yu Gothic"/>
-              </a:rPr>
-              <a:t>時期も規模も、まだ決めません。決めたくなったら、そのとき決めます。</a:t>
-            </a:r>
-          </a:p>
-        </p:txBody>
-      </p:sp>
-      <p:sp>
-        <p:nvSpPr>
-          <p:cNvPr id="20" name="TextBox 20"/>
+              <a:rPr lang="ja-JP" altLang="en-US" sz="1150" b="0">
+                <a:solidFill>
+                  <a:srgbClr val="6B6B76"/>
+                </a:solidFill>
+                <a:latin typeface="Yu Gothic"/>
+                <a:ea typeface="Yu Gothic"/>
+                <a:cs typeface="Yu Gothic"/>
+              </a:rPr>
+              <a:t>※広さそのものへのこだわりはありません。設備と場所を優先します。</a:t>
+            </a:r>
+          </a:p>
+        </p:txBody>
+      </p:sp>
+      <p:sp>
+        <p:nvSpPr>
+          <p:cNvPr id="32" name="TextBox 32"/>
           <p:cNvSpPr txBox="1"/>
           <p:nvPr/>
         </p:nvSpPr>
@@ -10025,14 +10447,14 @@
                 <a:ea typeface="Yu Gothic"/>
                 <a:cs typeface="Yu Gothic"/>
               </a:rPr>
-              <a:t>いくらずつ出すかは、次のページで決めます。</a:t>
-            </a:r>
-          </a:p>
-        </p:txBody>
-      </p:sp>
-      <p:sp>
-        <p:nvSpPr>
-          <p:cNvPr id="21" name="TextBox 21"/>
+              <a:t>決まっているのはここまでです。残りは、見ながら足します。</a:t>
+            </a:r>
+          </a:p>
+        </p:txBody>
+      </p:sp>
+      <p:sp>
+        <p:nvSpPr>
+          <p:cNvPr id="33" name="TextBox 33"/>
           <p:cNvSpPr txBox="1"/>
           <p:nvPr/>
         </p:nvSpPr>
@@ -10071,7 +10493,7 @@
       </p:sp>
       <p:sp>
         <p:nvSpPr>
-          <p:cNvPr id="22" name="TextBox 22"/>
+          <p:cNvPr id="34" name="TextBox 34"/>
           <p:cNvSpPr txBox="1"/>
           <p:nvPr/>
         </p:nvSpPr>
@@ -10175,7 +10597,7 @@
                 <a:ea typeface="Yu Gothic"/>
                 <a:cs typeface="Yu Gothic"/>
               </a:rPr>
-              <a:t>生活費の決め方</a:t>
+              <a:t>生活費</a:t>
             </a:r>
           </a:p>
         </p:txBody>
@@ -10214,158 +10636,27 @@
                 <a:ea typeface="Yu Gothic Medium"/>
                 <a:cs typeface="Yu Gothic Medium"/>
               </a:rPr>
-              <a:t>負担の割合は、</a:t>
-            </a:r>
-            <a:r>
-              <a:rPr lang="ja-JP" altLang="en-US" sz="2200" b="0">
-                <a:solidFill>
-                  <a:srgbClr val="14141A"/>
-                </a:solidFill>
-                <a:highlight>
-                  <a:srgbClr val="FFD93D"/>
-                </a:highlight>
-                <a:latin typeface="Yu Gothic Medium"/>
-                <a:ea typeface="Yu Gothic Medium"/>
-                <a:cs typeface="Yu Gothic Medium"/>
-              </a:rPr>
-              <a:t>半年ごと</a:t>
-            </a:r>
-            <a:r>
-              <a:rPr lang="ja-JP" altLang="en-US" sz="2200" b="0">
-                <a:solidFill>
-                  <a:srgbClr val="14141A"/>
-                </a:solidFill>
-                <a:latin typeface="Yu Gothic Medium"/>
-                <a:ea typeface="Yu Gothic Medium"/>
-                <a:cs typeface="Yu Gothic Medium"/>
-              </a:rPr>
-              <a:t>に決め直します。お金で足りない分は、家事で補います。</a:t>
-            </a:r>
-          </a:p>
-        </p:txBody>
-      </p:sp>
-      <p:sp>
-        <p:nvSpPr>
-          <p:cNvPr id="4" name="TextBox 4"/>
-          <p:cNvSpPr txBox="1"/>
-          <p:nvPr/>
-        </p:nvSpPr>
-        <p:spPr>
-          <a:xfrm>
-            <a:off x="841248" y="1924812"/>
-            <a:ext cx="2203704" cy="310896"/>
-          </a:xfrm>
-          <a:prstGeom prst="rect">
-            <a:avLst/>
-          </a:prstGeom>
-          <a:noFill/>
-        </p:spPr>
-        <p:txBody>
-          <a:bodyPr wrap="square" lIns="0" tIns="0" rIns="0" bIns="0" anchor="t" rtlCol="0"/>
-          <a:lstStyle/>
-          <a:p>
-            <a:pPr algn="ctr">
-              <a:lnSpc>
-                <a:spcPct val="145000"/>
-              </a:lnSpc>
-            </a:pPr>
-            <a:r>
-              <a:rPr lang="ja-JP" altLang="en-US" sz="1200" b="1" spc="80">
-                <a:solidFill>
-                  <a:srgbClr val="6B6B76"/>
-                </a:solidFill>
-                <a:latin typeface="Yu Gothic"/>
-                <a:ea typeface="Yu Gothic"/>
-                <a:cs typeface="Yu Gothic"/>
-              </a:rPr>
-              <a:t>半年に一度</a:t>
-            </a:r>
-          </a:p>
-        </p:txBody>
-      </p:sp>
-      <p:sp>
-        <p:nvSpPr>
-          <p:cNvPr id="5" name="Shape 5"/>
+              <a:t>二人の財布はひとつにして、見える化します。削らないものだけ、先に決めます。</a:t>
+            </a:r>
+          </a:p>
+        </p:txBody>
+      </p:sp>
+      <p:sp>
+        <p:nvSpPr>
+          <p:cNvPr id="4" name="Shape 4"/>
           <p:cNvSpPr/>
           <p:nvPr/>
         </p:nvSpPr>
         <p:spPr>
           <a:xfrm>
-            <a:off x="841248" y="2336292"/>
-            <a:ext cx="2203704" cy="1600200"/>
+            <a:off x="841248" y="1773936"/>
+            <a:ext cx="2320290" cy="38100"/>
           </a:xfrm>
           <a:prstGeom prst="rect">
             <a:avLst/>
           </a:prstGeom>
           <a:solidFill>
-            <a:srgbClr val="FFFFFF"/>
-          </a:solidFill>
-          <a:ln w="25400">
-            <a:solidFill>
-              <a:srgbClr val="14141A"/>
-            </a:solidFill>
-          </a:ln>
-        </p:spPr>
-        <p:txBody>
-          <a:bodyPr wrap="square" lIns="0" tIns="0" rIns="0" bIns="0" anchor="ctr" rtlCol="0"/>
-          <a:lstStyle/>
-          <a:p>
-            <a:pPr algn="ctr">
-              <a:lnSpc>
-                <a:spcPct val="130000"/>
-              </a:lnSpc>
-            </a:pPr>
-            <a:r>
-              <a:rPr lang="ja-JP" altLang="en-US" sz="2100" b="1">
-                <a:solidFill>
-                  <a:srgbClr val="14141A"/>
-                </a:solidFill>
-                <a:latin typeface="Yu Gothic"/>
-                <a:ea typeface="Yu Gothic"/>
-                <a:cs typeface="Yu Gothic"/>
-              </a:rPr>
-              <a:t>お互いの</a:t>
-            </a:r>
-          </a:p>
-          <a:p>
-            <a:pPr algn="ctr">
-              <a:lnSpc>
-                <a:spcPct val="130000"/>
-              </a:lnSpc>
-            </a:pPr>
-            <a:r>
-              <a:rPr lang="ja-JP" altLang="en-US" sz="2100" b="1">
-                <a:solidFill>
-                  <a:srgbClr val="14141A"/>
-                </a:solidFill>
-                <a:latin typeface="Yu Gothic"/>
-                <a:ea typeface="Yu Gothic"/>
-                <a:cs typeface="Yu Gothic"/>
-              </a:rPr>
-              <a:t>月収を見る</a:t>
-            </a:r>
-          </a:p>
-        </p:txBody>
-      </p:sp>
-      <p:sp>
-        <p:nvSpPr>
-          <p:cNvPr id="6" name="Shape 6"/>
-          <p:cNvSpPr/>
-          <p:nvPr/>
-        </p:nvSpPr>
-        <p:spPr>
-          <a:xfrm>
-            <a:off x="3172968" y="3067812"/>
-            <a:ext cx="310896" cy="137160"/>
-          </a:xfrm>
-          <a:prstGeom prst="rightArrow">
-            <a:avLst>
-              <a:gd name="adj1" fmla="val 50000"/>
-              <a:gd name="adj2" fmla="val 55000"/>
-            </a:avLst>
-          </a:prstGeom>
-          <a:solidFill>
-            <a:srgbClr val="14141A"/>
+            <a:srgbClr val="00C4B3"/>
           </a:solidFill>
           <a:ln>
             <a:noFill/>
@@ -10379,14 +10670,110 @@
       </p:sp>
       <p:sp>
         <p:nvSpPr>
+          <p:cNvPr id="5" name="TextBox 5"/>
+          <p:cNvSpPr txBox="1"/>
+          <p:nvPr/>
+        </p:nvSpPr>
+        <p:spPr>
+          <a:xfrm>
+            <a:off x="841248" y="2002536"/>
+            <a:ext cx="2320290" cy="320040"/>
+          </a:xfrm>
+          <a:prstGeom prst="rect">
+            <a:avLst/>
+          </a:prstGeom>
+          <a:noFill/>
+        </p:spPr>
+        <p:txBody>
+          <a:bodyPr wrap="square" lIns="0" tIns="0" rIns="0" bIns="0" anchor="t" rtlCol="0"/>
+          <a:lstStyle/>
+          <a:p>
+            <a:pPr algn="l">
+              <a:lnSpc>
+                <a:spcPct val="145000"/>
+              </a:lnSpc>
+            </a:pPr>
+            <a:r>
+              <a:rPr lang="ja-JP" altLang="en-US" sz="1200" b="1" spc="120">
+                <a:solidFill>
+                  <a:srgbClr val="00C4B3"/>
+                </a:solidFill>
+                <a:latin typeface="Yu Gothic"/>
+                <a:ea typeface="Yu Gothic"/>
+                <a:cs typeface="Yu Gothic"/>
+              </a:rPr>
+              <a:t>家賃</a:t>
+            </a:r>
+          </a:p>
+        </p:txBody>
+      </p:sp>
+      <p:sp>
+        <p:nvSpPr>
+          <p:cNvPr id="6" name="TextBox 6"/>
+          <p:cNvSpPr txBox="1"/>
+          <p:nvPr/>
+        </p:nvSpPr>
+        <p:spPr>
+          <a:xfrm>
+            <a:off x="841248" y="2414016"/>
+            <a:ext cx="2320290" cy="1005840"/>
+          </a:xfrm>
+          <a:prstGeom prst="rect">
+            <a:avLst/>
+          </a:prstGeom>
+          <a:noFill/>
+        </p:spPr>
+        <p:txBody>
+          <a:bodyPr wrap="square" lIns="0" tIns="0" rIns="0" bIns="0" anchor="t" rtlCol="0"/>
+          <a:lstStyle/>
+          <a:p>
+            <a:pPr algn="l">
+              <a:lnSpc>
+                <a:spcPct val="125000"/>
+              </a:lnSpc>
+            </a:pPr>
+            <a:r>
+              <a:rPr lang="ja-JP" altLang="en-US" sz="2200" b="1">
+                <a:solidFill>
+                  <a:srgbClr val="14141A"/>
+                </a:solidFill>
+                <a:latin typeface="Yu Gothic"/>
+                <a:ea typeface="Yu Gothic"/>
+                <a:cs typeface="Yu Gothic"/>
+              </a:rPr>
+              <a:t>ふたりで</a:t>
+            </a:r>
+          </a:p>
+          <a:p>
+            <a:pPr algn="l">
+              <a:lnSpc>
+                <a:spcPct val="125000"/>
+              </a:lnSpc>
+            </a:pPr>
+            <a:r>
+              <a:rPr lang="ja-JP" altLang="en-US" sz="2200" b="1">
+                <a:solidFill>
+                  <a:srgbClr val="14141A"/>
+                </a:solidFill>
+                <a:latin typeface="Yu Gothic"/>
+                <a:ea typeface="Yu Gothic"/>
+                <a:cs typeface="Yu Gothic"/>
+              </a:rPr>
+              <a:t>月20〜24万まで</a:t>
+            </a:r>
+          </a:p>
+        </p:txBody>
+      </p:sp>
+      <p:sp>
+        <p:nvSpPr>
           <p:cNvPr id="7" name="TextBox 7"/>
           <p:cNvSpPr txBox="1"/>
           <p:nvPr/>
         </p:nvSpPr>
         <p:spPr>
           <a:xfrm>
-            <a:off x="3611880" y="1924812"/>
-            <a:ext cx="2203704" cy="310896"/>
+            <a:off x="841248" y="3511296"/>
+            <a:ext cx="2320290" cy="1444752"/>
           </a:xfrm>
           <a:prstGeom prst="rect">
             <a:avLst/>
@@ -10397,21 +10784,21 @@
           <a:bodyPr wrap="square" lIns="0" tIns="0" rIns="0" bIns="0" anchor="t" rtlCol="0"/>
           <a:lstStyle/>
           <a:p>
-            <a:pPr algn="ctr">
-              <a:lnSpc>
-                <a:spcPct val="145000"/>
-              </a:lnSpc>
-            </a:pPr>
-            <a:r>
-              <a:rPr lang="ja-JP" altLang="en-US" sz="1200" b="1" spc="80">
-                <a:solidFill>
-                  <a:srgbClr val="6B6B76"/>
-                </a:solidFill>
-                <a:latin typeface="Yu Gothic"/>
-                <a:ea typeface="Yu Gothic"/>
-                <a:cs typeface="Yu Gothic"/>
-              </a:rPr>
-              <a:t>そのつど</a:t>
+            <a:pPr algn="l">
+              <a:lnSpc>
+                <a:spcPct val="155000"/>
+              </a:lnSpc>
+            </a:pPr>
+            <a:r>
+              <a:rPr lang="ja-JP" altLang="en-US" sz="1400" b="0">
+                <a:solidFill>
+                  <a:srgbClr val="14141A"/>
+                </a:solidFill>
+                <a:latin typeface="Yu Gothic"/>
+                <a:ea typeface="Yu Gothic"/>
+                <a:cs typeface="Yu Gothic"/>
+              </a:rPr>
+              <a:t>ひとり10〜12万が目安です。割合は固定せず、半年ごとに決めます。</a:t>
             </a:r>
           </a:p>
         </p:txBody>
@@ -10424,274 +10811,8 @@
         </p:nvSpPr>
         <p:spPr>
           <a:xfrm>
-            <a:off x="3611880" y="2336292"/>
-            <a:ext cx="2203704" cy="1600200"/>
-          </a:xfrm>
-          <a:prstGeom prst="rect">
-            <a:avLst/>
-          </a:prstGeom>
-          <a:solidFill>
-            <a:srgbClr val="FFFFFF"/>
-          </a:solidFill>
-          <a:ln w="25400">
-            <a:solidFill>
-              <a:srgbClr val="14141A"/>
-            </a:solidFill>
-          </a:ln>
-        </p:spPr>
-        <p:txBody>
-          <a:bodyPr wrap="square" lIns="0" tIns="0" rIns="0" bIns="0" anchor="ctr" rtlCol="0"/>
-          <a:lstStyle/>
-          <a:p>
-            <a:pPr algn="ctr">
-              <a:lnSpc>
-                <a:spcPct val="130000"/>
-              </a:lnSpc>
-            </a:pPr>
-            <a:r>
-              <a:rPr lang="ja-JP" altLang="en-US" sz="2100" b="1">
-                <a:solidFill>
-                  <a:srgbClr val="14141A"/>
-                </a:solidFill>
-                <a:latin typeface="Yu Gothic"/>
-                <a:ea typeface="Yu Gothic"/>
-                <a:cs typeface="Yu Gothic"/>
-              </a:rPr>
-              <a:t>負担の割合を</a:t>
-            </a:r>
-          </a:p>
-          <a:p>
-            <a:pPr algn="ctr">
-              <a:lnSpc>
-                <a:spcPct val="130000"/>
-              </a:lnSpc>
-            </a:pPr>
-            <a:r>
-              <a:rPr lang="ja-JP" altLang="en-US" sz="2100" b="1">
-                <a:solidFill>
-                  <a:srgbClr val="14141A"/>
-                </a:solidFill>
-                <a:latin typeface="Yu Gothic"/>
-                <a:ea typeface="Yu Gothic"/>
-                <a:cs typeface="Yu Gothic"/>
-              </a:rPr>
-              <a:t>決める</a:t>
-            </a:r>
-          </a:p>
-        </p:txBody>
-      </p:sp>
-      <p:sp>
-        <p:nvSpPr>
-          <p:cNvPr id="9" name="Shape 9"/>
-          <p:cNvSpPr/>
-          <p:nvPr/>
-        </p:nvSpPr>
-        <p:spPr>
-          <a:xfrm>
-            <a:off x="5943600" y="3067812"/>
-            <a:ext cx="310896" cy="137160"/>
-          </a:xfrm>
-          <a:prstGeom prst="rightArrow">
-            <a:avLst>
-              <a:gd name="adj1" fmla="val 50000"/>
-              <a:gd name="adj2" fmla="val 55000"/>
-            </a:avLst>
-          </a:prstGeom>
-          <a:solidFill>
-            <a:srgbClr val="14141A"/>
-          </a:solidFill>
-          <a:ln>
-            <a:noFill/>
-          </a:ln>
-        </p:spPr>
-        <p:txBody>
-          <a:bodyPr wrap="square" lIns="0" tIns="0" rIns="0" bIns="0" anchor="ctr" rtlCol="0"/>
-          <a:lstStyle/>
-          <a:p/>
-        </p:txBody>
-      </p:sp>
-      <p:sp>
-        <p:nvSpPr>
-          <p:cNvPr id="10" name="TextBox 10"/>
-          <p:cNvSpPr txBox="1"/>
-          <p:nvPr/>
-        </p:nvSpPr>
-        <p:spPr>
-          <a:xfrm>
-            <a:off x="6382512" y="1924812"/>
-            <a:ext cx="2203704" cy="310896"/>
-          </a:xfrm>
-          <a:prstGeom prst="rect">
-            <a:avLst/>
-          </a:prstGeom>
-          <a:noFill/>
-        </p:spPr>
-        <p:txBody>
-          <a:bodyPr wrap="square" lIns="0" tIns="0" rIns="0" bIns="0" anchor="t" rtlCol="0"/>
-          <a:lstStyle/>
-          <a:p>
-            <a:pPr algn="ctr">
-              <a:lnSpc>
-                <a:spcPct val="145000"/>
-              </a:lnSpc>
-            </a:pPr>
-            <a:r>
-              <a:rPr lang="ja-JP" altLang="en-US" sz="1200" b="1" spc="80">
-                <a:solidFill>
-                  <a:srgbClr val="6B6B76"/>
-                </a:solidFill>
-                <a:latin typeface="Yu Gothic"/>
-                <a:ea typeface="Yu Gothic"/>
-                <a:cs typeface="Yu Gothic"/>
-              </a:rPr>
-              <a:t>足りないときは</a:t>
-            </a:r>
-          </a:p>
-        </p:txBody>
-      </p:sp>
-      <p:sp>
-        <p:nvSpPr>
-          <p:cNvPr id="11" name="Shape 11"/>
-          <p:cNvSpPr/>
-          <p:nvPr/>
-        </p:nvSpPr>
-        <p:spPr>
-          <a:xfrm>
-            <a:off x="6382512" y="2336292"/>
-            <a:ext cx="2203704" cy="1600200"/>
-          </a:xfrm>
-          <a:prstGeom prst="rect">
-            <a:avLst/>
-          </a:prstGeom>
-          <a:solidFill>
-            <a:srgbClr val="FFFFFF"/>
-          </a:solidFill>
-          <a:ln w="25400">
-            <a:solidFill>
-              <a:srgbClr val="14141A"/>
-            </a:solidFill>
-          </a:ln>
-        </p:spPr>
-        <p:txBody>
-          <a:bodyPr wrap="square" lIns="0" tIns="0" rIns="0" bIns="0" anchor="ctr" rtlCol="0"/>
-          <a:lstStyle/>
-          <a:p>
-            <a:pPr algn="ctr">
-              <a:lnSpc>
-                <a:spcPct val="130000"/>
-              </a:lnSpc>
-            </a:pPr>
-            <a:r>
-              <a:rPr lang="ja-JP" altLang="en-US" sz="2100" b="1">
-                <a:solidFill>
-                  <a:srgbClr val="14141A"/>
-                </a:solidFill>
-                <a:latin typeface="Yu Gothic"/>
-                <a:ea typeface="Yu Gothic"/>
-                <a:cs typeface="Yu Gothic"/>
-              </a:rPr>
-              <a:t>家事で</a:t>
-            </a:r>
-          </a:p>
-          <a:p>
-            <a:pPr algn="ctr">
-              <a:lnSpc>
-                <a:spcPct val="130000"/>
-              </a:lnSpc>
-            </a:pPr>
-            <a:r>
-              <a:rPr lang="ja-JP" altLang="en-US" sz="2100" b="1">
-                <a:solidFill>
-                  <a:srgbClr val="14141A"/>
-                </a:solidFill>
-                <a:latin typeface="Yu Gothic"/>
-                <a:ea typeface="Yu Gothic"/>
-                <a:cs typeface="Yu Gothic"/>
-              </a:rPr>
-              <a:t>補う</a:t>
-            </a:r>
-          </a:p>
-        </p:txBody>
-      </p:sp>
-      <p:sp>
-        <p:nvSpPr>
-          <p:cNvPr id="12" name="Shape 12"/>
-          <p:cNvSpPr/>
-          <p:nvPr/>
-        </p:nvSpPr>
-        <p:spPr>
-          <a:xfrm>
-            <a:off x="8714232" y="3067812"/>
-            <a:ext cx="310896" cy="137160"/>
-          </a:xfrm>
-          <a:prstGeom prst="rightArrow">
-            <a:avLst>
-              <a:gd name="adj1" fmla="val 50000"/>
-              <a:gd name="adj2" fmla="val 55000"/>
-            </a:avLst>
-          </a:prstGeom>
-          <a:solidFill>
-            <a:srgbClr val="14141A"/>
-          </a:solidFill>
-          <a:ln>
-            <a:noFill/>
-          </a:ln>
-        </p:spPr>
-        <p:txBody>
-          <a:bodyPr wrap="square" lIns="0" tIns="0" rIns="0" bIns="0" anchor="ctr" rtlCol="0"/>
-          <a:lstStyle/>
-          <a:p/>
-        </p:txBody>
-      </p:sp>
-      <p:sp>
-        <p:nvSpPr>
-          <p:cNvPr id="13" name="TextBox 13"/>
-          <p:cNvSpPr txBox="1"/>
-          <p:nvPr/>
-        </p:nvSpPr>
-        <p:spPr>
-          <a:xfrm>
-            <a:off x="9153144" y="1924812"/>
-            <a:ext cx="2203704" cy="310896"/>
-          </a:xfrm>
-          <a:prstGeom prst="rect">
-            <a:avLst/>
-          </a:prstGeom>
-          <a:noFill/>
-        </p:spPr>
-        <p:txBody>
-          <a:bodyPr wrap="square" lIns="0" tIns="0" rIns="0" bIns="0" anchor="t" rtlCol="0"/>
-          <a:lstStyle/>
-          <a:p>
-            <a:pPr algn="ctr">
-              <a:lnSpc>
-                <a:spcPct val="145000"/>
-              </a:lnSpc>
-            </a:pPr>
-            <a:r>
-              <a:rPr lang="ja-JP" altLang="en-US" sz="1200" b="1" spc="80">
-                <a:solidFill>
-                  <a:srgbClr val="6B6B76"/>
-                </a:solidFill>
-                <a:latin typeface="Yu Gothic"/>
-                <a:ea typeface="Yu Gothic"/>
-                <a:cs typeface="Yu Gothic"/>
-              </a:rPr>
-              <a:t>妊娠・出産後は</a:t>
-            </a:r>
-          </a:p>
-        </p:txBody>
-      </p:sp>
-      <p:sp>
-        <p:nvSpPr>
-          <p:cNvPr id="14" name="Shape 14"/>
-          <p:cNvSpPr/>
-          <p:nvPr/>
-        </p:nvSpPr>
-        <p:spPr>
-          <a:xfrm>
-            <a:off x="9153144" y="2336292"/>
-            <a:ext cx="2203704" cy="1600200"/>
+            <a:off x="3573018" y="1773936"/>
+            <a:ext cx="2320290" cy="38100"/>
           </a:xfrm>
           <a:prstGeom prst="rect">
             <a:avLst/>
@@ -10706,22 +10827,263 @@
         <p:txBody>
           <a:bodyPr wrap="square" lIns="0" tIns="0" rIns="0" bIns="0" anchor="ctr" rtlCol="0"/>
           <a:lstStyle/>
-          <a:p>
-            <a:pPr algn="ctr">
-              <a:lnSpc>
-                <a:spcPct val="130000"/>
-              </a:lnSpc>
-            </a:pPr>
-            <a:r>
-              <a:rPr lang="ja-JP" altLang="en-US" sz="2100" b="1">
-                <a:solidFill>
-                  <a:srgbClr val="14141A"/>
-                </a:solidFill>
-                <a:latin typeface="Yu Gothic"/>
-                <a:ea typeface="Yu Gothic"/>
-                <a:cs typeface="Yu Gothic"/>
-              </a:rPr>
-              <a:t>要相談</a:t>
+          <a:p/>
+        </p:txBody>
+      </p:sp>
+      <p:sp>
+        <p:nvSpPr>
+          <p:cNvPr id="9" name="TextBox 9"/>
+          <p:cNvSpPr txBox="1"/>
+          <p:nvPr/>
+        </p:nvSpPr>
+        <p:spPr>
+          <a:xfrm>
+            <a:off x="3573018" y="2002536"/>
+            <a:ext cx="2320290" cy="320040"/>
+          </a:xfrm>
+          <a:prstGeom prst="rect">
+            <a:avLst/>
+          </a:prstGeom>
+          <a:noFill/>
+        </p:spPr>
+        <p:txBody>
+          <a:bodyPr wrap="square" lIns="0" tIns="0" rIns="0" bIns="0" anchor="t" rtlCol="0"/>
+          <a:lstStyle/>
+          <a:p>
+            <a:pPr algn="l">
+              <a:lnSpc>
+                <a:spcPct val="145000"/>
+              </a:lnSpc>
+            </a:pPr>
+            <a:r>
+              <a:rPr lang="ja-JP" altLang="en-US" sz="1200" b="1" spc="120">
+                <a:solidFill>
+                  <a:srgbClr val="14141A"/>
+                </a:solidFill>
+                <a:latin typeface="Yu Gothic"/>
+                <a:ea typeface="Yu Gothic"/>
+                <a:cs typeface="Yu Gothic"/>
+              </a:rPr>
+              <a:t>共同口座</a:t>
+            </a:r>
+          </a:p>
+        </p:txBody>
+      </p:sp>
+      <p:sp>
+        <p:nvSpPr>
+          <p:cNvPr id="10" name="TextBox 10"/>
+          <p:cNvSpPr txBox="1"/>
+          <p:nvPr/>
+        </p:nvSpPr>
+        <p:spPr>
+          <a:xfrm>
+            <a:off x="3573018" y="2414016"/>
+            <a:ext cx="2320290" cy="1005840"/>
+          </a:xfrm>
+          <a:prstGeom prst="rect">
+            <a:avLst/>
+          </a:prstGeom>
+          <a:noFill/>
+        </p:spPr>
+        <p:txBody>
+          <a:bodyPr wrap="square" lIns="0" tIns="0" rIns="0" bIns="0" anchor="t" rtlCol="0"/>
+          <a:lstStyle/>
+          <a:p>
+            <a:pPr algn="l">
+              <a:lnSpc>
+                <a:spcPct val="125000"/>
+              </a:lnSpc>
+            </a:pPr>
+            <a:r>
+              <a:rPr lang="ja-JP" altLang="en-US" sz="2200" b="1">
+                <a:solidFill>
+                  <a:srgbClr val="14141A"/>
+                </a:solidFill>
+                <a:latin typeface="Yu Gothic"/>
+                <a:ea typeface="Yu Gothic"/>
+                <a:cs typeface="Yu Gothic"/>
+              </a:rPr>
+              <a:t>お金はぜんぶ</a:t>
+            </a:r>
+          </a:p>
+          <a:p>
+            <a:pPr algn="l">
+              <a:lnSpc>
+                <a:spcPct val="125000"/>
+              </a:lnSpc>
+            </a:pPr>
+            <a:r>
+              <a:rPr lang="ja-JP" altLang="en-US" sz="2200" b="1">
+                <a:solidFill>
+                  <a:srgbClr val="14141A"/>
+                </a:solidFill>
+                <a:latin typeface="Yu Gothic"/>
+                <a:ea typeface="Yu Gothic"/>
+                <a:cs typeface="Yu Gothic"/>
+              </a:rPr>
+              <a:t>ここからです</a:t>
+            </a:r>
+          </a:p>
+        </p:txBody>
+      </p:sp>
+      <p:sp>
+        <p:nvSpPr>
+          <p:cNvPr id="11" name="TextBox 11"/>
+          <p:cNvSpPr txBox="1"/>
+          <p:nvPr/>
+        </p:nvSpPr>
+        <p:spPr>
+          <a:xfrm>
+            <a:off x="3573018" y="3511296"/>
+            <a:ext cx="2320290" cy="1444752"/>
+          </a:xfrm>
+          <a:prstGeom prst="rect">
+            <a:avLst/>
+          </a:prstGeom>
+          <a:noFill/>
+        </p:spPr>
+        <p:txBody>
+          <a:bodyPr wrap="square" lIns="0" tIns="0" rIns="0" bIns="0" anchor="t" rtlCol="0"/>
+          <a:lstStyle/>
+          <a:p>
+            <a:pPr algn="l">
+              <a:lnSpc>
+                <a:spcPct val="155000"/>
+              </a:lnSpc>
+            </a:pPr>
+            <a:r>
+              <a:rPr lang="ja-JP" altLang="en-US" sz="1400" b="0">
+                <a:solidFill>
+                  <a:srgbClr val="14141A"/>
+                </a:solidFill>
+                <a:latin typeface="Yu Gothic"/>
+                <a:ea typeface="Yu Gothic"/>
+                <a:cs typeface="Yu Gothic"/>
+              </a:rPr>
+              <a:t>私名義で、入居と同時に開設します。年に1回だけ棚卸しをします。お小遣いには干渉しません。</a:t>
+            </a:r>
+          </a:p>
+        </p:txBody>
+      </p:sp>
+      <p:sp>
+        <p:nvSpPr>
+          <p:cNvPr id="12" name="Shape 12"/>
+          <p:cNvSpPr/>
+          <p:nvPr/>
+        </p:nvSpPr>
+        <p:spPr>
+          <a:xfrm>
+            <a:off x="6304788" y="1773936"/>
+            <a:ext cx="2320290" cy="38100"/>
+          </a:xfrm>
+          <a:prstGeom prst="rect">
+            <a:avLst/>
+          </a:prstGeom>
+          <a:solidFill>
+            <a:srgbClr val="FF5C77"/>
+          </a:solidFill>
+          <a:ln>
+            <a:noFill/>
+          </a:ln>
+        </p:spPr>
+        <p:txBody>
+          <a:bodyPr wrap="square" lIns="0" tIns="0" rIns="0" bIns="0" anchor="ctr" rtlCol="0"/>
+          <a:lstStyle/>
+          <a:p/>
+        </p:txBody>
+      </p:sp>
+      <p:sp>
+        <p:nvSpPr>
+          <p:cNvPr id="13" name="TextBox 13"/>
+          <p:cNvSpPr txBox="1"/>
+          <p:nvPr/>
+        </p:nvSpPr>
+        <p:spPr>
+          <a:xfrm>
+            <a:off x="6304788" y="2002536"/>
+            <a:ext cx="2320290" cy="320040"/>
+          </a:xfrm>
+          <a:prstGeom prst="rect">
+            <a:avLst/>
+          </a:prstGeom>
+          <a:noFill/>
+        </p:spPr>
+        <p:txBody>
+          <a:bodyPr wrap="square" lIns="0" tIns="0" rIns="0" bIns="0" anchor="t" rtlCol="0"/>
+          <a:lstStyle/>
+          <a:p>
+            <a:pPr algn="l">
+              <a:lnSpc>
+                <a:spcPct val="145000"/>
+              </a:lnSpc>
+            </a:pPr>
+            <a:r>
+              <a:rPr lang="ja-JP" altLang="en-US" sz="1200" b="1" spc="120">
+                <a:solidFill>
+                  <a:srgbClr val="FF5C77"/>
+                </a:solidFill>
+                <a:latin typeface="Yu Gothic"/>
+                <a:ea typeface="Yu Gothic"/>
+                <a:cs typeface="Yu Gothic"/>
+              </a:rPr>
+              <a:t>削らないもの</a:t>
+            </a:r>
+          </a:p>
+        </p:txBody>
+      </p:sp>
+      <p:sp>
+        <p:nvSpPr>
+          <p:cNvPr id="14" name="TextBox 14"/>
+          <p:cNvSpPr txBox="1"/>
+          <p:nvPr/>
+        </p:nvSpPr>
+        <p:spPr>
+          <a:xfrm>
+            <a:off x="6304788" y="2414016"/>
+            <a:ext cx="2320290" cy="1005840"/>
+          </a:xfrm>
+          <a:prstGeom prst="rect">
+            <a:avLst/>
+          </a:prstGeom>
+          <a:noFill/>
+        </p:spPr>
+        <p:txBody>
+          <a:bodyPr wrap="square" lIns="0" tIns="0" rIns="0" bIns="0" anchor="t" rtlCol="0"/>
+          <a:lstStyle/>
+          <a:p>
+            <a:pPr algn="l">
+              <a:lnSpc>
+                <a:spcPct val="125000"/>
+              </a:lnSpc>
+            </a:pPr>
+            <a:r>
+              <a:rPr lang="ja-JP" altLang="en-US" sz="2200" b="1">
+                <a:solidFill>
+                  <a:srgbClr val="14141A"/>
+                </a:solidFill>
+                <a:latin typeface="Yu Gothic"/>
+                <a:ea typeface="Yu Gothic"/>
+                <a:cs typeface="Yu Gothic"/>
+              </a:rPr>
+              <a:t>写真と、</a:t>
+            </a:r>
+          </a:p>
+          <a:p>
+            <a:pPr algn="l">
+              <a:lnSpc>
+                <a:spcPct val="125000"/>
+              </a:lnSpc>
+            </a:pPr>
+            <a:r>
+              <a:rPr lang="ja-JP" altLang="en-US" sz="2200" b="1">
+                <a:solidFill>
+                  <a:srgbClr val="14141A"/>
+                </a:solidFill>
+                <a:latin typeface="Yu Gothic"/>
+                <a:ea typeface="Yu Gothic"/>
+                <a:cs typeface="Yu Gothic"/>
+              </a:rPr>
+              <a:t>新婚旅行</a:t>
             </a:r>
           </a:p>
         </p:txBody>
@@ -10734,8 +11096,8 @@
         </p:nvSpPr>
         <p:spPr>
           <a:xfrm>
-            <a:off x="841248" y="4773168"/>
-            <a:ext cx="10515600" cy="365760"/>
+            <a:off x="6304788" y="3511296"/>
+            <a:ext cx="2320290" cy="1444752"/>
           </a:xfrm>
           <a:prstGeom prst="rect">
             <a:avLst/>
@@ -10748,26 +11110,188 @@
           <a:p>
             <a:pPr algn="l">
               <a:lnSpc>
+                <a:spcPct val="155000"/>
+              </a:lnSpc>
+            </a:pPr>
+            <a:r>
+              <a:rPr lang="ja-JP" altLang="en-US" sz="1400" b="0">
+                <a:solidFill>
+                  <a:srgbClr val="14141A"/>
+                </a:solidFill>
+                <a:latin typeface="Yu Gothic"/>
+                <a:ea typeface="Yu Gothic"/>
+                <a:cs typeface="Yu Gothic"/>
+              </a:rPr>
+              <a:t>収入が増える分から、月に決めた額を積み立てます。出産の費用もここから出します。</a:t>
+            </a:r>
+          </a:p>
+        </p:txBody>
+      </p:sp>
+      <p:sp>
+        <p:nvSpPr>
+          <p:cNvPr id="16" name="Shape 16"/>
+          <p:cNvSpPr/>
+          <p:nvPr/>
+        </p:nvSpPr>
+        <p:spPr>
+          <a:xfrm>
+            <a:off x="9036558" y="1773936"/>
+            <a:ext cx="2320290" cy="38100"/>
+          </a:xfrm>
+          <a:prstGeom prst="rect">
+            <a:avLst/>
+          </a:prstGeom>
+          <a:solidFill>
+            <a:srgbClr val="6C5CE7"/>
+          </a:solidFill>
+          <a:ln>
+            <a:noFill/>
+          </a:ln>
+        </p:spPr>
+        <p:txBody>
+          <a:bodyPr wrap="square" lIns="0" tIns="0" rIns="0" bIns="0" anchor="ctr" rtlCol="0"/>
+          <a:lstStyle/>
+          <a:p/>
+        </p:txBody>
+      </p:sp>
+      <p:sp>
+        <p:nvSpPr>
+          <p:cNvPr id="17" name="TextBox 17"/>
+          <p:cNvSpPr txBox="1"/>
+          <p:nvPr/>
+        </p:nvSpPr>
+        <p:spPr>
+          <a:xfrm>
+            <a:off x="9036558" y="2002536"/>
+            <a:ext cx="2320290" cy="320040"/>
+          </a:xfrm>
+          <a:prstGeom prst="rect">
+            <a:avLst/>
+          </a:prstGeom>
+          <a:noFill/>
+        </p:spPr>
+        <p:txBody>
+          <a:bodyPr wrap="square" lIns="0" tIns="0" rIns="0" bIns="0" anchor="t" rtlCol="0"/>
+          <a:lstStyle/>
+          <a:p>
+            <a:pPr algn="l">
+              <a:lnSpc>
                 <a:spcPct val="145000"/>
               </a:lnSpc>
             </a:pPr>
             <a:r>
-              <a:rPr lang="ja-JP" altLang="en-US" sz="1150" b="0">
-                <a:solidFill>
-                  <a:srgbClr val="6B6B76"/>
-                </a:solidFill>
-                <a:latin typeface="Yu Gothic"/>
-                <a:ea typeface="Yu Gothic"/>
-                <a:cs typeface="Yu Gothic"/>
-              </a:rPr>
-              <a:t>※収入が上下する前提で組みます。どちらかが減っても、責める話にしません。</a:t>
-            </a:r>
-          </a:p>
-        </p:txBody>
-      </p:sp>
-      <p:sp>
-        <p:nvSpPr>
-          <p:cNvPr id="16" name="TextBox 16"/>
+              <a:rPr lang="ja-JP" altLang="en-US" sz="1200" b="1" spc="120">
+                <a:solidFill>
+                  <a:srgbClr val="6C5CE7"/>
+                </a:solidFill>
+                <a:latin typeface="Yu Gothic"/>
+                <a:ea typeface="Yu Gothic"/>
+                <a:cs typeface="Yu Gothic"/>
+              </a:rPr>
+              <a:t>後回し</a:t>
+            </a:r>
+          </a:p>
+        </p:txBody>
+      </p:sp>
+      <p:sp>
+        <p:nvSpPr>
+          <p:cNvPr id="18" name="TextBox 18"/>
+          <p:cNvSpPr txBox="1"/>
+          <p:nvPr/>
+        </p:nvSpPr>
+        <p:spPr>
+          <a:xfrm>
+            <a:off x="9036558" y="2414016"/>
+            <a:ext cx="2320290" cy="1005840"/>
+          </a:xfrm>
+          <a:prstGeom prst="rect">
+            <a:avLst/>
+          </a:prstGeom>
+          <a:noFill/>
+        </p:spPr>
+        <p:txBody>
+          <a:bodyPr wrap="square" lIns="0" tIns="0" rIns="0" bIns="0" anchor="t" rtlCol="0"/>
+          <a:lstStyle/>
+          <a:p>
+            <a:pPr algn="l">
+              <a:lnSpc>
+                <a:spcPct val="125000"/>
+              </a:lnSpc>
+            </a:pPr>
+            <a:r>
+              <a:rPr lang="ja-JP" altLang="en-US" sz="2200" b="1">
+                <a:solidFill>
+                  <a:srgbClr val="14141A"/>
+                </a:solidFill>
+                <a:latin typeface="Yu Gothic"/>
+                <a:ea typeface="Yu Gothic"/>
+                <a:cs typeface="Yu Gothic"/>
+              </a:rPr>
+              <a:t>式と、</a:t>
+            </a:r>
+          </a:p>
+          <a:p>
+            <a:pPr algn="l">
+              <a:lnSpc>
+                <a:spcPct val="125000"/>
+              </a:lnSpc>
+            </a:pPr>
+            <a:r>
+              <a:rPr lang="ja-JP" altLang="en-US" sz="2200" b="1">
+                <a:solidFill>
+                  <a:srgbClr val="14141A"/>
+                </a:solidFill>
+                <a:latin typeface="Yu Gothic"/>
+                <a:ea typeface="Yu Gothic"/>
+                <a:cs typeface="Yu Gothic"/>
+              </a:rPr>
+              <a:t>指輪</a:t>
+            </a:r>
+          </a:p>
+        </p:txBody>
+      </p:sp>
+      <p:sp>
+        <p:nvSpPr>
+          <p:cNvPr id="19" name="TextBox 19"/>
+          <p:cNvSpPr txBox="1"/>
+          <p:nvPr/>
+        </p:nvSpPr>
+        <p:spPr>
+          <a:xfrm>
+            <a:off x="9036558" y="3511296"/>
+            <a:ext cx="2320290" cy="1444752"/>
+          </a:xfrm>
+          <a:prstGeom prst="rect">
+            <a:avLst/>
+          </a:prstGeom>
+          <a:noFill/>
+        </p:spPr>
+        <p:txBody>
+          <a:bodyPr wrap="square" lIns="0" tIns="0" rIns="0" bIns="0" anchor="t" rtlCol="0"/>
+          <a:lstStyle/>
+          <a:p>
+            <a:pPr algn="l">
+              <a:lnSpc>
+                <a:spcPct val="155000"/>
+              </a:lnSpc>
+            </a:pPr>
+            <a:r>
+              <a:rPr lang="ja-JP" altLang="en-US" sz="1400" b="0">
+                <a:solidFill>
+                  <a:srgbClr val="14141A"/>
+                </a:solidFill>
+                <a:latin typeface="Yu Gothic"/>
+                <a:ea typeface="Yu Gothic"/>
+                <a:cs typeface="Yu Gothic"/>
+              </a:rPr>
+              <a:t>時期も規模も、まだ決めません。決めたくなったら、そのとき決めます。</a:t>
+            </a:r>
+          </a:p>
+        </p:txBody>
+      </p:sp>
+      <p:sp>
+        <p:nvSpPr>
+          <p:cNvPr id="20" name="TextBox 20"/>
           <p:cNvSpPr txBox="1"/>
           <p:nvPr/>
         </p:nvSpPr>
@@ -10799,14 +11323,14 @@
                 <a:ea typeface="Yu Gothic"/>
                 <a:cs typeface="Yu Gothic"/>
               </a:rPr>
-              <a:t>お金で無理をせず、手を動かすほうで調整します。</a:t>
-            </a:r>
-          </a:p>
-        </p:txBody>
-      </p:sp>
-      <p:sp>
-        <p:nvSpPr>
-          <p:cNvPr id="17" name="TextBox 17"/>
+              <a:t>いくらずつ出すかは、次のページで決めます。</a:t>
+            </a:r>
+          </a:p>
+        </p:txBody>
+      </p:sp>
+      <p:sp>
+        <p:nvSpPr>
+          <p:cNvPr id="21" name="TextBox 21"/>
           <p:cNvSpPr txBox="1"/>
           <p:nvPr/>
         </p:nvSpPr>
@@ -10845,7 +11369,7 @@
       </p:sp>
       <p:sp>
         <p:nvSpPr>
-          <p:cNvPr id="18" name="TextBox 18"/>
+          <p:cNvPr id="22" name="TextBox 22"/>
           <p:cNvSpPr txBox="1"/>
           <p:nvPr/>
         </p:nvSpPr>
@@ -10949,7 +11473,7 @@
                 <a:ea typeface="Yu Gothic"/>
                 <a:cs typeface="Yu Gothic"/>
               </a:rPr>
-              <a:t>私のお金のこと</a:t>
+              <a:t>生活費の決め方</a:t>
             </a:r>
           </a:p>
         </p:txBody>
@@ -10988,7 +11512,32 @@
                 <a:ea typeface="Yu Gothic Medium"/>
                 <a:cs typeface="Yu Gothic Medium"/>
               </a:rPr>
-              <a:t>私の側の事情を、先にお伝えします。</a:t>
+              <a:t>負担の割合は、</a:t>
+            </a:r>
+            <a:r>
+              <a:rPr lang="ja-JP" altLang="en-US" sz="2200" b="0">
+                <a:solidFill>
+                  <a:srgbClr val="14141A"/>
+                </a:solidFill>
+                <a:highlight>
+                  <a:srgbClr val="FFD93D"/>
+                </a:highlight>
+                <a:latin typeface="Yu Gothic Medium"/>
+                <a:ea typeface="Yu Gothic Medium"/>
+                <a:cs typeface="Yu Gothic Medium"/>
+              </a:rPr>
+              <a:t>半年ごと</a:t>
+            </a:r>
+            <a:r>
+              <a:rPr lang="ja-JP" altLang="en-US" sz="2200" b="0">
+                <a:solidFill>
+                  <a:srgbClr val="14141A"/>
+                </a:solidFill>
+                <a:latin typeface="Yu Gothic Medium"/>
+                <a:ea typeface="Yu Gothic Medium"/>
+                <a:cs typeface="Yu Gothic Medium"/>
+              </a:rPr>
+              <a:t>に決め直します。お金で足りない分は、家事で補います。</a:t>
             </a:r>
           </a:p>
         </p:txBody>
@@ -11001,8 +11550,8 @@
         </p:nvSpPr>
         <p:spPr>
           <a:xfrm>
-            <a:off x="841248" y="1984248"/>
-            <a:ext cx="640080" cy="365760"/>
+            <a:off x="841248" y="1924812"/>
+            <a:ext cx="2203704" cy="310896"/>
           </a:xfrm>
           <a:prstGeom prst="rect">
             <a:avLst/>
@@ -11013,35 +11562,129 @@
           <a:bodyPr wrap="square" lIns="0" tIns="0" rIns="0" bIns="0" anchor="t" rtlCol="0"/>
           <a:lstStyle/>
           <a:p>
-            <a:pPr algn="l">
+            <a:pPr algn="ctr">
               <a:lnSpc>
                 <a:spcPct val="145000"/>
               </a:lnSpc>
             </a:pPr>
             <a:r>
-              <a:rPr lang="ja-JP" altLang="en-US" sz="1500" b="1" spc="100">
-                <a:solidFill>
-                  <a:srgbClr val="00C4B3"/>
-                </a:solidFill>
-                <a:latin typeface="Yu Gothic"/>
-                <a:ea typeface="Yu Gothic"/>
-                <a:cs typeface="Yu Gothic"/>
-              </a:rPr>
-              <a:t>01</a:t>
-            </a:r>
-          </a:p>
-        </p:txBody>
-      </p:sp>
-      <p:sp>
-        <p:nvSpPr>
-          <p:cNvPr id="5" name="TextBox 5"/>
-          <p:cNvSpPr txBox="1"/>
-          <p:nvPr/>
-        </p:nvSpPr>
-        <p:spPr>
-          <a:xfrm>
-            <a:off x="1527048" y="1892808"/>
-            <a:ext cx="9784080" cy="914400"/>
+              <a:rPr lang="ja-JP" altLang="en-US" sz="1200" b="1" spc="80">
+                <a:solidFill>
+                  <a:srgbClr val="6B6B76"/>
+                </a:solidFill>
+                <a:latin typeface="Yu Gothic"/>
+                <a:ea typeface="Yu Gothic"/>
+                <a:cs typeface="Yu Gothic"/>
+              </a:rPr>
+              <a:t>半年に一度</a:t>
+            </a:r>
+          </a:p>
+        </p:txBody>
+      </p:sp>
+      <p:sp>
+        <p:nvSpPr>
+          <p:cNvPr id="5" name="Shape 5"/>
+          <p:cNvSpPr/>
+          <p:nvPr/>
+        </p:nvSpPr>
+        <p:spPr>
+          <a:xfrm>
+            <a:off x="841248" y="2336292"/>
+            <a:ext cx="2203704" cy="1600200"/>
+          </a:xfrm>
+          <a:prstGeom prst="rect">
+            <a:avLst/>
+          </a:prstGeom>
+          <a:solidFill>
+            <a:srgbClr val="FFFFFF"/>
+          </a:solidFill>
+          <a:ln w="25400">
+            <a:solidFill>
+              <a:srgbClr val="14141A"/>
+            </a:solidFill>
+          </a:ln>
+        </p:spPr>
+        <p:txBody>
+          <a:bodyPr wrap="square" lIns="0" tIns="0" rIns="0" bIns="0" anchor="ctr" rtlCol="0"/>
+          <a:lstStyle/>
+          <a:p>
+            <a:pPr algn="ctr">
+              <a:lnSpc>
+                <a:spcPct val="130000"/>
+              </a:lnSpc>
+            </a:pPr>
+            <a:r>
+              <a:rPr lang="ja-JP" altLang="en-US" sz="2100" b="1">
+                <a:solidFill>
+                  <a:srgbClr val="14141A"/>
+                </a:solidFill>
+                <a:latin typeface="Yu Gothic"/>
+                <a:ea typeface="Yu Gothic"/>
+                <a:cs typeface="Yu Gothic"/>
+              </a:rPr>
+              <a:t>お互いの</a:t>
+            </a:r>
+          </a:p>
+          <a:p>
+            <a:pPr algn="ctr">
+              <a:lnSpc>
+                <a:spcPct val="130000"/>
+              </a:lnSpc>
+            </a:pPr>
+            <a:r>
+              <a:rPr lang="ja-JP" altLang="en-US" sz="2100" b="1">
+                <a:solidFill>
+                  <a:srgbClr val="14141A"/>
+                </a:solidFill>
+                <a:latin typeface="Yu Gothic"/>
+                <a:ea typeface="Yu Gothic"/>
+                <a:cs typeface="Yu Gothic"/>
+              </a:rPr>
+              <a:t>月収を見る</a:t>
+            </a:r>
+          </a:p>
+        </p:txBody>
+      </p:sp>
+      <p:sp>
+        <p:nvSpPr>
+          <p:cNvPr id="6" name="Shape 6"/>
+          <p:cNvSpPr/>
+          <p:nvPr/>
+        </p:nvSpPr>
+        <p:spPr>
+          <a:xfrm>
+            <a:off x="3172968" y="3067812"/>
+            <a:ext cx="310896" cy="137160"/>
+          </a:xfrm>
+          <a:prstGeom prst="rightArrow">
+            <a:avLst>
+              <a:gd name="adj1" fmla="val 50000"/>
+              <a:gd name="adj2" fmla="val 55000"/>
+            </a:avLst>
+          </a:prstGeom>
+          <a:solidFill>
+            <a:srgbClr val="14141A"/>
+          </a:solidFill>
+          <a:ln>
+            <a:noFill/>
+          </a:ln>
+        </p:spPr>
+        <p:txBody>
+          <a:bodyPr wrap="square" lIns="0" tIns="0" rIns="0" bIns="0" anchor="ctr" rtlCol="0"/>
+          <a:lstStyle/>
+          <a:p/>
+        </p:txBody>
+      </p:sp>
+      <p:sp>
+        <p:nvSpPr>
+          <p:cNvPr id="7" name="TextBox 7"/>
+          <p:cNvSpPr txBox="1"/>
+          <p:nvPr/>
+        </p:nvSpPr>
+        <p:spPr>
+          <a:xfrm>
+            <a:off x="3611880" y="1924812"/>
+            <a:ext cx="2203704" cy="310896"/>
           </a:xfrm>
           <a:prstGeom prst="rect">
             <a:avLst/>
@@ -11052,57 +11695,129 @@
           <a:bodyPr wrap="square" lIns="0" tIns="0" rIns="0" bIns="0" anchor="t" rtlCol="0"/>
           <a:lstStyle/>
           <a:p>
-            <a:pPr algn="l">
+            <a:pPr algn="ctr">
               <a:lnSpc>
                 <a:spcPct val="145000"/>
               </a:lnSpc>
             </a:pPr>
             <a:r>
-              <a:rPr lang="ja-JP" altLang="en-US" sz="2000" b="0">
-                <a:solidFill>
-                  <a:srgbClr val="14141A"/>
-                </a:solidFill>
-                <a:latin typeface="Yu Gothic"/>
-                <a:ea typeface="Yu Gothic"/>
-                <a:cs typeface="Yu Gothic"/>
-              </a:rPr>
-              <a:t>転職で、</a:t>
-            </a:r>
-            <a:r>
-              <a:rPr lang="ja-JP" altLang="en-US" sz="2000" b="1">
-                <a:solidFill>
-                  <a:srgbClr val="14141A"/>
-                </a:solidFill>
-                <a:latin typeface="Yu Gothic"/>
-                <a:ea typeface="Yu Gothic"/>
-                <a:cs typeface="Yu Gothic"/>
-              </a:rPr>
-              <a:t>収入は増える</a:t>
-            </a:r>
-            <a:r>
-              <a:rPr lang="ja-JP" altLang="en-US" sz="2000" b="0">
-                <a:solidFill>
-                  <a:srgbClr val="14141A"/>
-                </a:solidFill>
-                <a:latin typeface="Yu Gothic"/>
-                <a:ea typeface="Yu Gothic"/>
-                <a:cs typeface="Yu Gothic"/>
-              </a:rPr>
-              <a:t>予定です。増えた分を、この計画の原資にします。</a:t>
-            </a:r>
-          </a:p>
-        </p:txBody>
-      </p:sp>
-      <p:sp>
-        <p:nvSpPr>
-          <p:cNvPr id="6" name="TextBox 6"/>
-          <p:cNvSpPr txBox="1"/>
-          <p:nvPr/>
-        </p:nvSpPr>
-        <p:spPr>
-          <a:xfrm>
-            <a:off x="841248" y="3044952"/>
-            <a:ext cx="640080" cy="365760"/>
+              <a:rPr lang="ja-JP" altLang="en-US" sz="1200" b="1" spc="80">
+                <a:solidFill>
+                  <a:srgbClr val="6B6B76"/>
+                </a:solidFill>
+                <a:latin typeface="Yu Gothic"/>
+                <a:ea typeface="Yu Gothic"/>
+                <a:cs typeface="Yu Gothic"/>
+              </a:rPr>
+              <a:t>そのつど</a:t>
+            </a:r>
+          </a:p>
+        </p:txBody>
+      </p:sp>
+      <p:sp>
+        <p:nvSpPr>
+          <p:cNvPr id="8" name="Shape 8"/>
+          <p:cNvSpPr/>
+          <p:nvPr/>
+        </p:nvSpPr>
+        <p:spPr>
+          <a:xfrm>
+            <a:off x="3611880" y="2336292"/>
+            <a:ext cx="2203704" cy="1600200"/>
+          </a:xfrm>
+          <a:prstGeom prst="rect">
+            <a:avLst/>
+          </a:prstGeom>
+          <a:solidFill>
+            <a:srgbClr val="FFFFFF"/>
+          </a:solidFill>
+          <a:ln w="25400">
+            <a:solidFill>
+              <a:srgbClr val="14141A"/>
+            </a:solidFill>
+          </a:ln>
+        </p:spPr>
+        <p:txBody>
+          <a:bodyPr wrap="square" lIns="0" tIns="0" rIns="0" bIns="0" anchor="ctr" rtlCol="0"/>
+          <a:lstStyle/>
+          <a:p>
+            <a:pPr algn="ctr">
+              <a:lnSpc>
+                <a:spcPct val="130000"/>
+              </a:lnSpc>
+            </a:pPr>
+            <a:r>
+              <a:rPr lang="ja-JP" altLang="en-US" sz="2100" b="1">
+                <a:solidFill>
+                  <a:srgbClr val="14141A"/>
+                </a:solidFill>
+                <a:latin typeface="Yu Gothic"/>
+                <a:ea typeface="Yu Gothic"/>
+                <a:cs typeface="Yu Gothic"/>
+              </a:rPr>
+              <a:t>負担の割合を</a:t>
+            </a:r>
+          </a:p>
+          <a:p>
+            <a:pPr algn="ctr">
+              <a:lnSpc>
+                <a:spcPct val="130000"/>
+              </a:lnSpc>
+            </a:pPr>
+            <a:r>
+              <a:rPr lang="ja-JP" altLang="en-US" sz="2100" b="1">
+                <a:solidFill>
+                  <a:srgbClr val="14141A"/>
+                </a:solidFill>
+                <a:latin typeface="Yu Gothic"/>
+                <a:ea typeface="Yu Gothic"/>
+                <a:cs typeface="Yu Gothic"/>
+              </a:rPr>
+              <a:t>決める</a:t>
+            </a:r>
+          </a:p>
+        </p:txBody>
+      </p:sp>
+      <p:sp>
+        <p:nvSpPr>
+          <p:cNvPr id="9" name="Shape 9"/>
+          <p:cNvSpPr/>
+          <p:nvPr/>
+        </p:nvSpPr>
+        <p:spPr>
+          <a:xfrm>
+            <a:off x="5943600" y="3067812"/>
+            <a:ext cx="310896" cy="137160"/>
+          </a:xfrm>
+          <a:prstGeom prst="rightArrow">
+            <a:avLst>
+              <a:gd name="adj1" fmla="val 50000"/>
+              <a:gd name="adj2" fmla="val 55000"/>
+            </a:avLst>
+          </a:prstGeom>
+          <a:solidFill>
+            <a:srgbClr val="14141A"/>
+          </a:solidFill>
+          <a:ln>
+            <a:noFill/>
+          </a:ln>
+        </p:spPr>
+        <p:txBody>
+          <a:bodyPr wrap="square" lIns="0" tIns="0" rIns="0" bIns="0" anchor="ctr" rtlCol="0"/>
+          <a:lstStyle/>
+          <a:p/>
+        </p:txBody>
+      </p:sp>
+      <p:sp>
+        <p:nvSpPr>
+          <p:cNvPr id="10" name="TextBox 10"/>
+          <p:cNvSpPr txBox="1"/>
+          <p:nvPr/>
+        </p:nvSpPr>
+        <p:spPr>
+          <a:xfrm>
+            <a:off x="6382512" y="1924812"/>
+            <a:ext cx="2203704" cy="310896"/>
           </a:xfrm>
           <a:prstGeom prst="rect">
             <a:avLst/>
@@ -11113,35 +11828,129 @@
           <a:bodyPr wrap="square" lIns="0" tIns="0" rIns="0" bIns="0" anchor="t" rtlCol="0"/>
           <a:lstStyle/>
           <a:p>
-            <a:pPr algn="l">
+            <a:pPr algn="ctr">
               <a:lnSpc>
                 <a:spcPct val="145000"/>
               </a:lnSpc>
             </a:pPr>
             <a:r>
-              <a:rPr lang="ja-JP" altLang="en-US" sz="1500" b="1" spc="100">
-                <a:solidFill>
-                  <a:srgbClr val="00C4B3"/>
-                </a:solidFill>
-                <a:latin typeface="Yu Gothic"/>
-                <a:ea typeface="Yu Gothic"/>
-                <a:cs typeface="Yu Gothic"/>
-              </a:rPr>
-              <a:t>02</a:t>
-            </a:r>
-          </a:p>
-        </p:txBody>
-      </p:sp>
-      <p:sp>
-        <p:nvSpPr>
-          <p:cNvPr id="7" name="TextBox 7"/>
-          <p:cNvSpPr txBox="1"/>
-          <p:nvPr/>
-        </p:nvSpPr>
-        <p:spPr>
-          <a:xfrm>
-            <a:off x="1527048" y="2953512"/>
-            <a:ext cx="9784080" cy="914400"/>
+              <a:rPr lang="ja-JP" altLang="en-US" sz="1200" b="1" spc="80">
+                <a:solidFill>
+                  <a:srgbClr val="6B6B76"/>
+                </a:solidFill>
+                <a:latin typeface="Yu Gothic"/>
+                <a:ea typeface="Yu Gothic"/>
+                <a:cs typeface="Yu Gothic"/>
+              </a:rPr>
+              <a:t>足りないときは</a:t>
+            </a:r>
+          </a:p>
+        </p:txBody>
+      </p:sp>
+      <p:sp>
+        <p:nvSpPr>
+          <p:cNvPr id="11" name="Shape 11"/>
+          <p:cNvSpPr/>
+          <p:nvPr/>
+        </p:nvSpPr>
+        <p:spPr>
+          <a:xfrm>
+            <a:off x="6382512" y="2336292"/>
+            <a:ext cx="2203704" cy="1600200"/>
+          </a:xfrm>
+          <a:prstGeom prst="rect">
+            <a:avLst/>
+          </a:prstGeom>
+          <a:solidFill>
+            <a:srgbClr val="FFFFFF"/>
+          </a:solidFill>
+          <a:ln w="25400">
+            <a:solidFill>
+              <a:srgbClr val="14141A"/>
+            </a:solidFill>
+          </a:ln>
+        </p:spPr>
+        <p:txBody>
+          <a:bodyPr wrap="square" lIns="0" tIns="0" rIns="0" bIns="0" anchor="ctr" rtlCol="0"/>
+          <a:lstStyle/>
+          <a:p>
+            <a:pPr algn="ctr">
+              <a:lnSpc>
+                <a:spcPct val="130000"/>
+              </a:lnSpc>
+            </a:pPr>
+            <a:r>
+              <a:rPr lang="ja-JP" altLang="en-US" sz="2100" b="1">
+                <a:solidFill>
+                  <a:srgbClr val="14141A"/>
+                </a:solidFill>
+                <a:latin typeface="Yu Gothic"/>
+                <a:ea typeface="Yu Gothic"/>
+                <a:cs typeface="Yu Gothic"/>
+              </a:rPr>
+              <a:t>家事で</a:t>
+            </a:r>
+          </a:p>
+          <a:p>
+            <a:pPr algn="ctr">
+              <a:lnSpc>
+                <a:spcPct val="130000"/>
+              </a:lnSpc>
+            </a:pPr>
+            <a:r>
+              <a:rPr lang="ja-JP" altLang="en-US" sz="2100" b="1">
+                <a:solidFill>
+                  <a:srgbClr val="14141A"/>
+                </a:solidFill>
+                <a:latin typeface="Yu Gothic"/>
+                <a:ea typeface="Yu Gothic"/>
+                <a:cs typeface="Yu Gothic"/>
+              </a:rPr>
+              <a:t>補う</a:t>
+            </a:r>
+          </a:p>
+        </p:txBody>
+      </p:sp>
+      <p:sp>
+        <p:nvSpPr>
+          <p:cNvPr id="12" name="Shape 12"/>
+          <p:cNvSpPr/>
+          <p:nvPr/>
+        </p:nvSpPr>
+        <p:spPr>
+          <a:xfrm>
+            <a:off x="8714232" y="3067812"/>
+            <a:ext cx="310896" cy="137160"/>
+          </a:xfrm>
+          <a:prstGeom prst="rightArrow">
+            <a:avLst>
+              <a:gd name="adj1" fmla="val 50000"/>
+              <a:gd name="adj2" fmla="val 55000"/>
+            </a:avLst>
+          </a:prstGeom>
+          <a:solidFill>
+            <a:srgbClr val="14141A"/>
+          </a:solidFill>
+          <a:ln>
+            <a:noFill/>
+          </a:ln>
+        </p:spPr>
+        <p:txBody>
+          <a:bodyPr wrap="square" lIns="0" tIns="0" rIns="0" bIns="0" anchor="ctr" rtlCol="0"/>
+          <a:lstStyle/>
+          <a:p/>
+        </p:txBody>
+      </p:sp>
+      <p:sp>
+        <p:nvSpPr>
+          <p:cNvPr id="13" name="TextBox 13"/>
+          <p:cNvSpPr txBox="1"/>
+          <p:nvPr/>
+        </p:nvSpPr>
+        <p:spPr>
+          <a:xfrm>
+            <a:off x="9153144" y="1924812"/>
+            <a:ext cx="2203704" cy="310896"/>
           </a:xfrm>
           <a:prstGeom prst="rect">
             <a:avLst/>
@@ -11152,79 +11961,79 @@
           <a:bodyPr wrap="square" lIns="0" tIns="0" rIns="0" bIns="0" anchor="t" rtlCol="0"/>
           <a:lstStyle/>
           <a:p>
-            <a:pPr algn="l">
+            <a:pPr algn="ctr">
               <a:lnSpc>
                 <a:spcPct val="145000"/>
               </a:lnSpc>
             </a:pPr>
             <a:r>
-              <a:rPr lang="ja-JP" altLang="en-US" sz="1820" b="0">
-                <a:solidFill>
-                  <a:srgbClr val="14141A"/>
-                </a:solidFill>
-                <a:latin typeface="Yu Gothic"/>
-                <a:ea typeface="Yu Gothic"/>
-                <a:cs typeface="Yu Gothic"/>
-              </a:rPr>
-              <a:t>貯金の代わりに、</a:t>
-            </a:r>
-            <a:r>
-              <a:rPr lang="ja-JP" altLang="en-US" sz="1820" b="1">
-                <a:solidFill>
-                  <a:srgbClr val="14141A"/>
-                </a:solidFill>
-                <a:latin typeface="Yu Gothic"/>
-                <a:ea typeface="Yu Gothic"/>
-                <a:cs typeface="Yu Gothic"/>
-              </a:rPr>
-              <a:t>NISAで積み立て</a:t>
-            </a:r>
-            <a:r>
-              <a:rPr lang="ja-JP" altLang="en-US" sz="1820" b="0">
-                <a:solidFill>
-                  <a:srgbClr val="14141A"/>
-                </a:solidFill>
-                <a:latin typeface="Yu Gothic"/>
-                <a:ea typeface="Yu Gothic"/>
-                <a:cs typeface="Yu Gothic"/>
-              </a:rPr>
-              <a:t>ています。有給消化の旅行などで、</a:t>
-            </a:r>
-            <a:r>
-              <a:rPr lang="ja-JP" altLang="en-US" sz="1820" b="1">
-                <a:solidFill>
-                  <a:srgbClr val="14141A"/>
-                </a:solidFill>
-                <a:latin typeface="Yu Gothic"/>
-                <a:ea typeface="Yu Gothic"/>
-                <a:cs typeface="Yu Gothic"/>
-              </a:rPr>
-              <a:t>使う可能性もあります</a:t>
-            </a:r>
-            <a:r>
-              <a:rPr lang="ja-JP" altLang="en-US" sz="1820" b="0">
-                <a:solidFill>
-                  <a:srgbClr val="14141A"/>
-                </a:solidFill>
-                <a:latin typeface="Yu Gothic"/>
-                <a:ea typeface="Yu Gothic"/>
-                <a:cs typeface="Yu Gothic"/>
-              </a:rPr>
-              <a:t>。</a:t>
-            </a:r>
-          </a:p>
-        </p:txBody>
-      </p:sp>
-      <p:sp>
-        <p:nvSpPr>
-          <p:cNvPr id="8" name="TextBox 8"/>
-          <p:cNvSpPr txBox="1"/>
-          <p:nvPr/>
-        </p:nvSpPr>
-        <p:spPr>
-          <a:xfrm>
-            <a:off x="841248" y="4105656"/>
-            <a:ext cx="640080" cy="365760"/>
+              <a:rPr lang="ja-JP" altLang="en-US" sz="1200" b="1" spc="80">
+                <a:solidFill>
+                  <a:srgbClr val="6B6B76"/>
+                </a:solidFill>
+                <a:latin typeface="Yu Gothic"/>
+                <a:ea typeface="Yu Gothic"/>
+                <a:cs typeface="Yu Gothic"/>
+              </a:rPr>
+              <a:t>妊娠・出産後は</a:t>
+            </a:r>
+          </a:p>
+        </p:txBody>
+      </p:sp>
+      <p:sp>
+        <p:nvSpPr>
+          <p:cNvPr id="14" name="Shape 14"/>
+          <p:cNvSpPr/>
+          <p:nvPr/>
+        </p:nvSpPr>
+        <p:spPr>
+          <a:xfrm>
+            <a:off x="9153144" y="2336292"/>
+            <a:ext cx="2203704" cy="1600200"/>
+          </a:xfrm>
+          <a:prstGeom prst="rect">
+            <a:avLst/>
+          </a:prstGeom>
+          <a:solidFill>
+            <a:srgbClr val="FFD93D"/>
+          </a:solidFill>
+          <a:ln>
+            <a:noFill/>
+          </a:ln>
+        </p:spPr>
+        <p:txBody>
+          <a:bodyPr wrap="square" lIns="0" tIns="0" rIns="0" bIns="0" anchor="ctr" rtlCol="0"/>
+          <a:lstStyle/>
+          <a:p>
+            <a:pPr algn="ctr">
+              <a:lnSpc>
+                <a:spcPct val="130000"/>
+              </a:lnSpc>
+            </a:pPr>
+            <a:r>
+              <a:rPr lang="ja-JP" altLang="en-US" sz="2100" b="1">
+                <a:solidFill>
+                  <a:srgbClr val="14141A"/>
+                </a:solidFill>
+                <a:latin typeface="Yu Gothic"/>
+                <a:ea typeface="Yu Gothic"/>
+                <a:cs typeface="Yu Gothic"/>
+              </a:rPr>
+              <a:t>要相談</a:t>
+            </a:r>
+          </a:p>
+        </p:txBody>
+      </p:sp>
+      <p:sp>
+        <p:nvSpPr>
+          <p:cNvPr id="15" name="TextBox 15"/>
+          <p:cNvSpPr txBox="1"/>
+          <p:nvPr/>
+        </p:nvSpPr>
+        <p:spPr>
+          <a:xfrm>
+            <a:off x="841248" y="4773168"/>
+            <a:ext cx="10515600" cy="365760"/>
           </a:xfrm>
           <a:prstGeom prst="rect">
             <a:avLst/>
@@ -11241,83 +12050,22 @@
               </a:lnSpc>
             </a:pPr>
             <a:r>
-              <a:rPr lang="ja-JP" altLang="en-US" sz="1500" b="1" spc="100">
-                <a:solidFill>
-                  <a:srgbClr val="00C4B3"/>
-                </a:solidFill>
-                <a:latin typeface="Yu Gothic"/>
-                <a:ea typeface="Yu Gothic"/>
-                <a:cs typeface="Yu Gothic"/>
-              </a:rPr>
-              <a:t>03</a:t>
-            </a:r>
-          </a:p>
-        </p:txBody>
-      </p:sp>
-      <p:sp>
-        <p:nvSpPr>
-          <p:cNvPr id="9" name="TextBox 9"/>
-          <p:cNvSpPr txBox="1"/>
-          <p:nvPr/>
-        </p:nvSpPr>
-        <p:spPr>
-          <a:xfrm>
-            <a:off x="1527048" y="4014216"/>
-            <a:ext cx="9784080" cy="914400"/>
-          </a:xfrm>
-          <a:prstGeom prst="rect">
-            <a:avLst/>
-          </a:prstGeom>
-          <a:noFill/>
-        </p:spPr>
-        <p:txBody>
-          <a:bodyPr wrap="square" lIns="0" tIns="0" rIns="0" bIns="0" anchor="t" rtlCol="0"/>
-          <a:lstStyle/>
-          <a:p>
-            <a:pPr algn="l">
-              <a:lnSpc>
-                <a:spcPct val="145000"/>
-              </a:lnSpc>
-            </a:pPr>
-            <a:r>
-              <a:rPr lang="ja-JP" altLang="en-US" sz="1820" b="0">
-                <a:solidFill>
-                  <a:srgbClr val="14141A"/>
-                </a:solidFill>
-                <a:latin typeface="Yu Gothic"/>
-                <a:ea typeface="Yu Gothic"/>
-                <a:cs typeface="Yu Gothic"/>
-              </a:rPr>
-              <a:t>2028年6月の</a:t>
-            </a:r>
-            <a:r>
-              <a:rPr lang="ja-JP" altLang="en-US" sz="1820" b="1">
-                <a:solidFill>
-                  <a:srgbClr val="14141A"/>
-                </a:solidFill>
-                <a:latin typeface="Yu Gothic"/>
-                <a:ea typeface="Yu Gothic"/>
-                <a:cs typeface="Yu Gothic"/>
-              </a:rPr>
-              <a:t>カンヌ</a:t>
-            </a:r>
-            <a:r>
-              <a:rPr lang="ja-JP" altLang="en-US" sz="1820" b="0">
-                <a:solidFill>
-                  <a:srgbClr val="14141A"/>
-                </a:solidFill>
-                <a:latin typeface="Yu Gothic"/>
-                <a:ea typeface="Yu Gothic"/>
-                <a:cs typeface="Yu Gothic"/>
-              </a:rPr>
-              <a:t>は仕事です。費用は私側（会社負担を含む）で、家計からは出しません。</a:t>
-            </a:r>
-          </a:p>
-        </p:txBody>
-      </p:sp>
-      <p:sp>
-        <p:nvSpPr>
-          <p:cNvPr id="10" name="TextBox 10"/>
+              <a:rPr lang="ja-JP" altLang="en-US" sz="1150" b="0">
+                <a:solidFill>
+                  <a:srgbClr val="6B6B76"/>
+                </a:solidFill>
+                <a:latin typeface="Yu Gothic"/>
+                <a:ea typeface="Yu Gothic"/>
+                <a:cs typeface="Yu Gothic"/>
+              </a:rPr>
+              <a:t>※収入が上下する前提で組みます。どちらかが減っても、責める話にしません。</a:t>
+            </a:r>
+          </a:p>
+        </p:txBody>
+      </p:sp>
+      <p:sp>
+        <p:nvSpPr>
+          <p:cNvPr id="16" name="TextBox 16"/>
           <p:cNvSpPr txBox="1"/>
           <p:nvPr/>
         </p:nvSpPr>
@@ -11349,14 +12097,14 @@
                 <a:ea typeface="Yu Gothic"/>
                 <a:cs typeface="Yu Gothic"/>
               </a:rPr>
-              <a:t>家計に影響するものは、ありません。</a:t>
-            </a:r>
-          </a:p>
-        </p:txBody>
-      </p:sp>
-      <p:sp>
-        <p:nvSpPr>
-          <p:cNvPr id="11" name="TextBox 11"/>
+              <a:t>お金で無理をせず、手を動かすほうで調整します。</a:t>
+            </a:r>
+          </a:p>
+        </p:txBody>
+      </p:sp>
+      <p:sp>
+        <p:nvSpPr>
+          <p:cNvPr id="17" name="TextBox 17"/>
           <p:cNvSpPr txBox="1"/>
           <p:nvPr/>
         </p:nvSpPr>
@@ -11395,7 +12143,7 @@
       </p:sp>
       <p:sp>
         <p:nvSpPr>
-          <p:cNvPr id="12" name="TextBox 12"/>
+          <p:cNvPr id="18" name="TextBox 18"/>
           <p:cNvSpPr txBox="1"/>
           <p:nvPr/>
         </p:nvSpPr>
@@ -11499,7 +12247,7 @@
                 <a:ea typeface="Yu Gothic"/>
                 <a:cs typeface="Yu Gothic"/>
               </a:rPr>
-              <a:t>決めること</a:t>
+              <a:t>私のお金のこと</a:t>
             </a:r>
           </a:p>
         </p:txBody>
@@ -11538,7 +12286,7 @@
                 <a:ea typeface="Yu Gothic Medium"/>
                 <a:cs typeface="Yu Gothic Medium"/>
               </a:rPr>
-              <a:t>まだ決まっていないことを、期限つきで並べました。</a:t>
+              <a:t>私の側の事情を、先にお伝えします。</a:t>
             </a:r>
           </a:p>
         </p:txBody>
@@ -11551,16 +12299,16 @@
         </p:nvSpPr>
         <p:spPr>
           <a:xfrm>
-            <a:off x="841248" y="1728216"/>
-            <a:ext cx="6272784" cy="540639"/>
-          </a:xfrm>
-          <a:prstGeom prst="rect">
-            <a:avLst/>
-          </a:prstGeom>
-          <a:noFill/>
-        </p:spPr>
-        <p:txBody>
-          <a:bodyPr wrap="square" lIns="0" tIns="0" rIns="0" bIns="0" anchor="ctr" rtlCol="0"/>
+            <a:off x="841248" y="1984248"/>
+            <a:ext cx="640080" cy="365760"/>
+          </a:xfrm>
+          <a:prstGeom prst="rect">
+            <a:avLst/>
+          </a:prstGeom>
+          <a:noFill/>
+        </p:spPr>
+        <p:txBody>
+          <a:bodyPr wrap="square" lIns="0" tIns="0" rIns="0" bIns="0" anchor="t" rtlCol="0"/>
           <a:lstStyle/>
           <a:p>
             <a:pPr algn="l">
@@ -11569,15 +12317,15 @@
               </a:lnSpc>
             </a:pPr>
             <a:r>
-              <a:rPr lang="ja-JP" altLang="en-US" sz="1250" b="1" spc="100">
-                <a:solidFill>
-                  <a:srgbClr val="6B6B76"/>
-                </a:solidFill>
-                <a:latin typeface="Yu Gothic"/>
-                <a:ea typeface="Yu Gothic"/>
-                <a:cs typeface="Yu Gothic"/>
-              </a:rPr>
-              <a:t>決めること</a:t>
+              <a:rPr lang="ja-JP" altLang="en-US" sz="1500" b="1" spc="100">
+                <a:solidFill>
+                  <a:srgbClr val="00C4B3"/>
+                </a:solidFill>
+                <a:latin typeface="Yu Gothic"/>
+                <a:ea typeface="Yu Gothic"/>
+                <a:cs typeface="Yu Gothic"/>
+              </a:rPr>
+              <a:t>01</a:t>
             </a:r>
           </a:p>
         </p:txBody>
@@ -11590,16 +12338,16 @@
         </p:nvSpPr>
         <p:spPr>
           <a:xfrm>
-            <a:off x="7242048" y="1728216"/>
-            <a:ext cx="2157984" cy="540639"/>
-          </a:xfrm>
-          <a:prstGeom prst="rect">
-            <a:avLst/>
-          </a:prstGeom>
-          <a:noFill/>
-        </p:spPr>
-        <p:txBody>
-          <a:bodyPr wrap="square" lIns="0" tIns="0" rIns="0" bIns="0" anchor="ctr" rtlCol="0"/>
+            <a:off x="1527048" y="1892808"/>
+            <a:ext cx="9784080" cy="914400"/>
+          </a:xfrm>
+          <a:prstGeom prst="rect">
+            <a:avLst/>
+          </a:prstGeom>
+          <a:noFill/>
+        </p:spPr>
+        <p:txBody>
+          <a:bodyPr wrap="square" lIns="0" tIns="0" rIns="0" bIns="0" anchor="t" rtlCol="0"/>
           <a:lstStyle/>
           <a:p>
             <a:pPr algn="l">
@@ -11608,15 +12356,37 @@
               </a:lnSpc>
             </a:pPr>
             <a:r>
-              <a:rPr lang="ja-JP" altLang="en-US" sz="1250" b="1" spc="100">
-                <a:solidFill>
-                  <a:srgbClr val="6B6B76"/>
-                </a:solidFill>
-                <a:latin typeface="Yu Gothic"/>
-                <a:ea typeface="Yu Gothic"/>
-                <a:cs typeface="Yu Gothic"/>
-              </a:rPr>
-              <a:t>いつまで</a:t>
+              <a:rPr lang="ja-JP" altLang="en-US" sz="2000" b="0">
+                <a:solidFill>
+                  <a:srgbClr val="14141A"/>
+                </a:solidFill>
+                <a:latin typeface="Yu Gothic"/>
+                <a:ea typeface="Yu Gothic"/>
+                <a:cs typeface="Yu Gothic"/>
+              </a:rPr>
+              <a:t>転職で、</a:t>
+            </a:r>
+            <a:r>
+              <a:rPr lang="ja-JP" altLang="en-US" sz="2000" b="1">
+                <a:solidFill>
+                  <a:srgbClr val="14141A"/>
+                </a:solidFill>
+                <a:latin typeface="Yu Gothic"/>
+                <a:ea typeface="Yu Gothic"/>
+                <a:cs typeface="Yu Gothic"/>
+              </a:rPr>
+              <a:t>収入は増える</a:t>
+            </a:r>
+            <a:r>
+              <a:rPr lang="ja-JP" altLang="en-US" sz="2000" b="0">
+                <a:solidFill>
+                  <a:srgbClr val="14141A"/>
+                </a:solidFill>
+                <a:latin typeface="Yu Gothic"/>
+                <a:ea typeface="Yu Gothic"/>
+                <a:cs typeface="Yu Gothic"/>
+              </a:rPr>
+              <a:t>予定です。増えた分を、この計画の原資にします。</a:t>
             </a:r>
           </a:p>
         </p:txBody>
@@ -11629,16 +12399,16 @@
         </p:nvSpPr>
         <p:spPr>
           <a:xfrm>
-            <a:off x="9528048" y="1728216"/>
-            <a:ext cx="1700784" cy="540639"/>
-          </a:xfrm>
-          <a:prstGeom prst="rect">
-            <a:avLst/>
-          </a:prstGeom>
-          <a:noFill/>
-        </p:spPr>
-        <p:txBody>
-          <a:bodyPr wrap="square" lIns="0" tIns="0" rIns="0" bIns="0" anchor="ctr" rtlCol="0"/>
+            <a:off x="841248" y="3044952"/>
+            <a:ext cx="640080" cy="365760"/>
+          </a:xfrm>
+          <a:prstGeom prst="rect">
+            <a:avLst/>
+          </a:prstGeom>
+          <a:noFill/>
+        </p:spPr>
+        <p:txBody>
+          <a:bodyPr wrap="square" lIns="0" tIns="0" rIns="0" bIns="0" anchor="t" rtlCol="0"/>
           <a:lstStyle/>
           <a:p>
             <a:pPr algn="l">
@@ -11647,44 +12417,100 @@
               </a:lnSpc>
             </a:pPr>
             <a:r>
-              <a:rPr lang="ja-JP" altLang="en-US" sz="1250" b="1" spc="100">
-                <a:solidFill>
-                  <a:srgbClr val="6B6B76"/>
-                </a:solidFill>
-                <a:latin typeface="Yu Gothic"/>
-                <a:ea typeface="Yu Gothic"/>
-                <a:cs typeface="Yu Gothic"/>
-              </a:rPr>
-              <a:t>だれが</a:t>
-            </a:r>
-          </a:p>
-        </p:txBody>
-      </p:sp>
-      <p:sp>
-        <p:nvSpPr>
-          <p:cNvPr id="7" name="Shape 7"/>
-          <p:cNvSpPr/>
-          <p:nvPr/>
-        </p:nvSpPr>
-        <p:spPr>
-          <a:xfrm>
-            <a:off x="841248" y="2256155"/>
-            <a:ext cx="10515600" cy="25400"/>
-          </a:xfrm>
-          <a:prstGeom prst="rect">
-            <a:avLst/>
-          </a:prstGeom>
-          <a:solidFill>
-            <a:srgbClr val="14141A"/>
-          </a:solidFill>
-          <a:ln>
-            <a:noFill/>
-          </a:ln>
-        </p:spPr>
-        <p:txBody>
-          <a:bodyPr wrap="square" lIns="0" tIns="0" rIns="0" bIns="0" anchor="ctr" rtlCol="0"/>
-          <a:lstStyle/>
-          <a:p/>
+              <a:rPr lang="ja-JP" altLang="en-US" sz="1500" b="1" spc="100">
+                <a:solidFill>
+                  <a:srgbClr val="00C4B3"/>
+                </a:solidFill>
+                <a:latin typeface="Yu Gothic"/>
+                <a:ea typeface="Yu Gothic"/>
+                <a:cs typeface="Yu Gothic"/>
+              </a:rPr>
+              <a:t>02</a:t>
+            </a:r>
+          </a:p>
+        </p:txBody>
+      </p:sp>
+      <p:sp>
+        <p:nvSpPr>
+          <p:cNvPr id="7" name="TextBox 7"/>
+          <p:cNvSpPr txBox="1"/>
+          <p:nvPr/>
+        </p:nvSpPr>
+        <p:spPr>
+          <a:xfrm>
+            <a:off x="1527048" y="2953512"/>
+            <a:ext cx="9784080" cy="914400"/>
+          </a:xfrm>
+          <a:prstGeom prst="rect">
+            <a:avLst/>
+          </a:prstGeom>
+          <a:noFill/>
+        </p:spPr>
+        <p:txBody>
+          <a:bodyPr wrap="square" lIns="0" tIns="0" rIns="0" bIns="0" anchor="t" rtlCol="0"/>
+          <a:lstStyle/>
+          <a:p>
+            <a:pPr algn="l">
+              <a:lnSpc>
+                <a:spcPct val="145000"/>
+              </a:lnSpc>
+            </a:pPr>
+            <a:r>
+              <a:rPr lang="ja-JP" altLang="en-US" sz="1820" b="0">
+                <a:solidFill>
+                  <a:srgbClr val="14141A"/>
+                </a:solidFill>
+                <a:latin typeface="Yu Gothic"/>
+                <a:ea typeface="Yu Gothic"/>
+                <a:cs typeface="Yu Gothic"/>
+              </a:rPr>
+              <a:t>貯金の代わりに、</a:t>
+            </a:r>
+            <a:r>
+              <a:rPr lang="ja-JP" altLang="en-US" sz="1820" b="1">
+                <a:solidFill>
+                  <a:srgbClr val="14141A"/>
+                </a:solidFill>
+                <a:latin typeface="Yu Gothic"/>
+                <a:ea typeface="Yu Gothic"/>
+                <a:cs typeface="Yu Gothic"/>
+              </a:rPr>
+              <a:t>NISAで積み立て</a:t>
+            </a:r>
+            <a:r>
+              <a:rPr lang="ja-JP" altLang="en-US" sz="1820" b="0">
+                <a:solidFill>
+                  <a:srgbClr val="14141A"/>
+                </a:solidFill>
+                <a:latin typeface="Yu Gothic"/>
+                <a:ea typeface="Yu Gothic"/>
+                <a:cs typeface="Yu Gothic"/>
+              </a:rPr>
+              <a:t>ています。有給消化の旅行などで、</a:t>
+            </a:r>
+            <a:r>
+              <a:rPr lang="ja-JP" altLang="en-US" sz="1820" b="1">
+                <a:solidFill>
+                  <a:srgbClr val="14141A"/>
+                </a:solidFill>
+                <a:latin typeface="Yu Gothic"/>
+                <a:ea typeface="Yu Gothic"/>
+                <a:cs typeface="Yu Gothic"/>
+              </a:rPr>
+              <a:t>使う可能性もあります</a:t>
+            </a:r>
+            <a:r>
+              <a:rPr lang="ja-JP" altLang="en-US" sz="1820" b="0">
+                <a:solidFill>
+                  <a:srgbClr val="14141A"/>
+                </a:solidFill>
+                <a:latin typeface="Yu Gothic"/>
+                <a:ea typeface="Yu Gothic"/>
+                <a:cs typeface="Yu Gothic"/>
+              </a:rPr>
+              <a:t>。</a:t>
+            </a:r>
+          </a:p>
         </p:txBody>
       </p:sp>
       <p:sp>
@@ -11695,33 +12521,33 @@
         </p:nvSpPr>
         <p:spPr>
           <a:xfrm>
-            <a:off x="841248" y="2268855"/>
-            <a:ext cx="6272784" cy="540639"/>
-          </a:xfrm>
-          <a:prstGeom prst="rect">
-            <a:avLst/>
-          </a:prstGeom>
-          <a:noFill/>
-        </p:spPr>
-        <p:txBody>
-          <a:bodyPr wrap="square" lIns="0" tIns="0" rIns="0" bIns="0" anchor="ctr" rtlCol="0"/>
-          <a:lstStyle/>
-          <a:p>
-            <a:pPr algn="l">
-              <a:lnSpc>
-                <a:spcPct val="130000"/>
-              </a:lnSpc>
-            </a:pPr>
-            <a:r>
-              <a:rPr lang="ja-JP" altLang="en-US" sz="1500" b="0">
-                <a:solidFill>
-                  <a:srgbClr val="14141A"/>
-                </a:solidFill>
-                <a:latin typeface="Yu Gothic"/>
-                <a:ea typeface="Yu Gothic"/>
-                <a:cs typeface="Yu Gothic"/>
-              </a:rPr>
-              <a:t>家賃補助の型・上限・同居人の条件・回数・退職時の扱い</a:t>
+            <a:off x="841248" y="4105656"/>
+            <a:ext cx="640080" cy="365760"/>
+          </a:xfrm>
+          <a:prstGeom prst="rect">
+            <a:avLst/>
+          </a:prstGeom>
+          <a:noFill/>
+        </p:spPr>
+        <p:txBody>
+          <a:bodyPr wrap="square" lIns="0" tIns="0" rIns="0" bIns="0" anchor="t" rtlCol="0"/>
+          <a:lstStyle/>
+          <a:p>
+            <a:pPr algn="l">
+              <a:lnSpc>
+                <a:spcPct val="145000"/>
+              </a:lnSpc>
+            </a:pPr>
+            <a:r>
+              <a:rPr lang="ja-JP" altLang="en-US" sz="1500" b="1" spc="100">
+                <a:solidFill>
+                  <a:srgbClr val="00C4B3"/>
+                </a:solidFill>
+                <a:latin typeface="Yu Gothic"/>
+                <a:ea typeface="Yu Gothic"/>
+                <a:cs typeface="Yu Gothic"/>
+              </a:rPr>
+              <a:t>03</a:t>
             </a:r>
           </a:p>
         </p:txBody>
@@ -11734,33 +12560,55 @@
         </p:nvSpPr>
         <p:spPr>
           <a:xfrm>
-            <a:off x="7242048" y="2268855"/>
-            <a:ext cx="2157984" cy="540639"/>
-          </a:xfrm>
-          <a:prstGeom prst="rect">
-            <a:avLst/>
-          </a:prstGeom>
-          <a:noFill/>
-        </p:spPr>
-        <p:txBody>
-          <a:bodyPr wrap="square" lIns="0" tIns="0" rIns="0" bIns="0" anchor="ctr" rtlCol="0"/>
-          <a:lstStyle/>
-          <a:p>
-            <a:pPr algn="l">
-              <a:lnSpc>
-                <a:spcPct val="130000"/>
-              </a:lnSpc>
-            </a:pPr>
-            <a:r>
-              <a:rPr lang="ja-JP" altLang="en-US" sz="1500" b="0">
-                <a:solidFill>
-                  <a:srgbClr val="14141A"/>
-                </a:solidFill>
-                <a:latin typeface="Yu Gothic"/>
-                <a:ea typeface="Yu Gothic"/>
-                <a:cs typeface="Yu Gothic"/>
-              </a:rPr>
-              <a:t>入社後すぐ</a:t>
+            <a:off x="1527048" y="4014216"/>
+            <a:ext cx="9784080" cy="914400"/>
+          </a:xfrm>
+          <a:prstGeom prst="rect">
+            <a:avLst/>
+          </a:prstGeom>
+          <a:noFill/>
+        </p:spPr>
+        <p:txBody>
+          <a:bodyPr wrap="square" lIns="0" tIns="0" rIns="0" bIns="0" anchor="t" rtlCol="0"/>
+          <a:lstStyle/>
+          <a:p>
+            <a:pPr algn="l">
+              <a:lnSpc>
+                <a:spcPct val="145000"/>
+              </a:lnSpc>
+            </a:pPr>
+            <a:r>
+              <a:rPr lang="ja-JP" altLang="en-US" sz="1820" b="0">
+                <a:solidFill>
+                  <a:srgbClr val="14141A"/>
+                </a:solidFill>
+                <a:latin typeface="Yu Gothic"/>
+                <a:ea typeface="Yu Gothic"/>
+                <a:cs typeface="Yu Gothic"/>
+              </a:rPr>
+              <a:t>2028年6月の</a:t>
+            </a:r>
+            <a:r>
+              <a:rPr lang="ja-JP" altLang="en-US" sz="1820" b="1">
+                <a:solidFill>
+                  <a:srgbClr val="14141A"/>
+                </a:solidFill>
+                <a:latin typeface="Yu Gothic"/>
+                <a:ea typeface="Yu Gothic"/>
+                <a:cs typeface="Yu Gothic"/>
+              </a:rPr>
+              <a:t>カンヌ</a:t>
+            </a:r>
+            <a:r>
+              <a:rPr lang="ja-JP" altLang="en-US" sz="1820" b="0">
+                <a:solidFill>
+                  <a:srgbClr val="14141A"/>
+                </a:solidFill>
+                <a:latin typeface="Yu Gothic"/>
+                <a:ea typeface="Yu Gothic"/>
+                <a:cs typeface="Yu Gothic"/>
+              </a:rPr>
+              <a:t>は仕事です。費用は私側（会社負担を含む）で、家計からは出しません。</a:t>
             </a:r>
           </a:p>
         </p:txBody>
@@ -11773,931 +12621,40 @@
         </p:nvSpPr>
         <p:spPr>
           <a:xfrm>
-            <a:off x="9528048" y="2268855"/>
-            <a:ext cx="1700784" cy="540639"/>
-          </a:xfrm>
-          <a:prstGeom prst="rect">
-            <a:avLst/>
-          </a:prstGeom>
-          <a:noFill/>
-        </p:spPr>
-        <p:txBody>
-          <a:bodyPr wrap="square" lIns="0" tIns="0" rIns="0" bIns="0" anchor="ctr" rtlCol="0"/>
-          <a:lstStyle/>
-          <a:p>
-            <a:pPr algn="l">
-              <a:lnSpc>
-                <a:spcPct val="130000"/>
-              </a:lnSpc>
-            </a:pPr>
-            <a:r>
-              <a:rPr lang="ja-JP" altLang="en-US" sz="1500" b="0">
-                <a:solidFill>
-                  <a:srgbClr val="14141A"/>
-                </a:solidFill>
-                <a:latin typeface="Yu Gothic"/>
-                <a:ea typeface="Yu Gothic"/>
-                <a:cs typeface="Yu Gothic"/>
-              </a:rPr>
-              <a:t>私</a:t>
-            </a:r>
-          </a:p>
-        </p:txBody>
-      </p:sp>
-      <p:sp>
-        <p:nvSpPr>
-          <p:cNvPr id="11" name="Shape 11"/>
-          <p:cNvSpPr/>
-          <p:nvPr/>
-        </p:nvSpPr>
-        <p:spPr>
-          <a:xfrm>
-            <a:off x="841248" y="2804414"/>
-            <a:ext cx="10515600" cy="9525"/>
-          </a:xfrm>
-          <a:prstGeom prst="rect">
-            <a:avLst/>
-          </a:prstGeom>
-          <a:solidFill>
-            <a:srgbClr val="E7E7EE"/>
-          </a:solidFill>
-          <a:ln>
-            <a:noFill/>
-          </a:ln>
-        </p:spPr>
-        <p:txBody>
-          <a:bodyPr wrap="square" lIns="0" tIns="0" rIns="0" bIns="0" anchor="ctr" rtlCol="0"/>
-          <a:lstStyle/>
-          <a:p/>
-        </p:txBody>
-      </p:sp>
-      <p:sp>
-        <p:nvSpPr>
-          <p:cNvPr id="12" name="TextBox 12"/>
-          <p:cNvSpPr txBox="1"/>
-          <p:nvPr/>
-        </p:nvSpPr>
-        <p:spPr>
-          <a:xfrm>
-            <a:off x="841248" y="2809494"/>
-            <a:ext cx="6272784" cy="540639"/>
-          </a:xfrm>
-          <a:prstGeom prst="rect">
-            <a:avLst/>
-          </a:prstGeom>
-          <a:noFill/>
-        </p:spPr>
-        <p:txBody>
-          <a:bodyPr wrap="square" lIns="0" tIns="0" rIns="0" bIns="0" anchor="ctr" rtlCol="0"/>
-          <a:lstStyle/>
-          <a:p>
-            <a:pPr algn="l">
-              <a:lnSpc>
-                <a:spcPct val="130000"/>
-              </a:lnSpc>
-            </a:pPr>
-            <a:r>
-              <a:rPr lang="ja-JP" altLang="en-US" sz="1500" b="0">
-                <a:solidFill>
-                  <a:srgbClr val="14141A"/>
-                </a:solidFill>
-                <a:latin typeface="Yu Gothic"/>
-                <a:ea typeface="Yu Gothic"/>
-                <a:cs typeface="Yu Gothic"/>
-              </a:rPr>
-              <a:t>給与の形（賞与の有無）を見て、家賃の負担額を確定する</a:t>
-            </a:r>
-          </a:p>
-        </p:txBody>
-      </p:sp>
-      <p:sp>
-        <p:nvSpPr>
-          <p:cNvPr id="13" name="TextBox 13"/>
-          <p:cNvSpPr txBox="1"/>
-          <p:nvPr/>
-        </p:nvSpPr>
-        <p:spPr>
-          <a:xfrm>
-            <a:off x="7242048" y="2809494"/>
-            <a:ext cx="2157984" cy="540639"/>
-          </a:xfrm>
-          <a:prstGeom prst="rect">
-            <a:avLst/>
-          </a:prstGeom>
-          <a:noFill/>
-        </p:spPr>
-        <p:txBody>
-          <a:bodyPr wrap="square" lIns="0" tIns="0" rIns="0" bIns="0" anchor="ctr" rtlCol="0"/>
-          <a:lstStyle/>
-          <a:p>
-            <a:pPr algn="l">
-              <a:lnSpc>
-                <a:spcPct val="130000"/>
-              </a:lnSpc>
-            </a:pPr>
-            <a:r>
-              <a:rPr lang="ja-JP" altLang="en-US" sz="1500" b="0">
-                <a:solidFill>
-                  <a:srgbClr val="14141A"/>
-                </a:solidFill>
-                <a:latin typeface="Yu Gothic"/>
-                <a:ea typeface="Yu Gothic"/>
-                <a:cs typeface="Yu Gothic"/>
-              </a:rPr>
-              <a:t>2027年1月</a:t>
-            </a:r>
-          </a:p>
-        </p:txBody>
-      </p:sp>
-      <p:sp>
-        <p:nvSpPr>
-          <p:cNvPr id="14" name="TextBox 14"/>
-          <p:cNvSpPr txBox="1"/>
-          <p:nvPr/>
-        </p:nvSpPr>
-        <p:spPr>
-          <a:xfrm>
-            <a:off x="9528048" y="2809494"/>
-            <a:ext cx="1700784" cy="540639"/>
-          </a:xfrm>
-          <a:prstGeom prst="rect">
-            <a:avLst/>
-          </a:prstGeom>
-          <a:noFill/>
-        </p:spPr>
-        <p:txBody>
-          <a:bodyPr wrap="square" lIns="0" tIns="0" rIns="0" bIns="0" anchor="ctr" rtlCol="0"/>
-          <a:lstStyle/>
-          <a:p>
-            <a:pPr algn="l">
-              <a:lnSpc>
-                <a:spcPct val="130000"/>
-              </a:lnSpc>
-            </a:pPr>
-            <a:r>
-              <a:rPr lang="ja-JP" altLang="en-US" sz="1500" b="0">
-                <a:solidFill>
-                  <a:srgbClr val="14141A"/>
-                </a:solidFill>
-                <a:latin typeface="Yu Gothic"/>
-                <a:ea typeface="Yu Gothic"/>
-                <a:cs typeface="Yu Gothic"/>
-              </a:rPr>
-              <a:t>私</a:t>
-            </a:r>
-          </a:p>
-        </p:txBody>
-      </p:sp>
-      <p:sp>
-        <p:nvSpPr>
-          <p:cNvPr id="15" name="Shape 15"/>
-          <p:cNvSpPr/>
-          <p:nvPr/>
-        </p:nvSpPr>
-        <p:spPr>
-          <a:xfrm>
-            <a:off x="841248" y="3345053"/>
-            <a:ext cx="10515600" cy="9525"/>
-          </a:xfrm>
-          <a:prstGeom prst="rect">
-            <a:avLst/>
-          </a:prstGeom>
-          <a:solidFill>
-            <a:srgbClr val="E7E7EE"/>
-          </a:solidFill>
-          <a:ln>
-            <a:noFill/>
-          </a:ln>
-        </p:spPr>
-        <p:txBody>
-          <a:bodyPr wrap="square" lIns="0" tIns="0" rIns="0" bIns="0" anchor="ctr" rtlCol="0"/>
-          <a:lstStyle/>
-          <a:p/>
-        </p:txBody>
-      </p:sp>
-      <p:sp>
-        <p:nvSpPr>
-          <p:cNvPr id="16" name="TextBox 16"/>
-          <p:cNvSpPr txBox="1"/>
-          <p:nvPr/>
-        </p:nvSpPr>
-        <p:spPr>
-          <a:xfrm>
-            <a:off x="841248" y="3350133"/>
-            <a:ext cx="6272784" cy="540639"/>
-          </a:xfrm>
-          <a:prstGeom prst="rect">
-            <a:avLst/>
-          </a:prstGeom>
-          <a:noFill/>
-        </p:spPr>
-        <p:txBody>
-          <a:bodyPr wrap="square" lIns="0" tIns="0" rIns="0" bIns="0" anchor="ctr" rtlCol="0"/>
-          <a:lstStyle/>
-          <a:p>
-            <a:pPr algn="l">
-              <a:lnSpc>
-                <a:spcPct val="130000"/>
-              </a:lnSpc>
-            </a:pPr>
-            <a:r>
-              <a:rPr lang="ja-JP" altLang="en-US" sz="1500" b="0">
-                <a:solidFill>
-                  <a:srgbClr val="14141A"/>
-                </a:solidFill>
-                <a:latin typeface="Yu Gothic"/>
-                <a:ea typeface="Yu Gothic"/>
-                <a:cs typeface="Yu Gothic"/>
-              </a:rPr>
-              <a:t>ルームシェアの契約期間と、解約の条件</a:t>
-            </a:r>
-          </a:p>
-        </p:txBody>
-      </p:sp>
-      <p:sp>
-        <p:nvSpPr>
-          <p:cNvPr id="17" name="TextBox 17"/>
-          <p:cNvSpPr txBox="1"/>
-          <p:nvPr/>
-        </p:nvSpPr>
-        <p:spPr>
-          <a:xfrm>
-            <a:off x="7242048" y="3350133"/>
-            <a:ext cx="2157984" cy="540639"/>
-          </a:xfrm>
-          <a:prstGeom prst="rect">
-            <a:avLst/>
-          </a:prstGeom>
-          <a:noFill/>
-        </p:spPr>
-        <p:txBody>
-          <a:bodyPr wrap="square" lIns="0" tIns="0" rIns="0" bIns="0" anchor="ctr" rtlCol="0"/>
-          <a:lstStyle/>
-          <a:p>
-            <a:pPr algn="l">
-              <a:lnSpc>
-                <a:spcPct val="130000"/>
-              </a:lnSpc>
-            </a:pPr>
-            <a:r>
-              <a:rPr lang="ja-JP" altLang="en-US" sz="1500" b="0">
-                <a:solidFill>
-                  <a:srgbClr val="14141A"/>
-                </a:solidFill>
-                <a:latin typeface="Yu Gothic"/>
-                <a:ea typeface="Yu Gothic"/>
-                <a:cs typeface="Yu Gothic"/>
-              </a:rPr>
-              <a:t>契約前</a:t>
-            </a:r>
-          </a:p>
-        </p:txBody>
-      </p:sp>
-      <p:sp>
-        <p:nvSpPr>
-          <p:cNvPr id="18" name="TextBox 18"/>
-          <p:cNvSpPr txBox="1"/>
-          <p:nvPr/>
-        </p:nvSpPr>
-        <p:spPr>
-          <a:xfrm>
-            <a:off x="9528048" y="3350133"/>
-            <a:ext cx="1700784" cy="540639"/>
-          </a:xfrm>
-          <a:prstGeom prst="rect">
-            <a:avLst/>
-          </a:prstGeom>
-          <a:noFill/>
-        </p:spPr>
-        <p:txBody>
-          <a:bodyPr wrap="square" lIns="0" tIns="0" rIns="0" bIns="0" anchor="ctr" rtlCol="0"/>
-          <a:lstStyle/>
-          <a:p>
-            <a:pPr algn="l">
-              <a:lnSpc>
-                <a:spcPct val="130000"/>
-              </a:lnSpc>
-            </a:pPr>
-            <a:r>
-              <a:rPr lang="ja-JP" altLang="en-US" sz="1500" b="0">
-                <a:solidFill>
-                  <a:srgbClr val="14141A"/>
-                </a:solidFill>
-                <a:latin typeface="Yu Gothic"/>
-                <a:ea typeface="Yu Gothic"/>
-                <a:cs typeface="Yu Gothic"/>
-              </a:rPr>
-              <a:t>凪</a:t>
-            </a:r>
-          </a:p>
-        </p:txBody>
-      </p:sp>
-      <p:sp>
-        <p:nvSpPr>
-          <p:cNvPr id="19" name="Shape 19"/>
-          <p:cNvSpPr/>
-          <p:nvPr/>
-        </p:nvSpPr>
-        <p:spPr>
-          <a:xfrm>
-            <a:off x="841248" y="3885692"/>
-            <a:ext cx="10515600" cy="9525"/>
-          </a:xfrm>
-          <a:prstGeom prst="rect">
-            <a:avLst/>
-          </a:prstGeom>
-          <a:solidFill>
-            <a:srgbClr val="E7E7EE"/>
-          </a:solidFill>
-          <a:ln>
-            <a:noFill/>
-          </a:ln>
-        </p:spPr>
-        <p:txBody>
-          <a:bodyPr wrap="square" lIns="0" tIns="0" rIns="0" bIns="0" anchor="ctr" rtlCol="0"/>
-          <a:lstStyle/>
-          <a:p/>
-        </p:txBody>
-      </p:sp>
-      <p:sp>
-        <p:nvSpPr>
-          <p:cNvPr id="20" name="TextBox 20"/>
-          <p:cNvSpPr txBox="1"/>
-          <p:nvPr/>
-        </p:nvSpPr>
-        <p:spPr>
-          <a:xfrm>
-            <a:off x="841248" y="3890772"/>
-            <a:ext cx="6272784" cy="540639"/>
-          </a:xfrm>
-          <a:prstGeom prst="rect">
-            <a:avLst/>
-          </a:prstGeom>
-          <a:noFill/>
-        </p:spPr>
-        <p:txBody>
-          <a:bodyPr wrap="square" lIns="0" tIns="0" rIns="0" bIns="0" anchor="ctr" rtlCol="0"/>
-          <a:lstStyle/>
-          <a:p>
-            <a:pPr algn="l">
-              <a:lnSpc>
-                <a:spcPct val="130000"/>
-              </a:lnSpc>
-            </a:pPr>
-            <a:r>
-              <a:rPr lang="ja-JP" altLang="en-US" sz="1500" b="0">
-                <a:solidFill>
-                  <a:srgbClr val="14141A"/>
-                </a:solidFill>
-                <a:latin typeface="Yu Gothic"/>
-                <a:ea typeface="Yu Gothic"/>
-                <a:cs typeface="Yu Gothic"/>
-              </a:rPr>
-              <a:t>入籍と入居を、何月にするか</a:t>
-            </a:r>
-          </a:p>
-        </p:txBody>
-      </p:sp>
-      <p:sp>
-        <p:nvSpPr>
-          <p:cNvPr id="21" name="TextBox 21"/>
-          <p:cNvSpPr txBox="1"/>
-          <p:nvPr/>
-        </p:nvSpPr>
-        <p:spPr>
-          <a:xfrm>
-            <a:off x="7242048" y="3890772"/>
-            <a:ext cx="2157984" cy="540639"/>
-          </a:xfrm>
-          <a:prstGeom prst="rect">
-            <a:avLst/>
-          </a:prstGeom>
-          <a:noFill/>
-        </p:spPr>
-        <p:txBody>
-          <a:bodyPr wrap="square" lIns="0" tIns="0" rIns="0" bIns="0" anchor="ctr" rtlCol="0"/>
-          <a:lstStyle/>
-          <a:p>
-            <a:pPr algn="l">
-              <a:lnSpc>
-                <a:spcPct val="130000"/>
-              </a:lnSpc>
-            </a:pPr>
-            <a:r>
-              <a:rPr lang="ja-JP" altLang="en-US" sz="1500" b="0">
-                <a:solidFill>
-                  <a:srgbClr val="14141A"/>
-                </a:solidFill>
-                <a:latin typeface="Yu Gothic"/>
-                <a:ea typeface="Yu Gothic"/>
-                <a:cs typeface="Yu Gothic"/>
-              </a:rPr>
-              <a:t>2027年後半</a:t>
-            </a:r>
-          </a:p>
-        </p:txBody>
-      </p:sp>
-      <p:sp>
-        <p:nvSpPr>
-          <p:cNvPr id="22" name="TextBox 22"/>
-          <p:cNvSpPr txBox="1"/>
-          <p:nvPr/>
-        </p:nvSpPr>
-        <p:spPr>
-          <a:xfrm>
-            <a:off x="9528048" y="3890772"/>
-            <a:ext cx="1700784" cy="540639"/>
-          </a:xfrm>
-          <a:prstGeom prst="rect">
-            <a:avLst/>
-          </a:prstGeom>
-          <a:noFill/>
-        </p:spPr>
-        <p:txBody>
-          <a:bodyPr wrap="square" lIns="0" tIns="0" rIns="0" bIns="0" anchor="ctr" rtlCol="0"/>
-          <a:lstStyle/>
-          <a:p>
-            <a:pPr algn="l">
-              <a:lnSpc>
-                <a:spcPct val="130000"/>
-              </a:lnSpc>
-            </a:pPr>
-            <a:r>
-              <a:rPr lang="ja-JP" altLang="en-US" sz="1500" b="0">
-                <a:solidFill>
-                  <a:srgbClr val="14141A"/>
-                </a:solidFill>
-                <a:latin typeface="Yu Gothic"/>
-                <a:ea typeface="Yu Gothic"/>
-                <a:cs typeface="Yu Gothic"/>
-              </a:rPr>
-              <a:t>ふたり</a:t>
-            </a:r>
-          </a:p>
-        </p:txBody>
-      </p:sp>
-      <p:sp>
-        <p:nvSpPr>
-          <p:cNvPr id="23" name="Shape 23"/>
-          <p:cNvSpPr/>
-          <p:nvPr/>
-        </p:nvSpPr>
-        <p:spPr>
-          <a:xfrm>
-            <a:off x="841248" y="4426331"/>
-            <a:ext cx="10515600" cy="9525"/>
-          </a:xfrm>
-          <a:prstGeom prst="rect">
-            <a:avLst/>
-          </a:prstGeom>
-          <a:solidFill>
-            <a:srgbClr val="E7E7EE"/>
-          </a:solidFill>
-          <a:ln>
-            <a:noFill/>
-          </a:ln>
-        </p:spPr>
-        <p:txBody>
-          <a:bodyPr wrap="square" lIns="0" tIns="0" rIns="0" bIns="0" anchor="ctr" rtlCol="0"/>
-          <a:lstStyle/>
-          <a:p/>
-        </p:txBody>
-      </p:sp>
-      <p:sp>
-        <p:nvSpPr>
-          <p:cNvPr id="24" name="TextBox 24"/>
-          <p:cNvSpPr txBox="1"/>
-          <p:nvPr/>
-        </p:nvSpPr>
-        <p:spPr>
-          <a:xfrm>
-            <a:off x="841248" y="4431411"/>
-            <a:ext cx="6272784" cy="540639"/>
-          </a:xfrm>
-          <a:prstGeom prst="rect">
-            <a:avLst/>
-          </a:prstGeom>
-          <a:noFill/>
-        </p:spPr>
-        <p:txBody>
-          <a:bodyPr wrap="square" lIns="0" tIns="0" rIns="0" bIns="0" anchor="ctr" rtlCol="0"/>
-          <a:lstStyle/>
-          <a:p>
-            <a:pPr algn="l">
-              <a:lnSpc>
-                <a:spcPct val="130000"/>
-              </a:lnSpc>
-            </a:pPr>
-            <a:r>
-              <a:rPr lang="ja-JP" altLang="en-US" sz="1500" b="0">
-                <a:solidFill>
-                  <a:srgbClr val="14141A"/>
-                </a:solidFill>
-                <a:latin typeface="Yu Gothic"/>
-                <a:ea typeface="Yu Gothic"/>
-                <a:cs typeface="Yu Gothic"/>
-              </a:rPr>
-              <a:t>収入合算が必要なら、確定申告書2〜3期分を用意する</a:t>
-            </a:r>
-          </a:p>
-        </p:txBody>
-      </p:sp>
-      <p:sp>
-        <p:nvSpPr>
-          <p:cNvPr id="25" name="TextBox 25"/>
-          <p:cNvSpPr txBox="1"/>
-          <p:nvPr/>
-        </p:nvSpPr>
-        <p:spPr>
-          <a:xfrm>
-            <a:off x="7242048" y="4431411"/>
-            <a:ext cx="2157984" cy="540639"/>
-          </a:xfrm>
-          <a:prstGeom prst="rect">
-            <a:avLst/>
-          </a:prstGeom>
-          <a:noFill/>
-        </p:spPr>
-        <p:txBody>
-          <a:bodyPr wrap="square" lIns="0" tIns="0" rIns="0" bIns="0" anchor="ctr" rtlCol="0"/>
-          <a:lstStyle/>
-          <a:p>
-            <a:pPr algn="l">
-              <a:lnSpc>
-                <a:spcPct val="130000"/>
-              </a:lnSpc>
-            </a:pPr>
-            <a:r>
-              <a:rPr lang="ja-JP" altLang="en-US" sz="1500" b="0">
-                <a:solidFill>
-                  <a:srgbClr val="14141A"/>
-                </a:solidFill>
-                <a:latin typeface="Yu Gothic"/>
-                <a:ea typeface="Yu Gothic"/>
-                <a:cs typeface="Yu Gothic"/>
-              </a:rPr>
-              <a:t>2027年後半</a:t>
-            </a:r>
-          </a:p>
-        </p:txBody>
-      </p:sp>
-      <p:sp>
-        <p:nvSpPr>
-          <p:cNvPr id="26" name="TextBox 26"/>
-          <p:cNvSpPr txBox="1"/>
-          <p:nvPr/>
-        </p:nvSpPr>
-        <p:spPr>
-          <a:xfrm>
-            <a:off x="9528048" y="4431411"/>
-            <a:ext cx="1700784" cy="540639"/>
-          </a:xfrm>
-          <a:prstGeom prst="rect">
-            <a:avLst/>
-          </a:prstGeom>
-          <a:noFill/>
-        </p:spPr>
-        <p:txBody>
-          <a:bodyPr wrap="square" lIns="0" tIns="0" rIns="0" bIns="0" anchor="ctr" rtlCol="0"/>
-          <a:lstStyle/>
-          <a:p>
-            <a:pPr algn="l">
-              <a:lnSpc>
-                <a:spcPct val="130000"/>
-              </a:lnSpc>
-            </a:pPr>
-            <a:r>
-              <a:rPr lang="ja-JP" altLang="en-US" sz="1500" b="0">
-                <a:solidFill>
-                  <a:srgbClr val="14141A"/>
-                </a:solidFill>
-                <a:latin typeface="Yu Gothic"/>
-                <a:ea typeface="Yu Gothic"/>
-                <a:cs typeface="Yu Gothic"/>
-              </a:rPr>
-              <a:t>凪</a:t>
-            </a:r>
-          </a:p>
-        </p:txBody>
-      </p:sp>
-      <p:sp>
-        <p:nvSpPr>
-          <p:cNvPr id="27" name="Shape 27"/>
-          <p:cNvSpPr/>
-          <p:nvPr/>
-        </p:nvSpPr>
-        <p:spPr>
-          <a:xfrm>
-            <a:off x="841248" y="4966970"/>
-            <a:ext cx="10515600" cy="9525"/>
-          </a:xfrm>
-          <a:prstGeom prst="rect">
-            <a:avLst/>
-          </a:prstGeom>
-          <a:solidFill>
-            <a:srgbClr val="E7E7EE"/>
-          </a:solidFill>
-          <a:ln>
-            <a:noFill/>
-          </a:ln>
-        </p:spPr>
-        <p:txBody>
-          <a:bodyPr wrap="square" lIns="0" tIns="0" rIns="0" bIns="0" anchor="ctr" rtlCol="0"/>
-          <a:lstStyle/>
-          <a:p/>
-        </p:txBody>
-      </p:sp>
-      <p:sp>
-        <p:nvSpPr>
-          <p:cNvPr id="28" name="Shape 28"/>
-          <p:cNvSpPr/>
-          <p:nvPr/>
-        </p:nvSpPr>
-        <p:spPr>
-          <a:xfrm>
-            <a:off x="841248" y="4972050"/>
-            <a:ext cx="10515600" cy="540639"/>
-          </a:xfrm>
-          <a:prstGeom prst="rect">
-            <a:avLst/>
-          </a:prstGeom>
-          <a:solidFill>
-            <a:srgbClr val="FFD93D"/>
-          </a:solidFill>
-          <a:ln>
-            <a:noFill/>
-          </a:ln>
-        </p:spPr>
-        <p:txBody>
-          <a:bodyPr wrap="square" lIns="0" tIns="0" rIns="0" bIns="0" anchor="ctr" rtlCol="0"/>
-          <a:lstStyle/>
-          <a:p/>
-        </p:txBody>
-      </p:sp>
-      <p:sp>
-        <p:nvSpPr>
-          <p:cNvPr id="29" name="TextBox 29"/>
-          <p:cNvSpPr txBox="1"/>
-          <p:nvPr/>
-        </p:nvSpPr>
-        <p:spPr>
-          <a:xfrm>
-            <a:off x="932688" y="4972050"/>
-            <a:ext cx="6181344" cy="540639"/>
-          </a:xfrm>
-          <a:prstGeom prst="rect">
-            <a:avLst/>
-          </a:prstGeom>
-          <a:noFill/>
-        </p:spPr>
-        <p:txBody>
-          <a:bodyPr wrap="square" lIns="0" tIns="0" rIns="0" bIns="0" anchor="ctr" rtlCol="0"/>
-          <a:lstStyle/>
-          <a:p>
-            <a:pPr algn="l">
-              <a:lnSpc>
-                <a:spcPct val="130000"/>
-              </a:lnSpc>
-            </a:pPr>
-            <a:r>
-              <a:rPr lang="ja-JP" altLang="en-US" sz="1500" b="1">
-                <a:solidFill>
-                  <a:srgbClr val="14141A"/>
-                </a:solidFill>
-                <a:latin typeface="Yu Gothic"/>
-                <a:ea typeface="Yu Gothic"/>
-                <a:cs typeface="Yu Gothic"/>
-              </a:rPr>
-              <a:t>あなたの分の空欄を埋める</a:t>
-            </a:r>
-          </a:p>
-        </p:txBody>
-      </p:sp>
-      <p:sp>
-        <p:nvSpPr>
-          <p:cNvPr id="30" name="TextBox 30"/>
-          <p:cNvSpPr txBox="1"/>
-          <p:nvPr/>
-        </p:nvSpPr>
-        <p:spPr>
-          <a:xfrm>
-            <a:off x="7333488" y="4972050"/>
-            <a:ext cx="2066544" cy="540639"/>
-          </a:xfrm>
-          <a:prstGeom prst="rect">
-            <a:avLst/>
-          </a:prstGeom>
-          <a:noFill/>
-        </p:spPr>
-        <p:txBody>
-          <a:bodyPr wrap="square" lIns="0" tIns="0" rIns="0" bIns="0" anchor="ctr" rtlCol="0"/>
-          <a:lstStyle/>
-          <a:p>
-            <a:pPr algn="l">
-              <a:lnSpc>
-                <a:spcPct val="130000"/>
-              </a:lnSpc>
-            </a:pPr>
-            <a:r>
-              <a:rPr lang="ja-JP" altLang="en-US" sz="1500" b="1">
-                <a:solidFill>
-                  <a:srgbClr val="14141A"/>
-                </a:solidFill>
-                <a:latin typeface="Yu Gothic"/>
-                <a:ea typeface="Yu Gothic"/>
-                <a:cs typeface="Yu Gothic"/>
-              </a:rPr>
-              <a:t>次に会うとき</a:t>
-            </a:r>
-          </a:p>
-        </p:txBody>
-      </p:sp>
-      <p:sp>
-        <p:nvSpPr>
-          <p:cNvPr id="31" name="TextBox 31"/>
-          <p:cNvSpPr txBox="1"/>
-          <p:nvPr/>
-        </p:nvSpPr>
-        <p:spPr>
-          <a:xfrm>
-            <a:off x="9619488" y="4972050"/>
-            <a:ext cx="1609344" cy="540639"/>
-          </a:xfrm>
-          <a:prstGeom prst="rect">
-            <a:avLst/>
-          </a:prstGeom>
-          <a:noFill/>
-        </p:spPr>
-        <p:txBody>
-          <a:bodyPr wrap="square" lIns="0" tIns="0" rIns="0" bIns="0" anchor="ctr" rtlCol="0"/>
-          <a:lstStyle/>
-          <a:p>
-            <a:pPr algn="l">
-              <a:lnSpc>
-                <a:spcPct val="130000"/>
-              </a:lnSpc>
-            </a:pPr>
-            <a:r>
-              <a:rPr lang="ja-JP" altLang="en-US" sz="1500" b="1">
-                <a:solidFill>
-                  <a:srgbClr val="14141A"/>
-                </a:solidFill>
-                <a:latin typeface="Yu Gothic"/>
-                <a:ea typeface="Yu Gothic"/>
-                <a:cs typeface="Yu Gothic"/>
-              </a:rPr>
-              <a:t>凪</a:t>
-            </a:r>
-          </a:p>
-        </p:txBody>
-      </p:sp>
-      <p:sp>
-        <p:nvSpPr>
-          <p:cNvPr id="32" name="Shape 32"/>
-          <p:cNvSpPr/>
-          <p:nvPr/>
-        </p:nvSpPr>
-        <p:spPr>
-          <a:xfrm>
-            <a:off x="841248" y="5507609"/>
-            <a:ext cx="10515600" cy="9525"/>
-          </a:xfrm>
-          <a:prstGeom prst="rect">
-            <a:avLst/>
-          </a:prstGeom>
-          <a:solidFill>
-            <a:srgbClr val="E7E7EE"/>
-          </a:solidFill>
-          <a:ln>
-            <a:noFill/>
-          </a:ln>
-        </p:spPr>
-        <p:txBody>
-          <a:bodyPr wrap="square" lIns="0" tIns="0" rIns="0" bIns="0" anchor="ctr" rtlCol="0"/>
-          <a:lstStyle/>
-          <a:p/>
-        </p:txBody>
-      </p:sp>
-      <p:sp>
-        <p:nvSpPr>
-          <p:cNvPr id="33" name="TextBox 33"/>
-          <p:cNvSpPr txBox="1"/>
-          <p:nvPr/>
-        </p:nvSpPr>
-        <p:spPr>
-          <a:xfrm>
-            <a:off x="841248" y="5512689"/>
-            <a:ext cx="6272784" cy="540639"/>
-          </a:xfrm>
-          <a:prstGeom prst="rect">
-            <a:avLst/>
-          </a:prstGeom>
-          <a:noFill/>
-        </p:spPr>
-        <p:txBody>
-          <a:bodyPr wrap="square" lIns="0" tIns="0" rIns="0" bIns="0" anchor="ctr" rtlCol="0"/>
-          <a:lstStyle/>
-          <a:p>
-            <a:pPr algn="l">
-              <a:lnSpc>
-                <a:spcPct val="130000"/>
-              </a:lnSpc>
-            </a:pPr>
-            <a:r>
-              <a:rPr lang="ja-JP" altLang="en-US" sz="1500" b="0">
-                <a:solidFill>
-                  <a:srgbClr val="14141A"/>
-                </a:solidFill>
-                <a:latin typeface="Yu Gothic"/>
-                <a:ea typeface="Yu Gothic"/>
-                <a:cs typeface="Yu Gothic"/>
-              </a:rPr>
-              <a:t>2人目をどうするか</a:t>
-            </a:r>
-          </a:p>
-        </p:txBody>
-      </p:sp>
-      <p:sp>
-        <p:nvSpPr>
-          <p:cNvPr id="34" name="TextBox 34"/>
-          <p:cNvSpPr txBox="1"/>
-          <p:nvPr/>
-        </p:nvSpPr>
-        <p:spPr>
-          <a:xfrm>
-            <a:off x="7242048" y="5512689"/>
-            <a:ext cx="2157984" cy="540639"/>
-          </a:xfrm>
-          <a:prstGeom prst="rect">
-            <a:avLst/>
-          </a:prstGeom>
-          <a:noFill/>
-        </p:spPr>
-        <p:txBody>
-          <a:bodyPr wrap="square" lIns="0" tIns="0" rIns="0" bIns="0" anchor="ctr" rtlCol="0"/>
-          <a:lstStyle/>
-          <a:p>
-            <a:pPr algn="l">
-              <a:lnSpc>
-                <a:spcPct val="130000"/>
-              </a:lnSpc>
-            </a:pPr>
-            <a:r>
-              <a:rPr lang="ja-JP" altLang="en-US" sz="1500" b="0">
-                <a:solidFill>
-                  <a:srgbClr val="14141A"/>
-                </a:solidFill>
-                <a:latin typeface="Yu Gothic"/>
-                <a:ea typeface="Yu Gothic"/>
-                <a:cs typeface="Yu Gothic"/>
-              </a:rPr>
-              <a:t>一人目のあと</a:t>
-            </a:r>
-          </a:p>
-        </p:txBody>
-      </p:sp>
-      <p:sp>
-        <p:nvSpPr>
-          <p:cNvPr id="35" name="TextBox 35"/>
-          <p:cNvSpPr txBox="1"/>
-          <p:nvPr/>
-        </p:nvSpPr>
-        <p:spPr>
-          <a:xfrm>
-            <a:off x="9528048" y="5512689"/>
-            <a:ext cx="1700784" cy="540639"/>
-          </a:xfrm>
-          <a:prstGeom prst="rect">
-            <a:avLst/>
-          </a:prstGeom>
-          <a:noFill/>
-        </p:spPr>
-        <p:txBody>
-          <a:bodyPr wrap="square" lIns="0" tIns="0" rIns="0" bIns="0" anchor="ctr" rtlCol="0"/>
-          <a:lstStyle/>
-          <a:p>
-            <a:pPr algn="l">
-              <a:lnSpc>
-                <a:spcPct val="130000"/>
-              </a:lnSpc>
-            </a:pPr>
-            <a:r>
-              <a:rPr lang="ja-JP" altLang="en-US" sz="1500" b="0">
-                <a:solidFill>
-                  <a:srgbClr val="14141A"/>
-                </a:solidFill>
-                <a:latin typeface="Yu Gothic"/>
-                <a:ea typeface="Yu Gothic"/>
-                <a:cs typeface="Yu Gothic"/>
-              </a:rPr>
-              <a:t>ふたり</a:t>
-            </a:r>
-          </a:p>
-        </p:txBody>
-      </p:sp>
-      <p:sp>
-        <p:nvSpPr>
-          <p:cNvPr id="36" name="TextBox 36"/>
+            <a:off x="841248" y="5138928"/>
+            <a:ext cx="10515600" cy="914400"/>
+          </a:xfrm>
+          <a:prstGeom prst="rect">
+            <a:avLst/>
+          </a:prstGeom>
+          <a:noFill/>
+        </p:spPr>
+        <p:txBody>
+          <a:bodyPr wrap="square" lIns="0" tIns="0" rIns="0" bIns="0" anchor="b" rtlCol="0"/>
+          <a:lstStyle/>
+          <a:p>
+            <a:pPr algn="l">
+              <a:lnSpc>
+                <a:spcPct val="125000"/>
+              </a:lnSpc>
+            </a:pPr>
+            <a:r>
+              <a:rPr lang="ja-JP" altLang="en-US" sz="2800" b="1">
+                <a:solidFill>
+                  <a:srgbClr val="14141A"/>
+                </a:solidFill>
+                <a:latin typeface="Yu Gothic"/>
+                <a:ea typeface="Yu Gothic"/>
+                <a:cs typeface="Yu Gothic"/>
+              </a:rPr>
+              <a:t>家計に影響するものは、ありません。</a:t>
+            </a:r>
+          </a:p>
+        </p:txBody>
+      </p:sp>
+      <p:sp>
+        <p:nvSpPr>
+          <p:cNvPr id="11" name="TextBox 11"/>
           <p:cNvSpPr txBox="1"/>
           <p:nvPr/>
         </p:nvSpPr>
@@ -12736,7 +12693,7 @@
       </p:sp>
       <p:sp>
         <p:nvSpPr>
-          <p:cNvPr id="37" name="TextBox 37"/>
+          <p:cNvPr id="12" name="TextBox 12"/>
           <p:cNvSpPr txBox="1"/>
           <p:nvPr/>
         </p:nvSpPr>
@@ -12840,7 +12797,7 @@
                 <a:ea typeface="Yu Gothic"/>
                 <a:cs typeface="Yu Gothic"/>
               </a:rPr>
-              <a:t>約束</a:t>
+              <a:t>決めること</a:t>
             </a:r>
           </a:p>
         </p:txBody>
@@ -12879,27 +12836,144 @@
                 <a:ea typeface="Yu Gothic Medium"/>
                 <a:cs typeface="Yu Gothic Medium"/>
               </a:rPr>
-              <a:t>私の側から先に書きます。変えないことと、直すことに分けました。</a:t>
-            </a:r>
-          </a:p>
-        </p:txBody>
-      </p:sp>
-      <p:sp>
-        <p:nvSpPr>
-          <p:cNvPr id="4" name="Shape 4"/>
+              <a:t>まだ決まっていないことを、期限つきで並べました。</a:t>
+            </a:r>
+          </a:p>
+        </p:txBody>
+      </p:sp>
+      <p:sp>
+        <p:nvSpPr>
+          <p:cNvPr id="4" name="TextBox 4"/>
+          <p:cNvSpPr txBox="1"/>
+          <p:nvPr/>
+        </p:nvSpPr>
+        <p:spPr>
+          <a:xfrm>
+            <a:off x="841248" y="1728216"/>
+            <a:ext cx="6272784" cy="540639"/>
+          </a:xfrm>
+          <a:prstGeom prst="rect">
+            <a:avLst/>
+          </a:prstGeom>
+          <a:noFill/>
+        </p:spPr>
+        <p:txBody>
+          <a:bodyPr wrap="square" lIns="0" tIns="0" rIns="0" bIns="0" anchor="ctr" rtlCol="0"/>
+          <a:lstStyle/>
+          <a:p>
+            <a:pPr algn="l">
+              <a:lnSpc>
+                <a:spcPct val="145000"/>
+              </a:lnSpc>
+            </a:pPr>
+            <a:r>
+              <a:rPr lang="ja-JP" altLang="en-US" sz="1250" b="1" spc="100">
+                <a:solidFill>
+                  <a:srgbClr val="6B6B76"/>
+                </a:solidFill>
+                <a:latin typeface="Yu Gothic"/>
+                <a:ea typeface="Yu Gothic"/>
+                <a:cs typeface="Yu Gothic"/>
+              </a:rPr>
+              <a:t>決めること</a:t>
+            </a:r>
+          </a:p>
+        </p:txBody>
+      </p:sp>
+      <p:sp>
+        <p:nvSpPr>
+          <p:cNvPr id="5" name="TextBox 5"/>
+          <p:cNvSpPr txBox="1"/>
+          <p:nvPr/>
+        </p:nvSpPr>
+        <p:spPr>
+          <a:xfrm>
+            <a:off x="7242048" y="1728216"/>
+            <a:ext cx="2157984" cy="540639"/>
+          </a:xfrm>
+          <a:prstGeom prst="rect">
+            <a:avLst/>
+          </a:prstGeom>
+          <a:noFill/>
+        </p:spPr>
+        <p:txBody>
+          <a:bodyPr wrap="square" lIns="0" tIns="0" rIns="0" bIns="0" anchor="ctr" rtlCol="0"/>
+          <a:lstStyle/>
+          <a:p>
+            <a:pPr algn="l">
+              <a:lnSpc>
+                <a:spcPct val="145000"/>
+              </a:lnSpc>
+            </a:pPr>
+            <a:r>
+              <a:rPr lang="ja-JP" altLang="en-US" sz="1250" b="1" spc="100">
+                <a:solidFill>
+                  <a:srgbClr val="6B6B76"/>
+                </a:solidFill>
+                <a:latin typeface="Yu Gothic"/>
+                <a:ea typeface="Yu Gothic"/>
+                <a:cs typeface="Yu Gothic"/>
+              </a:rPr>
+              <a:t>いつまで</a:t>
+            </a:r>
+          </a:p>
+        </p:txBody>
+      </p:sp>
+      <p:sp>
+        <p:nvSpPr>
+          <p:cNvPr id="6" name="TextBox 6"/>
+          <p:cNvSpPr txBox="1"/>
+          <p:nvPr/>
+        </p:nvSpPr>
+        <p:spPr>
+          <a:xfrm>
+            <a:off x="9528048" y="1728216"/>
+            <a:ext cx="1700784" cy="540639"/>
+          </a:xfrm>
+          <a:prstGeom prst="rect">
+            <a:avLst/>
+          </a:prstGeom>
+          <a:noFill/>
+        </p:spPr>
+        <p:txBody>
+          <a:bodyPr wrap="square" lIns="0" tIns="0" rIns="0" bIns="0" anchor="ctr" rtlCol="0"/>
+          <a:lstStyle/>
+          <a:p>
+            <a:pPr algn="l">
+              <a:lnSpc>
+                <a:spcPct val="145000"/>
+              </a:lnSpc>
+            </a:pPr>
+            <a:r>
+              <a:rPr lang="ja-JP" altLang="en-US" sz="1250" b="1" spc="100">
+                <a:solidFill>
+                  <a:srgbClr val="6B6B76"/>
+                </a:solidFill>
+                <a:latin typeface="Yu Gothic"/>
+                <a:ea typeface="Yu Gothic"/>
+                <a:cs typeface="Yu Gothic"/>
+              </a:rPr>
+              <a:t>だれが</a:t>
+            </a:r>
+          </a:p>
+        </p:txBody>
+      </p:sp>
+      <p:sp>
+        <p:nvSpPr>
+          <p:cNvPr id="7" name="Shape 7"/>
           <p:cNvSpPr/>
           <p:nvPr/>
         </p:nvSpPr>
         <p:spPr>
           <a:xfrm>
-            <a:off x="841248" y="1773936"/>
-            <a:ext cx="2320290" cy="38100"/>
+            <a:off x="841248" y="2256155"/>
+            <a:ext cx="10515600" cy="25400"/>
           </a:xfrm>
           <a:prstGeom prst="rect">
             <a:avLst/>
           </a:prstGeom>
           <a:solidFill>
-            <a:srgbClr val="00C4B3"/>
+            <a:srgbClr val="14141A"/>
           </a:solidFill>
           <a:ln>
             <a:noFill/>
@@ -12913,149 +12987,734 @@
       </p:sp>
       <p:sp>
         <p:nvSpPr>
-          <p:cNvPr id="5" name="TextBox 5"/>
-          <p:cNvSpPr txBox="1"/>
-          <p:nvPr/>
-        </p:nvSpPr>
-        <p:spPr>
-          <a:xfrm>
-            <a:off x="841248" y="2002536"/>
-            <a:ext cx="2320290" cy="320040"/>
-          </a:xfrm>
-          <a:prstGeom prst="rect">
-            <a:avLst/>
-          </a:prstGeom>
-          <a:noFill/>
-        </p:spPr>
-        <p:txBody>
-          <a:bodyPr wrap="square" lIns="0" tIns="0" rIns="0" bIns="0" anchor="t" rtlCol="0"/>
-          <a:lstStyle/>
-          <a:p>
-            <a:pPr algn="l">
-              <a:lnSpc>
-                <a:spcPct val="145000"/>
-              </a:lnSpc>
-            </a:pPr>
-            <a:r>
-              <a:rPr lang="ja-JP" altLang="en-US" sz="1200" b="1" spc="120">
-                <a:solidFill>
-                  <a:srgbClr val="00C4B3"/>
-                </a:solidFill>
-                <a:latin typeface="Yu Gothic"/>
-                <a:ea typeface="Yu Gothic"/>
-                <a:cs typeface="Yu Gothic"/>
-              </a:rPr>
-              <a:t>仕事</a:t>
-            </a:r>
-          </a:p>
-        </p:txBody>
-      </p:sp>
-      <p:sp>
-        <p:nvSpPr>
-          <p:cNvPr id="6" name="TextBox 6"/>
-          <p:cNvSpPr txBox="1"/>
-          <p:nvPr/>
-        </p:nvSpPr>
-        <p:spPr>
-          <a:xfrm>
-            <a:off x="841248" y="2414016"/>
-            <a:ext cx="2320290" cy="1005840"/>
-          </a:xfrm>
-          <a:prstGeom prst="rect">
-            <a:avLst/>
-          </a:prstGeom>
-          <a:noFill/>
-        </p:spPr>
-        <p:txBody>
-          <a:bodyPr wrap="square" lIns="0" tIns="0" rIns="0" bIns="0" anchor="t" rtlCol="0"/>
-          <a:lstStyle/>
-          <a:p>
-            <a:pPr algn="l">
-              <a:lnSpc>
-                <a:spcPct val="125000"/>
-              </a:lnSpc>
-            </a:pPr>
-            <a:r>
-              <a:rPr lang="ja-JP" altLang="en-US" sz="2200" b="1">
-                <a:solidFill>
-                  <a:srgbClr val="14141A"/>
-                </a:solidFill>
-                <a:latin typeface="Yu Gothic"/>
-                <a:ea typeface="Yu Gothic"/>
-                <a:cs typeface="Yu Gothic"/>
-              </a:rPr>
-              <a:t>熱量は</a:t>
-            </a:r>
-          </a:p>
-          <a:p>
-            <a:pPr algn="l">
-              <a:lnSpc>
-                <a:spcPct val="125000"/>
-              </a:lnSpc>
-            </a:pPr>
-            <a:r>
-              <a:rPr lang="ja-JP" altLang="en-US" sz="2200" b="1">
-                <a:solidFill>
-                  <a:srgbClr val="14141A"/>
-                </a:solidFill>
-                <a:latin typeface="Yu Gothic"/>
-                <a:ea typeface="Yu Gothic"/>
-                <a:cs typeface="Yu Gothic"/>
-              </a:rPr>
-              <a:t>落としません</a:t>
-            </a:r>
-          </a:p>
-        </p:txBody>
-      </p:sp>
-      <p:sp>
-        <p:nvSpPr>
-          <p:cNvPr id="7" name="TextBox 7"/>
-          <p:cNvSpPr txBox="1"/>
-          <p:nvPr/>
-        </p:nvSpPr>
-        <p:spPr>
-          <a:xfrm>
-            <a:off x="841248" y="3511296"/>
-            <a:ext cx="2320290" cy="1444752"/>
-          </a:xfrm>
-          <a:prstGeom prst="rect">
-            <a:avLst/>
-          </a:prstGeom>
-          <a:noFill/>
-        </p:spPr>
-        <p:txBody>
-          <a:bodyPr wrap="square" lIns="0" tIns="0" rIns="0" bIns="0" anchor="t" rtlCol="0"/>
-          <a:lstStyle/>
-          <a:p>
-            <a:pPr algn="l">
-              <a:lnSpc>
-                <a:spcPct val="155000"/>
-              </a:lnSpc>
-            </a:pPr>
-            <a:r>
-              <a:rPr lang="ja-JP" altLang="en-US" sz="1400" b="0">
-                <a:solidFill>
-                  <a:srgbClr val="14141A"/>
-                </a:solidFill>
-                <a:latin typeface="Yu Gothic"/>
-                <a:ea typeface="Yu Gothic"/>
-                <a:cs typeface="Yu Gothic"/>
-              </a:rPr>
-              <a:t>30歳まではお互い仕事優先です。結婚が仕事の邪魔をしない形にします。</a:t>
-            </a:r>
-          </a:p>
-        </p:txBody>
-      </p:sp>
-      <p:sp>
-        <p:nvSpPr>
-          <p:cNvPr id="8" name="Shape 8"/>
+          <p:cNvPr id="8" name="TextBox 8"/>
+          <p:cNvSpPr txBox="1"/>
+          <p:nvPr/>
+        </p:nvSpPr>
+        <p:spPr>
+          <a:xfrm>
+            <a:off x="841248" y="2268855"/>
+            <a:ext cx="6272784" cy="540639"/>
+          </a:xfrm>
+          <a:prstGeom prst="rect">
+            <a:avLst/>
+          </a:prstGeom>
+          <a:noFill/>
+        </p:spPr>
+        <p:txBody>
+          <a:bodyPr wrap="square" lIns="0" tIns="0" rIns="0" bIns="0" anchor="ctr" rtlCol="0"/>
+          <a:lstStyle/>
+          <a:p>
+            <a:pPr algn="l">
+              <a:lnSpc>
+                <a:spcPct val="130000"/>
+              </a:lnSpc>
+            </a:pPr>
+            <a:r>
+              <a:rPr lang="ja-JP" altLang="en-US" sz="1500" b="0">
+                <a:solidFill>
+                  <a:srgbClr val="14141A"/>
+                </a:solidFill>
+                <a:latin typeface="Yu Gothic"/>
+                <a:ea typeface="Yu Gothic"/>
+                <a:cs typeface="Yu Gothic"/>
+              </a:rPr>
+              <a:t>家賃補助の型・上限・同居人の条件・回数・退職時の扱い</a:t>
+            </a:r>
+          </a:p>
+        </p:txBody>
+      </p:sp>
+      <p:sp>
+        <p:nvSpPr>
+          <p:cNvPr id="9" name="TextBox 9"/>
+          <p:cNvSpPr txBox="1"/>
+          <p:nvPr/>
+        </p:nvSpPr>
+        <p:spPr>
+          <a:xfrm>
+            <a:off x="7242048" y="2268855"/>
+            <a:ext cx="2157984" cy="540639"/>
+          </a:xfrm>
+          <a:prstGeom prst="rect">
+            <a:avLst/>
+          </a:prstGeom>
+          <a:noFill/>
+        </p:spPr>
+        <p:txBody>
+          <a:bodyPr wrap="square" lIns="0" tIns="0" rIns="0" bIns="0" anchor="ctr" rtlCol="0"/>
+          <a:lstStyle/>
+          <a:p>
+            <a:pPr algn="l">
+              <a:lnSpc>
+                <a:spcPct val="130000"/>
+              </a:lnSpc>
+            </a:pPr>
+            <a:r>
+              <a:rPr lang="ja-JP" altLang="en-US" sz="1500" b="0">
+                <a:solidFill>
+                  <a:srgbClr val="14141A"/>
+                </a:solidFill>
+                <a:latin typeface="Yu Gothic"/>
+                <a:ea typeface="Yu Gothic"/>
+                <a:cs typeface="Yu Gothic"/>
+              </a:rPr>
+              <a:t>入社後すぐ</a:t>
+            </a:r>
+          </a:p>
+        </p:txBody>
+      </p:sp>
+      <p:sp>
+        <p:nvSpPr>
+          <p:cNvPr id="10" name="TextBox 10"/>
+          <p:cNvSpPr txBox="1"/>
+          <p:nvPr/>
+        </p:nvSpPr>
+        <p:spPr>
+          <a:xfrm>
+            <a:off x="9528048" y="2268855"/>
+            <a:ext cx="1700784" cy="540639"/>
+          </a:xfrm>
+          <a:prstGeom prst="rect">
+            <a:avLst/>
+          </a:prstGeom>
+          <a:noFill/>
+        </p:spPr>
+        <p:txBody>
+          <a:bodyPr wrap="square" lIns="0" tIns="0" rIns="0" bIns="0" anchor="ctr" rtlCol="0"/>
+          <a:lstStyle/>
+          <a:p>
+            <a:pPr algn="l">
+              <a:lnSpc>
+                <a:spcPct val="130000"/>
+              </a:lnSpc>
+            </a:pPr>
+            <a:r>
+              <a:rPr lang="ja-JP" altLang="en-US" sz="1500" b="0">
+                <a:solidFill>
+                  <a:srgbClr val="14141A"/>
+                </a:solidFill>
+                <a:latin typeface="Yu Gothic"/>
+                <a:ea typeface="Yu Gothic"/>
+                <a:cs typeface="Yu Gothic"/>
+              </a:rPr>
+              <a:t>私</a:t>
+            </a:r>
+          </a:p>
+        </p:txBody>
+      </p:sp>
+      <p:sp>
+        <p:nvSpPr>
+          <p:cNvPr id="11" name="Shape 11"/>
           <p:cNvSpPr/>
           <p:nvPr/>
         </p:nvSpPr>
         <p:spPr>
           <a:xfrm>
-            <a:off x="3573018" y="1773936"/>
-            <a:ext cx="2320290" cy="38100"/>
+            <a:off x="841248" y="2804414"/>
+            <a:ext cx="10515600" cy="9525"/>
+          </a:xfrm>
+          <a:prstGeom prst="rect">
+            <a:avLst/>
+          </a:prstGeom>
+          <a:solidFill>
+            <a:srgbClr val="E7E7EE"/>
+          </a:solidFill>
+          <a:ln>
+            <a:noFill/>
+          </a:ln>
+        </p:spPr>
+        <p:txBody>
+          <a:bodyPr wrap="square" lIns="0" tIns="0" rIns="0" bIns="0" anchor="ctr" rtlCol="0"/>
+          <a:lstStyle/>
+          <a:p/>
+        </p:txBody>
+      </p:sp>
+      <p:sp>
+        <p:nvSpPr>
+          <p:cNvPr id="12" name="TextBox 12"/>
+          <p:cNvSpPr txBox="1"/>
+          <p:nvPr/>
+        </p:nvSpPr>
+        <p:spPr>
+          <a:xfrm>
+            <a:off x="841248" y="2809494"/>
+            <a:ext cx="6272784" cy="540639"/>
+          </a:xfrm>
+          <a:prstGeom prst="rect">
+            <a:avLst/>
+          </a:prstGeom>
+          <a:noFill/>
+        </p:spPr>
+        <p:txBody>
+          <a:bodyPr wrap="square" lIns="0" tIns="0" rIns="0" bIns="0" anchor="ctr" rtlCol="0"/>
+          <a:lstStyle/>
+          <a:p>
+            <a:pPr algn="l">
+              <a:lnSpc>
+                <a:spcPct val="130000"/>
+              </a:lnSpc>
+            </a:pPr>
+            <a:r>
+              <a:rPr lang="ja-JP" altLang="en-US" sz="1500" b="0">
+                <a:solidFill>
+                  <a:srgbClr val="14141A"/>
+                </a:solidFill>
+                <a:latin typeface="Yu Gothic"/>
+                <a:ea typeface="Yu Gothic"/>
+                <a:cs typeface="Yu Gothic"/>
+              </a:rPr>
+              <a:t>給与の形（賞与の有無）を見て、家賃の負担額を確定する</a:t>
+            </a:r>
+          </a:p>
+        </p:txBody>
+      </p:sp>
+      <p:sp>
+        <p:nvSpPr>
+          <p:cNvPr id="13" name="TextBox 13"/>
+          <p:cNvSpPr txBox="1"/>
+          <p:nvPr/>
+        </p:nvSpPr>
+        <p:spPr>
+          <a:xfrm>
+            <a:off x="7242048" y="2809494"/>
+            <a:ext cx="2157984" cy="540639"/>
+          </a:xfrm>
+          <a:prstGeom prst="rect">
+            <a:avLst/>
+          </a:prstGeom>
+          <a:noFill/>
+        </p:spPr>
+        <p:txBody>
+          <a:bodyPr wrap="square" lIns="0" tIns="0" rIns="0" bIns="0" anchor="ctr" rtlCol="0"/>
+          <a:lstStyle/>
+          <a:p>
+            <a:pPr algn="l">
+              <a:lnSpc>
+                <a:spcPct val="130000"/>
+              </a:lnSpc>
+            </a:pPr>
+            <a:r>
+              <a:rPr lang="ja-JP" altLang="en-US" sz="1500" b="0">
+                <a:solidFill>
+                  <a:srgbClr val="14141A"/>
+                </a:solidFill>
+                <a:latin typeface="Yu Gothic"/>
+                <a:ea typeface="Yu Gothic"/>
+                <a:cs typeface="Yu Gothic"/>
+              </a:rPr>
+              <a:t>2027年1月</a:t>
+            </a:r>
+          </a:p>
+        </p:txBody>
+      </p:sp>
+      <p:sp>
+        <p:nvSpPr>
+          <p:cNvPr id="14" name="TextBox 14"/>
+          <p:cNvSpPr txBox="1"/>
+          <p:nvPr/>
+        </p:nvSpPr>
+        <p:spPr>
+          <a:xfrm>
+            <a:off x="9528048" y="2809494"/>
+            <a:ext cx="1700784" cy="540639"/>
+          </a:xfrm>
+          <a:prstGeom prst="rect">
+            <a:avLst/>
+          </a:prstGeom>
+          <a:noFill/>
+        </p:spPr>
+        <p:txBody>
+          <a:bodyPr wrap="square" lIns="0" tIns="0" rIns="0" bIns="0" anchor="ctr" rtlCol="0"/>
+          <a:lstStyle/>
+          <a:p>
+            <a:pPr algn="l">
+              <a:lnSpc>
+                <a:spcPct val="130000"/>
+              </a:lnSpc>
+            </a:pPr>
+            <a:r>
+              <a:rPr lang="ja-JP" altLang="en-US" sz="1500" b="0">
+                <a:solidFill>
+                  <a:srgbClr val="14141A"/>
+                </a:solidFill>
+                <a:latin typeface="Yu Gothic"/>
+                <a:ea typeface="Yu Gothic"/>
+                <a:cs typeface="Yu Gothic"/>
+              </a:rPr>
+              <a:t>私</a:t>
+            </a:r>
+          </a:p>
+        </p:txBody>
+      </p:sp>
+      <p:sp>
+        <p:nvSpPr>
+          <p:cNvPr id="15" name="Shape 15"/>
+          <p:cNvSpPr/>
+          <p:nvPr/>
+        </p:nvSpPr>
+        <p:spPr>
+          <a:xfrm>
+            <a:off x="841248" y="3345053"/>
+            <a:ext cx="10515600" cy="9525"/>
+          </a:xfrm>
+          <a:prstGeom prst="rect">
+            <a:avLst/>
+          </a:prstGeom>
+          <a:solidFill>
+            <a:srgbClr val="E7E7EE"/>
+          </a:solidFill>
+          <a:ln>
+            <a:noFill/>
+          </a:ln>
+        </p:spPr>
+        <p:txBody>
+          <a:bodyPr wrap="square" lIns="0" tIns="0" rIns="0" bIns="0" anchor="ctr" rtlCol="0"/>
+          <a:lstStyle/>
+          <a:p/>
+        </p:txBody>
+      </p:sp>
+      <p:sp>
+        <p:nvSpPr>
+          <p:cNvPr id="16" name="TextBox 16"/>
+          <p:cNvSpPr txBox="1"/>
+          <p:nvPr/>
+        </p:nvSpPr>
+        <p:spPr>
+          <a:xfrm>
+            <a:off x="841248" y="3350133"/>
+            <a:ext cx="6272784" cy="540639"/>
+          </a:xfrm>
+          <a:prstGeom prst="rect">
+            <a:avLst/>
+          </a:prstGeom>
+          <a:noFill/>
+        </p:spPr>
+        <p:txBody>
+          <a:bodyPr wrap="square" lIns="0" tIns="0" rIns="0" bIns="0" anchor="ctr" rtlCol="0"/>
+          <a:lstStyle/>
+          <a:p>
+            <a:pPr algn="l">
+              <a:lnSpc>
+                <a:spcPct val="130000"/>
+              </a:lnSpc>
+            </a:pPr>
+            <a:r>
+              <a:rPr lang="ja-JP" altLang="en-US" sz="1500" b="0">
+                <a:solidFill>
+                  <a:srgbClr val="14141A"/>
+                </a:solidFill>
+                <a:latin typeface="Yu Gothic"/>
+                <a:ea typeface="Yu Gothic"/>
+                <a:cs typeface="Yu Gothic"/>
+              </a:rPr>
+              <a:t>ルームシェアの契約期間と、解約の条件</a:t>
+            </a:r>
+          </a:p>
+        </p:txBody>
+      </p:sp>
+      <p:sp>
+        <p:nvSpPr>
+          <p:cNvPr id="17" name="TextBox 17"/>
+          <p:cNvSpPr txBox="1"/>
+          <p:nvPr/>
+        </p:nvSpPr>
+        <p:spPr>
+          <a:xfrm>
+            <a:off x="7242048" y="3350133"/>
+            <a:ext cx="2157984" cy="540639"/>
+          </a:xfrm>
+          <a:prstGeom prst="rect">
+            <a:avLst/>
+          </a:prstGeom>
+          <a:noFill/>
+        </p:spPr>
+        <p:txBody>
+          <a:bodyPr wrap="square" lIns="0" tIns="0" rIns="0" bIns="0" anchor="ctr" rtlCol="0"/>
+          <a:lstStyle/>
+          <a:p>
+            <a:pPr algn="l">
+              <a:lnSpc>
+                <a:spcPct val="130000"/>
+              </a:lnSpc>
+            </a:pPr>
+            <a:r>
+              <a:rPr lang="ja-JP" altLang="en-US" sz="1500" b="0">
+                <a:solidFill>
+                  <a:srgbClr val="14141A"/>
+                </a:solidFill>
+                <a:latin typeface="Yu Gothic"/>
+                <a:ea typeface="Yu Gothic"/>
+                <a:cs typeface="Yu Gothic"/>
+              </a:rPr>
+              <a:t>契約前</a:t>
+            </a:r>
+          </a:p>
+        </p:txBody>
+      </p:sp>
+      <p:sp>
+        <p:nvSpPr>
+          <p:cNvPr id="18" name="TextBox 18"/>
+          <p:cNvSpPr txBox="1"/>
+          <p:nvPr/>
+        </p:nvSpPr>
+        <p:spPr>
+          <a:xfrm>
+            <a:off x="9528048" y="3350133"/>
+            <a:ext cx="1700784" cy="540639"/>
+          </a:xfrm>
+          <a:prstGeom prst="rect">
+            <a:avLst/>
+          </a:prstGeom>
+          <a:noFill/>
+        </p:spPr>
+        <p:txBody>
+          <a:bodyPr wrap="square" lIns="0" tIns="0" rIns="0" bIns="0" anchor="ctr" rtlCol="0"/>
+          <a:lstStyle/>
+          <a:p>
+            <a:pPr algn="l">
+              <a:lnSpc>
+                <a:spcPct val="130000"/>
+              </a:lnSpc>
+            </a:pPr>
+            <a:r>
+              <a:rPr lang="ja-JP" altLang="en-US" sz="1500" b="0">
+                <a:solidFill>
+                  <a:srgbClr val="14141A"/>
+                </a:solidFill>
+                <a:latin typeface="Yu Gothic"/>
+                <a:ea typeface="Yu Gothic"/>
+                <a:cs typeface="Yu Gothic"/>
+              </a:rPr>
+              <a:t>凪</a:t>
+            </a:r>
+          </a:p>
+        </p:txBody>
+      </p:sp>
+      <p:sp>
+        <p:nvSpPr>
+          <p:cNvPr id="19" name="Shape 19"/>
+          <p:cNvSpPr/>
+          <p:nvPr/>
+        </p:nvSpPr>
+        <p:spPr>
+          <a:xfrm>
+            <a:off x="841248" y="3885692"/>
+            <a:ext cx="10515600" cy="9525"/>
+          </a:xfrm>
+          <a:prstGeom prst="rect">
+            <a:avLst/>
+          </a:prstGeom>
+          <a:solidFill>
+            <a:srgbClr val="E7E7EE"/>
+          </a:solidFill>
+          <a:ln>
+            <a:noFill/>
+          </a:ln>
+        </p:spPr>
+        <p:txBody>
+          <a:bodyPr wrap="square" lIns="0" tIns="0" rIns="0" bIns="0" anchor="ctr" rtlCol="0"/>
+          <a:lstStyle/>
+          <a:p/>
+        </p:txBody>
+      </p:sp>
+      <p:sp>
+        <p:nvSpPr>
+          <p:cNvPr id="20" name="TextBox 20"/>
+          <p:cNvSpPr txBox="1"/>
+          <p:nvPr/>
+        </p:nvSpPr>
+        <p:spPr>
+          <a:xfrm>
+            <a:off x="841248" y="3890772"/>
+            <a:ext cx="6272784" cy="540639"/>
+          </a:xfrm>
+          <a:prstGeom prst="rect">
+            <a:avLst/>
+          </a:prstGeom>
+          <a:noFill/>
+        </p:spPr>
+        <p:txBody>
+          <a:bodyPr wrap="square" lIns="0" tIns="0" rIns="0" bIns="0" anchor="ctr" rtlCol="0"/>
+          <a:lstStyle/>
+          <a:p>
+            <a:pPr algn="l">
+              <a:lnSpc>
+                <a:spcPct val="130000"/>
+              </a:lnSpc>
+            </a:pPr>
+            <a:r>
+              <a:rPr lang="ja-JP" altLang="en-US" sz="1500" b="0">
+                <a:solidFill>
+                  <a:srgbClr val="14141A"/>
+                </a:solidFill>
+                <a:latin typeface="Yu Gothic"/>
+                <a:ea typeface="Yu Gothic"/>
+                <a:cs typeface="Yu Gothic"/>
+              </a:rPr>
+              <a:t>入籍と入居を、何月にするか</a:t>
+            </a:r>
+          </a:p>
+        </p:txBody>
+      </p:sp>
+      <p:sp>
+        <p:nvSpPr>
+          <p:cNvPr id="21" name="TextBox 21"/>
+          <p:cNvSpPr txBox="1"/>
+          <p:nvPr/>
+        </p:nvSpPr>
+        <p:spPr>
+          <a:xfrm>
+            <a:off x="7242048" y="3890772"/>
+            <a:ext cx="2157984" cy="540639"/>
+          </a:xfrm>
+          <a:prstGeom prst="rect">
+            <a:avLst/>
+          </a:prstGeom>
+          <a:noFill/>
+        </p:spPr>
+        <p:txBody>
+          <a:bodyPr wrap="square" lIns="0" tIns="0" rIns="0" bIns="0" anchor="ctr" rtlCol="0"/>
+          <a:lstStyle/>
+          <a:p>
+            <a:pPr algn="l">
+              <a:lnSpc>
+                <a:spcPct val="130000"/>
+              </a:lnSpc>
+            </a:pPr>
+            <a:r>
+              <a:rPr lang="ja-JP" altLang="en-US" sz="1500" b="0">
+                <a:solidFill>
+                  <a:srgbClr val="14141A"/>
+                </a:solidFill>
+                <a:latin typeface="Yu Gothic"/>
+                <a:ea typeface="Yu Gothic"/>
+                <a:cs typeface="Yu Gothic"/>
+              </a:rPr>
+              <a:t>2027年後半</a:t>
+            </a:r>
+          </a:p>
+        </p:txBody>
+      </p:sp>
+      <p:sp>
+        <p:nvSpPr>
+          <p:cNvPr id="22" name="TextBox 22"/>
+          <p:cNvSpPr txBox="1"/>
+          <p:nvPr/>
+        </p:nvSpPr>
+        <p:spPr>
+          <a:xfrm>
+            <a:off x="9528048" y="3890772"/>
+            <a:ext cx="1700784" cy="540639"/>
+          </a:xfrm>
+          <a:prstGeom prst="rect">
+            <a:avLst/>
+          </a:prstGeom>
+          <a:noFill/>
+        </p:spPr>
+        <p:txBody>
+          <a:bodyPr wrap="square" lIns="0" tIns="0" rIns="0" bIns="0" anchor="ctr" rtlCol="0"/>
+          <a:lstStyle/>
+          <a:p>
+            <a:pPr algn="l">
+              <a:lnSpc>
+                <a:spcPct val="130000"/>
+              </a:lnSpc>
+            </a:pPr>
+            <a:r>
+              <a:rPr lang="ja-JP" altLang="en-US" sz="1500" b="0">
+                <a:solidFill>
+                  <a:srgbClr val="14141A"/>
+                </a:solidFill>
+                <a:latin typeface="Yu Gothic"/>
+                <a:ea typeface="Yu Gothic"/>
+                <a:cs typeface="Yu Gothic"/>
+              </a:rPr>
+              <a:t>ふたり</a:t>
+            </a:r>
+          </a:p>
+        </p:txBody>
+      </p:sp>
+      <p:sp>
+        <p:nvSpPr>
+          <p:cNvPr id="23" name="Shape 23"/>
+          <p:cNvSpPr/>
+          <p:nvPr/>
+        </p:nvSpPr>
+        <p:spPr>
+          <a:xfrm>
+            <a:off x="841248" y="4426331"/>
+            <a:ext cx="10515600" cy="9525"/>
+          </a:xfrm>
+          <a:prstGeom prst="rect">
+            <a:avLst/>
+          </a:prstGeom>
+          <a:solidFill>
+            <a:srgbClr val="E7E7EE"/>
+          </a:solidFill>
+          <a:ln>
+            <a:noFill/>
+          </a:ln>
+        </p:spPr>
+        <p:txBody>
+          <a:bodyPr wrap="square" lIns="0" tIns="0" rIns="0" bIns="0" anchor="ctr" rtlCol="0"/>
+          <a:lstStyle/>
+          <a:p/>
+        </p:txBody>
+      </p:sp>
+      <p:sp>
+        <p:nvSpPr>
+          <p:cNvPr id="24" name="TextBox 24"/>
+          <p:cNvSpPr txBox="1"/>
+          <p:nvPr/>
+        </p:nvSpPr>
+        <p:spPr>
+          <a:xfrm>
+            <a:off x="841248" y="4431411"/>
+            <a:ext cx="6272784" cy="540639"/>
+          </a:xfrm>
+          <a:prstGeom prst="rect">
+            <a:avLst/>
+          </a:prstGeom>
+          <a:noFill/>
+        </p:spPr>
+        <p:txBody>
+          <a:bodyPr wrap="square" lIns="0" tIns="0" rIns="0" bIns="0" anchor="ctr" rtlCol="0"/>
+          <a:lstStyle/>
+          <a:p>
+            <a:pPr algn="l">
+              <a:lnSpc>
+                <a:spcPct val="130000"/>
+              </a:lnSpc>
+            </a:pPr>
+            <a:r>
+              <a:rPr lang="ja-JP" altLang="en-US" sz="1500" b="0">
+                <a:solidFill>
+                  <a:srgbClr val="14141A"/>
+                </a:solidFill>
+                <a:latin typeface="Yu Gothic"/>
+                <a:ea typeface="Yu Gothic"/>
+                <a:cs typeface="Yu Gothic"/>
+              </a:rPr>
+              <a:t>収入合算が必要なら、確定申告書1〜2年分と納税証明書を用意する</a:t>
+            </a:r>
+          </a:p>
+        </p:txBody>
+      </p:sp>
+      <p:sp>
+        <p:nvSpPr>
+          <p:cNvPr id="25" name="TextBox 25"/>
+          <p:cNvSpPr txBox="1"/>
+          <p:nvPr/>
+        </p:nvSpPr>
+        <p:spPr>
+          <a:xfrm>
+            <a:off x="7242048" y="4431411"/>
+            <a:ext cx="2157984" cy="540639"/>
+          </a:xfrm>
+          <a:prstGeom prst="rect">
+            <a:avLst/>
+          </a:prstGeom>
+          <a:noFill/>
+        </p:spPr>
+        <p:txBody>
+          <a:bodyPr wrap="square" lIns="0" tIns="0" rIns="0" bIns="0" anchor="ctr" rtlCol="0"/>
+          <a:lstStyle/>
+          <a:p>
+            <a:pPr algn="l">
+              <a:lnSpc>
+                <a:spcPct val="130000"/>
+              </a:lnSpc>
+            </a:pPr>
+            <a:r>
+              <a:rPr lang="ja-JP" altLang="en-US" sz="1500" b="0">
+                <a:solidFill>
+                  <a:srgbClr val="14141A"/>
+                </a:solidFill>
+                <a:latin typeface="Yu Gothic"/>
+                <a:ea typeface="Yu Gothic"/>
+                <a:cs typeface="Yu Gothic"/>
+              </a:rPr>
+              <a:t>2027年後半</a:t>
+            </a:r>
+          </a:p>
+        </p:txBody>
+      </p:sp>
+      <p:sp>
+        <p:nvSpPr>
+          <p:cNvPr id="26" name="TextBox 26"/>
+          <p:cNvSpPr txBox="1"/>
+          <p:nvPr/>
+        </p:nvSpPr>
+        <p:spPr>
+          <a:xfrm>
+            <a:off x="9528048" y="4431411"/>
+            <a:ext cx="1700784" cy="540639"/>
+          </a:xfrm>
+          <a:prstGeom prst="rect">
+            <a:avLst/>
+          </a:prstGeom>
+          <a:noFill/>
+        </p:spPr>
+        <p:txBody>
+          <a:bodyPr wrap="square" lIns="0" tIns="0" rIns="0" bIns="0" anchor="ctr" rtlCol="0"/>
+          <a:lstStyle/>
+          <a:p>
+            <a:pPr algn="l">
+              <a:lnSpc>
+                <a:spcPct val="130000"/>
+              </a:lnSpc>
+            </a:pPr>
+            <a:r>
+              <a:rPr lang="ja-JP" altLang="en-US" sz="1500" b="0">
+                <a:solidFill>
+                  <a:srgbClr val="14141A"/>
+                </a:solidFill>
+                <a:latin typeface="Yu Gothic"/>
+                <a:ea typeface="Yu Gothic"/>
+                <a:cs typeface="Yu Gothic"/>
+              </a:rPr>
+              <a:t>凪</a:t>
+            </a:r>
+          </a:p>
+        </p:txBody>
+      </p:sp>
+      <p:sp>
+        <p:nvSpPr>
+          <p:cNvPr id="27" name="Shape 27"/>
+          <p:cNvSpPr/>
+          <p:nvPr/>
+        </p:nvSpPr>
+        <p:spPr>
+          <a:xfrm>
+            <a:off x="841248" y="4966970"/>
+            <a:ext cx="10515600" cy="9525"/>
+          </a:xfrm>
+          <a:prstGeom prst="rect">
+            <a:avLst/>
+          </a:prstGeom>
+          <a:solidFill>
+            <a:srgbClr val="E7E7EE"/>
+          </a:solidFill>
+          <a:ln>
+            <a:noFill/>
+          </a:ln>
+        </p:spPr>
+        <p:txBody>
+          <a:bodyPr wrap="square" lIns="0" tIns="0" rIns="0" bIns="0" anchor="ctr" rtlCol="0"/>
+          <a:lstStyle/>
+          <a:p/>
+        </p:txBody>
+      </p:sp>
+      <p:sp>
+        <p:nvSpPr>
+          <p:cNvPr id="28" name="Shape 28"/>
+          <p:cNvSpPr/>
+          <p:nvPr/>
+        </p:nvSpPr>
+        <p:spPr>
+          <a:xfrm>
+            <a:off x="841248" y="4972050"/>
+            <a:ext cx="10515600" cy="540639"/>
           </a:xfrm>
           <a:prstGeom prst="rect">
             <a:avLst/>
@@ -13075,155 +13734,137 @@
       </p:sp>
       <p:sp>
         <p:nvSpPr>
-          <p:cNvPr id="9" name="TextBox 9"/>
-          <p:cNvSpPr txBox="1"/>
-          <p:nvPr/>
-        </p:nvSpPr>
-        <p:spPr>
-          <a:xfrm>
-            <a:off x="3573018" y="2002536"/>
-            <a:ext cx="2320290" cy="320040"/>
-          </a:xfrm>
-          <a:prstGeom prst="rect">
-            <a:avLst/>
-          </a:prstGeom>
-          <a:noFill/>
-        </p:spPr>
-        <p:txBody>
-          <a:bodyPr wrap="square" lIns="0" tIns="0" rIns="0" bIns="0" anchor="t" rtlCol="0"/>
-          <a:lstStyle/>
-          <a:p>
-            <a:pPr algn="l">
-              <a:lnSpc>
-                <a:spcPct val="145000"/>
-              </a:lnSpc>
-            </a:pPr>
-            <a:r>
-              <a:rPr lang="ja-JP" altLang="en-US" sz="1200" b="1" spc="120">
-                <a:solidFill>
-                  <a:srgbClr val="14141A"/>
-                </a:solidFill>
-                <a:latin typeface="Yu Gothic"/>
-                <a:ea typeface="Yu Gothic"/>
-                <a:cs typeface="Yu Gothic"/>
-              </a:rPr>
-              <a:t>自由</a:t>
-            </a:r>
-          </a:p>
-        </p:txBody>
-      </p:sp>
-      <p:sp>
-        <p:nvSpPr>
-          <p:cNvPr id="10" name="TextBox 10"/>
-          <p:cNvSpPr txBox="1"/>
-          <p:nvPr/>
-        </p:nvSpPr>
-        <p:spPr>
-          <a:xfrm>
-            <a:off x="3573018" y="2414016"/>
-            <a:ext cx="2320290" cy="1005840"/>
-          </a:xfrm>
-          <a:prstGeom prst="rect">
-            <a:avLst/>
-          </a:prstGeom>
-          <a:noFill/>
-        </p:spPr>
-        <p:txBody>
-          <a:bodyPr wrap="square" lIns="0" tIns="0" rIns="0" bIns="0" anchor="t" rtlCol="0"/>
-          <a:lstStyle/>
-          <a:p>
-            <a:pPr algn="l">
-              <a:lnSpc>
-                <a:spcPct val="125000"/>
-              </a:lnSpc>
-            </a:pPr>
-            <a:r>
-              <a:rPr lang="ja-JP" altLang="en-US" sz="2200" b="1">
-                <a:solidFill>
-                  <a:srgbClr val="14141A"/>
-                </a:solidFill>
-                <a:latin typeface="Yu Gothic"/>
-                <a:ea typeface="Yu Gothic"/>
-                <a:cs typeface="Yu Gothic"/>
-              </a:rPr>
-              <a:t>ひとりの時間は</a:t>
-            </a:r>
-          </a:p>
-          <a:p>
-            <a:pPr algn="l">
-              <a:lnSpc>
-                <a:spcPct val="125000"/>
-              </a:lnSpc>
-            </a:pPr>
-            <a:r>
-              <a:rPr lang="ja-JP" altLang="en-US" sz="2200" b="1">
-                <a:solidFill>
-                  <a:srgbClr val="14141A"/>
-                </a:solidFill>
-                <a:latin typeface="Yu Gothic"/>
-                <a:ea typeface="Yu Gothic"/>
-                <a:cs typeface="Yu Gothic"/>
-              </a:rPr>
-              <a:t>制度で守ります</a:t>
-            </a:r>
-          </a:p>
-        </p:txBody>
-      </p:sp>
-      <p:sp>
-        <p:nvSpPr>
-          <p:cNvPr id="11" name="TextBox 11"/>
-          <p:cNvSpPr txBox="1"/>
-          <p:nvPr/>
-        </p:nvSpPr>
-        <p:spPr>
-          <a:xfrm>
-            <a:off x="3573018" y="3511296"/>
-            <a:ext cx="2320290" cy="1444752"/>
-          </a:xfrm>
-          <a:prstGeom prst="rect">
-            <a:avLst/>
-          </a:prstGeom>
-          <a:noFill/>
-        </p:spPr>
-        <p:txBody>
-          <a:bodyPr wrap="square" lIns="0" tIns="0" rIns="0" bIns="0" anchor="t" rtlCol="0"/>
-          <a:lstStyle/>
-          <a:p>
-            <a:pPr algn="l">
-              <a:lnSpc>
-                <a:spcPct val="155000"/>
-              </a:lnSpc>
-            </a:pPr>
-            <a:r>
-              <a:rPr lang="ja-JP" altLang="en-US" sz="1400" b="0">
-                <a:solidFill>
-                  <a:srgbClr val="14141A"/>
-                </a:solidFill>
-                <a:latin typeface="Yu Gothic"/>
-                <a:ea typeface="Yu Gothic"/>
-                <a:cs typeface="Yu Gothic"/>
-              </a:rPr>
-              <a:t>二人の家に自室を持ちます。週に一度は別行動でかまいません。</a:t>
-            </a:r>
-          </a:p>
-        </p:txBody>
-      </p:sp>
-      <p:sp>
-        <p:nvSpPr>
-          <p:cNvPr id="12" name="Shape 12"/>
+          <p:cNvPr id="29" name="TextBox 29"/>
+          <p:cNvSpPr txBox="1"/>
+          <p:nvPr/>
+        </p:nvSpPr>
+        <p:spPr>
+          <a:xfrm>
+            <a:off x="932688" y="4972050"/>
+            <a:ext cx="6181344" cy="540639"/>
+          </a:xfrm>
+          <a:prstGeom prst="rect">
+            <a:avLst/>
+          </a:prstGeom>
+          <a:noFill/>
+        </p:spPr>
+        <p:txBody>
+          <a:bodyPr wrap="square" lIns="0" tIns="0" rIns="0" bIns="0" anchor="ctr" rtlCol="0"/>
+          <a:lstStyle/>
+          <a:p>
+            <a:pPr algn="l">
+              <a:lnSpc>
+                <a:spcPct val="130000"/>
+              </a:lnSpc>
+            </a:pPr>
+            <a:r>
+              <a:rPr lang="ja-JP" altLang="en-US" sz="1500" b="1">
+                <a:solidFill>
+                  <a:srgbClr val="14141A"/>
+                </a:solidFill>
+                <a:latin typeface="Yu Gothic"/>
+                <a:ea typeface="Yu Gothic"/>
+                <a:cs typeface="Yu Gothic"/>
+              </a:rPr>
+              <a:t>あなたの分の空欄を埋める</a:t>
+            </a:r>
+          </a:p>
+        </p:txBody>
+      </p:sp>
+      <p:sp>
+        <p:nvSpPr>
+          <p:cNvPr id="30" name="TextBox 30"/>
+          <p:cNvSpPr txBox="1"/>
+          <p:nvPr/>
+        </p:nvSpPr>
+        <p:spPr>
+          <a:xfrm>
+            <a:off x="7333488" y="4972050"/>
+            <a:ext cx="2066544" cy="540639"/>
+          </a:xfrm>
+          <a:prstGeom prst="rect">
+            <a:avLst/>
+          </a:prstGeom>
+          <a:noFill/>
+        </p:spPr>
+        <p:txBody>
+          <a:bodyPr wrap="square" lIns="0" tIns="0" rIns="0" bIns="0" anchor="ctr" rtlCol="0"/>
+          <a:lstStyle/>
+          <a:p>
+            <a:pPr algn="l">
+              <a:lnSpc>
+                <a:spcPct val="130000"/>
+              </a:lnSpc>
+            </a:pPr>
+            <a:r>
+              <a:rPr lang="ja-JP" altLang="en-US" sz="1500" b="1">
+                <a:solidFill>
+                  <a:srgbClr val="14141A"/>
+                </a:solidFill>
+                <a:latin typeface="Yu Gothic"/>
+                <a:ea typeface="Yu Gothic"/>
+                <a:cs typeface="Yu Gothic"/>
+              </a:rPr>
+              <a:t>次に会うとき</a:t>
+            </a:r>
+          </a:p>
+        </p:txBody>
+      </p:sp>
+      <p:sp>
+        <p:nvSpPr>
+          <p:cNvPr id="31" name="TextBox 31"/>
+          <p:cNvSpPr txBox="1"/>
+          <p:nvPr/>
+        </p:nvSpPr>
+        <p:spPr>
+          <a:xfrm>
+            <a:off x="9619488" y="4972050"/>
+            <a:ext cx="1609344" cy="540639"/>
+          </a:xfrm>
+          <a:prstGeom prst="rect">
+            <a:avLst/>
+          </a:prstGeom>
+          <a:noFill/>
+        </p:spPr>
+        <p:txBody>
+          <a:bodyPr wrap="square" lIns="0" tIns="0" rIns="0" bIns="0" anchor="ctr" rtlCol="0"/>
+          <a:lstStyle/>
+          <a:p>
+            <a:pPr algn="l">
+              <a:lnSpc>
+                <a:spcPct val="130000"/>
+              </a:lnSpc>
+            </a:pPr>
+            <a:r>
+              <a:rPr lang="ja-JP" altLang="en-US" sz="1500" b="1">
+                <a:solidFill>
+                  <a:srgbClr val="14141A"/>
+                </a:solidFill>
+                <a:latin typeface="Yu Gothic"/>
+                <a:ea typeface="Yu Gothic"/>
+                <a:cs typeface="Yu Gothic"/>
+              </a:rPr>
+              <a:t>凪</a:t>
+            </a:r>
+          </a:p>
+        </p:txBody>
+      </p:sp>
+      <p:sp>
+        <p:nvSpPr>
+          <p:cNvPr id="32" name="Shape 32"/>
           <p:cNvSpPr/>
           <p:nvPr/>
         </p:nvSpPr>
         <p:spPr>
           <a:xfrm>
-            <a:off x="6304788" y="1773936"/>
-            <a:ext cx="2320290" cy="38100"/>
+            <a:off x="841248" y="5507609"/>
+            <a:ext cx="10515600" cy="9525"/>
           </a:xfrm>
           <a:prstGeom prst="rect">
             <a:avLst/>
           </a:prstGeom>
           <a:solidFill>
-            <a:srgbClr val="FF5C77"/>
+            <a:srgbClr val="E7E7EE"/>
           </a:solidFill>
           <a:ln>
             <a:noFill/>
@@ -13237,343 +13878,124 @@
       </p:sp>
       <p:sp>
         <p:nvSpPr>
-          <p:cNvPr id="13" name="TextBox 13"/>
-          <p:cNvSpPr txBox="1"/>
-          <p:nvPr/>
-        </p:nvSpPr>
-        <p:spPr>
-          <a:xfrm>
-            <a:off x="6304788" y="2002536"/>
-            <a:ext cx="2320290" cy="320040"/>
-          </a:xfrm>
-          <a:prstGeom prst="rect">
-            <a:avLst/>
-          </a:prstGeom>
-          <a:noFill/>
-        </p:spPr>
-        <p:txBody>
-          <a:bodyPr wrap="square" lIns="0" tIns="0" rIns="0" bIns="0" anchor="t" rtlCol="0"/>
-          <a:lstStyle/>
-          <a:p>
-            <a:pPr algn="l">
-              <a:lnSpc>
-                <a:spcPct val="145000"/>
-              </a:lnSpc>
-            </a:pPr>
-            <a:r>
-              <a:rPr lang="ja-JP" altLang="en-US" sz="1200" b="1" spc="120">
-                <a:solidFill>
-                  <a:srgbClr val="FF5C77"/>
-                </a:solidFill>
-                <a:latin typeface="Yu Gothic"/>
-                <a:ea typeface="Yu Gothic"/>
-                <a:cs typeface="Yu Gothic"/>
-              </a:rPr>
-              <a:t>家事</a:t>
-            </a:r>
-          </a:p>
-        </p:txBody>
-      </p:sp>
-      <p:sp>
-        <p:nvSpPr>
-          <p:cNvPr id="14" name="TextBox 14"/>
-          <p:cNvSpPr txBox="1"/>
-          <p:nvPr/>
-        </p:nvSpPr>
-        <p:spPr>
-          <a:xfrm>
-            <a:off x="6304788" y="2414016"/>
-            <a:ext cx="2320290" cy="1005840"/>
-          </a:xfrm>
-          <a:prstGeom prst="rect">
-            <a:avLst/>
-          </a:prstGeom>
-          <a:noFill/>
-        </p:spPr>
-        <p:txBody>
-          <a:bodyPr wrap="square" lIns="0" tIns="0" rIns="0" bIns="0" anchor="t" rtlCol="0"/>
-          <a:lstStyle/>
-          <a:p>
-            <a:pPr algn="l">
-              <a:lnSpc>
-                <a:spcPct val="125000"/>
-              </a:lnSpc>
-            </a:pPr>
-            <a:r>
-              <a:rPr lang="ja-JP" altLang="en-US" sz="2200" b="1">
-                <a:solidFill>
-                  <a:srgbClr val="14141A"/>
-                </a:solidFill>
-                <a:latin typeface="Yu Gothic"/>
-                <a:ea typeface="Yu Gothic"/>
-                <a:cs typeface="Yu Gothic"/>
-              </a:rPr>
-              <a:t>掃除は</a:t>
-            </a:r>
-          </a:p>
-          <a:p>
-            <a:pPr algn="l">
-              <a:lnSpc>
-                <a:spcPct val="125000"/>
-              </a:lnSpc>
-            </a:pPr>
-            <a:r>
-              <a:rPr lang="ja-JP" altLang="en-US" sz="2200" b="1">
-                <a:solidFill>
-                  <a:srgbClr val="14141A"/>
-                </a:solidFill>
-                <a:latin typeface="Yu Gothic"/>
-                <a:ea typeface="Yu Gothic"/>
-                <a:cs typeface="Yu Gothic"/>
-              </a:rPr>
-              <a:t>改善中です</a:t>
-            </a:r>
-          </a:p>
-        </p:txBody>
-      </p:sp>
-      <p:sp>
-        <p:nvSpPr>
-          <p:cNvPr id="15" name="TextBox 15"/>
-          <p:cNvSpPr txBox="1"/>
-          <p:nvPr/>
-        </p:nvSpPr>
-        <p:spPr>
-          <a:xfrm>
-            <a:off x="6304788" y="3511296"/>
-            <a:ext cx="2320290" cy="1444752"/>
-          </a:xfrm>
-          <a:prstGeom prst="rect">
-            <a:avLst/>
-          </a:prstGeom>
-          <a:noFill/>
-        </p:spPr>
-        <p:txBody>
-          <a:bodyPr wrap="square" lIns="0" tIns="0" rIns="0" bIns="0" anchor="t" rtlCol="0"/>
-          <a:lstStyle/>
-          <a:p>
-            <a:pPr algn="l">
-              <a:lnSpc>
-                <a:spcPct val="155000"/>
-              </a:lnSpc>
-            </a:pPr>
-            <a:r>
-              <a:rPr lang="ja-JP" altLang="en-US" sz="1400" b="0">
-                <a:solidFill>
-                  <a:srgbClr val="14141A"/>
-                </a:solidFill>
-                <a:latin typeface="Yu Gothic"/>
-                <a:ea typeface="Yu Gothic"/>
-                <a:cs typeface="Yu Gothic"/>
-              </a:rPr>
-              <a:t>得意なほうがやります。決まらないものは、外注も選択肢に入れます。</a:t>
-            </a:r>
-          </a:p>
-        </p:txBody>
-      </p:sp>
-      <p:sp>
-        <p:nvSpPr>
-          <p:cNvPr id="16" name="Shape 16"/>
-          <p:cNvSpPr/>
-          <p:nvPr/>
-        </p:nvSpPr>
-        <p:spPr>
-          <a:xfrm>
-            <a:off x="9036558" y="1773936"/>
-            <a:ext cx="2320290" cy="38100"/>
-          </a:xfrm>
-          <a:prstGeom prst="rect">
-            <a:avLst/>
-          </a:prstGeom>
-          <a:solidFill>
-            <a:srgbClr val="6C5CE7"/>
-          </a:solidFill>
-          <a:ln>
-            <a:noFill/>
-          </a:ln>
-        </p:spPr>
-        <p:txBody>
-          <a:bodyPr wrap="square" lIns="0" tIns="0" rIns="0" bIns="0" anchor="ctr" rtlCol="0"/>
-          <a:lstStyle/>
-          <a:p/>
-        </p:txBody>
-      </p:sp>
-      <p:sp>
-        <p:nvSpPr>
-          <p:cNvPr id="17" name="TextBox 17"/>
-          <p:cNvSpPr txBox="1"/>
-          <p:nvPr/>
-        </p:nvSpPr>
-        <p:spPr>
-          <a:xfrm>
-            <a:off x="9036558" y="2002536"/>
-            <a:ext cx="2320290" cy="320040"/>
-          </a:xfrm>
-          <a:prstGeom prst="rect">
-            <a:avLst/>
-          </a:prstGeom>
-          <a:noFill/>
-        </p:spPr>
-        <p:txBody>
-          <a:bodyPr wrap="square" lIns="0" tIns="0" rIns="0" bIns="0" anchor="t" rtlCol="0"/>
-          <a:lstStyle/>
-          <a:p>
-            <a:pPr algn="l">
-              <a:lnSpc>
-                <a:spcPct val="145000"/>
-              </a:lnSpc>
-            </a:pPr>
-            <a:r>
-              <a:rPr lang="ja-JP" altLang="en-US" sz="1200" b="1" spc="120">
-                <a:solidFill>
-                  <a:srgbClr val="6C5CE7"/>
-                </a:solidFill>
-                <a:latin typeface="Yu Gothic"/>
-                <a:ea typeface="Yu Gothic"/>
-                <a:cs typeface="Yu Gothic"/>
-              </a:rPr>
-              <a:t>ケンカ</a:t>
-            </a:r>
-          </a:p>
-        </p:txBody>
-      </p:sp>
-      <p:sp>
-        <p:nvSpPr>
-          <p:cNvPr id="18" name="TextBox 18"/>
-          <p:cNvSpPr txBox="1"/>
-          <p:nvPr/>
-        </p:nvSpPr>
-        <p:spPr>
-          <a:xfrm>
-            <a:off x="9036558" y="2414016"/>
-            <a:ext cx="2320290" cy="1005840"/>
-          </a:xfrm>
-          <a:prstGeom prst="rect">
-            <a:avLst/>
-          </a:prstGeom>
-          <a:noFill/>
-        </p:spPr>
-        <p:txBody>
-          <a:bodyPr wrap="square" lIns="0" tIns="0" rIns="0" bIns="0" anchor="t" rtlCol="0"/>
-          <a:lstStyle/>
-          <a:p>
-            <a:pPr algn="l">
-              <a:lnSpc>
-                <a:spcPct val="125000"/>
-              </a:lnSpc>
-            </a:pPr>
-            <a:r>
-              <a:rPr lang="ja-JP" altLang="en-US" sz="2200" b="1">
-                <a:solidFill>
-                  <a:srgbClr val="14141A"/>
-                </a:solidFill>
-                <a:latin typeface="Yu Gothic"/>
-                <a:ea typeface="Yu Gothic"/>
-                <a:cs typeface="Yu Gothic"/>
-              </a:rPr>
-              <a:t>片方が謝って</a:t>
-            </a:r>
-          </a:p>
-          <a:p>
-            <a:pPr algn="l">
-              <a:lnSpc>
-                <a:spcPct val="125000"/>
-              </a:lnSpc>
-            </a:pPr>
-            <a:r>
-              <a:rPr lang="ja-JP" altLang="en-US" sz="2200" b="1">
-                <a:solidFill>
-                  <a:srgbClr val="14141A"/>
-                </a:solidFill>
-                <a:latin typeface="Yu Gothic"/>
-                <a:ea typeface="Yu Gothic"/>
-                <a:cs typeface="Yu Gothic"/>
-              </a:rPr>
-              <a:t>終わります</a:t>
-            </a:r>
-          </a:p>
-        </p:txBody>
-      </p:sp>
-      <p:sp>
-        <p:nvSpPr>
-          <p:cNvPr id="19" name="TextBox 19"/>
-          <p:cNvSpPr txBox="1"/>
-          <p:nvPr/>
-        </p:nvSpPr>
-        <p:spPr>
-          <a:xfrm>
-            <a:off x="9036558" y="3511296"/>
-            <a:ext cx="2320290" cy="1444752"/>
-          </a:xfrm>
-          <a:prstGeom prst="rect">
-            <a:avLst/>
-          </a:prstGeom>
-          <a:noFill/>
-        </p:spPr>
-        <p:txBody>
-          <a:bodyPr wrap="square" lIns="0" tIns="0" rIns="0" bIns="0" anchor="t" rtlCol="0"/>
-          <a:lstStyle/>
-          <a:p>
-            <a:pPr algn="l">
-              <a:lnSpc>
-                <a:spcPct val="155000"/>
-              </a:lnSpc>
-            </a:pPr>
-            <a:r>
-              <a:rPr lang="ja-JP" altLang="en-US" sz="1400" b="0">
-                <a:solidFill>
-                  <a:srgbClr val="14141A"/>
-                </a:solidFill>
-                <a:latin typeface="Yu Gothic"/>
-                <a:ea typeface="Yu Gothic"/>
-                <a:cs typeface="Yu Gothic"/>
-              </a:rPr>
-              <a:t>今のやり方を変えません。翌日には持ち越しません。</a:t>
-            </a:r>
-          </a:p>
-        </p:txBody>
-      </p:sp>
-      <p:sp>
-        <p:nvSpPr>
-          <p:cNvPr id="20" name="TextBox 20"/>
-          <p:cNvSpPr txBox="1"/>
-          <p:nvPr/>
-        </p:nvSpPr>
-        <p:spPr>
-          <a:xfrm>
-            <a:off x="841248" y="5138928"/>
-            <a:ext cx="10515600" cy="914400"/>
-          </a:xfrm>
-          <a:prstGeom prst="rect">
-            <a:avLst/>
-          </a:prstGeom>
-          <a:noFill/>
-        </p:spPr>
-        <p:txBody>
-          <a:bodyPr wrap="square" lIns="0" tIns="0" rIns="0" bIns="0" anchor="b" rtlCol="0"/>
-          <a:lstStyle/>
-          <a:p>
-            <a:pPr algn="l">
-              <a:lnSpc>
-                <a:spcPct val="125000"/>
-              </a:lnSpc>
-            </a:pPr>
-            <a:r>
-              <a:rPr lang="ja-JP" altLang="en-US" sz="2800" b="1">
-                <a:solidFill>
-                  <a:srgbClr val="14141A"/>
-                </a:solidFill>
-                <a:latin typeface="Yu Gothic"/>
-                <a:ea typeface="Yu Gothic"/>
-                <a:cs typeface="Yu Gothic"/>
-              </a:rPr>
-              <a:t>変えないのは仕事、直すのは家事です。</a:t>
-            </a:r>
-          </a:p>
-        </p:txBody>
-      </p:sp>
-      <p:sp>
-        <p:nvSpPr>
-          <p:cNvPr id="21" name="TextBox 21"/>
+          <p:cNvPr id="33" name="TextBox 33"/>
+          <p:cNvSpPr txBox="1"/>
+          <p:nvPr/>
+        </p:nvSpPr>
+        <p:spPr>
+          <a:xfrm>
+            <a:off x="841248" y="5512689"/>
+            <a:ext cx="6272784" cy="540639"/>
+          </a:xfrm>
+          <a:prstGeom prst="rect">
+            <a:avLst/>
+          </a:prstGeom>
+          <a:noFill/>
+        </p:spPr>
+        <p:txBody>
+          <a:bodyPr wrap="square" lIns="0" tIns="0" rIns="0" bIns="0" anchor="ctr" rtlCol="0"/>
+          <a:lstStyle/>
+          <a:p>
+            <a:pPr algn="l">
+              <a:lnSpc>
+                <a:spcPct val="130000"/>
+              </a:lnSpc>
+            </a:pPr>
+            <a:r>
+              <a:rPr lang="ja-JP" altLang="en-US" sz="1500" b="0">
+                <a:solidFill>
+                  <a:srgbClr val="14141A"/>
+                </a:solidFill>
+                <a:latin typeface="Yu Gothic"/>
+                <a:ea typeface="Yu Gothic"/>
+                <a:cs typeface="Yu Gothic"/>
+              </a:rPr>
+              <a:t>2人目をどうするか</a:t>
+            </a:r>
+          </a:p>
+        </p:txBody>
+      </p:sp>
+      <p:sp>
+        <p:nvSpPr>
+          <p:cNvPr id="34" name="TextBox 34"/>
+          <p:cNvSpPr txBox="1"/>
+          <p:nvPr/>
+        </p:nvSpPr>
+        <p:spPr>
+          <a:xfrm>
+            <a:off x="7242048" y="5512689"/>
+            <a:ext cx="2157984" cy="540639"/>
+          </a:xfrm>
+          <a:prstGeom prst="rect">
+            <a:avLst/>
+          </a:prstGeom>
+          <a:noFill/>
+        </p:spPr>
+        <p:txBody>
+          <a:bodyPr wrap="square" lIns="0" tIns="0" rIns="0" bIns="0" anchor="ctr" rtlCol="0"/>
+          <a:lstStyle/>
+          <a:p>
+            <a:pPr algn="l">
+              <a:lnSpc>
+                <a:spcPct val="130000"/>
+              </a:lnSpc>
+            </a:pPr>
+            <a:r>
+              <a:rPr lang="ja-JP" altLang="en-US" sz="1500" b="0">
+                <a:solidFill>
+                  <a:srgbClr val="14141A"/>
+                </a:solidFill>
+                <a:latin typeface="Yu Gothic"/>
+                <a:ea typeface="Yu Gothic"/>
+                <a:cs typeface="Yu Gothic"/>
+              </a:rPr>
+              <a:t>一人目のあと</a:t>
+            </a:r>
+          </a:p>
+        </p:txBody>
+      </p:sp>
+      <p:sp>
+        <p:nvSpPr>
+          <p:cNvPr id="35" name="TextBox 35"/>
+          <p:cNvSpPr txBox="1"/>
+          <p:nvPr/>
+        </p:nvSpPr>
+        <p:spPr>
+          <a:xfrm>
+            <a:off x="9528048" y="5512689"/>
+            <a:ext cx="1700784" cy="540639"/>
+          </a:xfrm>
+          <a:prstGeom prst="rect">
+            <a:avLst/>
+          </a:prstGeom>
+          <a:noFill/>
+        </p:spPr>
+        <p:txBody>
+          <a:bodyPr wrap="square" lIns="0" tIns="0" rIns="0" bIns="0" anchor="ctr" rtlCol="0"/>
+          <a:lstStyle/>
+          <a:p>
+            <a:pPr algn="l">
+              <a:lnSpc>
+                <a:spcPct val="130000"/>
+              </a:lnSpc>
+            </a:pPr>
+            <a:r>
+              <a:rPr lang="ja-JP" altLang="en-US" sz="1500" b="0">
+                <a:solidFill>
+                  <a:srgbClr val="14141A"/>
+                </a:solidFill>
+                <a:latin typeface="Yu Gothic"/>
+                <a:ea typeface="Yu Gothic"/>
+                <a:cs typeface="Yu Gothic"/>
+              </a:rPr>
+              <a:t>ふたり</a:t>
+            </a:r>
+          </a:p>
+        </p:txBody>
+      </p:sp>
+      <p:sp>
+        <p:nvSpPr>
+          <p:cNvPr id="36" name="TextBox 36"/>
           <p:cNvSpPr txBox="1"/>
           <p:nvPr/>
         </p:nvSpPr>
@@ -13612,7 +14034,7 @@
       </p:sp>
       <p:sp>
         <p:nvSpPr>
-          <p:cNvPr id="22" name="TextBox 22"/>
+          <p:cNvPr id="37" name="TextBox 37"/>
           <p:cNvSpPr txBox="1"/>
           <p:nvPr/>
         </p:nvSpPr>
@@ -13658,6 +14080,882 @@
 </file>
 
 <file path=ppt/slides/slide25.xml><?xml version="1.0" encoding="utf-8"?>
+<p:sld xmlns:a="http://schemas.openxmlformats.org/drawingml/2006/main" xmlns:r="http://schemas.openxmlformats.org/officeDocument/2006/relationships" xmlns:p="http://schemas.openxmlformats.org/presentationml/2006/main">
+  <p:cSld>
+    <p:bg>
+      <p:bgPr>
+        <a:solidFill>
+          <a:srgbClr val="FFFFFF"/>
+        </a:solidFill>
+        <a:effectLst/>
+      </p:bgPr>
+    </p:bg>
+    <p:spTree>
+      <p:nvGrpSpPr>
+        <p:cNvPr id="1" name=""/>
+        <p:cNvGrpSpPr/>
+        <p:nvPr/>
+      </p:nvGrpSpPr>
+      <p:grpSpPr>
+        <a:xfrm>
+          <a:off x="0" y="0"/>
+          <a:ext cx="0" cy="0"/>
+          <a:chOff x="0" y="0"/>
+          <a:chExt cx="0" cy="0"/>
+        </a:xfrm>
+      </p:grpSpPr>
+      <p:sp>
+        <p:nvSpPr>
+          <p:cNvPr id="2" name="TextBox 2"/>
+          <p:cNvSpPr txBox="1"/>
+          <p:nvPr/>
+        </p:nvSpPr>
+        <p:spPr>
+          <a:xfrm>
+            <a:off x="841248" y="155448"/>
+            <a:ext cx="10515600" cy="329184"/>
+          </a:xfrm>
+          <a:prstGeom prst="rect">
+            <a:avLst/>
+          </a:prstGeom>
+          <a:noFill/>
+        </p:spPr>
+        <p:txBody>
+          <a:bodyPr wrap="square" lIns="0" tIns="0" rIns="0" bIns="0" anchor="t" rtlCol="0"/>
+          <a:lstStyle/>
+          <a:p>
+            <a:pPr algn="l">
+              <a:lnSpc>
+                <a:spcPct val="145000"/>
+              </a:lnSpc>
+            </a:pPr>
+            <a:r>
+              <a:rPr lang="ja-JP" altLang="en-US" sz="1300" b="1" spc="150">
+                <a:solidFill>
+                  <a:srgbClr val="14141A"/>
+                </a:solidFill>
+                <a:latin typeface="Yu Gothic"/>
+                <a:ea typeface="Yu Gothic"/>
+                <a:cs typeface="Yu Gothic"/>
+              </a:rPr>
+              <a:t>約束</a:t>
+            </a:r>
+          </a:p>
+        </p:txBody>
+      </p:sp>
+      <p:sp>
+        <p:nvSpPr>
+          <p:cNvPr id="3" name="TextBox 3"/>
+          <p:cNvSpPr txBox="1"/>
+          <p:nvPr/>
+        </p:nvSpPr>
+        <p:spPr>
+          <a:xfrm>
+            <a:off x="841248" y="585216"/>
+            <a:ext cx="10515600" cy="1005840"/>
+          </a:xfrm>
+          <a:prstGeom prst="rect">
+            <a:avLst/>
+          </a:prstGeom>
+          <a:noFill/>
+        </p:spPr>
+        <p:txBody>
+          <a:bodyPr wrap="square" lIns="0" tIns="0" rIns="0" bIns="0" anchor="t" rtlCol="0"/>
+          <a:lstStyle/>
+          <a:p>
+            <a:pPr algn="l">
+              <a:lnSpc>
+                <a:spcPct val="140000"/>
+              </a:lnSpc>
+            </a:pPr>
+            <a:r>
+              <a:rPr lang="ja-JP" altLang="en-US" sz="2200" b="0">
+                <a:solidFill>
+                  <a:srgbClr val="14141A"/>
+                </a:solidFill>
+                <a:latin typeface="Yu Gothic Medium"/>
+                <a:ea typeface="Yu Gothic Medium"/>
+                <a:cs typeface="Yu Gothic Medium"/>
+              </a:rPr>
+              <a:t>私の側から先に書きます。変えないことと、直すことに分けました。</a:t>
+            </a:r>
+          </a:p>
+        </p:txBody>
+      </p:sp>
+      <p:sp>
+        <p:nvSpPr>
+          <p:cNvPr id="4" name="Shape 4"/>
+          <p:cNvSpPr/>
+          <p:nvPr/>
+        </p:nvSpPr>
+        <p:spPr>
+          <a:xfrm>
+            <a:off x="841248" y="1773936"/>
+            <a:ext cx="2320290" cy="38100"/>
+          </a:xfrm>
+          <a:prstGeom prst="rect">
+            <a:avLst/>
+          </a:prstGeom>
+          <a:solidFill>
+            <a:srgbClr val="00C4B3"/>
+          </a:solidFill>
+          <a:ln>
+            <a:noFill/>
+          </a:ln>
+        </p:spPr>
+        <p:txBody>
+          <a:bodyPr wrap="square" lIns="0" tIns="0" rIns="0" bIns="0" anchor="ctr" rtlCol="0"/>
+          <a:lstStyle/>
+          <a:p/>
+        </p:txBody>
+      </p:sp>
+      <p:sp>
+        <p:nvSpPr>
+          <p:cNvPr id="5" name="TextBox 5"/>
+          <p:cNvSpPr txBox="1"/>
+          <p:nvPr/>
+        </p:nvSpPr>
+        <p:spPr>
+          <a:xfrm>
+            <a:off x="841248" y="2002536"/>
+            <a:ext cx="2320290" cy="320040"/>
+          </a:xfrm>
+          <a:prstGeom prst="rect">
+            <a:avLst/>
+          </a:prstGeom>
+          <a:noFill/>
+        </p:spPr>
+        <p:txBody>
+          <a:bodyPr wrap="square" lIns="0" tIns="0" rIns="0" bIns="0" anchor="t" rtlCol="0"/>
+          <a:lstStyle/>
+          <a:p>
+            <a:pPr algn="l">
+              <a:lnSpc>
+                <a:spcPct val="145000"/>
+              </a:lnSpc>
+            </a:pPr>
+            <a:r>
+              <a:rPr lang="ja-JP" altLang="en-US" sz="1200" b="1" spc="120">
+                <a:solidFill>
+                  <a:srgbClr val="00C4B3"/>
+                </a:solidFill>
+                <a:latin typeface="Yu Gothic"/>
+                <a:ea typeface="Yu Gothic"/>
+                <a:cs typeface="Yu Gothic"/>
+              </a:rPr>
+              <a:t>仕事</a:t>
+            </a:r>
+          </a:p>
+        </p:txBody>
+      </p:sp>
+      <p:sp>
+        <p:nvSpPr>
+          <p:cNvPr id="6" name="TextBox 6"/>
+          <p:cNvSpPr txBox="1"/>
+          <p:nvPr/>
+        </p:nvSpPr>
+        <p:spPr>
+          <a:xfrm>
+            <a:off x="841248" y="2414016"/>
+            <a:ext cx="2320290" cy="1005840"/>
+          </a:xfrm>
+          <a:prstGeom prst="rect">
+            <a:avLst/>
+          </a:prstGeom>
+          <a:noFill/>
+        </p:spPr>
+        <p:txBody>
+          <a:bodyPr wrap="square" lIns="0" tIns="0" rIns="0" bIns="0" anchor="t" rtlCol="0"/>
+          <a:lstStyle/>
+          <a:p>
+            <a:pPr algn="l">
+              <a:lnSpc>
+                <a:spcPct val="125000"/>
+              </a:lnSpc>
+            </a:pPr>
+            <a:r>
+              <a:rPr lang="ja-JP" altLang="en-US" sz="2200" b="1">
+                <a:solidFill>
+                  <a:srgbClr val="14141A"/>
+                </a:solidFill>
+                <a:latin typeface="Yu Gothic"/>
+                <a:ea typeface="Yu Gothic"/>
+                <a:cs typeface="Yu Gothic"/>
+              </a:rPr>
+              <a:t>熱量は</a:t>
+            </a:r>
+          </a:p>
+          <a:p>
+            <a:pPr algn="l">
+              <a:lnSpc>
+                <a:spcPct val="125000"/>
+              </a:lnSpc>
+            </a:pPr>
+            <a:r>
+              <a:rPr lang="ja-JP" altLang="en-US" sz="2200" b="1">
+                <a:solidFill>
+                  <a:srgbClr val="14141A"/>
+                </a:solidFill>
+                <a:latin typeface="Yu Gothic"/>
+                <a:ea typeface="Yu Gothic"/>
+                <a:cs typeface="Yu Gothic"/>
+              </a:rPr>
+              <a:t>落としません</a:t>
+            </a:r>
+          </a:p>
+        </p:txBody>
+      </p:sp>
+      <p:sp>
+        <p:nvSpPr>
+          <p:cNvPr id="7" name="TextBox 7"/>
+          <p:cNvSpPr txBox="1"/>
+          <p:nvPr/>
+        </p:nvSpPr>
+        <p:spPr>
+          <a:xfrm>
+            <a:off x="841248" y="3511296"/>
+            <a:ext cx="2320290" cy="1444752"/>
+          </a:xfrm>
+          <a:prstGeom prst="rect">
+            <a:avLst/>
+          </a:prstGeom>
+          <a:noFill/>
+        </p:spPr>
+        <p:txBody>
+          <a:bodyPr wrap="square" lIns="0" tIns="0" rIns="0" bIns="0" anchor="t" rtlCol="0"/>
+          <a:lstStyle/>
+          <a:p>
+            <a:pPr algn="l">
+              <a:lnSpc>
+                <a:spcPct val="155000"/>
+              </a:lnSpc>
+            </a:pPr>
+            <a:r>
+              <a:rPr lang="ja-JP" altLang="en-US" sz="1400" b="0">
+                <a:solidFill>
+                  <a:srgbClr val="14141A"/>
+                </a:solidFill>
+                <a:latin typeface="Yu Gothic"/>
+                <a:ea typeface="Yu Gothic"/>
+                <a:cs typeface="Yu Gothic"/>
+              </a:rPr>
+              <a:t>30歳まではお互い仕事優先です。結婚が仕事の邪魔をしない形にします。</a:t>
+            </a:r>
+          </a:p>
+        </p:txBody>
+      </p:sp>
+      <p:sp>
+        <p:nvSpPr>
+          <p:cNvPr id="8" name="Shape 8"/>
+          <p:cNvSpPr/>
+          <p:nvPr/>
+        </p:nvSpPr>
+        <p:spPr>
+          <a:xfrm>
+            <a:off x="3573018" y="1773936"/>
+            <a:ext cx="2320290" cy="38100"/>
+          </a:xfrm>
+          <a:prstGeom prst="rect">
+            <a:avLst/>
+          </a:prstGeom>
+          <a:solidFill>
+            <a:srgbClr val="FFD93D"/>
+          </a:solidFill>
+          <a:ln>
+            <a:noFill/>
+          </a:ln>
+        </p:spPr>
+        <p:txBody>
+          <a:bodyPr wrap="square" lIns="0" tIns="0" rIns="0" bIns="0" anchor="ctr" rtlCol="0"/>
+          <a:lstStyle/>
+          <a:p/>
+        </p:txBody>
+      </p:sp>
+      <p:sp>
+        <p:nvSpPr>
+          <p:cNvPr id="9" name="TextBox 9"/>
+          <p:cNvSpPr txBox="1"/>
+          <p:nvPr/>
+        </p:nvSpPr>
+        <p:spPr>
+          <a:xfrm>
+            <a:off x="3573018" y="2002536"/>
+            <a:ext cx="2320290" cy="320040"/>
+          </a:xfrm>
+          <a:prstGeom prst="rect">
+            <a:avLst/>
+          </a:prstGeom>
+          <a:noFill/>
+        </p:spPr>
+        <p:txBody>
+          <a:bodyPr wrap="square" lIns="0" tIns="0" rIns="0" bIns="0" anchor="t" rtlCol="0"/>
+          <a:lstStyle/>
+          <a:p>
+            <a:pPr algn="l">
+              <a:lnSpc>
+                <a:spcPct val="145000"/>
+              </a:lnSpc>
+            </a:pPr>
+            <a:r>
+              <a:rPr lang="ja-JP" altLang="en-US" sz="1200" b="1" spc="120">
+                <a:solidFill>
+                  <a:srgbClr val="14141A"/>
+                </a:solidFill>
+                <a:latin typeface="Yu Gothic"/>
+                <a:ea typeface="Yu Gothic"/>
+                <a:cs typeface="Yu Gothic"/>
+              </a:rPr>
+              <a:t>自由</a:t>
+            </a:r>
+          </a:p>
+        </p:txBody>
+      </p:sp>
+      <p:sp>
+        <p:nvSpPr>
+          <p:cNvPr id="10" name="TextBox 10"/>
+          <p:cNvSpPr txBox="1"/>
+          <p:nvPr/>
+        </p:nvSpPr>
+        <p:spPr>
+          <a:xfrm>
+            <a:off x="3573018" y="2414016"/>
+            <a:ext cx="2320290" cy="1005840"/>
+          </a:xfrm>
+          <a:prstGeom prst="rect">
+            <a:avLst/>
+          </a:prstGeom>
+          <a:noFill/>
+        </p:spPr>
+        <p:txBody>
+          <a:bodyPr wrap="square" lIns="0" tIns="0" rIns="0" bIns="0" anchor="t" rtlCol="0"/>
+          <a:lstStyle/>
+          <a:p>
+            <a:pPr algn="l">
+              <a:lnSpc>
+                <a:spcPct val="125000"/>
+              </a:lnSpc>
+            </a:pPr>
+            <a:r>
+              <a:rPr lang="ja-JP" altLang="en-US" sz="2200" b="1">
+                <a:solidFill>
+                  <a:srgbClr val="14141A"/>
+                </a:solidFill>
+                <a:latin typeface="Yu Gothic"/>
+                <a:ea typeface="Yu Gothic"/>
+                <a:cs typeface="Yu Gothic"/>
+              </a:rPr>
+              <a:t>ひとりの時間は</a:t>
+            </a:r>
+          </a:p>
+          <a:p>
+            <a:pPr algn="l">
+              <a:lnSpc>
+                <a:spcPct val="125000"/>
+              </a:lnSpc>
+            </a:pPr>
+            <a:r>
+              <a:rPr lang="ja-JP" altLang="en-US" sz="2200" b="1">
+                <a:solidFill>
+                  <a:srgbClr val="14141A"/>
+                </a:solidFill>
+                <a:latin typeface="Yu Gothic"/>
+                <a:ea typeface="Yu Gothic"/>
+                <a:cs typeface="Yu Gothic"/>
+              </a:rPr>
+              <a:t>制度で守ります</a:t>
+            </a:r>
+          </a:p>
+        </p:txBody>
+      </p:sp>
+      <p:sp>
+        <p:nvSpPr>
+          <p:cNvPr id="11" name="TextBox 11"/>
+          <p:cNvSpPr txBox="1"/>
+          <p:nvPr/>
+        </p:nvSpPr>
+        <p:spPr>
+          <a:xfrm>
+            <a:off x="3573018" y="3511296"/>
+            <a:ext cx="2320290" cy="1444752"/>
+          </a:xfrm>
+          <a:prstGeom prst="rect">
+            <a:avLst/>
+          </a:prstGeom>
+          <a:noFill/>
+        </p:spPr>
+        <p:txBody>
+          <a:bodyPr wrap="square" lIns="0" tIns="0" rIns="0" bIns="0" anchor="t" rtlCol="0"/>
+          <a:lstStyle/>
+          <a:p>
+            <a:pPr algn="l">
+              <a:lnSpc>
+                <a:spcPct val="155000"/>
+              </a:lnSpc>
+            </a:pPr>
+            <a:r>
+              <a:rPr lang="ja-JP" altLang="en-US" sz="1400" b="0">
+                <a:solidFill>
+                  <a:srgbClr val="14141A"/>
+                </a:solidFill>
+                <a:latin typeface="Yu Gothic"/>
+                <a:ea typeface="Yu Gothic"/>
+                <a:cs typeface="Yu Gothic"/>
+              </a:rPr>
+              <a:t>二人の家に自室を持ちます。週に一度は別行動でかまいません。</a:t>
+            </a:r>
+          </a:p>
+        </p:txBody>
+      </p:sp>
+      <p:sp>
+        <p:nvSpPr>
+          <p:cNvPr id="12" name="Shape 12"/>
+          <p:cNvSpPr/>
+          <p:nvPr/>
+        </p:nvSpPr>
+        <p:spPr>
+          <a:xfrm>
+            <a:off x="6304788" y="1773936"/>
+            <a:ext cx="2320290" cy="38100"/>
+          </a:xfrm>
+          <a:prstGeom prst="rect">
+            <a:avLst/>
+          </a:prstGeom>
+          <a:solidFill>
+            <a:srgbClr val="FF5C77"/>
+          </a:solidFill>
+          <a:ln>
+            <a:noFill/>
+          </a:ln>
+        </p:spPr>
+        <p:txBody>
+          <a:bodyPr wrap="square" lIns="0" tIns="0" rIns="0" bIns="0" anchor="ctr" rtlCol="0"/>
+          <a:lstStyle/>
+          <a:p/>
+        </p:txBody>
+      </p:sp>
+      <p:sp>
+        <p:nvSpPr>
+          <p:cNvPr id="13" name="TextBox 13"/>
+          <p:cNvSpPr txBox="1"/>
+          <p:nvPr/>
+        </p:nvSpPr>
+        <p:spPr>
+          <a:xfrm>
+            <a:off x="6304788" y="2002536"/>
+            <a:ext cx="2320290" cy="320040"/>
+          </a:xfrm>
+          <a:prstGeom prst="rect">
+            <a:avLst/>
+          </a:prstGeom>
+          <a:noFill/>
+        </p:spPr>
+        <p:txBody>
+          <a:bodyPr wrap="square" lIns="0" tIns="0" rIns="0" bIns="0" anchor="t" rtlCol="0"/>
+          <a:lstStyle/>
+          <a:p>
+            <a:pPr algn="l">
+              <a:lnSpc>
+                <a:spcPct val="145000"/>
+              </a:lnSpc>
+            </a:pPr>
+            <a:r>
+              <a:rPr lang="ja-JP" altLang="en-US" sz="1200" b="1" spc="120">
+                <a:solidFill>
+                  <a:srgbClr val="FF5C77"/>
+                </a:solidFill>
+                <a:latin typeface="Yu Gothic"/>
+                <a:ea typeface="Yu Gothic"/>
+                <a:cs typeface="Yu Gothic"/>
+              </a:rPr>
+              <a:t>家事</a:t>
+            </a:r>
+          </a:p>
+        </p:txBody>
+      </p:sp>
+      <p:sp>
+        <p:nvSpPr>
+          <p:cNvPr id="14" name="TextBox 14"/>
+          <p:cNvSpPr txBox="1"/>
+          <p:nvPr/>
+        </p:nvSpPr>
+        <p:spPr>
+          <a:xfrm>
+            <a:off x="6304788" y="2414016"/>
+            <a:ext cx="2320290" cy="1005840"/>
+          </a:xfrm>
+          <a:prstGeom prst="rect">
+            <a:avLst/>
+          </a:prstGeom>
+          <a:noFill/>
+        </p:spPr>
+        <p:txBody>
+          <a:bodyPr wrap="square" lIns="0" tIns="0" rIns="0" bIns="0" anchor="t" rtlCol="0"/>
+          <a:lstStyle/>
+          <a:p>
+            <a:pPr algn="l">
+              <a:lnSpc>
+                <a:spcPct val="125000"/>
+              </a:lnSpc>
+            </a:pPr>
+            <a:r>
+              <a:rPr lang="ja-JP" altLang="en-US" sz="2200" b="1">
+                <a:solidFill>
+                  <a:srgbClr val="14141A"/>
+                </a:solidFill>
+                <a:latin typeface="Yu Gothic"/>
+                <a:ea typeface="Yu Gothic"/>
+                <a:cs typeface="Yu Gothic"/>
+              </a:rPr>
+              <a:t>掃除は</a:t>
+            </a:r>
+          </a:p>
+          <a:p>
+            <a:pPr algn="l">
+              <a:lnSpc>
+                <a:spcPct val="125000"/>
+              </a:lnSpc>
+            </a:pPr>
+            <a:r>
+              <a:rPr lang="ja-JP" altLang="en-US" sz="2200" b="1">
+                <a:solidFill>
+                  <a:srgbClr val="14141A"/>
+                </a:solidFill>
+                <a:latin typeface="Yu Gothic"/>
+                <a:ea typeface="Yu Gothic"/>
+                <a:cs typeface="Yu Gothic"/>
+              </a:rPr>
+              <a:t>改善中です</a:t>
+            </a:r>
+          </a:p>
+        </p:txBody>
+      </p:sp>
+      <p:sp>
+        <p:nvSpPr>
+          <p:cNvPr id="15" name="TextBox 15"/>
+          <p:cNvSpPr txBox="1"/>
+          <p:nvPr/>
+        </p:nvSpPr>
+        <p:spPr>
+          <a:xfrm>
+            <a:off x="6304788" y="3511296"/>
+            <a:ext cx="2320290" cy="1444752"/>
+          </a:xfrm>
+          <a:prstGeom prst="rect">
+            <a:avLst/>
+          </a:prstGeom>
+          <a:noFill/>
+        </p:spPr>
+        <p:txBody>
+          <a:bodyPr wrap="square" lIns="0" tIns="0" rIns="0" bIns="0" anchor="t" rtlCol="0"/>
+          <a:lstStyle/>
+          <a:p>
+            <a:pPr algn="l">
+              <a:lnSpc>
+                <a:spcPct val="155000"/>
+              </a:lnSpc>
+            </a:pPr>
+            <a:r>
+              <a:rPr lang="ja-JP" altLang="en-US" sz="1400" b="0">
+                <a:solidFill>
+                  <a:srgbClr val="14141A"/>
+                </a:solidFill>
+                <a:latin typeface="Yu Gothic"/>
+                <a:ea typeface="Yu Gothic"/>
+                <a:cs typeface="Yu Gothic"/>
+              </a:rPr>
+              <a:t>得意なほうがやります。決まらないものは、外注も選択肢に入れます。</a:t>
+            </a:r>
+          </a:p>
+        </p:txBody>
+      </p:sp>
+      <p:sp>
+        <p:nvSpPr>
+          <p:cNvPr id="16" name="Shape 16"/>
+          <p:cNvSpPr/>
+          <p:nvPr/>
+        </p:nvSpPr>
+        <p:spPr>
+          <a:xfrm>
+            <a:off x="9036558" y="1773936"/>
+            <a:ext cx="2320290" cy="38100"/>
+          </a:xfrm>
+          <a:prstGeom prst="rect">
+            <a:avLst/>
+          </a:prstGeom>
+          <a:solidFill>
+            <a:srgbClr val="6C5CE7"/>
+          </a:solidFill>
+          <a:ln>
+            <a:noFill/>
+          </a:ln>
+        </p:spPr>
+        <p:txBody>
+          <a:bodyPr wrap="square" lIns="0" tIns="0" rIns="0" bIns="0" anchor="ctr" rtlCol="0"/>
+          <a:lstStyle/>
+          <a:p/>
+        </p:txBody>
+      </p:sp>
+      <p:sp>
+        <p:nvSpPr>
+          <p:cNvPr id="17" name="TextBox 17"/>
+          <p:cNvSpPr txBox="1"/>
+          <p:nvPr/>
+        </p:nvSpPr>
+        <p:spPr>
+          <a:xfrm>
+            <a:off x="9036558" y="2002536"/>
+            <a:ext cx="2320290" cy="320040"/>
+          </a:xfrm>
+          <a:prstGeom prst="rect">
+            <a:avLst/>
+          </a:prstGeom>
+          <a:noFill/>
+        </p:spPr>
+        <p:txBody>
+          <a:bodyPr wrap="square" lIns="0" tIns="0" rIns="0" bIns="0" anchor="t" rtlCol="0"/>
+          <a:lstStyle/>
+          <a:p>
+            <a:pPr algn="l">
+              <a:lnSpc>
+                <a:spcPct val="145000"/>
+              </a:lnSpc>
+            </a:pPr>
+            <a:r>
+              <a:rPr lang="ja-JP" altLang="en-US" sz="1200" b="1" spc="120">
+                <a:solidFill>
+                  <a:srgbClr val="6C5CE7"/>
+                </a:solidFill>
+                <a:latin typeface="Yu Gothic"/>
+                <a:ea typeface="Yu Gothic"/>
+                <a:cs typeface="Yu Gothic"/>
+              </a:rPr>
+              <a:t>ケンカ</a:t>
+            </a:r>
+          </a:p>
+        </p:txBody>
+      </p:sp>
+      <p:sp>
+        <p:nvSpPr>
+          <p:cNvPr id="18" name="TextBox 18"/>
+          <p:cNvSpPr txBox="1"/>
+          <p:nvPr/>
+        </p:nvSpPr>
+        <p:spPr>
+          <a:xfrm>
+            <a:off x="9036558" y="2414016"/>
+            <a:ext cx="2320290" cy="1005840"/>
+          </a:xfrm>
+          <a:prstGeom prst="rect">
+            <a:avLst/>
+          </a:prstGeom>
+          <a:noFill/>
+        </p:spPr>
+        <p:txBody>
+          <a:bodyPr wrap="square" lIns="0" tIns="0" rIns="0" bIns="0" anchor="t" rtlCol="0"/>
+          <a:lstStyle/>
+          <a:p>
+            <a:pPr algn="l">
+              <a:lnSpc>
+                <a:spcPct val="125000"/>
+              </a:lnSpc>
+            </a:pPr>
+            <a:r>
+              <a:rPr lang="ja-JP" altLang="en-US" sz="2200" b="1">
+                <a:solidFill>
+                  <a:srgbClr val="14141A"/>
+                </a:solidFill>
+                <a:latin typeface="Yu Gothic"/>
+                <a:ea typeface="Yu Gothic"/>
+                <a:cs typeface="Yu Gothic"/>
+              </a:rPr>
+              <a:t>片方が謝って</a:t>
+            </a:r>
+          </a:p>
+          <a:p>
+            <a:pPr algn="l">
+              <a:lnSpc>
+                <a:spcPct val="125000"/>
+              </a:lnSpc>
+            </a:pPr>
+            <a:r>
+              <a:rPr lang="ja-JP" altLang="en-US" sz="2200" b="1">
+                <a:solidFill>
+                  <a:srgbClr val="14141A"/>
+                </a:solidFill>
+                <a:latin typeface="Yu Gothic"/>
+                <a:ea typeface="Yu Gothic"/>
+                <a:cs typeface="Yu Gothic"/>
+              </a:rPr>
+              <a:t>終わります</a:t>
+            </a:r>
+          </a:p>
+        </p:txBody>
+      </p:sp>
+      <p:sp>
+        <p:nvSpPr>
+          <p:cNvPr id="19" name="TextBox 19"/>
+          <p:cNvSpPr txBox="1"/>
+          <p:nvPr/>
+        </p:nvSpPr>
+        <p:spPr>
+          <a:xfrm>
+            <a:off x="9036558" y="3511296"/>
+            <a:ext cx="2320290" cy="1444752"/>
+          </a:xfrm>
+          <a:prstGeom prst="rect">
+            <a:avLst/>
+          </a:prstGeom>
+          <a:noFill/>
+        </p:spPr>
+        <p:txBody>
+          <a:bodyPr wrap="square" lIns="0" tIns="0" rIns="0" bIns="0" anchor="t" rtlCol="0"/>
+          <a:lstStyle/>
+          <a:p>
+            <a:pPr algn="l">
+              <a:lnSpc>
+                <a:spcPct val="155000"/>
+              </a:lnSpc>
+            </a:pPr>
+            <a:r>
+              <a:rPr lang="ja-JP" altLang="en-US" sz="1400" b="0">
+                <a:solidFill>
+                  <a:srgbClr val="14141A"/>
+                </a:solidFill>
+                <a:latin typeface="Yu Gothic"/>
+                <a:ea typeface="Yu Gothic"/>
+                <a:cs typeface="Yu Gothic"/>
+              </a:rPr>
+              <a:t>今のやり方を変えません。翌日には持ち越しません。</a:t>
+            </a:r>
+          </a:p>
+        </p:txBody>
+      </p:sp>
+      <p:sp>
+        <p:nvSpPr>
+          <p:cNvPr id="20" name="TextBox 20"/>
+          <p:cNvSpPr txBox="1"/>
+          <p:nvPr/>
+        </p:nvSpPr>
+        <p:spPr>
+          <a:xfrm>
+            <a:off x="841248" y="5138928"/>
+            <a:ext cx="10515600" cy="914400"/>
+          </a:xfrm>
+          <a:prstGeom prst="rect">
+            <a:avLst/>
+          </a:prstGeom>
+          <a:noFill/>
+        </p:spPr>
+        <p:txBody>
+          <a:bodyPr wrap="square" lIns="0" tIns="0" rIns="0" bIns="0" anchor="b" rtlCol="0"/>
+          <a:lstStyle/>
+          <a:p>
+            <a:pPr algn="l">
+              <a:lnSpc>
+                <a:spcPct val="125000"/>
+              </a:lnSpc>
+            </a:pPr>
+            <a:r>
+              <a:rPr lang="ja-JP" altLang="en-US" sz="2800" b="1">
+                <a:solidFill>
+                  <a:srgbClr val="14141A"/>
+                </a:solidFill>
+                <a:latin typeface="Yu Gothic"/>
+                <a:ea typeface="Yu Gothic"/>
+                <a:cs typeface="Yu Gothic"/>
+              </a:rPr>
+              <a:t>変えないのは仕事、直すのは家事です。</a:t>
+            </a:r>
+          </a:p>
+        </p:txBody>
+      </p:sp>
+      <p:sp>
+        <p:nvSpPr>
+          <p:cNvPr id="21" name="TextBox 21"/>
+          <p:cNvSpPr txBox="1"/>
+          <p:nvPr/>
+        </p:nvSpPr>
+        <p:spPr>
+          <a:xfrm>
+            <a:off x="841248" y="6391656"/>
+            <a:ext cx="5486400" cy="274320"/>
+          </a:xfrm>
+          <a:prstGeom prst="rect">
+            <a:avLst/>
+          </a:prstGeom>
+          <a:noFill/>
+        </p:spPr>
+        <p:txBody>
+          <a:bodyPr wrap="square" lIns="0" tIns="0" rIns="0" bIns="0" anchor="t" rtlCol="0"/>
+          <a:lstStyle/>
+          <a:p>
+            <a:pPr algn="l">
+              <a:lnSpc>
+                <a:spcPct val="145000"/>
+              </a:lnSpc>
+            </a:pPr>
+            <a:r>
+              <a:rPr lang="ja-JP" altLang="en-US" sz="1000" b="0" spc="50">
+                <a:solidFill>
+                  <a:srgbClr val="A3A3AE"/>
+                </a:solidFill>
+                <a:latin typeface="Yu Gothic"/>
+                <a:ea typeface="Yu Gothic"/>
+                <a:cs typeface="Yu Gothic"/>
+              </a:rPr>
+              <a:t>ふたりの計画のご提案</a:t>
+            </a:r>
+          </a:p>
+        </p:txBody>
+      </p:sp>
+      <p:sp>
+        <p:nvSpPr>
+          <p:cNvPr id="22" name="TextBox 22"/>
+          <p:cNvSpPr txBox="1"/>
+          <p:nvPr/>
+        </p:nvSpPr>
+        <p:spPr>
+          <a:xfrm>
+            <a:off x="10436047" y="6373368"/>
+            <a:ext cx="914400" cy="274320"/>
+          </a:xfrm>
+          <a:prstGeom prst="rect">
+            <a:avLst/>
+          </a:prstGeom>
+          <a:noFill/>
+        </p:spPr>
+        <p:txBody>
+          <a:bodyPr wrap="square" lIns="0" tIns="0" rIns="0" bIns="0" anchor="t" rtlCol="0"/>
+          <a:lstStyle/>
+          <a:p>
+            <a:pPr algn="r">
+              <a:lnSpc>
+                <a:spcPct val="145000"/>
+              </a:lnSpc>
+            </a:pPr>
+            <a:r>
+              <a:rPr lang="ja-JP" altLang="en-US" sz="1200" b="1" spc="50">
+                <a:solidFill>
+                  <a:srgbClr val="A3A3AE"/>
+                </a:solidFill>
+                <a:latin typeface="Yu Gothic"/>
+                <a:ea typeface="Yu Gothic"/>
+                <a:cs typeface="Yu Gothic"/>
+              </a:rPr>
+              <a:t>25</a:t>
+            </a:r>
+          </a:p>
+        </p:txBody>
+      </p:sp>
+    </p:spTree>
+  </p:cSld>
+  <p:clrMapOvr>
+    <a:masterClrMapping/>
+  </p:clrMapOvr>
+</p:sld>
+</file>
+
+<file path=ppt/slides/slide26.xml><?xml version="1.0" encoding="utf-8"?>
 <p:sld xmlns:a="http://schemas.openxmlformats.org/drawingml/2006/main" xmlns:r="http://schemas.openxmlformats.org/officeDocument/2006/relationships" xmlns:p="http://schemas.openxmlformats.org/presentationml/2006/main">
   <p:cSld>
     <p:bg>
